--- a/deep_learning/2_CNN/CNN-1-Basics-of-image.pptx
+++ b/deep_learning/2_CNN/CNN-1-Basics-of-image.pptx
@@ -5,10 +5,10 @@
     <p:sldMasterId id="2147483648" r:id="rId1"/>
   </p:sldMasterIdLst>
   <p:notesMasterIdLst>
-    <p:notesMasterId r:id="rId17"/>
+    <p:notesMasterId r:id="rId18"/>
   </p:notesMasterIdLst>
   <p:handoutMasterIdLst>
-    <p:handoutMasterId r:id="rId18"/>
+    <p:handoutMasterId r:id="rId19"/>
   </p:handoutMasterIdLst>
   <p:sldIdLst>
     <p:sldId id="276" r:id="rId2"/>
@@ -18,14 +18,15 @@
     <p:sldId id="365" r:id="rId6"/>
     <p:sldId id="366" r:id="rId7"/>
     <p:sldId id="369" r:id="rId8"/>
-    <p:sldId id="362" r:id="rId9"/>
-    <p:sldId id="370" r:id="rId10"/>
-    <p:sldId id="371" r:id="rId11"/>
-    <p:sldId id="356" r:id="rId12"/>
-    <p:sldId id="355" r:id="rId13"/>
-    <p:sldId id="367" r:id="rId14"/>
-    <p:sldId id="368" r:id="rId15"/>
-    <p:sldId id="275" r:id="rId16"/>
+    <p:sldId id="372" r:id="rId9"/>
+    <p:sldId id="362" r:id="rId10"/>
+    <p:sldId id="370" r:id="rId11"/>
+    <p:sldId id="371" r:id="rId12"/>
+    <p:sldId id="356" r:id="rId13"/>
+    <p:sldId id="355" r:id="rId14"/>
+    <p:sldId id="367" r:id="rId15"/>
+    <p:sldId id="368" r:id="rId16"/>
+    <p:sldId id="275" r:id="rId17"/>
   </p:sldIdLst>
   <p:sldSz cx="12192000" cy="6858000"/>
   <p:notesSz cx="6858000" cy="9144000"/>
@@ -3155,7 +3156,7 @@
           <a:p>
             <a:fld id="{7BAEECA8-D063-486F-AE31-5020270C1449}" type="datetimeFigureOut">
               <a:rPr lang="en-US" smtClean="0"/>
-              <a:t>4/2/2026</a:t>
+              <a:t>5/8/2026</a:t>
             </a:fld>
             <a:endParaRPr lang="en-US"/>
           </a:p>
@@ -3314,6 +3315,166 @@
 </inkml:ink>
 </file>
 
+<file path=ppt/ink/ink100.xml><?xml version="1.0" encoding="utf-8"?>
+<inkml:ink xmlns:inkml="http://www.w3.org/2003/InkML">
+  <inkml:definitions>
+    <inkml:context xml:id="ctx0">
+      <inkml:inkSource xml:id="inkSrc0">
+        <inkml:traceFormat>
+          <inkml:channel name="X" type="integer" min="-2.14748E9" max="2.14748E9" units="cm"/>
+          <inkml:channel name="Y" type="integer" min="-2.14748E9" max="2.14748E9" units="cm"/>
+          <inkml:channel name="F" type="integer" max="32767" units="dev"/>
+          <inkml:channel name="OA" type="integer" max="360" units="deg"/>
+          <inkml:channel name="OE" type="integer" max="90" units="deg"/>
+        </inkml:traceFormat>
+        <inkml:channelProperties>
+          <inkml:channelProperty channel="X" name="resolution" value="1000" units="1/cm"/>
+          <inkml:channelProperty channel="Y" name="resolution" value="1000" units="1/cm"/>
+          <inkml:channelProperty channel="F" name="resolution" value="0" units="1/dev"/>
+          <inkml:channelProperty channel="OA" name="resolution" value="1000" units="1/deg"/>
+          <inkml:channelProperty channel="OE" name="resolution" value="1000" units="1/deg"/>
+        </inkml:channelProperties>
+      </inkml:inkSource>
+      <inkml:timestamp xml:id="ts0" timeString="2026-04-02T05:57:29.242"/>
+    </inkml:context>
+    <inkml:brush xml:id="br0">
+      <inkml:brushProperty name="width" value="0.2" units="cm"/>
+      <inkml:brushProperty name="height" value="0.2" units="cm"/>
+      <inkml:brushProperty name="color" value="#FFC114"/>
+    </inkml:brush>
+  </inkml:definitions>
+  <inkml:trace contextRef="#ctx0" brushRef="#br0">9 11 4752 0 0,'0'0'-120'0'0,"-9"-7"-33"0"0,9 7 169 0 0,1 0 0 0 0,-1 0 0 0 0,0 0 0 0 0,0 0 0 0 0,0 0-1 0 0,0 0 1 0 0,0 0 0 0 0,0-1 0 0 0,0 1 0 0 0,1 0 0 0 0,-1 0 0 0 0,0 0 0 0 0,0 0 0 0 0,0 0-1 0 0,0 0 1 0 0,0 0 0 0 0,0 0 0 0 0,0 0 0 0 0,0 0 0 0 0,0 0 0 0 0,0-1 0 0 0,0 1-1 0 0,0 0 1 0 0,1 0 0 0 0,-1 0 0 0 0,0 0 0 0 0,0 0 0 0 0,0 0 0 0 0,0 0 0 0 0,0-1 0 0 0,0 1-1 0 0,0 0 1 0 0,0 0 0 0 0,0 0 0 0 0,43 14-15 0 0,20 6-12 0 0,0 3 1 0 0,-1 2 0 0 0,106 61-1 0 0,-166-85 16 0 0,1 1-1 0 0,-1-1 1 0 0,1 1-1 0 0,-1 0 1 0 0,1 0-1 0 0,-1 0 0 0 0,0 0 1 0 0,0 0-1 0 0,0 1 1 0 0,0-1-1 0 0,-1 1 1 0 0,1-1-1 0 0,-1 1 0 0 0,1 0 1 0 0,-1-1-1 0 0,0 1 1 0 0,0 0-1 0 0,0 0 1 0 0,-1 0-1 0 0,1 0 0 0 0,0 0 1 0 0,-1 0-1 0 0,0 0 1 0 0,0 0-1 0 0,0 0 0 0 0,0 0 1 0 0,0 0-1 0 0,-1 3 1 0 0,-2 1 18 0 0,1 0 0 0 0,-1 0 0 0 0,0 0 0 0 0,-1-1 0 0 0,0 1 0 0 0,0-1 0 0 0,0 0 0 0 0,0 0 0 0 0,-1-1 0 0 0,-10 10 0 0 0,-58 52 205 0 0,40-38-2988 0 0</inkml:trace>
+</inkml:ink>
+</file>
+
+<file path=ppt/ink/ink101.xml><?xml version="1.0" encoding="utf-8"?>
+<inkml:ink xmlns:inkml="http://www.w3.org/2003/InkML">
+  <inkml:definitions>
+    <inkml:context xml:id="ctx0">
+      <inkml:inkSource xml:id="inkSrc0">
+        <inkml:traceFormat>
+          <inkml:channel name="X" type="integer" min="-2.14748E9" max="2.14748E9" units="cm"/>
+          <inkml:channel name="Y" type="integer" min="-2.14748E9" max="2.14748E9" units="cm"/>
+          <inkml:channel name="F" type="integer" max="32767" units="dev"/>
+          <inkml:channel name="OA" type="integer" max="360" units="deg"/>
+          <inkml:channel name="OE" type="integer" max="90" units="deg"/>
+        </inkml:traceFormat>
+        <inkml:channelProperties>
+          <inkml:channelProperty channel="X" name="resolution" value="1000" units="1/cm"/>
+          <inkml:channelProperty channel="Y" name="resolution" value="1000" units="1/cm"/>
+          <inkml:channelProperty channel="F" name="resolution" value="0" units="1/dev"/>
+          <inkml:channelProperty channel="OA" name="resolution" value="1000" units="1/deg"/>
+          <inkml:channelProperty channel="OE" name="resolution" value="1000" units="1/deg"/>
+        </inkml:channelProperties>
+      </inkml:inkSource>
+      <inkml:timestamp xml:id="ts0" timeString="2026-04-02T05:57:29.864"/>
+    </inkml:context>
+    <inkml:brush xml:id="br0">
+      <inkml:brushProperty name="width" value="0.2" units="cm"/>
+      <inkml:brushProperty name="height" value="0.2" units="cm"/>
+      <inkml:brushProperty name="color" value="#FFC114"/>
+    </inkml:brush>
+  </inkml:definitions>
+  <inkml:trace contextRef="#ctx0" brushRef="#br0">0 34 3956 0 0,'0'-33'3204'0'0,"6"92"-2769"0"0,21 49-391 0 0,37 74-217 0 0,-63-179 180 0 0,4 12-206 0 0,-1 0-1 0 0,0 0 0 0 0,-1 0 0 0 0,1 19 1 0 0,-3-36-23 0 0,0 0 0 0 0,0 0 0 0 0,0 0 0 0 0,1 0 0 0 0,-1 0 0 0 0,0 1 0 0 0,1-1 0 0 0,-1 0 0 0 0,1 1 0 0 0,0-1 0 0 0,2 0 0 0 0,0-3-264 0 0,14-18-983 0 0</inkml:trace>
+</inkml:ink>
+</file>
+
+<file path=ppt/ink/ink102.xml><?xml version="1.0" encoding="utf-8"?>
+<inkml:ink xmlns:inkml="http://www.w3.org/2003/InkML">
+  <inkml:definitions>
+    <inkml:context xml:id="ctx0">
+      <inkml:inkSource xml:id="inkSrc0">
+        <inkml:traceFormat>
+          <inkml:channel name="X" type="integer" min="-2.14748E9" max="2.14748E9" units="cm"/>
+          <inkml:channel name="Y" type="integer" min="-2.14748E9" max="2.14748E9" units="cm"/>
+          <inkml:channel name="F" type="integer" max="32767" units="dev"/>
+          <inkml:channel name="OA" type="integer" max="360" units="deg"/>
+          <inkml:channel name="OE" type="integer" max="90" units="deg"/>
+        </inkml:traceFormat>
+        <inkml:channelProperties>
+          <inkml:channelProperty channel="X" name="resolution" value="1000" units="1/cm"/>
+          <inkml:channelProperty channel="Y" name="resolution" value="1000" units="1/cm"/>
+          <inkml:channelProperty channel="F" name="resolution" value="0" units="1/dev"/>
+          <inkml:channelProperty channel="OA" name="resolution" value="1000" units="1/deg"/>
+          <inkml:channelProperty channel="OE" name="resolution" value="1000" units="1/deg"/>
+        </inkml:channelProperties>
+      </inkml:inkSource>
+      <inkml:timestamp xml:id="ts0" timeString="2026-04-02T05:57:30.644"/>
+    </inkml:context>
+    <inkml:brush xml:id="br0">
+      <inkml:brushProperty name="width" value="0.2" units="cm"/>
+      <inkml:brushProperty name="height" value="0.2" units="cm"/>
+      <inkml:brushProperty name="color" value="#FFC114"/>
+    </inkml:brush>
+  </inkml:definitions>
+  <inkml:trace contextRef="#ctx0" brushRef="#br0">16 71 4608 0 0,'0'0'-8'0'0,"-12"-18"1087"0"0,11 17-1050 0 0,1 1 0 0 0,-1-1 0 0 0,1 0 0 0 0,0 1 0 0 0,0-1 0 0 0,-1 0 0 0 0,1 1 0 0 0,0-1 0 0 0,0 0 0 0 0,0 0 0 0 0,0 1 0 0 0,-1-1 0 0 0,1 0 0 0 0,0 1 0 0 0,0-1 1 0 0,1 0-1 0 0,-1 0 0 0 0,0 1 0 0 0,0-1 0 0 0,0 0 0 0 0,0 1 0 0 0,1-1 0 0 0,-1 0 0 0 0,0 1 0 0 0,1-1 0 0 0,-1 0 0 0 0,0 1 0 0 0,1-1 0 0 0,-1 0 0 0 0,1 1 0 0 0,0-2 0 0 0,20-13 42 0 0,-19 15-57 0 0,1-1 4 0 0,13-3-11 0 0,2 0-21 0 0,1 2 1 0 0,0 0 0 0 0,-1 0-1 0 0,1 2 1 0 0,0 1-1 0 0,0 0 1 0 0,0 1-1 0 0,0 1 1 0 0,-1 1-1 0 0,23 7 1 0 0,-35-9-10 0 0,1 0-1 0 0,0 0 1 0 0,-1 0-1 0 0,1 1 1 0 0,-1 0-1 0 0,0 1 1 0 0,0-1-1 0 0,0 1 1 0 0,0 0 0 0 0,-1 1-1 0 0,1-1 1 0 0,-1 1-1 0 0,0 0 1 0 0,4 7-1 0 0,-7-9 17 0 0,0 1 1 0 0,0 0-1 0 0,-1-1 0 0 0,1 1 0 0 0,-1 0 0 0 0,0-1 0 0 0,0 1 0 0 0,-1 0 0 0 0,1 0 0 0 0,-1 0 0 0 0,0 0 0 0 0,0 0 0 0 0,0 0 0 0 0,0 0 0 0 0,-1 0 0 0 0,0 0 1 0 0,1-1-1 0 0,-1 1 0 0 0,-1 0 0 0 0,1 0 0 0 0,-1-1 0 0 0,1 1 0 0 0,-1-1 0 0 0,0 1 0 0 0,0-1 0 0 0,-5 6 0 0 0,-20 26 61 0 0,-1-1 1 0 0,-3-2-1 0 0,-37 33 0 0 0,67-64-12 0 0,484-25 1009 0 0,-403 17 149 0 0,-80 6-1404 0 0,1 1-1 0 0,24-29-6071 0 0</inkml:trace>
+</inkml:ink>
+</file>
+
+<file path=ppt/ink/ink103.xml><?xml version="1.0" encoding="utf-8"?>
+<inkml:ink xmlns:inkml="http://www.w3.org/2003/InkML">
+  <inkml:definitions>
+    <inkml:context xml:id="ctx0">
+      <inkml:inkSource xml:id="inkSrc0">
+        <inkml:traceFormat>
+          <inkml:channel name="X" type="integer" min="-2.14748E9" max="2.14748E9" units="cm"/>
+          <inkml:channel name="Y" type="integer" min="-2.14748E9" max="2.14748E9" units="cm"/>
+          <inkml:channel name="F" type="integer" max="32767" units="dev"/>
+          <inkml:channel name="OA" type="integer" max="360" units="deg"/>
+          <inkml:channel name="OE" type="integer" max="90" units="deg"/>
+        </inkml:traceFormat>
+        <inkml:channelProperties>
+          <inkml:channelProperty channel="X" name="resolution" value="1000" units="1/cm"/>
+          <inkml:channelProperty channel="Y" name="resolution" value="1000" units="1/cm"/>
+          <inkml:channelProperty channel="F" name="resolution" value="0" units="1/dev"/>
+          <inkml:channelProperty channel="OA" name="resolution" value="1000" units="1/deg"/>
+          <inkml:channelProperty channel="OE" name="resolution" value="1000" units="1/deg"/>
+        </inkml:channelProperties>
+      </inkml:inkSource>
+      <inkml:timestamp xml:id="ts0" timeString="2026-04-02T05:57:31.443"/>
+    </inkml:context>
+    <inkml:brush xml:id="br0">
+      <inkml:brushProperty name="width" value="0.2" units="cm"/>
+      <inkml:brushProperty name="height" value="0.2" units="cm"/>
+      <inkml:brushProperty name="color" value="#FFC114"/>
+    </inkml:brush>
+  </inkml:definitions>
+  <inkml:trace contextRef="#ctx0" brushRef="#br0">306 0 4952 0 0,'0'0'-190'0'0,"-7"0"-263"0"0,-18 1 424 0 0,1 1 0 0 0,0 1 0 0 0,-1 1 0 0 0,-25 8-1 0 0,37-8 8 0 0,0 0 0 0 0,0 0 0 0 0,1 2-1 0 0,0-1 1 0 0,0 1 0 0 0,0 1 0 0 0,1 0 0 0 0,0 1-1 0 0,-16 14 1 0 0,25-20 18 0 0,1-1-1 0 0,0 0 1 0 0,0 0 0 0 0,0 0-1 0 0,0 1 1 0 0,0-1 0 0 0,0 1 0 0 0,0-1-1 0 0,0 1 1 0 0,1-1 0 0 0,-1 1-1 0 0,0-1 1 0 0,1 1 0 0 0,-1 0-1 0 0,1-1 1 0 0,0 1 0 0 0,0-1 0 0 0,0 1-1 0 0,-1 0 1 0 0,1 0 0 0 0,1-1-1 0 0,-1 1 1 0 0,0 0 0 0 0,0-1-1 0 0,1 3 1 0 0,1-1 3 0 0,-1 0 1 0 0,1 0-1 0 0,0 0 1 0 0,0-1-1 0 0,0 1 1 0 0,0-1-1 0 0,1 1 0 0 0,-1-1 1 0 0,1 0-1 0 0,-1 0 1 0 0,1 0-1 0 0,3 2 0 0 0,10 5 9 0 0,1-1 0 0 0,0 0-1 0 0,27 8 1 0 0,-39-15-16 0 0,44 15 8 0 0,-15-7-3 0 0,0 2 0 0 0,-1 2 1 0 0,-1 0-1 0 0,0 3 0 0 0,47 29 0 0 0,-41-9 278 0 0,-36-34-255 0 0,-1 0-1 0 0,1-1 1 0 0,-1 1 0 0 0,0 0-1 0 0,1 0 1 0 0,-1 0-1 0 0,0 0 1 0 0,0 0 0 0 0,0 0-1 0 0,-1 0 1 0 0,1 1 0 0 0,0-1-1 0 0,-1 0 1 0 0,0 0 0 0 0,1 1-1 0 0,-1-1 1 0 0,0 0-1 0 0,0 5 1 0 0,-1-5 15 0 0,0-1-1 0 0,0 1 0 0 0,-1-1 1 0 0,1 0-1 0 0,0 1 1 0 0,0-1-1 0 0,-1 0 1 0 0,1 0-1 0 0,-1 0 0 0 0,1 0 1 0 0,-1 0-1 0 0,1 0 1 0 0,-1 0-1 0 0,1 0 1 0 0,-1-1-1 0 0,0 1 0 0 0,-2 0 1 0 0,-34 9 336 0 0,32-8-289 0 0,-51 9 627 0 0,-60 5-1 0 0,58-10 316 0 0,56-5-831 0 0,-6-4 1 0 0,8 3-201 0 0,1 0 1 0 0,-1 0 0 0 0,1 0 0 0 0,-1 0-1 0 0,1 0 1 0 0,-1 0 0 0 0,1 0 0 0 0,-1 0-1 0 0,1 0 1 0 0,-1-1 0 0 0,1 1 0 0 0,-1 0-1 0 0,1 0 1 0 0,-1 0 0 0 0,1-1 0 0 0,-1 1-1 0 0,1 0 1 0 0,0 0 0 0 0,-1-1 0 0 0,1 1-1 0 0,-1 0 1 0 0,1-1 0 0 0,0 1 0 0 0,-1-1-1 0 0,1 1 1 0 0,0 0 0 0 0,-1-2 0 0 0,1-1-243 0 0,1 0 1 0 0,-1 0-1 0 0,1 0 1 0 0,0 0-1 0 0,0 0 1 0 0,0 0-1 0 0,1 0 1 0 0,-1 0-1 0 0,1 0 1 0 0,-1 1-1 0 0,1-1 1 0 0,0 1-1 0 0,0-1 1 0 0,0 1-1 0 0,0-1 1 0 0,4-2-1 0 0,8-9-1871 0 0</inkml:trace>
+</inkml:ink>
+</file>
+
+<file path=ppt/ink/ink104.xml><?xml version="1.0" encoding="utf-8"?>
+<inkml:ink xmlns:inkml="http://www.w3.org/2003/InkML">
+  <inkml:definitions>
+    <inkml:context xml:id="ctx0">
+      <inkml:inkSource xml:id="inkSrc0">
+        <inkml:traceFormat>
+          <inkml:channel name="X" type="integer" min="-2.14748E9" max="2.14748E9" units="cm"/>
+          <inkml:channel name="Y" type="integer" min="-2.14748E9" max="2.14748E9" units="cm"/>
+          <inkml:channel name="F" type="integer" max="32767" units="dev"/>
+          <inkml:channel name="OA" type="integer" max="360" units="deg"/>
+          <inkml:channel name="OE" type="integer" max="90" units="deg"/>
+        </inkml:traceFormat>
+        <inkml:channelProperties>
+          <inkml:channelProperty channel="X" name="resolution" value="1000" units="1/cm"/>
+          <inkml:channelProperty channel="Y" name="resolution" value="1000" units="1/cm"/>
+          <inkml:channelProperty channel="F" name="resolution" value="0" units="1/dev"/>
+          <inkml:channelProperty channel="OA" name="resolution" value="1000" units="1/deg"/>
+          <inkml:channelProperty channel="OE" name="resolution" value="1000" units="1/deg"/>
+        </inkml:channelProperties>
+      </inkml:inkSource>
+      <inkml:timestamp xml:id="ts0" timeString="2026-04-02T05:57:31.768"/>
+    </inkml:context>
+    <inkml:brush xml:id="br0">
+      <inkml:brushProperty name="width" value="0.2" units="cm"/>
+      <inkml:brushProperty name="height" value="0.2" units="cm"/>
+      <inkml:brushProperty name="color" value="#FFC114"/>
+    </inkml:brush>
+  </inkml:definitions>
+  <inkml:trace contextRef="#ctx0" brushRef="#br0">47 166 6001 0 0,'-9'-5'355'0'0,"-29"-7"2030"0"0,81-11-2080 0 0,163-35-366 0 0,-1 1-5110 0 0,-179 46 3213 0 0</inkml:trace>
+</inkml:ink>
+</file>
+
 <file path=ppt/ink/ink11.xml><?xml version="1.0" encoding="utf-8"?>
 <inkml:ink xmlns:inkml="http://www.w3.org/2003/InkML">
   <inkml:definitions>
@@ -3398,7 +3559,7 @@
           <inkml:channelProperty channel="OE" name="resolution" value="1000" units="1/deg"/>
         </inkml:channelProperties>
       </inkml:inkSource>
-      <inkml:timestamp xml:id="ts0" timeString="2026-04-02T05:36:08.696"/>
+      <inkml:timestamp xml:id="ts0" timeString="2026-04-02T05:35:55.030"/>
     </inkml:context>
     <inkml:brush xml:id="br0">
       <inkml:brushProperty name="width" value="0.1" units="cm"/>
@@ -3406,7 +3567,7 @@
       <inkml:brushProperty name="color" value="#FFC114"/>
     </inkml:brush>
   </inkml:definitions>
-  <inkml:trace contextRef="#ctx0" brushRef="#br0">17 23 5857 0 0,'-11'-11'-275'0'0,"11"11"303"0"0,0 0 1 0 0,-1 0 0 0 0,1 0-1 0 0,0 0 1 0 0,-1-1 0 0 0,1 1-1 0 0,0 0 1 0 0,0 0 0 0 0,-1 0-1 0 0,1-1 1 0 0,0 1 0 0 0,0 0-1 0 0,-1 0 1 0 0,1-1 0 0 0,0 1-1 0 0,0 0 1 0 0,0-1 0 0 0,0 1-1 0 0,-1 0 1 0 0,1-1 0 0 0,0 1-1 0 0,0 0 1 0 0,0-1 0 0 0,0 1 0 0 0,0 0-1 0 0,0-1 1 0 0,0 1 0 0 0,0 0-1 0 0,0-1 1 0 0,0 1 0 0 0,0 0-1 0 0,0-1 1 0 0,0 1 0 0 0,0 0-1 0 0,0-1 1 0 0,0 1 0 0 0,0 0-1 0 0,1-1 1 0 0,-1 1 0 0 0,37 0-27 0 0,0 1 1 0 0,-1 3 0 0 0,1 1-1 0 0,-1 1 1 0 0,43 14 0 0 0,3-1 9 0 0,-68-16-9 0 0,0 0-1 0 0,0 1 0 0 0,0 1 0 0 0,-1 0 1 0 0,0 1-1 0 0,0 1 0 0 0,17 10 0 0 0,-29-16-1 0 0,0 0-1 0 0,0 0 1 0 0,1-1-1 0 0,-1 1 1 0 0,0 0-1 0 0,0 0 0 0 0,0 0 1 0 0,-1 0-1 0 0,1 0 1 0 0,0 0-1 0 0,0 0 1 0 0,0 1-1 0 0,-1-1 0 0 0,1 0 1 0 0,-1 0-1 0 0,1 1 1 0 0,-1-1-1 0 0,1 0 1 0 0,-1 1-1 0 0,0-1 1 0 0,1 0-1 0 0,-1 1 0 0 0,0-1 1 0 0,0 0-1 0 0,0 1 1 0 0,0-1-1 0 0,0 1 1 0 0,-1-1-1 0 0,1 0 1 0 0,0 1-1 0 0,-1-1 0 0 0,1 0 1 0 0,-1 0-1 0 0,1 1 1 0 0,-1-1-1 0 0,1 0 1 0 0,-1 0-1 0 0,0 1 1 0 0,0-1-1 0 0,0 0 0 0 0,0 0 1 0 0,0 0-1 0 0,0 0 1 0 0,0 0-1 0 0,0-1 1 0 0,0 1-1 0 0,0 0 1 0 0,0 0-1 0 0,0-1 0 0 0,-2 2 1 0 0,-6 3 14 0 0,0 1 0 0 0,-1-1-1 0 0,0 0 1 0 0,-14 4 0 0 0,-33 7 598 0 0,0-2 0 0 0,-1-2 0 0 0,-71 4 0 0 0,140-16-617 0 0,1-1 0 0 0,0 2 0 0 0,0 0 0 0 0,-1 0 0 0 0,1 1 0 0 0,-1 1 0 0 0,1 0 0 0 0,-1 0 0 0 0,19 9 0 0 0,101 53-39 0 0,269 142 72 0 0,-397-206-7 0 0,0 1 0 0 0,0 0 0 0 0,0 0 0 0 0,-1 0 0 0 0,1 0 0 0 0,-1 1 0 0 0,1-1 0 0 0,3 6 0 0 0,-5-7 46 0 0,-5-29-4966 0 0,8 9 2116 0 0</inkml:trace>
+  <inkml:trace contextRef="#ctx0" brushRef="#br0">61 80 4560 0 0,'-40'-60'1889'0'0,"39"58"-1625"0"0,0 1-218 0 0,0-1 1 0 0,0 1-1 0 0,0 0 0 0 0,0-1 0 0 0,0 1 0 0 0,0 0 0 0 0,0 0 0 0 0,-1-1 1 0 0,1 1-1 0 0,0 0 0 0 0,-1 0 0 0 0,1 0 0 0 0,-3-1 0 0 0,7 68-78 0 0,22 109 0 0 0,-9-72 40 0 0,-8-42 113 0 0,-8-60-77 0 0,-1 6 354 0 0,29-29-6408 0 0</inkml:trace>
 </inkml:ink>
 </file>
 
@@ -3430,7 +3591,7 @@
           <inkml:channelProperty channel="OE" name="resolution" value="1000" units="1/deg"/>
         </inkml:channelProperties>
       </inkml:inkSource>
-      <inkml:timestamp xml:id="ts0" timeString="2026-04-02T05:36:13.468"/>
+      <inkml:timestamp xml:id="ts0" timeString="2026-04-02T05:35:55.924"/>
     </inkml:context>
     <inkml:brush xml:id="br0">
       <inkml:brushProperty name="width" value="0.1" units="cm"/>
@@ -3438,7 +3599,7 @@
       <inkml:brushProperty name="color" value="#FFC114"/>
     </inkml:brush>
   </inkml:definitions>
-  <inkml:trace contextRef="#ctx0" brushRef="#br0">298 16 4428 0 0,'0'0'-258'0'0,"-7"-1"-348"0"0,-18-6 639 0 0,18 6-24 0 0,-31-4 35 0 0,35 4-40 0 0,0 1-1 0 0,0 0 1 0 0,0-1-1 0 0,0 1 0 0 0,0 1 1 0 0,0-1-1 0 0,0 0 1 0 0,0 1-1 0 0,0-1 1 0 0,-5 2-1 0 0,-25 6 28 0 0,26-6-29 0 0,0-1 0 0 0,0 2 0 0 0,0-1 0 0 0,0 1 0 0 0,0 0 0 0 0,0 1 0 0 0,1 0 0 0 0,0 0 1 0 0,0 0-1 0 0,0 0 0 0 0,0 1 0 0 0,0 0 0 0 0,1 1 0 0 0,0-1 0 0 0,0 1 0 0 0,1 0 0 0 0,0 0 0 0 0,0 0 0 0 0,0 1 0 0 0,1-1 0 0 0,-1 1 0 0 0,-3 12 0 0 0,2-1 16 0 0,1 0-1 0 0,0 0 0 0 0,1 1 1 0 0,1-1-1 0 0,1 1 0 0 0,1 0 1 0 0,0-1-1 0 0,4 20 0 0 0,-3-31 8 0 0,1 0 1 0 0,0-1-1 0 0,0 1 0 0 0,1-1 0 0 0,0 1 0 0 0,0-1 0 0 0,0 0 0 0 0,1 0 0 0 0,0 0 0 0 0,0-1 0 0 0,0 0 0 0 0,1 1 1 0 0,0-1-1 0 0,0-1 0 0 0,0 1 0 0 0,1-1 0 0 0,-1 0 0 0 0,1 0 0 0 0,0-1 0 0 0,0 1 0 0 0,1-1 0 0 0,-1-1 0 0 0,9 3 1 0 0,8 4 152 0 0,2-2 1 0 0,-1 0 0 0 0,1-2 0 0 0,49 4-1 0 0,-72-8-112 0 0,1-1-1 0 0,0 0 1 0 0,-1 0-1 0 0,1 0 0 0 0,0 0 1 0 0,-1 0-1 0 0,1 0 0 0 0,0-1 1 0 0,-1 1-1 0 0,1-1 0 0 0,-1 0 1 0 0,1 0-1 0 0,-1 0 0 0 0,1 0 1 0 0,-1 0-1 0 0,0 0 0 0 0,1-1 1 0 0,-1 1-1 0 0,0-1 0 0 0,0 0 1 0 0,0 0-1 0 0,0 0 0 0 0,0 1 1 0 0,2-5-1 0 0,-3 3-45 0 0,0 1 1 0 0,0 0-1 0 0,-1-1 1 0 0,1 1-1 0 0,-1 0 0 0 0,1-1 1 0 0,-1 1-1 0 0,0-1 0 0 0,0 1 1 0 0,0-1-1 0 0,0 1 0 0 0,-1-1 1 0 0,1 1-1 0 0,-1 0 0 0 0,1-1 1 0 0,-1 1-1 0 0,0 0 1 0 0,0-1-1 0 0,0 1 0 0 0,0 0 1 0 0,0 0-1 0 0,0 0 0 0 0,-1 0 1 0 0,1 0-1 0 0,-3-2 0 0 0,-1-1-10 0 0,0 0-1 0 0,-1 1 1 0 0,0-1-1 0 0,0 1 1 0 0,0 0-1 0 0,0 1 1 0 0,-1 0-1 0 0,0 0 1 0 0,-10-4-1 0 0,-20-10 71 0 0,35 17-59 0 0,1-1-27 0 0,0 1-1 0 0,1-1 0 0 0,-1 1 0 0 0,0-1 1 0 0,0 1-1 0 0,0-1 0 0 0,1 1 1 0 0,-1-1-1 0 0,0 1 0 0 0,1-1 0 0 0,-1 0 1 0 0,0 0-1 0 0,1 1 0 0 0,-1-1 0 0 0,1 0 1 0 0,0 0-1 0 0,-1 0 0 0 0,1 1 1 0 0,-1-1-1 0 0,1 0 0 0 0,0 0 0 0 0,-1-1 1 0 0,10-2-14 0 0,1 0 1 0 0,-1 1 0 0 0,1 0-1 0 0,-1 1 1 0 0,1 0-1 0 0,0 0 1 0 0,0 1 0 0 0,11 0-1 0 0,27-4-5 0 0,-45 4 19 0 0,33-1-22 0 0,-21 2 15 0 0,-12 0-2 0 0,19 14-223 0 0,-21 37 215 0 0,2 0-1 0 0,12 64 1 0 0,-14-106 47 0 0,0-1 0 0 0,0 1 0 0 0,-1 0 0 0 0,0-1 0 0 0,-2 12 0 0 0,2-18 21 0 0,-1 4 317 0 0,15-27-6110 0 0</inkml:trace>
+  <inkml:trace contextRef="#ctx0" brushRef="#br0">168 57 4592 0 0,'0'0'-109'0'0,"-5"-13"449"0"0,2 11-260 0 0,0 1 0 0 0,-1 0 0 0 0,1 0 0 0 0,-1 0 0 0 0,1 1 0 0 0,-1-1-1 0 0,1 1 1 0 0,-1 0 0 0 0,0 0 0 0 0,1 0 0 0 0,-1 0 0 0 0,1 1 0 0 0,-1-1 0 0 0,0 1 0 0 0,1 0 0 0 0,0 0-1 0 0,-1 1 1 0 0,1-1 0 0 0,0 0 0 0 0,-1 1 0 0 0,1 0 0 0 0,0 0 0 0 0,0 0 0 0 0,-4 4 0 0 0,0-1-77 0 0,1 0 0 0 0,0 0 1 0 0,-1 0-1 0 0,2 1 0 0 0,-1 0 1 0 0,1 0-1 0 0,0 1 0 0 0,0 0 1 0 0,0-1-1 0 0,-5 14 0 0 0,8-17-3 0 0,1 0 0 0 0,0 0 1 0 0,1-1-1 0 0,-1 1 0 0 0,0 0 0 0 0,1 0 0 0 0,0 0 0 0 0,-1 0 0 0 0,1-1 0 0 0,0 1 0 0 0,1 0 0 0 0,-1 0 0 0 0,0 0 1 0 0,1 0-1 0 0,0 0 0 0 0,-1-1 0 0 0,1 1 0 0 0,0 0 0 0 0,0 0 0 0 0,1-1 0 0 0,2 6 0 0 0,0-5 3 0 0,-1 1 0 0 0,1 0-1 0 0,0-1 1 0 0,0 0-1 0 0,0 0 1 0 0,0 0 0 0 0,0-1-1 0 0,1 1 1 0 0,0-1-1 0 0,-1 0 1 0 0,9 2 0 0 0,7 2 21 0 0,1-2 0 0 0,0 0 0 0 0,1-1 1 0 0,39 0-1 0 0,-46-3 10 0 0,0-1 1 0 0,0 0-1 0 0,0-1 0 0 0,0 0 1 0 0,0-2-1 0 0,25-8 0 0 0,-35 11 4 0 0,-1-1 0 0 0,0 0 0 0 0,0 0-1 0 0,0 0 1 0 0,-1 0 0 0 0,1-1 0 0 0,-1 0 0 0 0,1 1-1 0 0,-1-1 1 0 0,0-1 0 0 0,0 1 0 0 0,0 0 0 0 0,0-1-1 0 0,-1 1 1 0 0,1-1 0 0 0,-1 0 0 0 0,0 0 0 0 0,0 0-1 0 0,0 0 1 0 0,-1 0 0 0 0,1 0 0 0 0,-1 0 0 0 0,0-1-1 0 0,0 1 1 0 0,-1-1 0 0 0,1-7 0 0 0,-2 6-3 0 0,1 1 1 0 0,-1 0-1 0 0,-1 0 1 0 0,1 0-1 0 0,-1 0 1 0 0,0 0-1 0 0,0 0 1 0 0,0 0-1 0 0,-1 0 1 0 0,1 1-1 0 0,-1-1 1 0 0,-1 1-1 0 0,1 0 1 0 0,0 0-1 0 0,-1 0 1 0 0,0 0-1 0 0,0 1 1 0 0,0-1-1 0 0,0 1 1 0 0,-1 0-1 0 0,1 0 1 0 0,-6-2-1 0 0,-2-2-22 0 0,-1 1-1 0 0,1 1 0 0 0,-1 0 0 0 0,0 0 0 0 0,0 2 1 0 0,-27-5-1 0 0,31 7-32 0 0,0 1 1 0 0,0 0 0 0 0,0 1-1 0 0,0 0 1 0 0,1 1 0 0 0,-1-1-1 0 0,0 2 1 0 0,-14 5-1 0 0,3-2-457 0 0,18-5 119 0 0</inkml:trace>
 </inkml:ink>
 </file>
 
@@ -3462,7 +3623,7 @@
           <inkml:channelProperty channel="OE" name="resolution" value="1000" units="1/deg"/>
         </inkml:channelProperties>
       </inkml:inkSource>
-      <inkml:timestamp xml:id="ts0" timeString="2026-04-02T05:36:14.564"/>
+      <inkml:timestamp xml:id="ts0" timeString="2026-04-02T05:35:56.550"/>
     </inkml:context>
     <inkml:brush xml:id="br0">
       <inkml:brushProperty name="width" value="0.1" units="cm"/>
@@ -3470,7 +3631,7 @@
       <inkml:brushProperty name="color" value="#FFC114"/>
     </inkml:brush>
   </inkml:definitions>
-  <inkml:trace contextRef="#ctx0" brushRef="#br0">0 0 5044 0 0,'8'134'-386'0'0,"23"68"574"0"0,-28-171 177 0 0,-3-24-3019 0 0,5-40 1953 0 0</inkml:trace>
+  <inkml:trace contextRef="#ctx0" brushRef="#br0">143 85 5440 0 0,'0'0'-172'0'0,"-18"26"-294"0"0,8-12 448 0 0,7-10 12 0 0,-1 0 0 0 0,1 0 0 0 0,1 0 0 0 0,-1 0 0 0 0,1 1 0 0 0,-1-1 0 0 0,1 1 0 0 0,0-1 0 0 0,1 1 0 0 0,-1 0 0 0 0,-1 9 0 0 0,3-10 21 0 0,0 1 1 0 0,0-1 0 0 0,0 0-1 0 0,1 0 1 0 0,-1 0 0 0 0,1 1-1 0 0,0-1 1 0 0,0 0-1 0 0,0 0 1 0 0,1 0 0 0 0,0 0-1 0 0,-1-1 1 0 0,1 1 0 0 0,1 0-1 0 0,-1-1 1 0 0,0 1 0 0 0,1-1-1 0 0,0 0 1 0 0,0 0-1 0 0,0 0 1 0 0,0 0 0 0 0,0 0-1 0 0,1-1 1 0 0,-1 1 0 0 0,1-1-1 0 0,-1 0 1 0 0,1 0 0 0 0,0 0-1 0 0,0-1 1 0 0,7 3-1 0 0,-4-2 69 0 0,0 0-1 0 0,1 0 1 0 0,-1 0-1 0 0,1-1 1 0 0,-1 0-1 0 0,1-1 1 0 0,0 1-1 0 0,-1-1 1 0 0,1-1-1 0 0,0 0 1 0 0,-1 0-1 0 0,1 0 0 0 0,-1-1 1 0 0,1 0-1 0 0,-1 0 1 0 0,10-6-1 0 0,-11 5-16 0 0,0-1-1 0 0,0 0 0 0 0,-1 0 1 0 0,0-1-1 0 0,0 1 0 0 0,0-1 1 0 0,-1 0-1 0 0,1-1 1 0 0,-1 1-1 0 0,-1-1 0 0 0,1 1 1 0 0,-1-1-1 0 0,0-1 0 0 0,0 1 1 0 0,0 0-1 0 0,-1-1 1 0 0,0 1-1 0 0,0-1 0 0 0,-1 1 1 0 0,1-12-1 0 0,-2 13-17 0 0,0 0 0 0 0,0 0-1 0 0,0 0 1 0 0,-1 0 0 0 0,0-1 0 0 0,0 2-1 0 0,0-1 1 0 0,-1 0 0 0 0,0 0 0 0 0,0 0 0 0 0,0 1-1 0 0,0-1 1 0 0,-1 1 0 0 0,0-1 0 0 0,1 1 0 0 0,-2 0-1 0 0,1 0 1 0 0,0 0 0 0 0,-1 1 0 0 0,0-1-1 0 0,0 1 1 0 0,0 0 0 0 0,0 0 0 0 0,0 0 0 0 0,-1 1-1 0 0,1-1 1 0 0,-10-2 0 0 0,-9-2-39 0 0,0 1 0 0 0,0 1 1 0 0,-1 2-1 0 0,1 0 0 0 0,-1 1 0 0 0,0 1 0 0 0,0 2 1 0 0,-33 4-1 0 0,55-5-81 0 0,0 1 1 0 0,0-1-1 0 0,0 0 1 0 0,0 0 0 0 0,0 0-1 0 0,0 0 1 0 0,0-1-1 0 0,0 1 1 0 0,0 0-1 0 0,0-1 1 0 0,0 1-1 0 0,-2-2 1 0 0,-6-1-1053 0 0,-2-10-4449 0 0</inkml:trace>
 </inkml:ink>
 </file>
 
@@ -3494,7 +3655,7 @@
           <inkml:channelProperty channel="OE" name="resolution" value="1000" units="1/deg"/>
         </inkml:channelProperties>
       </inkml:inkSource>
-      <inkml:timestamp xml:id="ts0" timeString="2026-04-02T05:36:15.738"/>
+      <inkml:timestamp xml:id="ts0" timeString="2026-04-02T05:35:57.688"/>
     </inkml:context>
     <inkml:brush xml:id="br0">
       <inkml:brushProperty name="width" value="0.1" units="cm"/>
@@ -3502,7 +3663,7 @@
       <inkml:brushProperty name="color" value="#FFC114"/>
     </inkml:brush>
   </inkml:definitions>
-  <inkml:trace contextRef="#ctx0" brushRef="#br0">10 16 3172 0 0,'0'0'-187'0'0,"-7"-1"-152"0"0,7 1 363 0 0,0 0 0 0 0,0 0 0 0 0,0 0 1 0 0,0-1-1 0 0,0 1 0 0 0,0 0 0 0 0,0 0 0 0 0,0 0 0 0 0,0 0 1 0 0,0 0-1 0 0,0 0 0 0 0,0 0 0 0 0,0 0 0 0 0,0 0 0 0 0,0-1 1 0 0,0 1-1 0 0,0 0 0 0 0,0 0 0 0 0,0 0 0 0 0,0 0 0 0 0,0 0 1 0 0,0 0-1 0 0,0 0 0 0 0,0 0 0 0 0,0-1 0 0 0,0 1 0 0 0,0 0 1 0 0,0 0-1 0 0,0 0 0 0 0,0 0 0 0 0,0 0 0 0 0,0 0 1 0 0,0 0-1 0 0,0 0 0 0 0,0 0 0 0 0,0 0 0 0 0,0-1 0 0 0,0 1 1 0 0,0 0-1 0 0,-1 0 0 0 0,1 0 0 0 0,0 0 0 0 0,0 0 0 0 0,0 0 1 0 0,0 0-1 0 0,0 0 0 0 0,0 0 0 0 0,0 0 0 0 0,0 0 0 0 0,0 0 1 0 0,-1 0-1 0 0,1 0 0 0 0,0 0 0 0 0,0 0 0 0 0,0 0 1 0 0,0 0-1 0 0,0 0 0 0 0,0 0 0 0 0,0 0 0 0 0,-1 0 0 0 0,16-8 84 0 0,-11 6 71 0 0,37 2 184 0 0,49 14-73 0 0,-73-13-273 0 0,-1 1 1 0 0,1 0 0 0 0,-1 1 0 0 0,0 1 0 0 0,0 1 0 0 0,0 0 0 0 0,20 10-1 0 0,-35-15-18 0 0,0 1 0 0 0,-1-1 0 0 0,1 1 0 0 0,0 0 0 0 0,0-1 0 0 0,0 1 0 0 0,-1 0 0 0 0,1 0 0 0 0,0-1 0 0 0,-1 1 0 0 0,1 0 0 0 0,-1 0-1 0 0,1 0 1 0 0,-1 0 0 0 0,1 0 0 0 0,-1 0 0 0 0,0 0 0 0 0,1 0 0 0 0,-1 0 0 0 0,0 0 0 0 0,0 0 0 0 0,0 0 0 0 0,0 0 0 0 0,0 0 0 0 0,0 2-1 0 0,0 1 4 0 0,-1 0-1 0 0,0 0 1 0 0,0 0-1 0 0,0-1 1 0 0,-1 1-1 0 0,0 0 1 0 0,1 0-1 0 0,-1-1 1 0 0,0 1-1 0 0,-1-1 1 0 0,1 1-1 0 0,-1-1 1 0 0,1 0-1 0 0,-4 3 1 0 0,-46 38 40 0 0,31-35 20 0 0,0-2-1 0 0,-1 0 1 0 0,1-2 0 0 0,-37 5-1 0 0,55-9-17 0 0,-10 0-39 0 0,9 0 95 0 0,12-1 516 0 0,5-1-618 0 0,50 0-10 0 0,-51 3 9 0 0,21 4-12 0 0,0 1-1 0 0,-1 1 1 0 0,0 1 0 0 0,58 27 0 0 0,-85-35 10 0 0,-1 1-1 0 0,1 0 0 0 0,-1 0 1 0 0,0 0-1 0 0,0 1 0 0 0,0-1 1 0 0,0 1-1 0 0,0 0 0 0 0,0 0 1 0 0,-1 1-1 0 0,1-1 0 0 0,-1 1 1 0 0,0-1-1 0 0,0 1 0 0 0,-1 0 1 0 0,1 0-1 0 0,-1 0 0 0 0,0 1 1 0 0,0-1-1 0 0,0 1 0 0 0,0-1 1 0 0,-1 1-1 0 0,1 4 0 0 0,-2-7-4 0 0,0 0 15 0 0,-1 0 0 0 0,0 0 0 0 0,0 0 0 0 0,0 0 0 0 0,0 0-1 0 0,0-1 1 0 0,0 1 0 0 0,0 0 0 0 0,0-1 0 0 0,-1 1 0 0 0,1 0 0 0 0,-1-1-1 0 0,1 0 1 0 0,-1 1 0 0 0,0-1 0 0 0,-2 1 0 0 0,-11 6 98 0 0,0-2 1 0 0,0 0-1 0 0,-1-1 0 0 0,0 0 1 0 0,-31 4-1 0 0,-92 4 565 0 0,108-10-527 0 0,25-3-227 0 0,-33 0 292 0 0,37-1-420 0 0,1 1-1 0 0,0 0 1 0 0,0-1 0 0 0,-1 1-1 0 0,1-1 1 0 0,0 1-1 0 0,0-1 1 0 0,0 1 0 0 0,0-1-1 0 0,0 0 1 0 0,0 0-1 0 0,0 0 1 0 0,0 1 0 0 0,0-1-1 0 0,0 0 1 0 0,-1-2-1 0 0,0-6-1989 0 0</inkml:trace>
+  <inkml:trace contextRef="#ctx0" brushRef="#br0">211 28 6761 0 0,'-3'-15'-1123'0'0,"3"14"1088"0"0,0 1 0 0 0,0-1 1 0 0,0 1-1 0 0,0-1 0 0 0,0 1 0 0 0,0 0 0 0 0,0-1 0 0 0,0 1 0 0 0,0-1 0 0 0,0 1 0 0 0,0-1 1 0 0,0 1-1 0 0,-1 0 0 0 0,1-1 0 0 0,0 1 0 0 0,0-1 0 0 0,-1 1 0 0 0,1 0 0 0 0,0-1 0 0 0,-1 1 1 0 0,1 0-1 0 0,0-1 0 0 0,-1 1 0 0 0,1 0 0 0 0,0 0 0 0 0,-1-1 0 0 0,1 1 0 0 0,0 0 0 0 0,-1 0 1 0 0,1 0-1 0 0,-1-1 0 0 0,1 1 0 0 0,-1 0 0 0 0,0 0 0 0 0,-8 5 28 0 0,1 0-1 0 0,-1 1 1 0 0,1 0 0 0 0,0 0-1 0 0,1 1 1 0 0,-1 0 0 0 0,1 1-1 0 0,1-1 1 0 0,-7 11-1 0 0,-4 3 8 0 0,-8 13 61 0 0,1 0-1 0 0,-25 50 1 0 0,48-83 132 0 0,60-63 2718 0 0,94-93-2062 0 0,-122 131-815 0 0,-30 23-55 0 0,-1 1 20 0 0,0 0 1 0 0,0 0-1 0 0,0 0 1 0 0,1-1 0 0 0,-1 1-1 0 0,0 0 1 0 0,0 0-1 0 0,0 0 1 0 0,0 0-1 0 0,0-1 1 0 0,0 1 0 0 0,0 0-1 0 0,0 0 1 0 0,0 0-1 0 0,1 0 1 0 0,-1 0-1 0 0,0-1 1 0 0,0 1 0 0 0,0 0-1 0 0,0 0 1 0 0,0 0-1 0 0,1 0 1 0 0,-1 0-1 0 0,0 0 1 0 0,0 0 0 0 0,0 0-1 0 0,1 0 1 0 0,-1-1-1 0 0,0 1 1 0 0,0 0-1 0 0,0 0 1 0 0,0 0 0 0 0,1 0-1 0 0,-1 0 1 0 0,0 0-1 0 0,0 0 1 0 0,0 0-1 0 0,1 0 1 0 0,-1 0 0 0 0,0 1-1 0 0,0-1 1 0 0,0 0-1 0 0,0 0 1 0 0,1 0-1 0 0,-1 0 1 0 0,0 0 0 0 0,15 7-21 0 0,10 9 0 0 0,23 34-7 0 0,3-2 0 0 0,70 52 0 0 0,-120-100-304 0 0,4 3 711 0 0</inkml:trace>
 </inkml:ink>
 </file>
 
@@ -3526,15 +3687,15 @@
           <inkml:channelProperty channel="OE" name="resolution" value="1000" units="1/deg"/>
         </inkml:channelProperties>
       </inkml:inkSource>
-      <inkml:timestamp xml:id="ts0" timeString="2026-04-02T05:36:55.662"/>
+      <inkml:timestamp xml:id="ts0" timeString="2026-04-02T05:35:58.855"/>
     </inkml:context>
     <inkml:brush xml:id="br0">
-      <inkml:brushProperty name="width" value="0.2" units="cm"/>
-      <inkml:brushProperty name="height" value="0.2" units="cm"/>
+      <inkml:brushProperty name="width" value="0.1" units="cm"/>
+      <inkml:brushProperty name="height" value="0.1" units="cm"/>
       <inkml:brushProperty name="color" value="#FFC114"/>
     </inkml:brush>
   </inkml:definitions>
-  <inkml:trace contextRef="#ctx0" brushRef="#br0">46 4 7297 0 0,'0'0'134'0'0,"-18"-2"1962"0"0,9 2-850 0 0,-10-2-2965 0 0</inkml:trace>
+  <inkml:trace contextRef="#ctx0" brushRef="#br0">55 38 5969 0 0,'-4'-37'-408'0'0,"3"37"388"0"0,0 4-109 0 0,-2 21 112 0 0,0 0-1 0 0,3 38 1 0 0,-1 15-7 0 0,-18 206 39 0 0,2 66 127 0 0,11-147-64 0 0,6-176-61 0 0,7 69-32 0 0,-3-62 38 0 0,-1 0 0 0 0,-4 45 0 0 0,-6 88 70 0 0,4-94 79 0 0,6-13-2151 0 0</inkml:trace>
 </inkml:ink>
 </file>
 
@@ -3558,15 +3719,15 @@
           <inkml:channelProperty channel="OE" name="resolution" value="1000" units="1/deg"/>
         </inkml:channelProperties>
       </inkml:inkSource>
-      <inkml:timestamp xml:id="ts0" timeString="2026-04-02T05:36:55.866"/>
+      <inkml:timestamp xml:id="ts0" timeString="2026-04-02T05:36:00.869"/>
     </inkml:context>
     <inkml:brush xml:id="br0">
-      <inkml:brushProperty name="width" value="0.2" units="cm"/>
-      <inkml:brushProperty name="height" value="0.2" units="cm"/>
+      <inkml:brushProperty name="width" value="0.1" units="cm"/>
+      <inkml:brushProperty name="height" value="0.1" units="cm"/>
       <inkml:brushProperty name="color" value="#FFC114"/>
     </inkml:brush>
   </inkml:definitions>
-  <inkml:trace contextRef="#ctx0" brushRef="#br0">3 1 7257 0 0,'0'0'260'0'0,"-2"21"4215"0"0</inkml:trace>
+  <inkml:trace contextRef="#ctx0" brushRef="#br0">442 44 5384 0 0,'-7'-40'293'0'0,"6"38"-96"0"0,1 2-191 0 0,0 0 1 0 0,0 0 0 0 0,0 1-1 0 0,0-1 1 0 0,0 0 0 0 0,0 0-1 0 0,0 0 1 0 0,-1 0-1 0 0,1 0 1 0 0,0 0 0 0 0,0 0-1 0 0,0 0 1 0 0,0 0-1 0 0,0 0 1 0 0,0 0 0 0 0,0 0-1 0 0,0 0 1 0 0,0 0-1 0 0,0 0 1 0 0,-1 0 0 0 0,1 0-1 0 0,0 0 1 0 0,0 0-1 0 0,0 0 1 0 0,0 0 0 0 0,0 0-1 0 0,0 0 1 0 0,0-1-1 0 0,0 1 1 0 0,0 0 0 0 0,0 0-1 0 0,0 0 1 0 0,0 0 0 0 0,-1 0-1 0 0,1 0 1 0 0,0 0-1 0 0,0 0 1 0 0,0 0 0 0 0,0 0-1 0 0,0 0 1 0 0,0 0-1 0 0,0 0 1 0 0,0 0 0 0 0,0-1-1 0 0,0 1 1 0 0,0 0-1 0 0,0 0 1 0 0,0 0 0 0 0,0 0-1 0 0,-7 15 51 0 0,-6 23-93 0 0,0 66 28 0 0,5 0 1 0 0,8 190-1 0 0,3-115 51 0 0,-7-98 11 0 0,-21 120 0 0 0,13-121-13 0 0,-5 122-1 0 0,17-202-40 0 0,-8 266 52 0 0,2-211-48 0 0,-32 221 51 0 0,18-134-17 0 0,18-127-38 0 0,0 1 16 0 0,-3 36 34 0 0,-3 82 4870 0 0,-169-305-2408 0 0,123 115-2121 0 0,53 55-376 0 0,-12-9-497 0 0,26 31 475 0 0,0 0 0 0 0,2-1 1 0 0,0-1-1 0 0,1-1 1 0 0,1 0-1 0 0,1-1 0 0 0,1-1 1 0 0,0 0-1 0 0,29 17 1 0 0,-46-32 36 0 0,3-2-20 0 0,0 1 0 0 0,0-2 0 0 0,0 1 0 0 0,0 0 0 0 0,0-1 0 0 0,0 0 0 0 0,0-1 0 0 0,0 1 1 0 0,-1-1-1 0 0,8-4 0 0 0,48-40 1 0 0,-37 27-5 0 0,125-93 76 0 0,-126 91 109 0 0,-2 0-3554 0 0,2-2-3224 0 0,-14 15 4023 0 0</inkml:trace>
 </inkml:ink>
 </file>
 
@@ -3590,15 +3751,15 @@
           <inkml:channelProperty channel="OE" name="resolution" value="1000" units="1/deg"/>
         </inkml:channelProperties>
       </inkml:inkSource>
-      <inkml:timestamp xml:id="ts0" timeString="2026-04-02T05:36:57.085"/>
+      <inkml:timestamp xml:id="ts0" timeString="2026-04-02T05:36:02.221"/>
     </inkml:context>
     <inkml:brush xml:id="br0">
-      <inkml:brushProperty name="width" value="0.2" units="cm"/>
-      <inkml:brushProperty name="height" value="0.2" units="cm"/>
+      <inkml:brushProperty name="width" value="0.1" units="cm"/>
+      <inkml:brushProperty name="height" value="0.1" units="cm"/>
       <inkml:brushProperty name="color" value="#FFC114"/>
     </inkml:brush>
   </inkml:definitions>
-  <inkml:trace contextRef="#ctx0" brushRef="#br0">373 78 5861 0 0,'0'0'-158'0'0,"-31"-23"1234"0"0,19 21-1017 0 0,1 1 0 0 0,-1 0 0 0 0,0 1 0 0 0,0 0 0 0 0,1 1 0 0 0,-1 0 0 0 0,0 1 0 0 0,1 0 0 0 0,-1 1 0 0 0,1 0 0 0 0,0 1 0 0 0,0 0 0 0 0,-18 10 0 0 0,16-8-49 0 0,1 0 0 0 0,1 2 0 0 0,0-1 0 0 0,0 1-1 0 0,0 1 1 0 0,1 0 0 0 0,0 0 0 0 0,1 1-1 0 0,0 0 1 0 0,0 1 0 0 0,-13 23 0 0 0,18-26 4 0 0,0 0 1 0 0,1 0-1 0 0,0 1 1 0 0,0 0-1 0 0,1-1 1 0 0,0 1-1 0 0,0 0 1 0 0,1 0-1 0 0,1 0 1 0 0,-1 0-1 0 0,1 0 1 0 0,1 0-1 0 0,0 0 1 0 0,0 0-1 0 0,1 0 1 0 0,0-1-1 0 0,0 1 1 0 0,1 0-1 0 0,0-1 1 0 0,1 0-1 0 0,0 1 1 0 0,0-1-1 0 0,0-1 1 0 0,1 1-1 0 0,1-1 1 0 0,-1 0-1 0 0,1 0 1 0 0,0 0 0 0 0,1-1-1 0 0,-1 0 1 0 0,1 0-1 0 0,0-1 1 0 0,1 0-1 0 0,0 0 1 0 0,-1-1-1 0 0,1 1 1 0 0,15 4-1 0 0,-3-2 67 0 0,1-1 1 0 0,0-1-1 0 0,1 0 0 0 0,-1-2 1 0 0,1 0-1 0 0,0-2 0 0 0,-1 0 1 0 0,1-2-1 0 0,0 0 0 0 0,-1-1 1 0 0,1-1-1 0 0,-1-2 0 0 0,0 0 1 0 0,0-1-1 0 0,0 0 0 0 0,-1-2 0 0 0,0-1 1 0 0,0 0-1 0 0,-1-2 0 0 0,-1 0 1 0 0,1-1-1 0 0,-2-1 0 0 0,0 0 1 0 0,0-2-1 0 0,-2 0 0 0 0,15-16 1 0 0,-26 26-38 0 0,0 0 0 0 0,0 0 0 0 0,0-1 1 0 0,-1 1-1 0 0,1-1 0 0 0,-2 1 1 0 0,1-1-1 0 0,0 0 0 0 0,-1 0 0 0 0,0 0 1 0 0,-1 0-1 0 0,1-1 0 0 0,-1 1 1 0 0,0 0-1 0 0,-1-1 0 0 0,0 1 0 0 0,0-1 1 0 0,0 1-1 0 0,-1 0 0 0 0,0-1 1 0 0,0 1-1 0 0,0 0 0 0 0,-1 0 0 0 0,0-1 1 0 0,-3-6-1 0 0,0 4 7 0 0,0-1 0 0 0,0 1-1 0 0,-1 1 1 0 0,-1-1 0 0 0,1 1 0 0 0,-1 0 0 0 0,-1 0 0 0 0,1 1 0 0 0,-1 0 0 0 0,-1 0-1 0 0,1 1 1 0 0,-1 0 0 0 0,0 1 0 0 0,-15-7 0 0 0,-18-4 9 0 0,0 2 0 0 0,-1 2 0 0 0,-1 2 0 0 0,-53-6 0 0 0,56 10-380 0 0,26 2-5 0 0</inkml:trace>
+  <inkml:trace contextRef="#ctx0" brushRef="#br0">354 0 5701 0 0,'0'0'-275'0'0,"-5"3"-923"0"0,-181 102 1844 0 0,25-21 161 0 0,159-83-773 0 0,4 13 54 0 0,6-8-70 0 0,0 0 0 0 0,1-1 0 0 0,-1 0 0 0 0,1 0 0 0 0,0-1 0 0 0,0 0 0 0 0,1 0 0 0 0,13 3 0 0 0,89 15 41 0 0,-32-8-10 0 0,48 20 75 0 0,-126-33-87 0 0,0-1-181 0 0,-1 0-1 0 0,1 0 1 0 0,-1 0 0 0 0,1 0-1 0 0,0 0 1 0 0,-1 0 0 0 0,1 0-1 0 0,-1 0 1 0 0,1 0 0 0 0,-1-1-1 0 0,1 1 1 0 0,-1-1 0 0 0,1 1 0 0 0,-1-1-1 0 0,1 0 1 0 0,1-1 0 0 0,-1 2-213 0 0</inkml:trace>
 </inkml:ink>
 </file>
 
@@ -3654,15 +3815,15 @@
           <inkml:channelProperty channel="OE" name="resolution" value="1000" units="1/deg"/>
         </inkml:channelProperties>
       </inkml:inkSource>
-      <inkml:timestamp xml:id="ts0" timeString="2026-04-02T05:37:03.296"/>
+      <inkml:timestamp xml:id="ts0" timeString="2026-04-02T05:36:04.307"/>
     </inkml:context>
     <inkml:brush xml:id="br0">
-      <inkml:brushProperty name="width" value="0.2" units="cm"/>
-      <inkml:brushProperty name="height" value="0.2" units="cm"/>
+      <inkml:brushProperty name="width" value="0.1" units="cm"/>
+      <inkml:brushProperty name="height" value="0.1" units="cm"/>
       <inkml:brushProperty name="color" value="#FFC114"/>
     </inkml:brush>
   </inkml:definitions>
-  <inkml:trace contextRef="#ctx0" brushRef="#br0">88 66 2484 0 0,'-6'-3'655'0'0,"-1"0"0"0"0,1-1-1 0 0,-1 0 1 0 0,1 0 0 0 0,1-1-1 0 0,-1 1 1 0 0,0-1 0 0 0,1 0-1 0 0,-9-12 307 0 0,10 14-349 0 0,4 2-564 0 0,0 1 0 0 0,-1-1 0 0 0,1 1 0 0 0,0-1 0 0 0,0 1 0 0 0,-1-1 0 0 0,1 1 0 0 0,0 0 0 0 0,-1-1 0 0 0,1 1 0 0 0,0 0 0 0 0,-1-1 0 0 0,1 1-1 0 0,-1 0 1 0 0,1-1 0 0 0,-1 1 0 0 0,1 0 0 0 0,-1 0 0 0 0,1-1 0 0 0,-1 1 0 0 0,1 0 0 0 0,-1 0 0 0 0,1 0 0 0 0,-1 0 0 0 0,1 0 0 0 0,-1 0 0 0 0,1 0 0 0 0,-1 0 0 0 0,1 0 0 0 0,-1 0 0 0 0,1 0 0 0 0,-1 0 0 0 0,0 0 0 0 0,5 20-32 0 0,1-1 1 0 0,0 1-1 0 0,1-1 0 0 0,17 33 1 0 0,11 33 18 0 0,-2 25 50 0 0,-31-107-81 0 0,0 2 0 0 0,0-5-36 0 0,-1 0-1 0 0,0 1 1 0 0,0-1-1 0 0,0 0 0 0 0,0 0 1 0 0,0 1-1 0 0,0-1 1 0 0,0 0-1 0 0,1 0 0 0 0,-1 0 1 0 0,0 1-1 0 0,0-1 1 0 0,0 0-1 0 0,0 0 0 0 0,1 0 1 0 0,-1 1-1 0 0,0-1 1 0 0,0 0-1 0 0,1 0 0 0 0,-1 0 1 0 0,0 0-1 0 0,0 0 1 0 0,1 0-1 0 0,-1 0 0 0 0,0 0 1 0 0,0 1-1 0 0,1-1 1 0 0,-1 0-1 0 0,0 0 0 0 0,0 0 1 0 0,1 0-1 0 0,-1 0 1 0 0,0 0-1 0 0,0 0 0 0 0,1-1 1 0 0,-1 1-1 0 0,0 0 1 0 0,1 0-1 0 0,-1 0 1 0 0,0 0-1 0 0,0 0 0 0 0,0 0 1 0 0,1 0-1 0 0,-1 0 1 0 0,0-1-1 0 0,0 1 0 0 0,1 0 1 0 0,-1 0-1 0 0,0 0 1 0 0,0-1-1 0 0,0 1 0 0 0,0 0 1 0 0,1 0-1 0 0,-1 0 1 0 0,0-1-1 0 0,0 1 0 0 0,0 0 1 0 0,0-1-1 0 0,16-21-3621 0 0,-7 9 1851 0 0</inkml:trace>
+  <inkml:trace contextRef="#ctx0" brushRef="#br0">15 152 4428 0 0,'0'0'-227'0'0,"-11"0"-265"0"0,8 0 664 0 0,10 0 908 0 0,449 7-522 0 0,-369-7-404 0 0,768 12 268 0 0,-352-9-40 0 0,-25-10-42 0 0,-395 7-347 0 0,186 7 27 0 0,92-2 23 0 0,353-12 537 0 0,-609 7-531 0 0,505-12 242 0 0,-168-4 134 0 0,-313 12 0 0 0,-127 4-345 0 0,37 0 70 0 0,-23 0-387 0 0,7-2 1347 0 0,-23 1-1065 0 0,-1 0-1 0 0,0 0 1 0 0,0 0 0 0 0,0 0 0 0 0,0 0-1 0 0,0 0 1 0 0,0 0 0 0 0,0 0-1 0 0,0 0 1 0 0,0 1 0 0 0,-1-1 0 0 0,1 0-1 0 0,0 1 1 0 0,0-1 0 0 0,-1 1-1 0 0,1-1 1 0 0,0 1 0 0 0,-3-1 0 0 0,-45-17 41 0 0,-2 1 0 0 0,-88-16 0 0 0,16 4-52 0 0,49 12-24 0 0,71 17-25 0 0,-9-6-50 0 0,8 3-106 0 0,10 3-99 0 0,46 7 213 0 0,-1 2 1 0 0,0 3 0 0 0,-1 2-1 0 0,-1 2 1 0 0,0 2-1 0 0,67 35 1 0 0,-114-52 42 0 0,-1-1 11 0 0,0 0 0 0 0,0 1-1 0 0,0-1 1 0 0,0 0-1 0 0,0 0 1 0 0,0 1-1 0 0,0-1 1 0 0,0 1 0 0 0,0-1-1 0 0,0 1 1 0 0,0-1-1 0 0,-1 1 1 0 0,1 0 0 0 0,0-1-1 0 0,0 1 1 0 0,-1 0-1 0 0,1-1 1 0 0,0 1-1 0 0,-1 0 1 0 0,1 0 0 0 0,-1 0-1 0 0,1 0 1 0 0,-1 0-1 0 0,1 0 1 0 0,-1-1-1 0 0,0 1 1 0 0,0 0 0 0 0,1 0-1 0 0,-1 0 1 0 0,0 0-1 0 0,0 0 1 0 0,0 0 0 0 0,0 0-1 0 0,0 0 1 0 0,0 1-1 0 0,0-1 1 0 0,0 0-1 0 0,0 0 1 0 0,-1-1 0 0 0,1 3-1 0 0,-4 2 6 0 0,0 0 0 0 0,0 0 0 0 0,0 0 1 0 0,-1-1-1 0 0,0 1 0 0 0,1-1 0 0 0,-2 0 0 0 0,1-1 0 0 0,0 1 0 0 0,-8 3 0 0 0,-65 28 39 0 0,54-25-27 0 0,-18 8-118 0 0,-46 19-488 0 0,28-18-4256 0 0,47-16 2342 0 0</inkml:trace>
 </inkml:ink>
 </file>
 
@@ -3686,15 +3847,15 @@
           <inkml:channelProperty channel="OE" name="resolution" value="1000" units="1/deg"/>
         </inkml:channelProperties>
       </inkml:inkSource>
-      <inkml:timestamp xml:id="ts0" timeString="2026-04-02T05:37:04.985"/>
+      <inkml:timestamp xml:id="ts0" timeString="2026-04-02T05:36:05.104"/>
     </inkml:context>
     <inkml:brush xml:id="br0">
-      <inkml:brushProperty name="width" value="0.2" units="cm"/>
-      <inkml:brushProperty name="height" value="0.2" units="cm"/>
+      <inkml:brushProperty name="width" value="0.1" units="cm"/>
+      <inkml:brushProperty name="height" value="0.1" units="cm"/>
       <inkml:brushProperty name="color" value="#FFC114"/>
     </inkml:brush>
   </inkml:definitions>
-  <inkml:trace contextRef="#ctx0" brushRef="#br0">127 137 5765 0 0,'14'-42'-933'0'0,"-14"40"968"0"0,0 1 0 0 0,0-1 0 0 0,1 0-1 0 0,-1 0 1 0 0,-1 0 0 0 0,1 1 0 0 0,0-1 0 0 0,0 0-1 0 0,-1 0 1 0 0,1 1 0 0 0,-1-1 0 0 0,1 0 0 0 0,-1 0-1 0 0,0 1 1 0 0,1-1 0 0 0,-1 1 0 0 0,0-1 0 0 0,0 1-1 0 0,0-1 1 0 0,-1 1 0 0 0,-1-2 0 0 0,2 1 234 0 0,0 2-247 0 0,0-1 1 0 0,-1 1-1 0 0,1-1 1 0 0,0 1-1 0 0,0-1 1 0 0,-1 1-1 0 0,1 0 1 0 0,0 0-1 0 0,-1 0 1 0 0,1 0-1 0 0,0 0 1 0 0,-1 0-1 0 0,1 0 1 0 0,-2 0 0 0 0,-5 3-3 0 0,0 0 1 0 0,0 1 0 0 0,0 0-1 0 0,1 0 1 0 0,-1 1 0 0 0,1 0 0 0 0,-11 10-1 0 0,14-12-15 0 0,1 1 0 0 0,0-1 0 0 0,0 1 0 0 0,1 0 0 0 0,-1 0 0 0 0,1 0 0 0 0,0 0 0 0 0,0 0 0 0 0,0 1 0 0 0,0-1-1 0 0,1 0 1 0 0,0 1 0 0 0,0-1 0 0 0,0 1 0 0 0,0 0 0 0 0,1-1 0 0 0,0 1 0 0 0,0 0 0 0 0,0 5 0 0 0,1-8-2 0 0,0 1-1 0 0,0 0 1 0 0,0 0 0 0 0,0-1 0 0 0,1 1 0 0 0,-1 0 0 0 0,1-1 0 0 0,-1 0 0 0 0,1 1 0 0 0,0-1 0 0 0,0 0 0 0 0,0 0 0 0 0,0 0 0 0 0,0 0 0 0 0,0 0 0 0 0,1 0-1 0 0,-1-1 1 0 0,1 1 0 0 0,-1-1 0 0 0,1 1 0 0 0,3 0 0 0 0,61 20 113 0 0,-49-18-87 0 0,1-1 0 0 0,0 0 0 0 0,0-2 0 0 0,0 0 0 0 0,32-3 0 0 0,-44 1-13 0 0,1 0-1 0 0,0 0 1 0 0,0 0-1 0 0,-1-1 1 0 0,1 0-1 0 0,-1 0 0 0 0,1-1 1 0 0,-1 0-1 0 0,0 0 1 0 0,0-1-1 0 0,-1 0 1 0 0,1 0-1 0 0,-1-1 1 0 0,0 0-1 0 0,0 0 1 0 0,8-8-1 0 0,-12 11-3 0 0,-1 0 0 0 0,0 1 0 0 0,1-1 1 0 0,-1 0-1 0 0,0 0 0 0 0,0 0 0 0 0,0 0 0 0 0,0 0 0 0 0,0 0 0 0 0,-1 0 1 0 0,1-1-1 0 0,-1 1 0 0 0,1 0 0 0 0,-1 0 0 0 0,0 0 0 0 0,0-1 0 0 0,0 1 0 0 0,0 0 1 0 0,0 0-1 0 0,0-1 0 0 0,0 1 0 0 0,-1 0 0 0 0,0 0 0 0 0,-1-4 0 0 0,0 3 0 0 0,0-1 1 0 0,-1 1-1 0 0,1 0 0 0 0,-1 0 0 0 0,0 1 0 0 0,0-1 0 0 0,0 1 0 0 0,0-1 0 0 0,0 1 0 0 0,0 0 0 0 0,-1 0 0 0 0,-6-3 0 0 0,-8-2 28 0 0,-1 1 0 0 0,1 1 0 0 0,-1 0 0 0 0,-25-2 0 0 0,38 6-4 0 0,1 0 0 0 0,0 0 0 0 0,0 0 1 0 0,0-1-1 0 0,-1 0 0 0 0,1 0 0 0 0,1 0 0 0 0,-9-5 0 0 0,11 6 3 0 0,6-2-68 0 0,-2 1 28 0 0,0 0 1 0 0,1 0 0 0 0,-1 0-1 0 0,1 1 1 0 0,0-1 0 0 0,0 1-1 0 0,-1-1 1 0 0,1 1-1 0 0,0 0 1 0 0,0 0 0 0 0,0 0-1 0 0,0 0 1 0 0,0 1 0 0 0,0-1-1 0 0,1 1 1 0 0,-1 0-1 0 0,0 0 1 0 0,4 0 0 0 0,4 1-1 0 0,292-14 14 0 0,-294 13-13 0 0,-6 0 3 0 0,-1 0 0 0 0,1 0 1 0 0,-1 0-1 0 0,1 0 0 0 0,0 1 0 0 0,-1-1 0 0 0,1 1 1 0 0,-1-1-1 0 0,1 1 0 0 0,-1 0 0 0 0,1 0 0 0 0,-1 0 1 0 0,5 3-1 0 0,-6-3-2 0 0,0 1 1 0 0,0 0 0 0 0,0-1 0 0 0,-1 1-1 0 0,1-1 1 0 0,0 1 0 0 0,-1 0 0 0 0,0 0-1 0 0,1-1 1 0 0,-1 1 0 0 0,0 0 0 0 0,0 0-1 0 0,0 0 1 0 0,0-1 0 0 0,0 1 0 0 0,0 0-1 0 0,0 0 1 0 0,-1 0 0 0 0,1-1 0 0 0,-1 1-1 0 0,1 0 1 0 0,-1-1 0 0 0,0 1-1 0 0,1 0 1 0 0,-1-1 0 0 0,0 1 0 0 0,-1 1-1 0 0,-2 5-2 0 0,0 0 0 0 0,1 0 0 0 0,0 1 0 0 0,0-1 0 0 0,1 1 0 0 0,1 0 0 0 0,-1-1 0 0 0,0 11 0 0 0,3-16 4 0 0,-1 0 1 0 0,1-1 0 0 0,-1 1 0 0 0,1 0 0 0 0,0 0 0 0 0,0-1 0 0 0,0 1-1 0 0,0-1 1 0 0,0 1 0 0 0,1-1 0 0 0,-1 1 0 0 0,1-1 0 0 0,-1 0 0 0 0,1 0 0 0 0,0 0-1 0 0,0 0 1 0 0,0 0 0 0 0,0 0 0 0 0,1 0 0 0 0,-1 0 0 0 0,0-1 0 0 0,1 0-1 0 0,-1 1 1 0 0,1-1 0 0 0,-1 0 0 0 0,1 0 0 0 0,0 0 0 0 0,-1 0 0 0 0,4 0-1 0 0,0 0 20 0 0,0 1 0 0 0,0-1 0 0 0,0 0 0 0 0,0-1 0 0 0,0 1 0 0 0,0-1 0 0 0,0 0 0 0 0,0-1 0 0 0,0 0 0 0 0,0 0 0 0 0,0 0 0 0 0,0 0 0 0 0,-1-1 0 0 0,1 0 0 0 0,0 0 0 0 0,-1-1 0 0 0,0 0 0 0 0,1 1 0 0 0,-1-2 0 0 0,0 1 0 0 0,0-1 0 0 0,-1 1 0 0 0,1-1 0 0 0,-1-1 0 0 0,0 1 0 0 0,6-9-1 0 0,-9 10 3 0 0,-1 0 0 0 0,0 1 0 0 0,0-1 0 0 0,0 0 0 0 0,0 0 0 0 0,-1 0 0 0 0,1 0 0 0 0,-1 1 0 0 0,1-1 0 0 0,-1 0-1 0 0,0 0 1 0 0,0 1 0 0 0,-1-1 0 0 0,1 1 0 0 0,-2-4 0 0 0,1 3-3 0 0,-4-7 39 0 0,0 0 1 0 0,0 1-1 0 0,-1 0 1 0 0,-12-13 0 0 0,4 4 26 0 0,-18-9 38 0 0,31 25-131 0 0,2 2-63 0 0,1-1 66 0 0,-1 1-1 0 0,0-1 0 0 0,0 0 0 0 0,0 1 0 0 0,0-1 0 0 0,1 1 1 0 0,-1-1-1 0 0,0 1 0 0 0,1-1 0 0 0,-1 1 0 0 0,0-1 1 0 0,1 1-1 0 0,-1-1 0 0 0,1 1 0 0 0,-1 0 0 0 0,0-1 0 0 0,1 1 1 0 0,-1-1-1 0 0,1 1 0 0 0,-1 0 0 0 0,1 0 0 0 0,0-1 1 0 0,-1 1-1 0 0,1 0 0 0 0,-1 0 0 0 0,1 0 0 0 0,-1-1 0 0 0,1 1 1 0 0,1 0-1 0 0,25-2-46 0 0,-13 1 40 0 0,266-6-75 0 0,-276 7 93 0 0,0 0 0 0 0,0 0 1 0 0,0 0-1 0 0,0 1 0 0 0,0 0 1 0 0,0-1-1 0 0,0 1 0 0 0,4 2 1 0 0,-7-3-9 0 0,0 1 1 0 0,-1-1 0 0 0,1 1 0 0 0,-1-1 0 0 0,0 0 0 0 0,1 1 0 0 0,-1-1-1 0 0,1 1 1 0 0,-1-1 0 0 0,1 1 0 0 0,-1-1 0 0 0,0 1 0 0 0,0-1 0 0 0,1 1-1 0 0,-1 0 1 0 0,0-1 0 0 0,0 1 0 0 0,1-1 0 0 0,-1 1 0 0 0,0 0 0 0 0,0-1-1 0 0,0 1 1 0 0,0 0 0 0 0,0-1 0 0 0,0 1 0 0 0,0-1 0 0 0,0 1 0 0 0,0 0-1 0 0,0-1 1 0 0,-1 1 0 0 0,1-1 0 0 0,0 1 0 0 0,0 0 0 0 0,-1-1 0 0 0,1 1-1 0 0,0-1 1 0 0,0 1 0 0 0,-1-1 0 0 0,1 1 0 0 0,-1-1 0 0 0,1 1 0 0 0,0-1-1 0 0,-2 1 1 0 0,-1 3 0 0 0,0 1-1 0 0,1-1 0 0 0,-1 1 1 0 0,1 0-1 0 0,0 0 1 0 0,0-1-1 0 0,0 1 1 0 0,1 0-1 0 0,0 1 0 0 0,0-1 1 0 0,0 0-1 0 0,0 0 1 0 0,1 1-1 0 0,0-1 0 0 0,0 0 1 0 0,0 0-1 0 0,1 1 1 0 0,0-1-1 0 0,0 0 0 0 0,0 0 1 0 0,1 0-1 0 0,-1 0 1 0 0,1 0-1 0 0,0 0 0 0 0,4 6 1 0 0,-2-5 1 0 0,1 0 0 0 0,0 0 0 0 0,0 0 0 0 0,0-1 0 0 0,1 0 0 0 0,-1 0 0 0 0,1 0 0 0 0,0-1 0 0 0,1 1 0 0 0,-1-2 0 0 0,1 1 0 0 0,0-1 0 0 0,0 0 0 0 0,0 0 1 0 0,14 3-1 0 0,-18-5 6 0 0,-1 0 0 0 0,1-1 0 0 0,0 0 0 0 0,-1 1 0 0 0,1-1 0 0 0,-1 0 0 0 0,1 0 0 0 0,0-1 0 0 0,-1 1 0 0 0,1 0 0 0 0,-1-1 0 0 0,1 0 0 0 0,-1 1 0 0 0,1-1 0 0 0,-1 0-1 0 0,0 0 1 0 0,1 0 0 0 0,-1-1 0 0 0,0 1 0 0 0,0-1 0 0 0,0 1 0 0 0,0-1 0 0 0,0 0 0 0 0,0 1 0 0 0,0-1 0 0 0,0 0 0 0 0,-1 0 0 0 0,1 0 0 0 0,-1-1 0 0 0,0 1 0 0 0,1 0 0 0 0,-1-1 0 0 0,0 1 0 0 0,1-5 0 0 0,0 3 42 0 0,-1-1-1 0 0,0 0 0 0 0,0 0 0 0 0,0 0 0 0 0,-1-1 0 0 0,1 1 0 0 0,-1 0 0 0 0,-1 0 0 0 0,1 0 0 0 0,0 0 0 0 0,-1 0 0 0 0,0 0 0 0 0,-1 0 1 0 0,1 0-1 0 0,-4-8 0 0 0,2 9-20 0 0,1 1 0 0 0,-1-1 1 0 0,0 1-1 0 0,0-1 1 0 0,-1 1-1 0 0,1 0 0 0 0,-1 0 1 0 0,1 1-1 0 0,-1-1 1 0 0,0 1-1 0 0,0 0 0 0 0,0 0 1 0 0,0 0-1 0 0,-1 0 0 0 0,1 1 1 0 0,0-1-1 0 0,-1 1 1 0 0,1 0-1 0 0,-5 0 0 0 0,-13-1-48 0 0,1 0 0 0 0,-40 4 0 0 0,24-1-526 0 0,34-1 2 0 0,-5-5-931 0 0</inkml:trace>
+  <inkml:trace contextRef="#ctx0" brushRef="#br0">11 91 5749 0 0,'0'-39'184'0'0,"-1"36"-107"0"0,-8-41 2209 0 0,9 39-1513 0 0,6 25-839 0 0,9 26 85 0 0,26 51 0 0 0,-2-4 11 0 0,-12 1 491 0 0,-15-125-5123 0 0,1 10 1468 0 0</inkml:trace>
 </inkml:ink>
 </file>
 
@@ -3718,15 +3879,15 @@
           <inkml:channelProperty channel="OE" name="resolution" value="1000" units="1/deg"/>
         </inkml:channelProperties>
       </inkml:inkSource>
-      <inkml:timestamp xml:id="ts0" timeString="2026-04-02T05:37:05.856"/>
+      <inkml:timestamp xml:id="ts0" timeString="2026-04-02T05:36:05.828"/>
     </inkml:context>
     <inkml:brush xml:id="br0">
-      <inkml:brushProperty name="width" value="0.2" units="cm"/>
-      <inkml:brushProperty name="height" value="0.2" units="cm"/>
+      <inkml:brushProperty name="width" value="0.1" units="cm"/>
+      <inkml:brushProperty name="height" value="0.1" units="cm"/>
       <inkml:brushProperty name="color" value="#FFC114"/>
     </inkml:brush>
   </inkml:definitions>
-  <inkml:trace contextRef="#ctx0" brushRef="#br0">0 90 5709 0 0,'33'-83'653'0'0,"-33"82"-480"0"0,4-4 907 0 0,-4 5-1060 0 0,28 87 90 0 0,52 117 0 0 0,-63-161 210 0 0,-17-41-126 0 0,0-2-166 0 0,0 0 0 0 0,1 1-1 0 0,-1-1 1 0 0,0 0-1 0 0,0 0 1 0 0,0 1 0 0 0,0-1-1 0 0,0 0 1 0 0,0 1 0 0 0,0-1-1 0 0,0 0 1 0 0,0 0-1 0 0,0 1 1 0 0,0-1 0 0 0,0 0-1 0 0,0 1 1 0 0,0-1-1 0 0,0 0 1 0 0,0 1 0 0 0,0-1-1 0 0,-1 0 1 0 0,1 0-1 0 0,0 1 1 0 0,0-1 0 0 0,0 0-1 0 0,0 0 1 0 0,0 1-1 0 0,-1-1 1 0 0,1 0 0 0 0,0 0-1 0 0,0 1 1 0 0,-1-1 0 0 0,1 0-1 0 0,0 0 1 0 0,0 0-1 0 0,-1 0 1 0 0,1 0 0 0 0,0 1-1 0 0,0-1 1 0 0,-1 0-1 0 0,1 0 1 0 0,0 0 0 0 0,-1 0-1 0 0,1 0 1 0 0,0 0-1 0 0,0 0 1 0 0,-1 0 0 0 0,1 0-1 0 0,0 0 1 0 0,-1 0 0 0 0,1 0-1 0 0,0 0 1 0 0,-1 0-1 0 0,1 0 1 0 0,-1 0 0 0 0,-3-2 13 0 0,-1-1 0 0 0,1 1 0 0 0,0-1 1 0 0,0 1-1 0 0,0-1 0 0 0,0 0 0 0 0,0-1 1 0 0,1 1-1 0 0,-1-1 0 0 0,1 0 0 0 0,0 1 0 0 0,0-1 1 0 0,0-1-1 0 0,1 1 0 0 0,-1 0 0 0 0,1-1 1 0 0,0 1-1 0 0,0-1 0 0 0,1 0 0 0 0,-2-5 1 0 0,1 2-20 0 0,1 0 0 0 0,0 0-1 0 0,0 0 1 0 0,1 0 0 0 0,0 0 0 0 0,0 0 0 0 0,1 0 0 0 0,0 0 0 0 0,0 0 0 0 0,1 0 0 0 0,0 1 0 0 0,1-1 0 0 0,-1 1 0 0 0,1-1 0 0 0,1 1 0 0 0,0 0-1 0 0,0 0 1 0 0,0 0 0 0 0,0 1 0 0 0,1-1 0 0 0,1 1 0 0 0,-1 0 0 0 0,1 1 0 0 0,7-7 0 0 0,-6 6-21 0 0,0 1 0 0 0,0 0 0 0 0,0 1 0 0 0,1-1 0 0 0,-1 1 0 0 0,1 1 1 0 0,0 0-1 0 0,0 0 0 0 0,1 0 0 0 0,-1 1 0 0 0,0 0 0 0 0,1 1 0 0 0,-1 0 0 0 0,1 0 0 0 0,0 1 0 0 0,-1 0 0 0 0,1 0 1 0 0,-1 1-1 0 0,1 0 0 0 0,-1 1 0 0 0,1 0 0 0 0,11 4 0 0 0,-6-1-1 0 0,-1 2-1 0 0,1-1 1 0 0,-1 2-1 0 0,0 0 1 0 0,-1 0-1 0 0,0 1 1 0 0,0 1-1 0 0,-1 0 1 0 0,0 0-1 0 0,-1 1 1 0 0,0 1-1 0 0,0-1 1 0 0,-2 2 0 0 0,1-1-1 0 0,-2 1 1 0 0,1 0-1 0 0,-2 1 1 0 0,0 0-1 0 0,6 20 1 0 0,-11-30-544 0 0,3 15 1405 0 0</inkml:trace>
+  <inkml:trace contextRef="#ctx0" brushRef="#br0">93 18 6741 0 0,'2'-10'-463'0'0,"-1"10"461"0"0,-1-1 1 0 0,0 1 0 0 0,0 0 0 0 0,0 0-1 0 0,0 0 1 0 0,0-1 0 0 0,0 1 0 0 0,0 0 0 0 0,0 0-1 0 0,0 0 1 0 0,0-1 0 0 0,0 1 0 0 0,0 0-1 0 0,0 0 1 0 0,0 0 0 0 0,0-1 0 0 0,0 1 0 0 0,0 0-1 0 0,0 0 1 0 0,0 0 0 0 0,0-1 0 0 0,0 1-1 0 0,0 0 1 0 0,0 0 0 0 0,0 0 0 0 0,0-1-1 0 0,-1 1 1 0 0,1 0 0 0 0,0 0 0 0 0,0 0 0 0 0,0 0-1 0 0,0-1 1 0 0,0 1 0 0 0,-1 0 0 0 0,1 0-1 0 0,0 0 1 0 0,0 0 0 0 0,0 0 0 0 0,-1 0 0 0 0,1-1-1 0 0,0 1 1 0 0,0 0 0 0 0,0 0 0 0 0,-1 0-1 0 0,1 0 1 0 0,0 0 0 0 0,0 0 0 0 0,0 0 0 0 0,-1 0-1 0 0,1 0 1 0 0,0 0 0 0 0,0 0 0 0 0,0 0-1 0 0,-1 0 1 0 0,1 0 0 0 0,0 0 0 0 0,-1 1 0 0 0,-5 1-4 0 0,1 1 1 0 0,-1 0 0 0 0,0 1 0 0 0,1-1 0 0 0,0 1-1 0 0,0 0 1 0 0,0 0 0 0 0,0 1 0 0 0,1 0 0 0 0,0 0 0 0 0,-1 0-1 0 0,2 0 1 0 0,-1 0 0 0 0,1 1 0 0 0,0-1 0 0 0,0 1-1 0 0,-2 7 1 0 0,3-6 0 0 0,0 0 0 0 0,1 1 0 0 0,0-1 1 0 0,0 1-1 0 0,1 0 0 0 0,0-1 0 0 0,0 1 0 0 0,1-1 0 0 0,0 1 0 0 0,1-1 0 0 0,2 9 0 0 0,-2-11 10 0 0,0 0-1 0 0,0 0 0 0 0,1-1 1 0 0,-1 1-1 0 0,1-1 1 0 0,0 1-1 0 0,1-1 0 0 0,-1 0 1 0 0,1 0-1 0 0,0-1 0 0 0,0 1 1 0 0,0-1-1 0 0,0 0 1 0 0,0 0-1 0 0,1 0 0 0 0,-1-1 1 0 0,7 3-1 0 0,0 0 89 0 0,0-1 0 0 0,0 0 0 0 0,0-1-1 0 0,1 0 1 0 0,-1 0 0 0 0,1-2 0 0 0,-1 1-1 0 0,1-2 1 0 0,0 1 0 0 0,14-3 0 0 0,-20 2-4 0 0,0-1 0 0 0,0 0 1 0 0,0-1-1 0 0,0 0 0 0 0,-1 1 1 0 0,1-2-1 0 0,-1 1 0 0 0,1-1 1 0 0,-1 0-1 0 0,0 0 0 0 0,0 0 1 0 0,0-1-1 0 0,-1 1 0 0 0,1-1 1 0 0,-1 0-1 0 0,0-1 0 0 0,0 1 1 0 0,0-1-1 0 0,-1 0 1 0 0,1 0-1 0 0,4-10 0 0 0,-7 12-37 0 0,1 1 1 0 0,-1-1-1 0 0,0 0 0 0 0,-1 0 1 0 0,1 0-1 0 0,0 0 0 0 0,-1 0 0 0 0,0 0 1 0 0,0 0-1 0 0,1 0 0 0 0,-2 0 0 0 0,1 0 1 0 0,0 0-1 0 0,-1 1 0 0 0,1-1 0 0 0,-1 0 1 0 0,0 0-1 0 0,0 0 0 0 0,-1-3 1 0 0,-1 1-7 0 0,-1-1 1 0 0,1 1 0 0 0,-1 1 0 0 0,1-1 0 0 0,-2 0 0 0 0,1 1-1 0 0,0 0 1 0 0,-1 0 0 0 0,-5-4 0 0 0,-6-2 1 0 0,0 0-1 0 0,-1 1 1 0 0,0 0 0 0 0,-1 2 0 0 0,-24-8-1 0 0,-16-5-197 0 0,56 19 43 0 0,32-7-8819 0 0</inkml:trace>
 </inkml:ink>
 </file>
 
@@ -3750,15 +3911,15 @@
           <inkml:channelProperty channel="OE" name="resolution" value="1000" units="1/deg"/>
         </inkml:channelProperties>
       </inkml:inkSource>
-      <inkml:timestamp xml:id="ts0" timeString="2026-04-02T05:37:06.449"/>
+      <inkml:timestamp xml:id="ts0" timeString="2026-04-02T05:36:06.377"/>
     </inkml:context>
     <inkml:brush xml:id="br0">
-      <inkml:brushProperty name="width" value="0.2" units="cm"/>
-      <inkml:brushProperty name="height" value="0.2" units="cm"/>
+      <inkml:brushProperty name="width" value="0.1" units="cm"/>
+      <inkml:brushProperty name="height" value="0.1" units="cm"/>
       <inkml:brushProperty name="color" value="#FFC114"/>
     </inkml:brush>
   </inkml:definitions>
-  <inkml:trace contextRef="#ctx0" brushRef="#br0">40 188 6269 0 0,'0'0'-25'0'0,"0"0"1"0"0,0 0 0 0 0,0 0-1 0 0,0 0 1 0 0,0 0 0 0 0,1 0-1 0 0,-1 0 1 0 0,0 1 0 0 0,0-1-1 0 0,0 0 1 0 0,0 0 0 0 0,1 0-98 0 0,-1 1 98 0 0,0-1 0 0 0,0 0-1 0 0,0 0 1 0 0,0 0 0 0 0,0 0-1 0 0,0 0 1 0 0,0 0 0 0 0,0 1-1 0 0,0-1 1 0 0,0 0 0 0 0,0 0-1 0 0,0 0 1 0 0,0 0 0 0 0,0 1-1 0 0,0-1 1 0 0,0 0 0 0 0,0 0-1 0 0,0 0 1 0 0,0 0 0 0 0,34-9-8 0 0,-20 4 112 0 0,-1 0-1 0 0,1-1 1 0 0,-1-1-1 0 0,15-10 1 0 0,-23 14-46 0 0,0-1 0 0 0,0 0 0 0 0,-1 0 0 0 0,1 0 1 0 0,-1 0-1 0 0,0-1 0 0 0,-1 1 0 0 0,1-1 0 0 0,-1 0 1 0 0,0 0-1 0 0,0-1 0 0 0,-1 1 0 0 0,1-1 0 0 0,-1 1 1 0 0,0-1-1 0 0,1-6 0 0 0,-3 10-19 0 0,0-1 1 0 0,-1 1-1 0 0,1-1 0 0 0,0 1 1 0 0,-1 0-1 0 0,0-1 0 0 0,1 1 0 0 0,-1 0 1 0 0,0 0-1 0 0,0-1 0 0 0,-1 1 1 0 0,1 0-1 0 0,0 0 0 0 0,-1 0 1 0 0,1 0-1 0 0,-1 0 0 0 0,1 1 1 0 0,-1-1-1 0 0,0 0 0 0 0,0 1 1 0 0,0-1-1 0 0,0 1 0 0 0,0 0 1 0 0,0 0-1 0 0,0 0 0 0 0,0 0 1 0 0,0 0-1 0 0,-1 0 0 0 0,1 0 0 0 0,0 1 1 0 0,-1-1-1 0 0,1 1 0 0 0,-1 0 1 0 0,1-1-1 0 0,0 1 0 0 0,-1 0 1 0 0,1 1-1 0 0,-5 0 0 0 0,-1-1 1 0 0,0 1-1 0 0,0 0 0 0 0,1 0 1 0 0,-1 1-1 0 0,0 0 0 0 0,1 0 1 0 0,0 1-1 0 0,0 0 0 0 0,-1 0 1 0 0,-10 7-1 0 0,13-6-8 0 0,1 0-1 0 0,-1-1 1 0 0,1 2 0 0 0,0-1-1 0 0,0 0 1 0 0,1 1-1 0 0,-1-1 1 0 0,1 1 0 0 0,0 0-1 0 0,0 0 1 0 0,1 1 0 0 0,-1-1-1 0 0,1 1 1 0 0,0-1-1 0 0,1 1 1 0 0,0-1 0 0 0,-1 1-1 0 0,2 0 1 0 0,-1 0 0 0 0,1 0-1 0 0,0-1 1 0 0,0 1-1 0 0,0 0 1 0 0,1 0 0 0 0,0 0-1 0 0,0-1 1 0 0,0 1 0 0 0,1 0-1 0 0,2 5 1 0 0,0-3 27 0 0,0 0-1 0 0,0 0 1 0 0,1-1 0 0 0,0 0 0 0 0,0 0-1 0 0,0 0 1 0 0,1 0 0 0 0,0-1 0 0 0,1 0-1 0 0,-1 0 1 0 0,1-1 0 0 0,0 0 0 0 0,0 0 0 0 0,1 0-1 0 0,-1-1 1 0 0,1 0 0 0 0,0-1 0 0 0,1 0-1 0 0,9 3 1 0 0,-4-3 44 0 0,1 0 1 0 0,-1 0-1 0 0,1-1 1 0 0,0-1-1 0 0,21-1 0 0 0,-28-1-447 0 0,1 0 1 0 0,0-1-1 0 0,-1 0 0 0 0,1 0 0 0 0,-1-1 1 0 0,0 0-1 0 0,0 0 0 0 0,0-1 0 0 0,0 0 1 0 0,10-8-1 0 0,-1 0-2145 0 0</inkml:trace>
+  <inkml:trace contextRef="#ctx0" brushRef="#br0">85 113 6021 0 0,'0'0'-288'0'0,"-5"3"-527"0"0,1 0 808 0 0,-1 1-1 0 0,1 0 1 0 0,0-1-1 0 0,0 2 1 0 0,0-1-1 0 0,1 0 1 0 0,-1 1-1 0 0,1 0 1 0 0,0-1-1 0 0,0 1 1 0 0,1 0-1 0 0,-1 1 1 0 0,1-1-1 0 0,0 0 1 0 0,1 1-1 0 0,-1-1 1 0 0,1 1-1 0 0,0 7 1 0 0,1-9 16 0 0,0 1 0 0 0,0 0 1 0 0,1-1-1 0 0,-1 1 0 0 0,1 0 0 0 0,1-1 1 0 0,-1 1-1 0 0,0-1 0 0 0,1 1 1 0 0,0-1-1 0 0,0 0 0 0 0,1 0 1 0 0,-1 0-1 0 0,1 0 0 0 0,0 0 1 0 0,0 0-1 0 0,0-1 0 0 0,0 1 1 0 0,0-1-1 0 0,1 0 0 0 0,0 0 0 0 0,0 0 1 0 0,7 4-1 0 0,-2-3 86 0 0,1 1 0 0 0,-1-1 0 0 0,1-1-1 0 0,0 0 1 0 0,0 0 0 0 0,0-1 0 0 0,0 0 0 0 0,0-1-1 0 0,1 0 1 0 0,-1 0 0 0 0,0-1 0 0 0,1-1-1 0 0,-1 0 1 0 0,0 0 0 0 0,0-1 0 0 0,15-4 0 0 0,-16 3 34 0 0,0 0 0 0 0,0 0 0 0 0,0 0 0 0 0,-1-1 1 0 0,0-1-1 0 0,0 0 0 0 0,0 0 0 0 0,0 0 0 0 0,-1-1 0 0 0,0 0 1 0 0,0 0-1 0 0,-1-1 0 0 0,1 0 0 0 0,-2 0 0 0 0,1 0 0 0 0,-1-1 1 0 0,0 0-1 0 0,6-13 0 0 0,-9 18-50 0 0,-1 0 0 0 0,0 0 0 0 0,-1 1 1 0 0,1-1-1 0 0,0 0 0 0 0,-1 0 0 0 0,1 0 0 0 0,-1 0 1 0 0,0 0-1 0 0,0 0 0 0 0,0 0 0 0 0,-1 0 0 0 0,1 0 1 0 0,-1 0-1 0 0,1 0 0 0 0,-1 0 0 0 0,0 0 0 0 0,0 0 1 0 0,-2-3-1 0 0,0 2-9 0 0,0 0-1 0 0,0 0 1 0 0,0 0 0 0 0,-1 0-1 0 0,1 1 1 0 0,-1-1 0 0 0,0 1 0 0 0,0 0-1 0 0,0 1 1 0 0,-8-5 0 0 0,-9-3 33 0 0,0 2 0 0 0,-1 1 0 0 0,0 0 0 0 0,-24-3 0 0 0,35 7-32 0 0,-57-9 133 0 0,47 10-648 0 0,-1-2 0 0 0,1 0-1 0 0,0-2 1 0 0,-22-8 0 0 0,41 13 91 0 0,0 0 0 0 0,1 1 1 0 0,-1-1-1 0 0,1 0 0 0 0,-1 0 0 0 0,1 0 0 0 0,-1 0 1 0 0,1-1-1 0 0,0 1 0 0 0,0 0 0 0 0,-1-1 1 0 0,1 1-1 0 0,0 0 0 0 0,0-1 0 0 0,-1-2 0 0 0</inkml:trace>
 </inkml:ink>
 </file>
 
@@ -3782,15 +3943,15 @@
           <inkml:channelProperty channel="OE" name="resolution" value="1000" units="1/deg"/>
         </inkml:channelProperties>
       </inkml:inkSource>
-      <inkml:timestamp xml:id="ts0" timeString="2026-04-02T05:37:07.038"/>
+      <inkml:timestamp xml:id="ts0" timeString="2026-04-02T05:36:07.737"/>
     </inkml:context>
     <inkml:brush xml:id="br0">
-      <inkml:brushProperty name="width" value="0.2" units="cm"/>
-      <inkml:brushProperty name="height" value="0.2" units="cm"/>
+      <inkml:brushProperty name="width" value="0.1" units="cm"/>
+      <inkml:brushProperty name="height" value="0.1" units="cm"/>
       <inkml:brushProperty name="color" value="#FFC114"/>
     </inkml:brush>
   </inkml:definitions>
-  <inkml:trace contextRef="#ctx0" brushRef="#br0">30 77 5985 0 0,'1'-4'73'0'0,"0"0"-1"0"0,0-1 1 0 0,-1 1 0 0 0,1 0 0 0 0,-1-1 0 0 0,0 1 0 0 0,0 0 0 0 0,-1-1 0 0 0,1 1 0 0 0,-1 0 0 0 0,0-1 0 0 0,0 1 0 0 0,0 0 0 0 0,0 0 0 0 0,-5-9 895 0 0,3 17-882 0 0,1-1-70 0 0,0 0 0 0 0,0 0 0 0 0,0 0 0 0 0,0 0 0 0 0,1 0 0 0 0,-1 0 1 0 0,1 0-1 0 0,0 1 0 0 0,0-1 0 0 0,0 0 0 0 0,0 1 0 0 0,1-1 0 0 0,0 1 0 0 0,-1-1 0 0 0,1 0 0 0 0,0 1 0 0 0,1-1 0 0 0,-1 1 0 0 0,0-1 0 0 0,1 1 0 0 0,0-1 0 0 0,0 0 0 0 0,0 1 0 0 0,0-1 0 0 0,1 0 0 0 0,-1 0 0 0 0,1 0 0 0 0,0 0 0 0 0,0 0 0 0 0,0 0 0 0 0,0 0 0 0 0,0-1 0 0 0,1 1 0 0 0,-1-1 0 0 0,1 1 0 0 0,0-1 0 0 0,-1 0 0 0 0,5 2 0 0 0,1 1 10 0 0,0 1 1 0 0,1-1-1 0 0,-1-1 1 0 0,1 0-1 0 0,1 0 0 0 0,-1 0 1 0 0,0-1-1 0 0,1-1 1 0 0,-1 0-1 0 0,1 0 0 0 0,0-1 1 0 0,0 0-1 0 0,10 0 0 0 0,-14-1-13 0 0,-1-1-1 0 0,1 0 0 0 0,0 0 0 0 0,0 0 0 0 0,0 0 0 0 0,-1-1 0 0 0,1 0 0 0 0,-1 0 0 0 0,1 0 0 0 0,-1-1 0 0 0,0 0 0 0 0,0 0 1 0 0,0 0-1 0 0,0-1 0 0 0,-1 0 0 0 0,1 0 0 0 0,-1 0 0 0 0,0 0 0 0 0,0-1 0 0 0,0 1 0 0 0,-1-1 0 0 0,0 0 0 0 0,0 0 0 0 0,0 0 0 0 0,2-8 1 0 0,-3 8-8 0 0,0 1 112 0 0,0 1 0 0 0,-1-1 0 0 0,0 0 0 0 0,0-1 0 0 0,0 1 0 0 0,-1 0 0 0 0,1-10 650 0 0,-17 36-676 0 0,14-19-85 0 0,0 0 0 0 0,0 0 0 0 0,1 1 1 0 0,0-1-1 0 0,-1 0 0 0 0,1 1 0 0 0,1-1 1 0 0,-1 0-1 0 0,0 1 0 0 0,1-1 0 0 0,0 1 1 0 0,0-1-1 0 0,0 1 0 0 0,0-1 0 0 0,0 1 0 0 0,1-1 1 0 0,-1 1-1 0 0,1-1 0 0 0,0 1 0 0 0,0-1 1 0 0,0 0-1 0 0,1 0 0 0 0,-1 1 0 0 0,1-1 1 0 0,0 0-1 0 0,0 0 0 0 0,0 0 0 0 0,3 3 1 0 0,0-1-16 0 0,0 1 0 0 0,0 0 0 0 0,1-1 0 0 0,0 0 1 0 0,0-1-1 0 0,1 1 0 0 0,-1-1 0 0 0,1 0 0 0 0,0-1 1 0 0,0 0-1 0 0,8 3 0 0 0,-4-3-300 0 0,1 0 0 0 0,-1-1 0 0 0,1-1 0 0 0,-1 0 0 0 0,23-1 0 0 0,25-10-4417 0 0,-39 3 1963 0 0</inkml:trace>
+  <inkml:trace contextRef="#ctx0" brushRef="#br0">66 93 5801 0 0,'-19'-37'-99'0'0,"18"31"297"0"0,-1 1 1 0 0,-1 0-1 0 0,1 0 0 0 0,-1 0 0 0 0,0 1 0 0 0,-6-9 0 0 0,7 12-40 0 0,3 1-146 0 0,-1-1 1 0 0,0 1-1 0 0,0-1 0 0 0,0 1 1 0 0,0 0-1 0 0,0-1 1 0 0,0 1-1 0 0,0 0 0 0 0,0-1 1 0 0,0 1-1 0 0,0 0 1 0 0,0-1-1 0 0,0 1 1 0 0,0 0-1 0 0,0-1 0 0 0,0 1 1 0 0,0 0-1 0 0,-1-1 1 0 0,1 1-1 0 0,0 0 0 0 0,0-1 1 0 0,0 1-1 0 0,0 0 1 0 0,-1-1-1 0 0,1 1 1 0 0,0 0-1 0 0,0 0 0 0 0,-1-1 1 0 0,1 1-1 0 0,0 0 1 0 0,0 0-1 0 0,-1-1 0 0 0,1 1 1 0 0,0 0-1 0 0,-1 0 1 0 0,1 0-1 0 0,0 0 1 0 0,-1 0-1 0 0,1 0 0 0 0,0-1 1 0 0,-1 1-1 0 0,1 0 1 0 0,-1 0-1 0 0,1 0 0 0 0,0 0 1 0 0,-1 0-1 0 0,1 0 1 0 0,0 0-1 0 0,-1 0 1 0 0,1 1-1 0 0,0-1 0 0 0,-1 0 1 0 0,1 0-1 0 0,0 0 1 0 0,-1 0-1 0 0,0 1-8 0 0,0-1 0 0 0,1 1 0 0 0,-1-1 0 0 0,0 1 0 0 0,1-1 0 0 0,-1 1 0 0 0,1 0-1 0 0,-1-1 1 0 0,1 1 0 0 0,-1 0 0 0 0,1-1 0 0 0,-1 1 0 0 0,1 0 0 0 0,0-1 0 0 0,-1 1 0 0 0,1 0 0 0 0,0 0 0 0 0,-1 0 0 0 0,1 0-1 0 0,0-1 1 0 0,0 1 0 0 0,0 0 0 0 0,0 0 0 0 0,0 1 0 0 0,11 57 79 0 0,23 72-1 0 0,-16-72-40 0 0,11 79 0 0 0,-23-88 184 0 0,-6-48-218 0 0,17-47-6675 0 0</inkml:trace>
 </inkml:ink>
 </file>
 
@@ -3814,15 +3975,15 @@
           <inkml:channelProperty channel="OE" name="resolution" value="1000" units="1/deg"/>
         </inkml:channelProperties>
       </inkml:inkSource>
-      <inkml:timestamp xml:id="ts0" timeString="2026-04-02T05:37:07.696"/>
+      <inkml:timestamp xml:id="ts0" timeString="2026-04-02T05:36:08.696"/>
     </inkml:context>
     <inkml:brush xml:id="br0">
-      <inkml:brushProperty name="width" value="0.2" units="cm"/>
-      <inkml:brushProperty name="height" value="0.2" units="cm"/>
+      <inkml:brushProperty name="width" value="0.1" units="cm"/>
+      <inkml:brushProperty name="height" value="0.1" units="cm"/>
       <inkml:brushProperty name="color" value="#FFC114"/>
     </inkml:brush>
   </inkml:definitions>
-  <inkml:trace contextRef="#ctx0" brushRef="#br0">12 205 6129 0 0,'-11'-44'-1179'0'0,"11"44"1204"0"0,0-1 1 0 0,0 0-1 0 0,0 0 0 0 0,0 0 1 0 0,0 0-1 0 0,1 0 1 0 0,-1 0-1 0 0,0 0 0 0 0,1 1 1 0 0,-1-1-1 0 0,1 0 0 0 0,-1 0 1 0 0,1 0-1 0 0,-1 1 1 0 0,1-1-1 0 0,-1 0 0 0 0,1 1 1 0 0,0-1-1 0 0,-1 0 1 0 0,1 1-1 0 0,0-1 0 0 0,0 1 1 0 0,-1-1-1 0 0,1 1 1 0 0,0-1-1 0 0,0 1 0 0 0,0 0 1 0 0,1-1-1 0 0,37-2 272 0 0,35 15-115 0 0,-61-8-155 0 0,0 1 0 0 0,0-1 0 0 0,0 2 0 0 0,-1 0 0 0 0,0 1 0 0 0,0 0 0 0 0,0 0 0 0 0,-1 2 0 0 0,12 9 0 0 0,-5 0 21 0 0,-1 1 1 0 0,-1 0 0 0 0,-1 1 0 0 0,15 25 0 0 0,-29-44-37 0 0,0 1 1 0 0,0-1 0 0 0,-1 0-1 0 0,1 1 1 0 0,0-1-1 0 0,-1 1 1 0 0,1 0 0 0 0,-1-1-1 0 0,1 1 1 0 0,-1 0 0 0 0,0-1-1 0 0,1 1 1 0 0,-1-1 0 0 0,0 1-1 0 0,0 0 1 0 0,0 0 0 0 0,-1-1-1 0 0,1 1 1 0 0,0-1-1 0 0,-1 1 1 0 0,1 0 0 0 0,-1-1-1 0 0,-1 3 1 0 0,1-1 14 0 0,-1-1 0 0 0,0 1 0 0 0,0-1-1 0 0,0 0 1 0 0,0 0 0 0 0,0 0 0 0 0,-1 0 0 0 0,1 0 0 0 0,0 0-1 0 0,-1-1 1 0 0,0 1 0 0 0,-4 1 0 0 0,3-1 56 0 0,-1 0-1 0 0,1 0 1 0 0,-1-1 0 0 0,1 0-1 0 0,-1 0 1 0 0,0 0 0 0 0,1 0-1 0 0,-1-1 1 0 0,0 1 0 0 0,0-1-1 0 0,0-1 1 0 0,1 1-1 0 0,-1-1 1 0 0,0 1 0 0 0,0-2-1 0 0,1 1 1 0 0,-6-2 0 0 0,8 1-46 0 0,0 1 0 0 0,0-1 0 0 0,1 1 0 0 0,-1-1 0 0 0,1 0 0 0 0,-1 1 0 0 0,1-1 0 0 0,0 0 0 0 0,0 0 0 0 0,0 0 0 0 0,0 0 0 0 0,0 0 0 0 0,0-1 0 0 0,0 1 0 0 0,1 0 0 0 0,-1 0 0 0 0,1 0 0 0 0,0-1 0 0 0,-1 1 0 0 0,1 0 0 0 0,0 0 0 0 0,0-1 0 0 0,1 1 0 0 0,-1 0 0 0 0,1-5 0 0 0,1-4 36 0 0,1 0 1 0 0,0 0-1 0 0,9-18 0 0 0,-3 10-29 0 0,0 0-1 0 0,2 1 1 0 0,0 0 0 0 0,2 1-1 0 0,0 1 1 0 0,0 0-1 0 0,1 0 1 0 0,1 2-1 0 0,20-16 1 0 0,-14 14-5 0 0,1 0 0 0 0,1 1 1 0 0,0 2-1 0 0,1 0 0 0 0,1 1 0 0 0,46-14 0 0 0,-70 25-32 0 0,0 1-1 0 0,1-1 0 0 0,-1 1 1 0 0,1 0-1 0 0,-1-1 0 0 0,1 1 1 0 0,-1 0-1 0 0,1 0 0 0 0,-1 0 1 0 0,1 0-1 0 0,-1 0 1 0 0,1 1-1 0 0,-1-1 0 0 0,1 0 1 0 0,-1 0-1 0 0,1 1 0 0 0,-1-1 1 0 0,1 1-1 0 0,-1 0 0 0 0,3 1 1 0 0,-1 0 23 0 0,-6 1-1 0 0,-8 9-51 0 0,0-1 0 0 0,0 0 0 0 0,-24 17-1 0 0,1-8-3582 0 0</inkml:trace>
+  <inkml:trace contextRef="#ctx0" brushRef="#br0">17 23 5857 0 0,'-11'-11'-275'0'0,"11"11"303"0"0,0 0 1 0 0,-1 0 0 0 0,1 0-1 0 0,0 0 1 0 0,-1-1 0 0 0,1 1-1 0 0,0 0 1 0 0,0 0 0 0 0,-1 0-1 0 0,1-1 1 0 0,0 1 0 0 0,0 0-1 0 0,-1 0 1 0 0,1-1 0 0 0,0 1-1 0 0,0 0 1 0 0,0-1 0 0 0,0 1-1 0 0,-1 0 1 0 0,1-1 0 0 0,0 1-1 0 0,0 0 1 0 0,0-1 0 0 0,0 1 0 0 0,0 0-1 0 0,0-1 1 0 0,0 1 0 0 0,0 0-1 0 0,0-1 1 0 0,0 1 0 0 0,0 0-1 0 0,0-1 1 0 0,0 1 0 0 0,0 0-1 0 0,0-1 1 0 0,0 1 0 0 0,0 0-1 0 0,1-1 1 0 0,-1 1 0 0 0,37 0-27 0 0,0 1 1 0 0,-1 3 0 0 0,1 1-1 0 0,-1 1 1 0 0,43 14 0 0 0,3-1 9 0 0,-68-16-9 0 0,0 0-1 0 0,0 1 0 0 0,0 1 0 0 0,-1 0 1 0 0,0 1-1 0 0,0 1 0 0 0,17 10 0 0 0,-29-16-1 0 0,0 0-1 0 0,0 0 1 0 0,1-1-1 0 0,-1 1 1 0 0,0 0-1 0 0,0 0 0 0 0,0 0 1 0 0,-1 0-1 0 0,1 0 1 0 0,0 0-1 0 0,0 0 1 0 0,0 1-1 0 0,-1-1 0 0 0,1 0 1 0 0,-1 0-1 0 0,1 1 1 0 0,-1-1-1 0 0,1 0 1 0 0,-1 1-1 0 0,0-1 1 0 0,1 0-1 0 0,-1 1 0 0 0,0-1 1 0 0,0 0-1 0 0,0 1 1 0 0,0-1-1 0 0,0 1 1 0 0,-1-1-1 0 0,1 0 1 0 0,0 1-1 0 0,-1-1 0 0 0,1 0 1 0 0,-1 0-1 0 0,1 1 1 0 0,-1-1-1 0 0,1 0 1 0 0,-1 0-1 0 0,0 1 1 0 0,0-1-1 0 0,0 0 0 0 0,0 0 1 0 0,0 0-1 0 0,0 0 1 0 0,0 0-1 0 0,0-1 1 0 0,0 1-1 0 0,0 0 1 0 0,0 0-1 0 0,0-1 0 0 0,-2 2 1 0 0,-6 3 14 0 0,0 1 0 0 0,-1-1-1 0 0,0 0 1 0 0,-14 4 0 0 0,-33 7 598 0 0,0-2 0 0 0,-1-2 0 0 0,-71 4 0 0 0,140-16-617 0 0,1-1 0 0 0,0 2 0 0 0,0 0 0 0 0,-1 0 0 0 0,1 1 0 0 0,-1 1 0 0 0,1 0 0 0 0,-1 0 0 0 0,19 9 0 0 0,101 53-39 0 0,269 142 72 0 0,-397-206-7 0 0,0 1 0 0 0,0 0 0 0 0,0 0 0 0 0,-1 0 0 0 0,1 0 0 0 0,-1 1 0 0 0,1-1 0 0 0,3 6 0 0 0,-5-7 46 0 0,-5-29-4966 0 0,8 9 2116 0 0</inkml:trace>
 </inkml:ink>
 </file>
 
@@ -3846,15 +4007,15 @@
           <inkml:channelProperty channel="OE" name="resolution" value="1000" units="1/deg"/>
         </inkml:channelProperties>
       </inkml:inkSource>
-      <inkml:timestamp xml:id="ts0" timeString="2026-04-02T05:37:08.914"/>
+      <inkml:timestamp xml:id="ts0" timeString="2026-04-02T05:36:13.468"/>
     </inkml:context>
     <inkml:brush xml:id="br0">
-      <inkml:brushProperty name="width" value="0.2" units="cm"/>
-      <inkml:brushProperty name="height" value="0.2" units="cm"/>
+      <inkml:brushProperty name="width" value="0.1" units="cm"/>
+      <inkml:brushProperty name="height" value="0.1" units="cm"/>
       <inkml:brushProperty name="color" value="#FFC114"/>
     </inkml:brush>
   </inkml:definitions>
-  <inkml:trace contextRef="#ctx0" brushRef="#br0">62 105 6477 0 0,'-23'10'-285'0'0,"20"-9"291"0"0,0 1 1 0 0,1 0 0 0 0,-1 0-1 0 0,0 0 1 0 0,1 0-1 0 0,0 0 1 0 0,-1 0-1 0 0,1 1 1 0 0,0-1-1 0 0,0 1 1 0 0,1 0-1 0 0,-1-1 1 0 0,0 1-1 0 0,1 0 1 0 0,0 0 0 0 0,-1 0-1 0 0,0 3 1 0 0,2-3 11 0 0,0 0 1 0 0,0-1-1 0 0,0 1 1 0 0,0-1 0 0 0,0 1-1 0 0,1-1 1 0 0,-1 1-1 0 0,1-1 1 0 0,0 1 0 0 0,-1-1-1 0 0,1 1 1 0 0,0-1-1 0 0,1 0 1 0 0,-1 1 0 0 0,0-1-1 0 0,3 4 1 0 0,1 0 39 0 0,1-1 0 0 0,-1 1 1 0 0,1-1-1 0 0,0 0 0 0 0,0 0 1 0 0,1 0-1 0 0,-1-1 0 0 0,1 0 0 0 0,0-1 1 0 0,0 1-1 0 0,11 2 0 0 0,-2-1 23 0 0,1-1 1 0 0,-1-1-1 0 0,1 0 0 0 0,0-1 0 0 0,33-1 0 0 0,-46-1-65 0 0,0 0-1 0 0,0 0 0 0 0,0-1 0 0 0,0 1 1 0 0,-1-1-1 0 0,1 0 0 0 0,0 0 1 0 0,0 0-1 0 0,-1 0 0 0 0,1-1 1 0 0,-1 1-1 0 0,1-1 0 0 0,-1 0 1 0 0,1 0-1 0 0,-1 0 0 0 0,0-1 0 0 0,0 1 1 0 0,0-1-1 0 0,-1 0 0 0 0,1 1 1 0 0,0-1-1 0 0,-1 0 0 0 0,0-1 1 0 0,0 1-1 0 0,0 0 0 0 0,0-1 1 0 0,0 1-1 0 0,-1-1 0 0 0,0 1 1 0 0,1-1-1 0 0,-1 0 0 0 0,0-4 0 0 0,0 4 2 0 0,-1 1 0 0 0,0 0 0 0 0,0-1 0 0 0,-1 1 0 0 0,1-1-1 0 0,0 1 1 0 0,-1 0 0 0 0,0 0 0 0 0,0-1 0 0 0,0 1-1 0 0,0 0 1 0 0,-1 0 0 0 0,1 0 0 0 0,-1 0 0 0 0,0 0 0 0 0,0 0-1 0 0,0 1 1 0 0,0-1 0 0 0,0 1 0 0 0,0-1 0 0 0,-1 1 0 0 0,1 0-1 0 0,-1 0 1 0 0,0 0 0 0 0,0 0 0 0 0,-5-3 0 0 0,-7-2 13 0 0,0 1 1 0 0,-1 0 0 0 0,1 1 0 0 0,-21-5-1 0 0,8 3 26 0 0,25 6-43 0 0,0 0 11 0 0,2 1-22 0 0,0 0 0 0 0,0 0 0 0 0,0 0 0 0 0,0 0 0 0 0,0 0 0 0 0,0 0 1 0 0,-1 0-1 0 0,1-1 0 0 0,0 1 0 0 0,0 0 0 0 0,0-1 0 0 0,0 1 0 0 0,0-1 0 0 0,0 1 1 0 0,1-1-1 0 0,-1 0 0 0 0,0 1 0 0 0,-1-2 0 0 0,0 0 20 0 0,5-1-17 0 0,-2 1-5 0 0,1 0 1 0 0,-1 0-1 0 0,1 1 1 0 0,0-1-1 0 0,0 0 0 0 0,-1 0 1 0 0,1 1-1 0 0,0-1 1 0 0,0 1-1 0 0,0 0 1 0 0,1-1-1 0 0,-1 1 0 0 0,0 0 1 0 0,0 0-1 0 0,1 1 1 0 0,-1-1-1 0 0,1 0 0 0 0,-1 1 1 0 0,1-1-1 0 0,-1 1 1 0 0,3 0-1 0 0,6-1 1 0 0,196-15 80 0 0,-204 15-41 0 0,-1 1-2 0 0,53-9 796 0 0,-53 10-839 0 0,0 0 0 0 0,0 0-1 0 0,-1 0 1 0 0,1 0 0 0 0,-1 1 0 0 0,1-1-1 0 0,-1 0 1 0 0,0 1 0 0 0,1 0 0 0 0,-1-1-1 0 0,0 1 1 0 0,0 0 0 0 0,0-1 0 0 0,0 1-1 0 0,0 0 1 0 0,-1 0 0 0 0,2 4 0 0 0,10 39-24 0 0,-9-35 40 0 0,32 101 55 0 0,-35-110-47 0 0,1 0 1 0 0,-1 0 0 0 0,1 0 0 0 0,-1 0 0 0 0,0-1-1 0 0,0 1 1 0 0,1 0 0 0 0,-1 0 0 0 0,0 0 0 0 0,0 0-1 0 0,0 0 1 0 0,0 0 0 0 0,0 0 0 0 0,0-1 0 0 0,0 1-1 0 0,0 0 1 0 0,-1 0 0 0 0,1 0 0 0 0,0 0 0 0 0,-1 0-1 0 0,1 0 1 0 0,0-1 0 0 0,-1 1 0 0 0,1 0 0 0 0,-1 0-1 0 0,1-1 1 0 0,-1 1 0 0 0,1 0 0 0 0,-1-1 0 0 0,0 1-1 0 0,1 0 1 0 0,-1-1 0 0 0,0 1 0 0 0,1-1 0 0 0,-1 1-1 0 0,0-1 1 0 0,0 1 0 0 0,0-1 0 0 0,1 0 0 0 0,-1 1 0 0 0,0-1-1 0 0,0 0 1 0 0,0 0 0 0 0,0 1 0 0 0,0-1 0 0 0,1 0-1 0 0,-1 0 1 0 0,0 0 0 0 0,0 0 0 0 0,0 0 0 0 0,0 0-1 0 0,0-1 1 0 0,0 1 0 0 0,0 0 0 0 0,1 0 0 0 0,-1-1-1 0 0,-1 0 1 0 0,-1 1 21 0 0,0-1-1 0 0,1 0 1 0 0,-1 0-1 0 0,1 0 0 0 0,0-1 1 0 0,-1 1-1 0 0,1 0 1 0 0,0-1-1 0 0,-1 0 1 0 0,1 0-1 0 0,0 1 1 0 0,0-1-1 0 0,1 0 0 0 0,-1 0 1 0 0,0-1-1 0 0,1 1 1 0 0,-1 0-1 0 0,1-1 1 0 0,-2-3-1 0 0,2-1 2 0 0,0 0 0 0 0,1 1-1 0 0,0-1 1 0 0,0 0 0 0 0,1 0-1 0 0,0 0 1 0 0,0 0 0 0 0,0 0-1 0 0,1 1 1 0 0,0-1 0 0 0,1 0 0 0 0,-1 1-1 0 0,1 0 1 0 0,0-1 0 0 0,1 1-1 0 0,-1 1 1 0 0,1-1 0 0 0,1 0 0 0 0,-1 1-1 0 0,1 0 1 0 0,-1 0 0 0 0,2 0-1 0 0,-1 1 1 0 0,0-1 0 0 0,12-6 0 0 0,-9 6-31 0 0,0-1 1 0 0,0 2 0 0 0,1-1-1 0 0,-1 1 1 0 0,1 0 0 0 0,0 1-1 0 0,0 0 1 0 0,0 0 0 0 0,1 1 0 0 0,-1 0-1 0 0,0 1 1 0 0,1 0 0 0 0,0 0-1 0 0,-1 1 1 0 0,1 0 0 0 0,-1 1-1 0 0,1 0 1 0 0,14 4 0 0 0,-17-2-7 0 0,0-1 0 0 0,0 2 1 0 0,-1-1-1 0 0,1 1 0 0 0,-1 0 1 0 0,1 0-1 0 0,-1 1 0 0 0,0 0 0 0 0,-1 0 1 0 0,1 0-1 0 0,-1 1 0 0 0,0-1 1 0 0,4 8-1 0 0,1 4-29 0 0,-1 1 0 0 0,0 0 0 0 0,9 30 0 0 0,-14-39-15 0 0,-4-4-623 0 0,3 6 241 0 0,46-23-9885 0 0</inkml:trace>
+  <inkml:trace contextRef="#ctx0" brushRef="#br0">298 16 4428 0 0,'0'0'-258'0'0,"-7"-1"-348"0"0,-18-6 639 0 0,18 6-24 0 0,-31-4 35 0 0,35 4-40 0 0,0 1-1 0 0,0 0 1 0 0,0-1-1 0 0,0 1 0 0 0,0 1 1 0 0,0-1-1 0 0,0 0 1 0 0,0 1-1 0 0,0-1 1 0 0,-5 2-1 0 0,-25 6 28 0 0,26-6-29 0 0,0-1 0 0 0,0 2 0 0 0,0-1 0 0 0,0 1 0 0 0,0 0 0 0 0,0 1 0 0 0,1 0 0 0 0,0 0 1 0 0,0 0-1 0 0,0 0 0 0 0,0 1 0 0 0,0 0 0 0 0,1 1 0 0 0,0-1 0 0 0,0 1 0 0 0,1 0 0 0 0,0 0 0 0 0,0 0 0 0 0,0 1 0 0 0,1-1 0 0 0,-1 1 0 0 0,-3 12 0 0 0,2-1 16 0 0,1 0-1 0 0,0 0 0 0 0,1 1 1 0 0,1-1-1 0 0,1 1 0 0 0,1 0 1 0 0,0-1-1 0 0,4 20 0 0 0,-3-31 8 0 0,1 0 1 0 0,0-1-1 0 0,0 1 0 0 0,1-1 0 0 0,0 1 0 0 0,0-1 0 0 0,0 0 0 0 0,1 0 0 0 0,0 0 0 0 0,0-1 0 0 0,0 0 0 0 0,1 1 1 0 0,0-1-1 0 0,0-1 0 0 0,0 1 0 0 0,1-1 0 0 0,-1 0 0 0 0,1 0 0 0 0,0-1 0 0 0,0 1 0 0 0,1-1 0 0 0,-1-1 0 0 0,9 3 1 0 0,8 4 152 0 0,2-2 1 0 0,-1 0 0 0 0,1-2 0 0 0,49 4-1 0 0,-72-8-112 0 0,1-1-1 0 0,0 0 1 0 0,-1 0-1 0 0,1 0 0 0 0,0 0 1 0 0,-1 0-1 0 0,1 0 0 0 0,0-1 1 0 0,-1 1-1 0 0,1-1 0 0 0,-1 0 1 0 0,1 0-1 0 0,-1 0 0 0 0,1 0 1 0 0,-1 0-1 0 0,0 0 0 0 0,1-1 1 0 0,-1 1-1 0 0,0-1 0 0 0,0 0 1 0 0,0 0-1 0 0,0 0 0 0 0,0 1 1 0 0,2-5-1 0 0,-3 3-45 0 0,0 1 1 0 0,0 0-1 0 0,-1-1 1 0 0,1 1-1 0 0,-1 0 0 0 0,1-1 1 0 0,-1 1-1 0 0,0-1 0 0 0,0 1 1 0 0,0-1-1 0 0,0 1 0 0 0,-1-1 1 0 0,1 1-1 0 0,-1 0 0 0 0,1-1 1 0 0,-1 1-1 0 0,0 0 1 0 0,0-1-1 0 0,0 1 0 0 0,0 0 1 0 0,0 0-1 0 0,0 0 0 0 0,-1 0 1 0 0,1 0-1 0 0,-3-2 0 0 0,-1-1-10 0 0,0 0-1 0 0,-1 1 1 0 0,0-1-1 0 0,0 1 1 0 0,0 0-1 0 0,0 1 1 0 0,-1 0-1 0 0,0 0 1 0 0,-10-4-1 0 0,-20-10 71 0 0,35 17-59 0 0,1-1-27 0 0,0 1-1 0 0,1-1 0 0 0,-1 1 0 0 0,0-1 1 0 0,0 1-1 0 0,0-1 0 0 0,1 1 1 0 0,-1-1-1 0 0,0 1 0 0 0,1-1 0 0 0,-1 0 1 0 0,0 0-1 0 0,1 1 0 0 0,-1-1 0 0 0,1 0 1 0 0,0 0-1 0 0,-1 0 0 0 0,1 1 1 0 0,-1-1-1 0 0,1 0 0 0 0,0 0 0 0 0,-1-1 1 0 0,10-2-14 0 0,1 0 1 0 0,-1 1 0 0 0,1 0-1 0 0,-1 1 1 0 0,1 0-1 0 0,0 0 1 0 0,0 1 0 0 0,11 0-1 0 0,27-4-5 0 0,-45 4 19 0 0,33-1-22 0 0,-21 2 15 0 0,-12 0-2 0 0,19 14-223 0 0,-21 37 215 0 0,2 0-1 0 0,12 64 1 0 0,-14-106 47 0 0,0-1 0 0 0,0 1 0 0 0,-1 0 0 0 0,0-1 0 0 0,-2 12 0 0 0,2-18 21 0 0,-1 4 317 0 0,15-27-6110 0 0</inkml:trace>
 </inkml:ink>
 </file>
 
@@ -3878,15 +4039,15 @@
           <inkml:channelProperty channel="OE" name="resolution" value="1000" units="1/deg"/>
         </inkml:channelProperties>
       </inkml:inkSource>
-      <inkml:timestamp xml:id="ts0" timeString="2026-04-02T05:37:09.364"/>
+      <inkml:timestamp xml:id="ts0" timeString="2026-04-02T05:36:14.564"/>
     </inkml:context>
     <inkml:brush xml:id="br0">
-      <inkml:brushProperty name="width" value="0.2" units="cm"/>
-      <inkml:brushProperty name="height" value="0.2" units="cm"/>
+      <inkml:brushProperty name="width" value="0.1" units="cm"/>
+      <inkml:brushProperty name="height" value="0.1" units="cm"/>
       <inkml:brushProperty name="color" value="#FFC114"/>
     </inkml:brush>
   </inkml:definitions>
-  <inkml:trace contextRef="#ctx0" brushRef="#br0">122 7 7077 0 0,'2'-6'187'0'0,"-5"16"-135"0"0,2-8-45 0 0,1 0 0 0 0,0 1 0 0 0,0-1-1 0 0,0 0 1 0 0,1 1 0 0 0,-1-1-1 0 0,0 0 1 0 0,1 1 0 0 0,0-1 0 0 0,-1 0-1 0 0,1 0 1 0 0,0 0 0 0 0,0 1-1 0 0,0-1 1 0 0,0 0 0 0 0,1 0 0 0 0,2 3-1 0 0,5 3 46 0 0,0 0-1 0 0,0 0 0 0 0,19 11 1 0 0,-21-15-21 0 0,-1 0 0 0 0,1 0 0 0 0,-1 0 1 0 0,0 1-1 0 0,0 0 0 0 0,0 0 0 0 0,-1 1 1 0 0,0 0-1 0 0,0 0 0 0 0,0 0 0 0 0,4 8 0 0 0,-9-12-16 0 0,1-1 0 0 0,-1 1 0 0 0,0 0 0 0 0,0-1 0 0 0,0 1 0 0 0,0 0 0 0 0,0 0 0 0 0,0-1-1 0 0,-1 1 1 0 0,1 0 0 0 0,0-1 0 0 0,-1 1 0 0 0,0 0 0 0 0,1-1 0 0 0,-1 1 0 0 0,0-1 0 0 0,0 1 0 0 0,1-1-1 0 0,-1 1 1 0 0,0-1 0 0 0,-1 0 0 0 0,1 1 0 0 0,0-1 0 0 0,0 0 0 0 0,-1 0 0 0 0,1 0 0 0 0,0 0 0 0 0,-4 2-1 0 0,-47 24 121 0 0,45-23-100 0 0,-29 10 75 0 0,-1 0-1 0 0,-55 11 0 0 0,91-24-113 0 0,0-1-143 0 0,0 0 116 0 0,1 0 1 0 0,-1 0 0 0 0,1 0-1 0 0,-1 0 1 0 0,1 0 0 0 0,-1 0-1 0 0,1 0 1 0 0,-1 0 0 0 0,1 0-1 0 0,-1 0 1 0 0,1 0 0 0 0,-1-1-1 0 0,1 1 1 0 0,-1 0 0 0 0,1 0-1 0 0,-1 0 1 0 0,1-1 0 0 0,-1 1-1 0 0,1 0 1 0 0,0-1 0 0 0,-1 1 0 0 0,1 0-1 0 0,-1-1 1 0 0,1 1 0 0 0,0 0-1 0 0,0-1 1 0 0,-1 1 0 0 0,1-1-1 0 0,0 1 1 0 0,-1 0 0 0 0,1-1-1 0 0,0 1 1 0 0,0-1 0 0 0,0 1-1 0 0,0-1 1 0 0,0 1 0 0 0,-1-1-1 0 0,1 1 1 0 0,0-1 0 0 0,0 1-1 0 0,0-1 1 0 0,0 1 0 0 0,0-1 0 0 0,0 1-1 0 0,1-1 1 0 0,-1 1 0 0 0,0-1-1 0 0,0 1 1 0 0,0-1 0 0 0,1 0-1 0 0,15-24-3084 0 0,-5 15 837 0 0</inkml:trace>
+  <inkml:trace contextRef="#ctx0" brushRef="#br0">0 0 5044 0 0,'8'134'-386'0'0,"23"68"574"0"0,-28-171 177 0 0,-3-24-3019 0 0,5-40 1953 0 0</inkml:trace>
 </inkml:ink>
 </file>
 
@@ -3910,15 +4071,15 @@
           <inkml:channelProperty channel="OE" name="resolution" value="1000" units="1/deg"/>
         </inkml:channelProperties>
       </inkml:inkSource>
-      <inkml:timestamp xml:id="ts0" timeString="2026-04-02T05:37:09.928"/>
+      <inkml:timestamp xml:id="ts0" timeString="2026-04-02T05:36:15.738"/>
     </inkml:context>
     <inkml:brush xml:id="br0">
-      <inkml:brushProperty name="width" value="0.2" units="cm"/>
-      <inkml:brushProperty name="height" value="0.2" units="cm"/>
+      <inkml:brushProperty name="width" value="0.1" units="cm"/>
+      <inkml:brushProperty name="height" value="0.1" units="cm"/>
       <inkml:brushProperty name="color" value="#FFC114"/>
     </inkml:brush>
   </inkml:definitions>
-  <inkml:trace contextRef="#ctx0" brushRef="#br0">1 17 5513 0 0,'0'-1'-7'0'0,"0"0"0"0"0,0 1 1 0 0,0-1-1 0 0,0 0 1 0 0,0 0-1 0 0,0 1 1 0 0,0-1-1 0 0,1 0 0 0 0,-1 0 1 0 0,0 1-1 0 0,0-1 1 0 0,1 0-1 0 0,-1 1 1 0 0,1-1-1 0 0,-1 0 1 0 0,1 1-1 0 0,-1-1 0 0 0,1 1 1 0 0,-1-1-1 0 0,1 0 1 0 0,-1 1-1 0 0,1-1 1 0 0,0 1-1 0 0,0-1 0 0 0,20 4 180 0 0,-1 2 0 0 0,0 0 0 0 0,-1 1-1 0 0,34 14 1 0 0,76 46 306 0 0,-97-49-342 0 0,-2 2 0 0 0,0 2 1 0 0,53 46-1 0 0,-74-59-97 0 0,-1-1 0 0 0,-1 1 0 0 0,0 1 0 0 0,0-1 0 0 0,0 1 1 0 0,-1 0-1 0 0,0 1 0 0 0,-1 0 0 0 0,0-1 0 0 0,-1 2 0 0 0,0-1 0 0 0,-1 0 0 0 0,0 1 1 0 0,0 0-1 0 0,-1-1 0 0 0,0 1 0 0 0,0 16 0 0 0,-4-17-14 0 0,0 0 0 0 0,0 0 0 0 0,-1-1-1 0 0,0 1 1 0 0,0-1 0 0 0,-1 1 0 0 0,-1-1 0 0 0,1-1 0 0 0,-1 1 0 0 0,-1-1-1 0 0,0 1 1 0 0,0-2 0 0 0,0 1 0 0 0,-1-1 0 0 0,-10 9 0 0 0,-15 12 48 0 0,-2-2 0 0 0,-43 27 0 0 0,62-44-49 0 0,10-5-80 0 0,-32 20 54 0 0,0-1 0 0 0,-42 18 0 0 0,9-19-2786 0 0,60-21 864 0 0</inkml:trace>
+  <inkml:trace contextRef="#ctx0" brushRef="#br0">10 16 3172 0 0,'0'0'-187'0'0,"-7"-1"-152"0"0,7 1 363 0 0,0 0 0 0 0,0 0 0 0 0,0 0 1 0 0,0-1-1 0 0,0 1 0 0 0,0 0 0 0 0,0 0 0 0 0,0 0 0 0 0,0 0 1 0 0,0 0-1 0 0,0 0 0 0 0,0 0 0 0 0,0 0 0 0 0,0 0 0 0 0,0-1 1 0 0,0 1-1 0 0,0 0 0 0 0,0 0 0 0 0,0 0 0 0 0,0 0 0 0 0,0 0 1 0 0,0 0-1 0 0,0 0 0 0 0,0 0 0 0 0,0-1 0 0 0,0 1 0 0 0,0 0 1 0 0,0 0-1 0 0,0 0 0 0 0,0 0 0 0 0,0 0 0 0 0,0 0 1 0 0,0 0-1 0 0,0 0 0 0 0,0 0 0 0 0,0 0 0 0 0,0-1 0 0 0,0 1 1 0 0,0 0-1 0 0,-1 0 0 0 0,1 0 0 0 0,0 0 0 0 0,0 0 0 0 0,0 0 1 0 0,0 0-1 0 0,0 0 0 0 0,0 0 0 0 0,0 0 0 0 0,0 0 0 0 0,0 0 1 0 0,-1 0-1 0 0,1 0 0 0 0,0 0 0 0 0,0 0 0 0 0,0 0 1 0 0,0 0-1 0 0,0 0 0 0 0,0 0 0 0 0,0 0 0 0 0,-1 0 0 0 0,16-8 84 0 0,-11 6 71 0 0,37 2 184 0 0,49 14-73 0 0,-73-13-273 0 0,-1 1 1 0 0,1 0 0 0 0,-1 1 0 0 0,0 1 0 0 0,0 1 0 0 0,0 0 0 0 0,20 10-1 0 0,-35-15-18 0 0,0 1 0 0 0,-1-1 0 0 0,1 1 0 0 0,0 0 0 0 0,0-1 0 0 0,0 1 0 0 0,-1 0 0 0 0,1 0 0 0 0,0-1 0 0 0,-1 1 0 0 0,1 0 0 0 0,-1 0-1 0 0,1 0 1 0 0,-1 0 0 0 0,1 0 0 0 0,-1 0 0 0 0,0 0 0 0 0,1 0 0 0 0,-1 0 0 0 0,0 0 0 0 0,0 0 0 0 0,0 0 0 0 0,0 0 0 0 0,0 0 0 0 0,0 2-1 0 0,0 1 4 0 0,-1 0-1 0 0,0 0 1 0 0,0 0-1 0 0,0-1 1 0 0,-1 1-1 0 0,0 0 1 0 0,1 0-1 0 0,-1-1 1 0 0,0 1-1 0 0,-1-1 1 0 0,1 1-1 0 0,-1-1 1 0 0,1 0-1 0 0,-4 3 1 0 0,-46 38 40 0 0,31-35 20 0 0,0-2-1 0 0,-1 0 1 0 0,1-2 0 0 0,-37 5-1 0 0,55-9-17 0 0,-10 0-39 0 0,9 0 95 0 0,12-1 516 0 0,5-1-618 0 0,50 0-10 0 0,-51 3 9 0 0,21 4-12 0 0,0 1-1 0 0,-1 1 1 0 0,0 1 0 0 0,58 27 0 0 0,-85-35 10 0 0,-1 1-1 0 0,1 0 0 0 0,-1 0 1 0 0,0 0-1 0 0,0 1 0 0 0,0-1 1 0 0,0 1-1 0 0,0 0 0 0 0,0 0 1 0 0,-1 1-1 0 0,1-1 0 0 0,-1 1 1 0 0,0-1-1 0 0,0 1 0 0 0,-1 0 1 0 0,1 0-1 0 0,-1 0 0 0 0,0 1 1 0 0,0-1-1 0 0,0 1 0 0 0,0-1 1 0 0,-1 1-1 0 0,1 4 0 0 0,-2-7-4 0 0,0 0 15 0 0,-1 0 0 0 0,0 0 0 0 0,0 0 0 0 0,0 0 0 0 0,0 0-1 0 0,0-1 1 0 0,0 1 0 0 0,0 0 0 0 0,0-1 0 0 0,-1 1 0 0 0,1 0 0 0 0,-1-1-1 0 0,1 0 1 0 0,-1 1 0 0 0,0-1 0 0 0,-2 1 0 0 0,-11 6 98 0 0,0-2 1 0 0,0 0-1 0 0,-1-1 0 0 0,0 0 1 0 0,-31 4-1 0 0,-92 4 565 0 0,108-10-527 0 0,25-3-227 0 0,-33 0 292 0 0,37-1-420 0 0,1 1-1 0 0,0 0 1 0 0,0-1 0 0 0,-1 1-1 0 0,1-1 1 0 0,0 1-1 0 0,0-1 1 0 0,0 1 0 0 0,0-1-1 0 0,0 0 1 0 0,0 0-1 0 0,0 0 1 0 0,0 1 0 0 0,0-1-1 0 0,0 0 1 0 0,-1-2-1 0 0,0-6-1989 0 0</inkml:trace>
 </inkml:ink>
 </file>
 
@@ -3942,7 +4103,7 @@
           <inkml:channelProperty channel="OE" name="resolution" value="1000" units="1/deg"/>
         </inkml:channelProperties>
       </inkml:inkSource>
-      <inkml:timestamp xml:id="ts0" timeString="2026-04-02T05:37:10.738"/>
+      <inkml:timestamp xml:id="ts0" timeString="2026-04-02T05:36:55.662"/>
     </inkml:context>
     <inkml:brush xml:id="br0">
       <inkml:brushProperty name="width" value="0.2" units="cm"/>
@@ -3950,7 +4111,7 @@
       <inkml:brushProperty name="color" value="#FFC114"/>
     </inkml:brush>
   </inkml:definitions>
-  <inkml:trace contextRef="#ctx0" brushRef="#br0">399 42 5380 0 0,'2'-2'13'0'0,"-1"0"0"0"0,1 0-1 0 0,-1 0 1 0 0,0 0-1 0 0,0-1 1 0 0,0 1 0 0 0,0-1-1 0 0,-1 1 1 0 0,1 0-1 0 0,0-1 1 0 0,-1 1-1 0 0,0-1 1 0 0,0 1 0 0 0,0-4-1 0 0,0 6-5 0 0,0 0 1 0 0,0-1-1 0 0,-1 1 0 0 0,1 0 0 0 0,0 0 0 0 0,0-1 1 0 0,-1 1-1 0 0,1 0 0 0 0,0 0 0 0 0,-1-1 0 0 0,1 1 1 0 0,0 0-1 0 0,-1 0 0 0 0,1 0 0 0 0,0 0 1 0 0,-1 0-1 0 0,1 0 0 0 0,-1 0 0 0 0,1-1 0 0 0,0 1 1 0 0,-1 0-1 0 0,1 0 0 0 0,0 0 0 0 0,-1 0 0 0 0,1 0 1 0 0,-1 1-1 0 0,1-1 0 0 0,0 0 0 0 0,-1 0 1 0 0,1 0-1 0 0,-1 0 0 0 0,-25 13-5 0 0,-13 14 51 0 0,2 2 0 0 0,1 2 1 0 0,2 1-1 0 0,1 2 0 0 0,1 1 0 0 0,-49 72 1 0 0,70-91-39 0 0,1 1 1 0 0,0 0-1 0 0,2 0 1 0 0,0 1-1 0 0,0 0 1 0 0,2 0-1 0 0,0 1 1 0 0,1-1-1 0 0,-2 24 1 0 0,6-32-16 0 0,0-1 1 0 0,1 1 0 0 0,0 0-1 0 0,0-1 1 0 0,1 1 0 0 0,1-1-1 0 0,-1 1 1 0 0,2-1 0 0 0,-1 0-1 0 0,1 0 1 0 0,1 0 0 0 0,0 0-1 0 0,0 0 1 0 0,0-1-1 0 0,1 0 1 0 0,0 0 0 0 0,1 0-1 0 0,0-1 1 0 0,0 1 0 0 0,11 8-1 0 0,-7-7-306 0 0,0-1 0 0 0,1-1 0 0 0,0 1 0 0 0,0-2 0 0 0,1 0 1 0 0,0 0-1 0 0,0-1 0 0 0,22 6 0 0 0,18 1-1428 0 0</inkml:trace>
+  <inkml:trace contextRef="#ctx0" brushRef="#br0">46 4 7297 0 0,'0'0'134'0'0,"-18"-2"1962"0"0,9 2-850 0 0,-10-2-2965 0 0</inkml:trace>
 </inkml:ink>
 </file>
 
@@ -4006,7 +4167,7 @@
           <inkml:channelProperty channel="OE" name="resolution" value="1000" units="1/deg"/>
         </inkml:channelProperties>
       </inkml:inkSource>
-      <inkml:timestamp xml:id="ts0" timeString="2026-04-02T05:36:52.739"/>
+      <inkml:timestamp xml:id="ts0" timeString="2026-04-02T05:36:55.866"/>
     </inkml:context>
     <inkml:brush xml:id="br0">
       <inkml:brushProperty name="width" value="0.2" units="cm"/>
@@ -4014,7 +4175,7 @@
       <inkml:brushProperty name="color" value="#FFC114"/>
     </inkml:brush>
   </inkml:definitions>
-  <inkml:trace contextRef="#ctx0" brushRef="#br0">396 83 4236 0 0,'-29'-43'2216'0'0,"28"42"-1924"0"0,-28-23 468 0 0,26 22-736 0 0,0 0-1 0 0,0 1 1 0 0,-1-1-1 0 0,1 1 1 0 0,0-1-1 0 0,-1 1 1 0 0,1 0-1 0 0,-1 0 1 0 0,1 1 0 0 0,-1-1-1 0 0,0 1 1 0 0,1 0-1 0 0,-1-1 1 0 0,1 2-1 0 0,-1-1 1 0 0,-3 1-1 0 0,-3 0-9 0 0,0 1 0 0 0,0 0 1 0 0,1 0-1 0 0,-1 1 0 0 0,-9 5 0 0 0,5-1-10 0 0,1 1-1 0 0,1 0 1 0 0,-1 1 0 0 0,1 0 0 0 0,1 1-1 0 0,0 1 1 0 0,0 0 0 0 0,1 0 0 0 0,-14 21 0 0 0,13-17-4 0 0,2 0 0 0 0,-1 1 0 0 0,2 0 0 0 0,1 0 0 0 0,0 0 0 0 0,0 1 0 0 0,-6 33 0 0 0,12-43-1 0 0,0 0 1 0 0,0 0 0 0 0,1 0-1 0 0,0 0 1 0 0,0 0-1 0 0,1 0 1 0 0,-1 0 0 0 0,2 0-1 0 0,-1 0 1 0 0,1 0 0 0 0,0 0-1 0 0,0-1 1 0 0,1 1-1 0 0,0-1 1 0 0,0 1 0 0 0,1-1-1 0 0,0 0 1 0 0,0-1 0 0 0,0 1-1 0 0,7 6 1 0 0,-2-3 17 0 0,1-1 1 0 0,0 0-1 0 0,1 0 0 0 0,0-1 1 0 0,0-1-1 0 0,0 0 1 0 0,1-1-1 0 0,-1 0 0 0 0,1 0 1 0 0,17 3-1 0 0,-7-2-13 0 0,18 6 71 0 0,0-2-1 0 0,2-2 0 0 0,-1-2 1 0 0,53 2-1 0 0,-82-8-36 0 0,-1 0-1 0 0,0-1 1 0 0,1 0-1 0 0,-1-1 0 0 0,0-1 1 0 0,0 0-1 0 0,0 0 1 0 0,0-1-1 0 0,-1 0 1 0 0,1-1-1 0 0,-1 0 1 0 0,0-1-1 0 0,-1 0 1 0 0,1 0-1 0 0,-1-1 1 0 0,-1 0-1 0 0,1-1 0 0 0,-1 0 1 0 0,0-1-1 0 0,10-14 1 0 0,-12 15 13 0 0,-1 0 1 0 0,0-1-1 0 0,-1 1 1 0 0,0-1-1 0 0,0 0 0 0 0,-1 0 1 0 0,0-1-1 0 0,-1 1 1 0 0,0-1-1 0 0,0 1 0 0 0,-1-1 1 0 0,0 0-1 0 0,-1 1 1 0 0,0-1-1 0 0,-1-10 0 0 0,-1 12-11 0 0,1 1-1 0 0,-1 0 0 0 0,0-1 0 0 0,0 1 0 0 0,-1 0 0 0 0,0 0 0 0 0,0 1 0 0 0,-1-1 1 0 0,1 1-1 0 0,-2-1 0 0 0,1 1 0 0 0,-1 0 0 0 0,1 1 0 0 0,-2-1 0 0 0,1 1 0 0 0,-1 0 1 0 0,1 0-1 0 0,-1 1 0 0 0,-1-1 0 0 0,-8-3 0 0 0,-9-4 12 0 0,-1 1 0 0 0,0 2 0 0 0,0 0 0 0 0,-38-6 0 0 0,-104-9-120 0 0,96 15-393 0 0,68 9-77 0 0,-4 0-581 0 0,0 0 76 0 0</inkml:trace>
+  <inkml:trace contextRef="#ctx0" brushRef="#br0">3 1 7257 0 0,'0'0'260'0'0,"-2"21"4215"0"0</inkml:trace>
 </inkml:ink>
 </file>
 
@@ -4038,7 +4199,7 @@
           <inkml:channelProperty channel="OE" name="resolution" value="1000" units="1/deg"/>
         </inkml:channelProperties>
       </inkml:inkSource>
-      <inkml:timestamp xml:id="ts0" timeString="2026-04-02T05:36:53.976"/>
+      <inkml:timestamp xml:id="ts0" timeString="2026-04-02T05:36:57.085"/>
     </inkml:context>
     <inkml:brush xml:id="br0">
       <inkml:brushProperty name="width" value="0.2" units="cm"/>
@@ -4046,7 +4207,7 @@
       <inkml:brushProperty name="color" value="#FFC114"/>
     </inkml:brush>
   </inkml:definitions>
-  <inkml:trace contextRef="#ctx0" brushRef="#br0">325 32 5424 0 0,'0'0'-17'0'0,"0"-1"-1"0"0,1 1 1 0 0,-1-1-1 0 0,0 1 0 0 0,0-1 1 0 0,0 1-1 0 0,0-1 1 0 0,0 1-1 0 0,0-1 0 0 0,1 1 1 0 0,-1-1-1 0 0,0 1 0 0 0,0-1 1 0 0,-1 1-1 0 0,1-1 1 0 0,0 1-1 0 0,0-1 0 0 0,0 1 1 0 0,0-1-1 0 0,0 1 1 0 0,0-1-1 0 0,-1 1 0 0 0,1-1 1 0 0,0 1-1 0 0,0-1 0 0 0,-1 1 1 0 0,1-1-1 0 0,0 1 1 0 0,-1 0-1 0 0,1-1 0 0 0,-1 1 1 0 0,1 0-1 0 0,0-1 1 0 0,-1 1-1 0 0,0-1 0 0 0,-26-9 208 0 0,17 8-66 0 0,0 1 1 0 0,-1 0-1 0 0,1 0 1 0 0,-14 1 0 0 0,14 3-115 0 0,-1-1 0 0 0,1 1 0 0 0,0 0 0 0 0,0 1 1 0 0,1 0-1 0 0,-1 1 0 0 0,1 0 0 0 0,0 1 1 0 0,1 0-1 0 0,-1 0 0 0 0,1 0 0 0 0,0 1 1 0 0,0 1-1 0 0,1-1 0 0 0,0 1 0 0 0,1 0 1 0 0,-1 1-1 0 0,2 0 0 0 0,-9 15 0 0 0,6-9 8 0 0,0 0 0 0 0,1 1-1 0 0,1 1 1 0 0,1-1 0 0 0,0 1-1 0 0,1 0 1 0 0,0 0 0 0 0,2 0-1 0 0,0 0 1 0 0,1 1 0 0 0,2 26-1 0 0,0-34 35 0 0,1 1 0 0 0,1 0 1 0 0,-1-1-1 0 0,2 1 0 0 0,0-1 0 0 0,0 0 0 0 0,1 0 0 0 0,0-1 0 0 0,0 1 0 0 0,1-1 0 0 0,0 0 1 0 0,1-1-1 0 0,0 1 0 0 0,1-1 0 0 0,-1-1 0 0 0,2 1 0 0 0,-1-2 0 0 0,1 1 0 0 0,0-1 0 0 0,14 8 1 0 0,-6-5 49 0 0,1-1 0 0 0,0 0 0 0 0,1-2 0 0 0,-1 0 0 0 0,2-1 0 0 0,-1 0 0 0 0,0-2 0 0 0,1 0 0 0 0,-1-2 0 0 0,29 0 0 0 0,-21-2 2 0 0,0-1 0 0 0,-1-2 0 0 0,1 0 1 0 0,-1-2-1 0 0,0-1 0 0 0,0 0 0 0 0,28-15 0 0 0,-40 15-58 0 0,0 0-1 0 0,0-1 1 0 0,-1-1-1 0 0,0 0 1 0 0,-1-1-1 0 0,0 0 1 0 0,-1-1 0 0 0,0-1-1 0 0,0 1 1 0 0,-1-2-1 0 0,-1 1 1 0 0,0-2-1 0 0,10-20 1 0 0,-16 28-16 0 0,-1 0 0 0 0,0 0 0 0 0,0 0 1 0 0,0 0-1 0 0,-1 0 0 0 0,0-1 0 0 0,0 1 0 0 0,0 0 1 0 0,-1-1-1 0 0,0 1 0 0 0,-1-1 0 0 0,1 1 0 0 0,-1 0 1 0 0,-1-1-1 0 0,1 1 0 0 0,-1 0 0 0 0,0 0 0 0 0,0 0 1 0 0,-1 0-1 0 0,1 0 0 0 0,-1 0 0 0 0,-1 1 0 0 0,1-1 1 0 0,-1 1-1 0 0,0 0 0 0 0,0 0 0 0 0,-10-8 0 0 0,2 1 4 0 0,-2 0 0 0 0,1 1-1 0 0,-1 1 1 0 0,-1 0 0 0 0,0 1-1 0 0,0 0 1 0 0,-1 2 0 0 0,0-1-1 0 0,-20-4 1 0 0,-5 1-75 0 0,-1 3 0 0 0,-1 1 1 0 0,1 3-1 0 0,-1 1 0 0 0,-48 3 0 0 0,88 0-243 0 0,-22 0-305 0 0</inkml:trace>
+  <inkml:trace contextRef="#ctx0" brushRef="#br0">373 78 5861 0 0,'0'0'-158'0'0,"-31"-23"1234"0"0,19 21-1017 0 0,1 1 0 0 0,-1 0 0 0 0,0 1 0 0 0,0 0 0 0 0,1 1 0 0 0,-1 0 0 0 0,0 1 0 0 0,1 0 0 0 0,-1 1 0 0 0,1 0 0 0 0,0 1 0 0 0,0 0 0 0 0,-18 10 0 0 0,16-8-49 0 0,1 0 0 0 0,1 2 0 0 0,0-1 0 0 0,0 1-1 0 0,0 1 1 0 0,1 0 0 0 0,0 0 0 0 0,1 1-1 0 0,0 0 1 0 0,0 1 0 0 0,-13 23 0 0 0,18-26 4 0 0,0 0 1 0 0,1 0-1 0 0,0 1 1 0 0,0 0-1 0 0,1-1 1 0 0,0 1-1 0 0,0 0 1 0 0,1 0-1 0 0,1 0 1 0 0,-1 0-1 0 0,1 0 1 0 0,1 0-1 0 0,0 0 1 0 0,0 0-1 0 0,1 0 1 0 0,0-1-1 0 0,0 1 1 0 0,1 0-1 0 0,0-1 1 0 0,1 0-1 0 0,0 1 1 0 0,0-1-1 0 0,0-1 1 0 0,1 1-1 0 0,1-1 1 0 0,-1 0-1 0 0,1 0 1 0 0,0 0 0 0 0,1-1-1 0 0,-1 0 1 0 0,1 0-1 0 0,0-1 1 0 0,1 0-1 0 0,0 0 1 0 0,-1-1-1 0 0,1 1 1 0 0,15 4-1 0 0,-3-2 67 0 0,1-1 1 0 0,0-1-1 0 0,1 0 0 0 0,-1-2 1 0 0,1 0-1 0 0,0-2 0 0 0,-1 0 1 0 0,1-2-1 0 0,0 0 0 0 0,-1-1 1 0 0,1-1-1 0 0,-1-2 0 0 0,0 0 1 0 0,0-1-1 0 0,0 0 0 0 0,-1-2 0 0 0,0-1 1 0 0,0 0-1 0 0,-1-2 0 0 0,-1 0 1 0 0,1-1-1 0 0,-2-1 0 0 0,0 0 1 0 0,0-2-1 0 0,-2 0 0 0 0,15-16 1 0 0,-26 26-38 0 0,0 0 0 0 0,0 0 0 0 0,0-1 1 0 0,-1 1-1 0 0,1-1 0 0 0,-2 1 1 0 0,1-1-1 0 0,0 0 0 0 0,-1 0 0 0 0,0 0 1 0 0,-1 0-1 0 0,1-1 0 0 0,-1 1 1 0 0,0 0-1 0 0,-1-1 0 0 0,0 1 0 0 0,0-1 1 0 0,0 1-1 0 0,-1 0 0 0 0,0-1 1 0 0,0 1-1 0 0,0 0 0 0 0,-1 0 0 0 0,0-1 1 0 0,-3-6-1 0 0,0 4 7 0 0,0-1 0 0 0,0 1-1 0 0,-1 1 1 0 0,-1-1 0 0 0,1 1 0 0 0,-1 0 0 0 0,-1 0 0 0 0,1 1 0 0 0,-1 0 0 0 0,-1 0-1 0 0,1 1 1 0 0,-1 0 0 0 0,0 1 0 0 0,-15-7 0 0 0,-18-4 9 0 0,0 2 0 0 0,-1 2 0 0 0,-1 2 0 0 0,-53-6 0 0 0,56 10-380 0 0,26 2-5 0 0</inkml:trace>
 </inkml:ink>
 </file>
 
@@ -4070,7 +4231,7 @@
           <inkml:channelProperty channel="OE" name="resolution" value="1000" units="1/deg"/>
         </inkml:channelProperties>
       </inkml:inkSource>
-      <inkml:timestamp xml:id="ts0" timeString="2026-04-02T05:36:55.086"/>
+      <inkml:timestamp xml:id="ts0" timeString="2026-04-02T05:37:03.296"/>
     </inkml:context>
     <inkml:brush xml:id="br0">
       <inkml:brushProperty name="width" value="0.2" units="cm"/>
@@ -4078,7 +4239,7 @@
       <inkml:brushProperty name="color" value="#FFC114"/>
     </inkml:brush>
   </inkml:definitions>
-  <inkml:trace contextRef="#ctx0" brushRef="#br0">293 139 5913 0 0,'0'-4'-264'0'0,"1"2"275"0"0,-1 0 1 0 0,0 1-1 0 0,1-1 0 0 0,-1 0 1 0 0,0 0-1 0 0,0 1 0 0 0,0-1 1 0 0,-1 0-1 0 0,1 0 1 0 0,0 1-1 0 0,-1-1 0 0 0,1 0 1 0 0,-1 0-1 0 0,1 1 0 0 0,-1-1 1 0 0,0 1-1 0 0,0-1 1 0 0,0 1-1 0 0,0-1 0 0 0,0 1 1 0 0,0-1-1 0 0,0 1 0 0 0,0 0 1 0 0,-1 0-1 0 0,1-1 1 0 0,-3-1-1 0 0,2 3 102 0 0,-14-6 147 0 0,9 4-238 0 0,0 0 0 0 0,0 0 1 0 0,0 1-1 0 0,0 0 0 0 0,0 1 1 0 0,0-1-1 0 0,0 2 0 0 0,0-1 1 0 0,0 1-1 0 0,0 0 0 0 0,-1 0 1 0 0,2 0-1 0 0,-1 1 0 0 0,0 1 1 0 0,0-1-1 0 0,1 1 0 0 0,-1 0 1 0 0,1 0-1 0 0,0 1 0 0 0,0 0 1 0 0,0 0-1 0 0,-9 8 0 0 0,7-4-16 0 0,-1 0 1 0 0,1 0-1 0 0,0 1 0 0 0,1 1 0 0 0,0-1 0 0 0,1 1 0 0 0,0 0 1 0 0,0 0-1 0 0,1 1 0 0 0,1-1 0 0 0,-1 1 0 0 0,2 0 0 0 0,-4 14 1 0 0,6-17 9 0 0,-1 0 0 0 0,2 1 1 0 0,-1-1-1 0 0,1 1 0 0 0,0-1 0 0 0,1 1 1 0 0,0-1-1 0 0,0 1 0 0 0,1-1 1 0 0,0 0-1 0 0,0 0 0 0 0,1 0 0 0 0,0 0 1 0 0,0 0-1 0 0,1 0 0 0 0,0-1 1 0 0,1 0-1 0 0,6 9 0 0 0,-4-8 30 0 0,0-1-1 0 0,0 0 0 0 0,1 0 1 0 0,0-1-1 0 0,0 0 0 0 0,1 0 1 0 0,0-1-1 0 0,0 0 1 0 0,0-1-1 0 0,0 0 0 0 0,1 0 1 0 0,0-1-1 0 0,0 0 0 0 0,0-1 1 0 0,10 1-1 0 0,7 1 27 0 0,0 0 1 0 0,1-2-1 0 0,-1-2 1 0 0,1 0-1 0 0,-1-2 0 0 0,0-1 1 0 0,36-8-1 0 0,-53 9-52 0 0,0-1 1 0 0,0-1-1 0 0,0 0 0 0 0,0 0 0 0 0,-1-1 0 0 0,0 0 1 0 0,1-1-1 0 0,-2 0 0 0 0,1 0 0 0 0,-1-1 0 0 0,0 0 1 0 0,0 0-1 0 0,-1-1 0 0 0,0 0 0 0 0,-1 0 0 0 0,1-1 1 0 0,-1 0-1 0 0,-1 0 0 0 0,0-1 0 0 0,0 1 0 0 0,6-20 0 0 0,-7 15 39 0 0,-1 0 0 0 0,0 0 0 0 0,-1-1 0 0 0,0 1 0 0 0,-1 0 0 0 0,-1-1-1 0 0,0 1 1 0 0,-1-1 0 0 0,0 1 0 0 0,-1 0 0 0 0,-1 0 0 0 0,-4-14-1 0 0,4 20-9 0 0,0 0 0 0 0,0 1 0 0 0,0-1 0 0 0,-1 1 0 0 0,0 0-1 0 0,0 0 1 0 0,0 0 0 0 0,-1 1 0 0 0,-1-1 0 0 0,1 1 0 0 0,-1 1-1 0 0,0-1 1 0 0,0 1 0 0 0,0 0 0 0 0,-1 0 0 0 0,0 0 0 0 0,0 1-1 0 0,0 0 1 0 0,0 1 0 0 0,-1 0 0 0 0,1 0 0 0 0,-13-3 0 0 0,0 2 3 0 0,-1 1 0 0 0,0 1 0 0 0,1 1 1 0 0,-1 1-1 0 0,-34 4 0 0 0,-102 25 122 0 0,63-10-219 0 0,85-15 250 0 0,1-1-1364 0 0</inkml:trace>
+  <inkml:trace contextRef="#ctx0" brushRef="#br0">88 66 2484 0 0,'-6'-3'655'0'0,"-1"0"0"0"0,1-1-1 0 0,-1 0 1 0 0,1 0 0 0 0,1-1-1 0 0,-1 1 1 0 0,0-1 0 0 0,1 0-1 0 0,-9-12 307 0 0,10 14-349 0 0,4 2-564 0 0,0 1 0 0 0,-1-1 0 0 0,1 1 0 0 0,0-1 0 0 0,0 1 0 0 0,-1-1 0 0 0,1 1 0 0 0,0 0 0 0 0,-1-1 0 0 0,1 1 0 0 0,0 0 0 0 0,-1-1 0 0 0,1 1-1 0 0,-1 0 1 0 0,1-1 0 0 0,-1 1 0 0 0,1 0 0 0 0,-1 0 0 0 0,1-1 0 0 0,-1 1 0 0 0,1 0 0 0 0,-1 0 0 0 0,1 0 0 0 0,-1 0 0 0 0,1 0 0 0 0,-1 0 0 0 0,1 0 0 0 0,-1 0 0 0 0,1 0 0 0 0,-1 0 0 0 0,1 0 0 0 0,-1 0 0 0 0,0 0 0 0 0,5 20-32 0 0,1-1 1 0 0,0 1-1 0 0,1-1 0 0 0,17 33 1 0 0,11 33 18 0 0,-2 25 50 0 0,-31-107-81 0 0,0 2 0 0 0,0-5-36 0 0,-1 0-1 0 0,0 1 1 0 0,0-1-1 0 0,0 0 0 0 0,0 0 1 0 0,0 1-1 0 0,0-1 1 0 0,0 0-1 0 0,1 0 0 0 0,-1 0 1 0 0,0 1-1 0 0,0-1 1 0 0,0 0-1 0 0,0 0 0 0 0,1 0 1 0 0,-1 1-1 0 0,0-1 1 0 0,0 0-1 0 0,1 0 0 0 0,-1 0 1 0 0,0 0-1 0 0,0 0 1 0 0,1 0-1 0 0,-1 0 0 0 0,0 0 1 0 0,0 1-1 0 0,1-1 1 0 0,-1 0-1 0 0,0 0 0 0 0,0 0 1 0 0,1 0-1 0 0,-1 0 1 0 0,0 0-1 0 0,0 0 0 0 0,1-1 1 0 0,-1 1-1 0 0,0 0 1 0 0,1 0-1 0 0,-1 0 1 0 0,0 0-1 0 0,0 0 0 0 0,0 0 1 0 0,1 0-1 0 0,-1 0 1 0 0,0-1-1 0 0,0 1 0 0 0,1 0 1 0 0,-1 0-1 0 0,0 0 1 0 0,0-1-1 0 0,0 1 0 0 0,0 0 1 0 0,1 0-1 0 0,-1 0 1 0 0,0-1-1 0 0,0 1 0 0 0,0 0 1 0 0,0-1-1 0 0,16-21-3621 0 0,-7 9 1851 0 0</inkml:trace>
 </inkml:ink>
 </file>
 
@@ -4102,7 +4263,7 @@
           <inkml:channelProperty channel="OE" name="resolution" value="1000" units="1/deg"/>
         </inkml:channelProperties>
       </inkml:inkSource>
-      <inkml:timestamp xml:id="ts0" timeString="2026-04-02T05:37:20.490"/>
+      <inkml:timestamp xml:id="ts0" timeString="2026-04-02T05:37:04.985"/>
     </inkml:context>
     <inkml:brush xml:id="br0">
       <inkml:brushProperty name="width" value="0.2" units="cm"/>
@@ -4110,7 +4271,7 @@
       <inkml:brushProperty name="color" value="#FFC114"/>
     </inkml:brush>
   </inkml:definitions>
-  <inkml:trace contextRef="#ctx0" brushRef="#br0">53 24 4780 0 0,'0'0'-146'0'0,"1"-1"43"0"0,1 0 225 0 0,-1 0 1 0 0,0 0-1 0 0,1 0 1 0 0,-1-1-1 0 0,0 1 1 0 0,0 0-1 0 0,0-1 1 0 0,0 1-1 0 0,0-1 0 0 0,0 1 1 0 0,-1-1-1 0 0,1 1 1 0 0,0-2-1 0 0,-2 2-114 0 0,-1 0 0 0 0,0 1-1 0 0,1 0 1 0 0,-1-1 0 0 0,1 1 0 0 0,-1 0 0 0 0,0 0-1 0 0,0 0 1 0 0,1 0 0 0 0,-1 0 0 0 0,0 1-1 0 0,1-1 1 0 0,-1 0 0 0 0,1 1 0 0 0,-1-1-1 0 0,0 1 1 0 0,1 0 0 0 0,-1-1 0 0 0,1 1-1 0 0,-1 0 1 0 0,1 0 0 0 0,0 0 0 0 0,-1 0-1 0 0,1 0 1 0 0,0 0 0 0 0,0 1 0 0 0,-2 1-1 0 0,1-1-10 0 0,0 0 0 0 0,-1 1 0 0 0,1-1 0 0 0,0 1 0 0 0,0 0 0 0 0,1-1 0 0 0,-1 1 0 0 0,1 0 0 0 0,-1 0 0 0 0,1 0 0 0 0,0 0 0 0 0,0 1 0 0 0,0-1 0 0 0,0 6 0 0 0,1-7-27 0 0,0-1 21 0 0,1 0 0 0 0,0 0 1 0 0,0 0-1 0 0,-1 0 0 0 0,1 0 1 0 0,0 0-1 0 0,0-1 0 0 0,0 1 1 0 0,0 0-1 0 0,0 0 0 0 0,0-1 1 0 0,0 1-1 0 0,0-1 0 0 0,0 1 1 0 0,1-1-1 0 0,-1 1 0 0 0,0-1 1 0 0,0 0-1 0 0,0 0 0 0 0,1 1 1 0 0,1-1-1 0 0,10-5 40 0 0,1 0 1 0 0,-2 0-1 0 0,1-2 0 0 0,20-12 685 0 0,-46 22-684 0 0,8-3-24 0 0,1 0 0 0 0,0 1 0 0 0,-1 0 0 0 0,1 0 0 0 0,0 0 0 0 0,0 1 0 0 0,0-1 0 0 0,-1 1 0 0 0,2 0 0 0 0,-1 0 0 0 0,0 0 0 0 0,0 1 0 0 0,1-1 0 0 0,-1 1 0 0 0,1 0 0 0 0,-5 5 0 0 0,8-7 0 0 0,-2 4-1 0 0,2-4 18 0 0,3-5 2 0 0,-2 4-8 0 0,1-1 12 0 0,1-1-1 0 0,-1 0 1 0 0,0 0-1 0 0,1 0 1 0 0,-1 0 0 0 0,0-1-1 0 0,0 1 1 0 0,0-1-1 0 0,-1 1 1 0 0,1-1 0 0 0,0 1-1 0 0,-1-1 1 0 0,2-3-1 0 0,-4 5-35 0 0,1 1 0 0 0,0-1 0 0 0,-1 1 0 0 0,1-1 0 0 0,-1 1-1 0 0,1-1 1 0 0,-1 1 0 0 0,1-1 0 0 0,0 1 0 0 0,-1 0 0 0 0,1-1 0 0 0,-1 1-1 0 0,0 0 1 0 0,1 0 0 0 0,-1-1 0 0 0,1 1 0 0 0,-1 0 0 0 0,1 0 0 0 0,-1 0-1 0 0,0 0 1 0 0,1-1 0 0 0,-1 1 0 0 0,0 0 0 0 0,1 0 0 0 0,-1 0-1 0 0,1 0 1 0 0,-1 1 0 0 0,0-1 0 0 0,1 0 0 0 0,-1 0 0 0 0,1 0 0 0 0,-1 0-1 0 0,0 1 1 0 0,1-1 0 0 0,-1 0 0 0 0,1 0 0 0 0,-1 1 0 0 0,1-1-1 0 0,-1 1 1 0 0,1-1 0 0 0,-1 0 0 0 0,1 1 0 0 0,-1 0 0 0 0,-26 16-2545 0 0</inkml:trace>
+  <inkml:trace contextRef="#ctx0" brushRef="#br0">127 137 5765 0 0,'14'-42'-933'0'0,"-14"40"968"0"0,0 1 0 0 0,0-1 0 0 0,1 0-1 0 0,-1 0 1 0 0,-1 0 0 0 0,1 1 0 0 0,0-1 0 0 0,0 0-1 0 0,-1 0 1 0 0,1 1 0 0 0,-1-1 0 0 0,1 0 0 0 0,-1 0-1 0 0,0 1 1 0 0,1-1 0 0 0,-1 1 0 0 0,0-1 0 0 0,0 1-1 0 0,0-1 1 0 0,-1 1 0 0 0,-1-2 0 0 0,2 1 234 0 0,0 2-247 0 0,0-1 1 0 0,-1 1-1 0 0,1-1 1 0 0,0 1-1 0 0,0-1 1 0 0,-1 1-1 0 0,1 0 1 0 0,0 0-1 0 0,-1 0 1 0 0,1 0-1 0 0,0 0 1 0 0,-1 0-1 0 0,1 0 1 0 0,-2 0 0 0 0,-5 3-3 0 0,0 0 1 0 0,0 1 0 0 0,0 0-1 0 0,1 0 1 0 0,-1 1 0 0 0,1 0 0 0 0,-11 10-1 0 0,14-12-15 0 0,1 1 0 0 0,0-1 0 0 0,0 1 0 0 0,1 0 0 0 0,-1 0 0 0 0,1 0 0 0 0,0 0 0 0 0,0 0 0 0 0,0 1 0 0 0,0-1-1 0 0,1 0 1 0 0,0 1 0 0 0,0-1 0 0 0,0 1 0 0 0,0 0 0 0 0,1-1 0 0 0,0 1 0 0 0,0 0 0 0 0,0 5 0 0 0,1-8-2 0 0,0 1-1 0 0,0 0 1 0 0,0 0 0 0 0,0-1 0 0 0,1 1 0 0 0,-1 0 0 0 0,1-1 0 0 0,-1 0 0 0 0,1 1 0 0 0,0-1 0 0 0,0 0 0 0 0,0 0 0 0 0,0 0 0 0 0,0 0 0 0 0,0 0 0 0 0,1 0-1 0 0,-1-1 1 0 0,1 1 0 0 0,-1-1 0 0 0,1 1 0 0 0,3 0 0 0 0,61 20 113 0 0,-49-18-87 0 0,1-1 0 0 0,0 0 0 0 0,0-2 0 0 0,0 0 0 0 0,32-3 0 0 0,-44 1-13 0 0,1 0-1 0 0,0 0 1 0 0,0 0-1 0 0,-1-1 1 0 0,1 0-1 0 0,-1 0 0 0 0,1-1 1 0 0,-1 0-1 0 0,0 0 1 0 0,0-1-1 0 0,-1 0 1 0 0,1 0-1 0 0,-1-1 1 0 0,0 0-1 0 0,0 0 1 0 0,8-8-1 0 0,-12 11-3 0 0,-1 0 0 0 0,0 1 0 0 0,1-1 1 0 0,-1 0-1 0 0,0 0 0 0 0,0 0 0 0 0,0 0 0 0 0,0 0 0 0 0,0 0 0 0 0,-1 0 1 0 0,1-1-1 0 0,-1 1 0 0 0,1 0 0 0 0,-1 0 0 0 0,0 0 0 0 0,0-1 0 0 0,0 1 0 0 0,0 0 1 0 0,0 0-1 0 0,0-1 0 0 0,0 1 0 0 0,-1 0 0 0 0,0 0 0 0 0,-1-4 0 0 0,0 3 0 0 0,0-1 1 0 0,-1 1-1 0 0,1 0 0 0 0,-1 0 0 0 0,0 1 0 0 0,0-1 0 0 0,0 1 0 0 0,0-1 0 0 0,0 1 0 0 0,0 0 0 0 0,-1 0 0 0 0,-6-3 0 0 0,-8-2 28 0 0,-1 1 0 0 0,1 1 0 0 0,-1 0 0 0 0,-25-2 0 0 0,38 6-4 0 0,1 0 0 0 0,0 0 0 0 0,0 0 1 0 0,0-1-1 0 0,-1 0 0 0 0,1 0 0 0 0,1 0 0 0 0,-9-5 0 0 0,11 6 3 0 0,6-2-68 0 0,-2 1 28 0 0,0 0 1 0 0,1 0 0 0 0,-1 0-1 0 0,1 1 1 0 0,0-1 0 0 0,0 1-1 0 0,-1-1 1 0 0,1 1-1 0 0,0 0 1 0 0,0 0 0 0 0,0 0-1 0 0,0 0 1 0 0,0 1 0 0 0,0-1-1 0 0,1 1 1 0 0,-1 0-1 0 0,0 0 1 0 0,4 0 0 0 0,4 1-1 0 0,292-14 14 0 0,-294 13-13 0 0,-6 0 3 0 0,-1 0 0 0 0,1 0 1 0 0,-1 0-1 0 0,1 0 0 0 0,0 1 0 0 0,-1-1 0 0 0,1 1 1 0 0,-1-1-1 0 0,1 1 0 0 0,-1 0 0 0 0,1 0 0 0 0,-1 0 1 0 0,5 3-1 0 0,-6-3-2 0 0,0 1 1 0 0,0 0 0 0 0,0-1 0 0 0,-1 1-1 0 0,1-1 1 0 0,0 1 0 0 0,-1 0 0 0 0,0 0-1 0 0,1-1 1 0 0,-1 1 0 0 0,0 0 0 0 0,0 0-1 0 0,0 0 1 0 0,0-1 0 0 0,0 1 0 0 0,0 0-1 0 0,0 0 1 0 0,-1 0 0 0 0,1-1 0 0 0,-1 1-1 0 0,1 0 1 0 0,-1-1 0 0 0,0 1-1 0 0,1 0 1 0 0,-1-1 0 0 0,0 1 0 0 0,-1 1-1 0 0,-2 5-2 0 0,0 0 0 0 0,1 0 0 0 0,0 1 0 0 0,0-1 0 0 0,1 1 0 0 0,1 0 0 0 0,-1-1 0 0 0,0 11 0 0 0,3-16 4 0 0,-1 0 1 0 0,1-1 0 0 0,-1 1 0 0 0,1 0 0 0 0,0 0 0 0 0,0-1 0 0 0,0 1-1 0 0,0-1 1 0 0,0 1 0 0 0,1-1 0 0 0,-1 1 0 0 0,1-1 0 0 0,-1 0 0 0 0,1 0 0 0 0,0 0-1 0 0,0 0 1 0 0,0 0 0 0 0,0 0 0 0 0,1 0 0 0 0,-1 0 0 0 0,0-1 0 0 0,1 0-1 0 0,-1 1 1 0 0,1-1 0 0 0,-1 0 0 0 0,1 0 0 0 0,0 0 0 0 0,-1 0 0 0 0,4 0-1 0 0,0 0 20 0 0,0 1 0 0 0,0-1 0 0 0,0 0 0 0 0,0-1 0 0 0,0 1 0 0 0,0-1 0 0 0,0 0 0 0 0,0-1 0 0 0,0 0 0 0 0,0 0 0 0 0,0 0 0 0 0,0 0 0 0 0,-1-1 0 0 0,1 0 0 0 0,0 0 0 0 0,-1-1 0 0 0,0 0 0 0 0,1 1 0 0 0,-1-2 0 0 0,0 1 0 0 0,0-1 0 0 0,-1 1 0 0 0,1-1 0 0 0,-1-1 0 0 0,0 1 0 0 0,6-9-1 0 0,-9 10 3 0 0,-1 0 0 0 0,0 1 0 0 0,0-1 0 0 0,0 0 0 0 0,0 0 0 0 0,-1 0 0 0 0,1 0 0 0 0,-1 1 0 0 0,1-1 0 0 0,-1 0-1 0 0,0 0 1 0 0,0 1 0 0 0,-1-1 0 0 0,1 1 0 0 0,-2-4 0 0 0,1 3-3 0 0,-4-7 39 0 0,0 0 1 0 0,0 1-1 0 0,-1 0 1 0 0,-12-13 0 0 0,4 4 26 0 0,-18-9 38 0 0,31 25-131 0 0,2 2-63 0 0,1-1 66 0 0,-1 1-1 0 0,0-1 0 0 0,0 0 0 0 0,0 1 0 0 0,0-1 0 0 0,1 1 1 0 0,-1-1-1 0 0,0 1 0 0 0,1-1 0 0 0,-1 1 0 0 0,0-1 1 0 0,1 1-1 0 0,-1-1 0 0 0,1 1 0 0 0,-1 0 0 0 0,0-1 0 0 0,1 1 1 0 0,-1-1-1 0 0,1 1 0 0 0,-1 0 0 0 0,1 0 0 0 0,0-1 1 0 0,-1 1-1 0 0,1 0 0 0 0,-1 0 0 0 0,1 0 0 0 0,-1-1 0 0 0,1 1 1 0 0,1 0-1 0 0,25-2-46 0 0,-13 1 40 0 0,266-6-75 0 0,-276 7 93 0 0,0 0 0 0 0,0 0 1 0 0,0 0-1 0 0,0 1 0 0 0,0 0 1 0 0,0-1-1 0 0,0 1 0 0 0,4 2 1 0 0,-7-3-9 0 0,0 1 1 0 0,-1-1 0 0 0,1 1 0 0 0,-1-1 0 0 0,0 0 0 0 0,1 1 0 0 0,-1-1-1 0 0,1 1 1 0 0,-1-1 0 0 0,1 1 0 0 0,-1-1 0 0 0,0 1 0 0 0,0-1 0 0 0,1 1-1 0 0,-1 0 1 0 0,0-1 0 0 0,0 1 0 0 0,1-1 0 0 0,-1 1 0 0 0,0 0 0 0 0,0-1-1 0 0,0 1 1 0 0,0 0 0 0 0,0-1 0 0 0,0 1 0 0 0,0-1 0 0 0,0 1 0 0 0,0 0-1 0 0,0-1 1 0 0,-1 1 0 0 0,1-1 0 0 0,0 1 0 0 0,0 0 0 0 0,-1-1 0 0 0,1 1-1 0 0,0-1 1 0 0,0 1 0 0 0,-1-1 0 0 0,1 1 0 0 0,-1-1 0 0 0,1 1 0 0 0,0-1-1 0 0,-2 1 1 0 0,-1 3 0 0 0,0 1-1 0 0,1-1 0 0 0,-1 1 1 0 0,1 0-1 0 0,0 0 1 0 0,0-1-1 0 0,0 1 1 0 0,1 0-1 0 0,0 1 0 0 0,0-1 1 0 0,0 0-1 0 0,0 0 1 0 0,1 1-1 0 0,0-1 0 0 0,0 0 1 0 0,0 0-1 0 0,1 1 1 0 0,0-1-1 0 0,0 0 0 0 0,0 0 1 0 0,1 0-1 0 0,-1 0 1 0 0,1 0-1 0 0,0 0 0 0 0,4 6 1 0 0,-2-5 1 0 0,1 0 0 0 0,0 0 0 0 0,0 0 0 0 0,0-1 0 0 0,1 0 0 0 0,-1 0 0 0 0,1 0 0 0 0,0-1 0 0 0,1 1 0 0 0,-1-2 0 0 0,1 1 0 0 0,0-1 0 0 0,0 0 0 0 0,0 0 1 0 0,14 3-1 0 0,-18-5 6 0 0,-1 0 0 0 0,1-1 0 0 0,0 0 0 0 0,-1 1 0 0 0,1-1 0 0 0,-1 0 0 0 0,1 0 0 0 0,0-1 0 0 0,-1 1 0 0 0,1 0 0 0 0,-1-1 0 0 0,1 0 0 0 0,-1 1 0 0 0,1-1 0 0 0,-1 0-1 0 0,0 0 1 0 0,1 0 0 0 0,-1-1 0 0 0,0 1 0 0 0,0-1 0 0 0,0 1 0 0 0,0-1 0 0 0,0 0 0 0 0,0 1 0 0 0,0-1 0 0 0,0 0 0 0 0,-1 0 0 0 0,1 0 0 0 0,-1-1 0 0 0,0 1 0 0 0,1 0 0 0 0,-1-1 0 0 0,0 1 0 0 0,1-5 0 0 0,0 3 42 0 0,-1-1-1 0 0,0 0 0 0 0,0 0 0 0 0,0 0 0 0 0,-1-1 0 0 0,1 1 0 0 0,-1 0 0 0 0,-1 0 0 0 0,1 0 0 0 0,0 0 0 0 0,-1 0 0 0 0,0 0 0 0 0,-1 0 1 0 0,1 0-1 0 0,-4-8 0 0 0,2 9-20 0 0,1 1 0 0 0,-1-1 1 0 0,0 1-1 0 0,0-1 1 0 0,-1 1-1 0 0,1 0 0 0 0,-1 0 1 0 0,1 1-1 0 0,-1-1 1 0 0,0 1-1 0 0,0 0 0 0 0,0 0 1 0 0,0 0-1 0 0,-1 0 0 0 0,1 1 1 0 0,0-1-1 0 0,-1 1 1 0 0,1 0-1 0 0,-5 0 0 0 0,-13-1-48 0 0,1 0 0 0 0,-40 4 0 0 0,24-1-526 0 0,34-1 2 0 0,-5-5-931 0 0</inkml:trace>
 </inkml:ink>
 </file>
 
@@ -4134,7 +4295,7 @@
           <inkml:channelProperty channel="OE" name="resolution" value="1000" units="1/deg"/>
         </inkml:channelProperties>
       </inkml:inkSource>
-      <inkml:timestamp xml:id="ts0" timeString="2026-04-02T05:37:21.254"/>
+      <inkml:timestamp xml:id="ts0" timeString="2026-04-02T05:37:05.856"/>
     </inkml:context>
     <inkml:brush xml:id="br0">
       <inkml:brushProperty name="width" value="0.2" units="cm"/>
@@ -4142,7 +4303,7 @@
       <inkml:brushProperty name="color" value="#FFC114"/>
     </inkml:brush>
   </inkml:definitions>
-  <inkml:trace contextRef="#ctx0" brushRef="#br0">87 92 4416 0 0,'7'-10'-200'0'0,"0"-9"224"0"0,-8 16 33 0 0,0 1 1 0 0,0 0 0 0 0,0-1 0 0 0,0 1 0 0 0,-1 0-1 0 0,1 0 1 0 0,0-1 0 0 0,-1 1 0 0 0,0 0-1 0 0,1 1 1 0 0,-1-1 0 0 0,0 0 0 0 0,-3-2-1 0 0,3 3 32 0 0,1 1-83 0 0,0-1 0 0 0,0 0 0 0 0,0 1 0 0 0,-1-1 0 0 0,1 1 0 0 0,0 0 0 0 0,-1-1 0 0 0,1 1 1 0 0,0 0-1 0 0,-1 0 0 0 0,1 0 0 0 0,0 0 0 0 0,-1 0 0 0 0,1 0 0 0 0,-1 0 0 0 0,1 0 0 0 0,0 0 0 0 0,-1 1 0 0 0,1-1 0 0 0,0 1 0 0 0,0-1 0 0 0,-1 1 0 0 0,1-1 0 0 0,-2 2 0 0 0,-1 0 5 0 0,0-1-1 0 0,-1 1 1 0 0,1 0-1 0 0,0 0 0 0 0,0 0 1 0 0,1 0-1 0 0,-7 5 1 0 0,6-5-14 0 0,5-1 1 0 0,-1-1 0 0 0,0 1 0 0 0,1 0 0 0 0,-1-1 0 0 0,1 1-1 0 0,-1-1 1 0 0,1 1 0 0 0,-1 0 0 0 0,1-1 0 0 0,-1 1 0 0 0,1-1 0 0 0,-1 0-1 0 0,1 1 1 0 0,0-1 0 0 0,-1 1 0 0 0,1-1 0 0 0,0 0 0 0 0,-1 1 0 0 0,1-1 0 0 0,0 0-1 0 0,-1 0 1 0 0,1 0 0 0 0,0 0 0 0 0,1 1 0 0 0,1 0-2 0 0,5-3 57 0 0,1 0-1 0 0,-1 0 0 0 0,0-1 1 0 0,0 0-1 0 0,0 0 0 0 0,0-1 1 0 0,-1 0-1 0 0,11-8 1103 0 0,-25 15-1064 0 0,-6 3-29 0 0,1 0 1 0 0,1 1-1 0 0,-1 0 1 0 0,1 1-1 0 0,-17 15 1 0 0,26-20-42 0 0,0 2-13 0 0,1-4-7 0 0,4-1-7 0 0,0 0 6 0 0,0 0 1 0 0,0-1 0 0 0,0 1 0 0 0,0-1 0 0 0,0 0 0 0 0,-1 0 0 0 0,1 0 0 0 0,0 0 0 0 0,-1 0-1 0 0,5-3 1 0 0,1 0 3 0 0,-3 1 43 0 0,0 1 0 0 0,0-1 0 0 0,0-1 0 0 0,0 1 0 0 0,0-1 0 0 0,-1 1 0 0 0,1-1 0 0 0,-1-1 0 0 0,0 1 0 0 0,0 0 0 0 0,-1-1 0 0 0,1 0 0 0 0,-1 0-1 0 0,5-10 1 0 0,-7 13 238 0 0,-16-10 120 0 0,10 12-463 0 0,-1 1 0 0 0,1 0 0 0 0,-1 0 0 0 0,1 0 0 0 0,0 1 0 0 0,0 0 0 0 0,-1 0 0 0 0,1 0 0 0 0,0 1 0 0 0,1 0 0 0 0,-1 0 0 0 0,0 0 0 0 0,1 0 0 0 0,-8 8 0 0 0</inkml:trace>
+  <inkml:trace contextRef="#ctx0" brushRef="#br0">0 90 5709 0 0,'33'-83'653'0'0,"-33"82"-480"0"0,4-4 907 0 0,-4 5-1060 0 0,28 87 90 0 0,52 117 0 0 0,-63-161 210 0 0,-17-41-126 0 0,0-2-166 0 0,0 0 0 0 0,1 1-1 0 0,-1-1 1 0 0,0 0-1 0 0,0 0 1 0 0,0 1 0 0 0,0-1-1 0 0,0 0 1 0 0,0 1 0 0 0,0-1-1 0 0,0 0 1 0 0,0 0-1 0 0,0 1 1 0 0,0-1 0 0 0,0 0-1 0 0,0 1 1 0 0,0-1-1 0 0,0 0 1 0 0,0 1 0 0 0,0-1-1 0 0,-1 0 1 0 0,1 0-1 0 0,0 1 1 0 0,0-1 0 0 0,0 0-1 0 0,0 0 1 0 0,0 1-1 0 0,-1-1 1 0 0,1 0 0 0 0,0 0-1 0 0,0 1 1 0 0,-1-1 0 0 0,1 0-1 0 0,0 0 1 0 0,0 0-1 0 0,-1 0 1 0 0,1 0 0 0 0,0 1-1 0 0,0-1 1 0 0,-1 0-1 0 0,1 0 1 0 0,0 0 0 0 0,-1 0-1 0 0,1 0 1 0 0,0 0-1 0 0,0 0 1 0 0,-1 0 0 0 0,1 0-1 0 0,0 0 1 0 0,-1 0 0 0 0,1 0-1 0 0,0 0 1 0 0,-1 0-1 0 0,1 0 1 0 0,-1 0 0 0 0,-3-2 13 0 0,-1-1 0 0 0,1 1 0 0 0,0-1 1 0 0,0 1-1 0 0,0-1 0 0 0,0 0 0 0 0,0-1 1 0 0,1 1-1 0 0,-1-1 0 0 0,1 0 0 0 0,0 1 0 0 0,0-1 1 0 0,0-1-1 0 0,1 1 0 0 0,-1 0 0 0 0,1-1 1 0 0,0 1-1 0 0,0-1 0 0 0,1 0 0 0 0,-2-5 1 0 0,1 2-20 0 0,1 0 0 0 0,0 0-1 0 0,0 0 1 0 0,1 0 0 0 0,0 0 0 0 0,0 0 0 0 0,1 0 0 0 0,0 0 0 0 0,0 0 0 0 0,1 0 0 0 0,0 1 0 0 0,1-1 0 0 0,-1 1 0 0 0,1-1 0 0 0,1 1 0 0 0,0 0-1 0 0,0 0 1 0 0,0 0 0 0 0,0 1 0 0 0,1-1 0 0 0,1 1 0 0 0,-1 0 0 0 0,1 1 0 0 0,7-7 0 0 0,-6 6-21 0 0,0 1 0 0 0,0 0 0 0 0,0 1 0 0 0,1-1 0 0 0,-1 1 0 0 0,1 1 1 0 0,0 0-1 0 0,0 0 0 0 0,1 0 0 0 0,-1 1 0 0 0,0 0 0 0 0,1 1 0 0 0,-1 0 0 0 0,1 0 0 0 0,0 1 0 0 0,-1 0 0 0 0,1 0 1 0 0,-1 1-1 0 0,1 0 0 0 0,-1 1 0 0 0,1 0 0 0 0,11 4 0 0 0,-6-1-1 0 0,-1 2-1 0 0,1-1 1 0 0,-1 2-1 0 0,0 0 1 0 0,-1 0-1 0 0,0 1 1 0 0,0 1-1 0 0,-1 0 1 0 0,0 0-1 0 0,-1 1 1 0 0,0 1-1 0 0,0-1 1 0 0,-2 2 0 0 0,1-1-1 0 0,-2 1 1 0 0,1 0-1 0 0,-2 1 1 0 0,0 0-1 0 0,6 20 1 0 0,-11-30-544 0 0,3 15 1405 0 0</inkml:trace>
 </inkml:ink>
 </file>
 
@@ -4166,7 +4327,7 @@
           <inkml:channelProperty channel="OE" name="resolution" value="1000" units="1/deg"/>
         </inkml:channelProperties>
       </inkml:inkSource>
-      <inkml:timestamp xml:id="ts0" timeString="2026-04-02T05:37:22.145"/>
+      <inkml:timestamp xml:id="ts0" timeString="2026-04-02T05:37:06.449"/>
     </inkml:context>
     <inkml:brush xml:id="br0">
       <inkml:brushProperty name="width" value="0.2" units="cm"/>
@@ -4174,7 +4335,7 @@
       <inkml:brushProperty name="color" value="#FFC114"/>
     </inkml:brush>
   </inkml:definitions>
-  <inkml:trace contextRef="#ctx0" brushRef="#br0">124 45 5669 0 0,'0'-1'1'0'0,"1"-1"1"0"0,-1 1-1 0 0,0-1 1 0 0,0 0 0 0 0,0 1-1 0 0,0-1 1 0 0,0 1-1 0 0,0-1 1 0 0,0 1 0 0 0,-1-1-1 0 0,1 1 1 0 0,-1-1-1 0 0,1 1 1 0 0,-1-1 0 0 0,1 1-1 0 0,-1 0 1 0 0,0-1 0 0 0,1 1-1 0 0,-1 0 1 0 0,0-1-1 0 0,0 1 1 0 0,0 0 0 0 0,0 0-1 0 0,0 0 1 0 0,-1 0-1 0 0,1 0 1 0 0,0 0 0 0 0,0 0-1 0 0,-1 0 1 0 0,1 0-1 0 0,0 1 1 0 0,-1-1 0 0 0,1 0-1 0 0,-1 1 1 0 0,-1-1 0 0 0,0 1 50 0 0,-25 5-2 0 0,-1 9 25 0 0,28-14-85 0 0,2 0-48 0 0,1 0 111 0 0,-1 0 0 0 0,0-1 1 0 0,0 1-1 0 0,1-1 0 0 0,-1 1 0 0 0,0-1 0 0 0,0 0 0 0 0,0 0 0 0 0,0 1 0 0 0,0-1 0 0 0,0 0 0 0 0,0 0 0 0 0,0 0 1 0 0,2-2-1 0 0,-1 1 104 0 0,-5 3-153 0 0,-1 0 8 0 0,0 0 0 0 0,1 1 1 0 0,-1-1-1 0 0,1 1 0 0 0,0 0 1 0 0,0 0-1 0 0,-1 0 1 0 0,1 0-1 0 0,0 1 0 0 0,1-1 1 0 0,-1 1-1 0 0,0 0 0 0 0,1 0 1 0 0,0 0-1 0 0,-1 0 1 0 0,-2 6-1 0 0,4-7-11 0 0,9-5-29 0 0,-6 2 37 0 0,2 1 18 0 0,0-1 0 0 0,0-1-1 0 0,0 1 1 0 0,0-1-1 0 0,0 0 1 0 0,0 1 0 0 0,0-2-1 0 0,-1 1 1 0 0,1 0 0 0 0,-1-1-1 0 0,0 1 1 0 0,0-1 0 0 0,5-7 1264 0 0,-31 18-1201 0 0,21-8-80 0 0,0 0-1 0 0,0 1 0 0 0,0-1 1 0 0,0 1-1 0 0,-1 0 1 0 0,1-1-1 0 0,0 1 0 0 0,0 0 1 0 0,1 0-1 0 0,-1 1 0 0 0,-3 1 1 0 0,1 0-4 0 0,9-8 814 0 0,4-1-1626 0 0</inkml:trace>
+  <inkml:trace contextRef="#ctx0" brushRef="#br0">40 188 6269 0 0,'0'0'-25'0'0,"0"0"1"0"0,0 0 0 0 0,0 0-1 0 0,0 0 1 0 0,0 0 0 0 0,1 0-1 0 0,-1 0 1 0 0,0 1 0 0 0,0-1-1 0 0,0 0 1 0 0,0 0 0 0 0,1 0-98 0 0,-1 1 98 0 0,0-1 0 0 0,0 0-1 0 0,0 0 1 0 0,0 0 0 0 0,0 0-1 0 0,0 0 1 0 0,0 0 0 0 0,0 1-1 0 0,0-1 1 0 0,0 0 0 0 0,0 0-1 0 0,0 0 1 0 0,0 0 0 0 0,0 1-1 0 0,0-1 1 0 0,0 0 0 0 0,0 0-1 0 0,0 0 1 0 0,0 0 0 0 0,34-9-8 0 0,-20 4 112 0 0,-1 0-1 0 0,1-1 1 0 0,-1-1-1 0 0,15-10 1 0 0,-23 14-46 0 0,0-1 0 0 0,0 0 0 0 0,-1 0 0 0 0,1 0 1 0 0,-1 0-1 0 0,0-1 0 0 0,-1 1 0 0 0,1-1 0 0 0,-1 0 1 0 0,0 0-1 0 0,0-1 0 0 0,-1 1 0 0 0,1-1 0 0 0,-1 1 1 0 0,0-1-1 0 0,1-6 0 0 0,-3 10-19 0 0,0-1 1 0 0,-1 1-1 0 0,1-1 0 0 0,0 1 1 0 0,-1 0-1 0 0,0-1 0 0 0,1 1 0 0 0,-1 0 1 0 0,0 0-1 0 0,0-1 0 0 0,-1 1 1 0 0,1 0-1 0 0,0 0 0 0 0,-1 0 1 0 0,1 0-1 0 0,-1 0 0 0 0,1 1 1 0 0,-1-1-1 0 0,0 0 0 0 0,0 1 1 0 0,0-1-1 0 0,0 1 0 0 0,0 0 1 0 0,0 0-1 0 0,0 0 0 0 0,0 0 1 0 0,0 0-1 0 0,-1 0 0 0 0,1 0 0 0 0,0 1 1 0 0,-1-1-1 0 0,1 1 0 0 0,-1 0 1 0 0,1-1-1 0 0,0 1 0 0 0,-1 0 1 0 0,1 1-1 0 0,-5 0 0 0 0,-1-1 1 0 0,0 1-1 0 0,0 0 0 0 0,1 0 1 0 0,-1 1-1 0 0,0 0 0 0 0,1 0 1 0 0,0 1-1 0 0,0 0 0 0 0,-1 0 1 0 0,-10 7-1 0 0,13-6-8 0 0,1 0-1 0 0,-1-1 1 0 0,1 2 0 0 0,0-1-1 0 0,0 0 1 0 0,1 1-1 0 0,-1-1 1 0 0,1 1 0 0 0,0 0-1 0 0,0 0 1 0 0,1 1 0 0 0,-1-1-1 0 0,1 1 1 0 0,0-1-1 0 0,1 1 1 0 0,0-1 0 0 0,-1 1-1 0 0,2 0 1 0 0,-1 0 0 0 0,1 0-1 0 0,0-1 1 0 0,0 1-1 0 0,0 0 1 0 0,1 0 0 0 0,0 0-1 0 0,0-1 1 0 0,0 1 0 0 0,1 0-1 0 0,2 5 1 0 0,0-3 27 0 0,0 0-1 0 0,0 0 1 0 0,1-1 0 0 0,0 0 0 0 0,0 0-1 0 0,0 0 1 0 0,1 0 0 0 0,0-1 0 0 0,1 0-1 0 0,-1 0 1 0 0,1-1 0 0 0,0 0 0 0 0,0 0 0 0 0,1 0-1 0 0,-1-1 1 0 0,1 0 0 0 0,0-1 0 0 0,1 0-1 0 0,9 3 1 0 0,-4-3 44 0 0,1 0 1 0 0,-1 0-1 0 0,1-1 1 0 0,0-1-1 0 0,21-1 0 0 0,-28-1-447 0 0,1 0 1 0 0,0-1-1 0 0,-1 0 0 0 0,1 0 0 0 0,-1-1 1 0 0,0 0-1 0 0,0 0 0 0 0,0-1 0 0 0,0 0 1 0 0,10-8-1 0 0,-1 0-2145 0 0</inkml:trace>
 </inkml:ink>
 </file>
 
@@ -4198,7 +4359,7 @@
           <inkml:channelProperty channel="OE" name="resolution" value="1000" units="1/deg"/>
         </inkml:channelProperties>
       </inkml:inkSource>
-      <inkml:timestamp xml:id="ts0" timeString="2026-04-02T05:37:35.116"/>
+      <inkml:timestamp xml:id="ts0" timeString="2026-04-02T05:37:07.038"/>
     </inkml:context>
     <inkml:brush xml:id="br0">
       <inkml:brushProperty name="width" value="0.2" units="cm"/>
@@ -4206,7 +4367,7 @@
       <inkml:brushProperty name="color" value="#FFC114"/>
     </inkml:brush>
   </inkml:definitions>
-  <inkml:trace contextRef="#ctx0" brushRef="#br0">9 856 3608 0 0,'0'0'3'0'0,"-1"0"-1"0"0,1 0 1 0 0,-1 0-1 0 0,1-1 1 0 0,-1 1-1 0 0,1 0 1 0 0,-1 0-1 0 0,1-1 1 0 0,0 1-1 0 0,-1 0 1 0 0,1-1-1 0 0,-1 1 0 0 0,1-1 1 0 0,0 1-1 0 0,-1 0 1 0 0,1-1-1 0 0,0 1 1 0 0,0-1-1 0 0,-1 1 1 0 0,1-1-1 0 0,0 1 1 0 0,0-1-1 0 0,0 1 1 0 0,0-1-1 0 0,0 1 1 0 0,0-1-1 0 0,0 1 1 0 0,0-1-1 0 0,0 1 1 0 0,0-1-1 0 0,0 1 0 0 0,0-1 1 0 0,0 1-1 0 0,0-2 1 0 0,17-13 249 0 0,44-9 223 0 0,-45 17-483 0 0,234-73 184 0 0,-56 21-70 0 0,-115 31-96 0 0,271-107 96 0 0,-102 20 253 0 0,-55 41-209 0 0,-38 17-49 0 0,-78 24 129 0 0,-20 8-143 0 0,2 2 0 0 0,0 3 0 0 0,63-13 0 0 0,-103 29-98 0 0,23-3 248 0 0,0-2-1 0 0,-1-2 1 0 0,45-19-1 0 0,-34 11 224 0 0,12-9-167 0 0,-63 28-257 0 0,3-2 0 0 0,2 0-63 0 0,-10 1 403 0 0,-437 40-193 0 0,436-38-190 0 0,-2 0-43 0 0,1 0-25 0 0,9-1 36 0 0,83-15 62 0 0,-47 13-18 0 0,-13-1 3 0 0,1 2 0 0 0,0 1 0 0 0,46 5 0 0 0,-71-4-21 0 0,2 3-3 0 0,-4-3 18 0 0,1-1 0 0 0,0 1 0 0 0,-1-1 0 0 0,1 1 0 0 0,-1-1 0 0 0,1 1 0 0 0,-1-1 0 0 0,1 1 0 0 0,-1 0 0 0 0,0-1 0 0 0,1 1 0 0 0,-1 0 0 0 0,0 0 1 0 0,1-1-1 0 0,-1 1 0 0 0,0 0 0 0 0,0 0 0 0 0,0-1 0 0 0,0 1 0 0 0,0 1 0 0 0,-1 11 64 0 0,-1 0 1 0 0,0 0 0 0 0,-1-1 0 0 0,-1 1-1 0 0,0-1 1 0 0,-1 0 0 0 0,-8 17-1 0 0,-16 44-5174 0 0,27-65 3344 0 0</inkml:trace>
+  <inkml:trace contextRef="#ctx0" brushRef="#br0">30 77 5985 0 0,'1'-4'73'0'0,"0"0"-1"0"0,0-1 1 0 0,-1 1 0 0 0,1 0 0 0 0,-1-1 0 0 0,0 1 0 0 0,0 0 0 0 0,-1-1 0 0 0,1 1 0 0 0,-1 0 0 0 0,0-1 0 0 0,0 1 0 0 0,0 0 0 0 0,0 0 0 0 0,-5-9 895 0 0,3 17-882 0 0,1-1-70 0 0,0 0 0 0 0,0 0 0 0 0,0 0 0 0 0,0 0 0 0 0,1 0 0 0 0,-1 0 1 0 0,1 0-1 0 0,0 1 0 0 0,0-1 0 0 0,0 0 0 0 0,0 1 0 0 0,1-1 0 0 0,0 1 0 0 0,-1-1 0 0 0,1 0 0 0 0,0 1 0 0 0,1-1 0 0 0,-1 1 0 0 0,0-1 0 0 0,1 1 0 0 0,0-1 0 0 0,0 0 0 0 0,0 1 0 0 0,0-1 0 0 0,1 0 0 0 0,-1 0 0 0 0,1 0 0 0 0,0 0 0 0 0,0 0 0 0 0,0 0 0 0 0,0 0 0 0 0,0-1 0 0 0,1 1 0 0 0,-1-1 0 0 0,1 1 0 0 0,0-1 0 0 0,-1 0 0 0 0,5 2 0 0 0,1 1 10 0 0,0 1 1 0 0,1-1-1 0 0,-1-1 1 0 0,1 0-1 0 0,1 0 0 0 0,-1 0 1 0 0,0-1-1 0 0,1-1 1 0 0,-1 0-1 0 0,1 0 0 0 0,0-1 1 0 0,0 0-1 0 0,10 0 0 0 0,-14-1-13 0 0,-1-1-1 0 0,1 0 0 0 0,0 0 0 0 0,0 0 0 0 0,0 0 0 0 0,-1-1 0 0 0,1 0 0 0 0,-1 0 0 0 0,1 0 0 0 0,-1-1 0 0 0,0 0 0 0 0,0 0 1 0 0,0 0-1 0 0,0-1 0 0 0,-1 0 0 0 0,1 0 0 0 0,-1 0 0 0 0,0 0 0 0 0,0-1 0 0 0,0 1 0 0 0,-1-1 0 0 0,0 0 0 0 0,0 0 0 0 0,0 0 0 0 0,2-8 1 0 0,-3 8-8 0 0,0 1 112 0 0,0 1 0 0 0,-1-1 0 0 0,0 0 0 0 0,0-1 0 0 0,0 1 0 0 0,-1 0 0 0 0,1-10 650 0 0,-17 36-676 0 0,14-19-85 0 0,0 0 0 0 0,0 0 0 0 0,1 1 1 0 0,0-1-1 0 0,-1 0 0 0 0,1 1 0 0 0,1-1 1 0 0,-1 0-1 0 0,0 1 0 0 0,1-1 0 0 0,0 1 1 0 0,0-1-1 0 0,0 1 0 0 0,0-1 0 0 0,0 1 0 0 0,1-1 1 0 0,-1 1-1 0 0,1-1 0 0 0,0 1 0 0 0,0-1 1 0 0,0 0-1 0 0,1 0 0 0 0,-1 1 0 0 0,1-1 1 0 0,0 0-1 0 0,0 0 0 0 0,0 0 0 0 0,3 3 1 0 0,0-1-16 0 0,0 1 0 0 0,0 0 0 0 0,1-1 0 0 0,0 0 1 0 0,0-1-1 0 0,1 1 0 0 0,-1-1 0 0 0,1 0 0 0 0,0-1 1 0 0,0 0-1 0 0,8 3 0 0 0,-4-3-300 0 0,1 0 0 0 0,-1-1 0 0 0,1-1 0 0 0,-1 0 0 0 0,23-1 0 0 0,25-10-4417 0 0,-39 3 1963 0 0</inkml:trace>
 </inkml:ink>
 </file>
 
@@ -4230,7 +4391,7 @@
           <inkml:channelProperty channel="OE" name="resolution" value="1000" units="1/deg"/>
         </inkml:channelProperties>
       </inkml:inkSource>
-      <inkml:timestamp xml:id="ts0" timeString="2026-04-02T05:37:37.115"/>
+      <inkml:timestamp xml:id="ts0" timeString="2026-04-02T05:37:07.696"/>
     </inkml:context>
     <inkml:brush xml:id="br0">
       <inkml:brushProperty name="width" value="0.2" units="cm"/>
@@ -4238,7 +4399,7 @@
       <inkml:brushProperty name="color" value="#FFC114"/>
     </inkml:brush>
   </inkml:definitions>
-  <inkml:trace contextRef="#ctx0" brushRef="#br0">4 10 4664 0 0,'0'0'-259'0'0,"-3"-3"-481"0"0,3 2 727 0 0,0 1 0 0 0,0 0 0 0 0,0 0 0 0 0,0-1 1 0 0,0 1-1 0 0,0 0 0 0 0,0 0 0 0 0,0 0 0 0 0,0-1 1 0 0,0 1-1 0 0,0 0 0 0 0,0 0 0 0 0,0 0 0 0 0,0-1 0 0 0,0 1 1 0 0,1 0-1 0 0,-1 0 0 0 0,0 0 0 0 0,0 0 0 0 0,0-1 1 0 0,0 1-1 0 0,0 0 0 0 0,0 0 0 0 0,1 0 0 0 0,-1 0 1 0 0,0 0-1 0 0,0-1 0 0 0,0 1 0 0 0,1 0 0 0 0,-1 0 1 0 0,0 0-1 0 0,0 0 0 0 0,0 0 0 0 0,1 0 0 0 0,-1 0 1 0 0,0 0-1 0 0,0 0 0 0 0,0 0 0 0 0,1 0 0 0 0,-1 0 1 0 0,0 0-1 0 0,0 0 0 0 0,0 0 0 0 0,1 0 0 0 0,23 3 77 0 0,-18-2 6 0 0,41 9 280 0 0,145 30 509 0 0,240 22 0 0 0,-245-34-597 0 0,-9 0-150 0 0,-93-21 12 0 0,185 23 151 0 0,-7-3-164 0 0,-162-19-98 0 0,133 26-1 0 0,-122-19 46 0 0,-55-5 2252 0 0,-59-16-2253 0 0,-1 1-1 0 0,0 0 1 0 0,0 0 0 0 0,-1 0 0 0 0,1 0 0 0 0,-1 1 0 0 0,0 0-1 0 0,0-1 1 0 0,-1 1 0 0 0,1 1 0 0 0,-9-7 0 0 0,-5-5 50 0 0,-4-6-21 0 0,-1 2 0 0 0,-1 0 0 0 0,0 1 0 0 0,-28-14 0 0 0,51 32-83 0 0,-15-10 25 0 0,8 5-83 0 0,10 4-173 0 0,19 12 222 0 0,1 1 1 0 0,-1 1-1 0 0,-1 1 1 0 0,33 28-1 0 0,7 5 1 0 0,-53-43 8 0 0,0 1 0 0 0,-1 0 0 0 0,0 0 1 0 0,0 1-1 0 0,0 0 0 0 0,-1 0 0 0 0,1 0 0 0 0,6 11 1 0 0,-11-15-3 0 0,-1-1 0 0 0,1 1 0 0 0,0 0 0 0 0,-1 0 1 0 0,1 0-1 0 0,-1 0 0 0 0,0 0 0 0 0,0-1 1 0 0,1 1-1 0 0,-1 0 0 0 0,-1 0 0 0 0,1 0 0 0 0,0 0 1 0 0,0 0-1 0 0,-1 0 0 0 0,0 2 0 0 0,0-1 0 0 0,-1 1 0 0 0,0-1 0 0 0,0 0 0 0 0,0 0 0 0 0,0 0 0 0 0,0 0 0 0 0,-1 0 0 0 0,1-1 0 0 0,-1 1 0 0 0,1-1 0 0 0,-5 3 0 0 0,-43 31-174 0 0,-2-3 1 0 0,0-3-1 0 0,-66 29 0 0 0,79-45-4229 0 0</inkml:trace>
+  <inkml:trace contextRef="#ctx0" brushRef="#br0">12 205 6129 0 0,'-11'-44'-1179'0'0,"11"44"1204"0"0,0-1 1 0 0,0 0-1 0 0,0 0 0 0 0,0 0 1 0 0,0 0-1 0 0,1 0 1 0 0,-1 0-1 0 0,0 0 0 0 0,1 1 1 0 0,-1-1-1 0 0,1 0 0 0 0,-1 0 1 0 0,1 0-1 0 0,-1 1 1 0 0,1-1-1 0 0,-1 0 0 0 0,1 1 1 0 0,0-1-1 0 0,-1 0 1 0 0,1 1-1 0 0,0-1 0 0 0,0 1 1 0 0,-1-1-1 0 0,1 1 1 0 0,0-1-1 0 0,0 1 0 0 0,0 0 1 0 0,1-1-1 0 0,37-2 272 0 0,35 15-115 0 0,-61-8-155 0 0,0 1 0 0 0,0-1 0 0 0,0 2 0 0 0,-1 0 0 0 0,0 1 0 0 0,0 0 0 0 0,0 0 0 0 0,-1 2 0 0 0,12 9 0 0 0,-5 0 21 0 0,-1 1 1 0 0,-1 0 0 0 0,-1 1 0 0 0,15 25 0 0 0,-29-44-37 0 0,0 1 1 0 0,0-1 0 0 0,-1 0-1 0 0,1 1 1 0 0,0-1-1 0 0,-1 1 1 0 0,1 0 0 0 0,-1-1-1 0 0,1 1 1 0 0,-1 0 0 0 0,0-1-1 0 0,1 1 1 0 0,-1-1 0 0 0,0 1-1 0 0,0 0 1 0 0,0 0 0 0 0,-1-1-1 0 0,1 1 1 0 0,0-1-1 0 0,-1 1 1 0 0,1 0 0 0 0,-1-1-1 0 0,-1 3 1 0 0,1-1 14 0 0,-1-1 0 0 0,0 1 0 0 0,0-1-1 0 0,0 0 1 0 0,0 0 0 0 0,0 0 0 0 0,-1 0 0 0 0,1 0 0 0 0,0 0-1 0 0,-1-1 1 0 0,0 1 0 0 0,-4 1 0 0 0,3-1 56 0 0,-1 0-1 0 0,1 0 1 0 0,-1-1 0 0 0,1 0-1 0 0,-1 0 1 0 0,0 0 0 0 0,1 0-1 0 0,-1-1 1 0 0,0 1 0 0 0,0-1-1 0 0,0-1 1 0 0,1 1-1 0 0,-1-1 1 0 0,0 1 0 0 0,0-2-1 0 0,1 1 1 0 0,-6-2 0 0 0,8 1-46 0 0,0 1 0 0 0,0-1 0 0 0,1 1 0 0 0,-1-1 0 0 0,1 0 0 0 0,-1 1 0 0 0,1-1 0 0 0,0 0 0 0 0,0 0 0 0 0,0 0 0 0 0,0 0 0 0 0,0 0 0 0 0,0-1 0 0 0,0 1 0 0 0,1 0 0 0 0,-1 0 0 0 0,1 0 0 0 0,0-1 0 0 0,-1 1 0 0 0,1 0 0 0 0,0 0 0 0 0,0-1 0 0 0,1 1 0 0 0,-1 0 0 0 0,1-5 0 0 0,1-4 36 0 0,1 0 1 0 0,0 0-1 0 0,9-18 0 0 0,-3 10-29 0 0,0 0-1 0 0,2 1 1 0 0,0 0 0 0 0,2 1-1 0 0,0 1 1 0 0,0 0-1 0 0,1 0 1 0 0,1 2-1 0 0,20-16 1 0 0,-14 14-5 0 0,1 0 0 0 0,1 1 1 0 0,0 2-1 0 0,1 0 0 0 0,1 1 0 0 0,46-14 0 0 0,-70 25-32 0 0,0 1-1 0 0,1-1 0 0 0,-1 1 1 0 0,1 0-1 0 0,-1-1 0 0 0,1 1 1 0 0,-1 0-1 0 0,1 0 0 0 0,-1 0 1 0 0,1 0-1 0 0,-1 0 1 0 0,1 1-1 0 0,-1-1 0 0 0,1 0 1 0 0,-1 0-1 0 0,1 1 0 0 0,-1-1 1 0 0,1 1-1 0 0,-1 0 0 0 0,3 1 1 0 0,-1 0 23 0 0,-6 1-1 0 0,-8 9-51 0 0,0-1 0 0 0,0 0 0 0 0,-24 17-1 0 0,1-8-3582 0 0</inkml:trace>
 </inkml:ink>
 </file>
 
@@ -4262,7 +4423,7 @@
           <inkml:channelProperty channel="OE" name="resolution" value="1000" units="1/deg"/>
         </inkml:channelProperties>
       </inkml:inkSource>
-      <inkml:timestamp xml:id="ts0" timeString="2026-04-02T05:37:38.619"/>
+      <inkml:timestamp xml:id="ts0" timeString="2026-04-02T05:37:08.914"/>
     </inkml:context>
     <inkml:brush xml:id="br0">
       <inkml:brushProperty name="width" value="0.2" units="cm"/>
@@ -4270,7 +4431,7 @@
       <inkml:brushProperty name="color" value="#FFC114"/>
     </inkml:brush>
   </inkml:definitions>
-  <inkml:trace contextRef="#ctx0" brushRef="#br0">10 15 5913 0 0,'0'0'-280'0'0,"-6"-7"-286"0"0,5 7 548 0 0,1 0 0 0 0,0 0 1 0 0,0-1-1 0 0,0 1 0 0 0,0 0 0 0 0,-1 0 0 0 0,1 0 0 0 0,0 0 1 0 0,0 0-1 0 0,0 0 0 0 0,0 0 0 0 0,0 0 0 0 0,0-1 0 0 0,-1 1 0 0 0,1 0 1 0 0,0 0-1 0 0,0 0 0 0 0,0 0 0 0 0,0 0 0 0 0,0 0 0 0 0,0-1 0 0 0,0 1 1 0 0,0 0-1 0 0,0 0 0 0 0,0 0 0 0 0,0 0 0 0 0,0-1 0 0 0,0 1 1 0 0,0 0-1 0 0,0 0 0 0 0,0 0 0 0 0,0 0 0 0 0,0-1 0 0 0,0 1 0 0 0,0 0 1 0 0,0 0-1 0 0,0 0 0 0 0,0 0 0 0 0,0-1 0 0 0,0 1 0 0 0,0 0 0 0 0,0 0 1 0 0,0 0-1 0 0,0 0 0 0 0,0 0 0 0 0,1-1 0 0 0,-1 1 0 0 0,0 0 1 0 0,0 0-1 0 0,0 0 0 0 0,0 0 0 0 0,0 0 0 0 0,0 0 0 0 0,1 0 0 0 0,-1 0 1 0 0,0 0-1 0 0,0-1 0 0 0,0 1 0 0 0,0 0 0 0 0,1 0 0 0 0,17 3 81 0 0,1 0 0 0 0,-1 1 0 0 0,0 0 0 0 0,0 2 1 0 0,0 0-1 0 0,-1 1 0 0 0,31 18 0 0 0,37 13 78 0 0,272 91 232 0 0,-268-96-296 0 0,108 59-1 0 0,4 2 47 0 0,-31-13 27 0 0,-120-56-129 0 0,106 44 26 0 0,3-8-1 0 0,169 41 1 0 0,-226-72-38 0 0,-80-24 28 0 0,-7-2 2 0 0,1 1-1 0 0,-1 1 1 0 0,26 12 0 0 0,-40-17 1 0 0,4 2 238 0 0</inkml:trace>
+  <inkml:trace contextRef="#ctx0" brushRef="#br0">62 105 6477 0 0,'-23'10'-285'0'0,"20"-9"291"0"0,0 1 1 0 0,1 0 0 0 0,-1 0-1 0 0,0 0 1 0 0,1 0-1 0 0,0 0 1 0 0,-1 0-1 0 0,1 1 1 0 0,0-1-1 0 0,0 1 1 0 0,1 0-1 0 0,-1-1 1 0 0,0 1-1 0 0,1 0 1 0 0,0 0 0 0 0,-1 0-1 0 0,0 3 1 0 0,2-3 11 0 0,0 0 1 0 0,0-1-1 0 0,0 1 1 0 0,0-1 0 0 0,0 1-1 0 0,1-1 1 0 0,-1 1-1 0 0,1-1 1 0 0,0 1 0 0 0,-1-1-1 0 0,1 1 1 0 0,0-1-1 0 0,1 0 1 0 0,-1 1 0 0 0,0-1-1 0 0,3 4 1 0 0,1 0 39 0 0,1-1 0 0 0,-1 1 1 0 0,1-1-1 0 0,0 0 0 0 0,0 0 1 0 0,1 0-1 0 0,-1-1 0 0 0,1 0 0 0 0,0-1 1 0 0,0 1-1 0 0,11 2 0 0 0,-2-1 23 0 0,1-1 1 0 0,-1-1-1 0 0,1 0 0 0 0,0-1 0 0 0,33-1 0 0 0,-46-1-65 0 0,0 0-1 0 0,0 0 0 0 0,0-1 0 0 0,0 1 1 0 0,-1-1-1 0 0,1 0 0 0 0,0 0 1 0 0,0 0-1 0 0,-1 0 0 0 0,1-1 1 0 0,-1 1-1 0 0,1-1 0 0 0,-1 0 1 0 0,1 0-1 0 0,-1 0 0 0 0,0-1 0 0 0,0 1 1 0 0,0-1-1 0 0,-1 0 0 0 0,1 1 1 0 0,0-1-1 0 0,-1 0 0 0 0,0-1 1 0 0,0 1-1 0 0,0 0 0 0 0,0-1 1 0 0,0 1-1 0 0,-1-1 0 0 0,0 1 1 0 0,1-1-1 0 0,-1 0 0 0 0,0-4 0 0 0,0 4 2 0 0,-1 1 0 0 0,0 0 0 0 0,0-1 0 0 0,-1 1 0 0 0,1-1-1 0 0,0 1 1 0 0,-1 0 0 0 0,0 0 0 0 0,0-1 0 0 0,0 1-1 0 0,0 0 1 0 0,-1 0 0 0 0,1 0 0 0 0,-1 0 0 0 0,0 0 0 0 0,0 0-1 0 0,0 1 1 0 0,0-1 0 0 0,0 1 0 0 0,0-1 0 0 0,-1 1 0 0 0,1 0-1 0 0,-1 0 1 0 0,0 0 0 0 0,0 0 0 0 0,-5-3 0 0 0,-7-2 13 0 0,0 1 1 0 0,-1 0 0 0 0,1 1 0 0 0,-21-5-1 0 0,8 3 26 0 0,25 6-43 0 0,0 0 11 0 0,2 1-22 0 0,0 0 0 0 0,0 0 0 0 0,0 0 0 0 0,0 0 0 0 0,0 0 0 0 0,0 0 1 0 0,-1 0-1 0 0,1-1 0 0 0,0 1 0 0 0,0 0 0 0 0,0-1 0 0 0,0 1 0 0 0,0-1 0 0 0,0 1 1 0 0,1-1-1 0 0,-1 0 0 0 0,0 1 0 0 0,-1-2 0 0 0,0 0 20 0 0,5-1-17 0 0,-2 1-5 0 0,1 0 1 0 0,-1 0-1 0 0,1 1 1 0 0,0-1-1 0 0,0 0 0 0 0,-1 0 1 0 0,1 1-1 0 0,0-1 1 0 0,0 1-1 0 0,0 0 1 0 0,1-1-1 0 0,-1 1 0 0 0,0 0 1 0 0,0 0-1 0 0,1 1 1 0 0,-1-1-1 0 0,1 0 0 0 0,-1 1 1 0 0,1-1-1 0 0,-1 1 1 0 0,3 0-1 0 0,6-1 1 0 0,196-15 80 0 0,-204 15-41 0 0,-1 1-2 0 0,53-9 796 0 0,-53 10-839 0 0,0 0 0 0 0,0 0-1 0 0,-1 0 1 0 0,1 0 0 0 0,-1 1 0 0 0,1-1-1 0 0,-1 0 1 0 0,0 1 0 0 0,1 0 0 0 0,-1-1-1 0 0,0 1 1 0 0,0 0 0 0 0,0-1 0 0 0,0 1-1 0 0,0 0 1 0 0,-1 0 0 0 0,2 4 0 0 0,10 39-24 0 0,-9-35 40 0 0,32 101 55 0 0,-35-110-47 0 0,1 0 1 0 0,-1 0 0 0 0,1 0 0 0 0,-1 0 0 0 0,0-1-1 0 0,0 1 1 0 0,1 0 0 0 0,-1 0 0 0 0,0 0 0 0 0,0 0-1 0 0,0 0 1 0 0,0 0 0 0 0,0 0 0 0 0,0-1 0 0 0,0 1-1 0 0,0 0 1 0 0,-1 0 0 0 0,1 0 0 0 0,0 0 0 0 0,-1 0-1 0 0,1 0 1 0 0,0-1 0 0 0,-1 1 0 0 0,1 0 0 0 0,-1 0-1 0 0,1-1 1 0 0,-1 1 0 0 0,1 0 0 0 0,-1-1 0 0 0,0 1-1 0 0,1 0 1 0 0,-1-1 0 0 0,0 1 0 0 0,1-1 0 0 0,-1 1-1 0 0,0-1 1 0 0,0 1 0 0 0,0-1 0 0 0,1 0 0 0 0,-1 1 0 0 0,0-1-1 0 0,0 0 1 0 0,0 0 0 0 0,0 1 0 0 0,0-1 0 0 0,1 0-1 0 0,-1 0 1 0 0,0 0 0 0 0,0 0 0 0 0,0 0 0 0 0,0 0-1 0 0,0-1 1 0 0,0 1 0 0 0,0 0 0 0 0,1 0 0 0 0,-1-1-1 0 0,-1 0 1 0 0,-1 1 21 0 0,0-1-1 0 0,1 0 1 0 0,-1 0-1 0 0,1 0 0 0 0,0-1 1 0 0,-1 1-1 0 0,1 0 1 0 0,0-1-1 0 0,-1 0 1 0 0,1 0-1 0 0,0 1 1 0 0,0-1-1 0 0,1 0 0 0 0,-1 0 1 0 0,0-1-1 0 0,1 1 1 0 0,-1 0-1 0 0,1-1 1 0 0,-2-3-1 0 0,2-1 2 0 0,0 0 0 0 0,1 1-1 0 0,0-1 1 0 0,0 0 0 0 0,1 0-1 0 0,0 0 1 0 0,0 0 0 0 0,0 0-1 0 0,1 1 1 0 0,0-1 0 0 0,1 0 0 0 0,-1 1-1 0 0,1 0 1 0 0,0-1 0 0 0,1 1-1 0 0,-1 1 1 0 0,1-1 0 0 0,1 0 0 0 0,-1 1-1 0 0,1 0 1 0 0,-1 0 0 0 0,2 0-1 0 0,-1 1 1 0 0,0-1 0 0 0,12-6 0 0 0,-9 6-31 0 0,0-1 1 0 0,0 2 0 0 0,1-1-1 0 0,-1 1 1 0 0,1 0 0 0 0,0 1-1 0 0,0 0 1 0 0,0 0 0 0 0,1 1 0 0 0,-1 0-1 0 0,0 1 1 0 0,1 0 0 0 0,0 0-1 0 0,-1 1 1 0 0,1 0 0 0 0,-1 1-1 0 0,1 0 1 0 0,14 4 0 0 0,-17-2-7 0 0,0-1 0 0 0,0 2 1 0 0,-1-1-1 0 0,1 1 0 0 0,-1 0 1 0 0,1 0-1 0 0,-1 1 0 0 0,0 0 0 0 0,-1 0 1 0 0,1 0-1 0 0,-1 1 0 0 0,0-1 1 0 0,4 8-1 0 0,1 4-29 0 0,-1 1 0 0 0,0 0 0 0 0,9 30 0 0 0,-14-39-15 0 0,-4-4-623 0 0,3 6 241 0 0,46-23-9885 0 0</inkml:trace>
 </inkml:ink>
 </file>
 
@@ -4294,7 +4455,7 @@
           <inkml:channelProperty channel="OE" name="resolution" value="1000" units="1/deg"/>
         </inkml:channelProperties>
       </inkml:inkSource>
-      <inkml:timestamp xml:id="ts0" timeString="2026-04-02T05:37:39.223"/>
+      <inkml:timestamp xml:id="ts0" timeString="2026-04-02T05:37:09.364"/>
     </inkml:context>
     <inkml:brush xml:id="br0">
       <inkml:brushProperty name="width" value="0.2" units="cm"/>
@@ -4302,7 +4463,7 @@
       <inkml:brushProperty name="color" value="#FFC114"/>
     </inkml:brush>
   </inkml:definitions>
-  <inkml:trace contextRef="#ctx0" brushRef="#br0">206 70 4272 0 0,'-64'-45'999'0'0,"62"43"-749"0"0,-27-21 2110 0 0,158 136-1692 0 0,-119-103-657 0 0,-3-5-2 0 0,0 1 0 0 0,0 1 0 0 0,-1-1 0 0 0,0 1 0 0 0,0 0 0 0 0,-1 1-1 0 0,0 0 1 0 0,0-1 0 0 0,0 1 0 0 0,-1 1 0 0 0,4 11 0 0 0,-8-16 3 0 0,-1 0 0 0 0,1 0 0 0 0,-1 0-1 0 0,0 0 1 0 0,0 0 0 0 0,0-1 0 0 0,-1 1 0 0 0,0 0 0 0 0,1 0 0 0 0,-1-1 0 0 0,0 1 0 0 0,-1-1 0 0 0,1 0 0 0 0,-1 0 0 0 0,1 0 0 0 0,-1 0 0 0 0,0 0-1 0 0,0 0 1 0 0,-7 4 0 0 0,-5 5 23 0 0,-1-1-1 0 0,-27 15 1 0 0,29-19-144 0 0,-98 49 418 0 0,96-50-1181 0 0,0 0 0 0 0,-30 5 0 0 0</inkml:trace>
+  <inkml:trace contextRef="#ctx0" brushRef="#br0">122 7 7077 0 0,'2'-6'187'0'0,"-5"16"-135"0"0,2-8-45 0 0,1 0 0 0 0,0 1 0 0 0,0-1-1 0 0,0 0 1 0 0,1 1 0 0 0,-1-1-1 0 0,0 0 1 0 0,1 1 0 0 0,0-1 0 0 0,-1 0-1 0 0,1 0 1 0 0,0 0 0 0 0,0 1-1 0 0,0-1 1 0 0,0 0 0 0 0,1 0 0 0 0,2 3-1 0 0,5 3 46 0 0,0 0-1 0 0,0 0 0 0 0,19 11 1 0 0,-21-15-21 0 0,-1 0 0 0 0,1 0 0 0 0,-1 0 1 0 0,0 1-1 0 0,0 0 0 0 0,0 0 0 0 0,-1 1 1 0 0,0 0-1 0 0,0 0 0 0 0,0 0 0 0 0,4 8 0 0 0,-9-12-16 0 0,1-1 0 0 0,-1 1 0 0 0,0 0 0 0 0,0-1 0 0 0,0 1 0 0 0,0 0 0 0 0,0 0 0 0 0,0-1-1 0 0,-1 1 1 0 0,1 0 0 0 0,0-1 0 0 0,-1 1 0 0 0,0 0 0 0 0,1-1 0 0 0,-1 1 0 0 0,0-1 0 0 0,0 1 0 0 0,1-1-1 0 0,-1 1 1 0 0,0-1 0 0 0,-1 0 0 0 0,1 1 0 0 0,0-1 0 0 0,0 0 0 0 0,-1 0 0 0 0,1 0 0 0 0,0 0 0 0 0,-4 2-1 0 0,-47 24 121 0 0,45-23-100 0 0,-29 10 75 0 0,-1 0-1 0 0,-55 11 0 0 0,91-24-113 0 0,0-1-143 0 0,0 0 116 0 0,1 0 1 0 0,-1 0 0 0 0,1 0-1 0 0,-1 0 1 0 0,1 0 0 0 0,-1 0-1 0 0,1 0 1 0 0,-1 0 0 0 0,1 0-1 0 0,-1 0 1 0 0,1 0 0 0 0,-1-1-1 0 0,1 1 1 0 0,-1 0 0 0 0,1 0-1 0 0,-1 0 1 0 0,1-1 0 0 0,-1 1-1 0 0,1 0 1 0 0,0-1 0 0 0,-1 1 0 0 0,1 0-1 0 0,-1-1 1 0 0,1 1 0 0 0,0 0-1 0 0,0-1 1 0 0,-1 1 0 0 0,1-1-1 0 0,0 1 1 0 0,-1 0 0 0 0,1-1-1 0 0,0 1 1 0 0,0-1 0 0 0,0 1-1 0 0,0-1 1 0 0,0 1 0 0 0,-1-1-1 0 0,1 1 1 0 0,0-1 0 0 0,0 1-1 0 0,0-1 1 0 0,0 1 0 0 0,0-1 0 0 0,0 1-1 0 0,1-1 1 0 0,-1 1 0 0 0,0-1-1 0 0,0 1 1 0 0,0-1 0 0 0,1 0-1 0 0,15-24-3084 0 0,-5 15 837 0 0</inkml:trace>
 </inkml:ink>
 </file>
 
@@ -4358,7 +4519,7 @@
           <inkml:channelProperty channel="OE" name="resolution" value="1000" units="1/deg"/>
         </inkml:channelProperties>
       </inkml:inkSource>
-      <inkml:timestamp xml:id="ts0" timeString="2026-04-02T05:37:40.252"/>
+      <inkml:timestamp xml:id="ts0" timeString="2026-04-02T05:37:09.928"/>
     </inkml:context>
     <inkml:brush xml:id="br0">
       <inkml:brushProperty name="width" value="0.2" units="cm"/>
@@ -4366,7 +4527,7 @@
       <inkml:brushProperty name="color" value="#FFC114"/>
     </inkml:brush>
   </inkml:definitions>
-  <inkml:trace contextRef="#ctx0" brushRef="#br0">15 1 5833 0 0,'-6'7'-344'0'0,"-2"1"-249"0"0</inkml:trace>
+  <inkml:trace contextRef="#ctx0" brushRef="#br0">1 17 5513 0 0,'0'-1'-7'0'0,"0"0"0"0"0,0 1 1 0 0,0-1-1 0 0,0 0 1 0 0,0 0-1 0 0,0 1 1 0 0,0-1-1 0 0,1 0 0 0 0,-1 0 1 0 0,0 1-1 0 0,0-1 1 0 0,1 0-1 0 0,-1 1 1 0 0,1-1-1 0 0,-1 0 1 0 0,1 1-1 0 0,-1-1 0 0 0,1 1 1 0 0,-1-1-1 0 0,1 0 1 0 0,-1 1-1 0 0,1-1 1 0 0,0 1-1 0 0,0-1 0 0 0,20 4 180 0 0,-1 2 0 0 0,0 0 0 0 0,-1 1-1 0 0,34 14 1 0 0,76 46 306 0 0,-97-49-342 0 0,-2 2 0 0 0,0 2 1 0 0,53 46-1 0 0,-74-59-97 0 0,-1-1 0 0 0,-1 1 0 0 0,0 1 0 0 0,0-1 0 0 0,0 1 1 0 0,-1 0-1 0 0,0 1 0 0 0,-1 0 0 0 0,0-1 0 0 0,-1 2 0 0 0,0-1 0 0 0,-1 0 0 0 0,0 1 1 0 0,0 0-1 0 0,-1-1 0 0 0,0 1 0 0 0,0 16 0 0 0,-4-17-14 0 0,0 0 0 0 0,0 0 0 0 0,-1-1-1 0 0,0 1 1 0 0,0-1 0 0 0,-1 1 0 0 0,-1-1 0 0 0,1-1 0 0 0,-1 1 0 0 0,-1-1-1 0 0,0 1 1 0 0,0-2 0 0 0,0 1 0 0 0,-1-1 0 0 0,-10 9 0 0 0,-15 12 48 0 0,-2-2 0 0 0,-43 27 0 0 0,62-44-49 0 0,10-5-80 0 0,-32 20 54 0 0,0-1 0 0 0,-42 18 0 0 0,9-19-2786 0 0,60-21 864 0 0</inkml:trace>
 </inkml:ink>
 </file>
 
@@ -4390,7 +4551,7 @@
           <inkml:channelProperty channel="OE" name="resolution" value="1000" units="1/deg"/>
         </inkml:channelProperties>
       </inkml:inkSource>
-      <inkml:timestamp xml:id="ts0" timeString="2026-04-02T05:37:41.636"/>
+      <inkml:timestamp xml:id="ts0" timeString="2026-04-02T05:37:10.738"/>
     </inkml:context>
     <inkml:brush xml:id="br0">
       <inkml:brushProperty name="width" value="0.2" units="cm"/>
@@ -4398,7 +4559,7 @@
       <inkml:brushProperty name="color" value="#FFC114"/>
     </inkml:brush>
   </inkml:definitions>
-  <inkml:trace contextRef="#ctx0" brushRef="#br0">94 24 3336 0 0,'0'0'-87'0'0,"-1"-2"26"0"0,-4-6 1407 0 0,3 6-1232 0 0,-1 0-1 0 0,0 1 0 0 0,0-1 0 0 0,0 1 0 0 0,0 0 0 0 0,-1 0 0 0 0,1 0 0 0 0,-6-1 1 0 0,3 5-108 0 0,0 1 1 0 0,1 0 0 0 0,0 0 0 0 0,0 0 0 0 0,0 1-1 0 0,0-1 1 0 0,1 1 0 0 0,-6 8 0 0 0,9-11-17 0 0,9 11-77 0 0,-5-13 87 0 0,0 0 1 0 0,0 1 0 0 0,-1-1 0 0 0,1 0-1 0 0,0-1 1 0 0,0 1 0 0 0,0 0 0 0 0,0-1 0 0 0,-1 0-1 0 0,1 1 1 0 0,0-1 0 0 0,0 0 0 0 0,-1 0 0 0 0,1-1-1 0 0,-1 1 1 0 0,3-2 0 0 0,16-6 129 0 0,-19 8-31 0 0,-3 1-55 0 0,1 0 1 0 0,-1 0-1 0 0,0 0 0 0 0,1 1 0 0 0,-1-1 1 0 0,0 0-1 0 0,1 0 0 0 0,-1 1 1 0 0,1-1-1 0 0,-1 0 0 0 0,0 1 0 0 0,1-1 1 0 0,-1 0-1 0 0,1 1 0 0 0,-1-1 0 0 0,1 1 1 0 0,-1-1-1 0 0,1 1 0 0 0,0-1 0 0 0,-1 1 1 0 0,1-1-1 0 0,0 1 0 0 0,-1-1 0 0 0,1 1 1 0 0,0-1-1 0 0,-1 1 0 0 0,1 0 0 0 0,0 0 1 0 0,-24 36 8 0 0,23-36-33 0 0,1-1-18 0 0,0 0-1 0 0,0 0 1 0 0,0 0 0 0 0,0 0 0 0 0,-1 1-1 0 0,1-1 1 0 0,0 0 0 0 0,0 0 0 0 0,0 0-1 0 0,0 1 1 0 0,0-1 0 0 0,0 0-1 0 0,0 0 1 0 0,-1 1 0 0 0,1-1 0 0 0,0 0-1 0 0,0 0 1 0 0,0 1 0 0 0,0-1-1 0 0,0 0 1 0 0,0 0 0 0 0,0 1 0 0 0,0-1-1 0 0,0 0 1 0 0,0 0 0 0 0,1 1 0 0 0,-1-1-1 0 0,0 0 1 0 0,0 0 0 0 0,0 1-1 0 0,0-1 1 0 0,0 0 0 0 0,0 0 0 0 0,0 1-1 0 0,1-1 1 0 0,-1 0 0 0 0,0 0 0 0 0,0 0-1 0 0,0 0 1 0 0,0 1 0 0 0,1-1-1 0 0,-1 0 1 0 0,0 0 0 0 0,0 0 0 0 0,1 0-1 0 0,-1 0 1 0 0,0 1 0 0 0,0-1 0 0 0,0 0-1 0 0,1 0 1 0 0,-1 0 0 0 0,0 0-1 0 0,0 0 1 0 0,1 0 0 0 0,-1 0 0 0 0,0 0-1 0 0,0 0 1 0 0,1 0 0 0 0,-1 0 0 0 0,0 0-1 0 0,1 0 1 0 0,-1 0 0 0 0,0 0-1 0 0,0 0 1 0 0,0-1 0 0 0,1 1 0 0 0,-1 0-1 0 0,12-6 21 0 0,-1 0-1 0 0,0 0 1 0 0,0-1-1 0 0,10-8 1 0 0,-19 13 30 0 0,-10 7-42 0 0,0-1-273 0 0,-49 30 813 0 0,53-31-914 0 0,-1 0-1 0 0,1 0 1 0 0,0 1-1 0 0,0 0 1 0 0,0 0 0 0 0,0 0-1 0 0,1 0 1 0 0,-1 0-1 0 0,1 1 1 0 0,-4 7 0 0 0</inkml:trace>
+  <inkml:trace contextRef="#ctx0" brushRef="#br0">399 42 5380 0 0,'2'-2'13'0'0,"-1"0"0"0"0,1 0-1 0 0,-1 0 1 0 0,0 0-1 0 0,0-1 1 0 0,0 1 0 0 0,0-1-1 0 0,-1 1 1 0 0,1 0-1 0 0,0-1 1 0 0,-1 1-1 0 0,0-1 1 0 0,0 1 0 0 0,0-4-1 0 0,0 6-5 0 0,0 0 1 0 0,0-1-1 0 0,-1 1 0 0 0,1 0 0 0 0,0 0 0 0 0,0-1 1 0 0,-1 1-1 0 0,1 0 0 0 0,0 0 0 0 0,-1-1 0 0 0,1 1 1 0 0,0 0-1 0 0,-1 0 0 0 0,1 0 0 0 0,0 0 1 0 0,-1 0-1 0 0,1 0 0 0 0,-1 0 0 0 0,1-1 0 0 0,0 1 1 0 0,-1 0-1 0 0,1 0 0 0 0,0 0 0 0 0,-1 0 0 0 0,1 0 1 0 0,-1 1-1 0 0,1-1 0 0 0,0 0 0 0 0,-1 0 1 0 0,1 0-1 0 0,-1 0 0 0 0,-25 13-5 0 0,-13 14 51 0 0,2 2 0 0 0,1 2 1 0 0,2 1-1 0 0,1 2 0 0 0,1 1 0 0 0,-49 72 1 0 0,70-91-39 0 0,1 1 1 0 0,0 0-1 0 0,2 0 1 0 0,0 1-1 0 0,0 0 1 0 0,2 0-1 0 0,0 1 1 0 0,1-1-1 0 0,-2 24 1 0 0,6-32-16 0 0,0-1 1 0 0,1 1 0 0 0,0 0-1 0 0,0-1 1 0 0,1 1 0 0 0,1-1-1 0 0,-1 1 1 0 0,2-1 0 0 0,-1 0-1 0 0,1 0 1 0 0,1 0 0 0 0,0 0-1 0 0,0 0 1 0 0,0-1-1 0 0,1 0 1 0 0,0 0 0 0 0,1 0-1 0 0,0-1 1 0 0,0 1 0 0 0,11 8-1 0 0,-7-7-306 0 0,0-1 0 0 0,1-1 0 0 0,0 1 0 0 0,0-2 0 0 0,1 0 1 0 0,0 0-1 0 0,0-1 0 0 0,22 6 0 0 0,18 1-1428 0 0</inkml:trace>
 </inkml:ink>
 </file>
 
@@ -4422,7 +4583,7 @@
           <inkml:channelProperty channel="OE" name="resolution" value="1000" units="1/deg"/>
         </inkml:channelProperties>
       </inkml:inkSource>
-      <inkml:timestamp xml:id="ts0" timeString="2026-04-02T05:37:42.243"/>
+      <inkml:timestamp xml:id="ts0" timeString="2026-04-02T05:36:52.739"/>
     </inkml:context>
     <inkml:brush xml:id="br0">
       <inkml:brushProperty name="width" value="0.2" units="cm"/>
@@ -4430,7 +4591,7 @@
       <inkml:brushProperty name="color" value="#FFC114"/>
     </inkml:brush>
   </inkml:definitions>
-  <inkml:trace contextRef="#ctx0" brushRef="#br0">140 12 4932 0 0,'0'0'-134'0'0,"-14"-7"-279"0"0,-9 3 332 0 0,22 3 366 0 0,-4 3-267 0 0,5-2-18 0 0,-4 1 7 0 0,0 1-1 0 0,0 0 1 0 0,0-1-1 0 0,1 1 1 0 0,-1 0 0 0 0,1 1-1 0 0,0-1 1 0 0,-1 1 0 0 0,1-1-1 0 0,0 1 1 0 0,0 0 0 0 0,1 0-1 0 0,-1 0 1 0 0,1 1 0 0 0,0-1-1 0 0,-1 1 1 0 0,-2 5 1621 0 0,33-26 543 0 0,-35 19-2077 0 0,-21 6 280 0 0,26-8-576 0 0,1 1 1 0 0,-1-1-1 0 0,0 1 1 0 0,1-1-1 0 0,-1 1 1 0 0,0 0-1 0 0,1 0 0 0 0,-1-1 1 0 0,1 1-1 0 0,-1 0 1 0 0,1 0-1 0 0,0 1 1 0 0,-1-1-1 0 0,1 0 1 0 0,0 0-1 0 0,0 1 1 0 0,0-1-1 0 0,0 1 1 0 0,0-1-1 0 0,0 1 1 0 0,-1 2-1 0 0</inkml:trace>
+  <inkml:trace contextRef="#ctx0" brushRef="#br0">396 83 4236 0 0,'-29'-43'2216'0'0,"28"42"-1924"0"0,-28-23 468 0 0,26 22-736 0 0,0 0-1 0 0,0 1 1 0 0,-1-1-1 0 0,1 1 1 0 0,0-1-1 0 0,-1 1 1 0 0,1 0-1 0 0,-1 0 1 0 0,1 1 0 0 0,-1-1-1 0 0,0 1 1 0 0,1 0-1 0 0,-1-1 1 0 0,1 2-1 0 0,-1-1 1 0 0,-3 1-1 0 0,-3 0-9 0 0,0 1 0 0 0,0 0 1 0 0,1 0-1 0 0,-1 1 0 0 0,-9 5 0 0 0,5-1-10 0 0,1 1-1 0 0,1 0 1 0 0,-1 1 0 0 0,1 0 0 0 0,1 1-1 0 0,0 1 1 0 0,0 0 0 0 0,1 0 0 0 0,-14 21 0 0 0,13-17-4 0 0,2 0 0 0 0,-1 1 0 0 0,2 0 0 0 0,1 0 0 0 0,0 0 0 0 0,0 1 0 0 0,-6 33 0 0 0,12-43-1 0 0,0 0 1 0 0,0 0 0 0 0,1 0-1 0 0,0 0 1 0 0,0 0-1 0 0,1 0 1 0 0,-1 0 0 0 0,2 0-1 0 0,-1 0 1 0 0,1 0 0 0 0,0 0-1 0 0,0-1 1 0 0,1 1-1 0 0,0-1 1 0 0,0 1 0 0 0,1-1-1 0 0,0 0 1 0 0,0-1 0 0 0,0 1-1 0 0,7 6 1 0 0,-2-3 17 0 0,1-1 1 0 0,0 0-1 0 0,1 0 0 0 0,0-1 1 0 0,0-1-1 0 0,0 0 1 0 0,1-1-1 0 0,-1 0 0 0 0,1 0 1 0 0,17 3-1 0 0,-7-2-13 0 0,18 6 71 0 0,0-2-1 0 0,2-2 0 0 0,-1-2 1 0 0,53 2-1 0 0,-82-8-36 0 0,-1 0-1 0 0,0-1 1 0 0,1 0-1 0 0,-1-1 0 0 0,0-1 1 0 0,0 0-1 0 0,0 0 1 0 0,0-1-1 0 0,-1 0 1 0 0,1-1-1 0 0,-1 0 1 0 0,0-1-1 0 0,-1 0 1 0 0,1 0-1 0 0,-1-1 1 0 0,-1 0-1 0 0,1-1 0 0 0,-1 0 1 0 0,0-1-1 0 0,10-14 1 0 0,-12 15 13 0 0,-1 0 1 0 0,0-1-1 0 0,-1 1 1 0 0,0-1-1 0 0,0 0 0 0 0,-1 0 1 0 0,0-1-1 0 0,-1 1 1 0 0,0-1-1 0 0,0 1 0 0 0,-1-1 1 0 0,0 0-1 0 0,-1 1 1 0 0,0-1-1 0 0,-1-10 0 0 0,-1 12-11 0 0,1 1-1 0 0,-1 0 0 0 0,0-1 0 0 0,0 1 0 0 0,-1 0 0 0 0,0 0 0 0 0,0 1 0 0 0,-1-1 1 0 0,1 1-1 0 0,-2-1 0 0 0,1 1 0 0 0,-1 0 0 0 0,1 1 0 0 0,-2-1 0 0 0,1 1 0 0 0,-1 0 1 0 0,1 0-1 0 0,-1 1 0 0 0,-1-1 0 0 0,-8-3 0 0 0,-9-4 12 0 0,-1 1 0 0 0,0 2 0 0 0,0 0 0 0 0,-38-6 0 0 0,-104-9-120 0 0,96 15-393 0 0,68 9-77 0 0,-4 0-581 0 0,0 0 76 0 0</inkml:trace>
 </inkml:ink>
 </file>
 
@@ -4454,7 +4615,7 @@
           <inkml:channelProperty channel="OE" name="resolution" value="1000" units="1/deg"/>
         </inkml:channelProperties>
       </inkml:inkSource>
-      <inkml:timestamp xml:id="ts0" timeString="2026-04-02T05:37:25.243"/>
+      <inkml:timestamp xml:id="ts0" timeString="2026-04-02T05:36:53.976"/>
     </inkml:context>
     <inkml:brush xml:id="br0">
       <inkml:brushProperty name="width" value="0.2" units="cm"/>
@@ -4462,7 +4623,7 @@
       <inkml:brushProperty name="color" value="#FFC114"/>
     </inkml:brush>
   </inkml:definitions>
-  <inkml:trace contextRef="#ctx0" brushRef="#br0">22 62 5000 0 0,'0'0'-346'0'0,"-21"5"891"0"0,26-7-540 0 0,17-9 41 0 0,13-2 118 0 0,-12 7-152 0 0,-21 6-8 0 0,1-1-5 0 0,66-13 42 0 0,-67 14-49 0 0,30-8 13 0 0,-24 4-5 0 0,-3 3 6 0 0,0-1 0 0 0,0 1-1 0 0,0 0 1 0 0,0 0 0 0 0,0 1 0 0 0,0-1 0 0 0,6 1-1 0 0,5-1 7 0 0,-13 1-12 0 0,35 0-38 0 0,-27 0 27 0 0,-6 1 11 0 0,0 1-1 0 0,0-1 1 0 0,0 1 0 0 0,0 0 0 0 0,-1 0-1 0 0,1 1 1 0 0,-1-1 0 0 0,1 1 0 0 0,-1 0-1 0 0,0 0 1 0 0,7 7 0 0 0,9 5-16 0 0,-17-13 21 0 0,-1-1 0 0 0,1 0-1 0 0,-1 1 1 0 0,1 0 0 0 0,-1-1-1 0 0,0 1 1 0 0,0 0 0 0 0,1 0-1 0 0,-1 0 1 0 0,-1 1 0 0 0,1-1-1 0 0,0 0 1 0 0,-1 1 0 0 0,1-1-1 0 0,-1 1 1 0 0,0 0 0 0 0,1-1-1 0 0,-1 1 1 0 0,-1 0 0 0 0,1 0-1 0 0,0-1 1 0 0,-1 1 0 0 0,1 0-1 0 0,-1 5 1 0 0,-1-4 1 0 0,0-1 0 0 0,0 0 0 0 0,0 0 0 0 0,0 0 0 0 0,-1 0 0 0 0,1 0 0 0 0,-1 0 0 0 0,0 0 1 0 0,0 0-1 0 0,0-1 0 0 0,0 1 0 0 0,-1-1 0 0 0,1 0 0 0 0,-1 1 0 0 0,1-1 0 0 0,-1 0 0 0 0,0 0 0 0 0,0-1 0 0 0,0 1 0 0 0,0-1 0 0 0,-5 3 0 0 0,-24 10 99 0 0,-1-1 0 0 0,0-1-1 0 0,-39 8 1 0 0,69-20-58 0 0,-17 3 289 0 0,39-7-345 0 0,-1 0 0 0 0,1 1 0 0 0,-1 1 0 0 0,1 1 0 0 0,0 0 0 0 0,0 1 0 0 0,26 5 0 0 0,-38-5 14 0 0,1 2 0 0 0,0-1 0 0 0,0 1-1 0 0,-1 0 1 0 0,1 0 0 0 0,-1 1 0 0 0,0 0-1 0 0,0 1 1 0 0,0-1 0 0 0,0 1 0 0 0,-1 1-1 0 0,1-1 1 0 0,-1 1 0 0 0,0 0 0 0 0,0 1-1 0 0,-1-1 1 0 0,0 1 0 0 0,0 0 0 0 0,0 1-1 0 0,-1-1 1 0 0,5 10 0 0 0,-8-15-2 0 0,-1 1 0 0 0,0-1 0 0 0,1 1 0 0 0,-1-1 0 0 0,0 1 0 0 0,0-1 1 0 0,0 1-1 0 0,0-1 0 0 0,0 1 0 0 0,-1 0 0 0 0,1-1 0 0 0,0 1 0 0 0,-1-1 0 0 0,1 1 0 0 0,-1-1 0 0 0,1 1 0 0 0,-1-1 1 0 0,0 0-1 0 0,0 1 0 0 0,1-1 0 0 0,-1 0 0 0 0,0 0 0 0 0,0 1 0 0 0,0-1 0 0 0,-1 0 0 0 0,1 0 0 0 0,0 0 0 0 0,0 0 1 0 0,-1 0-1 0 0,1 0 0 0 0,0-1 0 0 0,-3 2 0 0 0,-46 20 39 0 0,16-12 176 0 0,0-1-1 0 0,-1-1 1 0 0,0-2 0 0 0,0-2-1 0 0,-41 1 1 0 0,74-5-101 0 0,-1 0-133 0 0,0 1 0 0 0,1-1 0 0 0,-1 1 0 0 0,1-1-1 0 0,-1 0 1 0 0,1 0 0 0 0,-1 0 0 0 0,1-1 0 0 0,-1 1-1 0 0,0 0 1 0 0,1-1 0 0 0,-1 0 0 0 0,-3-1 0 0 0,7-1-320 0 0,1 0 0 0 0,0 0 0 0 0,0 0 0 0 0,0 0 0 0 0,0 0 0 0 0,0 1 0 0 0,0-1 0 0 0,1 1 0 0 0,-1 0 0 0 0,1-1 0 0 0,3-1 0 0 0,10-4-1659 0 0</inkml:trace>
+  <inkml:trace contextRef="#ctx0" brushRef="#br0">325 32 5424 0 0,'0'0'-17'0'0,"0"-1"-1"0"0,1 1 1 0 0,-1-1-1 0 0,0 1 0 0 0,0-1 1 0 0,0 1-1 0 0,0-1 1 0 0,0 1-1 0 0,0-1 0 0 0,1 1 1 0 0,-1-1-1 0 0,0 1 0 0 0,0-1 1 0 0,-1 1-1 0 0,1-1 1 0 0,0 1-1 0 0,0-1 0 0 0,0 1 1 0 0,0-1-1 0 0,0 1 1 0 0,0-1-1 0 0,-1 1 0 0 0,1-1 1 0 0,0 1-1 0 0,0-1 0 0 0,-1 1 1 0 0,1-1-1 0 0,0 1 1 0 0,-1 0-1 0 0,1-1 0 0 0,-1 1 1 0 0,1 0-1 0 0,0-1 1 0 0,-1 1-1 0 0,0-1 0 0 0,-26-9 208 0 0,17 8-66 0 0,0 1 1 0 0,-1 0-1 0 0,1 0 1 0 0,-14 1 0 0 0,14 3-115 0 0,-1-1 0 0 0,1 1 0 0 0,0 0 0 0 0,0 1 1 0 0,1 0-1 0 0,-1 1 0 0 0,1 0 0 0 0,0 1 1 0 0,1 0-1 0 0,-1 0 0 0 0,1 0 0 0 0,0 1 1 0 0,0 1-1 0 0,1-1 0 0 0,0 1 0 0 0,1 0 1 0 0,-1 1-1 0 0,2 0 0 0 0,-9 15 0 0 0,6-9 8 0 0,0 0 0 0 0,1 1-1 0 0,1 1 1 0 0,1-1 0 0 0,0 1-1 0 0,1 0 1 0 0,0 0 0 0 0,2 0-1 0 0,0 0 1 0 0,1 1 0 0 0,2 26-1 0 0,0-34 35 0 0,1 1 0 0 0,1 0 1 0 0,-1-1-1 0 0,2 1 0 0 0,0-1 0 0 0,0 0 0 0 0,1 0 0 0 0,0-1 0 0 0,0 1 0 0 0,1-1 0 0 0,0 0 1 0 0,1-1-1 0 0,0 1 0 0 0,1-1 0 0 0,-1-1 0 0 0,2 1 0 0 0,-1-2 0 0 0,1 1 0 0 0,0-1 0 0 0,14 8 1 0 0,-6-5 49 0 0,1-1 0 0 0,0 0 0 0 0,1-2 0 0 0,-1 0 0 0 0,2-1 0 0 0,-1 0 0 0 0,0-2 0 0 0,1 0 0 0 0,-1-2 0 0 0,29 0 0 0 0,-21-2 2 0 0,0-1 0 0 0,-1-2 0 0 0,1 0 1 0 0,-1-2-1 0 0,0-1 0 0 0,0 0 0 0 0,28-15 0 0 0,-40 15-58 0 0,0 0-1 0 0,0-1 1 0 0,-1-1-1 0 0,0 0 1 0 0,-1-1-1 0 0,0 0 1 0 0,-1-1 0 0 0,0-1-1 0 0,0 1 1 0 0,-1-2-1 0 0,-1 1 1 0 0,0-2-1 0 0,10-20 1 0 0,-16 28-16 0 0,-1 0 0 0 0,0 0 0 0 0,0 0 1 0 0,0 0-1 0 0,-1 0 0 0 0,0-1 0 0 0,0 1 0 0 0,0 0 1 0 0,-1-1-1 0 0,0 1 0 0 0,-1-1 0 0 0,1 1 0 0 0,-1 0 1 0 0,-1-1-1 0 0,1 1 0 0 0,-1 0 0 0 0,0 0 0 0 0,0 0 1 0 0,-1 0-1 0 0,1 0 0 0 0,-1 0 0 0 0,-1 1 0 0 0,1-1 1 0 0,-1 1-1 0 0,0 0 0 0 0,0 0 0 0 0,-10-8 0 0 0,2 1 4 0 0,-2 0 0 0 0,1 1-1 0 0,-1 1 1 0 0,-1 0 0 0 0,0 1-1 0 0,0 0 1 0 0,-1 2 0 0 0,0-1-1 0 0,-20-4 1 0 0,-5 1-75 0 0,-1 3 0 0 0,-1 1 1 0 0,1 3-1 0 0,-1 1 0 0 0,-48 3 0 0 0,88 0-243 0 0,-22 0-305 0 0</inkml:trace>
 </inkml:ink>
 </file>
 
@@ -4486,7 +4647,7 @@
           <inkml:channelProperty channel="OE" name="resolution" value="1000" units="1/deg"/>
         </inkml:channelProperties>
       </inkml:inkSource>
-      <inkml:timestamp xml:id="ts0" timeString="2026-04-02T05:37:26.021"/>
+      <inkml:timestamp xml:id="ts0" timeString="2026-04-02T05:36:55.086"/>
     </inkml:context>
     <inkml:brush xml:id="br0">
       <inkml:brushProperty name="width" value="0.2" units="cm"/>
@@ -4494,7 +4655,7 @@
       <inkml:brushProperty name="color" value="#FFC114"/>
     </inkml:brush>
   </inkml:definitions>
-  <inkml:trace contextRef="#ctx0" brushRef="#br0">118 60 4976 0 0,'1'-5'-222'0'0,"3"-26"-527"0"0,-4 30 758 0 0,0 0 0 0 0,0 0-1 0 0,-1 0 1 0 0,1 0-1 0 0,0 0 1 0 0,0 0 0 0 0,-1 0-1 0 0,1 0 1 0 0,-1 0-1 0 0,1 1 1 0 0,-1-1 0 0 0,1 0-1 0 0,-1 0 1 0 0,0 0-1 0 0,1 1 1 0 0,-1-1 0 0 0,0 0-1 0 0,1 1 1 0 0,-1-1-1 0 0,0 1 1 0 0,0-1 0 0 0,0 1-1 0 0,0-1 1 0 0,1 1 0 0 0,-1-1-1 0 0,-1 1 1 0 0,-1-1 62 0 0,2 0-68 0 0,0 1-1 0 0,0 0 1 0 0,0-1 0 0 0,0 1-1 0 0,0 0 1 0 0,0 0-1 0 0,0-1 1 0 0,0 1 0 0 0,-1 0-1 0 0,1 0 1 0 0,0 0-1 0 0,0 1 1 0 0,0-1 0 0 0,0 0-1 0 0,0 0 1 0 0,0 0-1 0 0,0 1 1 0 0,0-1 0 0 0,0 1-1 0 0,0-1 1 0 0,0 1 0 0 0,-1 0-1 0 0,-23 9 25 0 0,20-7-28 0 0,1 1 0 0 0,0-1 0 0 0,0 1 0 0 0,0-1 0 0 0,1 1 0 0 0,-1 0 0 0 0,1 1 0 0 0,0-1 0 0 0,0 1 0 0 0,1-1 0 0 0,-1 1 0 0 0,1 0 0 0 0,0 0 0 0 0,0 0 0 0 0,1 0 0 0 0,0 0 0 0 0,-1 0 0 0 0,2 0 0 0 0,-1 1 0 0 0,0-1 0 0 0,1 0 0 0 0,1 9 0 0 0,2-7 19 0 0,0-1 0 0 0,0 1 0 0 0,1-1 0 0 0,0 0 0 0 0,0 0 0 0 0,1-1 0 0 0,0 1 0 0 0,0-1 0 0 0,0 0 0 0 0,0 0 0 0 0,1-1 0 0 0,0 1 0 0 0,0-1 0 0 0,0-1 0 0 0,0 1 0 0 0,1-1 1 0 0,-1 0-1 0 0,1 0 0 0 0,0-1 0 0 0,13 3 0 0 0,-3-1 90 0 0,0 0 0 0 0,1-2 0 0 0,0 0 0 0 0,0 0 0 0 0,-1-2 0 0 0,1 0 0 0 0,25-5 1 0 0,-38 5-52 0 0,0-1 1 0 0,-1-1-1 0 0,1 1 1 0 0,-1-1-1 0 0,1 1 1 0 0,-1-1-1 0 0,0-1 1 0 0,1 1-1 0 0,-1-1 1 0 0,0 1-1 0 0,-1-1 1 0 0,1 0-1 0 0,0 0 1 0 0,-1-1-1 0 0,0 1 1 0 0,0-1-1 0 0,0 0 1 0 0,0 0-1 0 0,0 0 1 0 0,-1 0-1 0 0,4-9 1 0 0,-5 10-24 0 0,0 0 0 0 0,0 0 0 0 0,-1 0 1 0 0,1-1-1 0 0,-1 1 0 0 0,0 0 0 0 0,0-1 1 0 0,0 1-1 0 0,0 0 0 0 0,0 0 0 0 0,-1-1 0 0 0,0 1 1 0 0,1 0-1 0 0,-1 0 0 0 0,0 0 0 0 0,-1 0 1 0 0,1 0-1 0 0,-1 0 0 0 0,1 0 0 0 0,-1 0 1 0 0,0 0-1 0 0,0 1 0 0 0,0-1 0 0 0,0 1 1 0 0,0-1-1 0 0,-1 1 0 0 0,1 0 0 0 0,-1 0 0 0 0,0 0 1 0 0,1 0-1 0 0,-1 0 0 0 0,-4-1 0 0 0,-6-2 12 0 0,0 0 0 0 0,1 1-1 0 0,-1 1 1 0 0,-1 0 0 0 0,1 1-1 0 0,0 0 1 0 0,-1 1 0 0 0,-18 1-1 0 0,-11-2-14 0 0,19 3-461 0 0</inkml:trace>
+  <inkml:trace contextRef="#ctx0" brushRef="#br0">293 139 5913 0 0,'0'-4'-264'0'0,"1"2"275"0"0,-1 0 1 0 0,0 1-1 0 0,1-1 0 0 0,-1 0 1 0 0,0 0-1 0 0,0 1 0 0 0,0-1 1 0 0,-1 0-1 0 0,1 0 1 0 0,0 1-1 0 0,-1-1 0 0 0,1 0 1 0 0,-1 0-1 0 0,1 1 0 0 0,-1-1 1 0 0,0 1-1 0 0,0-1 1 0 0,0 1-1 0 0,0-1 0 0 0,0 1 1 0 0,0-1-1 0 0,0 1 0 0 0,0 0 1 0 0,-1 0-1 0 0,1-1 1 0 0,-3-1-1 0 0,2 3 102 0 0,-14-6 147 0 0,9 4-238 0 0,0 0 0 0 0,0 0 1 0 0,0 1-1 0 0,0 0 0 0 0,0 1 1 0 0,0-1-1 0 0,0 2 0 0 0,0-1 1 0 0,0 1-1 0 0,0 0 0 0 0,-1 0 1 0 0,2 0-1 0 0,-1 1 0 0 0,0 1 1 0 0,0-1-1 0 0,1 1 0 0 0,-1 0 1 0 0,1 0-1 0 0,0 1 0 0 0,0 0 1 0 0,0 0-1 0 0,-9 8 0 0 0,7-4-16 0 0,-1 0 1 0 0,1 0-1 0 0,0 1 0 0 0,1 1 0 0 0,0-1 0 0 0,1 1 0 0 0,0 0 1 0 0,0 0-1 0 0,1 1 0 0 0,1-1 0 0 0,-1 1 0 0 0,2 0 0 0 0,-4 14 1 0 0,6-17 9 0 0,-1 0 0 0 0,2 1 1 0 0,-1-1-1 0 0,1 1 0 0 0,0-1 0 0 0,1 1 1 0 0,0-1-1 0 0,0 1 0 0 0,1-1 1 0 0,0 0-1 0 0,0 0 0 0 0,1 0 0 0 0,0 0 1 0 0,0 0-1 0 0,1 0 0 0 0,0-1 1 0 0,1 0-1 0 0,6 9 0 0 0,-4-8 30 0 0,0-1-1 0 0,0 0 0 0 0,1 0 1 0 0,0-1-1 0 0,0 0 0 0 0,1 0 1 0 0,0-1-1 0 0,0 0 1 0 0,0-1-1 0 0,0 0 0 0 0,1 0 1 0 0,0-1-1 0 0,0 0 0 0 0,0-1 1 0 0,10 1-1 0 0,7 1 27 0 0,0 0 1 0 0,1-2-1 0 0,-1-2 1 0 0,1 0-1 0 0,-1-2 0 0 0,0-1 1 0 0,36-8-1 0 0,-53 9-52 0 0,0-1 1 0 0,0-1-1 0 0,0 0 0 0 0,0 0 0 0 0,-1-1 0 0 0,0 0 1 0 0,1-1-1 0 0,-2 0 0 0 0,1 0 0 0 0,-1-1 0 0 0,0 0 1 0 0,0 0-1 0 0,-1-1 0 0 0,0 0 0 0 0,-1 0 0 0 0,1-1 1 0 0,-1 0-1 0 0,-1 0 0 0 0,0-1 0 0 0,0 1 0 0 0,6-20 0 0 0,-7 15 39 0 0,-1 0 0 0 0,0 0 0 0 0,-1-1 0 0 0,0 1 0 0 0,-1 0 0 0 0,-1-1-1 0 0,0 1 1 0 0,-1-1 0 0 0,0 1 0 0 0,-1 0 0 0 0,-1 0 0 0 0,-4-14-1 0 0,4 20-9 0 0,0 0 0 0 0,0 1 0 0 0,0-1 0 0 0,-1 1 0 0 0,0 0-1 0 0,0 0 1 0 0,0 0 0 0 0,-1 1 0 0 0,-1-1 0 0 0,1 1 0 0 0,-1 1-1 0 0,0-1 1 0 0,0 1 0 0 0,0 0 0 0 0,-1 0 0 0 0,0 0 0 0 0,0 1-1 0 0,0 0 1 0 0,0 1 0 0 0,-1 0 0 0 0,1 0 0 0 0,-13-3 0 0 0,0 2 3 0 0,-1 1 0 0 0,0 1 0 0 0,1 1 1 0 0,-1 1-1 0 0,-34 4 0 0 0,-102 25 122 0 0,63-10-219 0 0,85-15 250 0 0,1-1-1364 0 0</inkml:trace>
 </inkml:ink>
 </file>
 
@@ -4518,7 +4679,7 @@
           <inkml:channelProperty channel="OE" name="resolution" value="1000" units="1/deg"/>
         </inkml:channelProperties>
       </inkml:inkSource>
-      <inkml:timestamp xml:id="ts0" timeString="2026-04-02T05:37:26.635"/>
+      <inkml:timestamp xml:id="ts0" timeString="2026-04-02T05:37:20.490"/>
     </inkml:context>
     <inkml:brush xml:id="br0">
       <inkml:brushProperty name="width" value="0.2" units="cm"/>
@@ -4526,7 +4687,7 @@
       <inkml:brushProperty name="color" value="#FFC114"/>
     </inkml:brush>
   </inkml:definitions>
-  <inkml:trace contextRef="#ctx0" brushRef="#br0">0 89 5416 0 0,'4'-12'-64'0'0,"-1"-1"0"0"0,0 0 0 0 0,-1 0 0 0 0,0-16 0 0 0,-2 28 135 0 0,0-4-13 0 0,0 3-24 0 0,0 4 177 0 0,3 26-199 0 0,2 0 1 0 0,0 0 0 0 0,2 0-1 0 0,1-1 1 0 0,1 0-1 0 0,21 42 1 0 0,-12-25 2 0 0,-14-36 77 0 0,0 1 0 0 0,-1-1 0 0 0,0 1-1 0 0,-1 0 1 0 0,0 0 0 0 0,0 0 0 0 0,0 0 0 0 0,-2 0-1 0 0,1 0 1 0 0,-1 0 0 0 0,0 0 0 0 0,-3 17 0 0 0,2-25 81 0 0,1-1-178 0 0,1 0 0 0 0,-1 0 0 0 0,0 0 0 0 0,0 0 0 0 0,0 0 0 0 0,0-1 0 0 0,0 1-1 0 0,0 0 1 0 0,0 0 0 0 0,0 0 0 0 0,0 0 0 0 0,1 0 0 0 0,-1 0 0 0 0,0 0 0 0 0,0 0 0 0 0,0 0 0 0 0,0 0 0 0 0,0 0 0 0 0,0 0 0 0 0,1 0 0 0 0,-1 0 0 0 0,0 0 0 0 0,0 0 0 0 0,0 0-1 0 0,0 0 1 0 0,0 0 0 0 0,0 0 0 0 0,0 0 0 0 0,1 0 0 0 0,-1 0 0 0 0,0 0 0 0 0,0 0 0 0 0,0 0 0 0 0,0 0 0 0 0,0 0 0 0 0,0 0 0 0 0,0 1 0 0 0,0-1 0 0 0,1 0 0 0 0,-1 0 0 0 0,0 0-1 0 0,0 0 1 0 0,0 0 0 0 0,0 0 0 0 0,0 0 0 0 0,0 0 0 0 0,0 1 0 0 0,0-1 0 0 0,0 0 0 0 0,0 0 0 0 0,0 0 0 0 0,0 0 0 0 0,0 0 0 0 0,0 0 0 0 0,0 0 0 0 0,0 1 0 0 0,0-1 0 0 0,0 0-1 0 0,0 0 1 0 0,0 0 0 0 0,0 0 0 0 0,0 0 0 0 0,0 0 0 0 0,0 0 0 0 0,0 1 0 0 0,0-1 0 0 0,0 0 0 0 0,0 0 0 0 0,0 0 0 0 0,15-10-592 0 0,18-20-1721 0 0,-14 13 503 0 0</inkml:trace>
+  <inkml:trace contextRef="#ctx0" brushRef="#br0">53 24 4780 0 0,'0'0'-146'0'0,"1"-1"43"0"0,1 0 225 0 0,-1 0 1 0 0,0 0-1 0 0,1 0 1 0 0,-1-1-1 0 0,0 1 1 0 0,0 0-1 0 0,0-1 1 0 0,0 1-1 0 0,0-1 0 0 0,0 1 1 0 0,-1-1-1 0 0,1 1 1 0 0,0-2-1 0 0,-2 2-114 0 0,-1 0 0 0 0,0 1-1 0 0,1 0 1 0 0,-1-1 0 0 0,1 1 0 0 0,-1 0 0 0 0,0 0-1 0 0,0 0 1 0 0,1 0 0 0 0,-1 0 0 0 0,0 1-1 0 0,1-1 1 0 0,-1 0 0 0 0,1 1 0 0 0,-1-1-1 0 0,0 1 1 0 0,1 0 0 0 0,-1-1 0 0 0,1 1-1 0 0,-1 0 1 0 0,1 0 0 0 0,0 0 0 0 0,-1 0-1 0 0,1 0 1 0 0,0 0 0 0 0,0 1 0 0 0,-2 1-1 0 0,1-1-10 0 0,0 0 0 0 0,-1 1 0 0 0,1-1 0 0 0,0 1 0 0 0,0 0 0 0 0,1-1 0 0 0,-1 1 0 0 0,1 0 0 0 0,-1 0 0 0 0,1 0 0 0 0,0 0 0 0 0,0 1 0 0 0,0-1 0 0 0,0 6 0 0 0,1-7-27 0 0,0-1 21 0 0,1 0 0 0 0,0 0 1 0 0,0 0-1 0 0,-1 0 0 0 0,1 0 1 0 0,0 0-1 0 0,0-1 0 0 0,0 1 1 0 0,0 0-1 0 0,0 0 0 0 0,0-1 1 0 0,0 1-1 0 0,0-1 0 0 0,0 1 1 0 0,1-1-1 0 0,-1 1 0 0 0,0-1 1 0 0,0 0-1 0 0,0 0 0 0 0,1 1 1 0 0,1-1-1 0 0,10-5 40 0 0,1 0 1 0 0,-2 0-1 0 0,1-2 0 0 0,20-12 685 0 0,-46 22-684 0 0,8-3-24 0 0,1 0 0 0 0,0 1 0 0 0,-1 0 0 0 0,1 0 0 0 0,0 0 0 0 0,0 1 0 0 0,0-1 0 0 0,-1 1 0 0 0,2 0 0 0 0,-1 0 0 0 0,0 0 0 0 0,0 1 0 0 0,1-1 0 0 0,-1 1 0 0 0,1 0 0 0 0,-5 5 0 0 0,8-7 0 0 0,-2 4-1 0 0,2-4 18 0 0,3-5 2 0 0,-2 4-8 0 0,1-1 12 0 0,1-1-1 0 0,-1 0 1 0 0,0 0-1 0 0,1 0 1 0 0,-1 0 0 0 0,0-1-1 0 0,0 1 1 0 0,0-1-1 0 0,-1 1 1 0 0,1-1 0 0 0,0 1-1 0 0,-1-1 1 0 0,2-3-1 0 0,-4 5-35 0 0,1 1 0 0 0,0-1 0 0 0,-1 1 0 0 0,1-1 0 0 0,-1 1-1 0 0,1-1 1 0 0,-1 1 0 0 0,1-1 0 0 0,0 1 0 0 0,-1 0 0 0 0,1-1 0 0 0,-1 1-1 0 0,0 0 1 0 0,1 0 0 0 0,-1-1 0 0 0,1 1 0 0 0,-1 0 0 0 0,1 0 0 0 0,-1 0-1 0 0,0 0 1 0 0,1-1 0 0 0,-1 1 0 0 0,0 0 0 0 0,1 0 0 0 0,-1 0-1 0 0,1 0 1 0 0,-1 1 0 0 0,0-1 0 0 0,1 0 0 0 0,-1 0 0 0 0,1 0 0 0 0,-1 0-1 0 0,0 1 1 0 0,1-1 0 0 0,-1 0 0 0 0,1 0 0 0 0,-1 1 0 0 0,1-1-1 0 0,-1 1 1 0 0,1-1 0 0 0,-1 0 0 0 0,1 1 0 0 0,-1 0 0 0 0,-26 16-2545 0 0</inkml:trace>
 </inkml:ink>
 </file>
 
@@ -4550,7 +4711,7 @@
           <inkml:channelProperty channel="OE" name="resolution" value="1000" units="1/deg"/>
         </inkml:channelProperties>
       </inkml:inkSource>
-      <inkml:timestamp xml:id="ts0" timeString="2026-04-02T05:37:27.118"/>
+      <inkml:timestamp xml:id="ts0" timeString="2026-04-02T05:37:21.254"/>
     </inkml:context>
     <inkml:brush xml:id="br0">
       <inkml:brushProperty name="width" value="0.2" units="cm"/>
@@ -4558,7 +4719,7 @@
       <inkml:brushProperty name="color" value="#FFC114"/>
     </inkml:brush>
   </inkml:definitions>
-  <inkml:trace contextRef="#ctx0" brushRef="#br0">29 203 4844 0 0,'0'0'-200'0'0,"-2"0"165"0"0,-1 0 0 0 0,1-1 0 0 0,-1 1 0 0 0,1-1-1 0 0,0 0 1 0 0,-1 1 0 0 0,1-1 0 0 0,0 0-1 0 0,0 0 1 0 0,-4-3 0 0 0,11-2 33 0 0,0-1 1 0 0,0 1-1 0 0,0-1 1 0 0,1 1-1 0 0,-1 1 1 0 0,2-1-1 0 0,-1 1 1 0 0,0 0-1 0 0,13-6 0 0 0,72-34 20 0 0,-50 26-17 0 0,109-44 137 0 0,-148 62-88 0 0,-21 17-2154 0 0,16-12 1616 0 0</inkml:trace>
+  <inkml:trace contextRef="#ctx0" brushRef="#br0">87 92 4416 0 0,'7'-10'-200'0'0,"0"-9"224"0"0,-8 16 33 0 0,0 1 1 0 0,0 0 0 0 0,0-1 0 0 0,0 1 0 0 0,-1 0-1 0 0,1 0 1 0 0,0-1 0 0 0,-1 1 0 0 0,0 0-1 0 0,1 1 1 0 0,-1-1 0 0 0,0 0 0 0 0,-3-2-1 0 0,3 3 32 0 0,1 1-83 0 0,0-1 0 0 0,0 0 0 0 0,0 1 0 0 0,-1-1 0 0 0,1 1 0 0 0,0 0 0 0 0,-1-1 0 0 0,1 1 1 0 0,0 0-1 0 0,-1 0 0 0 0,1 0 0 0 0,0 0 0 0 0,-1 0 0 0 0,1 0 0 0 0,-1 0 0 0 0,1 0 0 0 0,0 0 0 0 0,-1 1 0 0 0,1-1 0 0 0,0 1 0 0 0,0-1 0 0 0,-1 1 0 0 0,1-1 0 0 0,-2 2 0 0 0,-1 0 5 0 0,0-1-1 0 0,-1 1 1 0 0,1 0-1 0 0,0 0 0 0 0,0 0 1 0 0,1 0-1 0 0,-7 5 1 0 0,6-5-14 0 0,5-1 1 0 0,-1-1 0 0 0,0 1 0 0 0,1 0 0 0 0,-1-1 0 0 0,1 1-1 0 0,-1-1 1 0 0,1 1 0 0 0,-1 0 0 0 0,1-1 0 0 0,-1 1 0 0 0,1-1 0 0 0,-1 0-1 0 0,1 1 1 0 0,0-1 0 0 0,-1 1 0 0 0,1-1 0 0 0,0 0 0 0 0,-1 1 0 0 0,1-1 0 0 0,0 0-1 0 0,-1 0 1 0 0,1 0 0 0 0,0 0 0 0 0,1 1 0 0 0,1 0-2 0 0,5-3 57 0 0,1 0-1 0 0,-1 0 0 0 0,0-1 1 0 0,0 0-1 0 0,0 0 0 0 0,0-1 1 0 0,-1 0-1 0 0,11-8 1103 0 0,-25 15-1064 0 0,-6 3-29 0 0,1 0 1 0 0,1 1-1 0 0,-1 0 1 0 0,1 1-1 0 0,-17 15 1 0 0,26-20-42 0 0,0 2-13 0 0,1-4-7 0 0,4-1-7 0 0,0 0 6 0 0,0 0 1 0 0,0-1 0 0 0,0 1 0 0 0,0-1 0 0 0,0 0 0 0 0,-1 0 0 0 0,1 0 0 0 0,0 0 0 0 0,-1 0-1 0 0,5-3 1 0 0,1 0 3 0 0,-3 1 43 0 0,0 1 0 0 0,0-1 0 0 0,0-1 0 0 0,0 1 0 0 0,0-1 0 0 0,-1 1 0 0 0,1-1 0 0 0,-1-1 0 0 0,0 1 0 0 0,0 0 0 0 0,-1-1 0 0 0,1 0 0 0 0,-1 0-1 0 0,5-10 1 0 0,-7 13 238 0 0,-16-10 120 0 0,10 12-463 0 0,-1 1 0 0 0,1 0 0 0 0,-1 0 0 0 0,1 0 0 0 0,0 1 0 0 0,0 0 0 0 0,-1 0 0 0 0,1 0 0 0 0,0 1 0 0 0,1 0 0 0 0,-1 0 0 0 0,0 0 0 0 0,1 0 0 0 0,-8 8 0 0 0</inkml:trace>
 </inkml:ink>
 </file>
 
@@ -4582,7 +4743,7 @@
           <inkml:channelProperty channel="OE" name="resolution" value="1000" units="1/deg"/>
         </inkml:channelProperties>
       </inkml:inkSource>
-      <inkml:timestamp xml:id="ts0" timeString="2026-04-02T05:37:27.464"/>
+      <inkml:timestamp xml:id="ts0" timeString="2026-04-02T05:37:22.145"/>
     </inkml:context>
     <inkml:brush xml:id="br0">
       <inkml:brushProperty name="width" value="0.2" units="cm"/>
@@ -4590,7 +4751,7 @@
       <inkml:brushProperty name="color" value="#FFC114"/>
     </inkml:brush>
   </inkml:definitions>
-  <inkml:trace contextRef="#ctx0" brushRef="#br0">39 0 3084 0 0,'0'0'27'0'0,"-37"12"942"0"0,35-11-907 0 0,3 0-52 0 0,0 0 0 0 0,-1 1-1 0 0,1-1 1 0 0,0 0-1 0 0,0 0 1 0 0,0 0-1 0 0,0 0 1 0 0,0 0 0 0 0,0 0-1 0 0,1 0 1 0 0,-1 0-1 0 0,0 0 1 0 0,0 0-1 0 0,1 0 1 0 0,-1-1 0 0 0,0 1-1 0 0,1 0 1 0 0,-1-1-1 0 0,2 1 1 0 0,35 12 217 0 0,-31-11-178 0 0,40 11 265 0 0,73 12-1 0 0,-83-20-126 0 0,0 2 1 0 0,0 2-1 0 0,59 23 0 0 0,-95-32-189 0 0,0 0-1 0 0,0 0 1 0 0,0 0 0 0 0,-1 1 0 0 0,1-1-1 0 0,0 0 1 0 0,0 1 0 0 0,0-1 0 0 0,0 1-1 0 0,0-1 1 0 0,-1 1 0 0 0,1-1 0 0 0,0 1-1 0 0,-1 0 1 0 0,1-1 0 0 0,0 1 0 0 0,-1 0-1 0 0,1 0 1 0 0,-1-1 0 0 0,1 1 0 0 0,-1 0-1 0 0,1 0 1 0 0,-1 0 0 0 0,1 0 0 0 0,-1-1-1 0 0,0 1 1 0 0,0 0 0 0 0,1 1 0 0 0,-15 11-2455 0 0</inkml:trace>
+  <inkml:trace contextRef="#ctx0" brushRef="#br0">124 45 5669 0 0,'0'-1'1'0'0,"1"-1"1"0"0,-1 1-1 0 0,0-1 1 0 0,0 0 0 0 0,0 1-1 0 0,0-1 1 0 0,0 1-1 0 0,0-1 1 0 0,0 1 0 0 0,-1-1-1 0 0,1 1 1 0 0,-1-1-1 0 0,1 1 1 0 0,-1-1 0 0 0,1 1-1 0 0,-1 0 1 0 0,0-1 0 0 0,1 1-1 0 0,-1 0 1 0 0,0-1-1 0 0,0 1 1 0 0,0 0 0 0 0,0 0-1 0 0,0 0 1 0 0,-1 0-1 0 0,1 0 1 0 0,0 0 0 0 0,0 0-1 0 0,-1 0 1 0 0,1 0-1 0 0,0 1 1 0 0,-1-1 0 0 0,1 0-1 0 0,-1 1 1 0 0,-1-1 0 0 0,0 1 50 0 0,-25 5-2 0 0,-1 9 25 0 0,28-14-85 0 0,2 0-48 0 0,1 0 111 0 0,-1 0 0 0 0,0-1 1 0 0,0 1-1 0 0,1-1 0 0 0,-1 1 0 0 0,0-1 0 0 0,0 0 0 0 0,0 0 0 0 0,0 1 0 0 0,0-1 0 0 0,0 0 0 0 0,0 0 0 0 0,0 0 1 0 0,2-2-1 0 0,-1 1 104 0 0,-5 3-153 0 0,-1 0 8 0 0,0 0 0 0 0,1 1 1 0 0,-1-1-1 0 0,1 1 0 0 0,0 0 1 0 0,0 0-1 0 0,-1 0 1 0 0,1 0-1 0 0,0 1 0 0 0,1-1 1 0 0,-1 1-1 0 0,0 0 0 0 0,1 0 1 0 0,0 0-1 0 0,-1 0 1 0 0,-2 6-1 0 0,4-7-11 0 0,9-5-29 0 0,-6 2 37 0 0,2 1 18 0 0,0-1 0 0 0,0-1-1 0 0,0 1 1 0 0,0-1-1 0 0,0 0 1 0 0,0 1 0 0 0,0-2-1 0 0,-1 1 1 0 0,1 0 0 0 0,-1-1-1 0 0,0 1 1 0 0,0-1 0 0 0,5-7 1264 0 0,-31 18-1201 0 0,21-8-80 0 0,0 0-1 0 0,0 1 0 0 0,0-1 1 0 0,0 1-1 0 0,-1 0 1 0 0,1-1-1 0 0,0 1 0 0 0,0 0 1 0 0,1 0-1 0 0,-1 1 0 0 0,-3 1 1 0 0,1 0-4 0 0,9-8 814 0 0,4-1-1626 0 0</inkml:trace>
 </inkml:ink>
 </file>
 
@@ -4614,7 +4775,7 @@
           <inkml:channelProperty channel="OE" name="resolution" value="1000" units="1/deg"/>
         </inkml:channelProperties>
       </inkml:inkSource>
-      <inkml:timestamp xml:id="ts0" timeString="2026-04-02T05:37:28.408"/>
+      <inkml:timestamp xml:id="ts0" timeString="2026-04-02T05:37:35.116"/>
     </inkml:context>
     <inkml:brush xml:id="br0">
       <inkml:brushProperty name="width" value="0.2" units="cm"/>
@@ -4622,7 +4783,7 @@
       <inkml:brushProperty name="color" value="#FFC114"/>
     </inkml:brush>
   </inkml:definitions>
-  <inkml:trace contextRef="#ctx0" brushRef="#br0">19 43 4612 0 0,'-11'-37'76'0'0,"8"31"161"0"0,1 9-96 0 0,-1 23-59 0 0,3 37-104 0 0,2-44 66 0 0,0-1 0 0 0,1 0 0 0 0,1 0-1 0 0,1 0 1 0 0,13 33 0 0 0,-16-47-18 0 0,0 0-1 0 0,0 0 1 0 0,1 0 0 0 0,-1 0 0 0 0,1 0 0 0 0,0 0 0 0 0,0-1 0 0 0,0 1 0 0 0,0-1 0 0 0,1 0 0 0 0,-1 0 0 0 0,1 0 0 0 0,0-1 0 0 0,0 1 0 0 0,0-1 0 0 0,0 0-1 0 0,0 0 1 0 0,1 0 0 0 0,-1-1 0 0 0,1 1 0 0 0,-1-1 0 0 0,1 0 0 0 0,-1 0 0 0 0,1-1 0 0 0,-1 1 0 0 0,1-1 0 0 0,0 0 0 0 0,-1 0 0 0 0,6-2 0 0 0,-1 1-221 0 0,-1 0 0 0 0,1-1 0 0 0,0 0 0 0 0,-1-1 0 0 0,0 0 0 0 0,1 0 1 0 0,-1-1-1 0 0,-1 0 0 0 0,1-1 0 0 0,0 1 0 0 0,-1-1 0 0 0,0-1 1 0 0,0 1-1 0 0,-1-1 0 0 0,12-14 0 0 0,-6 3-998 0 0</inkml:trace>
+  <inkml:trace contextRef="#ctx0" brushRef="#br0">9 856 3608 0 0,'0'0'3'0'0,"-1"0"-1"0"0,1 0 1 0 0,-1 0-1 0 0,1-1 1 0 0,-1 1-1 0 0,1 0 1 0 0,-1 0-1 0 0,1-1 1 0 0,0 1-1 0 0,-1 0 1 0 0,1-1-1 0 0,-1 1 0 0 0,1-1 1 0 0,0 1-1 0 0,-1 0 1 0 0,1-1-1 0 0,0 1 1 0 0,0-1-1 0 0,-1 1 1 0 0,1-1-1 0 0,0 1 1 0 0,0-1-1 0 0,0 1 1 0 0,0-1-1 0 0,0 1 1 0 0,0-1-1 0 0,0 1 1 0 0,0-1-1 0 0,0 1 1 0 0,0-1-1 0 0,0 1 0 0 0,0-1 1 0 0,0 1-1 0 0,0-2 1 0 0,17-13 249 0 0,44-9 223 0 0,-45 17-483 0 0,234-73 184 0 0,-56 21-70 0 0,-115 31-96 0 0,271-107 96 0 0,-102 20 253 0 0,-55 41-209 0 0,-38 17-49 0 0,-78 24 129 0 0,-20 8-143 0 0,2 2 0 0 0,0 3 0 0 0,63-13 0 0 0,-103 29-98 0 0,23-3 248 0 0,0-2-1 0 0,-1-2 1 0 0,45-19-1 0 0,-34 11 224 0 0,12-9-167 0 0,-63 28-257 0 0,3-2 0 0 0,2 0-63 0 0,-10 1 403 0 0,-437 40-193 0 0,436-38-190 0 0,-2 0-43 0 0,1 0-25 0 0,9-1 36 0 0,83-15 62 0 0,-47 13-18 0 0,-13-1 3 0 0,1 2 0 0 0,0 1 0 0 0,46 5 0 0 0,-71-4-21 0 0,2 3-3 0 0,-4-3 18 0 0,1-1 0 0 0,0 1 0 0 0,-1-1 0 0 0,1 1 0 0 0,-1-1 0 0 0,1 1 0 0 0,-1-1 0 0 0,1 1 0 0 0,-1 0 0 0 0,0-1 0 0 0,1 1 0 0 0,-1 0 0 0 0,0 0 1 0 0,1-1-1 0 0,-1 1 0 0 0,0 0 0 0 0,0 0 0 0 0,0-1 0 0 0,0 1 0 0 0,0 1 0 0 0,-1 11 64 0 0,-1 0 1 0 0,0 0 0 0 0,-1-1 0 0 0,-1 1-1 0 0,0-1 1 0 0,-1 0 0 0 0,-8 17-1 0 0,-16 44-5174 0 0,27-65 3344 0 0</inkml:trace>
 </inkml:ink>
 </file>
 
@@ -4646,7 +4807,7 @@
           <inkml:channelProperty channel="OE" name="resolution" value="1000" units="1/deg"/>
         </inkml:channelProperties>
       </inkml:inkSource>
-      <inkml:timestamp xml:id="ts0" timeString="2026-04-02T05:37:28.665"/>
+      <inkml:timestamp xml:id="ts0" timeString="2026-04-02T05:37:37.115"/>
     </inkml:context>
     <inkml:brush xml:id="br0">
       <inkml:brushProperty name="width" value="0.2" units="cm"/>
@@ -4654,7 +4815,7 @@
       <inkml:brushProperty name="color" value="#FFC114"/>
     </inkml:brush>
   </inkml:definitions>
-  <inkml:trace contextRef="#ctx0" brushRef="#br0">73 27 4068 0 0,'-4'-3'61'0'0,"0"0"-1"0"0,0 1 0 0 0,-1 0 0 0 0,1 0 0 0 0,-1 0 0 0 0,1 0 0 0 0,-1 1 1 0 0,-8-2-1 0 0,12 3 40 0 0,-23-6 231 0 0</inkml:trace>
+  <inkml:trace contextRef="#ctx0" brushRef="#br0">4 10 4664 0 0,'0'0'-259'0'0,"-3"-3"-481"0"0,3 2 727 0 0,0 1 0 0 0,0 0 0 0 0,0 0 0 0 0,0-1 1 0 0,0 1-1 0 0,0 0 0 0 0,0 0 0 0 0,0 0 0 0 0,0-1 1 0 0,0 1-1 0 0,0 0 0 0 0,0 0 0 0 0,0 0 0 0 0,0-1 0 0 0,0 1 1 0 0,1 0-1 0 0,-1 0 0 0 0,0 0 0 0 0,0 0 0 0 0,0-1 1 0 0,0 1-1 0 0,0 0 0 0 0,0 0 0 0 0,1 0 0 0 0,-1 0 1 0 0,0 0-1 0 0,0-1 0 0 0,0 1 0 0 0,1 0 0 0 0,-1 0 1 0 0,0 0-1 0 0,0 0 0 0 0,0 0 0 0 0,1 0 0 0 0,-1 0 1 0 0,0 0-1 0 0,0 0 0 0 0,0 0 0 0 0,1 0 0 0 0,-1 0 1 0 0,0 0-1 0 0,0 0 0 0 0,0 0 0 0 0,1 0 0 0 0,23 3 77 0 0,-18-2 6 0 0,41 9 280 0 0,145 30 509 0 0,240 22 0 0 0,-245-34-597 0 0,-9 0-150 0 0,-93-21 12 0 0,185 23 151 0 0,-7-3-164 0 0,-162-19-98 0 0,133 26-1 0 0,-122-19 46 0 0,-55-5 2252 0 0,-59-16-2253 0 0,-1 1-1 0 0,0 0 1 0 0,0 0 0 0 0,-1 0 0 0 0,1 0 0 0 0,-1 1 0 0 0,0 0-1 0 0,0-1 1 0 0,-1 1 0 0 0,1 1 0 0 0,-9-7 0 0 0,-5-5 50 0 0,-4-6-21 0 0,-1 2 0 0 0,-1 0 0 0 0,0 1 0 0 0,-28-14 0 0 0,51 32-83 0 0,-15-10 25 0 0,8 5-83 0 0,10 4-173 0 0,19 12 222 0 0,1 1 1 0 0,-1 1-1 0 0,-1 1 1 0 0,33 28-1 0 0,7 5 1 0 0,-53-43 8 0 0,0 1 0 0 0,-1 0 0 0 0,0 0 1 0 0,0 1-1 0 0,0 0 0 0 0,-1 0 0 0 0,1 0 0 0 0,6 11 1 0 0,-11-15-3 0 0,-1-1 0 0 0,1 1 0 0 0,0 0 0 0 0,-1 0 1 0 0,1 0-1 0 0,-1 0 0 0 0,0 0 0 0 0,0-1 1 0 0,1 1-1 0 0,-1 0 0 0 0,-1 0 0 0 0,1 0 0 0 0,0 0 1 0 0,0 0-1 0 0,-1 0 0 0 0,0 2 0 0 0,0-1 0 0 0,-1 1 0 0 0,0-1 0 0 0,0 0 0 0 0,0 0 0 0 0,0 0 0 0 0,0 0 0 0 0,-1 0 0 0 0,1-1 0 0 0,-1 1 0 0 0,1-1 0 0 0,-5 3 0 0 0,-43 31-174 0 0,-2-3 1 0 0,0-3-1 0 0,-66 29 0 0 0,79-45-4229 0 0</inkml:trace>
 </inkml:ink>
 </file>
 
@@ -4710,7 +4871,7 @@
           <inkml:channelProperty channel="OE" name="resolution" value="1000" units="1/deg"/>
         </inkml:channelProperties>
       </inkml:inkSource>
-      <inkml:timestamp xml:id="ts0" timeString="2026-04-02T05:37:29.556"/>
+      <inkml:timestamp xml:id="ts0" timeString="2026-04-02T05:37:38.619"/>
     </inkml:context>
     <inkml:brush xml:id="br0">
       <inkml:brushProperty name="width" value="0.2" units="cm"/>
@@ -4718,7 +4879,7 @@
       <inkml:brushProperty name="color" value="#FFC114"/>
     </inkml:brush>
   </inkml:definitions>
-  <inkml:trace contextRef="#ctx0" brushRef="#br0">28 92 3252 0 0,'-4'-7'-25'0'0,"1"0"-1"0"0,-1-1 1 0 0,2 1 0 0 0,-1-1-1 0 0,1 0 1 0 0,-2-12-1 0 0,-1-5 330 0 0,4 24-260 0 0,4 23 95 0 0,1 1 1 0 0,0-1-1 0 0,13 34 1 0 0,32 56 3182 0 0,-96-184-2559 0 0,44 67-739 0 0,1-1-1 0 0,0 1 0 0 0,0-1 1 0 0,0 0-1 0 0,1 1 0 0 0,0-1 1 0 0,0 0-1 0 0,0 0 0 0 0,1 0 1 0 0,0 1-1 0 0,0-1 0 0 0,0 0 1 0 0,1 0-1 0 0,0 0 0 0 0,2-6 1 0 0,-2 8-22 0 0,1 1 1 0 0,-1-1 0 0 0,1 0-1 0 0,0 1 1 0 0,0 0 0 0 0,1-1 0 0 0,-1 1-1 0 0,1 0 1 0 0,0 0 0 0 0,-1 1-1 0 0,1-1 1 0 0,1 0 0 0 0,-1 1-1 0 0,0 0 1 0 0,0 0 0 0 0,1 0 0 0 0,0 0-1 0 0,-1 0 1 0 0,1 1 0 0 0,0 0-1 0 0,-1-1 1 0 0,8 0 0 0 0,-7 1-4 0 0,0 0 1 0 0,1 1 0 0 0,-1-1 0 0 0,0 1-1 0 0,1 0 1 0 0,-1 0 0 0 0,1 0-1 0 0,-1 1 1 0 0,0 0 0 0 0,1 0-1 0 0,-1 0 1 0 0,0 0 0 0 0,0 0-1 0 0,0 1 1 0 0,0 0 0 0 0,0 0 0 0 0,0 0-1 0 0,0 0 1 0 0,-1 1 0 0 0,5 3-1 0 0,3 4-1 0 0,-2 1 0 0 0,1-1 0 0 0,-1 2 0 0 0,13 21 0 0 0,5 7 0 0 0,-15-22-103 0 0,-1 1 0 0 0,-1 1 0 0 0,12 30-1 0 0</inkml:trace>
+  <inkml:trace contextRef="#ctx0" brushRef="#br0">10 15 5913 0 0,'0'0'-280'0'0,"-6"-7"-286"0"0,5 7 548 0 0,1 0 0 0 0,0 0 1 0 0,0-1-1 0 0,0 1 0 0 0,0 0 0 0 0,-1 0 0 0 0,1 0 0 0 0,0 0 1 0 0,0 0-1 0 0,0 0 0 0 0,0 0 0 0 0,0 0 0 0 0,0-1 0 0 0,-1 1 0 0 0,1 0 1 0 0,0 0-1 0 0,0 0 0 0 0,0 0 0 0 0,0 0 0 0 0,0 0 0 0 0,0-1 0 0 0,0 1 1 0 0,0 0-1 0 0,0 0 0 0 0,0 0 0 0 0,0 0 0 0 0,0-1 0 0 0,0 1 1 0 0,0 0-1 0 0,0 0 0 0 0,0 0 0 0 0,0 0 0 0 0,0-1 0 0 0,0 1 0 0 0,0 0 1 0 0,0 0-1 0 0,0 0 0 0 0,0 0 0 0 0,0-1 0 0 0,0 1 0 0 0,0 0 0 0 0,0 0 1 0 0,0 0-1 0 0,0 0 0 0 0,0 0 0 0 0,1-1 0 0 0,-1 1 0 0 0,0 0 1 0 0,0 0-1 0 0,0 0 0 0 0,0 0 0 0 0,0 0 0 0 0,0 0 0 0 0,1 0 0 0 0,-1 0 1 0 0,0 0-1 0 0,0-1 0 0 0,0 1 0 0 0,0 0 0 0 0,1 0 0 0 0,17 3 81 0 0,1 0 0 0 0,-1 1 0 0 0,0 0 0 0 0,0 2 1 0 0,0 0-1 0 0,-1 1 0 0 0,31 18 0 0 0,37 13 78 0 0,272 91 232 0 0,-268-96-296 0 0,108 59-1 0 0,4 2 47 0 0,-31-13 27 0 0,-120-56-129 0 0,106 44 26 0 0,3-8-1 0 0,169 41 1 0 0,-226-72-38 0 0,-80-24 28 0 0,-7-2 2 0 0,1 1-1 0 0,-1 1 1 0 0,26 12 0 0 0,-40-17 1 0 0,4 2 238 0 0</inkml:trace>
 </inkml:ink>
 </file>
 
@@ -4742,7 +4903,7 @@
           <inkml:channelProperty channel="OE" name="resolution" value="1000" units="1/deg"/>
         </inkml:channelProperties>
       </inkml:inkSource>
-      <inkml:timestamp xml:id="ts0" timeString="2026-04-02T05:37:30.493"/>
+      <inkml:timestamp xml:id="ts0" timeString="2026-04-02T05:37:39.223"/>
     </inkml:context>
     <inkml:brush xml:id="br0">
       <inkml:brushProperty name="width" value="0.2" units="cm"/>
@@ -4750,7 +4911,7 @@
       <inkml:brushProperty name="color" value="#FFC114"/>
     </inkml:brush>
   </inkml:definitions>
-  <inkml:trace contextRef="#ctx0" brushRef="#br0">0 220 5837 0 0,'3'-6'-309'0'0,"-1"0"219"0"0,0 0-1 0 0,-1-1 0 0 0,1 0 0 0 0,-1 1 0 0 0,0-1 1 0 0,-1 0-1 0 0,0 1 0 0 0,-1-13 0 0 0,1 17 151 0 0,11 53 101 0 0,3-1 0 0 0,1 0 0 0 0,30 63 0 0 0,-41-105-121 0 0,15 27 416 0 0,22 50 1681 0 0,-45-90-1964 0 0,-3-7-99 0 0,1 0-1 0 0,0-1 0 0 0,1 1 1 0 0,0-1-1 0 0,1 0 0 0 0,1-1 1 0 0,0 1-1 0 0,1-1 0 0 0,-2-20 1 0 0,4-141 231 0 0,2 94-156 0 0,0 3-139 0 0,-1 76-11 0 0,14-21-39 0 0,-11 20 37 0 0,-1 1 0 0 0,1 0-1 0 0,-1 0 1 0 0,1 0 0 0 0,0 1-1 0 0,0-1 1 0 0,0 1 0 0 0,0 0 0 0 0,0 0-1 0 0,0 0 1 0 0,0 1 0 0 0,0-1-1 0 0,8 1 1 0 0,-8 0 3 0 0,0 0-10 0 0,32 11-7 0 0,-22-4 11 0 0,-1 0 1 0 0,0 1 0 0 0,0 1-1 0 0,-1 0 1 0 0,0 1-1 0 0,0 0 1 0 0,-1 1-1 0 0,-1 0 1 0 0,0 0-1 0 0,0 1 1 0 0,15 25 0 0 0,-24-35 6 0 0,0 0 1 0 0,0 0 0 0 0,0 0-1 0 0,-1 0 1 0 0,1 0 0 0 0,-1 0 0 0 0,1 0-1 0 0,-1 0 1 0 0,1 0 0 0 0,-1 0 0 0 0,0 0-1 0 0,0 0 1 0 0,0 1 0 0 0,0-1 0 0 0,-1 0-1 0 0,1 0 1 0 0,0 0 0 0 0,-1 0-1 0 0,0 0 1 0 0,1 0 0 0 0,-2 3 0 0 0,-1-1-1 0 0,1 0 1 0 0,-1-1-1 0 0,0 1 1 0 0,0 0-1 0 0,0-1 1 0 0,0 0-1 0 0,-1 0 1 0 0,0 0 0 0 0,-5 4-1 0 0,-6 2 4 0 0,0-1 0 0 0,-1 0 0 0 0,-33 11 0 0 0,-31 2 72 0 0,76-20-95 0 0,-1-1-1 0 0,1 1 1 0 0,-1-1-1 0 0,1 1 1 0 0,-1-1 0 0 0,1 0-1 0 0,-1-1 1 0 0,1 1-1 0 0,-1-1 1 0 0,1 0 0 0 0,-1 0-1 0 0,1-1 1 0 0,0 1-1 0 0,-1-1 1 0 0,-3-2 0 0 0,2-5-1880 0 0,6 8 1708 0 0,-1 0 1 0 0,1 0-1 0 0,0 0 0 0 0,0 0 0 0 0,0 0 1 0 0,-1 0-1 0 0,1 0 0 0 0,0 0 0 0 0,0 0 1 0 0,1 0-1 0 0,-1 0 0 0 0,0 0 0 0 0,1-2 1 0 0,5-12-2497 0 0</inkml:trace>
+  <inkml:trace contextRef="#ctx0" brushRef="#br0">206 70 4272 0 0,'-64'-45'999'0'0,"62"43"-749"0"0,-27-21 2110 0 0,158 136-1692 0 0,-119-103-657 0 0,-3-5-2 0 0,0 1 0 0 0,0 1 0 0 0,-1-1 0 0 0,0 1 0 0 0,0 0 0 0 0,-1 1-1 0 0,0 0 1 0 0,0-1 0 0 0,0 1 0 0 0,-1 1 0 0 0,4 11 0 0 0,-8-16 3 0 0,-1 0 0 0 0,1 0 0 0 0,-1 0-1 0 0,0 0 1 0 0,0 0 0 0 0,0-1 0 0 0,-1 1 0 0 0,0 0 0 0 0,1 0 0 0 0,-1-1 0 0 0,0 1 0 0 0,-1-1 0 0 0,1 0 0 0 0,-1 0 0 0 0,1 0 0 0 0,-1 0 0 0 0,0 0-1 0 0,0 0 1 0 0,-7 4 0 0 0,-5 5 23 0 0,-1-1-1 0 0,-27 15 1 0 0,29-19-144 0 0,-98 49 418 0 0,96-50-1181 0 0,0 0 0 0 0,-30 5 0 0 0</inkml:trace>
 </inkml:ink>
 </file>
 
@@ -4774,7 +4935,7 @@
           <inkml:channelProperty channel="OE" name="resolution" value="1000" units="1/deg"/>
         </inkml:channelProperties>
       </inkml:inkSource>
-      <inkml:timestamp xml:id="ts0" timeString="2026-04-02T05:37:31.279"/>
+      <inkml:timestamp xml:id="ts0" timeString="2026-04-02T05:37:40.252"/>
     </inkml:context>
     <inkml:brush xml:id="br0">
       <inkml:brushProperty name="width" value="0.2" units="cm"/>
@@ -4782,7 +4943,7 @@
       <inkml:brushProperty name="color" value="#FFC114"/>
     </inkml:brush>
   </inkml:definitions>
-  <inkml:trace contextRef="#ctx0" brushRef="#br0">26 126 5901 0 0,'-3'-121'-206'0'0,"3"121"212"0"0,0 0 1 0 0,0 0 0 0 0,0 0-1 0 0,0-1 1 0 0,0 1 0 0 0,0 0-1 0 0,0 0 1 0 0,0 0 0 0 0,0 0 0 0 0,0-1-1 0 0,-1 1 1 0 0,1 0 0 0 0,0 0-1 0 0,0 0 1 0 0,0 0 0 0 0,0-1-1 0 0,0 1 1 0 0,0 0 0 0 0,0 0 0 0 0,0 0-1 0 0,-1 0 1 0 0,1 0 0 0 0,0 0-1 0 0,0-1 1 0 0,0 1 0 0 0,0 0-1 0 0,-1 0 1 0 0,1 0 0 0 0,0 0 0 0 0,0 0-1 0 0,0 0 1 0 0,0 0 0 0 0,-1 0-1 0 0,1 0 1 0 0,0 0 0 0 0,0 0-1 0 0,0 0 1 0 0,-1 0 0 0 0,1 0 0 0 0,0 0-1 0 0,0 0 1 0 0,0 0 0 0 0,0 0-1 0 0,-1 0 1 0 0,1 0 0 0 0,0 0-1 0 0,0 0 1 0 0,0 0 0 0 0,0 0 0 0 0,-1 0-1 0 0,1 1 1 0 0,0-1 0 0 0,0 0-1 0 0,0 0 1 0 0,0 0 0 0 0,0 0-1 0 0,-1 0 1 0 0,1 0 0 0 0,0 1 0 0 0,-3 5 5 0 0,1 1 0 0 0,0-1 0 0 0,0 1 0 0 0,0 0 0 0 0,1-1 0 0 0,0 1 0 0 0,0 0 1 0 0,0 0-1 0 0,1 0 0 0 0,0 0 0 0 0,1 0 0 0 0,0-1 0 0 0,0 1 0 0 0,0 0 1 0 0,1 0-1 0 0,0-1 0 0 0,0 1 0 0 0,0-1 0 0 0,1 1 0 0 0,0-1 0 0 0,0 0 1 0 0,1 0-1 0 0,0 0 0 0 0,5 6 0 0 0,-6-9-4 0 0,-1-1 1 0 0,1 1-1 0 0,0-1 0 0 0,-1 1 1 0 0,1-1-1 0 0,0 0 0 0 0,0 0 1 0 0,1 0-1 0 0,-1 0 0 0 0,0-1 1 0 0,1 1-1 0 0,-1-1 0 0 0,0 0 1 0 0,1 0-1 0 0,0 0 0 0 0,-1-1 1 0 0,1 1-1 0 0,0-1 0 0 0,-1 0 1 0 0,1 0-1 0 0,0 0 0 0 0,4-1 1 0 0,-3 0 10 0 0,0-1 1 0 0,-1 0-1 0 0,1 0 1 0 0,-1 0 0 0 0,0-1-1 0 0,0 1 1 0 0,0-1-1 0 0,0 0 1 0 0,0 0 0 0 0,-1-1-1 0 0,1 1 1 0 0,-1-1 0 0 0,0 0-1 0 0,0 1 1 0 0,0-1-1 0 0,-1-1 1 0 0,3-4 0 0 0,-4 8-6 0 0,1-2 110 0 0,-1 0 0 0 0,1 1 0 0 0,-1-1 0 0 0,1 0 1 0 0,-1 0-1 0 0,0 0 0 0 0,0 0 0 0 0,-1 0 0 0 0,1-1 0 0 0,0 1 0 0 0,-1 0 1 0 0,0 0-1 0 0,0-4 0 0 0,0 7-120 0 0,0 1 0 0 0,0 0 0 0 0,0 0 0 0 0,0-1-1 0 0,0 1 1 0 0,0 0 0 0 0,-1 0 0 0 0,1-1 0 0 0,0 1 0 0 0,0 0 0 0 0,-1-1 0 0 0,1 1 0 0 0,0 0 0 0 0,-1-1 0 0 0,1 1 0 0 0,-1 0 0 0 0,1-1 0 0 0,-1 1-1 0 0,1-1 1 0 0,-1 1 0 0 0,1-1 0 0 0,-1 1 0 0 0,0 0 0 0 0,0-1 0 0 0,0 1 0 0 0,0 0-1 0 0,0-1 1 0 0,1 1 0 0 0,-1 0 0 0 0,0 0-1 0 0,0 0 1 0 0,1 0 0 0 0,-1 0-1 0 0,1-1 1 0 0,-1 1 0 0 0,1 0 0 0 0,-1 0-1 0 0,1 0 1 0 0,0 0 0 0 0,-1 1 0 0 0,1-1-1 0 0,0 0 1 0 0,0 0 0 0 0,0 0 0 0 0,0 0-1 0 0,0 0 1 0 0,0 2 0 0 0,0 1 16 0 0,1 1 0 0 0,0 0 0 0 0,0-1-1 0 0,0 1 1 0 0,0 0 0 0 0,1-1 0 0 0,0 0 0 0 0,0 1 0 0 0,0-1 0 0 0,0 0 0 0 0,1 0 0 0 0,-1 0 0 0 0,1 0 0 0 0,0 0 0 0 0,0-1-1 0 0,1 0 1 0 0,-1 1 0 0 0,1-1 0 0 0,7 5 0 0 0,-2-2-581 0 0,0-1-1 0 0,1 1 1 0 0,-1-1-1 0 0,1-1 1 0 0,1 0-1 0 0,-1 0 1 0 0,0-1-1 0 0,12 2 1 0 0,-9-3-1809 0 0</inkml:trace>
+  <inkml:trace contextRef="#ctx0" brushRef="#br0">15 1 5833 0 0,'-6'7'-344'0'0,"-2"1"-249"0"0</inkml:trace>
 </inkml:ink>
 </file>
 
@@ -4806,7 +4967,7 @@
           <inkml:channelProperty channel="OE" name="resolution" value="1000" units="1/deg"/>
         </inkml:channelProperties>
       </inkml:inkSource>
-      <inkml:timestamp xml:id="ts0" timeString="2026-04-02T05:37:31.792"/>
+      <inkml:timestamp xml:id="ts0" timeString="2026-04-02T05:37:41.636"/>
     </inkml:context>
     <inkml:brush xml:id="br0">
       <inkml:brushProperty name="width" value="0.2" units="cm"/>
@@ -4814,7 +4975,7 @@
       <inkml:brushProperty name="color" value="#FFC114"/>
     </inkml:brush>
   </inkml:definitions>
-  <inkml:trace contextRef="#ctx0" brushRef="#br0">1 139 5589 0 0,'13'-43'-430'0'0,"-9"30"608"0"0,0 0-1 0 0,0 0 1 0 0,-2 0-1 0 0,1-1 0 0 0,0-15 1 0 0,15 67-71 0 0,16 107 53 0 0,7 40 15 0 0,-5 74 80 0 0,-29-221-127 0 0,-6-37-324 0 0,12-25-2979 0 0,-4 9 1353 0 0</inkml:trace>
+  <inkml:trace contextRef="#ctx0" brushRef="#br0">94 24 3336 0 0,'0'0'-87'0'0,"-1"-2"26"0"0,-4-6 1407 0 0,3 6-1232 0 0,-1 0-1 0 0,0 1 0 0 0,0-1 0 0 0,0 1 0 0 0,0 0 0 0 0,-1 0 0 0 0,1 0 0 0 0,-6-1 1 0 0,3 5-108 0 0,0 1 1 0 0,1 0 0 0 0,0 0 0 0 0,0 0 0 0 0,0 1-1 0 0,0-1 1 0 0,1 1 0 0 0,-6 8 0 0 0,9-11-17 0 0,9 11-77 0 0,-5-13 87 0 0,0 0 1 0 0,0 1 0 0 0,-1-1 0 0 0,1 0-1 0 0,0-1 1 0 0,0 1 0 0 0,0 0 0 0 0,0-1 0 0 0,-1 0-1 0 0,1 1 1 0 0,0-1 0 0 0,0 0 0 0 0,-1 0 0 0 0,1-1-1 0 0,-1 1 1 0 0,3-2 0 0 0,16-6 129 0 0,-19 8-31 0 0,-3 1-55 0 0,1 0 1 0 0,-1 0-1 0 0,0 0 0 0 0,1 1 0 0 0,-1-1 1 0 0,0 0-1 0 0,1 0 0 0 0,-1 1 1 0 0,1-1-1 0 0,-1 0 0 0 0,0 1 0 0 0,1-1 1 0 0,-1 0-1 0 0,1 1 0 0 0,-1-1 0 0 0,1 1 1 0 0,-1-1-1 0 0,1 1 0 0 0,0-1 0 0 0,-1 1 1 0 0,1-1-1 0 0,0 1 0 0 0,-1-1 0 0 0,1 1 1 0 0,0-1-1 0 0,-1 1 0 0 0,1 0 0 0 0,0 0 1 0 0,-24 36 8 0 0,23-36-33 0 0,1-1-18 0 0,0 0-1 0 0,0 0 1 0 0,0 0 0 0 0,0 0 0 0 0,-1 1-1 0 0,1-1 1 0 0,0 0 0 0 0,0 0 0 0 0,0 0-1 0 0,0 1 1 0 0,0-1 0 0 0,0 0-1 0 0,0 0 1 0 0,-1 1 0 0 0,1-1 0 0 0,0 0-1 0 0,0 0 1 0 0,0 1 0 0 0,0-1-1 0 0,0 0 1 0 0,0 0 0 0 0,0 1 0 0 0,0-1-1 0 0,0 0 1 0 0,0 0 0 0 0,1 1 0 0 0,-1-1-1 0 0,0 0 1 0 0,0 0 0 0 0,0 1-1 0 0,0-1 1 0 0,0 0 0 0 0,0 0 0 0 0,0 1-1 0 0,1-1 1 0 0,-1 0 0 0 0,0 0 0 0 0,0 0-1 0 0,0 0 1 0 0,0 1 0 0 0,1-1-1 0 0,-1 0 1 0 0,0 0 0 0 0,0 0 0 0 0,1 0-1 0 0,-1 0 1 0 0,0 1 0 0 0,0-1 0 0 0,0 0-1 0 0,1 0 1 0 0,-1 0 0 0 0,0 0-1 0 0,0 0 1 0 0,1 0 0 0 0,-1 0 0 0 0,0 0-1 0 0,0 0 1 0 0,1 0 0 0 0,-1 0 0 0 0,0 0-1 0 0,1 0 1 0 0,-1 0 0 0 0,0 0-1 0 0,0 0 1 0 0,0-1 0 0 0,1 1 0 0 0,-1 0-1 0 0,12-6 21 0 0,-1 0-1 0 0,0 0 1 0 0,0-1-1 0 0,10-8 1 0 0,-19 13 30 0 0,-10 7-42 0 0,0-1-273 0 0,-49 30 813 0 0,53-31-914 0 0,-1 0-1 0 0,1 0 1 0 0,0 1-1 0 0,0 0 1 0 0,0 0 0 0 0,0 0-1 0 0,1 0 1 0 0,-1 0-1 0 0,1 1 1 0 0,-4 7 0 0 0</inkml:trace>
 </inkml:ink>
 </file>
 
@@ -4838,7 +4999,7 @@
           <inkml:channelProperty channel="OE" name="resolution" value="1000" units="1/deg"/>
         </inkml:channelProperties>
       </inkml:inkSource>
-      <inkml:timestamp xml:id="ts0" timeString="2026-04-02T05:37:32.102"/>
+      <inkml:timestamp xml:id="ts0" timeString="2026-04-02T05:37:42.243"/>
     </inkml:context>
     <inkml:brush xml:id="br0">
       <inkml:brushProperty name="width" value="0.2" units="cm"/>
@@ -4846,7 +5007,7 @@
       <inkml:brushProperty name="color" value="#FFC114"/>
     </inkml:brush>
   </inkml:definitions>
-  <inkml:trace contextRef="#ctx0" brushRef="#br0">27 139 4988 0 0,'-3'-2'-7'0'0,"1"1"0"0"0,-1 0 0 0 0,1-1 0 0 0,0 1 0 0 0,-1-1 0 0 0,1 0 0 0 0,0 0 0 0 0,0 0 0 0 0,-3-3 0 0 0,8 1 21 0 0,1 0 0 0 0,-1 0 0 0 0,1 0-1 0 0,0 1 1 0 0,0-1 0 0 0,0 1 0 0 0,0 0 0 0 0,1 1 0 0 0,-1-1 0 0 0,1 1 0 0 0,7-3 0 0 0,63-23 74 0 0,-59 24-77 0 0,25-12 40 0 0,-21 8-814 0 0,1 1 0 0 0,28-6 0 0 0,-38 11-327 0 0</inkml:trace>
+  <inkml:trace contextRef="#ctx0" brushRef="#br0">140 12 4932 0 0,'0'0'-134'0'0,"-14"-7"-279"0"0,-9 3 332 0 0,22 3 366 0 0,-4 3-267 0 0,5-2-18 0 0,-4 1 7 0 0,0 1-1 0 0,0 0 1 0 0,0-1-1 0 0,1 1 1 0 0,-1 0 0 0 0,1 1-1 0 0,0-1 1 0 0,-1 1 0 0 0,1-1-1 0 0,0 1 1 0 0,0 0 0 0 0,1 0-1 0 0,-1 0 1 0 0,1 1 0 0 0,0-1-1 0 0,-1 1 1 0 0,-2 5 1621 0 0,33-26 543 0 0,-35 19-2077 0 0,-21 6 280 0 0,26-8-576 0 0,1 1 1 0 0,-1-1-1 0 0,0 1 1 0 0,1-1-1 0 0,-1 1 1 0 0,0 0-1 0 0,1 0 0 0 0,-1-1 1 0 0,1 1-1 0 0,-1 0 1 0 0,1 0-1 0 0,0 1 1 0 0,-1-1-1 0 0,1 0 1 0 0,0 0-1 0 0,0 1 1 0 0,0-1-1 0 0,0 1 1 0 0,0-1-1 0 0,0 1 1 0 0,-1 2-1 0 0</inkml:trace>
 </inkml:ink>
 </file>
 
@@ -4870,7 +5031,7 @@
           <inkml:channelProperty channel="OE" name="resolution" value="1000" units="1/deg"/>
         </inkml:channelProperties>
       </inkml:inkSource>
-      <inkml:timestamp xml:id="ts0" timeString="2026-04-02T05:37:32.896"/>
+      <inkml:timestamp xml:id="ts0" timeString="2026-04-02T05:37:25.243"/>
     </inkml:context>
     <inkml:brush xml:id="br0">
       <inkml:brushProperty name="width" value="0.2" units="cm"/>
@@ -4878,7 +5039,7 @@
       <inkml:brushProperty name="color" value="#FFC114"/>
     </inkml:brush>
   </inkml:definitions>
-  <inkml:trace contextRef="#ctx0" brushRef="#br0">267 1 3672 0 0,'0'0'-170'0'0,"-19"9"1110"0"0,-3 2-768 0 0,-38 25 0 0 0,55-32-152 0 0,0 0 1 0 0,1-1 0 0 0,-1 1-1 0 0,1 1 1 0 0,0-1-1 0 0,0 1 1 0 0,0 0 0 0 0,0 0-1 0 0,1 0 1 0 0,0 0 0 0 0,0 0-1 0 0,-4 11 1 0 0,7-14-21 0 0,0-1 1 0 0,0 1 0 0 0,0 0-1 0 0,0 0 1 0 0,1-1-1 0 0,-1 1 1 0 0,0 0-1 0 0,1-1 1 0 0,-1 1 0 0 0,1 0-1 0 0,-1-1 1 0 0,1 1-1 0 0,0 0 1 0 0,0-1 0 0 0,0 1-1 0 0,0-1 1 0 0,0 0-1 0 0,0 1 1 0 0,0-1-1 0 0,0 0 1 0 0,1 0 0 0 0,-1 1-1 0 0,0-1 1 0 0,1 0-1 0 0,-1 0 1 0 0,1 0-1 0 0,-1-1 1 0 0,1 1 0 0 0,-1 0-1 0 0,1-1 1 0 0,2 2-1 0 0,63 19 27 0 0,-53-17-16 0 0,1-1-4 0 0,-11-2-6 0 0,0-1 0 0 0,0 1 0 0 0,0 0 0 0 0,0 0 1 0 0,0 1-1 0 0,0-1 0 0 0,0 1 0 0 0,-1 0 0 0 0,1 0 0 0 0,0 0 0 0 0,-1 0 0 0 0,0 1 1 0 0,1-1-1 0 0,4 6 0 0 0,-8-7 1 0 0,0 0 1 0 0,0 0-1 0 0,0 0 1 0 0,0 0-1 0 0,-1 0 1 0 0,1 0-1 0 0,0 0 0 0 0,0 0 1 0 0,-1 0-1 0 0,1 0 1 0 0,0 0-1 0 0,-1 0 1 0 0,1 0-1 0 0,-1 0 1 0 0,0 0-1 0 0,1-1 0 0 0,-1 1 1 0 0,0 0-1 0 0,1 0 1 0 0,-1-1-1 0 0,0 1 1 0 0,0 0-1 0 0,1-1 1 0 0,-1 1-1 0 0,0-1 0 0 0,0 1 1 0 0,0-1-1 0 0,-1 1 1 0 0,-28 16 40 0 0,30-17-41 0 0,-26 13-6 0 0,1-1 0 0 0,-2-1 1 0 0,1-1-1 0 0,-1-1 0 0 0,-53 9 1 0 0,77-18-219 0 0,1 0 1 0 0,-1-1-1 0 0,0 1 1 0 0,0 0-1 0 0,0-1 1 0 0,0 0-1 0 0,0 0 1 0 0,1 0 0 0 0,-1 0-1 0 0,-2-2 1 0 0,-3-4-715 0 0</inkml:trace>
+  <inkml:trace contextRef="#ctx0" brushRef="#br0">22 62 5000 0 0,'0'0'-346'0'0,"-21"5"891"0"0,26-7-540 0 0,17-9 41 0 0,13-2 118 0 0,-12 7-152 0 0,-21 6-8 0 0,1-1-5 0 0,66-13 42 0 0,-67 14-49 0 0,30-8 13 0 0,-24 4-5 0 0,-3 3 6 0 0,0-1 0 0 0,0 1-1 0 0,0 0 1 0 0,0 0 0 0 0,0 1 0 0 0,0-1 0 0 0,6 1-1 0 0,5-1 7 0 0,-13 1-12 0 0,35 0-38 0 0,-27 0 27 0 0,-6 1 11 0 0,0 1-1 0 0,0-1 1 0 0,0 1 0 0 0,0 0 0 0 0,-1 0-1 0 0,1 1 1 0 0,-1-1 0 0 0,1 1 0 0 0,-1 0-1 0 0,0 0 1 0 0,7 7 0 0 0,9 5-16 0 0,-17-13 21 0 0,-1-1 0 0 0,1 0-1 0 0,-1 1 1 0 0,1 0 0 0 0,-1-1-1 0 0,0 1 1 0 0,0 0 0 0 0,1 0-1 0 0,-1 0 1 0 0,-1 1 0 0 0,1-1-1 0 0,0 0 1 0 0,-1 1 0 0 0,1-1-1 0 0,-1 1 1 0 0,0 0 0 0 0,1-1-1 0 0,-1 1 1 0 0,-1 0 0 0 0,1 0-1 0 0,0-1 1 0 0,-1 1 0 0 0,1 0-1 0 0,-1 5 1 0 0,-1-4 1 0 0,0-1 0 0 0,0 0 0 0 0,0 0 0 0 0,0 0 0 0 0,-1 0 0 0 0,1 0 0 0 0,-1 0 0 0 0,0 0 1 0 0,0 0-1 0 0,0-1 0 0 0,0 1 0 0 0,-1-1 0 0 0,1 0 0 0 0,-1 1 0 0 0,1-1 0 0 0,-1 0 0 0 0,0 0 0 0 0,0-1 0 0 0,0 1 0 0 0,0-1 0 0 0,-5 3 0 0 0,-24 10 99 0 0,-1-1 0 0 0,0-1-1 0 0,-39 8 1 0 0,69-20-58 0 0,-17 3 289 0 0,39-7-345 0 0,-1 0 0 0 0,1 1 0 0 0,-1 1 0 0 0,1 1 0 0 0,0 0 0 0 0,0 1 0 0 0,26 5 0 0 0,-38-5 14 0 0,1 2 0 0 0,0-1 0 0 0,0 1-1 0 0,-1 0 1 0 0,1 0 0 0 0,-1 1 0 0 0,0 0-1 0 0,0 1 1 0 0,0-1 0 0 0,0 1 0 0 0,-1 1-1 0 0,1-1 1 0 0,-1 1 0 0 0,0 0 0 0 0,0 1-1 0 0,-1-1 1 0 0,0 1 0 0 0,0 0 0 0 0,0 1-1 0 0,-1-1 1 0 0,5 10 0 0 0,-8-15-2 0 0,-1 1 0 0 0,0-1 0 0 0,1 1 0 0 0,-1-1 0 0 0,0 1 0 0 0,0-1 1 0 0,0 1-1 0 0,0-1 0 0 0,0 1 0 0 0,-1 0 0 0 0,1-1 0 0 0,0 1 0 0 0,-1-1 0 0 0,1 1 0 0 0,-1-1 0 0 0,1 1 0 0 0,-1-1 1 0 0,0 0-1 0 0,0 1 0 0 0,1-1 0 0 0,-1 0 0 0 0,0 0 0 0 0,0 1 0 0 0,0-1 0 0 0,-1 0 0 0 0,1 0 0 0 0,0 0 0 0 0,0 0 1 0 0,-1 0-1 0 0,1 0 0 0 0,0-1 0 0 0,-3 2 0 0 0,-46 20 39 0 0,16-12 176 0 0,0-1-1 0 0,-1-1 1 0 0,0-2 0 0 0,0-2-1 0 0,-41 1 1 0 0,74-5-101 0 0,-1 0-133 0 0,0 1 0 0 0,1-1 0 0 0,-1 1 0 0 0,1-1-1 0 0,-1 0 1 0 0,1 0 0 0 0,-1 0 0 0 0,1-1 0 0 0,-1 1-1 0 0,0 0 1 0 0,1-1 0 0 0,-1 0 0 0 0,-3-1 0 0 0,7-1-320 0 0,1 0 0 0 0,0 0 0 0 0,0 0 0 0 0,0 0 0 0 0,0 0 0 0 0,0 1 0 0 0,0-1 0 0 0,1 1 0 0 0,-1 0 0 0 0,1-1 0 0 0,3-1 0 0 0,10-4-1659 0 0</inkml:trace>
 </inkml:ink>
 </file>
 
@@ -4902,7 +5063,7 @@
           <inkml:channelProperty channel="OE" name="resolution" value="1000" units="1/deg"/>
         </inkml:channelProperties>
       </inkml:inkSource>
-      <inkml:timestamp xml:id="ts0" timeString="2026-04-02T05:37:43.519"/>
+      <inkml:timestamp xml:id="ts0" timeString="2026-04-02T05:37:26.021"/>
     </inkml:context>
     <inkml:brush xml:id="br0">
       <inkml:brushProperty name="width" value="0.2" units="cm"/>
@@ -4910,7 +5071,7 @@
       <inkml:brushProperty name="color" value="#FFC114"/>
     </inkml:brush>
   </inkml:definitions>
-  <inkml:trace contextRef="#ctx0" brushRef="#br0">249 13 6309 0 0,'0'0'-220'0'0,"1"0"207"0"0,-1-1 0 0 0,0 1 0 0 0,0 0 0 0 0,0-1-1 0 0,0 1 1 0 0,0 0 0 0 0,0-1 0 0 0,0 1 0 0 0,0-1 0 0 0,0 1 0 0 0,0 0 0 0 0,0-1 0 0 0,0 1 0 0 0,0 0 0 0 0,0-1 0 0 0,0 1 0 0 0,0 0 0 0 0,-1-1 0 0 0,1 1 0 0 0,0 0 0 0 0,0-1 0 0 0,0 1 0 0 0,0 0 0 0 0,-1-1 0 0 0,1 1 0 0 0,0 0 0 0 0,0-1 0 0 0,-1 1 0 0 0,1 0 0 0 0,0 0 0 0 0,-1-1 0 0 0,1 1 0 0 0,0 0 0 0 0,-1 0 0 0 0,1 0 0 0 0,0 0 0 0 0,-1-1 0 0 0,1 1 0 0 0,0 0 0 0 0,-1 0 0 0 0,1 0 0 0 0,0 0 0 0 0,-1 0 0 0 0,1 0 0 0 0,-1 0 0 0 0,1 0 0 0 0,0 0 0 0 0,-1 0 0 0 0,1 0 0 0 0,0 0 0 0 0,-1 0 0 0 0,1 0 0 0 0,0 0 0 0 0,-1 1 0 0 0,1-1 0 0 0,0 0 0 0 0,-1 0 0 0 0,1 0 0 0 0,-1 1 0 0 0,-15 10-6 0 0,0 1-1 0 0,1 1 1 0 0,0 1 0 0 0,1 0-1 0 0,0 1 1 0 0,2 0 0 0 0,0 1 0 0 0,0 0-1 0 0,1 1 1 0 0,1 0 0 0 0,1 1-1 0 0,-9 25 1 0 0,5-12 39 0 0,2 1 1 0 0,2 1-1 0 0,0-1 1 0 0,2 1-1 0 0,2 1 0 0 0,-2 62 1 0 0,9-38 23 0 0,3 0-1 0 0,2-1 1 0 0,3 0 0 0 0,2 0 0 0 0,3-1 0 0 0,22 57-1 0 0,-2-28 48 0 0,3-1 0 0 0,3-2 0 0 0,58 84 0 0 0,-72-127-13 0 0,0 0-1 0 0,3-2 1 0 0,53 52 0 0 0,-65-73-352 0 0,0-1 0 0 0,1 0-1 0 0,0-1 1 0 0,2-1 0 0 0,-1-1 0 0 0,2-1 0 0 0,-1 0-1 0 0,2-2 1 0 0,22 6 0 0 0,11-1-1309 0 0</inkml:trace>
+  <inkml:trace contextRef="#ctx0" brushRef="#br0">118 60 4976 0 0,'1'-5'-222'0'0,"3"-26"-527"0"0,-4 30 758 0 0,0 0 0 0 0,0 0-1 0 0,-1 0 1 0 0,1 0-1 0 0,0 0 1 0 0,0 0 0 0 0,-1 0-1 0 0,1 0 1 0 0,-1 0-1 0 0,1 1 1 0 0,-1-1 0 0 0,1 0-1 0 0,-1 0 1 0 0,0 0-1 0 0,1 1 1 0 0,-1-1 0 0 0,0 0-1 0 0,1 1 1 0 0,-1-1-1 0 0,0 1 1 0 0,0-1 0 0 0,0 1-1 0 0,0-1 1 0 0,1 1 0 0 0,-1-1-1 0 0,-1 1 1 0 0,-1-1 62 0 0,2 0-68 0 0,0 1-1 0 0,0 0 1 0 0,0-1 0 0 0,0 1-1 0 0,0 0 1 0 0,0 0-1 0 0,0-1 1 0 0,0 1 0 0 0,-1 0-1 0 0,1 0 1 0 0,0 0-1 0 0,0 1 1 0 0,0-1 0 0 0,0 0-1 0 0,0 0 1 0 0,0 0-1 0 0,0 1 1 0 0,0-1 0 0 0,0 1-1 0 0,0-1 1 0 0,0 1 0 0 0,-1 0-1 0 0,-23 9 25 0 0,20-7-28 0 0,1 1 0 0 0,0-1 0 0 0,0 1 0 0 0,0-1 0 0 0,1 1 0 0 0,-1 0 0 0 0,1 1 0 0 0,0-1 0 0 0,0 1 0 0 0,1-1 0 0 0,-1 1 0 0 0,1 0 0 0 0,0 0 0 0 0,0 0 0 0 0,1 0 0 0 0,0 0 0 0 0,-1 0 0 0 0,2 0 0 0 0,-1 1 0 0 0,0-1 0 0 0,1 0 0 0 0,1 9 0 0 0,2-7 19 0 0,0-1 0 0 0,0 1 0 0 0,1-1 0 0 0,0 0 0 0 0,0 0 0 0 0,1-1 0 0 0,0 1 0 0 0,0-1 0 0 0,0 0 0 0 0,0 0 0 0 0,1-1 0 0 0,0 1 0 0 0,0-1 0 0 0,0-1 0 0 0,0 1 0 0 0,1-1 1 0 0,-1 0-1 0 0,1 0 0 0 0,0-1 0 0 0,13 3 0 0 0,-3-1 90 0 0,0 0 0 0 0,1-2 0 0 0,0 0 0 0 0,0 0 0 0 0,-1-2 0 0 0,1 0 0 0 0,25-5 1 0 0,-38 5-52 0 0,0-1 1 0 0,-1-1-1 0 0,1 1 1 0 0,-1-1-1 0 0,1 1 1 0 0,-1-1-1 0 0,0-1 1 0 0,1 1-1 0 0,-1-1 1 0 0,0 1-1 0 0,-1-1 1 0 0,1 0-1 0 0,0 0 1 0 0,-1-1-1 0 0,0 1 1 0 0,0-1-1 0 0,0 0 1 0 0,0 0-1 0 0,0 0 1 0 0,-1 0-1 0 0,4-9 1 0 0,-5 10-24 0 0,0 0 0 0 0,0 0 0 0 0,-1 0 1 0 0,1-1-1 0 0,-1 1 0 0 0,0 0 0 0 0,0-1 1 0 0,0 1-1 0 0,0 0 0 0 0,0 0 0 0 0,-1-1 0 0 0,0 1 1 0 0,1 0-1 0 0,-1 0 0 0 0,0 0 0 0 0,-1 0 1 0 0,1 0-1 0 0,-1 0 0 0 0,1 0 0 0 0,-1 0 1 0 0,0 0-1 0 0,0 1 0 0 0,0-1 0 0 0,0 1 1 0 0,0-1-1 0 0,-1 1 0 0 0,1 0 0 0 0,-1 0 0 0 0,0 0 1 0 0,1 0-1 0 0,-1 0 0 0 0,-4-1 0 0 0,-6-2 12 0 0,0 0 0 0 0,1 1-1 0 0,-1 1 1 0 0,-1 0 0 0 0,1 1-1 0 0,0 0 1 0 0,-1 1 0 0 0,-18 1-1 0 0,-11-2-14 0 0,19 3-461 0 0</inkml:trace>
 </inkml:ink>
 </file>
 
@@ -4934,7 +5095,7 @@
           <inkml:channelProperty channel="OE" name="resolution" value="1000" units="1/deg"/>
         </inkml:channelProperties>
       </inkml:inkSource>
-      <inkml:timestamp xml:id="ts0" timeString="2026-04-02T05:37:44.515"/>
+      <inkml:timestamp xml:id="ts0" timeString="2026-04-02T05:37:26.635"/>
     </inkml:context>
     <inkml:brush xml:id="br0">
       <inkml:brushProperty name="width" value="0.2" units="cm"/>
@@ -4942,7 +5103,7 @@
       <inkml:brushProperty name="color" value="#FFC114"/>
     </inkml:brush>
   </inkml:definitions>
-  <inkml:trace contextRef="#ctx0" brushRef="#br0">40 78 4396 0 0,'-38'-60'-288'0'0,"37"58"356"0"0,1 1-44 0 0,0 1 0 0 0,0-1 0 0 0,0 1-1 0 0,0-1 1 0 0,0 1 0 0 0,0-1-1 0 0,0 1 1 0 0,0-1 0 0 0,0 1-1 0 0,0-1 1 0 0,0 0 0 0 0,1 1 0 0 0,-1-1-1 0 0,0 1 1 0 0,0-1 0 0 0,1 1-1 0 0,-1 0 1 0 0,0-1 0 0 0,0 1 0 0 0,1-1-1 0 0,-1 1 1 0 0,1-1 0 0 0,-1 1-1 0 0,0 0 1 0 0,1-1 0 0 0,-1 1 0 0 0,1 0-1 0 0,-1-1 1 0 0,1 1 0 0 0,-1 0-1 0 0,1 0 1 0 0,-1-1 0 0 0,1 1-1 0 0,-1 0 1 0 0,2 0 0 0 0,23 7 249 0 0,35 33-302 0 0,-46-30 173 0 0,71 47 44 0 0,-19-14-86 0 0,-1 3 1 0 0,76 71-1 0 0,-123-100-29 0 0,-1 1 1 0 0,-1 0 0 0 0,-1 1 0 0 0,-1 1-1 0 0,-1 0 1 0 0,0 1 0 0 0,-1 0-1 0 0,-2 1 1 0 0,0 0 0 0 0,-1 0 0 0 0,11 48-1 0 0,-16-42 14 0 0,-1 1 1 0 0,-1-1-1 0 0,-2 1 0 0 0,-1 0 0 0 0,-1-1 0 0 0,-1 1 0 0 0,-2-1 0 0 0,0 0 0 0 0,-2 0 0 0 0,-2-1 1 0 0,0 1-1 0 0,-2-2 0 0 0,-16 32 0 0 0,-1-7 35 0 0,-2-1 0 0 0,-3-2 0 0 0,-1-1-1 0 0,-2-2 1 0 0,-65 63 0 0 0,88-95-282 0 0,-32 30 609 0 0,43-40-682 0 0,-1-1 0 0 0,0 1 1 0 0,0-1-1 0 0,0 0 0 0 0,0 0 0 0 0,0 0 1 0 0,-1-1-1 0 0,1 1 0 0 0,0-1 0 0 0,-1 0 1 0 0,1 0-1 0 0,-5 1 0 0 0</inkml:trace>
+  <inkml:trace contextRef="#ctx0" brushRef="#br0">0 89 5416 0 0,'4'-12'-64'0'0,"-1"-1"0"0"0,0 0 0 0 0,-1 0 0 0 0,0-16 0 0 0,-2 28 135 0 0,0-4-13 0 0,0 3-24 0 0,0 4 177 0 0,3 26-199 0 0,2 0 1 0 0,0 0 0 0 0,2 0-1 0 0,1-1 1 0 0,1 0-1 0 0,21 42 1 0 0,-12-25 2 0 0,-14-36 77 0 0,0 1 0 0 0,-1-1 0 0 0,0 1-1 0 0,-1 0 1 0 0,0 0 0 0 0,0 0 0 0 0,0 0 0 0 0,-2 0-1 0 0,1 0 1 0 0,-1 0 0 0 0,0 0 0 0 0,-3 17 0 0 0,2-25 81 0 0,1-1-178 0 0,1 0 0 0 0,-1 0 0 0 0,0 0 0 0 0,0 0 0 0 0,0 0 0 0 0,0-1 0 0 0,0 1-1 0 0,0 0 1 0 0,0 0 0 0 0,0 0 0 0 0,0 0 0 0 0,1 0 0 0 0,-1 0 0 0 0,0 0 0 0 0,0 0 0 0 0,0 0 0 0 0,0 0 0 0 0,0 0 0 0 0,0 0 0 0 0,1 0 0 0 0,-1 0 0 0 0,0 0 0 0 0,0 0 0 0 0,0 0-1 0 0,0 0 1 0 0,0 0 0 0 0,0 0 0 0 0,0 0 0 0 0,1 0 0 0 0,-1 0 0 0 0,0 0 0 0 0,0 0 0 0 0,0 0 0 0 0,0 0 0 0 0,0 0 0 0 0,0 0 0 0 0,0 1 0 0 0,0-1 0 0 0,1 0 0 0 0,-1 0 0 0 0,0 0-1 0 0,0 0 1 0 0,0 0 0 0 0,0 0 0 0 0,0 0 0 0 0,0 0 0 0 0,0 1 0 0 0,0-1 0 0 0,0 0 0 0 0,0 0 0 0 0,0 0 0 0 0,0 0 0 0 0,0 0 0 0 0,0 0 0 0 0,0 0 0 0 0,0 1 0 0 0,0-1 0 0 0,0 0-1 0 0,0 0 1 0 0,0 0 0 0 0,0 0 0 0 0,0 0 0 0 0,0 0 0 0 0,0 0 0 0 0,0 1 0 0 0,0-1 0 0 0,0 0 0 0 0,0 0 0 0 0,0 0 0 0 0,15-10-592 0 0,18-20-1721 0 0,-14 13 503 0 0</inkml:trace>
 </inkml:ink>
 </file>
 
@@ -4966,7 +5127,7 @@
           <inkml:channelProperty channel="OE" name="resolution" value="1000" units="1/deg"/>
         </inkml:channelProperties>
       </inkml:inkSource>
-      <inkml:timestamp xml:id="ts0" timeString="2026-04-02T05:40:53.391"/>
+      <inkml:timestamp xml:id="ts0" timeString="2026-04-02T05:37:27.118"/>
     </inkml:context>
     <inkml:brush xml:id="br0">
       <inkml:brushProperty name="width" value="0.2" units="cm"/>
@@ -4974,7 +5135,7 @@
       <inkml:brushProperty name="color" value="#FFC114"/>
     </inkml:brush>
   </inkml:definitions>
-  <inkml:trace contextRef="#ctx0" brushRef="#br0">1030 89 4148 0 0,'6'-15'4902'0'0,"-6"13"-4695"0"0,-12-3-162 0 0,-1 0 0 0 0,1 0 0 0 0,0 1 0 0 0,-1 1 0 0 0,0 0 0 0 0,0 1 1 0 0,0 0-1 0 0,0 1 0 0 0,0 1 0 0 0,-17 1 0 0 0,-4 1-48 0 0,1 1 0 0 0,-64 15 0 0 0,53-6-27 0 0,1 1-1 0 0,1 2 1 0 0,0 2 0 0 0,1 2-1 0 0,1 1 1 0 0,1 2-1 0 0,1 2 1 0 0,0 2 0 0 0,-51 46-1 0 0,61-47 0 0 0,1 2-1 0 0,1 0 1 0 0,1 2-1 0 0,2 0 1 0 0,0 2-1 0 0,3 0 0 0 0,0 2 1 0 0,2 0-1 0 0,-15 40 1 0 0,29-61 22 0 0,1 0 0 0 0,0 0 0 0 0,1 1 1 0 0,0-1-1 0 0,1 1 0 0 0,0-1 0 0 0,1 1 0 0 0,1-1 1 0 0,0 1-1 0 0,0 0 0 0 0,2-1 0 0 0,-1 0 1 0 0,1 0-1 0 0,1 1 0 0 0,7 14 0 0 0,-3-10 6 0 0,1-1 0 0 0,1 0 0 0 0,0 0 0 0 0,1-1 0 0 0,1 0 1 0 0,0-1-1 0 0,1-1 0 0 0,0 0 0 0 0,26 19 0 0 0,-3-6 18 0 0,1-3 0 0 0,1-1 1 0 0,0-2-1 0 0,2-1 0 0 0,0-2 1 0 0,73 19-1 0 0,-52-21 34 0 0,1-3-1 0 0,0-3 1 0 0,1-3 0 0 0,65-1 0 0 0,-86-6 41 0 0,-1-3 1 0 0,1-1 0 0 0,-1-2 0 0 0,-1-2 0 0 0,0-1 0 0 0,68-28 0 0 0,-83 28 57 0 0,-2-1-1 0 0,1-1 1 0 0,-2-1-1 0 0,0-1 1 0 0,0-1-1 0 0,-1-1 1 0 0,-1 0-1 0 0,-1-2 1 0 0,0 0-1 0 0,-1-2 1 0 0,-1 0-1 0 0,15-24 1 0 0,-13 13 21 0 0,-2-1 0 0 0,-1 0 0 0 0,13-40 0 0 0,-23 53-111 0 0,-1 0 0 0 0,-1 0 0 0 0,0 0 0 0 0,-2 0 0 0 0,0-1-1 0 0,-1 1 1 0 0,-2-31 0 0 0,-1 31-38 0 0,-1-1 0 0 0,-1 0 0 0 0,0 1 0 0 0,-1-1 0 0 0,-2 1 0 0 0,0 1 0 0 0,0-1 0 0 0,-2 1 0 0 0,-1 1 0 0 0,0 0 0 0 0,-1 0 0 0 0,0 1 0 0 0,-2 0 0 0 0,0 1 0 0 0,0 0 0 0 0,-18-14 0 0 0,-3-1-13 0 0,-1 2 0 0 0,-2 1 0 0 0,0 1 0 0 0,-2 3 0 0 0,-1 1 0 0 0,0 1-1 0 0,-2 3 1 0 0,-43-14 0 0 0,19 16-23 0 0,44 12-486 0 0,1-2 0 0 0,-25-8 0 0 0</inkml:trace>
+  <inkml:trace contextRef="#ctx0" brushRef="#br0">29 203 4844 0 0,'0'0'-200'0'0,"-2"0"165"0"0,-1 0 0 0 0,1-1 0 0 0,-1 1 0 0 0,1-1-1 0 0,0 0 1 0 0,-1 1 0 0 0,1-1 0 0 0,0 0-1 0 0,0 0 1 0 0,-4-3 0 0 0,11-2 33 0 0,0-1 1 0 0,0 1-1 0 0,0-1 1 0 0,1 1-1 0 0,-1 1 1 0 0,2-1-1 0 0,-1 1 1 0 0,0 0-1 0 0,13-6 0 0 0,72-34 20 0 0,-50 26-17 0 0,109-44 137 0 0,-148 62-88 0 0,-21 17-2154 0 0,16-12 1616 0 0</inkml:trace>
 </inkml:ink>
 </file>
 
@@ -4998,7 +5159,7 @@
           <inkml:channelProperty channel="OE" name="resolution" value="1000" units="1/deg"/>
         </inkml:channelProperties>
       </inkml:inkSource>
-      <inkml:timestamp xml:id="ts0" timeString="2026-04-02T05:40:56.699"/>
+      <inkml:timestamp xml:id="ts0" timeString="2026-04-02T05:37:27.464"/>
     </inkml:context>
     <inkml:brush xml:id="br0">
       <inkml:brushProperty name="width" value="0.2" units="cm"/>
@@ -5006,7 +5167,7 @@
       <inkml:brushProperty name="color" value="#FFC114"/>
     </inkml:brush>
   </inkml:definitions>
-  <inkml:trace contextRef="#ctx0" brushRef="#br0">29 375 6761 0 0,'0'0'-320'0'0,"-19"3"-213"0"0,10-2 514 0 0,11-1 420 0 0,448-58-270 0 0,-104 16-51 0 0,379-77-36 0 0,-557 92-14 0 0,-167 27-6 0 0,35-10 2493 0 0,-123-20-2387 0 0,-1 3 0 0 0,-139-25 1 0 0,179 43-113 0 0,37 6-188 0 0,14 1 71 0 0,35 4 43 0 0,61 8 26 0 0,215 51-146 0 0,-312-60 171 0 0,1-1 0 0 0,0 0 0 0 0,-1 1-1 0 0,1 0 1 0 0,0 0 0 0 0,-1 0 0 0 0,1 0 0 0 0,-1 0 0 0 0,0 0-1 0 0,1 0 1 0 0,-1 1 0 0 0,0-1 0 0 0,0 1 0 0 0,0 0-1 0 0,0 0 1 0 0,0 0 0 0 0,0 0 0 0 0,0 0 0 0 0,-1 0 0 0 0,1 0-1 0 0,-1 1 1 0 0,1-1 0 0 0,-1 0 0 0 0,0 1 0 0 0,0-1-1 0 0,0 1 1 0 0,0-1 0 0 0,-1 1 0 0 0,1 0 0 0 0,-1-1 0 0 0,1 5-1 0 0,-2-1 5 0 0,0-1 0 0 0,0 1 0 0 0,-1 0 0 0 0,0-1 0 0 0,0 1-1 0 0,0-1 1 0 0,-1 0 0 0 0,0 0 0 0 0,0 0 0 0 0,0 0 0 0 0,0 0-1 0 0,-1-1 1 0 0,-6 7 0 0 0,-11 9 6 0 0,-1-1-1 0 0,-1 0 0 0 0,0-2 1 0 0,-27 15-1 0 0,2-1 29 0 0,-1-2-387 0 0</inkml:trace>
+  <inkml:trace contextRef="#ctx0" brushRef="#br0">39 0 3084 0 0,'0'0'27'0'0,"-37"12"942"0"0,35-11-907 0 0,3 0-52 0 0,0 0 0 0 0,-1 1-1 0 0,1-1 1 0 0,0 0-1 0 0,0 0 1 0 0,0 0-1 0 0,0 0 1 0 0,0 0 0 0 0,0 0-1 0 0,1 0 1 0 0,-1 0-1 0 0,0 0 1 0 0,0 0-1 0 0,1 0 1 0 0,-1-1 0 0 0,0 1-1 0 0,1 0 1 0 0,-1-1-1 0 0,2 1 1 0 0,35 12 217 0 0,-31-11-178 0 0,40 11 265 0 0,73 12-1 0 0,-83-20-126 0 0,0 2 1 0 0,0 2-1 0 0,59 23 0 0 0,-95-32-189 0 0,0 0-1 0 0,0 0 1 0 0,0 0 0 0 0,-1 1 0 0 0,1-1-1 0 0,0 0 1 0 0,0 1 0 0 0,0-1 0 0 0,0 1-1 0 0,0-1 1 0 0,-1 1 0 0 0,1-1 0 0 0,0 1-1 0 0,-1 0 1 0 0,1-1 0 0 0,0 1 0 0 0,-1 0-1 0 0,1 0 1 0 0,-1-1 0 0 0,1 1 0 0 0,-1 0-1 0 0,1 0 1 0 0,-1 0 0 0 0,1 0 0 0 0,-1-1-1 0 0,0 1 1 0 0,0 0 0 0 0,1 1 0 0 0,-15 11-2455 0 0</inkml:trace>
 </inkml:ink>
 </file>
 
@@ -5062,7 +5223,7 @@
           <inkml:channelProperty channel="OE" name="resolution" value="1000" units="1/deg"/>
         </inkml:channelProperties>
       </inkml:inkSource>
-      <inkml:timestamp xml:id="ts0" timeString="2026-04-02T05:40:57.724"/>
+      <inkml:timestamp xml:id="ts0" timeString="2026-04-02T05:37:28.408"/>
     </inkml:context>
     <inkml:brush xml:id="br0">
       <inkml:brushProperty name="width" value="0.2" units="cm"/>
@@ -5070,7 +5231,7 @@
       <inkml:brushProperty name="color" value="#FFC114"/>
     </inkml:brush>
   </inkml:definitions>
-  <inkml:trace contextRef="#ctx0" brushRef="#br0">11 121 6533 0 0,'-8'-42'619'0'0,"6"36"-509"0"0,2 4-99 0 0,0 6 53 0 0,3 40-86 0 0,2 0 1 0 0,3 0-1 0 0,1-1 1 0 0,25 73-1 0 0,-11-47 2879 0 0,-31-86-2814 0 0,1 1 1 0 0,1-1-1 0 0,1 0 1 0 0,0 0-1 0 0,1-1 1 0 0,1 1-1 0 0,1-1 1 0 0,1 0 0 0 0,0 0-1 0 0,1 0 1 0 0,1 0-1 0 0,0 1 1 0 0,2-1-1 0 0,0 0 1 0 0,1 1-1 0 0,0-1 1 0 0,2 1-1 0 0,8-20 1 0 0,-11 32-68 0 0,1 0 1 0 0,-1 0-1 0 0,1 1 1 0 0,0-1-1 0 0,0 1 1 0 0,0 0-1 0 0,0 0 0 0 0,1 0 1 0 0,0 0-1 0 0,0 1 1 0 0,0 0-1 0 0,8-4 1 0 0,-3 2-20 0 0,1 0 0 0 0,0 1 0 0 0,0 0 0 0 0,0 1 0 0 0,15-2 0 0 0,-24 4 18 0 0,20 10-81 0 0,-18-8 93 0 0,0 0-1 0 0,0 1 0 0 0,0 0 0 0 0,0 0 0 0 0,0 0 0 0 0,0 1 0 0 0,0-1 0 0 0,3 4 1 0 0,4 6-21 0 0,0 0-1 0 0,0 2 1 0 0,-1-1 0 0 0,11 21 0 0 0,9 12-10 0 0,-22-35 30 0 0,-1 1 1 0 0,0 1 0 0 0,-1-1-1 0 0,0 1 1 0 0,-1 1-1 0 0,5 15 1 0 0,24 65-42 0 0,-30-81 474 0 0,-2-5-1448 0 0</inkml:trace>
+  <inkml:trace contextRef="#ctx0" brushRef="#br0">19 43 4612 0 0,'-11'-37'76'0'0,"8"31"161"0"0,1 9-96 0 0,-1 23-59 0 0,3 37-104 0 0,2-44 66 0 0,0-1 0 0 0,1 0 0 0 0,1 0-1 0 0,1 0 1 0 0,13 33 0 0 0,-16-47-18 0 0,0 0-1 0 0,0 0 1 0 0,1 0 0 0 0,-1 0 0 0 0,1 0 0 0 0,0 0 0 0 0,0-1 0 0 0,0 1 0 0 0,0-1 0 0 0,1 0 0 0 0,-1 0 0 0 0,1 0 0 0 0,0-1 0 0 0,0 1 0 0 0,0-1 0 0 0,0 0-1 0 0,0 0 1 0 0,1 0 0 0 0,-1-1 0 0 0,1 1 0 0 0,-1-1 0 0 0,1 0 0 0 0,-1 0 0 0 0,1-1 0 0 0,-1 1 0 0 0,1-1 0 0 0,0 0 0 0 0,-1 0 0 0 0,6-2 0 0 0,-1 1-221 0 0,-1 0 0 0 0,1-1 0 0 0,0 0 0 0 0,-1-1 0 0 0,0 0 0 0 0,1 0 1 0 0,-1-1-1 0 0,-1 0 0 0 0,1-1 0 0 0,0 1 0 0 0,-1-1 0 0 0,0-1 1 0 0,0 1-1 0 0,-1-1 0 0 0,12-14 0 0 0,-6 3-998 0 0</inkml:trace>
 </inkml:ink>
 </file>
 
@@ -5094,7 +5255,7 @@
           <inkml:channelProperty channel="OE" name="resolution" value="1000" units="1/deg"/>
         </inkml:channelProperties>
       </inkml:inkSource>
-      <inkml:timestamp xml:id="ts0" timeString="2026-04-02T05:40:58.443"/>
+      <inkml:timestamp xml:id="ts0" timeString="2026-04-02T05:37:28.665"/>
     </inkml:context>
     <inkml:brush xml:id="br0">
       <inkml:brushProperty name="width" value="0.2" units="cm"/>
@@ -5102,7 +5263,7 @@
       <inkml:brushProperty name="color" value="#FFC114"/>
     </inkml:brush>
   </inkml:definitions>
-  <inkml:trace contextRef="#ctx0" brushRef="#br0">131 189 5621 0 0,'0'0'-299'0'0,"0"0"284"0"0,0 0-1 0 0,1 0 0 0 0,-1 0 0 0 0,0 0 0 0 0,0 0 0 0 0,0 0 0 0 0,0 0 0 0 0,1 0 0 0 0,-1 0 1 0 0,0 0-1 0 0,0 1 0 0 0,0-1 0 0 0,0 0 0 0 0,0 0 0 0 0,0 0 0 0 0,1 0 0 0 0,-1 0 0 0 0,0 0 1 0 0,0 0-1 0 0,0 1 0 0 0,0-1 0 0 0,0 0 0 0 0,0 0 0 0 0,0 0 0 0 0,0 0 0 0 0,0 0 0 0 0,0 1 1 0 0,0-1-1 0 0,0 0 0 0 0,0 0 0 0 0,0 0 0 0 0,0 0 0 0 0,0 1 0 0 0,0-1 0 0 0,0 0 0 0 0,0 0 1 0 0,0 0-1 0 0,0 0 0 0 0,0 1 0 0 0,0-1 0 0 0,0 0 0 0 0,0 0 0 0 0,0 0 0 0 0,0 0 0 0 0,0 0 1 0 0,0 1-1 0 0,0-1 0 0 0,0 0 0 0 0,0 0 0 0 0,-1 0 0 0 0,1 0 0 0 0,0 0 0 0 0,0 0 0 0 0,0 1 1 0 0,0-1-1 0 0,0 0 0 0 0,0 0 0 0 0,-1 0 0 0 0,1 0 0 0 0,0 0 0 0 0,0 0 0 0 0,0 0 0 0 0,0 0 1 0 0,-1 0-1 0 0,1 0 0 0 0,14 0-21 0 0,1-1 1 0 0,-1-1-1 0 0,0 0 1 0 0,0-1-1 0 0,26-9 1 0 0,-31 9 126 0 0,-1-1 1 0 0,0 0-1 0 0,1 0 1 0 0,-1 0-1 0 0,-1-1 1 0 0,1 0-1 0 0,-1-1 1 0 0,0 0-1 0 0,0 0 1 0 0,-1 0-1 0 0,7-8 0 0 0,-12 12-67 0 0,-1 1-1 0 0,1-1 0 0 0,0 0 0 0 0,-1 1 0 0 0,1-1 0 0 0,-1 0 0 0 0,1 1 0 0 0,-1-1 0 0 0,0 0 0 0 0,0 0 0 0 0,0 1 0 0 0,0-1 0 0 0,0 0 0 0 0,0 0 0 0 0,0 1 0 0 0,0-1 0 0 0,-1 0 0 0 0,1 0 0 0 0,-1 1 0 0 0,1-1 1 0 0,-1 1-1 0 0,0-1 0 0 0,1 0 0 0 0,-1 1 0 0 0,0-1 0 0 0,0 1 0 0 0,0 0 0 0 0,0-1 0 0 0,-1 1 0 0 0,1 0 0 0 0,-3-3 0 0 0,-1-1 12 0 0,0 1-1 0 0,-1-1 1 0 0,1 1-1 0 0,-1 0 0 0 0,0 0 1 0 0,0 1-1 0 0,-8-4 1 0 0,6 4-29 0 0,0-1 0 0 0,-1 2 0 0 0,1-1 0 0 0,-1 1 0 0 0,0 0 0 0 0,1 1 0 0 0,-1 0 0 0 0,0 0 0 0 0,0 1 0 0 0,0 0 0 0 0,0 1 0 0 0,0 0 0 0 0,1 0 0 0 0,-1 1 0 0 0,0 0 0 0 0,1 0 0 0 0,-1 1 0 0 0,1 0 0 0 0,0 1 0 0 0,0 0 0 0 0,0 0 0 0 0,1 1 0 0 0,-1 0 0 0 0,1 0 0 0 0,-7 6 0 0 0,10-7-8 0 0,-1 0 1 0 0,1 0-1 0 0,0 0 0 0 0,1 0 1 0 0,-1 1-1 0 0,1-1 0 0 0,0 1 1 0 0,0 0-1 0 0,0 0 0 0 0,0 0 1 0 0,1 1-1 0 0,0-1 0 0 0,0 0 1 0 0,1 1-1 0 0,-1-1 0 0 0,1 1 1 0 0,1 0-1 0 0,-1-1 0 0 0,1 1 1 0 0,0 0-1 0 0,0-1 0 0 0,0 1 1 0 0,1 0-1 0 0,0-1 0 0 0,0 1 1 0 0,0 0-1 0 0,1-1 0 0 0,0 0 1 0 0,0 1-1 0 0,0-1 0 0 0,1 0 1 0 0,-1 0-1 0 0,1 0 0 0 0,1 0 1 0 0,-1-1-1 0 0,1 1 0 0 0,0-1 1 0 0,-1 0-1 0 0,2 0 0 0 0,-1 0 1 0 0,0-1-1 0 0,9 6 0 0 0,5 3 22 0 0,1-2-1 0 0,0 1 1 0 0,1-2-1 0 0,0-1 1 0 0,35 10-1 0 0,108 17 534 0 0,-131-29-257 0 0,-29-6-234 0 0,5 1-197 0 0,-7-1 16 0 0,0 0-1 0 0,0 0 0 0 0,0 1 1 0 0,0-1-1 0 0,0 0 1 0 0,0 0-1 0 0,0 0 1 0 0,0 0-1 0 0,0 0 0 0 0,0-1 1 0 0,0 1-1 0 0,0 0 1 0 0,0 0-1 0 0,0-1 0 0 0,0 1 1 0 0,0 0-1 0 0,0-1 1 0 0,0 1-1 0 0,0-1 1 0 0,0 0-1 0 0,0 1 0 0 0,0-1 1 0 0,-1 1-1 0 0,1-1 1 0 0,1-1-1 0 0,5-8-1900 0 0</inkml:trace>
+  <inkml:trace contextRef="#ctx0" brushRef="#br0">73 27 4068 0 0,'-4'-3'61'0'0,"0"0"-1"0"0,0 1 0 0 0,-1 0 0 0 0,1 0 0 0 0,-1 0 0 0 0,1 0 0 0 0,-1 1 1 0 0,-8-2-1 0 0,12 3 40 0 0,-23-6 231 0 0</inkml:trace>
 </inkml:ink>
 </file>
 
@@ -5126,7 +5287,7 @@
           <inkml:channelProperty channel="OE" name="resolution" value="1000" units="1/deg"/>
         </inkml:channelProperties>
       </inkml:inkSource>
-      <inkml:timestamp xml:id="ts0" timeString="2026-04-02T05:40:59.243"/>
+      <inkml:timestamp xml:id="ts0" timeString="2026-04-02T05:37:29.556"/>
     </inkml:context>
     <inkml:brush xml:id="br0">
       <inkml:brushProperty name="width" value="0.2" units="cm"/>
@@ -5134,7 +5295,7 @@
       <inkml:brushProperty name="color" value="#FFC114"/>
     </inkml:brush>
   </inkml:definitions>
-  <inkml:trace contextRef="#ctx0" brushRef="#br0">360 99 5192 0 0,'0'0'-195'0'0,"-7"-39"2"0"0,5 35 248 0 0,-1 0-1 0 0,1 0 0 0 0,-1 0 1 0 0,0 0-1 0 0,-1 1 0 0 0,1-1 0 0 0,-1 1 1 0 0,1 0-1 0 0,-1 0 0 0 0,0 0 1 0 0,0 0-1 0 0,0 1 0 0 0,-1 0 1 0 0,1 0-1 0 0,0 0 0 0 0,-1 0 0 0 0,-8-1 1 0 0,4 1-29 0 0,0 1 1 0 0,0 0-1 0 0,0 1 1 0 0,1 0-1 0 0,-1 0 0 0 0,0 1 1 0 0,0 0-1 0 0,0 1 1 0 0,-13 4-1 0 0,11-3-34 0 0,0 1 0 0 0,1 0-1 0 0,-1 0 1 0 0,1 1 0 0 0,0 1-1 0 0,0 0 1 0 0,1 0 0 0 0,0 1-1 0 0,0 0 1 0 0,0 0 0 0 0,1 1-1 0 0,0 0 1 0 0,0 1 0 0 0,1 0-1 0 0,0 0 1 0 0,-6 12 0 0 0,10-16 7 0 0,1 1 0 0 0,-1-1 0 0 0,1 1 1 0 0,1 0-1 0 0,-1 0 0 0 0,1 0 1 0 0,0 0-1 0 0,0 0 0 0 0,1 0 1 0 0,0 0-1 0 0,0 8 0 0 0,1-10 7 0 0,0-1-1 0 0,0 0 1 0 0,0 0-1 0 0,1-1 0 0 0,-1 1 1 0 0,1 0-1 0 0,0 0 1 0 0,0-1-1 0 0,0 1 1 0 0,0-1-1 0 0,0 1 0 0 0,0-1 1 0 0,0 0-1 0 0,1 0 1 0 0,-1 0-1 0 0,1 0 1 0 0,0-1-1 0 0,0 1 0 0 0,-1-1 1 0 0,1 1-1 0 0,0-1 1 0 0,0 0-1 0 0,7 1 1 0 0,0 2 17 0 0,0-1 1 0 0,1-1-1 0 0,0 0 1 0 0,-1-1 0 0 0,1 0-1 0 0,0 0 1 0 0,0-1 0 0 0,-1-1-1 0 0,1 1 1 0 0,0-2 0 0 0,0 0-1 0 0,-1 0 1 0 0,17-6 0 0 0,-13 2 27 0 0,-1 0 1 0 0,1-1 0 0 0,-2 0-1 0 0,1-1 1 0 0,-1-1 0 0 0,0 0 0 0 0,-1-1-1 0 0,0 0 1 0 0,13-15 0 0 0,-15 15 139 0 0,-1 0 1 0 0,0-1 0 0 0,-1-1 0 0 0,0 1-1 0 0,0-1 1 0 0,-1 0 0 0 0,-1 0 0 0 0,0-1-1 0 0,4-16 1 0 0,-9 29-184 0 0,0 0 1 0 0,0 0-1 0 0,0 0 0 0 0,0 0 0 0 0,0-1 0 0 0,0 1 0 0 0,0 0 1 0 0,0 0-1 0 0,0 0 0 0 0,0-1 0 0 0,0 1 0 0 0,0 0 1 0 0,0 0-1 0 0,0 0 0 0 0,0 0 0 0 0,0-1 0 0 0,0 1 0 0 0,0 0 1 0 0,0 0-1 0 0,0 0 0 0 0,0-1 0 0 0,0 1 0 0 0,0 0 1 0 0,0 0-1 0 0,0 0 0 0 0,-1 0 0 0 0,1 0 0 0 0,0-1 1 0 0,0 1-1 0 0,0 0 0 0 0,0 0 0 0 0,0 0 0 0 0,0 0 0 0 0,-1 0 1 0 0,1 0-1 0 0,0-1 0 0 0,0 1 0 0 0,0 0 0 0 0,0 0 1 0 0,-1 0-1 0 0,1 0 0 0 0,0 0 0 0 0,0 0 0 0 0,0 0 0 0 0,-1 0 1 0 0,1 0-1 0 0,0 0 0 0 0,0 0 0 0 0,0 0 0 0 0,0 0 1 0 0,-1 0-1 0 0,1 0 0 0 0,0 0 0 0 0,0 0 0 0 0,0 0 1 0 0,-1 0-1 0 0,1 0 0 0 0,0 0 0 0 0,0 0 0 0 0,-1 1 0 0 0,-18 10 76 0 0,15-8-89 0 0,0 1-1 0 0,0-1 0 0 0,0 1 0 0 0,1 0 1 0 0,-1 0-1 0 0,1 0 0 0 0,0 1 0 0 0,-5 8 1 0 0,7-8-12 0 0,-1 1 0 0 0,1 0 1 0 0,0-1-1 0 0,0 1 1 0 0,0 0-1 0 0,1 0 1 0 0,0 0-1 0 0,0 0 1 0 0,1-1-1 0 0,-1 1 1 0 0,1 0-1 0 0,0 0 1 0 0,1-1-1 0 0,0 1 1 0 0,3 9-1 0 0,-1-7 80 0 0,1 0 1 0 0,0 0-1 0 0,0 0 1 0 0,0 0-1 0 0,1-1 1 0 0,0 0-1 0 0,0 0 0 0 0,1-1 1 0 0,12 11-1 0 0,-12-12-145 0 0,0-1 0 0 0,1 1 1 0 0,-1-1-1 0 0,1 0 0 0 0,-1-1 0 0 0,1 0 0 0 0,0 0 0 0 0,1-1 0 0 0,-1 0 0 0 0,14 2 0 0 0,-17-4-189 0 0,1 1 1 0 0,-1-1-1 0 0,1-1 0 0 0,-1 1 1 0 0,1-1-1 0 0,-1 0 0 0 0,0 0 1 0 0,0-1-1 0 0,1 1 1 0 0,-1-1-1 0 0,0 0 0 0 0,0-1 1 0 0,0 1-1 0 0,-1-1 0 0 0,1 0 1 0 0,-1 0-1 0 0,5-5 0 0 0,5-6-1793 0 0</inkml:trace>
+  <inkml:trace contextRef="#ctx0" brushRef="#br0">28 92 3252 0 0,'-4'-7'-25'0'0,"1"0"-1"0"0,-1-1 1 0 0,2 1 0 0 0,-1-1-1 0 0,1 0 1 0 0,-2-12-1 0 0,-1-5 330 0 0,4 24-260 0 0,4 23 95 0 0,1 1 1 0 0,0-1-1 0 0,13 34 1 0 0,32 56 3182 0 0,-96-184-2559 0 0,44 67-739 0 0,1-1-1 0 0,0 1 0 0 0,0-1 1 0 0,0 0-1 0 0,1 1 0 0 0,0-1 1 0 0,0 0-1 0 0,0 0 0 0 0,1 0 1 0 0,0 1-1 0 0,0-1 0 0 0,0 0 1 0 0,1 0-1 0 0,0 0 0 0 0,2-6 1 0 0,-2 8-22 0 0,1 1 1 0 0,-1-1 0 0 0,1 0-1 0 0,0 1 1 0 0,0 0 0 0 0,1-1 0 0 0,-1 1-1 0 0,1 0 1 0 0,0 0 0 0 0,-1 1-1 0 0,1-1 1 0 0,1 0 0 0 0,-1 1-1 0 0,0 0 1 0 0,0 0 0 0 0,1 0 0 0 0,0 0-1 0 0,-1 0 1 0 0,1 1 0 0 0,0 0-1 0 0,-1-1 1 0 0,8 0 0 0 0,-7 1-4 0 0,0 0 1 0 0,1 1 0 0 0,-1-1 0 0 0,0 1-1 0 0,1 0 1 0 0,-1 0 0 0 0,1 0-1 0 0,-1 1 1 0 0,0 0 0 0 0,1 0-1 0 0,-1 0 1 0 0,0 0 0 0 0,0 0-1 0 0,0 1 1 0 0,0 0 0 0 0,0 0 0 0 0,0 0-1 0 0,0 0 1 0 0,-1 1 0 0 0,5 3-1 0 0,3 4-1 0 0,-2 1 0 0 0,1-1 0 0 0,-1 2 0 0 0,13 21 0 0 0,5 7 0 0 0,-15-22-103 0 0,-1 1 0 0 0,-1 1 0 0 0,12 30-1 0 0</inkml:trace>
 </inkml:ink>
 </file>
 
@@ -5158,7 +5319,7 @@
           <inkml:channelProperty channel="OE" name="resolution" value="1000" units="1/deg"/>
         </inkml:channelProperties>
       </inkml:inkSource>
-      <inkml:timestamp xml:id="ts0" timeString="2026-04-02T05:40:59.900"/>
+      <inkml:timestamp xml:id="ts0" timeString="2026-04-02T05:37:30.493"/>
     </inkml:context>
     <inkml:brush xml:id="br0">
       <inkml:brushProperty name="width" value="0.2" units="cm"/>
@@ -5166,7 +5327,7 @@
       <inkml:brushProperty name="color" value="#FFC114"/>
     </inkml:brush>
   </inkml:definitions>
-  <inkml:trace contextRef="#ctx0" brushRef="#br0">20 50 5092 0 0,'0'0'-254'0'0,"-10"-6"-330"0"0,2 3 576 0 0,7 2 81 0 0,42 20 672 0 0,65 41 0 0 0,-91-49-743 0 0,0 0 0 0 0,-1 0 0 0 0,0 2 0 0 0,-1 0 0 0 0,-1 0 0 0 0,0 1 0 0 0,0 1 1 0 0,-2 0-1 0 0,14 24 0 0 0,-23-38 9 0 0,-1 0 0 0 0,1 1 0 0 0,-1-1 0 0 0,1 0-1 0 0,-1 0 1 0 0,1 1 0 0 0,-1-1 0 0 0,0 1 0 0 0,0-1 0 0 0,0 0 0 0 0,0 1 0 0 0,0-1 0 0 0,0 0 0 0 0,0 1 0 0 0,0-1 0 0 0,0 0 0 0 0,-1 1-1 0 0,1-1 1 0 0,0 0 0 0 0,-1 1 0 0 0,0-1 0 0 0,1 0 0 0 0,-1 0 0 0 0,1 1 0 0 0,-1-1 0 0 0,0 0 0 0 0,0 0 0 0 0,0 0 0 0 0,0 0 0 0 0,0 0 0 0 0,0 0-1 0 0,0 0 1 0 0,0 0 0 0 0,0-1 0 0 0,0 1 0 0 0,0 0 0 0 0,-1-1 0 0 0,-1 2 0 0 0,-1 0 61 0 0,-1 0-1 0 0,1-1 1 0 0,-1 1 0 0 0,0-1 0 0 0,1 0-1 0 0,-1 0 1 0 0,0 0 0 0 0,0-1-1 0 0,0 1 1 0 0,1-1 0 0 0,-11-1 0 0 0,9 0 16 0 0,-1 0 0 0 0,0-1 0 0 0,1 0 0 0 0,-1 0 0 0 0,1 0 0 0 0,-1-1 0 0 0,1 0 0 0 0,0 0 0 0 0,0 0 0 0 0,1-1 0 0 0,-9-7 0 0 0,12 9-63 0 0,0 0 1 0 0,0-1-1 0 0,0 1 0 0 0,0-1 1 0 0,0 0-1 0 0,1 0 1 0 0,-1 1-1 0 0,1-1 0 0 0,0 0 1 0 0,-1 0-1 0 0,2-1 0 0 0,-1 1 1 0 0,0 0-1 0 0,1 0 1 0 0,-1 0-1 0 0,1 0 0 0 0,0-1 1 0 0,0 1-1 0 0,0 0 0 0 0,0 0 1 0 0,1 0-1 0 0,0-1 1 0 0,-1 1-1 0 0,1 0 0 0 0,0 0 1 0 0,0 0-1 0 0,1 0 0 0 0,2-5 1 0 0,4-6 6 0 0,0 0 1 0 0,0 1 0 0 0,1 0 0 0 0,1 1-1 0 0,0 0 1 0 0,23-21 0 0 0,78-53-248 0 0,-106 82 179 0 0,-3 3-4 0 0,-46 3-6951 0 0</inkml:trace>
+  <inkml:trace contextRef="#ctx0" brushRef="#br0">0 220 5837 0 0,'3'-6'-309'0'0,"-1"0"219"0"0,0 0-1 0 0,-1-1 0 0 0,1 0 0 0 0,-1 1 0 0 0,0-1 1 0 0,-1 0-1 0 0,0 1 0 0 0,-1-13 0 0 0,1 17 151 0 0,11 53 101 0 0,3-1 0 0 0,1 0 0 0 0,30 63 0 0 0,-41-105-121 0 0,15 27 416 0 0,22 50 1681 0 0,-45-90-1964 0 0,-3-7-99 0 0,1 0-1 0 0,0-1 0 0 0,1 1 1 0 0,0-1-1 0 0,1 0 0 0 0,1-1 1 0 0,0 1-1 0 0,1-1 0 0 0,-2-20 1 0 0,4-141 231 0 0,2 94-156 0 0,0 3-139 0 0,-1 76-11 0 0,14-21-39 0 0,-11 20 37 0 0,-1 1 0 0 0,1 0-1 0 0,-1 0 1 0 0,1 0 0 0 0,0 1-1 0 0,0-1 1 0 0,0 1 0 0 0,0 0 0 0 0,0 0-1 0 0,0 0 1 0 0,0 1 0 0 0,0-1-1 0 0,8 1 1 0 0,-8 0 3 0 0,0 0-10 0 0,32 11-7 0 0,-22-4 11 0 0,-1 0 1 0 0,0 1 0 0 0,0 1-1 0 0,-1 0 1 0 0,0 1-1 0 0,0 0 1 0 0,-1 1-1 0 0,-1 0 1 0 0,0 0-1 0 0,0 1 1 0 0,15 25 0 0 0,-24-35 6 0 0,0 0 1 0 0,0 0 0 0 0,0 0-1 0 0,-1 0 1 0 0,1 0 0 0 0,-1 0 0 0 0,1 0-1 0 0,-1 0 1 0 0,1 0 0 0 0,-1 0 0 0 0,0 0-1 0 0,0 0 1 0 0,0 1 0 0 0,0-1 0 0 0,-1 0-1 0 0,1 0 1 0 0,0 0 0 0 0,-1 0-1 0 0,0 0 1 0 0,1 0 0 0 0,-2 3 0 0 0,-1-1-1 0 0,1 0 1 0 0,-1-1-1 0 0,0 1 1 0 0,0 0-1 0 0,0-1 1 0 0,0 0-1 0 0,-1 0 1 0 0,0 0 0 0 0,-5 4-1 0 0,-6 2 4 0 0,0-1 0 0 0,-1 0 0 0 0,-33 11 0 0 0,-31 2 72 0 0,76-20-95 0 0,-1-1-1 0 0,1 1 1 0 0,-1-1-1 0 0,1 1 1 0 0,-1-1 0 0 0,1 0-1 0 0,-1-1 1 0 0,1 1-1 0 0,-1-1 1 0 0,1 0 0 0 0,-1 0-1 0 0,1-1 1 0 0,0 1-1 0 0,-1-1 1 0 0,-3-2 0 0 0,2-5-1880 0 0,6 8 1708 0 0,-1 0 1 0 0,1 0-1 0 0,0 0 0 0 0,0 0 0 0 0,0 0 1 0 0,-1 0-1 0 0,1 0 0 0 0,0 0 0 0 0,0 0 1 0 0,1 0-1 0 0,-1 0 0 0 0,0 0 0 0 0,1-2 1 0 0,5-12-2497 0 0</inkml:trace>
 </inkml:ink>
 </file>
 
@@ -5190,7 +5351,7 @@
           <inkml:channelProperty channel="OE" name="resolution" value="1000" units="1/deg"/>
         </inkml:channelProperties>
       </inkml:inkSource>
-      <inkml:timestamp xml:id="ts0" timeString="2026-04-02T05:41:00.780"/>
+      <inkml:timestamp xml:id="ts0" timeString="2026-04-02T05:37:31.279"/>
     </inkml:context>
     <inkml:brush xml:id="br0">
       <inkml:brushProperty name="width" value="0.2" units="cm"/>
@@ -5198,7 +5359,7 @@
       <inkml:brushProperty name="color" value="#FFC114"/>
     </inkml:brush>
   </inkml:definitions>
-  <inkml:trace contextRef="#ctx0" brushRef="#br0">0 48 4944 0 0,'8'-44'820'0'0,"-7"40"-712"0"0,0 24 66 0 0,3 54 201 0 0,-1-23-243 0 0,4 9-117 0 0,3 0 1 0 0,34 111 0 0 0,-31-124-11 0 0,19 60 877 0 0,-31-106-574 0 0,-1-1-275 0 0,-1 0 0 0 0,1 0-1 0 0,0 0 1 0 0,0 0 0 0 0,0 0-1 0 0,-1 0 1 0 0,1 0-1 0 0,0 0 1 0 0,0 0 0 0 0,0 0-1 0 0,-1 0 1 0 0,1 0 0 0 0,0 0-1 0 0,0 0 1 0 0,0 0 0 0 0,-1 0-1 0 0,1 0 1 0 0,0 0 0 0 0,0 0-1 0 0,0 0 1 0 0,-1 0-1 0 0,1 0 1 0 0,0 0 0 0 0,0 0-1 0 0,0 0 1 0 0,-1 0 0 0 0,1 0-1 0 0,0 0 1 0 0,0 1 0 0 0,0-1-1 0 0,0 0 1 0 0,-1 0-1 0 0,1 0 1 0 0,0 0 0 0 0,0 1-1 0 0,0-1 1 0 0,0 0 0 0 0,0 0-1 0 0,0 0 1 0 0,0 0 0 0 0,-1 1-1 0 0,1-1 1 0 0,0 0-1 0 0,0 0 1 0 0,0 0 0 0 0,0 1-1 0 0,0-1 1 0 0,0 0 0 0 0,0 0-1 0 0,0 0 1 0 0,0 1 0 0 0,0-1-1 0 0,0 0 1 0 0,0 0 0 0 0,0 0-1 0 0,0 1 1 0 0,0-1-1 0 0,0 0 1 0 0,1 0 0 0 0,-1 0-1 0 0,0 1 1 0 0,0-1 0 0 0,0 0-1 0 0,0 0 1 0 0,-4-1 6 0 0,0-1 0 0 0,0 0-1 0 0,1 0 1 0 0,-1 0 0 0 0,0-1 0 0 0,1 1 0 0 0,-1-1 0 0 0,1 0-1 0 0,0 0 1 0 0,0 0 0 0 0,0-1 0 0 0,0 1 0 0 0,1-1-1 0 0,0 1 1 0 0,-1-1 0 0 0,1 0 0 0 0,0 0 0 0 0,1 0 0 0 0,-1 0-1 0 0,1 0 1 0 0,0 0 0 0 0,0 0 0 0 0,0-1 0 0 0,0 1 0 0 0,0-8-1 0 0,1 7-38 0 0,0 0-1 0 0,0 0 1 0 0,1 0-1 0 0,0 0 1 0 0,0 0-1 0 0,0 1 1 0 0,0-1-1 0 0,0 0 1 0 0,1 1-1 0 0,0-1 1 0 0,0 1-1 0 0,0-1 1 0 0,1 1-1 0 0,0 0 0 0 0,-1 0 1 0 0,1 0-1 0 0,1 0 1 0 0,4-4-1 0 0,-2 4-19 0 0,-1 0 1 0 0,1 1-1 0 0,0 0 0 0 0,0 0 0 0 0,0 0 0 0 0,0 1 0 0 0,0 0 0 0 0,1 0 0 0 0,-1 0 0 0 0,1 1 0 0 0,-1 0 0 0 0,1 0 0 0 0,0 1 1 0 0,7 0-1 0 0,15 1-38 0 0,0 1 1 0 0,0 2-1 0 0,38 9 1 0 0,-50-9-15 0 0,0 1 0 0 0,0 0 0 0 0,-1 2 0 0 0,0 0 0 0 0,0 0 0 0 0,0 2 0 0 0,16 11 0 0 0,-31-19 62 0 0,0 0 0 0 0,1-1-1 0 0,-1 1 1 0 0,0 0 0 0 0,0 0 0 0 0,0 0 0 0 0,0 1 0 0 0,0-1 0 0 0,0 0 0 0 0,0 0 0 0 0,0 0 0 0 0,0 1 0 0 0,-1-1 0 0 0,1 0 0 0 0,0 1 0 0 0,-1-1 0 0 0,1 1 0 0 0,-1-1 0 0 0,1 1 0 0 0,-1-1 0 0 0,0 1 0 0 0,0-1 0 0 0,0 1 0 0 0,0-1 0 0 0,0 1 0 0 0,0 1 0 0 0,-1 0 2 0 0,0-1 1 0 0,-1 1-1 0 0,1-1 1 0 0,0 0-1 0 0,-1 1 1 0 0,0-1-1 0 0,1 0 1 0 0,-1 0-1 0 0,0 0 1 0 0,0 0-1 0 0,0-1 0 0 0,0 1 1 0 0,-4 2-1 0 0,-8 4-6 0 0,0 0-1 0 0,-1-1 1 0 0,-26 8 0 0 0,-4-4 128 0 0,-1-1 1 0 0,0-3 0 0 0,0-2 0 0 0,0-1-1 0 0,-49-4 1 0 0,93 0-127 0 0,1 1 0 0 0,0-1 0 0 0,-1 0 0 0 0,1 0 0 0 0,-1-1 0 0 0,1 1 0 0 0,-1 0 0 0 0,1 0 0 0 0,0-1 0 0 0,-1 1 0 0 0,1-1 0 0 0,0 1 0 0 0,-1-1 0 0 0,1 1 0 0 0,0-1 0 0 0,-2-1 0 0 0,3 2-16 0 0,0-1 1 0 0,-1 1 0 0 0,1-1 0 0 0,0 1 0 0 0,0-1-1 0 0,0 1 1 0 0,0-1 0 0 0,0 1 0 0 0,-1-1-1 0 0,1 1 1 0 0,0-1 0 0 0,0 1 0 0 0,1-1 0 0 0,-1 1-1 0 0,0-1 1 0 0,0 1 0 0 0,0-1 0 0 0,0 1-1 0 0,0-1 1 0 0,0 1 0 0 0,1-1 0 0 0,-1 1 0 0 0,0-1-1 0 0,0 1 1 0 0,1-1 0 0 0,-1 1 0 0 0,0 0-1 0 0,1-1 1 0 0,31-26-4235 0 0,-19 20 1308 0 0</inkml:trace>
+  <inkml:trace contextRef="#ctx0" brushRef="#br0">26 126 5901 0 0,'-3'-121'-206'0'0,"3"121"212"0"0,0 0 1 0 0,0 0 0 0 0,0 0-1 0 0,0-1 1 0 0,0 1 0 0 0,0 0-1 0 0,0 0 1 0 0,0 0 0 0 0,0 0 0 0 0,0-1-1 0 0,-1 1 1 0 0,1 0 0 0 0,0 0-1 0 0,0 0 1 0 0,0 0 0 0 0,0-1-1 0 0,0 1 1 0 0,0 0 0 0 0,0 0 0 0 0,0 0-1 0 0,-1 0 1 0 0,1 0 0 0 0,0 0-1 0 0,0-1 1 0 0,0 1 0 0 0,0 0-1 0 0,-1 0 1 0 0,1 0 0 0 0,0 0 0 0 0,0 0-1 0 0,0 0 1 0 0,0 0 0 0 0,-1 0-1 0 0,1 0 1 0 0,0 0 0 0 0,0 0-1 0 0,0 0 1 0 0,-1 0 0 0 0,1 0 0 0 0,0 0-1 0 0,0 0 1 0 0,0 0 0 0 0,0 0-1 0 0,-1 0 1 0 0,1 0 0 0 0,0 0-1 0 0,0 0 1 0 0,0 0 0 0 0,0 0 0 0 0,-1 0-1 0 0,1 1 1 0 0,0-1 0 0 0,0 0-1 0 0,0 0 1 0 0,0 0 0 0 0,0 0-1 0 0,-1 0 1 0 0,1 0 0 0 0,0 1 0 0 0,-3 5 5 0 0,1 1 0 0 0,0-1 0 0 0,0 1 0 0 0,0 0 0 0 0,1-1 0 0 0,0 1 0 0 0,0 0 1 0 0,0 0-1 0 0,1 0 0 0 0,0 0 0 0 0,1 0 0 0 0,0-1 0 0 0,0 1 0 0 0,0 0 1 0 0,1 0-1 0 0,0-1 0 0 0,0 1 0 0 0,0-1 0 0 0,1 1 0 0 0,0-1 0 0 0,0 0 1 0 0,1 0-1 0 0,0 0 0 0 0,5 6 0 0 0,-6-9-4 0 0,-1-1 1 0 0,1 1-1 0 0,0-1 0 0 0,-1 1 1 0 0,1-1-1 0 0,0 0 0 0 0,0 0 1 0 0,1 0-1 0 0,-1 0 0 0 0,0-1 1 0 0,1 1-1 0 0,-1-1 0 0 0,0 0 1 0 0,1 0-1 0 0,0 0 0 0 0,-1-1 1 0 0,1 1-1 0 0,0-1 0 0 0,-1 0 1 0 0,1 0-1 0 0,0 0 0 0 0,4-1 1 0 0,-3 0 10 0 0,0-1 1 0 0,-1 0-1 0 0,1 0 1 0 0,-1 0 0 0 0,0-1-1 0 0,0 1 1 0 0,0-1-1 0 0,0 0 1 0 0,0 0 0 0 0,-1-1-1 0 0,1 1 1 0 0,-1-1 0 0 0,0 0-1 0 0,0 1 1 0 0,0-1-1 0 0,-1-1 1 0 0,3-4 0 0 0,-4 8-6 0 0,1-2 110 0 0,-1 0 0 0 0,1 1 0 0 0,-1-1 0 0 0,1 0 1 0 0,-1 0-1 0 0,0 0 0 0 0,0 0 0 0 0,-1 0 0 0 0,1-1 0 0 0,0 1 0 0 0,-1 0 1 0 0,0 0-1 0 0,0-4 0 0 0,0 7-120 0 0,0 1 0 0 0,0 0 0 0 0,0 0 0 0 0,0-1-1 0 0,0 1 1 0 0,0 0 0 0 0,-1 0 0 0 0,1-1 0 0 0,0 1 0 0 0,0 0 0 0 0,-1-1 0 0 0,1 1 0 0 0,0 0 0 0 0,-1-1 0 0 0,1 1 0 0 0,-1 0 0 0 0,1-1 0 0 0,-1 1-1 0 0,1-1 1 0 0,-1 1 0 0 0,1-1 0 0 0,-1 1 0 0 0,0 0 0 0 0,0-1 0 0 0,0 1 0 0 0,0 0-1 0 0,0-1 1 0 0,1 1 0 0 0,-1 0 0 0 0,0 0-1 0 0,0 0 1 0 0,1 0 0 0 0,-1 0-1 0 0,1-1 1 0 0,-1 1 0 0 0,1 0 0 0 0,-1 0-1 0 0,1 0 1 0 0,0 0 0 0 0,-1 1 0 0 0,1-1-1 0 0,0 0 1 0 0,0 0 0 0 0,0 0 0 0 0,0 0-1 0 0,0 0 1 0 0,0 2 0 0 0,0 1 16 0 0,1 1 0 0 0,0 0 0 0 0,0-1-1 0 0,0 1 1 0 0,0 0 0 0 0,1-1 0 0 0,0 0 0 0 0,0 1 0 0 0,0-1 0 0 0,0 0 0 0 0,1 0 0 0 0,-1 0 0 0 0,1 0 0 0 0,0 0 0 0 0,0-1-1 0 0,1 0 1 0 0,-1 1 0 0 0,1-1 0 0 0,7 5 0 0 0,-2-2-581 0 0,0-1-1 0 0,1 1 1 0 0,-1-1-1 0 0,1-1 1 0 0,1 0-1 0 0,-1 0 1 0 0,0-1-1 0 0,12 2 1 0 0,-9-3-1809 0 0</inkml:trace>
 </inkml:ink>
 </file>
 
@@ -5222,7 +5383,7 @@
           <inkml:channelProperty channel="OE" name="resolution" value="1000" units="1/deg"/>
         </inkml:channelProperties>
       </inkml:inkSource>
-      <inkml:timestamp xml:id="ts0" timeString="2026-04-02T05:41:01.372"/>
+      <inkml:timestamp xml:id="ts0" timeString="2026-04-02T05:37:31.792"/>
     </inkml:context>
     <inkml:brush xml:id="br0">
       <inkml:brushProperty name="width" value="0.2" units="cm"/>
@@ -5230,7 +5391,7 @@
       <inkml:brushProperty name="color" value="#FFC114"/>
     </inkml:brush>
   </inkml:definitions>
-  <inkml:trace contextRef="#ctx0" brushRef="#br0">361 52 6753 0 0,'0'0'-23'0'0,"0"-7"138"0"0,0 7-86 0 0,0 1-15 0 0,0-1 1 0 0,0 0-1 0 0,0 0 1 0 0,0 0-1 0 0,0 0 1 0 0,0 0-1 0 0,-1 0 1 0 0,1 0-1 0 0,0 0 1 0 0,0 0-1 0 0,0 0 1 0 0,0 0-1 0 0,0 0 1 0 0,0 0-1 0 0,0 0 1 0 0,0 0 0 0 0,0 0-1 0 0,0 0 1 0 0,-1 0-1 0 0,1 0 1 0 0,0 0-1 0 0,0 0 1 0 0,0 0-1 0 0,0 0 1 0 0,0 0-1 0 0,0 0 1 0 0,-1-1 87 0 0,1 1-73 0 0,0 0-15 0 0,0 0 1 0 0,0 0-1 0 0,0 0 1 0 0,0 0-1 0 0,0 0 1 0 0,0 0-1 0 0,0-1 1 0 0,0 1-1 0 0,-11 17-15 0 0,8-13 7 0 0,4 10 12 0 0,2-10-13 0 0,0 1 0 0 0,1-2 0 0 0,-1 1 0 0 0,1 0-1 0 0,0-1 1 0 0,0 1 0 0 0,0-1 0 0 0,1 0 0 0 0,-1-1 0 0 0,1 1 0 0 0,-1-1 0 0 0,1 0-1 0 0,0 0 1 0 0,0 0 0 0 0,0 0 0 0 0,0-1 0 0 0,0 0 0 0 0,8 0 0 0 0,1 2 14 0 0,1-1 1 0 0,-1-1-1 0 0,1 0 1 0 0,-1-1-1 0 0,26-3 1 0 0,-25-1-4 0 0,0-1 0 0 0,0 0 0 0 0,0-1 0 0 0,-1 0 0 0 0,0-1 0 0 0,0-1 0 0 0,-1 0 0 0 0,0-1 0 0 0,13-12 0 0 0,38-23 505 0 0,-42 34-336 0 0,-22 10-185 0 0,0 0 1 0 0,0 0-1 0 0,0 0 0 0 0,1 0 1 0 0,-1 0-1 0 0,0 0 0 0 0,0 0 1 0 0,1 0-1 0 0,-1 0 0 0 0,0 0 1 0 0,0 0-1 0 0,0 0 0 0 0,1 0 1 0 0,-1 0-1 0 0,0 0 0 0 0,0 0 1 0 0,1 0-1 0 0,-1 0 1 0 0,0 0-1 0 0,0 0 0 0 0,0 0 1 0 0,1 0-1 0 0,-1 0 0 0 0,0 0 1 0 0,0 0-1 0 0,0 1 0 0 0,0-1 1 0 0,1 0-1 0 0,-1 0 0 0 0,0 0 1 0 0,0 0-1 0 0,0 1 0 0 0,0-1 1 0 0,1 0-1 0 0,-1 0 0 0 0,0 0 1 0 0,0 0-1 0 0,0 1 1 0 0,0-1-1 0 0,0 0 0 0 0,0 1 1 0 0,-1 2-4 0 0,0 0 0 0 0,0 0 0 0 0,0 0 0 0 0,0 0 0 0 0,-1 0 1 0 0,1 0-1 0 0,-1 0 0 0 0,0-1 0 0 0,0 1 0 0 0,-4 4 0 0 0,-96 109 6 0 0,-148 133 0 0 0,137-142 15 0 0,29-29-289 0 0,-123 88 0 0 0,189-159-443 0 0</inkml:trace>
+  <inkml:trace contextRef="#ctx0" brushRef="#br0">1 139 5589 0 0,'13'-43'-430'0'0,"-9"30"608"0"0,0 0-1 0 0,0 0 1 0 0,-2 0-1 0 0,1-1 0 0 0,0-15 1 0 0,15 67-71 0 0,16 107 53 0 0,7 40 15 0 0,-5 74 80 0 0,-29-221-127 0 0,-6-37-324 0 0,12-25-2979 0 0,-4 9 1353 0 0</inkml:trace>
 </inkml:ink>
 </file>
 
@@ -5254,7 +5415,7 @@
           <inkml:channelProperty channel="OE" name="resolution" value="1000" units="1/deg"/>
         </inkml:channelProperties>
       </inkml:inkSource>
-      <inkml:timestamp xml:id="ts0" timeString="2026-04-02T05:41:03.774"/>
+      <inkml:timestamp xml:id="ts0" timeString="2026-04-02T05:37:32.102"/>
     </inkml:context>
     <inkml:brush xml:id="br0">
       <inkml:brushProperty name="width" value="0.2" units="cm"/>
@@ -5262,7 +5423,7 @@
       <inkml:brushProperty name="color" value="#FFC114"/>
     </inkml:brush>
   </inkml:definitions>
-  <inkml:trace contextRef="#ctx0" brushRef="#br0">556 14 5757 0 0,'0'0'1796'0'0,"-7"1"-1738"0"0,-45 4 61 0 0,28-4-109 0 0,-1 1-1 0 0,1 2 1 0 0,0 0 0 0 0,-25 9 0 0 0,23-2-48 0 0,1 1 0 0 0,0 2 1 0 0,1 0-1 0 0,1 2 0 0 0,0 0 1 0 0,1 2-1 0 0,1 0 0 0 0,0 1 1 0 0,2 1-1 0 0,0 1 0 0 0,-27 42 1 0 0,38-51 13 0 0,1-1 0 0 0,0 1 0 0 0,1 1 0 0 0,0-1 0 0 0,1 1 0 0 0,1 0 0 0 0,0 0 0 0 0,1 0 0 0 0,-3 19 0 0 0,6-23 15 0 0,-1-1 1 0 0,1 0-1 0 0,0 1 0 0 0,1-1 0 0 0,0 1 0 0 0,0-1 0 0 0,1 0 0 0 0,0 1 0 0 0,1-1 0 0 0,0 0 0 0 0,0 0 1 0 0,0-1-1 0 0,1 1 0 0 0,0-1 0 0 0,1 0 0 0 0,6 9 0 0 0,15 10 22 0 0,0 0-1 0 0,2-2 1 0 0,0-1-1 0 0,2-2 1 0 0,0 0-1 0 0,2-2 1 0 0,0-2-1 0 0,1-1 1 0 0,50 18-1 0 0,-68-30 12 0 0,0 0-1 0 0,1-1 0 0 0,-1-1 0 0 0,1-1 0 0 0,-1 0 1 0 0,1-1-1 0 0,-1 0 0 0 0,30-5 0 0 0,4-4 140 0 0,69-22 0 0 0,-101 26 69 0 0,0-1-1 0 0,-1-1 1 0 0,1-1 0 0 0,-2 0-1 0 0,1-1 1 0 0,-1 0 0 0 0,0-2-1 0 0,-1 0 1 0 0,0 0 0 0 0,-1-1-1 0 0,0-1 1 0 0,-1 0 0 0 0,-1-1-1 0 0,0 0 1 0 0,0 0 0 0 0,-2-2-1 0 0,0 1 1 0 0,10-23 0 0 0,-14 22-136 0 0,0 1 1 0 0,-1-1 0 0 0,-1 0-1 0 0,-1-1 1 0 0,0 1 0 0 0,-1 0-1 0 0,0-1 1 0 0,-1 1 0 0 0,-1-1 0 0 0,-1 1-1 0 0,-1 0 1 0 0,-7-27 0 0 0,6 31-91 0 0,0-1-1 0 0,-1 2 1 0 0,0-1 0 0 0,-1 0 0 0 0,-1 1 0 0 0,0 0 0 0 0,0 1 0 0 0,-1-1 0 0 0,-1 1 0 0 0,1 1 0 0 0,-2 0 0 0 0,-19-16 0 0 0,5 7-44 0 0,-1 2 1 0 0,0 0-1 0 0,-1 2 0 0 0,-45-18 0 0 0,-16 8-135 0 0,38 13 90 0 0,34 7-246 0 0,-1 1 0 0 0,0 0 1 0 0,0 1-1 0 0,0 1 0 0 0,0 0 0 0 0,0 2 0 0 0,0 0 0 0 0,-20 3 1 0 0</inkml:trace>
+  <inkml:trace contextRef="#ctx0" brushRef="#br0">27 139 4988 0 0,'-3'-2'-7'0'0,"1"1"0"0"0,-1 0 0 0 0,1-1 0 0 0,0 1 0 0 0,-1-1 0 0 0,1 0 0 0 0,0 0 0 0 0,0 0 0 0 0,-3-3 0 0 0,8 1 21 0 0,1 0 0 0 0,-1 0 0 0 0,1 0-1 0 0,0 1 1 0 0,0-1 0 0 0,0 1 0 0 0,0 0 0 0 0,1 1 0 0 0,-1-1 0 0 0,1 1 0 0 0,7-3 0 0 0,63-23 74 0 0,-59 24-77 0 0,25-12 40 0 0,-21 8-814 0 0,1 1 0 0 0,28-6 0 0 0,-38 11-327 0 0</inkml:trace>
 </inkml:ink>
 </file>
 
@@ -5286,7 +5447,7 @@
           <inkml:channelProperty channel="OE" name="resolution" value="1000" units="1/deg"/>
         </inkml:channelProperties>
       </inkml:inkSource>
-      <inkml:timestamp xml:id="ts0" timeString="2026-04-02T05:41:05.150"/>
+      <inkml:timestamp xml:id="ts0" timeString="2026-04-02T05:37:32.896"/>
     </inkml:context>
     <inkml:brush xml:id="br0">
       <inkml:brushProperty name="width" value="0.2" units="cm"/>
@@ -5294,7 +5455,7 @@
       <inkml:brushProperty name="color" value="#FFC114"/>
     </inkml:brush>
   </inkml:definitions>
-  <inkml:trace contextRef="#ctx0" brushRef="#br0">22 156 5821 0 0,'0'0'-419'0'0,"-6"1"-463"0"0,6-1 840 0 0,-1 0 0 0 0,1-1 1 0 0,-1 1-1 0 0,0 0 0 0 0,1 0 0 0 0,-1 0 0 0 0,1 1 1 0 0,-1-1-1 0 0,1 0 0 0 0,-1 0 0 0 0,0 0 0 0 0,1 0 1 0 0,-1 0-1 0 0,1 1 0 0 0,-1-1 0 0 0,1 0 0 0 0,-1 0 1 0 0,1 1-1 0 0,-1-1 0 0 0,1 0 0 0 0,-1 1 0 0 0,1-1 1 0 0,0 1-1 0 0,-1-1 0 0 0,1 1 0 0 0,0-1 0 0 0,-1 0 1 0 0,1 1-1 0 0,0-1 0 0 0,-1 1 0 0 0,1-1 0 0 0,0 1 1 0 0,0 0-1 0 0,-1 0 0 0 0,1 0-101 0 0,31 26-413 0 0,-13-17 492 0 0,0 0 0 0 0,0-2-1 0 0,1 0 1 0 0,0-1 0 0 0,28 6-1 0 0,105 16-13 0 0,-87-19 53 0 0,41 5 287 0 0,0-4 1 0 0,193-6-1 0 0,-203-13 394 0 0,159-36 0 0 0,-20 2-134 0 0,-120 24-114 0 0,-1-5 0 0 0,173-59 1 0 0,-191 55-312 0 0,0 3 1 0 0,2 5 0 0 0,1 4-1 0 0,126-3 1 0 0,223 17-153 0 0,-376 4 476 0 0,-68-3-309 0 0,30 1-1447 0 0</inkml:trace>
+  <inkml:trace contextRef="#ctx0" brushRef="#br0">267 1 3672 0 0,'0'0'-170'0'0,"-19"9"1110"0"0,-3 2-768 0 0,-38 25 0 0 0,55-32-152 0 0,0 0 1 0 0,1-1 0 0 0,-1 1-1 0 0,1 1 1 0 0,0-1-1 0 0,0 1 1 0 0,0 0 0 0 0,0 0-1 0 0,1 0 1 0 0,0 0 0 0 0,0 0-1 0 0,-4 11 1 0 0,7-14-21 0 0,0-1 1 0 0,0 1 0 0 0,0 0-1 0 0,0 0 1 0 0,1-1-1 0 0,-1 1 1 0 0,0 0-1 0 0,1-1 1 0 0,-1 1 0 0 0,1 0-1 0 0,-1-1 1 0 0,1 1-1 0 0,0 0 1 0 0,0-1 0 0 0,0 1-1 0 0,0-1 1 0 0,0 0-1 0 0,0 1 1 0 0,0-1-1 0 0,0 0 1 0 0,1 0 0 0 0,-1 1-1 0 0,0-1 1 0 0,1 0-1 0 0,-1 0 1 0 0,1 0-1 0 0,-1-1 1 0 0,1 1 0 0 0,-1 0-1 0 0,1-1 1 0 0,2 2-1 0 0,63 19 27 0 0,-53-17-16 0 0,1-1-4 0 0,-11-2-6 0 0,0-1 0 0 0,0 1 0 0 0,0 0 0 0 0,0 0 1 0 0,0 1-1 0 0,0-1 0 0 0,0 1 0 0 0,-1 0 0 0 0,1 0 0 0 0,0 0 0 0 0,-1 0 0 0 0,0 1 1 0 0,1-1-1 0 0,4 6 0 0 0,-8-7 1 0 0,0 0 1 0 0,0 0-1 0 0,0 0 1 0 0,0 0-1 0 0,-1 0 1 0 0,1 0-1 0 0,0 0 0 0 0,0 0 1 0 0,-1 0-1 0 0,1 0 1 0 0,0 0-1 0 0,-1 0 1 0 0,1 0-1 0 0,-1 0 1 0 0,0 0-1 0 0,1-1 0 0 0,-1 1 1 0 0,0 0-1 0 0,1 0 1 0 0,-1-1-1 0 0,0 1 1 0 0,0 0-1 0 0,1-1 1 0 0,-1 1-1 0 0,0-1 0 0 0,0 1 1 0 0,0-1-1 0 0,-1 1 1 0 0,-28 16 40 0 0,30-17-41 0 0,-26 13-6 0 0,1-1 0 0 0,-2-1 1 0 0,1-1-1 0 0,-1-1 0 0 0,-53 9 1 0 0,77-18-219 0 0,1 0 1 0 0,-1-1-1 0 0,0 1 1 0 0,0 0-1 0 0,0-1 1 0 0,0 0-1 0 0,0 0 1 0 0,1 0 0 0 0,-1 0-1 0 0,-2-2 1 0 0,-3-4-715 0 0</inkml:trace>
 </inkml:ink>
 </file>
 
@@ -5318,7 +5479,7 @@
           <inkml:channelProperty channel="OE" name="resolution" value="1000" units="1/deg"/>
         </inkml:channelProperties>
       </inkml:inkSource>
-      <inkml:timestamp xml:id="ts0" timeString="2026-04-02T05:41:05.885"/>
+      <inkml:timestamp xml:id="ts0" timeString="2026-04-02T05:37:43.519"/>
     </inkml:context>
     <inkml:brush xml:id="br0">
       <inkml:brushProperty name="width" value="0.2" units="cm"/>
@@ -5326,7 +5487,7 @@
       <inkml:brushProperty name="color" value="#FFC114"/>
     </inkml:brush>
   </inkml:definitions>
-  <inkml:trace contextRef="#ctx0" brushRef="#br0">86 25 4776 0 0,'-74'-22'1575'0'0,"63"20"-12"0"0,18 4-1608 0 0,121 33 29 0 0,156 39 79 0 0,-278-74-73 0 0,0 1 0 0 0,-1 0 0 0 0,1 0 0 0 0,-1 1 0 0 0,1 0 0 0 0,-1 0 0 0 0,1 0 0 0 0,-1 0 0 0 0,0 1 0 0 0,0 0-1 0 0,0 0 1 0 0,6 6 0 0 0,-10-8-3 0 0,-1 1 9 0 0,-1 0 0 0 0,1-1 0 0 0,-1 1 0 0 0,0 0 1 0 0,0 0-1 0 0,1-1 0 0 0,-1 1 0 0 0,0-1 0 0 0,0 1 0 0 0,-1-1 0 0 0,1 1 0 0 0,0-1 0 0 0,0 0 0 0 0,-1 1 0 0 0,1-1 1 0 0,-1 0-1 0 0,1 0 0 0 0,-3 1 0 0 0,-35 20 11 0 0,32-19-5 0 0,-54 25 77 0 0,-115 34 0 0 0,81-31-251 0 0,74-25-139 0 0</inkml:trace>
+  <inkml:trace contextRef="#ctx0" brushRef="#br0">249 13 6309 0 0,'0'0'-220'0'0,"1"0"207"0"0,-1-1 0 0 0,0 1 0 0 0,0 0 0 0 0,0-1-1 0 0,0 1 1 0 0,0 0 0 0 0,0-1 0 0 0,0 1 0 0 0,0-1 0 0 0,0 1 0 0 0,0 0 0 0 0,0-1 0 0 0,0 1 0 0 0,0 0 0 0 0,0-1 0 0 0,0 1 0 0 0,0 0 0 0 0,-1-1 0 0 0,1 1 0 0 0,0 0 0 0 0,0-1 0 0 0,0 1 0 0 0,0 0 0 0 0,-1-1 0 0 0,1 1 0 0 0,0 0 0 0 0,0-1 0 0 0,-1 1 0 0 0,1 0 0 0 0,0 0 0 0 0,-1-1 0 0 0,1 1 0 0 0,0 0 0 0 0,-1 0 0 0 0,1 0 0 0 0,0 0 0 0 0,-1-1 0 0 0,1 1 0 0 0,0 0 0 0 0,-1 0 0 0 0,1 0 0 0 0,0 0 0 0 0,-1 0 0 0 0,1 0 0 0 0,-1 0 0 0 0,1 0 0 0 0,0 0 0 0 0,-1 0 0 0 0,1 0 0 0 0,0 0 0 0 0,-1 0 0 0 0,1 0 0 0 0,0 0 0 0 0,-1 1 0 0 0,1-1 0 0 0,0 0 0 0 0,-1 0 0 0 0,1 0 0 0 0,-1 1 0 0 0,-15 10-6 0 0,0 1-1 0 0,1 1 1 0 0,0 1 0 0 0,1 0-1 0 0,0 1 1 0 0,2 0 0 0 0,0 1 0 0 0,0 0-1 0 0,1 1 1 0 0,1 0 0 0 0,1 1-1 0 0,-9 25 1 0 0,5-12 39 0 0,2 1 1 0 0,2 1-1 0 0,0-1 1 0 0,2 1-1 0 0,2 1 0 0 0,-2 62 1 0 0,9-38 23 0 0,3 0-1 0 0,2-1 1 0 0,3 0 0 0 0,2 0 0 0 0,3-1 0 0 0,22 57-1 0 0,-2-28 48 0 0,3-1 0 0 0,3-2 0 0 0,58 84 0 0 0,-72-127-13 0 0,0 0-1 0 0,3-2 1 0 0,53 52 0 0 0,-65-73-352 0 0,0-1 0 0 0,1 0-1 0 0,0-1 1 0 0,2-1 0 0 0,-1-1 0 0 0,2-1 0 0 0,-1 0-1 0 0,2-2 1 0 0,22 6 0 0 0,11-1-1309 0 0</inkml:trace>
 </inkml:ink>
 </file>
 
@@ -5350,7 +5511,7 @@
           <inkml:channelProperty channel="OE" name="resolution" value="1000" units="1/deg"/>
         </inkml:channelProperties>
       </inkml:inkSource>
-      <inkml:timestamp xml:id="ts0" timeString="2026-04-02T05:41:07.544"/>
+      <inkml:timestamp xml:id="ts0" timeString="2026-04-02T05:37:44.515"/>
     </inkml:context>
     <inkml:brush xml:id="br0">
       <inkml:brushProperty name="width" value="0.2" units="cm"/>
@@ -5358,7 +5519,7 @@
       <inkml:brushProperty name="color" value="#FFC114"/>
     </inkml:brush>
   </inkml:definitions>
-  <inkml:trace contextRef="#ctx0" brushRef="#br0">0 105 5076 0 0,'0'-24'114'0'0,"0"22"-89"0"0,0-2-21 0 0,0 2 173 0 0,1 8-395 0 0,7 43 203 0 0,3-1 0 0 0,1-1-1 0 0,3 0 1 0 0,20 45 0 0 0,-15-40 2837 0 0,-22-53-2791 0 0,0 0 1 0 0,0 0-1 0 0,0 0 0 0 0,0 0 1 0 0,0 0-1 0 0,0 0 0 0 0,0 0 0 0 0,0-1 1 0 0,1 1-1 0 0,-1-1 0 0 0,1 1 1 0 0,-1-1-1 0 0,1 0 0 0 0,-1 1 1 0 0,1-1-1 0 0,0 0 0 0 0,0 0 0 0 0,0 0 1 0 0,0 0-1 0 0,0 0 0 0 0,0 0 1 0 0,1 0-1 0 0,-1 0 0 0 0,0-4 0 0 0,-14-62 382 0 0,14 60-380 0 0,-3-29 62 0 0,2 0 0 0 0,2-1 0 0 0,1 1-1 0 0,7-42 1 0 0,-8 75-145 0 0,0 1 1 0 0,1-1-1 0 0,-1 0 0 0 0,1 1 0 0 0,0-1 0 0 0,0 1 0 0 0,0-1 1 0 0,0 1-1 0 0,1-1 0 0 0,-1 1 0 0 0,1 0 0 0 0,4-6 0 0 0,-3 7 30 0 0,0 0-1 0 0,0 1 0 0 0,0-1 0 0 0,0 0 0 0 0,0 1 0 0 0,0 0 0 0 0,1 0 0 0 0,-1 0 0 0 0,0 0 0 0 0,1 1 0 0 0,-1-1 0 0 0,1 1 0 0 0,-1 0 0 0 0,1 0 0 0 0,5 0 0 0 0,2 0-22 0 0,-1 0 0 0 0,1 1 0 0 0,0 0 0 0 0,-1 0 0 0 0,1 1 0 0 0,-1 0 0 0 0,0 1 0 0 0,1 1 0 0 0,-1-1 0 0 0,0 1 0 0 0,-1 1 0 0 0,1 0 0 0 0,-1 0 0 0 0,0 1 0 0 0,0 0 0 0 0,-1 1 0 0 0,12 11 0 0 0,5 15-27 0 0,-2 1-1 0 0,-1 1 0 0 0,-2 0 0 0 0,26 64 0 0 0,-42-89-253 0 0,15 34 844 0 0,-6-24-4163 0 0</inkml:trace>
+  <inkml:trace contextRef="#ctx0" brushRef="#br0">40 78 4396 0 0,'-38'-60'-288'0'0,"37"58"356"0"0,1 1-44 0 0,0 1 0 0 0,0-1 0 0 0,0 1-1 0 0,0-1 1 0 0,0 1 0 0 0,0-1-1 0 0,0 1 1 0 0,0-1 0 0 0,0 1-1 0 0,0-1 1 0 0,0 0 0 0 0,1 1 0 0 0,-1-1-1 0 0,0 1 1 0 0,0-1 0 0 0,1 1-1 0 0,-1 0 1 0 0,0-1 0 0 0,0 1 0 0 0,1-1-1 0 0,-1 1 1 0 0,1-1 0 0 0,-1 1-1 0 0,0 0 1 0 0,1-1 0 0 0,-1 1 0 0 0,1 0-1 0 0,-1-1 1 0 0,1 1 0 0 0,-1 0-1 0 0,1 0 1 0 0,-1-1 0 0 0,1 1-1 0 0,-1 0 1 0 0,2 0 0 0 0,23 7 249 0 0,35 33-302 0 0,-46-30 173 0 0,71 47 44 0 0,-19-14-86 0 0,-1 3 1 0 0,76 71-1 0 0,-123-100-29 0 0,-1 1 1 0 0,-1 0 0 0 0,-1 1 0 0 0,-1 1-1 0 0,-1 0 1 0 0,0 1 0 0 0,-1 0-1 0 0,-2 1 1 0 0,0 0 0 0 0,-1 0 0 0 0,11 48-1 0 0,-16-42 14 0 0,-1 1 1 0 0,-1-1-1 0 0,-2 1 0 0 0,-1 0 0 0 0,-1-1 0 0 0,-1 1 0 0 0,-2-1 0 0 0,0 0 0 0 0,-2 0 0 0 0,-2-1 1 0 0,0 1-1 0 0,-2-2 0 0 0,-16 32 0 0 0,-1-7 35 0 0,-2-1 0 0 0,-3-2 0 0 0,-1-1-1 0 0,-2-2 1 0 0,-65 63 0 0 0,88-95-282 0 0,-32 30 609 0 0,43-40-682 0 0,-1-1 0 0 0,0 1 1 0 0,0-1-1 0 0,0 0 0 0 0,0 0 0 0 0,0 0 1 0 0,-1-1-1 0 0,1 1 0 0 0,0-1 0 0 0,-1 0 1 0 0,1 0-1 0 0,-5 1 0 0 0</inkml:trace>
 </inkml:ink>
 </file>
 
@@ -5414,7 +5575,7 @@
           <inkml:channelProperty channel="OE" name="resolution" value="1000" units="1/deg"/>
         </inkml:channelProperties>
       </inkml:inkSource>
-      <inkml:timestamp xml:id="ts0" timeString="2026-04-02T05:41:08.091"/>
+      <inkml:timestamp xml:id="ts0" timeString="2026-04-02T05:40:53.391"/>
     </inkml:context>
     <inkml:brush xml:id="br0">
       <inkml:brushProperty name="width" value="0.2" units="cm"/>
@@ -5422,7 +5583,7 @@
       <inkml:brushProperty name="color" value="#FFC114"/>
     </inkml:brush>
   </inkml:definitions>
-  <inkml:trace contextRef="#ctx0" brushRef="#br0">2 146 5188 0 0,'0'1'-33'0'0,"0"-1"-1"0"0,-1 1 1 0 0,1-1-1 0 0,0 1 1 0 0,0-1-1 0 0,0 0 1 0 0,0 1-1 0 0,-1-1 0 0 0,1 1 1 0 0,0-1-1 0 0,0 1 1 0 0,0-1-1 0 0,0 1 1 0 0,0-1-1 0 0,0 1 1 0 0,0-1-1 0 0,0 1 0 0 0,0-1 1 0 0,1 0-1 0 0,-1 1 1 0 0,0-1-1 0 0,0 1 1 0 0,0-1-1 0 0,0 1 1 0 0,1-1-1 0 0,-1 0 0 0 0,0 1 1 0 0,0-1-1 0 0,1 1 1 0 0,-1-1-1 0 0,0 0 1 0 0,1 1-1 0 0,-1-1 1 0 0,0 0-1 0 0,1 1 0 0 0,-1-1 1 0 0,1 0-1 0 0,-1 0 1 0 0,0 0-1 0 0,1 1 1 0 0,-1-1-1 0 0,1 0 1 0 0,0 0-1 0 0,31 6-432 0 0,28-8 383 0 0,-42-1 129 0 0,-1 0 0 0 0,0-1-1 0 0,0-1 1 0 0,0-1 0 0 0,20-9 0 0 0,-28 11 60 0 0,0-1 1 0 0,0 0-1 0 0,-1 0 1 0 0,1-1-1 0 0,-2 0 1 0 0,1 0-1 0 0,0-1 1 0 0,-1 0-1 0 0,-1 0 1 0 0,10-14-1 0 0,-15 20-92 0 0,0 0 1 0 0,-1 0-1 0 0,1 0 0 0 0,-1 0 1 0 0,0 0-1 0 0,1-1 0 0 0,-1 1 0 0 0,0 0 1 0 0,0 0-1 0 0,0 0 0 0 0,0-1 1 0 0,0 1-1 0 0,0 0 0 0 0,0 0 1 0 0,0-1-1 0 0,0 1 0 0 0,0 0 0 0 0,-1 0 1 0 0,1 0-1 0 0,0 0 0 0 0,-1-1 1 0 0,1 1-1 0 0,-1 0 0 0 0,0 0 0 0 0,1 0 1 0 0,-1 0-1 0 0,0 0 0 0 0,1 0 1 0 0,-1 0-1 0 0,0 0 0 0 0,0 1 1 0 0,0-1-1 0 0,0 0 0 0 0,0 0 0 0 0,0 1 1 0 0,0-1-1 0 0,0 1 0 0 0,0-1 1 0 0,0 1-1 0 0,0-1 0 0 0,-1 1 0 0 0,1-1 1 0 0,-2 1-1 0 0,-2-2 2 0 0,0 0-1 0 0,-1 1 1 0 0,1-1 0 0 0,-1 1-1 0 0,1 0 1 0 0,-1 1-1 0 0,0-1 1 0 0,1 1 0 0 0,-1 1-1 0 0,-6 0 1 0 0,-3 2-40 0 0,-1 1 1 0 0,1 0-1 0 0,-1 1 1 0 0,1 1-1 0 0,1 1 1 0 0,-1 0-1 0 0,1 1 1 0 0,-20 14-1 0 0,29-19 17 0 0,1 0 0 0 0,0 1 0 0 0,0-1 0 0 0,0 1 0 0 0,0 0-1 0 0,1 0 1 0 0,-1 1 0 0 0,1-1 0 0 0,0 0 0 0 0,0 1 0 0 0,1 0-1 0 0,0 0 1 0 0,-1 0 0 0 0,2 0 0 0 0,-1 0 0 0 0,0 0-1 0 0,1 0 1 0 0,0 0 0 0 0,0 1 0 0 0,1-1 0 0 0,0 1 0 0 0,-1-1-1 0 0,2 0 1 0 0,-1 1 0 0 0,1-1 0 0 0,0 0 0 0 0,0 1-1 0 0,0-1 1 0 0,4 10 0 0 0,-2-10 10 0 0,0 0-1 0 0,0 0 1 0 0,0-1 0 0 0,1 1-1 0 0,-1-1 1 0 0,1 0-1 0 0,0 0 1 0 0,0 0 0 0 0,1-1-1 0 0,-1 1 1 0 0,1-1 0 0 0,-1 0-1 0 0,1-1 1 0 0,0 1-1 0 0,7 2 1 0 0,12 4 18 0 0,0 0 1 0 0,26 4-1 0 0,-32-8-13 0 0,-2 0-207 0 0,1-1-1 0 0,-1 0 1 0 0,1-1-1 0 0,-1-1 0 0 0,1-1 1 0 0,0 0-1 0 0,0-1 1 0 0,0-1-1 0 0,-1 0 1 0 0,19-5-1 0 0,-11-1-846 0 0</inkml:trace>
+  <inkml:trace contextRef="#ctx0" brushRef="#br0">1030 89 4148 0 0,'6'-15'4902'0'0,"-6"13"-4695"0"0,-12-3-162 0 0,-1 0 0 0 0,1 0 0 0 0,0 1 0 0 0,-1 1 0 0 0,0 0 0 0 0,0 1 1 0 0,0 0-1 0 0,0 1 0 0 0,0 1 0 0 0,-17 1 0 0 0,-4 1-48 0 0,1 1 0 0 0,-64 15 0 0 0,53-6-27 0 0,1 1-1 0 0,1 2 1 0 0,0 2 0 0 0,1 2-1 0 0,1 1 1 0 0,1 2-1 0 0,1 2 1 0 0,0 2 0 0 0,-51 46-1 0 0,61-47 0 0 0,1 2-1 0 0,1 0 1 0 0,1 2-1 0 0,2 0 1 0 0,0 2-1 0 0,3 0 0 0 0,0 2 1 0 0,2 0-1 0 0,-15 40 1 0 0,29-61 22 0 0,1 0 0 0 0,0 0 0 0 0,1 1 1 0 0,0-1-1 0 0,1 1 0 0 0,0-1 0 0 0,1 1 0 0 0,1-1 1 0 0,0 1-1 0 0,0 0 0 0 0,2-1 0 0 0,-1 0 1 0 0,1 0-1 0 0,1 1 0 0 0,7 14 0 0 0,-3-10 6 0 0,1-1 0 0 0,1 0 0 0 0,0 0 0 0 0,1-1 0 0 0,1 0 1 0 0,0-1-1 0 0,1-1 0 0 0,0 0 0 0 0,26 19 0 0 0,-3-6 18 0 0,1-3 0 0 0,1-1 1 0 0,0-2-1 0 0,2-1 0 0 0,0-2 1 0 0,73 19-1 0 0,-52-21 34 0 0,1-3-1 0 0,0-3 1 0 0,1-3 0 0 0,65-1 0 0 0,-86-6 41 0 0,-1-3 1 0 0,1-1 0 0 0,-1-2 0 0 0,-1-2 0 0 0,0-1 0 0 0,68-28 0 0 0,-83 28 57 0 0,-2-1-1 0 0,1-1 1 0 0,-2-1-1 0 0,0-1 1 0 0,0-1-1 0 0,-1-1 1 0 0,-1 0-1 0 0,-1-2 1 0 0,0 0-1 0 0,-1-2 1 0 0,-1 0-1 0 0,15-24 1 0 0,-13 13 21 0 0,-2-1 0 0 0,-1 0 0 0 0,13-40 0 0 0,-23 53-111 0 0,-1 0 0 0 0,-1 0 0 0 0,0 0 0 0 0,-2 0 0 0 0,0-1-1 0 0,-1 1 1 0 0,-2-31 0 0 0,-1 31-38 0 0,-1-1 0 0 0,-1 0 0 0 0,0 1 0 0 0,-1-1 0 0 0,-2 1 0 0 0,0 1 0 0 0,0-1 0 0 0,-2 1 0 0 0,-1 1 0 0 0,0 0 0 0 0,-1 0 0 0 0,0 1 0 0 0,-2 0 0 0 0,0 1 0 0 0,0 0 0 0 0,-18-14 0 0 0,-3-1-13 0 0,-1 2 0 0 0,-2 1 0 0 0,0 1 0 0 0,-2 3 0 0 0,-1 1 0 0 0,0 1-1 0 0,-2 3 1 0 0,-43-14 0 0 0,19 16-23 0 0,44 12-486 0 0,1-2 0 0 0,-25-8 0 0 0</inkml:trace>
 </inkml:ink>
 </file>
 
@@ -5446,7 +5607,7 @@
           <inkml:channelProperty channel="OE" name="resolution" value="1000" units="1/deg"/>
         </inkml:channelProperties>
       </inkml:inkSource>
-      <inkml:timestamp xml:id="ts0" timeString="2026-04-02T05:41:08.776"/>
+      <inkml:timestamp xml:id="ts0" timeString="2026-04-02T05:40:56.699"/>
     </inkml:context>
     <inkml:brush xml:id="br0">
       <inkml:brushProperty name="width" value="0.2" units="cm"/>
@@ -5454,7 +5615,7 @@
       <inkml:brushProperty name="color" value="#FFC114"/>
     </inkml:brush>
   </inkml:definitions>
-  <inkml:trace contextRef="#ctx0" brushRef="#br0">282 34 3948 0 0,'0'0'-78'0'0,"-22"-27"778"0"0,15 24-675 0 0,4 2-21 0 0,1 0-1 0 0,-1 1 1 0 0,1-1-1 0 0,-1 1 0 0 0,1 0 1 0 0,-1 0-1 0 0,1-1 1 0 0,-1 2-1 0 0,0-1 0 0 0,1 0 1 0 0,-1 0-1 0 0,1 1 0 0 0,-1 0 1 0 0,1-1-1 0 0,-1 1 1 0 0,1 0-1 0 0,-3 1 0 0 0,-6 2-16 0 0,-1 0 0 0 0,1 0 0 0 0,0 1 0 0 0,1 0 0 0 0,-1 1 0 0 0,1 0 0 0 0,0 1 0 0 0,-16 14 0 0 0,7-3-59 0 0,1 2 0 0 0,-29 38-1 0 0,46-56 74 0 0,-1 1-1 0 0,1-1 1 0 0,0 1-1 0 0,1-1 1 0 0,-1 1-1 0 0,0 0 1 0 0,1-1 0 0 0,-1 1-1 0 0,1 0 1 0 0,0-1-1 0 0,0 1 1 0 0,0 0-1 0 0,0-1 1 0 0,0 1-1 0 0,1 0 1 0 0,-1-1-1 0 0,1 1 1 0 0,0 0-1 0 0,0-1 1 0 0,0 1-1 0 0,1 3 1 0 0,0-4 23 0 0,0 0 0 0 0,0 0 0 0 0,0-1 0 0 0,0 1 0 0 0,0 0 1 0 0,1-1-1 0 0,-1 1 0 0 0,0-1 0 0 0,1 0 0 0 0,-1 0 0 0 0,1 0 0 0 0,0 0 0 0 0,-1 0 1 0 0,1 0-1 0 0,0-1 0 0 0,-1 1 0 0 0,1-1 0 0 0,0 0 0 0 0,-1 0 0 0 0,1 0 0 0 0,0 0 1 0 0,0 0-1 0 0,-1 0 0 0 0,1-1 0 0 0,0 1 0 0 0,-1-1 0 0 0,1 0 0 0 0,0 0 1 0 0,-1 0-1 0 0,1 0 0 0 0,-1-1 0 0 0,0 1 0 0 0,1-1 0 0 0,3-2 0 0 0,4-3 83 0 0,-1 0 1 0 0,0-1-1 0 0,0 0 0 0 0,-1 0 0 0 0,0-1 0 0 0,13-17 1 0 0,57-84 1514 0 0,-77 109-1627 0 0,0 4-86 0 0,0 0 83 0 0,0 0 0 0 0,0 0 0 0 0,0 1 0 0 0,-1-1 0 0 0,1 0 1 0 0,-1 0-1 0 0,0 1 0 0 0,0 2 0 0 0,0 3 5 0 0,0-1 0 0 0,1 0-1 0 0,0 0 1 0 0,0 1 0 0 0,1-1 0 0 0,1 0 0 0 0,-1 0-1 0 0,1-1 1 0 0,0 1 0 0 0,1 0 0 0 0,0-1-1 0 0,0 0 1 0 0,0 0 0 0 0,1 0 0 0 0,0-1 0 0 0,1 1-1 0 0,8 7 1 0 0,-9-9-187 0 0,1-1 0 0 0,-1 0-1 0 0,1-1 1 0 0,0 1 0 0 0,0-1 0 0 0,0 0-1 0 0,1 0 1 0 0,-1-1 0 0 0,0 0 0 0 0,1 0 0 0 0,0-1-1 0 0,-1 0 1 0 0,1 0 0 0 0,0 0 0 0 0,0-1-1 0 0,0 0 1 0 0,-1 0 0 0 0,1-1 0 0 0,0 1-1 0 0,0-2 1 0 0,8-2 0 0 0,12-5-1095 0 0</inkml:trace>
+  <inkml:trace contextRef="#ctx0" brushRef="#br0">29 375 6761 0 0,'0'0'-320'0'0,"-19"3"-213"0"0,10-2 514 0 0,11-1 420 0 0,448-58-270 0 0,-104 16-51 0 0,379-77-36 0 0,-557 92-14 0 0,-167 27-6 0 0,35-10 2493 0 0,-123-20-2387 0 0,-1 3 0 0 0,-139-25 1 0 0,179 43-113 0 0,37 6-188 0 0,14 1 71 0 0,35 4 43 0 0,61 8 26 0 0,215 51-146 0 0,-312-60 171 0 0,1-1 0 0 0,0 0 0 0 0,-1 1-1 0 0,1 0 1 0 0,0 0 0 0 0,-1 0 0 0 0,1 0 0 0 0,-1 0 0 0 0,0 0-1 0 0,1 0 1 0 0,-1 1 0 0 0,0-1 0 0 0,0 1 0 0 0,0 0-1 0 0,0 0 1 0 0,0 0 0 0 0,0 0 0 0 0,0 0 0 0 0,-1 0 0 0 0,1 0-1 0 0,-1 1 1 0 0,1-1 0 0 0,-1 0 0 0 0,0 1 0 0 0,0-1-1 0 0,0 1 1 0 0,0-1 0 0 0,-1 1 0 0 0,1 0 0 0 0,-1-1 0 0 0,1 5-1 0 0,-2-1 5 0 0,0-1 0 0 0,0 1 0 0 0,-1 0 0 0 0,0-1 0 0 0,0 1-1 0 0,0-1 1 0 0,-1 0 0 0 0,0 0 0 0 0,0 0 0 0 0,0 0 0 0 0,0 0-1 0 0,-1-1 1 0 0,-6 7 0 0 0,-11 9 6 0 0,-1-1-1 0 0,-1 0 0 0 0,0-2 1 0 0,-27 15-1 0 0,2-1 29 0 0,-1-2-387 0 0</inkml:trace>
 </inkml:ink>
 </file>
 
@@ -5478,7 +5639,7 @@
           <inkml:channelProperty channel="OE" name="resolution" value="1000" units="1/deg"/>
         </inkml:channelProperties>
       </inkml:inkSource>
-      <inkml:timestamp xml:id="ts0" timeString="2026-04-02T05:41:09.513"/>
+      <inkml:timestamp xml:id="ts0" timeString="2026-04-02T05:40:57.724"/>
     </inkml:context>
     <inkml:brush xml:id="br0">
       <inkml:brushProperty name="width" value="0.2" units="cm"/>
@@ -5486,7 +5647,7 @@
       <inkml:brushProperty name="color" value="#FFC114"/>
     </inkml:brush>
   </inkml:definitions>
-  <inkml:trace contextRef="#ctx0" brushRef="#br0">1 84 3888 0 0,'0'0'-302'0'0,"17"7"-1031"0"0,-5-2 1321 0 0,-1 1-1 0 0,1 1 0 0 0,-1-1 0 0 0,0 2 0 0 0,-1-1 0 0 0,1 1 0 0 0,-2 1 1 0 0,1 0-1 0 0,-1 1 0 0 0,-1-1 0 0 0,1 2 0 0 0,-2-1 0 0 0,12 22 1 0 0,19 27 4 0 0,-13-21 388 0 0,-24-37-174 0 0,-5 3-24 0 0,-1-1 1 0 0,0 0 0 0 0,0 0-1 0 0,0 0 1 0 0,0-1 0 0 0,0 0 0 0 0,0 0-1 0 0,-1 0 1 0 0,1-1 0 0 0,-1 0 0 0 0,1 0-1 0 0,-1 0 1 0 0,0 0 0 0 0,1-1-1 0 0,-1 0 1 0 0,-9-1 0 0 0,14 1-149 0 0,0-1 0 0 0,0 1 0 0 0,0 0 0 0 0,0 0 0 0 0,0 0 0 0 0,0 0 0 0 0,0-1 0 0 0,0 1 0 0 0,0-1 0 0 0,0 1 0 0 0,0-1 0 0 0,0 1 0 0 0,0-1 0 0 0,0 1 0 0 0,0-1 0 0 0,0 0 0 0 0,0 0 0 0 0,0 1 0 0 0,1-1 0 0 0,-1 0 0 0 0,0 0 0 0 0,1 0 0 0 0,-1 0 0 0 0,1 0 0 0 0,-1 0 0 0 0,1 0 0 0 0,-1 0 0 0 0,1 0 0 0 0,0 0 0 0 0,-1 0 0 0 0,1 0 0 0 0,0 0 0 0 0,0 0 0 0 0,0 0 0 0 0,0 0 0 0 0,0 0 0 0 0,0-1 0 0 0,0 1 0 0 0,0 0 0 0 0,1-2 0 0 0,-1-2 12 0 0,1 0-1 0 0,0 0 0 0 0,0 0 1 0 0,1 0-1 0 0,-1 0 1 0 0,1 0-1 0 0,3-6 0 0 0,7-7-13 0 0,1 1-1 0 0,0 0 1 0 0,2 1-1 0 0,-1 0 1 0 0,2 1-1 0 0,0 1 1 0 0,28-19-1 0 0,-3 6 3 0 0,0 2-1 0 0,62-26 0 0 0,-88 42-132 0 0,14-8 93 0 0</inkml:trace>
+  <inkml:trace contextRef="#ctx0" brushRef="#br0">11 121 6533 0 0,'-8'-42'619'0'0,"6"36"-509"0"0,2 4-99 0 0,0 6 53 0 0,3 40-86 0 0,2 0 1 0 0,3 0-1 0 0,1-1 1 0 0,25 73-1 0 0,-11-47 2879 0 0,-31-86-2814 0 0,1 1 1 0 0,1-1-1 0 0,1 0 1 0 0,0 0-1 0 0,1-1 1 0 0,1 1-1 0 0,1-1 1 0 0,1 0 0 0 0,0 0-1 0 0,1 0 1 0 0,1 0-1 0 0,0 1 1 0 0,2-1-1 0 0,0 0 1 0 0,1 1-1 0 0,0-1 1 0 0,2 1-1 0 0,8-20 1 0 0,-11 32-68 0 0,1 0 1 0 0,-1 0-1 0 0,1 1 1 0 0,0-1-1 0 0,0 1 1 0 0,0 0-1 0 0,0 0 0 0 0,1 0 1 0 0,0 0-1 0 0,0 1 1 0 0,0 0-1 0 0,8-4 1 0 0,-3 2-20 0 0,1 0 0 0 0,0 1 0 0 0,0 0 0 0 0,0 1 0 0 0,15-2 0 0 0,-24 4 18 0 0,20 10-81 0 0,-18-8 93 0 0,0 0-1 0 0,0 1 0 0 0,0 0 0 0 0,0 0 0 0 0,0 0 0 0 0,0 1 0 0 0,0-1 0 0 0,3 4 1 0 0,4 6-21 0 0,0 0-1 0 0,0 2 1 0 0,-1-1 0 0 0,11 21 0 0 0,9 12-10 0 0,-22-35 30 0 0,-1 1 1 0 0,0 1 0 0 0,-1-1-1 0 0,0 1 1 0 0,-1 1-1 0 0,5 15 1 0 0,24 65-42 0 0,-30-81 474 0 0,-2-5-1448 0 0</inkml:trace>
 </inkml:ink>
 </file>
 
@@ -5510,7 +5671,7 @@
           <inkml:channelProperty channel="OE" name="resolution" value="1000" units="1/deg"/>
         </inkml:channelProperties>
       </inkml:inkSource>
-      <inkml:timestamp xml:id="ts0" timeString="2026-04-02T05:41:10.368"/>
+      <inkml:timestamp xml:id="ts0" timeString="2026-04-02T05:40:58.443"/>
     </inkml:context>
     <inkml:brush xml:id="br0">
       <inkml:brushProperty name="width" value="0.2" units="cm"/>
@@ -5518,7 +5679,7 @@
       <inkml:brushProperty name="color" value="#FFC114"/>
     </inkml:brush>
   </inkml:definitions>
-  <inkml:trace contextRef="#ctx0" brushRef="#br0">20 70 5064 0 0,'-16'-68'1377'0'0,"15"67"-1343"0"0,0 6-394 0 0,0 6 335 0 0,0 1 1 0 0,1-1-1 0 0,0 1 0 0 0,1-1 0 0 0,1 1 0 0 0,-1-1 1 0 0,2 1-1 0 0,3 11 0 0 0,38 99-77 0 0,-24-70 77 0 0,41 85-1 0 0,-38-89 61 0 0,33 98 0 0 0,-34-92 4806 0 0,-22-61-4583 0 0,-2-18 32 0 0,0 10-165 0 0,1 1 0 0 0,0-1 0 0 0,1 0 0 0 0,1 1 0 0 0,3-21 0 0 0,-3 31-150 0 0,0 1 0 0 0,0-1 0 0 0,0 1 1 0 0,0-1-1 0 0,1 1 0 0 0,0 0 0 0 0,-1 0 0 0 0,1 0 1 0 0,0 0-1 0 0,1 0 0 0 0,-1 0 0 0 0,0 0 0 0 0,1 1 0 0 0,0-1 1 0 0,-1 1-1 0 0,1 0 0 0 0,0 0 0 0 0,0 0 0 0 0,0 0 1 0 0,1 0-1 0 0,-1 1 0 0 0,0-1 0 0 0,1 1 0 0 0,-1 0 0 0 0,0 0 1 0 0,1 0-1 0 0,7 0 0 0 0,31-4-134 0 0,0 3-1 0 0,0 2 1 0 0,1 1-1 0 0,58 10 1 0 0,-34 1-217 0 0,128 39 1 0 0,-188-48 323 0 0,46 17-349 0 0,-51-19 379 0 0,0 0-1 0 0,0 0 1 0 0,-1 0 0 0 0,1 0-1 0 0,0 0 1 0 0,-1 0-1 0 0,1 0 1 0 0,-1 1 0 0 0,1-1-1 0 0,-1 0 1 0 0,1 1 0 0 0,-1-1-1 0 0,0 1 1 0 0,0 0-1 0 0,0-1 1 0 0,0 1 0 0 0,0 0-1 0 0,0 0 1 0 0,0-1 0 0 0,-1 1-1 0 0,1 0 1 0 0,0 2-1 0 0,-3 0 3 0 0,0 0-1 0 0,-1 0 0 0 0,1-1 0 0 0,-1 1 0 0 0,0-1 1 0 0,0 0-1 0 0,0 0 0 0 0,0 0 0 0 0,0 0 0 0 0,-1-1 1 0 0,0 1-1 0 0,1-1 0 0 0,-6 3 0 0 0,-10 5 111 0 0,1-1 0 0 0,-2-1 0 0 0,1 0 0 0 0,-1-1 0 0 0,0-2 0 0 0,0 0 0 0 0,-1-1 0 0 0,-28 2 0 0 0,46-6-46 0 0,1 0 0 0 0,-1 0-1 0 0,0 0 1 0 0,1 0 0 0 0,-1-1-1 0 0,0 1 1 0 0,1-1 0 0 0,-1 0 0 0 0,1 0-1 0 0,-1 0 1 0 0,1 0 0 0 0,-1 0-1 0 0,-3-3 1 0 0,5 3-68 0 0,0 0-1 0 0,0 0 0 0 0,0 0 1 0 0,0 0-1 0 0,0-1 0 0 0,0 1 1 0 0,0 0-1 0 0,1 0 0 0 0,-1-1 1 0 0,0 1-1 0 0,1-1 0 0 0,-1 1 1 0 0,1-1-1 0 0,0 1 1 0 0,-1-1-1 0 0,1 1 0 0 0,0-1 1 0 0,0-1-1 0 0,0-2-404 0 0,1-1 1 0 0,0 1-1 0 0,0-1 0 0 0,1 1 1 0 0,0-1-1 0 0,0 1 0 0 0,0 0 0 0 0,0 0 1 0 0,1 0-1 0 0,0 0 0 0 0,4-6 1 0 0,9-10-1972 0 0</inkml:trace>
+  <inkml:trace contextRef="#ctx0" brushRef="#br0">131 189 5621 0 0,'0'0'-299'0'0,"0"0"284"0"0,0 0-1 0 0,1 0 0 0 0,-1 0 0 0 0,0 0 0 0 0,0 0 0 0 0,0 0 0 0 0,0 0 0 0 0,1 0 0 0 0,-1 0 1 0 0,0 0-1 0 0,0 1 0 0 0,0-1 0 0 0,0 0 0 0 0,0 0 0 0 0,0 0 0 0 0,1 0 0 0 0,-1 0 0 0 0,0 0 1 0 0,0 0-1 0 0,0 1 0 0 0,0-1 0 0 0,0 0 0 0 0,0 0 0 0 0,0 0 0 0 0,0 0 0 0 0,0 0 0 0 0,0 1 1 0 0,0-1-1 0 0,0 0 0 0 0,0 0 0 0 0,0 0 0 0 0,0 0 0 0 0,0 1 0 0 0,0-1 0 0 0,0 0 0 0 0,0 0 1 0 0,0 0-1 0 0,0 0 0 0 0,0 1 0 0 0,0-1 0 0 0,0 0 0 0 0,0 0 0 0 0,0 0 0 0 0,0 0 0 0 0,0 0 1 0 0,0 1-1 0 0,0-1 0 0 0,0 0 0 0 0,0 0 0 0 0,-1 0 0 0 0,1 0 0 0 0,0 0 0 0 0,0 0 0 0 0,0 1 1 0 0,0-1-1 0 0,0 0 0 0 0,0 0 0 0 0,-1 0 0 0 0,1 0 0 0 0,0 0 0 0 0,0 0 0 0 0,0 0 0 0 0,0 0 1 0 0,-1 0-1 0 0,1 0 0 0 0,14 0-21 0 0,1-1 1 0 0,-1-1-1 0 0,0 0 1 0 0,0-1-1 0 0,26-9 1 0 0,-31 9 126 0 0,-1-1 1 0 0,0 0-1 0 0,1 0 1 0 0,-1 0-1 0 0,-1-1 1 0 0,1 0-1 0 0,-1-1 1 0 0,0 0-1 0 0,0 0 1 0 0,-1 0-1 0 0,7-8 0 0 0,-12 12-67 0 0,-1 1-1 0 0,1-1 0 0 0,0 0 0 0 0,-1 1 0 0 0,1-1 0 0 0,-1 0 0 0 0,1 1 0 0 0,-1-1 0 0 0,0 0 0 0 0,0 0 0 0 0,0 1 0 0 0,0-1 0 0 0,0 0 0 0 0,0 0 0 0 0,0 1 0 0 0,0-1 0 0 0,-1 0 0 0 0,1 0 0 0 0,-1 1 0 0 0,1-1 1 0 0,-1 1-1 0 0,0-1 0 0 0,1 0 0 0 0,-1 1 0 0 0,0-1 0 0 0,0 1 0 0 0,0 0 0 0 0,0-1 0 0 0,-1 1 0 0 0,1 0 0 0 0,-3-3 0 0 0,-1-1 12 0 0,0 1-1 0 0,-1-1 1 0 0,1 1-1 0 0,-1 0 0 0 0,0 0 1 0 0,0 1-1 0 0,-8-4 1 0 0,6 4-29 0 0,0-1 0 0 0,-1 2 0 0 0,1-1 0 0 0,-1 1 0 0 0,0 0 0 0 0,1 1 0 0 0,-1 0 0 0 0,0 0 0 0 0,0 1 0 0 0,0 0 0 0 0,0 1 0 0 0,0 0 0 0 0,1 0 0 0 0,-1 1 0 0 0,0 0 0 0 0,1 0 0 0 0,-1 1 0 0 0,1 0 0 0 0,0 1 0 0 0,0 0 0 0 0,0 0 0 0 0,1 1 0 0 0,-1 0 0 0 0,1 0 0 0 0,-7 6 0 0 0,10-7-8 0 0,-1 0 1 0 0,1 0-1 0 0,0 0 0 0 0,1 0 1 0 0,-1 1-1 0 0,1-1 0 0 0,0 1 1 0 0,0 0-1 0 0,0 0 0 0 0,0 0 1 0 0,1 1-1 0 0,0-1 0 0 0,0 0 1 0 0,1 1-1 0 0,-1-1 0 0 0,1 1 1 0 0,1 0-1 0 0,-1-1 0 0 0,1 1 1 0 0,0 0-1 0 0,0-1 0 0 0,0 1 1 0 0,1 0-1 0 0,0-1 0 0 0,0 1 1 0 0,0 0-1 0 0,1-1 0 0 0,0 0 1 0 0,0 1-1 0 0,0-1 0 0 0,1 0 1 0 0,-1 0-1 0 0,1 0 0 0 0,1 0 1 0 0,-1-1-1 0 0,1 1 0 0 0,0-1 1 0 0,-1 0-1 0 0,2 0 0 0 0,-1 0 1 0 0,0-1-1 0 0,9 6 0 0 0,5 3 22 0 0,1-2-1 0 0,0 1 1 0 0,1-2-1 0 0,0-1 1 0 0,35 10-1 0 0,108 17 534 0 0,-131-29-257 0 0,-29-6-234 0 0,5 1-197 0 0,-7-1 16 0 0,0 0-1 0 0,0 0 0 0 0,0 1 1 0 0,0-1-1 0 0,0 0 1 0 0,0 0-1 0 0,0 0 1 0 0,0 0-1 0 0,0 0 0 0 0,0-1 1 0 0,0 1-1 0 0,0 0 1 0 0,0 0-1 0 0,0-1 0 0 0,0 1 1 0 0,0 0-1 0 0,0-1 1 0 0,0 1-1 0 0,0-1 1 0 0,0 0-1 0 0,0 1 0 0 0,0-1 1 0 0,-1 1-1 0 0,1-1 1 0 0,1-1-1 0 0,5-8-1900 0 0</inkml:trace>
 </inkml:ink>
 </file>
 
@@ -5542,7 +5703,7 @@
           <inkml:channelProperty channel="OE" name="resolution" value="1000" units="1/deg"/>
         </inkml:channelProperties>
       </inkml:inkSource>
-      <inkml:timestamp xml:id="ts0" timeString="2026-04-02T05:41:10.883"/>
+      <inkml:timestamp xml:id="ts0" timeString="2026-04-02T05:40:59.243"/>
     </inkml:context>
     <inkml:brush xml:id="br0">
       <inkml:brushProperty name="width" value="0.2" units="cm"/>
@@ -5550,7 +5711,7 @@
       <inkml:brushProperty name="color" value="#FFC114"/>
     </inkml:brush>
   </inkml:definitions>
-  <inkml:trace contextRef="#ctx0" brushRef="#br0">631 0 5573 0 0,'-3'2'-145'0'0,"0"0"1"0"0,-1 0 0 0 0,1 1-1 0 0,0-1 1 0 0,1 0 0 0 0,-1 1 0 0 0,0 0-1 0 0,1 0 1 0 0,-1 0 0 0 0,1 0-1 0 0,0 0 1 0 0,0 0 0 0 0,0 0 0 0 0,0 1-1 0 0,-1 5 1 0 0,3-8 136 0 0,-1 0 1 0 0,1 0-1 0 0,0 1 0 0 0,0-1 1 0 0,0 0-1 0 0,0 0 1 0 0,0 0-1 0 0,0 1 0 0 0,1-1 1 0 0,-1 0-1 0 0,0 0 0 0 0,1 0 1 0 0,-1 0-1 0 0,0 1 1 0 0,1-1-1 0 0,0 0 0 0 0,-1 0 1 0 0,1 0-1 0 0,1 1 0 0 0,-1 0 7 0 0,1 0 0 0 0,0-1 0 0 0,0 1-1 0 0,1-1 1 0 0,-1 1 0 0 0,0-1 0 0 0,0 0-1 0 0,1 0 1 0 0,-1 0 0 0 0,0 0-1 0 0,1 0 1 0 0,3 0 0 0 0,15 3 34 0 0,0-1-1 0 0,1-1 1 0 0,-1 0 0 0 0,41-4-1 0 0,87-17 322 0 0,-97 11-62 0 0,1-2 447 0 0,-35 6 527 0 0,0 0 0 0 0,35-1 0 0 0,-58 10-1101 0 0,-26 21-20 0 0,-1-1-1 0 0,-40 23 1 0 0,-3 3-28 0 0,-648 445-861 0 0,579-415-3627 0 0,109-65 2185 0 0</inkml:trace>
+  <inkml:trace contextRef="#ctx0" brushRef="#br0">360 99 5192 0 0,'0'0'-195'0'0,"-7"-39"2"0"0,5 35 248 0 0,-1 0-1 0 0,1 0 0 0 0,-1 0 1 0 0,0 0-1 0 0,-1 1 0 0 0,1-1 0 0 0,-1 1 1 0 0,1 0-1 0 0,-1 0 0 0 0,0 0 1 0 0,0 0-1 0 0,0 1 0 0 0,-1 0 1 0 0,1 0-1 0 0,0 0 0 0 0,-1 0 0 0 0,-8-1 1 0 0,4 1-29 0 0,0 1 1 0 0,0 0-1 0 0,0 1 1 0 0,1 0-1 0 0,-1 0 0 0 0,0 1 1 0 0,0 0-1 0 0,0 1 1 0 0,-13 4-1 0 0,11-3-34 0 0,0 1 0 0 0,1 0-1 0 0,-1 0 1 0 0,1 1 0 0 0,0 1-1 0 0,0 0 1 0 0,1 0 0 0 0,0 1-1 0 0,0 0 1 0 0,0 0 0 0 0,1 1-1 0 0,0 0 1 0 0,0 1 0 0 0,1 0-1 0 0,0 0 1 0 0,-6 12 0 0 0,10-16 7 0 0,1 1 0 0 0,-1-1 0 0 0,1 1 1 0 0,1 0-1 0 0,-1 0 0 0 0,1 0 1 0 0,0 0-1 0 0,0 0 0 0 0,1 0 1 0 0,0 0-1 0 0,0 8 0 0 0,1-10 7 0 0,0-1-1 0 0,0 0 1 0 0,0 0-1 0 0,1-1 0 0 0,-1 1 1 0 0,1 0-1 0 0,0 0 1 0 0,0-1-1 0 0,0 1 1 0 0,0-1-1 0 0,0 1 0 0 0,0-1 1 0 0,0 0-1 0 0,1 0 1 0 0,-1 0-1 0 0,1 0 1 0 0,0-1-1 0 0,0 1 0 0 0,-1-1 1 0 0,1 1-1 0 0,0-1 1 0 0,0 0-1 0 0,7 1 1 0 0,0 2 17 0 0,0-1 1 0 0,1-1-1 0 0,0 0 1 0 0,-1-1 0 0 0,1 0-1 0 0,0 0 1 0 0,0-1 0 0 0,-1-1-1 0 0,1 1 1 0 0,0-2 0 0 0,0 0-1 0 0,-1 0 1 0 0,17-6 0 0 0,-13 2 27 0 0,-1 0 1 0 0,1-1 0 0 0,-2 0-1 0 0,1-1 1 0 0,-1-1 0 0 0,0 0 0 0 0,-1-1-1 0 0,0 0 1 0 0,13-15 0 0 0,-15 15 139 0 0,-1 0 1 0 0,0-1 0 0 0,-1-1 0 0 0,0 1-1 0 0,0-1 1 0 0,-1 0 0 0 0,-1 0 0 0 0,0-1-1 0 0,4-16 1 0 0,-9 29-184 0 0,0 0 1 0 0,0 0-1 0 0,0 0 0 0 0,0 0 0 0 0,0-1 0 0 0,0 1 0 0 0,0 0 1 0 0,0 0-1 0 0,0 0 0 0 0,0-1 0 0 0,0 1 0 0 0,0 0 1 0 0,0 0-1 0 0,0 0 0 0 0,0 0 0 0 0,0-1 0 0 0,0 1 0 0 0,0 0 1 0 0,0 0-1 0 0,0 0 0 0 0,0-1 0 0 0,0 1 0 0 0,0 0 1 0 0,0 0-1 0 0,0 0 0 0 0,-1 0 0 0 0,1 0 0 0 0,0-1 1 0 0,0 1-1 0 0,0 0 0 0 0,0 0 0 0 0,0 0 0 0 0,0 0 0 0 0,-1 0 1 0 0,1 0-1 0 0,0-1 0 0 0,0 1 0 0 0,0 0 0 0 0,0 0 1 0 0,-1 0-1 0 0,1 0 0 0 0,0 0 0 0 0,0 0 0 0 0,0 0 0 0 0,-1 0 1 0 0,1 0-1 0 0,0 0 0 0 0,0 0 0 0 0,0 0 0 0 0,0 0 1 0 0,-1 0-1 0 0,1 0 0 0 0,0 0 0 0 0,0 0 0 0 0,0 0 1 0 0,-1 0-1 0 0,1 0 0 0 0,0 0 0 0 0,0 0 0 0 0,-1 1 0 0 0,-18 10 76 0 0,15-8-89 0 0,0 1-1 0 0,0-1 0 0 0,0 1 0 0 0,1 0 1 0 0,-1 0-1 0 0,1 0 0 0 0,0 1 0 0 0,-5 8 1 0 0,7-8-12 0 0,-1 1 0 0 0,1 0 1 0 0,0-1-1 0 0,0 1 1 0 0,0 0-1 0 0,1 0 1 0 0,0 0-1 0 0,0 0 1 0 0,1-1-1 0 0,-1 1 1 0 0,1 0-1 0 0,0 0 1 0 0,1-1-1 0 0,0 1 1 0 0,3 9-1 0 0,-1-7 80 0 0,1 0 1 0 0,0 0-1 0 0,0 0 1 0 0,0 0-1 0 0,1-1 1 0 0,0 0-1 0 0,0 0 0 0 0,1-1 1 0 0,12 11-1 0 0,-12-12-145 0 0,0-1 0 0 0,1 1 1 0 0,-1-1-1 0 0,1 0 0 0 0,-1-1 0 0 0,1 0 0 0 0,0 0 0 0 0,1-1 0 0 0,-1 0 0 0 0,14 2 0 0 0,-17-4-189 0 0,1 1 1 0 0,-1-1-1 0 0,1-1 0 0 0,-1 1 1 0 0,1-1-1 0 0,-1 0 0 0 0,0 0 1 0 0,0-1-1 0 0,1 1 1 0 0,-1-1-1 0 0,0 0 0 0 0,0-1 1 0 0,0 1-1 0 0,-1-1 0 0 0,1 0 1 0 0,-1 0-1 0 0,5-5 0 0 0,5-6-1793 0 0</inkml:trace>
 </inkml:ink>
 </file>
 
@@ -5574,7 +5735,7 @@
           <inkml:channelProperty channel="OE" name="resolution" value="1000" units="1/deg"/>
         </inkml:channelProperties>
       </inkml:inkSource>
-      <inkml:timestamp xml:id="ts0" timeString="2026-04-02T05:57:09.388"/>
+      <inkml:timestamp xml:id="ts0" timeString="2026-04-02T05:40:59.900"/>
     </inkml:context>
     <inkml:brush xml:id="br0">
       <inkml:brushProperty name="width" value="0.2" units="cm"/>
@@ -5582,7 +5743,7 @@
       <inkml:brushProperty name="color" value="#FFC114"/>
     </inkml:brush>
   </inkml:definitions>
-  <inkml:trace contextRef="#ctx0" brushRef="#br0">1 474 4956 0 0,'0'0'3378'0'0,"4"-3"-3351"0"0,19-16 5 0 0,1 1 0 0 0,1 1 1 0 0,1 1-1 0 0,48-22 1 0 0,-8 4-6 0 0,50-22-22 0 0,2 6 0 0 0,177-52 0 0 0,-196 71-66 0 0,3 3 1 0 0,0 5 0 0 0,171-15-1 0 0,-109 42-385 0 0,-161-4 477 0 0,33 3 851 0 0,-24-1-787 0 0</inkml:trace>
+  <inkml:trace contextRef="#ctx0" brushRef="#br0">20 50 5092 0 0,'0'0'-254'0'0,"-10"-6"-330"0"0,2 3 576 0 0,7 2 81 0 0,42 20 672 0 0,65 41 0 0 0,-91-49-743 0 0,0 0 0 0 0,-1 0 0 0 0,0 2 0 0 0,-1 0 0 0 0,-1 0 0 0 0,0 1 0 0 0,0 1 1 0 0,-2 0-1 0 0,14 24 0 0 0,-23-38 9 0 0,-1 0 0 0 0,1 1 0 0 0,-1-1 0 0 0,1 0-1 0 0,-1 0 1 0 0,1 1 0 0 0,-1-1 0 0 0,0 1 0 0 0,0-1 0 0 0,0 0 0 0 0,0 1 0 0 0,0-1 0 0 0,0 0 0 0 0,0 1 0 0 0,0-1 0 0 0,0 0 0 0 0,-1 1-1 0 0,1-1 1 0 0,0 0 0 0 0,-1 1 0 0 0,0-1 0 0 0,1 0 0 0 0,-1 0 0 0 0,1 1 0 0 0,-1-1 0 0 0,0 0 0 0 0,0 0 0 0 0,0 0 0 0 0,0 0 0 0 0,0 0 0 0 0,0 0-1 0 0,0 0 1 0 0,0 0 0 0 0,0-1 0 0 0,0 1 0 0 0,0 0 0 0 0,-1-1 0 0 0,-1 2 0 0 0,-1 0 61 0 0,-1 0-1 0 0,1-1 1 0 0,-1 1 0 0 0,0-1 0 0 0,1 0-1 0 0,-1 0 1 0 0,0 0 0 0 0,0-1-1 0 0,0 1 1 0 0,1-1 0 0 0,-11-1 0 0 0,9 0 16 0 0,-1 0 0 0 0,0-1 0 0 0,1 0 0 0 0,-1 0 0 0 0,1 0 0 0 0,-1-1 0 0 0,1 0 0 0 0,0 0 0 0 0,0 0 0 0 0,1-1 0 0 0,-9-7 0 0 0,12 9-63 0 0,0 0 1 0 0,0-1-1 0 0,0 1 0 0 0,0-1 1 0 0,0 0-1 0 0,1 0 1 0 0,-1 1-1 0 0,1-1 0 0 0,0 0 1 0 0,-1 0-1 0 0,2-1 0 0 0,-1 1 1 0 0,0 0-1 0 0,1 0 1 0 0,-1 0-1 0 0,1 0 0 0 0,0-1 1 0 0,0 1-1 0 0,0 0 0 0 0,0 0 1 0 0,1 0-1 0 0,0-1 1 0 0,-1 1-1 0 0,1 0 0 0 0,0 0 1 0 0,0 0-1 0 0,1 0 0 0 0,2-5 1 0 0,4-6 6 0 0,0 0 1 0 0,0 1 0 0 0,1 0 0 0 0,1 1-1 0 0,0 0 1 0 0,23-21 0 0 0,78-53-248 0 0,-106 82 179 0 0,-3 3-4 0 0,-46 3-6951 0 0</inkml:trace>
 </inkml:ink>
 </file>
 
@@ -5606,7 +5767,7 @@
           <inkml:channelProperty channel="OE" name="resolution" value="1000" units="1/deg"/>
         </inkml:channelProperties>
       </inkml:inkSource>
-      <inkml:timestamp xml:id="ts0" timeString="2026-04-02T05:57:10.064"/>
+      <inkml:timestamp xml:id="ts0" timeString="2026-04-02T05:41:00.780"/>
     </inkml:context>
     <inkml:brush xml:id="br0">
       <inkml:brushProperty name="width" value="0.2" units="cm"/>
@@ -5614,7 +5775,7 @@
       <inkml:brushProperty name="color" value="#FFC114"/>
     </inkml:brush>
   </inkml:definitions>
-  <inkml:trace contextRef="#ctx0" brushRef="#br0">80 28 5268 0 0,'-70'-24'1249'0'0,"68"24"-869"0"0,2-1-369 0 0,0 1 0 0 0,0 0 0 0 0,0 0 1 0 0,0 0-1 0 0,0 0 0 0 0,0-1 0 0 0,0 1 1 0 0,0 0-1 0 0,0 0 0 0 0,-1 0 0 0 0,1 0 1 0 0,0 0-1 0 0,0-1 0 0 0,0 1 0 0 0,0 0 0 0 0,0 0 1 0 0,-1 0-1 0 0,1 0 0 0 0,0 0 0 0 0,0 0 1 0 0,0 0-1 0 0,0 0 0 0 0,0 0 0 0 0,-1 0 1 0 0,1 0-1 0 0,0 0 0 0 0,0-1 0 0 0,0 1 1 0 0,-1 0-1 0 0,1 0 0 0 0,0 0 0 0 0,0 0 1 0 0,0 1-1 0 0,0-1 0 0 0,-1 0 0 0 0,1 0 1 0 0,0 0-1 0 0,0 0 0 0 0,0 0 0 0 0,0 0 1 0 0,-1 0-1 0 0,1 0 0 0 0,0 0 0 0 0,0 0 0 0 0,0 0 1 0 0,0 0-1 0 0,0 1 0 0 0,-1-1 0 0 0,1 0 1 0 0,0 0-1 0 0,0 0 0 0 0,0 0 0 0 0,0 0 1 0 0,0 1-1 0 0,0-1 0 0 0,0 0 0 0 0,13 15-23 0 0,1-1-1 0 0,1-1 0 0 0,0 0 1 0 0,1-2-1 0 0,0 1 0 0 0,1-2 0 0 0,25 12 1 0 0,56 39 9 0 0,-91-56 6 0 0,0 0 1 0 0,-1 0 0 0 0,0 1 0 0 0,0-1 0 0 0,-1 1 0 0 0,1 1-1 0 0,-1-1 1 0 0,6 11 0 0 0,-10-14 7 0 0,0 0-1 0 0,0 0 1 0 0,0 0 0 0 0,-1 0 0 0 0,1 0-1 0 0,-1 0 1 0 0,1 1 0 0 0,-1-1 0 0 0,0 0-1 0 0,0 0 1 0 0,-1 1 0 0 0,1-1 0 0 0,0 0-1 0 0,-1 0 1 0 0,0 0 0 0 0,0 1 0 0 0,0-1-1 0 0,0 0 1 0 0,-1 0 0 0 0,1-1-1 0 0,-1 1 1 0 0,0 0 0 0 0,-3 5 0 0 0,-17 17 63 0 0,0 0 1 0 0,-1-1 0 0 0,-2-1 0 0 0,0-2-1 0 0,-1 0 1 0 0,-29 16 0 0 0,-8 9 272 0 0,47-36-199 0 0</inkml:trace>
+  <inkml:trace contextRef="#ctx0" brushRef="#br0">0 48 4944 0 0,'8'-44'820'0'0,"-7"40"-712"0"0,0 24 66 0 0,3 54 201 0 0,-1-23-243 0 0,4 9-117 0 0,3 0 1 0 0,34 111 0 0 0,-31-124-11 0 0,19 60 877 0 0,-31-106-574 0 0,-1-1-275 0 0,-1 0 0 0 0,1 0-1 0 0,0 0 1 0 0,0 0 0 0 0,0 0-1 0 0,-1 0 1 0 0,1 0-1 0 0,0 0 1 0 0,0 0 0 0 0,0 0-1 0 0,-1 0 1 0 0,1 0 0 0 0,0 0-1 0 0,0 0 1 0 0,0 0 0 0 0,-1 0-1 0 0,1 0 1 0 0,0 0 0 0 0,0 0-1 0 0,0 0 1 0 0,-1 0-1 0 0,1 0 1 0 0,0 0 0 0 0,0 0-1 0 0,0 0 1 0 0,-1 0 0 0 0,1 0-1 0 0,0 0 1 0 0,0 1 0 0 0,0-1-1 0 0,0 0 1 0 0,-1 0-1 0 0,1 0 1 0 0,0 0 0 0 0,0 1-1 0 0,0-1 1 0 0,0 0 0 0 0,0 0-1 0 0,0 0 1 0 0,0 0 0 0 0,-1 1-1 0 0,1-1 1 0 0,0 0-1 0 0,0 0 1 0 0,0 0 0 0 0,0 1-1 0 0,0-1 1 0 0,0 0 0 0 0,0 0-1 0 0,0 0 1 0 0,0 1 0 0 0,0-1-1 0 0,0 0 1 0 0,0 0 0 0 0,0 0-1 0 0,0 1 1 0 0,0-1-1 0 0,0 0 1 0 0,1 0 0 0 0,-1 0-1 0 0,0 1 1 0 0,0-1 0 0 0,0 0-1 0 0,0 0 1 0 0,-4-1 6 0 0,0-1 0 0 0,0 0-1 0 0,1 0 1 0 0,-1 0 0 0 0,0-1 0 0 0,1 1 0 0 0,-1-1 0 0 0,1 0-1 0 0,0 0 1 0 0,0 0 0 0 0,0-1 0 0 0,0 1 0 0 0,1-1-1 0 0,0 1 1 0 0,-1-1 0 0 0,1 0 0 0 0,0 0 0 0 0,1 0 0 0 0,-1 0-1 0 0,1 0 1 0 0,0 0 0 0 0,0 0 0 0 0,0-1 0 0 0,0 1 0 0 0,0-8-1 0 0,1 7-38 0 0,0 0-1 0 0,0 0 1 0 0,1 0-1 0 0,0 0 1 0 0,0 0-1 0 0,0 1 1 0 0,0-1-1 0 0,0 0 1 0 0,1 1-1 0 0,0-1 1 0 0,0 1-1 0 0,0-1 1 0 0,1 1-1 0 0,0 0 0 0 0,-1 0 1 0 0,1 0-1 0 0,1 0 1 0 0,4-4-1 0 0,-2 4-19 0 0,-1 0 1 0 0,1 1-1 0 0,0 0 0 0 0,0 0 0 0 0,0 0 0 0 0,0 1 0 0 0,0 0 0 0 0,1 0 0 0 0,-1 0 0 0 0,1 1 0 0 0,-1 0 0 0 0,1 0 0 0 0,0 1 1 0 0,7 0-1 0 0,15 1-38 0 0,0 1 1 0 0,0 2-1 0 0,38 9 1 0 0,-50-9-15 0 0,0 1 0 0 0,0 0 0 0 0,-1 2 0 0 0,0 0 0 0 0,0 0 0 0 0,0 2 0 0 0,16 11 0 0 0,-31-19 62 0 0,0 0 0 0 0,1-1-1 0 0,-1 1 1 0 0,0 0 0 0 0,0 0 0 0 0,0 0 0 0 0,0 1 0 0 0,0-1 0 0 0,0 0 0 0 0,0 0 0 0 0,0 0 0 0 0,0 1 0 0 0,-1-1 0 0 0,1 0 0 0 0,0 1 0 0 0,-1-1 0 0 0,1 1 0 0 0,-1-1 0 0 0,1 1 0 0 0,-1-1 0 0 0,0 1 0 0 0,0-1 0 0 0,0 1 0 0 0,0-1 0 0 0,0 1 0 0 0,0 1 0 0 0,-1 0 2 0 0,0-1 1 0 0,-1 1-1 0 0,1-1 1 0 0,0 0-1 0 0,-1 1 1 0 0,0-1-1 0 0,1 0 1 0 0,-1 0-1 0 0,0 0 1 0 0,0 0-1 0 0,0-1 0 0 0,0 1 1 0 0,-4 2-1 0 0,-8 4-6 0 0,0 0-1 0 0,-1-1 1 0 0,-26 8 0 0 0,-4-4 128 0 0,-1-1 1 0 0,0-3 0 0 0,0-2 0 0 0,0-1-1 0 0,-49-4 1 0 0,93 0-127 0 0,1 1 0 0 0,0-1 0 0 0,-1 0 0 0 0,1 0 0 0 0,-1-1 0 0 0,1 1 0 0 0,-1 0 0 0 0,1 0 0 0 0,0-1 0 0 0,-1 1 0 0 0,1-1 0 0 0,0 1 0 0 0,-1-1 0 0 0,1 1 0 0 0,0-1 0 0 0,-2-1 0 0 0,3 2-16 0 0,0-1 1 0 0,-1 1 0 0 0,1-1 0 0 0,0 1 0 0 0,0-1-1 0 0,0 1 1 0 0,0-1 0 0 0,0 1 0 0 0,-1-1-1 0 0,1 1 1 0 0,0-1 0 0 0,0 1 0 0 0,1-1 0 0 0,-1 1-1 0 0,0-1 1 0 0,0 1 0 0 0,0-1 0 0 0,0 1-1 0 0,0-1 1 0 0,0 1 0 0 0,1-1 0 0 0,-1 1 0 0 0,0-1-1 0 0,0 1 1 0 0,1-1 0 0 0,-1 1 0 0 0,0 0-1 0 0,1-1 1 0 0,31-26-4235 0 0,-19 20 1308 0 0</inkml:trace>
 </inkml:ink>
 </file>
 
@@ -5638,7 +5799,7 @@
           <inkml:channelProperty channel="OE" name="resolution" value="1000" units="1/deg"/>
         </inkml:channelProperties>
       </inkml:inkSource>
-      <inkml:timestamp xml:id="ts0" timeString="2026-04-02T05:57:12.053"/>
+      <inkml:timestamp xml:id="ts0" timeString="2026-04-02T05:41:01.372"/>
     </inkml:context>
     <inkml:brush xml:id="br0">
       <inkml:brushProperty name="width" value="0.2" units="cm"/>
@@ -5646,7 +5807,7 @@
       <inkml:brushProperty name="color" value="#FFC114"/>
     </inkml:brush>
   </inkml:definitions>
-  <inkml:trace contextRef="#ctx0" brushRef="#br0">74 52 6165 0 0,'1'-5'116'0'0,"-1"1"0"0"0,1-1 0 0 0,-1 1 0 0 0,1-1 0 0 0,-1 0 0 0 0,0 1 0 0 0,-1-1 0 0 0,-1-8 0 0 0,2 11 180 0 0,-4 6-262 0 0,-3 4-33 0 0,0 0 0 0 0,0 0-1 0 0,1 1 1 0 0,0-1 0 0 0,1 2 0 0 0,0-1 0 0 0,0 0 0 0 0,1 1 0 0 0,0 0 0 0 0,1 0 0 0 0,0 0 0 0 0,1 1 0 0 0,0-1 0 0 0,-1 19-1 0 0,3-23 0 0 0,0 0-1 0 0,0 0 1 0 0,1 0-1 0 0,0 0 1 0 0,0 0-1 0 0,0 0 1 0 0,1-1-1 0 0,0 1 1 0 0,0 0-1 0 0,0-1 1 0 0,1 0-1 0 0,-1 1 1 0 0,1-1-1 0 0,1 0 1 0 0,-1 0-1 0 0,1-1 1 0 0,0 1-1 0 0,0-1 1 0 0,0 0-1 0 0,1 0 1 0 0,-1 0-1 0 0,1 0 1 0 0,0-1-1 0 0,0 0 1 0 0,0 0-1 0 0,0 0 1 0 0,12 3-1 0 0,-4-1 10 0 0,1-1 0 0 0,0 0-1 0 0,0-1 1 0 0,0-1 0 0 0,0-1 0 0 0,0 0 0 0 0,0 0-1 0 0,1-1 1 0 0,-1-1 0 0 0,24-5 0 0 0,-31 5 11 0 0,0 0 1 0 0,1-1 0 0 0,-1-1 0 0 0,0 1-1 0 0,0-1 1 0 0,-1 0 0 0 0,1-1 0 0 0,-1 1-1 0 0,1-1 1 0 0,-1-1 0 0 0,0 1-1 0 0,-1-1 1 0 0,1 0 0 0 0,-1 0 0 0 0,0-1-1 0 0,0 0 1 0 0,0 0 0 0 0,-1 0 0 0 0,0 0-1 0 0,-1-1 1 0 0,6-10 0 0 0,-7 8 171 0 0,-1 0-1 0 0,0 1 1 0 0,0-1 0 0 0,-1 0 0 0 0,0 1-1 0 0,-1-1 1 0 0,-2-15 0 0 0,2 23-97 0 0,4-17 282 0 0,-1 8-354 0 0,-3 66-852 0 0,1-3 701 0 0,3 1 0 0 0,2-1 0 0 0,3 0 0 0 0,25 93 0 0 0,-29-127 138 0 0,-1 0 1 0 0,-1 0 0 0 0,0 0-1 0 0,-2 33 1 0 0,0-31 47 0 0,0-19-83 0 0</inkml:trace>
+  <inkml:trace contextRef="#ctx0" brushRef="#br0">361 52 6753 0 0,'0'0'-23'0'0,"0"-7"138"0"0,0 7-86 0 0,0 1-15 0 0,0-1 1 0 0,0 0-1 0 0,0 0 1 0 0,0 0-1 0 0,0 0 1 0 0,0 0-1 0 0,-1 0 1 0 0,1 0-1 0 0,0 0 1 0 0,0 0-1 0 0,0 0 1 0 0,0 0-1 0 0,0 0 1 0 0,0 0-1 0 0,0 0 1 0 0,0 0 0 0 0,0 0-1 0 0,0 0 1 0 0,-1 0-1 0 0,1 0 1 0 0,0 0-1 0 0,0 0 1 0 0,0 0-1 0 0,0 0 1 0 0,0 0-1 0 0,0 0 1 0 0,-1-1 87 0 0,1 1-73 0 0,0 0-15 0 0,0 0 1 0 0,0 0-1 0 0,0 0 1 0 0,0 0-1 0 0,0 0 1 0 0,0 0-1 0 0,0-1 1 0 0,0 1-1 0 0,-11 17-15 0 0,8-13 7 0 0,4 10 12 0 0,2-10-13 0 0,0 1 0 0 0,1-2 0 0 0,-1 1 0 0 0,1 0-1 0 0,0-1 1 0 0,0 1 0 0 0,0-1 0 0 0,1 0 0 0 0,-1-1 0 0 0,1 1 0 0 0,-1-1 0 0 0,1 0-1 0 0,0 0 1 0 0,0 0 0 0 0,0 0 0 0 0,0-1 0 0 0,0 0 0 0 0,8 0 0 0 0,1 2 14 0 0,1-1 1 0 0,-1-1-1 0 0,1 0 1 0 0,-1-1-1 0 0,26-3 1 0 0,-25-1-4 0 0,0-1 0 0 0,0 0 0 0 0,0-1 0 0 0,-1 0 0 0 0,0-1 0 0 0,0-1 0 0 0,-1 0 0 0 0,0-1 0 0 0,13-12 0 0 0,38-23 505 0 0,-42 34-336 0 0,-22 10-185 0 0,0 0 1 0 0,0 0-1 0 0,0 0 0 0 0,1 0 1 0 0,-1 0-1 0 0,0 0 0 0 0,0 0 1 0 0,1 0-1 0 0,-1 0 0 0 0,0 0 1 0 0,0 0-1 0 0,0 0 0 0 0,1 0 1 0 0,-1 0-1 0 0,0 0 0 0 0,0 0 1 0 0,1 0-1 0 0,-1 0 1 0 0,0 0-1 0 0,0 0 0 0 0,0 0 1 0 0,1 0-1 0 0,-1 0 0 0 0,0 0 1 0 0,0 0-1 0 0,0 1 0 0 0,0-1 1 0 0,1 0-1 0 0,-1 0 0 0 0,0 0 1 0 0,0 0-1 0 0,0 1 0 0 0,0-1 1 0 0,1 0-1 0 0,-1 0 0 0 0,0 0 1 0 0,0 0-1 0 0,0 1 1 0 0,0-1-1 0 0,0 0 0 0 0,0 1 1 0 0,-1 2-4 0 0,0 0 0 0 0,0 0 0 0 0,0 0 0 0 0,0 0 0 0 0,-1 0 1 0 0,1 0-1 0 0,-1 0 0 0 0,0-1 0 0 0,0 1 0 0 0,-4 4 0 0 0,-96 109 6 0 0,-148 133 0 0 0,137-142 15 0 0,29-29-289 0 0,-123 88 0 0 0,189-159-443 0 0</inkml:trace>
 </inkml:ink>
 </file>
 
@@ -5670,7 +5831,7 @@
           <inkml:channelProperty channel="OE" name="resolution" value="1000" units="1/deg"/>
         </inkml:channelProperties>
       </inkml:inkSource>
-      <inkml:timestamp xml:id="ts0" timeString="2026-04-02T05:57:13.068"/>
+      <inkml:timestamp xml:id="ts0" timeString="2026-04-02T05:41:03.774"/>
     </inkml:context>
     <inkml:brush xml:id="br0">
       <inkml:brushProperty name="width" value="0.2" units="cm"/>
@@ -5678,7 +5839,7 @@
       <inkml:brushProperty name="color" value="#FFC114"/>
     </inkml:brush>
   </inkml:definitions>
-  <inkml:trace contextRef="#ctx0" brushRef="#br0">303 107 6189 0 0,'-4'-34'-49'0'0,"0"31"55"0"0,0 1 0 0 0,0-1 1 0 0,-1 1-1 0 0,1 1 0 0 0,0-1 0 0 0,-1 0 0 0 0,1 1 1 0 0,-1 0-1 0 0,0 0 0 0 0,1 0 0 0 0,-1 1 0 0 0,0 0 1 0 0,0 0-1 0 0,-6 0 0 0 0,-70 10 6 0 0,72-9-17 0 0,1 1 1 0 0,0 0 0 0 0,0 1-1 0 0,-1 0 1 0 0,1 0 0 0 0,1 0-1 0 0,-1 1 1 0 0,0 0 0 0 0,1 1-1 0 0,0 0 1 0 0,0 0 0 0 0,0 0-1 0 0,1 1 1 0 0,0 0 0 0 0,0 0 0 0 0,-8 12-1 0 0,13-16 5 0 0,-1 0-1 0 0,1 0 1 0 0,0 0-1 0 0,0 0 0 0 0,0 0 1 0 0,0 0-1 0 0,1 1 1 0 0,-1-1-1 0 0,1 0 1 0 0,-1 1-1 0 0,1-1 1 0 0,0 0-1 0 0,0 1 1 0 0,0-1-1 0 0,0 0 0 0 0,0 1 1 0 0,0-1-1 0 0,1 1 1 0 0,-1-1-1 0 0,1 0 1 0 0,-1 0-1 0 0,1 1 1 0 0,0-1-1 0 0,0 0 1 0 0,0 0-1 0 0,0 0 0 0 0,1 0 1 0 0,-1 0-1 0 0,1 0 1 0 0,2 3-1 0 0,1 0 0 0 0,-1 0-1 0 0,1 0 0 0 0,1-1 1 0 0,-1 1-1 0 0,1-1 0 0 0,0 0 1 0 0,0-1-1 0 0,9 5 0 0 0,28 8 11 0 0,48 10-1 0 0,-61-20-2 0 0,-1 3 0 0 0,1 0-1 0 0,-2 2 1 0 0,46 24 0 0 0,-48-18-13 0 0,43 22 9 0 0,-69-39 7 0 0,1 1 0 0 0,0-1 0 0 0,0 0 0 0 0,0 0 0 0 0,-1 1 0 0 0,1-1 0 0 0,0 1 0 0 0,-1-1 0 0 0,1 1 0 0 0,0-1 0 0 0,-1 1 0 0 0,1-1 0 0 0,0 1 0 0 0,-1 0 0 0 0,1-1 0 0 0,-1 1 0 0 0,1 0 0 0 0,-1-1 1 0 0,0 1-1 0 0,1 0 0 0 0,-1 0 0 0 0,0-1 0 0 0,1 1 0 0 0,-1 0 0 0 0,0 0 0 0 0,0 0 0 0 0,0-1 0 0 0,1 2 0 0 0,-2 0 5 0 0,1-1 0 0 0,-1 1 0 0 0,1-1 0 0 0,-1 0 1 0 0,0 1-1 0 0,1-1 0 0 0,-1 0 0 0 0,0 1 0 0 0,0-1 0 0 0,0 0 0 0 0,0 0 1 0 0,0 0-1 0 0,0 0 0 0 0,-2 1 0 0 0,-45 29 273 0 0,46-30-270 0 0,-15 9 244 0 0,-1-2 0 0 0,-1 0 1 0 0,1-1-1 0 0,-1 0 0 0 0,0-2 0 0 0,-1 0 0 0 0,1-1 1 0 0,-23 1-1 0 0,40-5-229 0 0,0 0 1 0 0,0 0-1 0 0,1 0 0 0 0,-1 0 1 0 0,0 0-1 0 0,0 0 1 0 0,1 0-1 0 0,-1-1 0 0 0,0 1 1 0 0,1-1-1 0 0,-1 1 1 0 0,0-1-1 0 0,1 0 0 0 0,-1 0 1 0 0,1 0-1 0 0,-1 0 1 0 0,1 0-1 0 0,0 0 0 0 0,-1 0 1 0 0,1 0-1 0 0,0 0 1 0 0,0 0-1 0 0,0-1 0 0 0,-1 1 1 0 0,1-1-1 0 0,1 1 1 0 0,-1-1-1 0 0,0 1 0 0 0,0-1 1 0 0,1 1-1 0 0,-1-1 1 0 0,0 0-1 0 0,1 1 0 0 0,0-1 1 0 0,-1 0-1 0 0,1 1 1 0 0,0-1-1 0 0,0 0 0 0 0,0 0 1 0 0,0 1-1 0 0,0-1 1 0 0,0 0-1 0 0,1 1 0 0 0,-1-1 1 0 0,1 0-1 0 0,0-2 1 0 0,1-5-17 0 0,1-1-1 0 0,0 1 1 0 0,1 0 0 0 0,0-1 0 0 0,0 1 0 0 0,8-11 0 0 0,17-19-37 0 0,66-68-1 0 0,10-13 122 0 0,-104 118-84 0 0,1 0 1 0 0,0 0-1 0 0,-1-1 1 0 0,1 1-1 0 0,-1 0 0 0 0,0-1 1 0 0,0 1-1 0 0,0-1 1 0 0,0 1-1 0 0,0-1 1 0 0,0 1-1 0 0,-1-1 1 0 0,1 0-1 0 0,-1 1 1 0 0,0-1-1 0 0,1 0 1 0 0,-1 1-1 0 0,-1-1 1 0 0,1 0-1 0 0,0 1 0 0 0,-1-1 1 0 0,1 0-1 0 0,-1 1 1 0 0,-2-6-1 0 0,1 5-5 0 0,0 0-1 0 0,-1 0 1 0 0,1 0-1 0 0,-1 0 1 0 0,0 0 0 0 0,0 1-1 0 0,0-1 1 0 0,0 1-1 0 0,0 0 1 0 0,-1 0-1 0 0,1 0 1 0 0,-1 0-1 0 0,1 1 1 0 0,-1-1-1 0 0,0 1 1 0 0,-5-1-1 0 0,-65-17 198 0 0,6 2-1924 0 0,24 5-4026 0 0,31 8 3258 0 0</inkml:trace>
+  <inkml:trace contextRef="#ctx0" brushRef="#br0">556 14 5757 0 0,'0'0'1796'0'0,"-7"1"-1738"0"0,-45 4 61 0 0,28-4-109 0 0,-1 1-1 0 0,1 2 1 0 0,0 0 0 0 0,-25 9 0 0 0,23-2-48 0 0,1 1 0 0 0,0 2 1 0 0,1 0-1 0 0,1 2 0 0 0,0 0 1 0 0,1 2-1 0 0,1 0 0 0 0,0 1 1 0 0,2 1-1 0 0,0 1 0 0 0,-27 42 1 0 0,38-51 13 0 0,1-1 0 0 0,0 1 0 0 0,1 1 0 0 0,0-1 0 0 0,1 1 0 0 0,1 0 0 0 0,0 0 0 0 0,1 0 0 0 0,-3 19 0 0 0,6-23 15 0 0,-1-1 1 0 0,1 0-1 0 0,0 1 0 0 0,1-1 0 0 0,0 1 0 0 0,0-1 0 0 0,1 0 0 0 0,0 1 0 0 0,1-1 0 0 0,0 0 0 0 0,0 0 1 0 0,0-1-1 0 0,1 1 0 0 0,0-1 0 0 0,1 0 0 0 0,6 9 0 0 0,15 10 22 0 0,0 0-1 0 0,2-2 1 0 0,0-1-1 0 0,2-2 1 0 0,0 0-1 0 0,2-2 1 0 0,0-2-1 0 0,1-1 1 0 0,50 18-1 0 0,-68-30 12 0 0,0 0-1 0 0,1-1 0 0 0,-1-1 0 0 0,1-1 0 0 0,-1 0 1 0 0,1-1-1 0 0,-1 0 0 0 0,30-5 0 0 0,4-4 140 0 0,69-22 0 0 0,-101 26 69 0 0,0-1-1 0 0,-1-1 1 0 0,1-1 0 0 0,-2 0-1 0 0,1-1 1 0 0,-1 0 0 0 0,0-2-1 0 0,-1 0 1 0 0,0 0 0 0 0,-1-1-1 0 0,0-1 1 0 0,-1 0 0 0 0,-1-1-1 0 0,0 0 1 0 0,0 0 0 0 0,-2-2-1 0 0,0 1 1 0 0,10-23 0 0 0,-14 22-136 0 0,0 1 1 0 0,-1-1 0 0 0,-1 0-1 0 0,-1-1 1 0 0,0 1 0 0 0,-1 0-1 0 0,0-1 1 0 0,-1 1 0 0 0,-1-1 0 0 0,-1 1-1 0 0,-1 0 1 0 0,-7-27 0 0 0,6 31-91 0 0,0-1-1 0 0,-1 2 1 0 0,0-1 0 0 0,-1 0 0 0 0,-1 1 0 0 0,0 0 0 0 0,0 1 0 0 0,-1-1 0 0 0,-1 1 0 0 0,1 1 0 0 0,-2 0 0 0 0,-19-16 0 0 0,5 7-44 0 0,-1 2 1 0 0,0 0-1 0 0,-1 2 0 0 0,-45-18 0 0 0,-16 8-135 0 0,38 13 90 0 0,34 7-246 0 0,-1 1 0 0 0,0 0 1 0 0,0 1-1 0 0,0 1 0 0 0,0 0 0 0 0,0 2 0 0 0,0 0 0 0 0,-20 3 1 0 0</inkml:trace>
 </inkml:ink>
 </file>
 
@@ -5702,7 +5863,7 @@
           <inkml:channelProperty channel="OE" name="resolution" value="1000" units="1/deg"/>
         </inkml:channelProperties>
       </inkml:inkSource>
-      <inkml:timestamp xml:id="ts0" timeString="2026-04-02T05:57:17.668"/>
+      <inkml:timestamp xml:id="ts0" timeString="2026-04-02T05:41:05.150"/>
     </inkml:context>
     <inkml:brush xml:id="br0">
       <inkml:brushProperty name="width" value="0.2" units="cm"/>
@@ -5710,7 +5871,7 @@
       <inkml:brushProperty name="color" value="#FFC114"/>
     </inkml:brush>
   </inkml:definitions>
-  <inkml:trace contextRef="#ctx0" brushRef="#br0">1 2094 5793 0 0,'0'0'-42'0'0,"4"-3"50"0"0,24-21 43 0 0,46-49 1 0 0,-30 27 72 0 0,164-158 183 0 0,-143 140-200 0 0,65-83 0 0 0,21-22-21 0 0,217-172 11 0 0,-269 252 4 0 0,-10 14-3 0 0,3 5-1 0 0,195-114 0 0 0,-172 117-50 0 0,-35 18-5 0 0,3 4 0 0 0,170-68-1 0 0,-116 67-8 0 0,362-103-6 0 0,49 41 26 0 0,-443 94-53 0 0,0 4 1 0 0,146 6-1 0 0,-190 4 3 0 0,181 5 472 0 0,-175 0 1000 0 0,-64-5-1467 0 0</inkml:trace>
+  <inkml:trace contextRef="#ctx0" brushRef="#br0">22 156 5821 0 0,'0'0'-419'0'0,"-6"1"-463"0"0,6-1 840 0 0,-1 0 0 0 0,1-1 1 0 0,-1 1-1 0 0,0 0 0 0 0,1 0 0 0 0,-1 0 0 0 0,1 1 1 0 0,-1-1-1 0 0,1 0 0 0 0,-1 0 0 0 0,0 0 0 0 0,1 0 1 0 0,-1 0-1 0 0,1 1 0 0 0,-1-1 0 0 0,1 0 0 0 0,-1 0 1 0 0,1 1-1 0 0,-1-1 0 0 0,1 0 0 0 0,-1 1 0 0 0,1-1 1 0 0,0 1-1 0 0,-1-1 0 0 0,1 1 0 0 0,0-1 0 0 0,-1 0 1 0 0,1 1-1 0 0,0-1 0 0 0,-1 1 0 0 0,1-1 0 0 0,0 1 1 0 0,0 0-1 0 0,-1 0 0 0 0,1 0-101 0 0,31 26-413 0 0,-13-17 492 0 0,0 0 0 0 0,0-2-1 0 0,1 0 1 0 0,0-1 0 0 0,28 6-1 0 0,105 16-13 0 0,-87-19 53 0 0,41 5 287 0 0,0-4 1 0 0,193-6-1 0 0,-203-13 394 0 0,159-36 0 0 0,-20 2-134 0 0,-120 24-114 0 0,-1-5 0 0 0,173-59 1 0 0,-191 55-312 0 0,0 3 1 0 0,2 5 0 0 0,1 4-1 0 0,126-3 1 0 0,223 17-153 0 0,-376 4 476 0 0,-68-3-309 0 0,30 1-1447 0 0</inkml:trace>
 </inkml:ink>
 </file>
 
@@ -5766,7 +5927,7 @@
           <inkml:channelProperty channel="OE" name="resolution" value="1000" units="1/deg"/>
         </inkml:channelProperties>
       </inkml:inkSource>
-      <inkml:timestamp xml:id="ts0" timeString="2026-04-02T05:57:18.404"/>
+      <inkml:timestamp xml:id="ts0" timeString="2026-04-02T05:41:05.885"/>
     </inkml:context>
     <inkml:brush xml:id="br0">
       <inkml:brushProperty name="width" value="0.2" units="cm"/>
@@ -5774,7 +5935,7 @@
       <inkml:brushProperty name="color" value="#FFC114"/>
     </inkml:brush>
   </inkml:definitions>
-  <inkml:trace contextRef="#ctx0" brushRef="#br0">120 48 6857 0 0,'-35'-18'-1059'0'0,"-10"-2"1809"0"0,43 19-581 0 0,-9-4 21 0 0,6 2-7 0 0,8 3 63 0 0,96 19-243 0 0,-47-11-2 0 0,1 3-1 0 0,-2 2 1 0 0,62 25 0 0 0,-111-38 1 0 0,0 1 0 0 0,0 0-1 0 0,1 0 1 0 0,-1 0 0 0 0,0 0 0 0 0,0 1 0 0 0,0-1 0 0 0,0 1-1 0 0,-1-1 1 0 0,1 1 0 0 0,0-1 0 0 0,0 1 0 0 0,-1 0-1 0 0,1 0 1 0 0,-1 0 0 0 0,0 0 0 0 0,0 0 0 0 0,0 0 0 0 0,0 0-1 0 0,2 5 1 0 0,-3-4 3 0 0,0-1 0 0 0,0 1 1 0 0,0-1-1 0 0,-1 1 0 0 0,1-1 0 0 0,-1 0 0 0 0,1 1 0 0 0,-1-1 1 0 0,0 1-1 0 0,0-1 0 0 0,0 0 0 0 0,0 0 0 0 0,0 1 0 0 0,0-1 1 0 0,-1 0-1 0 0,-2 3 0 0 0,-6 6 28 0 0,-2 1 0 0 0,0-1 0 0 0,0-1 0 0 0,-23 15 0 0 0,27-19-24 0 0,-274 173 234 0 0,255-162-240 0 0,10-9-606 0 0</inkml:trace>
+  <inkml:trace contextRef="#ctx0" brushRef="#br0">86 25 4776 0 0,'-74'-22'1575'0'0,"63"20"-12"0"0,18 4-1608 0 0,121 33 29 0 0,156 39 79 0 0,-278-74-73 0 0,0 1 0 0 0,-1 0 0 0 0,1 0 0 0 0,-1 1 0 0 0,1 0 0 0 0,-1 0 0 0 0,1 0 0 0 0,-1 0 0 0 0,0 1 0 0 0,0 0-1 0 0,0 0 1 0 0,6 6 0 0 0,-10-8-3 0 0,-1 1 9 0 0,-1 0 0 0 0,1-1 0 0 0,-1 1 0 0 0,0 0 1 0 0,0 0-1 0 0,1-1 0 0 0,-1 1 0 0 0,0-1 0 0 0,0 1 0 0 0,-1-1 0 0 0,1 1 0 0 0,0-1 0 0 0,0 0 0 0 0,-1 1 0 0 0,1-1 1 0 0,-1 0-1 0 0,1 0 0 0 0,-3 1 0 0 0,-35 20 11 0 0,32-19-5 0 0,-54 25 77 0 0,-115 34 0 0 0,81-31-251 0 0,74-25-139 0 0</inkml:trace>
 </inkml:ink>
 </file>
 
@@ -5798,7 +5959,7 @@
           <inkml:channelProperty channel="OE" name="resolution" value="1000" units="1/deg"/>
         </inkml:channelProperties>
       </inkml:inkSource>
-      <inkml:timestamp xml:id="ts0" timeString="2026-04-02T05:57:20.752"/>
+      <inkml:timestamp xml:id="ts0" timeString="2026-04-02T05:41:07.544"/>
     </inkml:context>
     <inkml:brush xml:id="br0">
       <inkml:brushProperty name="width" value="0.2" units="cm"/>
@@ -5806,7 +5967,7 @@
       <inkml:brushProperty name="color" value="#FFC114"/>
     </inkml:brush>
   </inkml:definitions>
-  <inkml:trace contextRef="#ctx0" brushRef="#br0">418 1 5661 0 0,'-22'12'448'0'0,"-29"26"-426"0"0,2 2 0 0 0,-76 79-1 0 0,101-93-24 0 0,2 1 0 0 0,0 2 0 0 0,2 0 0 0 0,2 1-1 0 0,0 1 1 0 0,-17 42 0 0 0,33-68 2 0 0,0 0-1 0 0,0-1 1 0 0,1 1 0 0 0,0 0-1 0 0,0 0 1 0 0,0 0 0 0 0,0 0-1 0 0,1 0 1 0 0,-1 1 0 0 0,2-1-1 0 0,-1 0 1 0 0,0 0 0 0 0,1 0-1 0 0,0 0 1 0 0,0 0 0 0 0,0 0-1 0 0,1 0 1 0 0,3 7 0 0 0,-2-7 6 0 0,1-1 0 0 0,-1 1 0 0 0,1-1 1 0 0,0 0-1 0 0,0 0 0 0 0,0 0 0 0 0,0 0 0 0 0,1-1 1 0 0,0 0-1 0 0,0 0 0 0 0,0 0 0 0 0,0-1 0 0 0,0 1 1 0 0,0-1-1 0 0,0-1 0 0 0,10 3 0 0 0,0 0 13 0 0,-1-1 0 0 0,1-1 0 0 0,-1 0 0 0 0,1-1 0 0 0,0 0 1 0 0,-1-1-1 0 0,1-1 0 0 0,0-1 0 0 0,0 0 0 0 0,15-4 0 0 0,-22 3 20 0 0,0 1 0 0 0,0-1 0 0 0,0-1 1 0 0,0 1-1 0 0,-1-1 0 0 0,1-1 0 0 0,-1 1 0 0 0,0-1 0 0 0,0-1 1 0 0,-1 1-1 0 0,0-1 0 0 0,0 0 0 0 0,0-1 0 0 0,-1 1 1 0 0,1-1-1 0 0,-2 0 0 0 0,1 0 0 0 0,5-13 0 0 0,-8 16-1 0 0,0 0 0 0 0,0 0-1 0 0,-1 0 1 0 0,0 0 0 0 0,0 0 0 0 0,0 0-1 0 0,0-1 1 0 0,0 1 0 0 0,-1 0-1 0 0,0-1 1 0 0,0 1 0 0 0,0 0 0 0 0,0-1-1 0 0,-1 1 1 0 0,1 0 0 0 0,-3-7-1 0 0,1 8-23 0 0,0 0 0 0 0,1 0 0 0 0,-1 1 0 0 0,-1-1-1 0 0,1 0 1 0 0,0 1 0 0 0,-1-1 0 0 0,1 1 0 0 0,-1 0-1 0 0,0 0 1 0 0,0 0 0 0 0,0 0 0 0 0,0 0 0 0 0,0 1-1 0 0,0-1 1 0 0,0 1 0 0 0,-1 0 0 0 0,1 0-1 0 0,0 0 1 0 0,-7-1 0 0 0,-25-3 69 0 0,-49-2 0 0 0,-20-3-140 0 0,102 10-133 0 0</inkml:trace>
+  <inkml:trace contextRef="#ctx0" brushRef="#br0">0 105 5076 0 0,'0'-24'114'0'0,"0"22"-89"0"0,0-2-21 0 0,0 2 173 0 0,1 8-395 0 0,7 43 203 0 0,3-1 0 0 0,1-1-1 0 0,3 0 1 0 0,20 45 0 0 0,-15-40 2837 0 0,-22-53-2791 0 0,0 0 1 0 0,0 0-1 0 0,0 0 0 0 0,0 0 1 0 0,0 0-1 0 0,0 0 0 0 0,0 0 0 0 0,0-1 1 0 0,1 1-1 0 0,-1-1 0 0 0,1 1 1 0 0,-1-1-1 0 0,1 0 0 0 0,-1 1 1 0 0,1-1-1 0 0,0 0 0 0 0,0 0 0 0 0,0 0 1 0 0,0 0-1 0 0,0 0 0 0 0,0 0 1 0 0,1 0-1 0 0,-1 0 0 0 0,0-4 0 0 0,-14-62 382 0 0,14 60-380 0 0,-3-29 62 0 0,2 0 0 0 0,2-1 0 0 0,1 1-1 0 0,7-42 1 0 0,-8 75-145 0 0,0 1 1 0 0,1-1-1 0 0,-1 0 0 0 0,1 1 0 0 0,0-1 0 0 0,0 1 0 0 0,0-1 1 0 0,0 1-1 0 0,1-1 0 0 0,-1 1 0 0 0,1 0 0 0 0,4-6 0 0 0,-3 7 30 0 0,0 0-1 0 0,0 1 0 0 0,0-1 0 0 0,0 0 0 0 0,0 1 0 0 0,0 0 0 0 0,1 0 0 0 0,-1 0 0 0 0,0 0 0 0 0,1 1 0 0 0,-1-1 0 0 0,1 1 0 0 0,-1 0 0 0 0,1 0 0 0 0,5 0 0 0 0,2 0-22 0 0,-1 0 0 0 0,1 1 0 0 0,0 0 0 0 0,-1 0 0 0 0,1 1 0 0 0,-1 0 0 0 0,0 1 0 0 0,1 1 0 0 0,-1-1 0 0 0,0 1 0 0 0,-1 1 0 0 0,1 0 0 0 0,-1 0 0 0 0,0 1 0 0 0,0 0 0 0 0,-1 1 0 0 0,12 11 0 0 0,5 15-27 0 0,-2 1-1 0 0,-1 1 0 0 0,-2 0 0 0 0,26 64 0 0 0,-42-89-253 0 0,15 34 844 0 0,-6-24-4163 0 0</inkml:trace>
 </inkml:ink>
 </file>
 
@@ -5830,7 +5991,7 @@
           <inkml:channelProperty channel="OE" name="resolution" value="1000" units="1/deg"/>
         </inkml:channelProperties>
       </inkml:inkSource>
-      <inkml:timestamp xml:id="ts0" timeString="2026-04-02T05:57:22.420"/>
+      <inkml:timestamp xml:id="ts0" timeString="2026-04-02T05:41:08.091"/>
     </inkml:context>
     <inkml:brush xml:id="br0">
       <inkml:brushProperty name="width" value="0.2" units="cm"/>
@@ -5838,7 +5999,7 @@
       <inkml:brushProperty name="color" value="#FFC114"/>
     </inkml:brush>
   </inkml:definitions>
-  <inkml:trace contextRef="#ctx0" brushRef="#br0">1 164 4808 0 0,'0'0'-98'0'0,"11"-15"3184"0"0,-1-15-2212 0 0,2-60-60 0 0,-12 89-756 0 0,1-26-415 0 0,-9 53 313 0 0,1 1 1 0 0,1 0-1 0 0,2 0 1 0 0,0 0-1 0 0,2 1 1 0 0,1 0-1 0 0,4 41 1 0 0,-3-65 42 0 0,1-1 1 0 0,0 1-1 0 0,0-1 0 0 0,0 1 1 0 0,0 0-1 0 0,0-1 1 0 0,1 0-1 0 0,0 1 0 0 0,-1-1 1 0 0,1 0-1 0 0,0 0 1 0 0,1 0-1 0 0,-1 0 1 0 0,0 0-1 0 0,1 0 0 0 0,0-1 1 0 0,4 4-1 0 0,-1-2 3 0 0,1 0 1 0 0,-1 0-1 0 0,1-1 0 0 0,0 0 1 0 0,-1-1-1 0 0,1 0 0 0 0,0 0 1 0 0,12 2-1 0 0,2-2 9 0 0,-1 0 1 0 0,0-2-1 0 0,1 0 0 0 0,-1-1 0 0 0,36-7 1 0 0,-48 6-9 0 0,0 0 0 0 0,-1 0 0 0 0,1-1 0 0 0,0 0 0 0 0,-1 0 0 0 0,1-1 0 0 0,-1 0 0 0 0,0 0 0 0 0,0 0 0 0 0,-1-1 0 0 0,1 0 0 0 0,-1-1 0 0 0,0 1 0 0 0,-1-1 0 0 0,8-9 0 0 0,-10 10 3 0 0,0 0 0 0 0,0-1 0 0 0,0 1 0 0 0,-1 0 0 0 0,0-1 0 0 0,0 1 0 0 0,-1-1-1 0 0,1 0 1 0 0,-1 1 0 0 0,0-1 0 0 0,-1 0 0 0 0,1 0 0 0 0,-1 0 0 0 0,-1 0 0 0 0,1 1 0 0 0,-1-1 0 0 0,0 0 0 0 0,0 0 0 0 0,0 1 0 0 0,-1-1 0 0 0,0 0 0 0 0,-3-6 0 0 0,-33-79 564 0 0,37 90-537 0 0,-2-15 110 0 0,-1 7-147 0 0,1 8-309 0 0,-1 10 299 0 0,1 0 1 0 0,0 0 0 0 0,1 0-1 0 0,0 0 1 0 0,0 0 0 0 0,1 1-1 0 0,0-1 1 0 0,1 0-1 0 0,0 12 1 0 0,13 94-60 0 0,-6-60 51 0 0,28 133-18 0 0,-6-43 77 0 0,-22-95 243 0 0,-7-48-270 0 0</inkml:trace>
+  <inkml:trace contextRef="#ctx0" brushRef="#br0">2 146 5188 0 0,'0'1'-33'0'0,"0"-1"-1"0"0,-1 1 1 0 0,1-1-1 0 0,0 1 1 0 0,0-1-1 0 0,0 0 1 0 0,0 1-1 0 0,-1-1 0 0 0,1 1 1 0 0,0-1-1 0 0,0 1 1 0 0,0-1-1 0 0,0 1 1 0 0,0-1-1 0 0,0 1 1 0 0,0-1-1 0 0,0 1 0 0 0,0-1 1 0 0,1 0-1 0 0,-1 1 1 0 0,0-1-1 0 0,0 1 1 0 0,0-1-1 0 0,0 1 1 0 0,1-1-1 0 0,-1 0 0 0 0,0 1 1 0 0,0-1-1 0 0,1 1 1 0 0,-1-1-1 0 0,0 0 1 0 0,1 1-1 0 0,-1-1 1 0 0,0 0-1 0 0,1 1 0 0 0,-1-1 1 0 0,1 0-1 0 0,-1 0 1 0 0,0 0-1 0 0,1 1 1 0 0,-1-1-1 0 0,1 0 1 0 0,0 0-1 0 0,31 6-432 0 0,28-8 383 0 0,-42-1 129 0 0,-1 0 0 0 0,0-1-1 0 0,0-1 1 0 0,0-1 0 0 0,20-9 0 0 0,-28 11 60 0 0,0-1 1 0 0,0 0-1 0 0,-1 0 1 0 0,1-1-1 0 0,-2 0 1 0 0,1 0-1 0 0,0-1 1 0 0,-1 0-1 0 0,-1 0 1 0 0,10-14-1 0 0,-15 20-92 0 0,0 0 1 0 0,-1 0-1 0 0,1 0 0 0 0,-1 0 1 0 0,0 0-1 0 0,1-1 0 0 0,-1 1 0 0 0,0 0 1 0 0,0 0-1 0 0,0 0 0 0 0,0-1 1 0 0,0 1-1 0 0,0 0 0 0 0,0 0 1 0 0,0-1-1 0 0,0 1 0 0 0,0 0 0 0 0,-1 0 1 0 0,1 0-1 0 0,0 0 0 0 0,-1-1 1 0 0,1 1-1 0 0,-1 0 0 0 0,0 0 0 0 0,1 0 1 0 0,-1 0-1 0 0,0 0 0 0 0,1 0 1 0 0,-1 0-1 0 0,0 0 0 0 0,0 1 1 0 0,0-1-1 0 0,0 0 0 0 0,0 0 0 0 0,0 1 1 0 0,0-1-1 0 0,0 1 0 0 0,0-1 1 0 0,0 1-1 0 0,0-1 0 0 0,-1 1 0 0 0,1-1 1 0 0,-2 1-1 0 0,-2-2 2 0 0,0 0-1 0 0,-1 1 1 0 0,1-1 0 0 0,-1 1-1 0 0,1 0 1 0 0,-1 1-1 0 0,0-1 1 0 0,1 1 0 0 0,-1 1-1 0 0,-6 0 1 0 0,-3 2-40 0 0,-1 1 1 0 0,1 0-1 0 0,-1 1 1 0 0,1 1-1 0 0,1 1 1 0 0,-1 0-1 0 0,1 1 1 0 0,-20 14-1 0 0,29-19 17 0 0,1 0 0 0 0,0 1 0 0 0,0-1 0 0 0,0 1 0 0 0,0 0-1 0 0,1 0 1 0 0,-1 1 0 0 0,1-1 0 0 0,0 0 0 0 0,0 1 0 0 0,1 0-1 0 0,0 0 1 0 0,-1 0 0 0 0,2 0 0 0 0,-1 0 0 0 0,0 0-1 0 0,1 0 1 0 0,0 0 0 0 0,0 1 0 0 0,1-1 0 0 0,0 1 0 0 0,-1-1-1 0 0,2 0 1 0 0,-1 1 0 0 0,1-1 0 0 0,0 0 0 0 0,0 1-1 0 0,0-1 1 0 0,4 10 0 0 0,-2-10 10 0 0,0 0-1 0 0,0 0 1 0 0,0-1 0 0 0,1 1-1 0 0,-1-1 1 0 0,1 0-1 0 0,0 0 1 0 0,0 0 0 0 0,1-1-1 0 0,-1 1 1 0 0,1-1 0 0 0,-1 0-1 0 0,1-1 1 0 0,0 1-1 0 0,7 2 1 0 0,12 4 18 0 0,0 0 1 0 0,26 4-1 0 0,-32-8-13 0 0,-2 0-207 0 0,1-1-1 0 0,-1 0 1 0 0,1-1-1 0 0,-1-1 0 0 0,1-1 1 0 0,0 0-1 0 0,0-1 1 0 0,0-1-1 0 0,-1 0 1 0 0,19-5-1 0 0,-11-1-846 0 0</inkml:trace>
 </inkml:ink>
 </file>
 
@@ -5862,7 +6023,7 @@
           <inkml:channelProperty channel="OE" name="resolution" value="1000" units="1/deg"/>
         </inkml:channelProperties>
       </inkml:inkSource>
-      <inkml:timestamp xml:id="ts0" timeString="2026-04-02T05:57:24.244"/>
+      <inkml:timestamp xml:id="ts0" timeString="2026-04-02T05:41:08.776"/>
     </inkml:context>
     <inkml:brush xml:id="br0">
       <inkml:brushProperty name="width" value="0.2" units="cm"/>
@@ -5870,7 +6031,7 @@
       <inkml:brushProperty name="color" value="#FFC114"/>
     </inkml:brush>
   </inkml:definitions>
-  <inkml:trace contextRef="#ctx0" brushRef="#br0">1 267 5268 0 0,'14'3'-297'0'0,"0"0"-1"0"0,0-1 1 0 0,0-1-1 0 0,0 0 1 0 0,28-3-1 0 0,70-13 155 0 0,-22-1 390 0 0,125-40 0 0 0,-32 3-131 0 0,338-51 0 0 0,-370 87-98 0 0,257 5 0 0 0,-330 13 12 0 0,13 4 830 0 0,-88-5-748 0 0,-2 0-189 0 0,0 0 0 0 0,1 0 0 0 0,-1 0 0 0 0,1 0 0 0 0,-1-1 0 0 0,0 1 0 0 0,1 0 0 0 0,-1 0 0 0 0,1-1 0 0 0,-1 1 1 0 0,0-1-1 0 0,0 1 0 0 0,1-1 0 0 0,-1 0 0 0 0,0 0 0 0 0,2-1 0 0 0</inkml:trace>
+  <inkml:trace contextRef="#ctx0" brushRef="#br0">282 34 3948 0 0,'0'0'-78'0'0,"-22"-27"778"0"0,15 24-675 0 0,4 2-21 0 0,1 0-1 0 0,-1 1 1 0 0,1-1-1 0 0,-1 1 0 0 0,1 0 1 0 0,-1 0-1 0 0,1-1 1 0 0,-1 2-1 0 0,0-1 0 0 0,1 0 1 0 0,-1 0-1 0 0,1 1 0 0 0,-1 0 1 0 0,1-1-1 0 0,-1 1 1 0 0,1 0-1 0 0,-3 1 0 0 0,-6 2-16 0 0,-1 0 0 0 0,1 0 0 0 0,0 1 0 0 0,1 0 0 0 0,-1 1 0 0 0,1 0 0 0 0,0 1 0 0 0,-16 14 0 0 0,7-3-59 0 0,1 2 0 0 0,-29 38-1 0 0,46-56 74 0 0,-1 1-1 0 0,1-1 1 0 0,0 1-1 0 0,1-1 1 0 0,-1 1-1 0 0,0 0 1 0 0,1-1 0 0 0,-1 1-1 0 0,1 0 1 0 0,0-1-1 0 0,0 1 1 0 0,0 0-1 0 0,0-1 1 0 0,0 1-1 0 0,1 0 1 0 0,-1-1-1 0 0,1 1 1 0 0,0 0-1 0 0,0-1 1 0 0,0 1-1 0 0,1 3 1 0 0,0-4 23 0 0,0 0 0 0 0,0 0 0 0 0,0-1 0 0 0,0 1 0 0 0,0 0 1 0 0,1-1-1 0 0,-1 1 0 0 0,0-1 0 0 0,1 0 0 0 0,-1 0 0 0 0,1 0 0 0 0,0 0 0 0 0,-1 0 1 0 0,1 0-1 0 0,0-1 0 0 0,-1 1 0 0 0,1-1 0 0 0,0 0 0 0 0,-1 0 0 0 0,1 0 0 0 0,0 0 1 0 0,0 0-1 0 0,-1 0 0 0 0,1-1 0 0 0,0 1 0 0 0,-1-1 0 0 0,1 0 0 0 0,0 0 1 0 0,-1 0-1 0 0,1 0 0 0 0,-1-1 0 0 0,0 1 0 0 0,1-1 0 0 0,3-2 0 0 0,4-3 83 0 0,-1 0 1 0 0,0-1-1 0 0,0 0 0 0 0,-1 0 0 0 0,0-1 0 0 0,13-17 1 0 0,57-84 1514 0 0,-77 109-1627 0 0,0 4-86 0 0,0 0 83 0 0,0 0 0 0 0,0 0 0 0 0,0 1 0 0 0,-1-1 0 0 0,1 0 1 0 0,-1 0-1 0 0,0 1 0 0 0,0 2 0 0 0,0 3 5 0 0,0-1 0 0 0,1 0-1 0 0,0 0 1 0 0,0 1 0 0 0,1-1 0 0 0,1 0 0 0 0,-1 0-1 0 0,1-1 1 0 0,0 1 0 0 0,1 0 0 0 0,0-1-1 0 0,0 0 1 0 0,0 0 0 0 0,1 0 0 0 0,0-1 0 0 0,1 1-1 0 0,8 7 1 0 0,-9-9-187 0 0,1-1 0 0 0,-1 0-1 0 0,1-1 1 0 0,0 1 0 0 0,0-1 0 0 0,0 0-1 0 0,1 0 1 0 0,-1-1 0 0 0,0 0 0 0 0,1 0 0 0 0,0-1-1 0 0,-1 0 1 0 0,1 0 0 0 0,0 0 0 0 0,0-1-1 0 0,0 0 1 0 0,-1 0 0 0 0,1-1 0 0 0,0 1-1 0 0,0-2 1 0 0,8-2 0 0 0,12-5-1095 0 0</inkml:trace>
 </inkml:ink>
 </file>
 
@@ -5894,7 +6055,7 @@
           <inkml:channelProperty channel="OE" name="resolution" value="1000" units="1/deg"/>
         </inkml:channelProperties>
       </inkml:inkSource>
-      <inkml:timestamp xml:id="ts0" timeString="2026-04-02T05:57:24.871"/>
+      <inkml:timestamp xml:id="ts0" timeString="2026-04-02T05:41:09.513"/>
     </inkml:context>
     <inkml:brush xml:id="br0">
       <inkml:brushProperty name="width" value="0.2" units="cm"/>
@@ -5902,7 +6063,7 @@
       <inkml:brushProperty name="color" value="#FFC114"/>
     </inkml:brush>
   </inkml:definitions>
-  <inkml:trace contextRef="#ctx0" brushRef="#br0">64 45 4260 0 0,'-27'-17'-209'0'0,"26"17"284"0"0,-34-28 2270 0 0,201 73-1989 0 0,-117-29-365 0 0,2 0-13 0 0,-1 2 0 0 0,72 36 1 0 0,-121-54 22 0 0,0 1-1 0 0,0-1 1 0 0,0 1 0 0 0,0 0 0 0 0,0 0 0 0 0,0-1 0 0 0,0 1 0 0 0,0 0 0 0 0,0 0 0 0 0,0 0 0 0 0,0 0-1 0 0,-1 0 1 0 0,1 0 0 0 0,0 0 0 0 0,-1 0 0 0 0,1 0 0 0 0,0 0 0 0 0,-1 0 0 0 0,0 0 0 0 0,1 1 0 0 0,-1-1 0 0 0,0 0-1 0 0,1 0 1 0 0,-1 1 0 0 0,0-1 0 0 0,0 2 0 0 0,-1-1 2 0 0,1 1-1 0 0,-1-1 1 0 0,0 1-1 0 0,0-1 1 0 0,0 0 0 0 0,0 1-1 0 0,-1-1 1 0 0,1 0-1 0 0,-1 0 1 0 0,1 0-1 0 0,-1 0 1 0 0,-2 3 0 0 0,-8 6 9 0 0,-1-1 0 0 0,0 0-1 0 0,-17 11 1 0 0,21-16-11 0 0,-57 39-528 0 0,-127 61 0 0 0,174-98-2148 0 0</inkml:trace>
+  <inkml:trace contextRef="#ctx0" brushRef="#br0">1 84 3888 0 0,'0'0'-302'0'0,"17"7"-1031"0"0,-5-2 1321 0 0,-1 1-1 0 0,1 1 0 0 0,-1-1 0 0 0,0 2 0 0 0,-1-1 0 0 0,1 1 0 0 0,-2 1 1 0 0,1 0-1 0 0,-1 1 0 0 0,-1-1 0 0 0,1 2 0 0 0,-2-1 0 0 0,12 22 1 0 0,19 27 4 0 0,-13-21 388 0 0,-24-37-174 0 0,-5 3-24 0 0,-1-1 1 0 0,0 0 0 0 0,0 0-1 0 0,0 0 1 0 0,0-1 0 0 0,0 0 0 0 0,0 0-1 0 0,-1 0 1 0 0,1-1 0 0 0,-1 0 0 0 0,1 0-1 0 0,-1 0 1 0 0,0 0 0 0 0,1-1-1 0 0,-1 0 1 0 0,-9-1 0 0 0,14 1-149 0 0,0-1 0 0 0,0 1 0 0 0,0 0 0 0 0,0 0 0 0 0,0 0 0 0 0,0 0 0 0 0,0-1 0 0 0,0 1 0 0 0,0-1 0 0 0,0 1 0 0 0,0-1 0 0 0,0 1 0 0 0,0-1 0 0 0,0 1 0 0 0,0-1 0 0 0,0 0 0 0 0,0 0 0 0 0,0 1 0 0 0,1-1 0 0 0,-1 0 0 0 0,0 0 0 0 0,1 0 0 0 0,-1 0 0 0 0,1 0 0 0 0,-1 0 0 0 0,1 0 0 0 0,-1 0 0 0 0,1 0 0 0 0,0 0 0 0 0,-1 0 0 0 0,1 0 0 0 0,0 0 0 0 0,0 0 0 0 0,0 0 0 0 0,0 0 0 0 0,0 0 0 0 0,0-1 0 0 0,0 1 0 0 0,0 0 0 0 0,1-2 0 0 0,-1-2 12 0 0,1 0-1 0 0,0 0 0 0 0,0 0 1 0 0,1 0-1 0 0,-1 0 1 0 0,1 0-1 0 0,3-6 0 0 0,7-7-13 0 0,1 1-1 0 0,0 0 1 0 0,2 1-1 0 0,-1 0 1 0 0,2 1-1 0 0,0 1 1 0 0,28-19-1 0 0,-3 6 3 0 0,0 2-1 0 0,62-26 0 0 0,-88 42-132 0 0,14-8 93 0 0</inkml:trace>
 </inkml:ink>
 </file>
 
@@ -5926,7 +6087,7 @@
           <inkml:channelProperty channel="OE" name="resolution" value="1000" units="1/deg"/>
         </inkml:channelProperties>
       </inkml:inkSource>
-      <inkml:timestamp xml:id="ts0" timeString="2026-04-02T05:57:26.491"/>
+      <inkml:timestamp xml:id="ts0" timeString="2026-04-02T05:41:10.368"/>
     </inkml:context>
     <inkml:brush xml:id="br0">
       <inkml:brushProperty name="width" value="0.2" units="cm"/>
@@ -5934,7 +6095,7 @@
       <inkml:brushProperty name="color" value="#FFC114"/>
     </inkml:brush>
   </inkml:definitions>
-  <inkml:trace contextRef="#ctx0" brushRef="#br0">345 104 3924 0 0,'0'0'-122'0'0,"-2"-24"1672"0"0,-5 16-1504 0 0,1 1 0 0 0,-2 0 1 0 0,1 0-1 0 0,-1 0 0 0 0,0 1 1 0 0,0 0-1 0 0,-1 1 0 0 0,1 0 0 0 0,-1 0 1 0 0,0 1-1 0 0,-18-5 0 0 0,21 7-55 0 0,0 1 0 0 0,0 1 0 0 0,0-1 0 0 0,0 1 0 0 0,0 0 0 0 0,-1 1 0 0 0,1-1 0 0 0,0 1 0 0 0,0 1 0 0 0,0-1-1 0 0,0 1 1 0 0,0 0 0 0 0,1 0 0 0 0,-1 0 0 0 0,0 1 0 0 0,1 0 0 0 0,0 0 0 0 0,-9 7 0 0 0,1 0-23 0 0,1 0 0 0 0,0 1 0 0 0,1 0 1 0 0,0 1-1 0 0,-18 23 0 0 0,27-32 27 0 0,0 1 1 0 0,0-1 0 0 0,-1 0-1 0 0,2 1 1 0 0,-1-1-1 0 0,0 1 1 0 0,1-1-1 0 0,0 1 1 0 0,0 0-1 0 0,0 0 1 0 0,0 0-1 0 0,0-1 1 0 0,1 1 0 0 0,0 0-1 0 0,-1 0 1 0 0,2 0-1 0 0,-1 0 1 0 0,0 0-1 0 0,1 0 1 0 0,0 0-1 0 0,0-1 1 0 0,0 1 0 0 0,0 0-1 0 0,0 0 1 0 0,1-1-1 0 0,0 1 1 0 0,0-1-1 0 0,0 0 1 0 0,0 1-1 0 0,0-1 1 0 0,1 0 0 0 0,-1 0-1 0 0,1 0 1 0 0,0-1-1 0 0,0 1 1 0 0,0 0-1 0 0,6 3 1 0 0,1 0 26 0 0,0 1 1 0 0,0-2-1 0 0,1 1 1 0 0,0-2-1 0 0,0 1 1 0 0,0-1-1 0 0,1-1 1 0 0,-1 0-1 0 0,1-1 1 0 0,-1 0-1 0 0,18 0 1 0 0,-25-1 15 0 0,0-2 0 0 0,0 1 0 0 0,0 0 0 0 0,0-1 0 0 0,0 0 1 0 0,0 0-1 0 0,0 0 0 0 0,0 0 0 0 0,0-1 0 0 0,-1 1 0 0 0,1-1 1 0 0,-1 0-1 0 0,1 0 0 0 0,-1-1 0 0 0,0 1 0 0 0,0-1 0 0 0,0 1 1 0 0,0-1-1 0 0,0 0 0 0 0,0 0 0 0 0,-1 0 0 0 0,4-7 0 0 0,1-2 247 0 0,-1-1 0 0 0,-1 0 0 0 0,0 0 0 0 0,-1 0 0 0 0,3-15 0 0 0,-1 5 381 0 0,-6 22-534 0 0,3-7 44 0 0,-2 8-203 0 0,-1-1-1 0 0,1 1 1 0 0,-1 0-1 0 0,1-1 1 0 0,-1 1-1 0 0,0-1 1 0 0,1 1-1 0 0,-1-1 0 0 0,1 1 1 0 0,-1 0-1 0 0,0-1 1 0 0,0 1-1 0 0,1-1 1 0 0,-1 0-1 0 0,0 1 1 0 0,0-1-1 0 0,0 1 1 0 0,1-1-1 0 0,-1 1 1 0 0,0-1-1 0 0,0 0 1 0 0,0 1-1 0 0,0-1 1 0 0,0 1-1 0 0,0-1 1 0 0,0 1-1 0 0,-1-2 0 0 0,29 125-390 0 0,15 83 226 0 0,-37-157 158 0 0,9 53 182 0 0,-14-100-66 0 0,12-30-4009 0 0,-2 9 1689 0 0</inkml:trace>
+  <inkml:trace contextRef="#ctx0" brushRef="#br0">20 70 5064 0 0,'-16'-68'1377'0'0,"15"67"-1343"0"0,0 6-394 0 0,0 6 335 0 0,0 1 1 0 0,1-1-1 0 0,0 1 0 0 0,1-1 0 0 0,1 1 0 0 0,-1-1 1 0 0,2 1-1 0 0,3 11 0 0 0,38 99-77 0 0,-24-70 77 0 0,41 85-1 0 0,-38-89 61 0 0,33 98 0 0 0,-34-92 4806 0 0,-22-61-4583 0 0,-2-18 32 0 0,0 10-165 0 0,1 1 0 0 0,0-1 0 0 0,1 0 0 0 0,1 1 0 0 0,3-21 0 0 0,-3 31-150 0 0,0 1 0 0 0,0-1 0 0 0,0 1 1 0 0,0-1-1 0 0,1 1 0 0 0,0 0 0 0 0,-1 0 0 0 0,1 0 1 0 0,0 0-1 0 0,1 0 0 0 0,-1 0 0 0 0,0 0 0 0 0,1 1 0 0 0,0-1 1 0 0,-1 1-1 0 0,1 0 0 0 0,0 0 0 0 0,0 0 0 0 0,0 0 1 0 0,1 0-1 0 0,-1 1 0 0 0,0-1 0 0 0,1 1 0 0 0,-1 0 0 0 0,0 0 1 0 0,1 0-1 0 0,7 0 0 0 0,31-4-134 0 0,0 3-1 0 0,0 2 1 0 0,1 1-1 0 0,58 10 1 0 0,-34 1-217 0 0,128 39 1 0 0,-188-48 323 0 0,46 17-349 0 0,-51-19 379 0 0,0 0-1 0 0,0 0 1 0 0,-1 0 0 0 0,1 0-1 0 0,0 0 1 0 0,-1 0-1 0 0,1 0 1 0 0,-1 1 0 0 0,1-1-1 0 0,-1 0 1 0 0,1 1 0 0 0,-1-1-1 0 0,0 1 1 0 0,0 0-1 0 0,0-1 1 0 0,0 1 0 0 0,0 0-1 0 0,0 0 1 0 0,0-1 0 0 0,-1 1-1 0 0,1 0 1 0 0,0 2-1 0 0,-3 0 3 0 0,0 0-1 0 0,-1 0 0 0 0,1-1 0 0 0,-1 1 0 0 0,0-1 1 0 0,0 0-1 0 0,0 0 0 0 0,0 0 0 0 0,0 0 0 0 0,-1-1 1 0 0,0 1-1 0 0,1-1 0 0 0,-6 3 0 0 0,-10 5 111 0 0,1-1 0 0 0,-2-1 0 0 0,1 0 0 0 0,-1-1 0 0 0,0-2 0 0 0,0 0 0 0 0,-1-1 0 0 0,-28 2 0 0 0,46-6-46 0 0,1 0 0 0 0,-1 0-1 0 0,0 0 1 0 0,1 0 0 0 0,-1-1-1 0 0,0 1 1 0 0,1-1 0 0 0,-1 0 0 0 0,1 0-1 0 0,-1 0 1 0 0,1 0 0 0 0,-1 0-1 0 0,-3-3 1 0 0,5 3-68 0 0,0 0-1 0 0,0 0 0 0 0,0 0 1 0 0,0 0-1 0 0,0-1 0 0 0,0 1 1 0 0,0 0-1 0 0,1 0 0 0 0,-1-1 1 0 0,0 1-1 0 0,1-1 0 0 0,-1 1 1 0 0,1-1-1 0 0,0 1 1 0 0,-1-1-1 0 0,1 1 0 0 0,0-1 1 0 0,0-1-1 0 0,0-2-404 0 0,1-1 1 0 0,0 1-1 0 0,0-1 0 0 0,1 1 1 0 0,0-1-1 0 0,0 1 0 0 0,0 0 0 0 0,0 0 1 0 0,1 0-1 0 0,0 0 0 0 0,4-6 1 0 0,9-10-1972 0 0</inkml:trace>
 </inkml:ink>
 </file>
 
@@ -5958,7 +6119,7 @@
           <inkml:channelProperty channel="OE" name="resolution" value="1000" units="1/deg"/>
         </inkml:channelProperties>
       </inkml:inkSource>
-      <inkml:timestamp xml:id="ts0" timeString="2026-04-02T05:57:27.087"/>
+      <inkml:timestamp xml:id="ts0" timeString="2026-04-02T05:41:10.883"/>
     </inkml:context>
     <inkml:brush xml:id="br0">
       <inkml:brushProperty name="width" value="0.2" units="cm"/>
@@ -5966,7 +6127,7 @@
       <inkml:brushProperty name="color" value="#FFC114"/>
     </inkml:brush>
   </inkml:definitions>
-  <inkml:trace contextRef="#ctx0" brushRef="#br0">248 123 5400 0 0,'-1'-1'-53'0'0,"-1"0"-1"0"0,1 0 1 0 0,0 0-1 0 0,0-1 1 0 0,-1 1-1 0 0,1 0 0 0 0,0-1 1 0 0,0 1-1 0 0,1-1 1 0 0,-1 1-1 0 0,0-1 0 0 0,0 1 1 0 0,1-1-1 0 0,-1 1 1 0 0,1-1-1 0 0,-1 0 1 0 0,1 1-1 0 0,0-1 0 0 0,0 0 1 0 0,0 0-1 0 0,0 1 1 0 0,0-3-1 0 0,16-31-123 0 0,0 4 338 0 0,-15 29-156 0 0,1 0-1 0 0,0 1 1 0 0,-1-1-1 0 0,1 1 0 0 0,0-1 1 0 0,0 1-1 0 0,0-1 1 0 0,0 1-1 0 0,0 0 0 0 0,0 0 1 0 0,1 0-1 0 0,-1 0 1 0 0,0 1-1 0 0,0-1 0 0 0,1 0 1 0 0,-1 1-1 0 0,1 0 0 0 0,-1-1 1 0 0,0 1-1 0 0,1 0 1 0 0,3 1-1 0 0,7-2-5 0 0,-1 1-1 0 0,0 1 1 0 0,1 0-1 0 0,-1 1 1 0 0,0 0-1 0 0,16 5 1 0 0,-21-5-5 0 0,0 1-1 0 0,0-1 1 0 0,-1 1 0 0 0,1 1 0 0 0,0-1 0 0 0,-1 1 0 0 0,0 0 0 0 0,0 1-1 0 0,0-1 1 0 0,-1 1 0 0 0,9 9 0 0 0,-13-11 6 0 0,1-1 1 0 0,-1 1-1 0 0,0 0 0 0 0,1 0 0 0 0,-1-1 1 0 0,-1 1-1 0 0,1 0 0 0 0,0 0 0 0 0,-1 0 1 0 0,1 0-1 0 0,-1 0 0 0 0,0 0 0 0 0,0 0 1 0 0,0 0-1 0 0,-1 0 0 0 0,1 0 0 0 0,-1 0 1 0 0,1 0-1 0 0,-1 0 0 0 0,0 0 1 0 0,0 0-1 0 0,0-1 0 0 0,-1 1 0 0 0,1 0 1 0 0,-1-1-1 0 0,-1 4 0 0 0,-6 8 7 0 0,-1-1 1 0 0,0 0-1 0 0,-17 16 0 0 0,26-28-7 0 0,-55 51 8 0 0,-2-3-1 0 0,-119 78 0 0 0,33-25 8 0 0,139-99-6 0 0,6-1 29 0 0,9-2 137 0 0,369-77 67 0 0,-229 42-319 0 0,130-31-1936 0 0,-216 51 1257 0 0</inkml:trace>
+  <inkml:trace contextRef="#ctx0" brushRef="#br0">631 0 5573 0 0,'-3'2'-145'0'0,"0"0"1"0"0,-1 0 0 0 0,1 1-1 0 0,0-1 1 0 0,1 0 0 0 0,-1 1 0 0 0,0 0-1 0 0,1 0 1 0 0,-1 0 0 0 0,1 0-1 0 0,0 0 1 0 0,0 0 0 0 0,0 0 0 0 0,0 1-1 0 0,-1 5 1 0 0,3-8 136 0 0,-1 0 1 0 0,1 0-1 0 0,0 1 0 0 0,0-1 1 0 0,0 0-1 0 0,0 0 1 0 0,0 0-1 0 0,0 1 0 0 0,1-1 1 0 0,-1 0-1 0 0,0 0 0 0 0,1 0 1 0 0,-1 0-1 0 0,0 1 1 0 0,1-1-1 0 0,0 0 0 0 0,-1 0 1 0 0,1 0-1 0 0,1 1 0 0 0,-1 0 7 0 0,1 0 0 0 0,0-1 0 0 0,0 1-1 0 0,1-1 1 0 0,-1 1 0 0 0,0-1 0 0 0,0 0-1 0 0,1 0 1 0 0,-1 0 0 0 0,0 0-1 0 0,1 0 1 0 0,3 0 0 0 0,15 3 34 0 0,0-1-1 0 0,1-1 1 0 0,-1 0 0 0 0,41-4-1 0 0,87-17 322 0 0,-97 11-62 0 0,1-2 447 0 0,-35 6 527 0 0,0 0 0 0 0,35-1 0 0 0,-58 10-1101 0 0,-26 21-20 0 0,-1-1-1 0 0,-40 23 1 0 0,-3 3-28 0 0,-648 445-861 0 0,579-415-3627 0 0,109-65 2185 0 0</inkml:trace>
 </inkml:ink>
 </file>
 
@@ -5990,7 +6151,7 @@
           <inkml:channelProperty channel="OE" name="resolution" value="1000" units="1/deg"/>
         </inkml:channelProperties>
       </inkml:inkSource>
-      <inkml:timestamp xml:id="ts0" timeString="2026-04-02T05:57:28.603"/>
+      <inkml:timestamp xml:id="ts0" timeString="2026-04-02T05:57:09.388"/>
     </inkml:context>
     <inkml:brush xml:id="br0">
       <inkml:brushProperty name="width" value="0.2" units="cm"/>
@@ -5998,7 +6159,7 @@
       <inkml:brushProperty name="color" value="#FFC114"/>
     </inkml:brush>
   </inkml:definitions>
-  <inkml:trace contextRef="#ctx0" brushRef="#br0">1 0 3608 0 0,'98'72'2982'0'0,"-24"-18"-3031"0"0,19 9 60 0 0,3-4 1 0 0,2-5-1 0 0,2-3 0 0 0,3-5 0 0 0,148 45 1 0 0,248 61 42 0 0,-402-128-37 0 0,136 17 1 0 0,103-7 38 0 0,-292-30-49 0 0,156 5 44 0 0,340-29 0 0 0,-520 18-49 0 0,317-29 38 0 0,-301 29-41 0 0,46-8 18 0 0,-57 6-16 0 0,-22 3-6 0 0,16-2-7 0 0,-15 3 21 0 0,18-7-321 0 0,-12-10-2670 0 0</inkml:trace>
+  <inkml:trace contextRef="#ctx0" brushRef="#br0">1 474 4956 0 0,'0'0'3378'0'0,"4"-3"-3351"0"0,19-16 5 0 0,1 1 0 0 0,1 1 1 0 0,1 1-1 0 0,48-22 1 0 0,-8 4-6 0 0,50-22-22 0 0,2 6 0 0 0,177-52 0 0 0,-196 71-66 0 0,3 3 1 0 0,0 5 0 0 0,171-15-1 0 0,-109 42-385 0 0,-161-4 477 0 0,33 3 851 0 0,-24-1-787 0 0</inkml:trace>
 </inkml:ink>
 </file>
 
@@ -6022,7 +6183,7 @@
           <inkml:channelProperty channel="OE" name="resolution" value="1000" units="1/deg"/>
         </inkml:channelProperties>
       </inkml:inkSource>
-      <inkml:timestamp xml:id="ts0" timeString="2026-04-02T05:57:29.242"/>
+      <inkml:timestamp xml:id="ts0" timeString="2026-04-02T05:57:10.064"/>
     </inkml:context>
     <inkml:brush xml:id="br0">
       <inkml:brushProperty name="width" value="0.2" units="cm"/>
@@ -6030,7 +6191,7 @@
       <inkml:brushProperty name="color" value="#FFC114"/>
     </inkml:brush>
   </inkml:definitions>
-  <inkml:trace contextRef="#ctx0" brushRef="#br0">9 11 4752 0 0,'0'0'-120'0'0,"-9"-7"-33"0"0,9 7 169 0 0,1 0 0 0 0,-1 0 0 0 0,0 0 0 0 0,0 0 0 0 0,0 0-1 0 0,0 0 1 0 0,0 0 0 0 0,0-1 0 0 0,0 1 0 0 0,1 0 0 0 0,-1 0 0 0 0,0 0 0 0 0,0 0 0 0 0,0 0-1 0 0,0 0 1 0 0,0 0 0 0 0,0 0 0 0 0,0 0 0 0 0,0 0 0 0 0,0 0 0 0 0,0-1 0 0 0,0 1-1 0 0,0 0 1 0 0,1 0 0 0 0,-1 0 0 0 0,0 0 0 0 0,0 0 0 0 0,0 0 0 0 0,0 0 0 0 0,0-1 0 0 0,0 1-1 0 0,0 0 1 0 0,0 0 0 0 0,0 0 0 0 0,43 14-15 0 0,20 6-12 0 0,0 3 1 0 0,-1 2 0 0 0,106 61-1 0 0,-166-85 16 0 0,1 1-1 0 0,-1-1 1 0 0,1 1-1 0 0,-1 0 1 0 0,1 0-1 0 0,-1 0 0 0 0,0 0 1 0 0,0 0-1 0 0,0 1 1 0 0,0-1-1 0 0,-1 1 1 0 0,1-1-1 0 0,-1 1 0 0 0,1 0 1 0 0,-1-1-1 0 0,0 1 1 0 0,0 0-1 0 0,0 0 1 0 0,-1 0-1 0 0,1 0 0 0 0,0 0 1 0 0,-1 0-1 0 0,0 0 1 0 0,0 0-1 0 0,0 0 0 0 0,0 0 1 0 0,0 0-1 0 0,-1 3 1 0 0,-2 1 18 0 0,1 0 0 0 0,-1 0 0 0 0,0 0 0 0 0,-1-1 0 0 0,0 1 0 0 0,0-1 0 0 0,0 0 0 0 0,0 0 0 0 0,-1-1 0 0 0,-10 10 0 0 0,-58 52 205 0 0,40-38-2988 0 0</inkml:trace>
+  <inkml:trace contextRef="#ctx0" brushRef="#br0">80 28 5268 0 0,'-70'-24'1249'0'0,"68"24"-869"0"0,2-1-369 0 0,0 1 0 0 0,0 0 0 0 0,0 0 1 0 0,0 0-1 0 0,0 0 0 0 0,0-1 0 0 0,0 1 1 0 0,0 0-1 0 0,0 0 0 0 0,-1 0 0 0 0,1 0 1 0 0,0 0-1 0 0,0-1 0 0 0,0 1 0 0 0,0 0 0 0 0,0 0 1 0 0,-1 0-1 0 0,1 0 0 0 0,0 0 0 0 0,0 0 1 0 0,0 0-1 0 0,0 0 0 0 0,0 0 0 0 0,-1 0 1 0 0,1 0-1 0 0,0 0 0 0 0,0-1 0 0 0,0 1 1 0 0,-1 0-1 0 0,1 0 0 0 0,0 0 0 0 0,0 0 1 0 0,0 1-1 0 0,0-1 0 0 0,-1 0 0 0 0,1 0 1 0 0,0 0-1 0 0,0 0 0 0 0,0 0 0 0 0,0 0 1 0 0,-1 0-1 0 0,1 0 0 0 0,0 0 0 0 0,0 0 0 0 0,0 0 1 0 0,0 0-1 0 0,0 1 0 0 0,-1-1 0 0 0,1 0 1 0 0,0 0-1 0 0,0 0 0 0 0,0 0 0 0 0,0 0 1 0 0,0 1-1 0 0,0-1 0 0 0,0 0 0 0 0,13 15-23 0 0,1-1-1 0 0,1-1 0 0 0,0 0 1 0 0,1-2-1 0 0,0 1 0 0 0,1-2 0 0 0,25 12 1 0 0,56 39 9 0 0,-91-56 6 0 0,0 0 1 0 0,-1 0 0 0 0,0 1 0 0 0,0-1 0 0 0,-1 1 0 0 0,1 1-1 0 0,-1-1 1 0 0,6 11 0 0 0,-10-14 7 0 0,0 0-1 0 0,0 0 1 0 0,0 0 0 0 0,-1 0 0 0 0,1 0-1 0 0,-1 0 1 0 0,1 1 0 0 0,-1-1 0 0 0,0 0-1 0 0,0 0 1 0 0,-1 1 0 0 0,1-1 0 0 0,0 0-1 0 0,-1 0 1 0 0,0 0 0 0 0,0 1 0 0 0,0-1-1 0 0,0 0 1 0 0,-1 0 0 0 0,1-1-1 0 0,-1 1 1 0 0,0 0 0 0 0,-3 5 0 0 0,-17 17 63 0 0,0 0 1 0 0,-1-1 0 0 0,-2-1 0 0 0,0-2-1 0 0,-1 0 1 0 0,-29 16 0 0 0,-8 9 272 0 0,47-36-199 0 0</inkml:trace>
 </inkml:ink>
 </file>
 
@@ -6054,7 +6215,7 @@
           <inkml:channelProperty channel="OE" name="resolution" value="1000" units="1/deg"/>
         </inkml:channelProperties>
       </inkml:inkSource>
-      <inkml:timestamp xml:id="ts0" timeString="2026-04-02T05:57:29.864"/>
+      <inkml:timestamp xml:id="ts0" timeString="2026-04-02T05:57:12.053"/>
     </inkml:context>
     <inkml:brush xml:id="br0">
       <inkml:brushProperty name="width" value="0.2" units="cm"/>
@@ -6062,7 +6223,7 @@
       <inkml:brushProperty name="color" value="#FFC114"/>
     </inkml:brush>
   </inkml:definitions>
-  <inkml:trace contextRef="#ctx0" brushRef="#br0">0 34 3956 0 0,'0'-33'3204'0'0,"6"92"-2769"0"0,21 49-391 0 0,37 74-217 0 0,-63-179 180 0 0,4 12-206 0 0,-1 0-1 0 0,0 0 0 0 0,-1 0 0 0 0,1 19 1 0 0,-3-36-23 0 0,0 0 0 0 0,0 0 0 0 0,0 0 0 0 0,1 0 0 0 0,-1 0 0 0 0,0 1 0 0 0,1-1 0 0 0,-1 0 0 0 0,1 1 0 0 0,0-1 0 0 0,2 0 0 0 0,0-3-264 0 0,14-18-983 0 0</inkml:trace>
+  <inkml:trace contextRef="#ctx0" brushRef="#br0">74 52 6165 0 0,'1'-5'116'0'0,"-1"1"0"0"0,1-1 0 0 0,-1 1 0 0 0,1-1 0 0 0,-1 0 0 0 0,0 1 0 0 0,-1-1 0 0 0,-1-8 0 0 0,2 11 180 0 0,-4 6-262 0 0,-3 4-33 0 0,0 0 0 0 0,0 0-1 0 0,1 1 1 0 0,0-1 0 0 0,1 2 0 0 0,0-1 0 0 0,0 0 0 0 0,1 1 0 0 0,0 0 0 0 0,1 0 0 0 0,0 0 0 0 0,1 1 0 0 0,0-1 0 0 0,-1 19-1 0 0,3-23 0 0 0,0 0-1 0 0,0 0 1 0 0,1 0-1 0 0,0 0 1 0 0,0 0-1 0 0,0 0 1 0 0,1-1-1 0 0,0 1 1 0 0,0 0-1 0 0,0-1 1 0 0,1 0-1 0 0,-1 1 1 0 0,1-1-1 0 0,1 0 1 0 0,-1 0-1 0 0,1-1 1 0 0,0 1-1 0 0,0-1 1 0 0,0 0-1 0 0,1 0 1 0 0,-1 0-1 0 0,1 0 1 0 0,0-1-1 0 0,0 0 1 0 0,0 0-1 0 0,0 0 1 0 0,12 3-1 0 0,-4-1 10 0 0,1-1 0 0 0,0 0-1 0 0,0-1 1 0 0,0-1 0 0 0,0-1 0 0 0,0 0 0 0 0,0 0-1 0 0,1-1 1 0 0,-1-1 0 0 0,24-5 0 0 0,-31 5 11 0 0,0 0 1 0 0,1-1 0 0 0,-1-1 0 0 0,0 1-1 0 0,0-1 1 0 0,-1 0 0 0 0,1-1 0 0 0,-1 1-1 0 0,1-1 1 0 0,-1-1 0 0 0,0 1-1 0 0,-1-1 1 0 0,1 0 0 0 0,-1 0 0 0 0,0-1-1 0 0,0 0 1 0 0,0 0 0 0 0,-1 0 0 0 0,0 0-1 0 0,-1-1 1 0 0,6-10 0 0 0,-7 8 171 0 0,-1 0-1 0 0,0 1 1 0 0,0-1 0 0 0,-1 0 0 0 0,0 1-1 0 0,-1-1 1 0 0,-2-15 0 0 0,2 23-97 0 0,4-17 282 0 0,-1 8-354 0 0,-3 66-852 0 0,1-3 701 0 0,3 1 0 0 0,2-1 0 0 0,3 0 0 0 0,25 93 0 0 0,-29-127 138 0 0,-1 0 1 0 0,-1 0 0 0 0,0 0-1 0 0,-2 33 1 0 0,0-31 47 0 0,0-19-83 0 0</inkml:trace>
 </inkml:ink>
 </file>
 
@@ -6118,7 +6279,7 @@
           <inkml:channelProperty channel="OE" name="resolution" value="1000" units="1/deg"/>
         </inkml:channelProperties>
       </inkml:inkSource>
-      <inkml:timestamp xml:id="ts0" timeString="2026-04-02T05:57:30.644"/>
+      <inkml:timestamp xml:id="ts0" timeString="2026-04-02T05:57:13.068"/>
     </inkml:context>
     <inkml:brush xml:id="br0">
       <inkml:brushProperty name="width" value="0.2" units="cm"/>
@@ -6126,7 +6287,7 @@
       <inkml:brushProperty name="color" value="#FFC114"/>
     </inkml:brush>
   </inkml:definitions>
-  <inkml:trace contextRef="#ctx0" brushRef="#br0">16 71 4608 0 0,'0'0'-8'0'0,"-12"-18"1087"0"0,11 17-1050 0 0,1 1 0 0 0,-1-1 0 0 0,1 0 0 0 0,0 1 0 0 0,0-1 0 0 0,-1 0 0 0 0,1 1 0 0 0,0-1 0 0 0,0 0 0 0 0,0 0 0 0 0,0 1 0 0 0,-1-1 0 0 0,1 0 0 0 0,0 1 0 0 0,0-1 1 0 0,1 0-1 0 0,-1 0 0 0 0,0 1 0 0 0,0-1 0 0 0,0 0 0 0 0,0 1 0 0 0,1-1 0 0 0,-1 0 0 0 0,0 1 0 0 0,1-1 0 0 0,-1 0 0 0 0,0 1 0 0 0,1-1 0 0 0,-1 0 0 0 0,1 1 0 0 0,0-2 0 0 0,20-13 42 0 0,-19 15-57 0 0,1-1 4 0 0,13-3-11 0 0,2 0-21 0 0,1 2 1 0 0,0 0 0 0 0,-1 0-1 0 0,1 2 1 0 0,0 1-1 0 0,0 0 1 0 0,0 1-1 0 0,0 1 1 0 0,-1 1-1 0 0,23 7 1 0 0,-35-9-10 0 0,1 0-1 0 0,0 0 1 0 0,-1 0-1 0 0,1 1 1 0 0,-1 0-1 0 0,0 1 1 0 0,0-1-1 0 0,0 1 1 0 0,0 0 0 0 0,-1 1-1 0 0,1-1 1 0 0,-1 1-1 0 0,0 0 1 0 0,4 7-1 0 0,-7-9 17 0 0,0 1 1 0 0,0 0-1 0 0,-1-1 0 0 0,1 1 0 0 0,-1 0 0 0 0,0-1 0 0 0,0 1 0 0 0,-1 0 0 0 0,1 0 0 0 0,-1 0 0 0 0,0 0 0 0 0,0 0 0 0 0,0 0 0 0 0,0 0 0 0 0,-1 0 0 0 0,0 0 1 0 0,1-1-1 0 0,-1 1 0 0 0,-1 0 0 0 0,1 0 0 0 0,-1-1 0 0 0,1 1 0 0 0,-1-1 0 0 0,0 1 0 0 0,0-1 0 0 0,-5 6 0 0 0,-20 26 61 0 0,-1-1 1 0 0,-3-2-1 0 0,-37 33 0 0 0,67-64-12 0 0,484-25 1009 0 0,-403 17 149 0 0,-80 6-1404 0 0,1 1-1 0 0,24-29-6071 0 0</inkml:trace>
+  <inkml:trace contextRef="#ctx0" brushRef="#br0">303 107 6189 0 0,'-4'-34'-49'0'0,"0"31"55"0"0,0 1 0 0 0,0-1 1 0 0,-1 1-1 0 0,1 1 0 0 0,0-1 0 0 0,-1 0 0 0 0,1 1 1 0 0,-1 0-1 0 0,0 0 0 0 0,1 0 0 0 0,-1 1 0 0 0,0 0 1 0 0,0 0-1 0 0,-6 0 0 0 0,-70 10 6 0 0,72-9-17 0 0,1 1 1 0 0,0 0 0 0 0,0 1-1 0 0,-1 0 1 0 0,1 0 0 0 0,1 0-1 0 0,-1 1 1 0 0,0 0 0 0 0,1 1-1 0 0,0 0 1 0 0,0 0 0 0 0,0 0-1 0 0,1 1 1 0 0,0 0 0 0 0,0 0 0 0 0,-8 12-1 0 0,13-16 5 0 0,-1 0-1 0 0,1 0 1 0 0,0 0-1 0 0,0 0 0 0 0,0 0 1 0 0,0 0-1 0 0,1 1 1 0 0,-1-1-1 0 0,1 0 1 0 0,-1 1-1 0 0,1-1 1 0 0,0 0-1 0 0,0 1 1 0 0,0-1-1 0 0,0 0 0 0 0,0 1 1 0 0,0-1-1 0 0,1 1 1 0 0,-1-1-1 0 0,1 0 1 0 0,-1 0-1 0 0,1 1 1 0 0,0-1-1 0 0,0 0 1 0 0,0 0-1 0 0,0 0 0 0 0,1 0 1 0 0,-1 0-1 0 0,1 0 1 0 0,2 3-1 0 0,1 0 0 0 0,-1 0-1 0 0,1 0 0 0 0,1-1 1 0 0,-1 1-1 0 0,1-1 0 0 0,0 0 1 0 0,0-1-1 0 0,9 5 0 0 0,28 8 11 0 0,48 10-1 0 0,-61-20-2 0 0,-1 3 0 0 0,1 0-1 0 0,-2 2 1 0 0,46 24 0 0 0,-48-18-13 0 0,43 22 9 0 0,-69-39 7 0 0,1 1 0 0 0,0-1 0 0 0,0 0 0 0 0,0 0 0 0 0,-1 1 0 0 0,1-1 0 0 0,0 1 0 0 0,-1-1 0 0 0,1 1 0 0 0,0-1 0 0 0,-1 1 0 0 0,1-1 0 0 0,0 1 0 0 0,-1 0 0 0 0,1-1 0 0 0,-1 1 0 0 0,1 0 0 0 0,-1-1 1 0 0,0 1-1 0 0,1 0 0 0 0,-1 0 0 0 0,0-1 0 0 0,1 1 0 0 0,-1 0 0 0 0,0 0 0 0 0,0 0 0 0 0,0-1 0 0 0,1 2 0 0 0,-2 0 5 0 0,1-1 0 0 0,-1 1 0 0 0,1-1 0 0 0,-1 0 1 0 0,0 1-1 0 0,1-1 0 0 0,-1 0 0 0 0,0 1 0 0 0,0-1 0 0 0,0 0 0 0 0,0 0 1 0 0,0 0-1 0 0,0 0 0 0 0,-2 1 0 0 0,-45 29 273 0 0,46-30-270 0 0,-15 9 244 0 0,-1-2 0 0 0,-1 0 1 0 0,1-1-1 0 0,-1 0 0 0 0,0-2 0 0 0,-1 0 0 0 0,1-1 1 0 0,-23 1-1 0 0,40-5-229 0 0,0 0 1 0 0,0 0-1 0 0,1 0 0 0 0,-1 0 1 0 0,0 0-1 0 0,0 0 1 0 0,1 0-1 0 0,-1-1 0 0 0,0 1 1 0 0,1-1-1 0 0,-1 1 1 0 0,0-1-1 0 0,1 0 0 0 0,-1 0 1 0 0,1 0-1 0 0,-1 0 1 0 0,1 0-1 0 0,0 0 0 0 0,-1 0 1 0 0,1 0-1 0 0,0 0 1 0 0,0 0-1 0 0,0-1 0 0 0,-1 1 1 0 0,1-1-1 0 0,1 1 1 0 0,-1-1-1 0 0,0 1 0 0 0,0-1 1 0 0,1 1-1 0 0,-1-1 1 0 0,0 0-1 0 0,1 1 0 0 0,0-1 1 0 0,-1 0-1 0 0,1 1 1 0 0,0-1-1 0 0,0 0 0 0 0,0 0 1 0 0,0 1-1 0 0,0-1 1 0 0,0 0-1 0 0,1 1 0 0 0,-1-1 1 0 0,1 0-1 0 0,0-2 1 0 0,1-5-17 0 0,1-1-1 0 0,0 1 1 0 0,1 0 0 0 0,0-1 0 0 0,0 1 0 0 0,8-11 0 0 0,17-19-37 0 0,66-68-1 0 0,10-13 122 0 0,-104 118-84 0 0,1 0 1 0 0,0 0-1 0 0,-1-1 1 0 0,1 1-1 0 0,-1 0 0 0 0,0-1 1 0 0,0 1-1 0 0,0-1 1 0 0,0 1-1 0 0,0-1 1 0 0,0 1-1 0 0,-1-1 1 0 0,1 0-1 0 0,-1 1 1 0 0,0-1-1 0 0,1 0 1 0 0,-1 1-1 0 0,-1-1 1 0 0,1 0-1 0 0,0 1 0 0 0,-1-1 1 0 0,1 0-1 0 0,-1 1 1 0 0,-2-6-1 0 0,1 5-5 0 0,0 0-1 0 0,-1 0 1 0 0,1 0-1 0 0,-1 0 1 0 0,0 0 0 0 0,0 1-1 0 0,0-1 1 0 0,0 1-1 0 0,0 0 1 0 0,-1 0-1 0 0,1 0 1 0 0,-1 0-1 0 0,1 1 1 0 0,-1-1-1 0 0,0 1 1 0 0,-5-1-1 0 0,-65-17 198 0 0,6 2-1924 0 0,24 5-4026 0 0,31 8 3258 0 0</inkml:trace>
 </inkml:ink>
 </file>
 
@@ -6150,7 +6311,7 @@
           <inkml:channelProperty channel="OE" name="resolution" value="1000" units="1/deg"/>
         </inkml:channelProperties>
       </inkml:inkSource>
-      <inkml:timestamp xml:id="ts0" timeString="2026-04-02T05:57:31.443"/>
+      <inkml:timestamp xml:id="ts0" timeString="2026-04-02T05:57:17.668"/>
     </inkml:context>
     <inkml:brush xml:id="br0">
       <inkml:brushProperty name="width" value="0.2" units="cm"/>
@@ -6158,7 +6319,7 @@
       <inkml:brushProperty name="color" value="#FFC114"/>
     </inkml:brush>
   </inkml:definitions>
-  <inkml:trace contextRef="#ctx0" brushRef="#br0">306 0 4952 0 0,'0'0'-190'0'0,"-7"0"-263"0"0,-18 1 424 0 0,1 1 0 0 0,0 1 0 0 0,-1 1 0 0 0,-25 8-1 0 0,37-8 8 0 0,0 0 0 0 0,0 0 0 0 0,1 2-1 0 0,0-1 1 0 0,0 1 0 0 0,0 1 0 0 0,1 0 0 0 0,0 1-1 0 0,-16 14 1 0 0,25-20 18 0 0,1-1-1 0 0,0 0 1 0 0,0 0 0 0 0,0 0-1 0 0,0 1 1 0 0,0-1 0 0 0,0 1 0 0 0,0-1-1 0 0,0 1 1 0 0,1-1 0 0 0,-1 1-1 0 0,0-1 1 0 0,1 1 0 0 0,-1 0-1 0 0,1-1 1 0 0,0 1 0 0 0,0-1 0 0 0,0 1-1 0 0,-1 0 1 0 0,1 0 0 0 0,1-1-1 0 0,-1 1 1 0 0,0 0 0 0 0,0-1-1 0 0,1 3 1 0 0,1-1 3 0 0,-1 0 1 0 0,1 0-1 0 0,0 0 1 0 0,0-1-1 0 0,0 1 1 0 0,0-1-1 0 0,1 1 0 0 0,-1-1 1 0 0,1 0-1 0 0,-1 0 1 0 0,1 0-1 0 0,3 2 0 0 0,10 5 9 0 0,1-1 0 0 0,0 0-1 0 0,27 8 1 0 0,-39-15-16 0 0,44 15 8 0 0,-15-7-3 0 0,0 2 0 0 0,-1 2 1 0 0,-1 0-1 0 0,0 3 0 0 0,47 29 0 0 0,-41-9 278 0 0,-36-34-255 0 0,-1 0-1 0 0,1-1 1 0 0,-1 1 0 0 0,0 0-1 0 0,1 0 1 0 0,-1 0-1 0 0,0 0 1 0 0,0 0 0 0 0,0 0-1 0 0,-1 0 1 0 0,1 1 0 0 0,0-1-1 0 0,-1 0 1 0 0,0 0 0 0 0,1 1-1 0 0,-1-1 1 0 0,0 0-1 0 0,0 5 1 0 0,-1-5 15 0 0,0-1-1 0 0,0 1 0 0 0,-1-1 1 0 0,1 0-1 0 0,0 1 1 0 0,0-1-1 0 0,-1 0 1 0 0,1 0-1 0 0,-1 0 0 0 0,1 0 1 0 0,-1 0-1 0 0,1 0 1 0 0,-1 0-1 0 0,1 0 1 0 0,-1-1-1 0 0,0 1 0 0 0,-2 0 1 0 0,-34 9 336 0 0,32-8-289 0 0,-51 9 627 0 0,-60 5-1 0 0,58-10 316 0 0,56-5-831 0 0,-6-4 1 0 0,8 3-201 0 0,1 0 1 0 0,-1 0 0 0 0,1 0 0 0 0,-1 0-1 0 0,1 0 1 0 0,-1 0 0 0 0,1 0 0 0 0,-1 0-1 0 0,1 0 1 0 0,-1-1 0 0 0,1 1 0 0 0,-1 0-1 0 0,1 0 1 0 0,-1 0 0 0 0,1-1 0 0 0,-1 1-1 0 0,1 0 1 0 0,0 0 0 0 0,-1-1 0 0 0,1 1-1 0 0,-1 0 1 0 0,1-1 0 0 0,0 1 0 0 0,-1-1-1 0 0,1 1 1 0 0,0 0 0 0 0,-1-2 0 0 0,1-1-243 0 0,1 0 1 0 0,-1 0-1 0 0,1 0 1 0 0,0 0-1 0 0,0 0 1 0 0,0 0-1 0 0,1 0 1 0 0,-1 0-1 0 0,1 0 1 0 0,-1 1-1 0 0,1-1 1 0 0,0 1-1 0 0,0-1 1 0 0,0 1-1 0 0,0-1 1 0 0,4-2-1 0 0,8-9-1871 0 0</inkml:trace>
+  <inkml:trace contextRef="#ctx0" brushRef="#br0">1 2094 5793 0 0,'0'0'-42'0'0,"4"-3"50"0"0,24-21 43 0 0,46-49 1 0 0,-30 27 72 0 0,164-158 183 0 0,-143 140-200 0 0,65-83 0 0 0,21-22-21 0 0,217-172 11 0 0,-269 252 4 0 0,-10 14-3 0 0,3 5-1 0 0,195-114 0 0 0,-172 117-50 0 0,-35 18-5 0 0,3 4 0 0 0,170-68-1 0 0,-116 67-8 0 0,362-103-6 0 0,49 41 26 0 0,-443 94-53 0 0,0 4 1 0 0,146 6-1 0 0,-190 4 3 0 0,181 5 472 0 0,-175 0 1000 0 0,-64-5-1467 0 0</inkml:trace>
 </inkml:ink>
 </file>
 
@@ -6182,7 +6343,7 @@
           <inkml:channelProperty channel="OE" name="resolution" value="1000" units="1/deg"/>
         </inkml:channelProperties>
       </inkml:inkSource>
-      <inkml:timestamp xml:id="ts0" timeString="2026-04-02T05:57:31.768"/>
+      <inkml:timestamp xml:id="ts0" timeString="2026-04-02T05:57:18.404"/>
     </inkml:context>
     <inkml:brush xml:id="br0">
       <inkml:brushProperty name="width" value="0.2" units="cm"/>
@@ -6190,7 +6351,231 @@
       <inkml:brushProperty name="color" value="#FFC114"/>
     </inkml:brush>
   </inkml:definitions>
-  <inkml:trace contextRef="#ctx0" brushRef="#br0">47 166 6001 0 0,'-9'-5'355'0'0,"-29"-7"2030"0"0,81-11-2080 0 0,163-35-366 0 0,-1 1-5110 0 0,-179 46 3213 0 0</inkml:trace>
+  <inkml:trace contextRef="#ctx0" brushRef="#br0">120 48 6857 0 0,'-35'-18'-1059'0'0,"-10"-2"1809"0"0,43 19-581 0 0,-9-4 21 0 0,6 2-7 0 0,8 3 63 0 0,96 19-243 0 0,-47-11-2 0 0,1 3-1 0 0,-2 2 1 0 0,62 25 0 0 0,-111-38 1 0 0,0 1 0 0 0,0 0-1 0 0,1 0 1 0 0,-1 0 0 0 0,0 0 0 0 0,0 1 0 0 0,0-1 0 0 0,0 1-1 0 0,-1-1 1 0 0,1 1 0 0 0,0-1 0 0 0,0 1 0 0 0,-1 0-1 0 0,1 0 1 0 0,-1 0 0 0 0,0 0 0 0 0,0 0 0 0 0,0 0 0 0 0,0 0-1 0 0,2 5 1 0 0,-3-4 3 0 0,0-1 0 0 0,0 1 1 0 0,0-1-1 0 0,-1 1 0 0 0,1-1 0 0 0,-1 0 0 0 0,1 1 0 0 0,-1-1 1 0 0,0 1-1 0 0,0-1 0 0 0,0 0 0 0 0,0 0 0 0 0,0 1 0 0 0,0-1 1 0 0,-1 0-1 0 0,-2 3 0 0 0,-6 6 28 0 0,-2 1 0 0 0,0-1 0 0 0,0-1 0 0 0,-23 15 0 0 0,27-19-24 0 0,-274 173 234 0 0,255-162-240 0 0,10-9-606 0 0</inkml:trace>
+</inkml:ink>
+</file>
+
+<file path=ppt/ink/ink93.xml><?xml version="1.0" encoding="utf-8"?>
+<inkml:ink xmlns:inkml="http://www.w3.org/2003/InkML">
+  <inkml:definitions>
+    <inkml:context xml:id="ctx0">
+      <inkml:inkSource xml:id="inkSrc0">
+        <inkml:traceFormat>
+          <inkml:channel name="X" type="integer" min="-2.14748E9" max="2.14748E9" units="cm"/>
+          <inkml:channel name="Y" type="integer" min="-2.14748E9" max="2.14748E9" units="cm"/>
+          <inkml:channel name="F" type="integer" max="32767" units="dev"/>
+          <inkml:channel name="OA" type="integer" max="360" units="deg"/>
+          <inkml:channel name="OE" type="integer" max="90" units="deg"/>
+        </inkml:traceFormat>
+        <inkml:channelProperties>
+          <inkml:channelProperty channel="X" name="resolution" value="1000" units="1/cm"/>
+          <inkml:channelProperty channel="Y" name="resolution" value="1000" units="1/cm"/>
+          <inkml:channelProperty channel="F" name="resolution" value="0" units="1/dev"/>
+          <inkml:channelProperty channel="OA" name="resolution" value="1000" units="1/deg"/>
+          <inkml:channelProperty channel="OE" name="resolution" value="1000" units="1/deg"/>
+        </inkml:channelProperties>
+      </inkml:inkSource>
+      <inkml:timestamp xml:id="ts0" timeString="2026-04-02T05:57:20.752"/>
+    </inkml:context>
+    <inkml:brush xml:id="br0">
+      <inkml:brushProperty name="width" value="0.2" units="cm"/>
+      <inkml:brushProperty name="height" value="0.2" units="cm"/>
+      <inkml:brushProperty name="color" value="#FFC114"/>
+    </inkml:brush>
+  </inkml:definitions>
+  <inkml:trace contextRef="#ctx0" brushRef="#br0">418 1 5661 0 0,'-22'12'448'0'0,"-29"26"-426"0"0,2 2 0 0 0,-76 79-1 0 0,101-93-24 0 0,2 1 0 0 0,0 2 0 0 0,2 0 0 0 0,2 1-1 0 0,0 1 1 0 0,-17 42 0 0 0,33-68 2 0 0,0 0-1 0 0,0-1 1 0 0,1 1 0 0 0,0 0-1 0 0,0 0 1 0 0,0 0 0 0 0,0 0-1 0 0,1 0 1 0 0,-1 1 0 0 0,2-1-1 0 0,-1 0 1 0 0,0 0 0 0 0,1 0-1 0 0,0 0 1 0 0,0 0 0 0 0,0 0-1 0 0,1 0 1 0 0,3 7 0 0 0,-2-7 6 0 0,1-1 0 0 0,-1 1 0 0 0,1-1 1 0 0,0 0-1 0 0,0 0 0 0 0,0 0 0 0 0,0 0 0 0 0,1-1 1 0 0,0 0-1 0 0,0 0 0 0 0,0 0 0 0 0,0-1 0 0 0,0 1 1 0 0,0-1-1 0 0,0-1 0 0 0,10 3 0 0 0,0 0 13 0 0,-1-1 0 0 0,1-1 0 0 0,-1 0 0 0 0,1-1 0 0 0,0 0 1 0 0,-1-1-1 0 0,1-1 0 0 0,0-1 0 0 0,0 0 0 0 0,15-4 0 0 0,-22 3 20 0 0,0 1 0 0 0,0-1 0 0 0,0-1 1 0 0,0 1-1 0 0,-1-1 0 0 0,1-1 0 0 0,-1 1 0 0 0,0-1 0 0 0,0-1 1 0 0,-1 1-1 0 0,0-1 0 0 0,0 0 0 0 0,0-1 0 0 0,-1 1 1 0 0,1-1-1 0 0,-2 0 0 0 0,1 0 0 0 0,5-13 0 0 0,-8 16-1 0 0,0 0 0 0 0,0 0-1 0 0,-1 0 1 0 0,0 0 0 0 0,0 0 0 0 0,0 0-1 0 0,0-1 1 0 0,0 1 0 0 0,-1 0-1 0 0,0-1 1 0 0,0 1 0 0 0,0 0 0 0 0,0-1-1 0 0,-1 1 1 0 0,1 0 0 0 0,-3-7-1 0 0,1 8-23 0 0,0 0 0 0 0,1 0 0 0 0,-1 1 0 0 0,-1-1-1 0 0,1 0 1 0 0,0 1 0 0 0,-1-1 0 0 0,1 1 0 0 0,-1 0-1 0 0,0 0 1 0 0,0 0 0 0 0,0 0 0 0 0,0 0 0 0 0,0 1-1 0 0,0-1 1 0 0,0 1 0 0 0,-1 0 0 0 0,1 0-1 0 0,0 0 1 0 0,-7-1 0 0 0,-25-3 69 0 0,-49-2 0 0 0,-20-3-140 0 0,102 10-133 0 0</inkml:trace>
+</inkml:ink>
+</file>
+
+<file path=ppt/ink/ink94.xml><?xml version="1.0" encoding="utf-8"?>
+<inkml:ink xmlns:inkml="http://www.w3.org/2003/InkML">
+  <inkml:definitions>
+    <inkml:context xml:id="ctx0">
+      <inkml:inkSource xml:id="inkSrc0">
+        <inkml:traceFormat>
+          <inkml:channel name="X" type="integer" min="-2.14748E9" max="2.14748E9" units="cm"/>
+          <inkml:channel name="Y" type="integer" min="-2.14748E9" max="2.14748E9" units="cm"/>
+          <inkml:channel name="F" type="integer" max="32767" units="dev"/>
+          <inkml:channel name="OA" type="integer" max="360" units="deg"/>
+          <inkml:channel name="OE" type="integer" max="90" units="deg"/>
+        </inkml:traceFormat>
+        <inkml:channelProperties>
+          <inkml:channelProperty channel="X" name="resolution" value="1000" units="1/cm"/>
+          <inkml:channelProperty channel="Y" name="resolution" value="1000" units="1/cm"/>
+          <inkml:channelProperty channel="F" name="resolution" value="0" units="1/dev"/>
+          <inkml:channelProperty channel="OA" name="resolution" value="1000" units="1/deg"/>
+          <inkml:channelProperty channel="OE" name="resolution" value="1000" units="1/deg"/>
+        </inkml:channelProperties>
+      </inkml:inkSource>
+      <inkml:timestamp xml:id="ts0" timeString="2026-04-02T05:57:22.420"/>
+    </inkml:context>
+    <inkml:brush xml:id="br0">
+      <inkml:brushProperty name="width" value="0.2" units="cm"/>
+      <inkml:brushProperty name="height" value="0.2" units="cm"/>
+      <inkml:brushProperty name="color" value="#FFC114"/>
+    </inkml:brush>
+  </inkml:definitions>
+  <inkml:trace contextRef="#ctx0" brushRef="#br0">1 164 4808 0 0,'0'0'-98'0'0,"11"-15"3184"0"0,-1-15-2212 0 0,2-60-60 0 0,-12 89-756 0 0,1-26-415 0 0,-9 53 313 0 0,1 1 1 0 0,1 0-1 0 0,2 0 1 0 0,0 0-1 0 0,2 1 1 0 0,1 0-1 0 0,4 41 1 0 0,-3-65 42 0 0,1-1 1 0 0,0 1-1 0 0,0-1 0 0 0,0 1 1 0 0,0 0-1 0 0,0-1 1 0 0,1 0-1 0 0,0 1 0 0 0,-1-1 1 0 0,1 0-1 0 0,0 0 1 0 0,1 0-1 0 0,-1 0 1 0 0,0 0-1 0 0,1 0 0 0 0,0-1 1 0 0,4 4-1 0 0,-1-2 3 0 0,1 0 1 0 0,-1 0-1 0 0,1-1 0 0 0,0 0 1 0 0,-1-1-1 0 0,1 0 0 0 0,0 0 1 0 0,12 2-1 0 0,2-2 9 0 0,-1 0 1 0 0,0-2-1 0 0,1 0 0 0 0,-1-1 0 0 0,36-7 1 0 0,-48 6-9 0 0,0 0 0 0 0,-1 0 0 0 0,1-1 0 0 0,0 0 0 0 0,-1 0 0 0 0,1-1 0 0 0,-1 0 0 0 0,0 0 0 0 0,0 0 0 0 0,-1-1 0 0 0,1 0 0 0 0,-1-1 0 0 0,0 1 0 0 0,-1-1 0 0 0,8-9 0 0 0,-10 10 3 0 0,0 0 0 0 0,0-1 0 0 0,0 1 0 0 0,-1 0 0 0 0,0-1 0 0 0,0 1 0 0 0,-1-1-1 0 0,1 0 1 0 0,-1 1 0 0 0,0-1 0 0 0,-1 0 0 0 0,1 0 0 0 0,-1 0 0 0 0,-1 0 0 0 0,1 1 0 0 0,-1-1 0 0 0,0 0 0 0 0,0 0 0 0 0,0 1 0 0 0,-1-1 0 0 0,0 0 0 0 0,-3-6 0 0 0,-33-79 564 0 0,37 90-537 0 0,-2-15 110 0 0,-1 7-147 0 0,1 8-309 0 0,-1 10 299 0 0,1 0 1 0 0,0 0 0 0 0,1 0-1 0 0,0 0 1 0 0,0 0 0 0 0,1 1-1 0 0,0-1 1 0 0,1 0-1 0 0,0 12 1 0 0,13 94-60 0 0,-6-60 51 0 0,28 133-18 0 0,-6-43 77 0 0,-22-95 243 0 0,-7-48-270 0 0</inkml:trace>
+</inkml:ink>
+</file>
+
+<file path=ppt/ink/ink95.xml><?xml version="1.0" encoding="utf-8"?>
+<inkml:ink xmlns:inkml="http://www.w3.org/2003/InkML">
+  <inkml:definitions>
+    <inkml:context xml:id="ctx0">
+      <inkml:inkSource xml:id="inkSrc0">
+        <inkml:traceFormat>
+          <inkml:channel name="X" type="integer" min="-2.14748E9" max="2.14748E9" units="cm"/>
+          <inkml:channel name="Y" type="integer" min="-2.14748E9" max="2.14748E9" units="cm"/>
+          <inkml:channel name="F" type="integer" max="32767" units="dev"/>
+          <inkml:channel name="OA" type="integer" max="360" units="deg"/>
+          <inkml:channel name="OE" type="integer" max="90" units="deg"/>
+        </inkml:traceFormat>
+        <inkml:channelProperties>
+          <inkml:channelProperty channel="X" name="resolution" value="1000" units="1/cm"/>
+          <inkml:channelProperty channel="Y" name="resolution" value="1000" units="1/cm"/>
+          <inkml:channelProperty channel="F" name="resolution" value="0" units="1/dev"/>
+          <inkml:channelProperty channel="OA" name="resolution" value="1000" units="1/deg"/>
+          <inkml:channelProperty channel="OE" name="resolution" value="1000" units="1/deg"/>
+        </inkml:channelProperties>
+      </inkml:inkSource>
+      <inkml:timestamp xml:id="ts0" timeString="2026-04-02T05:57:24.244"/>
+    </inkml:context>
+    <inkml:brush xml:id="br0">
+      <inkml:brushProperty name="width" value="0.2" units="cm"/>
+      <inkml:brushProperty name="height" value="0.2" units="cm"/>
+      <inkml:brushProperty name="color" value="#FFC114"/>
+    </inkml:brush>
+  </inkml:definitions>
+  <inkml:trace contextRef="#ctx0" brushRef="#br0">1 267 5268 0 0,'14'3'-297'0'0,"0"0"-1"0"0,0-1 1 0 0,0-1-1 0 0,0 0 1 0 0,28-3-1 0 0,70-13 155 0 0,-22-1 390 0 0,125-40 0 0 0,-32 3-131 0 0,338-51 0 0 0,-370 87-98 0 0,257 5 0 0 0,-330 13 12 0 0,13 4 830 0 0,-88-5-748 0 0,-2 0-189 0 0,0 0 0 0 0,1 0 0 0 0,-1 0 0 0 0,1 0 0 0 0,-1-1 0 0 0,0 1 0 0 0,1 0 0 0 0,-1 0 0 0 0,1-1 0 0 0,-1 1 1 0 0,0-1-1 0 0,0 1 0 0 0,1-1 0 0 0,-1 0 0 0 0,0 0 0 0 0,2-1 0 0 0</inkml:trace>
+</inkml:ink>
+</file>
+
+<file path=ppt/ink/ink96.xml><?xml version="1.0" encoding="utf-8"?>
+<inkml:ink xmlns:inkml="http://www.w3.org/2003/InkML">
+  <inkml:definitions>
+    <inkml:context xml:id="ctx0">
+      <inkml:inkSource xml:id="inkSrc0">
+        <inkml:traceFormat>
+          <inkml:channel name="X" type="integer" min="-2.14748E9" max="2.14748E9" units="cm"/>
+          <inkml:channel name="Y" type="integer" min="-2.14748E9" max="2.14748E9" units="cm"/>
+          <inkml:channel name="F" type="integer" max="32767" units="dev"/>
+          <inkml:channel name="OA" type="integer" max="360" units="deg"/>
+          <inkml:channel name="OE" type="integer" max="90" units="deg"/>
+        </inkml:traceFormat>
+        <inkml:channelProperties>
+          <inkml:channelProperty channel="X" name="resolution" value="1000" units="1/cm"/>
+          <inkml:channelProperty channel="Y" name="resolution" value="1000" units="1/cm"/>
+          <inkml:channelProperty channel="F" name="resolution" value="0" units="1/dev"/>
+          <inkml:channelProperty channel="OA" name="resolution" value="1000" units="1/deg"/>
+          <inkml:channelProperty channel="OE" name="resolution" value="1000" units="1/deg"/>
+        </inkml:channelProperties>
+      </inkml:inkSource>
+      <inkml:timestamp xml:id="ts0" timeString="2026-04-02T05:57:24.871"/>
+    </inkml:context>
+    <inkml:brush xml:id="br0">
+      <inkml:brushProperty name="width" value="0.2" units="cm"/>
+      <inkml:brushProperty name="height" value="0.2" units="cm"/>
+      <inkml:brushProperty name="color" value="#FFC114"/>
+    </inkml:brush>
+  </inkml:definitions>
+  <inkml:trace contextRef="#ctx0" brushRef="#br0">64 45 4260 0 0,'-27'-17'-209'0'0,"26"17"284"0"0,-34-28 2270 0 0,201 73-1989 0 0,-117-29-365 0 0,2 0-13 0 0,-1 2 0 0 0,72 36 1 0 0,-121-54 22 0 0,0 1-1 0 0,0-1 1 0 0,0 1 0 0 0,0 0 0 0 0,0 0 0 0 0,0-1 0 0 0,0 1 0 0 0,0 0 0 0 0,0 0 0 0 0,0 0 0 0 0,0 0-1 0 0,-1 0 1 0 0,1 0 0 0 0,0 0 0 0 0,-1 0 0 0 0,1 0 0 0 0,0 0 0 0 0,-1 0 0 0 0,0 0 0 0 0,1 1 0 0 0,-1-1 0 0 0,0 0-1 0 0,1 0 1 0 0,-1 1 0 0 0,0-1 0 0 0,0 2 0 0 0,-1-1 2 0 0,1 1-1 0 0,-1-1 1 0 0,0 1-1 0 0,0-1 1 0 0,0 0 0 0 0,0 1-1 0 0,-1-1 1 0 0,1 0-1 0 0,-1 0 1 0 0,1 0-1 0 0,-1 0 1 0 0,-2 3 0 0 0,-8 6 9 0 0,-1-1 0 0 0,0 0-1 0 0,-17 11 1 0 0,21-16-11 0 0,-57 39-528 0 0,-127 61 0 0 0,174-98-2148 0 0</inkml:trace>
+</inkml:ink>
+</file>
+
+<file path=ppt/ink/ink97.xml><?xml version="1.0" encoding="utf-8"?>
+<inkml:ink xmlns:inkml="http://www.w3.org/2003/InkML">
+  <inkml:definitions>
+    <inkml:context xml:id="ctx0">
+      <inkml:inkSource xml:id="inkSrc0">
+        <inkml:traceFormat>
+          <inkml:channel name="X" type="integer" min="-2.14748E9" max="2.14748E9" units="cm"/>
+          <inkml:channel name="Y" type="integer" min="-2.14748E9" max="2.14748E9" units="cm"/>
+          <inkml:channel name="F" type="integer" max="32767" units="dev"/>
+          <inkml:channel name="OA" type="integer" max="360" units="deg"/>
+          <inkml:channel name="OE" type="integer" max="90" units="deg"/>
+        </inkml:traceFormat>
+        <inkml:channelProperties>
+          <inkml:channelProperty channel="X" name="resolution" value="1000" units="1/cm"/>
+          <inkml:channelProperty channel="Y" name="resolution" value="1000" units="1/cm"/>
+          <inkml:channelProperty channel="F" name="resolution" value="0" units="1/dev"/>
+          <inkml:channelProperty channel="OA" name="resolution" value="1000" units="1/deg"/>
+          <inkml:channelProperty channel="OE" name="resolution" value="1000" units="1/deg"/>
+        </inkml:channelProperties>
+      </inkml:inkSource>
+      <inkml:timestamp xml:id="ts0" timeString="2026-04-02T05:57:26.491"/>
+    </inkml:context>
+    <inkml:brush xml:id="br0">
+      <inkml:brushProperty name="width" value="0.2" units="cm"/>
+      <inkml:brushProperty name="height" value="0.2" units="cm"/>
+      <inkml:brushProperty name="color" value="#FFC114"/>
+    </inkml:brush>
+  </inkml:definitions>
+  <inkml:trace contextRef="#ctx0" brushRef="#br0">345 104 3924 0 0,'0'0'-122'0'0,"-2"-24"1672"0"0,-5 16-1504 0 0,1 1 0 0 0,-2 0 1 0 0,1 0-1 0 0,-1 0 0 0 0,0 1 1 0 0,0 0-1 0 0,-1 1 0 0 0,1 0 0 0 0,-1 0 1 0 0,0 1-1 0 0,-18-5 0 0 0,21 7-55 0 0,0 1 0 0 0,0 1 0 0 0,0-1 0 0 0,0 1 0 0 0,0 0 0 0 0,-1 1 0 0 0,1-1 0 0 0,0 1 0 0 0,0 1 0 0 0,0-1-1 0 0,0 1 1 0 0,0 0 0 0 0,1 0 0 0 0,-1 0 0 0 0,0 1 0 0 0,1 0 0 0 0,0 0 0 0 0,-9 7 0 0 0,1 0-23 0 0,1 0 0 0 0,0 1 0 0 0,1 0 1 0 0,0 1-1 0 0,-18 23 0 0 0,27-32 27 0 0,0 1 1 0 0,0-1 0 0 0,-1 0-1 0 0,2 1 1 0 0,-1-1-1 0 0,0 1 1 0 0,1-1-1 0 0,0 1 1 0 0,0 0-1 0 0,0 0 1 0 0,0 0-1 0 0,0-1 1 0 0,1 1 0 0 0,0 0-1 0 0,-1 0 1 0 0,2 0-1 0 0,-1 0 1 0 0,0 0-1 0 0,1 0 1 0 0,0 0-1 0 0,0-1 1 0 0,0 1 0 0 0,0 0-1 0 0,0 0 1 0 0,1-1-1 0 0,0 1 1 0 0,0-1-1 0 0,0 0 1 0 0,0 1-1 0 0,0-1 1 0 0,1 0 0 0 0,-1 0-1 0 0,1 0 1 0 0,0-1-1 0 0,0 1 1 0 0,0 0-1 0 0,6 3 1 0 0,1 0 26 0 0,0 1 1 0 0,0-2-1 0 0,1 1 1 0 0,0-2-1 0 0,0 1 1 0 0,0-1-1 0 0,1-1 1 0 0,-1 0-1 0 0,1-1 1 0 0,-1 0-1 0 0,18 0 1 0 0,-25-1 15 0 0,0-2 0 0 0,0 1 0 0 0,0 0 0 0 0,0-1 0 0 0,0 0 1 0 0,0 0-1 0 0,0 0 0 0 0,0 0 0 0 0,0-1 0 0 0,-1 1 0 0 0,1-1 1 0 0,-1 0-1 0 0,1 0 0 0 0,-1-1 0 0 0,0 1 0 0 0,0-1 0 0 0,0 1 1 0 0,0-1-1 0 0,0 0 0 0 0,0 0 0 0 0,-1 0 0 0 0,4-7 0 0 0,1-2 247 0 0,-1-1 0 0 0,-1 0 0 0 0,0 0 0 0 0,-1 0 0 0 0,3-15 0 0 0,-1 5 381 0 0,-6 22-534 0 0,3-7 44 0 0,-2 8-203 0 0,-1-1-1 0 0,1 1 1 0 0,-1 0-1 0 0,1-1 1 0 0,-1 1-1 0 0,0-1 1 0 0,1 1-1 0 0,-1-1 0 0 0,1 1 1 0 0,-1 0-1 0 0,0-1 1 0 0,0 1-1 0 0,1-1 1 0 0,-1 0-1 0 0,0 1 1 0 0,0-1-1 0 0,0 1 1 0 0,1-1-1 0 0,-1 1 1 0 0,0-1-1 0 0,0 0 1 0 0,0 1-1 0 0,0-1 1 0 0,0 1-1 0 0,0-1 1 0 0,0 1-1 0 0,-1-2 0 0 0,29 125-390 0 0,15 83 226 0 0,-37-157 158 0 0,9 53 182 0 0,-14-100-66 0 0,12-30-4009 0 0,-2 9 1689 0 0</inkml:trace>
+</inkml:ink>
+</file>
+
+<file path=ppt/ink/ink98.xml><?xml version="1.0" encoding="utf-8"?>
+<inkml:ink xmlns:inkml="http://www.w3.org/2003/InkML">
+  <inkml:definitions>
+    <inkml:context xml:id="ctx0">
+      <inkml:inkSource xml:id="inkSrc0">
+        <inkml:traceFormat>
+          <inkml:channel name="X" type="integer" min="-2.14748E9" max="2.14748E9" units="cm"/>
+          <inkml:channel name="Y" type="integer" min="-2.14748E9" max="2.14748E9" units="cm"/>
+          <inkml:channel name="F" type="integer" max="32767" units="dev"/>
+          <inkml:channel name="OA" type="integer" max="360" units="deg"/>
+          <inkml:channel name="OE" type="integer" max="90" units="deg"/>
+        </inkml:traceFormat>
+        <inkml:channelProperties>
+          <inkml:channelProperty channel="X" name="resolution" value="1000" units="1/cm"/>
+          <inkml:channelProperty channel="Y" name="resolution" value="1000" units="1/cm"/>
+          <inkml:channelProperty channel="F" name="resolution" value="0" units="1/dev"/>
+          <inkml:channelProperty channel="OA" name="resolution" value="1000" units="1/deg"/>
+          <inkml:channelProperty channel="OE" name="resolution" value="1000" units="1/deg"/>
+        </inkml:channelProperties>
+      </inkml:inkSource>
+      <inkml:timestamp xml:id="ts0" timeString="2026-04-02T05:57:27.087"/>
+    </inkml:context>
+    <inkml:brush xml:id="br0">
+      <inkml:brushProperty name="width" value="0.2" units="cm"/>
+      <inkml:brushProperty name="height" value="0.2" units="cm"/>
+      <inkml:brushProperty name="color" value="#FFC114"/>
+    </inkml:brush>
+  </inkml:definitions>
+  <inkml:trace contextRef="#ctx0" brushRef="#br0">248 123 5400 0 0,'-1'-1'-53'0'0,"-1"0"-1"0"0,1 0 1 0 0,0 0-1 0 0,0-1 1 0 0,-1 1-1 0 0,1 0 0 0 0,0-1 1 0 0,0 1-1 0 0,1-1 1 0 0,-1 1-1 0 0,0-1 0 0 0,0 1 1 0 0,1-1-1 0 0,-1 1 1 0 0,1-1-1 0 0,-1 0 1 0 0,1 1-1 0 0,0-1 0 0 0,0 0 1 0 0,0 0-1 0 0,0 1 1 0 0,0-3-1 0 0,16-31-123 0 0,0 4 338 0 0,-15 29-156 0 0,1 0-1 0 0,0 1 1 0 0,-1-1-1 0 0,1 1 0 0 0,0-1 1 0 0,0 1-1 0 0,0-1 1 0 0,0 1-1 0 0,0 0 0 0 0,0 0 1 0 0,1 0-1 0 0,-1 0 1 0 0,0 1-1 0 0,0-1 0 0 0,1 0 1 0 0,-1 1-1 0 0,1 0 0 0 0,-1-1 1 0 0,0 1-1 0 0,1 0 1 0 0,3 1-1 0 0,7-2-5 0 0,-1 1-1 0 0,0 1 1 0 0,1 0-1 0 0,-1 1 1 0 0,0 0-1 0 0,16 5 1 0 0,-21-5-5 0 0,0 1-1 0 0,0-1 1 0 0,-1 1 0 0 0,1 1 0 0 0,0-1 0 0 0,-1 1 0 0 0,0 0 0 0 0,0 1-1 0 0,0-1 1 0 0,-1 1 0 0 0,9 9 0 0 0,-13-11 6 0 0,1-1 1 0 0,-1 1-1 0 0,0 0 0 0 0,1 0 0 0 0,-1-1 1 0 0,-1 1-1 0 0,1 0 0 0 0,0 0 0 0 0,-1 0 1 0 0,1 0-1 0 0,-1 0 0 0 0,0 0 0 0 0,0 0 1 0 0,0 0-1 0 0,-1 0 0 0 0,1 0 0 0 0,-1 0 1 0 0,1 0-1 0 0,-1 0 0 0 0,0 0 1 0 0,0 0-1 0 0,0-1 0 0 0,-1 1 0 0 0,1 0 1 0 0,-1-1-1 0 0,-1 4 0 0 0,-6 8 7 0 0,-1-1 1 0 0,0 0-1 0 0,-17 16 0 0 0,26-28-7 0 0,-55 51 8 0 0,-2-3-1 0 0,-119 78 0 0 0,33-25 8 0 0,139-99-6 0 0,6-1 29 0 0,9-2 137 0 0,369-77 67 0 0,-229 42-319 0 0,130-31-1936 0 0,-216 51 1257 0 0</inkml:trace>
+</inkml:ink>
+</file>
+
+<file path=ppt/ink/ink99.xml><?xml version="1.0" encoding="utf-8"?>
+<inkml:ink xmlns:inkml="http://www.w3.org/2003/InkML">
+  <inkml:definitions>
+    <inkml:context xml:id="ctx0">
+      <inkml:inkSource xml:id="inkSrc0">
+        <inkml:traceFormat>
+          <inkml:channel name="X" type="integer" min="-2.14748E9" max="2.14748E9" units="cm"/>
+          <inkml:channel name="Y" type="integer" min="-2.14748E9" max="2.14748E9" units="cm"/>
+          <inkml:channel name="F" type="integer" max="32767" units="dev"/>
+          <inkml:channel name="OA" type="integer" max="360" units="deg"/>
+          <inkml:channel name="OE" type="integer" max="90" units="deg"/>
+        </inkml:traceFormat>
+        <inkml:channelProperties>
+          <inkml:channelProperty channel="X" name="resolution" value="1000" units="1/cm"/>
+          <inkml:channelProperty channel="Y" name="resolution" value="1000" units="1/cm"/>
+          <inkml:channelProperty channel="F" name="resolution" value="0" units="1/dev"/>
+          <inkml:channelProperty channel="OA" name="resolution" value="1000" units="1/deg"/>
+          <inkml:channelProperty channel="OE" name="resolution" value="1000" units="1/deg"/>
+        </inkml:channelProperties>
+      </inkml:inkSource>
+      <inkml:timestamp xml:id="ts0" timeString="2026-04-02T05:57:28.603"/>
+    </inkml:context>
+    <inkml:brush xml:id="br0">
+      <inkml:brushProperty name="width" value="0.2" units="cm"/>
+      <inkml:brushProperty name="height" value="0.2" units="cm"/>
+      <inkml:brushProperty name="color" value="#FFC114"/>
+    </inkml:brush>
+  </inkml:definitions>
+  <inkml:trace contextRef="#ctx0" brushRef="#br0">1 0 3608 0 0,'98'72'2982'0'0,"-24"-18"-3031"0"0,19 9 60 0 0,3-4 1 0 0,2-5-1 0 0,2-3 0 0 0,3-5 0 0 0,148 45 1 0 0,248 61 42 0 0,-402-128-37 0 0,136 17 1 0 0,103-7 38 0 0,-292-30-49 0 0,156 5 44 0 0,340-29 0 0 0,-520 18-49 0 0,317-29 38 0 0,-301 29-41 0 0,46-8 18 0 0,-57 6-16 0 0,-22 3-6 0 0,16-2-7 0 0,-15 3 21 0 0,18-7-321 0 0,-12-10-2670 0 0</inkml:trace>
 </inkml:ink>
 </file>
 
@@ -6276,7 +6661,7 @@
           <a:p>
             <a:fld id="{CB233BD1-3BA8-448D-9D08-7846095EA517}" type="datetimeFigureOut">
               <a:rPr lang="en-US" smtClean="0"/>
-              <a:t>4/2/2026</a:t>
+              <a:t>5/8/2026</a:t>
             </a:fld>
             <a:endParaRPr lang="en-US"/>
           </a:p>
@@ -6690,7 +7075,7 @@
           <a:p>
             <a:fld id="{6383FAE1-13DE-4511-8C1B-C8AFB720664C}" type="datetimeFigureOut">
               <a:rPr lang="en-US" smtClean="0"/>
-              <a:t>4/2/2026</a:t>
+              <a:t>5/8/2026</a:t>
             </a:fld>
             <a:endParaRPr lang="en-US"/>
           </a:p>
@@ -6888,7 +7273,7 @@
           <a:p>
             <a:fld id="{6383FAE1-13DE-4511-8C1B-C8AFB720664C}" type="datetimeFigureOut">
               <a:rPr lang="en-US" smtClean="0"/>
-              <a:t>4/2/2026</a:t>
+              <a:t>5/8/2026</a:t>
             </a:fld>
             <a:endParaRPr lang="en-US"/>
           </a:p>
@@ -7096,7 +7481,7 @@
           <a:p>
             <a:fld id="{6383FAE1-13DE-4511-8C1B-C8AFB720664C}" type="datetimeFigureOut">
               <a:rPr lang="en-US" smtClean="0"/>
-              <a:t>4/2/2026</a:t>
+              <a:t>5/8/2026</a:t>
             </a:fld>
             <a:endParaRPr lang="en-US"/>
           </a:p>
@@ -7294,7 +7679,7 @@
           <a:p>
             <a:fld id="{6383FAE1-13DE-4511-8C1B-C8AFB720664C}" type="datetimeFigureOut">
               <a:rPr lang="en-US" smtClean="0"/>
-              <a:t>4/2/2026</a:t>
+              <a:t>5/8/2026</a:t>
             </a:fld>
             <a:endParaRPr lang="en-US"/>
           </a:p>
@@ -7569,7 +7954,7 @@
           <a:p>
             <a:fld id="{6383FAE1-13DE-4511-8C1B-C8AFB720664C}" type="datetimeFigureOut">
               <a:rPr lang="en-US" smtClean="0"/>
-              <a:t>4/2/2026</a:t>
+              <a:t>5/8/2026</a:t>
             </a:fld>
             <a:endParaRPr lang="en-US"/>
           </a:p>
@@ -7834,7 +8219,7 @@
           <a:p>
             <a:fld id="{6383FAE1-13DE-4511-8C1B-C8AFB720664C}" type="datetimeFigureOut">
               <a:rPr lang="en-US" smtClean="0"/>
-              <a:t>4/2/2026</a:t>
+              <a:t>5/8/2026</a:t>
             </a:fld>
             <a:endParaRPr lang="en-US"/>
           </a:p>
@@ -8246,7 +8631,7 @@
           <a:p>
             <a:fld id="{6383FAE1-13DE-4511-8C1B-C8AFB720664C}" type="datetimeFigureOut">
               <a:rPr lang="en-US" smtClean="0"/>
-              <a:t>4/2/2026</a:t>
+              <a:t>5/8/2026</a:t>
             </a:fld>
             <a:endParaRPr lang="en-US"/>
           </a:p>
@@ -8387,7 +8772,7 @@
           <a:p>
             <a:fld id="{6383FAE1-13DE-4511-8C1B-C8AFB720664C}" type="datetimeFigureOut">
               <a:rPr lang="en-US" smtClean="0"/>
-              <a:t>4/2/2026</a:t>
+              <a:t>5/8/2026</a:t>
             </a:fld>
             <a:endParaRPr lang="en-US"/>
           </a:p>
@@ -8500,7 +8885,7 @@
           <a:p>
             <a:fld id="{6383FAE1-13DE-4511-8C1B-C8AFB720664C}" type="datetimeFigureOut">
               <a:rPr lang="en-US" smtClean="0"/>
-              <a:t>4/2/2026</a:t>
+              <a:t>5/8/2026</a:t>
             </a:fld>
             <a:endParaRPr lang="en-US"/>
           </a:p>
@@ -8811,7 +9196,7 @@
           <a:p>
             <a:fld id="{6383FAE1-13DE-4511-8C1B-C8AFB720664C}" type="datetimeFigureOut">
               <a:rPr lang="en-US" smtClean="0"/>
-              <a:t>4/2/2026</a:t>
+              <a:t>5/8/2026</a:t>
             </a:fld>
             <a:endParaRPr lang="en-US"/>
           </a:p>
@@ -9102,7 +9487,7 @@
           <a:p>
             <a:fld id="{6383FAE1-13DE-4511-8C1B-C8AFB720664C}" type="datetimeFigureOut">
               <a:rPr lang="en-US" smtClean="0"/>
-              <a:t>4/2/2026</a:t>
+              <a:t>5/8/2026</a:t>
             </a:fld>
             <a:endParaRPr lang="en-US"/>
           </a:p>
@@ -9346,7 +9731,7 @@
           <a:p>
             <a:fld id="{6383FAE1-13DE-4511-8C1B-C8AFB720664C}" type="datetimeFigureOut">
               <a:rPr lang="en-US" smtClean="0"/>
-              <a:t>4/2/2026</a:t>
+              <a:t>5/8/2026</a:t>
             </a:fld>
             <a:endParaRPr lang="en-US"/>
           </a:p>
@@ -9973,6 +10358,1165 @@
         <p:cNvPr id="1" name="">
           <a:extLst>
             <a:ext uri="{FF2B5EF4-FFF2-40B4-BE49-F238E27FC236}">
+              <a16:creationId xmlns:a16="http://schemas.microsoft.com/office/drawing/2014/main" id="{9E5339FB-3CCE-9C06-6D57-630433EE2FFB}"/>
+            </a:ext>
+          </a:extLst>
+        </p:cNvPr>
+        <p:cNvGrpSpPr/>
+        <p:nvPr/>
+      </p:nvGrpSpPr>
+      <p:grpSpPr>
+        <a:xfrm>
+          <a:off x="0" y="0"/>
+          <a:ext cx="0" cy="0"/>
+          <a:chOff x="0" y="0"/>
+          <a:chExt cx="0" cy="0"/>
+        </a:xfrm>
+      </p:grpSpPr>
+      <p:pic>
+        <p:nvPicPr>
+          <p:cNvPr id="27" name="Picture 2">
+            <a:extLst>
+              <a:ext uri="{FF2B5EF4-FFF2-40B4-BE49-F238E27FC236}">
+                <a16:creationId xmlns:a16="http://schemas.microsoft.com/office/drawing/2014/main" id="{B0816346-52BA-1BF0-CE1A-929B33BB607B}"/>
+              </a:ext>
+            </a:extLst>
+          </p:cNvPr>
+          <p:cNvPicPr>
+            <a:picLocks noChangeAspect="1" noChangeArrowheads="1"/>
+          </p:cNvPicPr>
+          <p:nvPr/>
+        </p:nvPicPr>
+        <p:blipFill>
+          <a:blip r:embed="rId2">
+            <a:extLst>
+              <a:ext uri="{28A0092B-C50C-407E-A947-70E740481C1C}">
+                <a14:useLocalDpi xmlns:a14="http://schemas.microsoft.com/office/drawing/2010/main" val="0"/>
+              </a:ext>
+            </a:extLst>
+          </a:blip>
+          <a:srcRect/>
+          <a:stretch>
+            <a:fillRect/>
+          </a:stretch>
+        </p:blipFill>
+        <p:spPr bwMode="auto">
+          <a:xfrm>
+            <a:off x="1307592" y="1132070"/>
+            <a:ext cx="5724144" cy="5175916"/>
+          </a:xfrm>
+          <a:prstGeom prst="rect">
+            <a:avLst/>
+          </a:prstGeom>
+          <a:noFill/>
+          <a:extLst>
+            <a:ext uri="{909E8E84-426E-40DD-AFC4-6F175D3DCCD1}">
+              <a14:hiddenFill xmlns:a14="http://schemas.microsoft.com/office/drawing/2010/main">
+                <a:solidFill>
+                  <a:srgbClr val="FFFFFF"/>
+                </a:solidFill>
+              </a14:hiddenFill>
+            </a:ext>
+          </a:extLst>
+        </p:spPr>
+      </p:pic>
+      <p:sp>
+        <p:nvSpPr>
+          <p:cNvPr id="30" name="TextBox 29">
+            <a:extLst>
+              <a:ext uri="{FF2B5EF4-FFF2-40B4-BE49-F238E27FC236}">
+                <a16:creationId xmlns:a16="http://schemas.microsoft.com/office/drawing/2014/main" id="{D4D8C8B7-8D00-FEF1-9ADE-6877D7289872}"/>
+              </a:ext>
+            </a:extLst>
+          </p:cNvPr>
+          <p:cNvSpPr txBox="1"/>
+          <p:nvPr/>
+        </p:nvSpPr>
+        <p:spPr>
+          <a:xfrm>
+            <a:off x="736092" y="71366"/>
+            <a:ext cx="6190488" cy="461665"/>
+          </a:xfrm>
+          <a:prstGeom prst="rect">
+            <a:avLst/>
+          </a:prstGeom>
+          <a:noFill/>
+        </p:spPr>
+        <p:txBody>
+          <a:bodyPr wrap="square">
+            <a:spAutoFit/>
+          </a:bodyPr>
+          <a:lstStyle/>
+          <a:p>
+            <a:r>
+              <a:rPr lang="en-US" sz="2400" b="1" i="0" dirty="0">
+                <a:solidFill>
+                  <a:schemeClr val="accent6">
+                    <a:lumMod val="60000"/>
+                    <a:lumOff val="40000"/>
+                  </a:schemeClr>
+                </a:solidFill>
+                <a:effectLst/>
+                <a:latin typeface="sohne"/>
+              </a:rPr>
+              <a:t>How do computers process images?</a:t>
+            </a:r>
+            <a:endParaRPr lang="en-US" sz="2400" b="1" dirty="0">
+              <a:solidFill>
+                <a:schemeClr val="accent6">
+                  <a:lumMod val="60000"/>
+                  <a:lumOff val="40000"/>
+                </a:schemeClr>
+              </a:solidFill>
+            </a:endParaRPr>
+          </a:p>
+        </p:txBody>
+      </p:sp>
+      <p:sp>
+        <p:nvSpPr>
+          <p:cNvPr id="32" name="TextBox 31">
+            <a:extLst>
+              <a:ext uri="{FF2B5EF4-FFF2-40B4-BE49-F238E27FC236}">
+                <a16:creationId xmlns:a16="http://schemas.microsoft.com/office/drawing/2014/main" id="{0C0F8E5F-4D8B-7FB4-E6BC-8B09AD5D24BF}"/>
+              </a:ext>
+            </a:extLst>
+          </p:cNvPr>
+          <p:cNvSpPr txBox="1"/>
+          <p:nvPr/>
+        </p:nvSpPr>
+        <p:spPr>
+          <a:xfrm>
+            <a:off x="512064" y="601718"/>
+            <a:ext cx="5824728" cy="461665"/>
+          </a:xfrm>
+          <a:prstGeom prst="rect">
+            <a:avLst/>
+          </a:prstGeom>
+          <a:noFill/>
+        </p:spPr>
+        <p:txBody>
+          <a:bodyPr wrap="square">
+            <a:spAutoFit/>
+          </a:bodyPr>
+          <a:lstStyle/>
+          <a:p>
+            <a:r>
+              <a:rPr lang="en-US" sz="2400" dirty="0">
+                <a:solidFill>
+                  <a:schemeClr val="accent6">
+                    <a:lumMod val="60000"/>
+                    <a:lumOff val="40000"/>
+                  </a:schemeClr>
+                </a:solidFill>
+                <a:latin typeface="sohne"/>
+              </a:rPr>
+              <a:t>T</a:t>
+            </a:r>
+            <a:r>
+              <a:rPr lang="en-US" sz="2400" b="0" i="0" dirty="0">
+                <a:solidFill>
+                  <a:schemeClr val="accent6">
+                    <a:lumMod val="60000"/>
+                    <a:lumOff val="40000"/>
+                  </a:schemeClr>
+                </a:solidFill>
+                <a:effectLst/>
+                <a:latin typeface="sohne"/>
+              </a:rPr>
+              <a:t>o a computer, images are just numbers. </a:t>
+            </a:r>
+            <a:endParaRPr lang="en-IN" sz="2400" dirty="0">
+              <a:solidFill>
+                <a:schemeClr val="accent6">
+                  <a:lumMod val="60000"/>
+                  <a:lumOff val="40000"/>
+                </a:schemeClr>
+              </a:solidFill>
+            </a:endParaRPr>
+          </a:p>
+        </p:txBody>
+      </p:sp>
+      <p:grpSp>
+        <p:nvGrpSpPr>
+          <p:cNvPr id="61" name="Group 60">
+            <a:extLst>
+              <a:ext uri="{FF2B5EF4-FFF2-40B4-BE49-F238E27FC236}">
+                <a16:creationId xmlns:a16="http://schemas.microsoft.com/office/drawing/2014/main" id="{0D305897-197E-497C-F211-5AC12946E344}"/>
+              </a:ext>
+            </a:extLst>
+          </p:cNvPr>
+          <p:cNvGrpSpPr/>
+          <p:nvPr/>
+        </p:nvGrpSpPr>
+        <p:grpSpPr>
+          <a:xfrm>
+            <a:off x="5993424" y="3478176"/>
+            <a:ext cx="2061720" cy="981000"/>
+            <a:chOff x="5993424" y="3478176"/>
+            <a:chExt cx="2061720" cy="981000"/>
+          </a:xfrm>
+        </p:grpSpPr>
+        <mc:AlternateContent xmlns:mc="http://schemas.openxmlformats.org/markup-compatibility/2006" xmlns:p14="http://schemas.microsoft.com/office/powerpoint/2010/main">
+          <mc:Choice Requires="p14">
+            <p:contentPart p14:bwMode="auto" r:id="rId3">
+              <p14:nvContentPartPr>
+                <p14:cNvPr id="50" name="Ink 49">
+                  <a:extLst>
+                    <a:ext uri="{FF2B5EF4-FFF2-40B4-BE49-F238E27FC236}">
+                      <a16:creationId xmlns:a16="http://schemas.microsoft.com/office/drawing/2014/main" id="{04E43AB7-CE34-95AC-24A0-7A1868285E50}"/>
+                    </a:ext>
+                  </a:extLst>
+                </p14:cNvPr>
+                <p14:cNvContentPartPr/>
+                <p14:nvPr/>
+              </p14:nvContentPartPr>
+              <p14:xfrm>
+                <a:off x="6560064" y="4288176"/>
+                <a:ext cx="562680" cy="171000"/>
+              </p14:xfrm>
+            </p:contentPart>
+          </mc:Choice>
+          <mc:Fallback xmlns="">
+            <p:pic>
+              <p:nvPicPr>
+                <p:cNvPr id="50" name="Ink 49">
+                  <a:extLst>
+                    <a:ext uri="{FF2B5EF4-FFF2-40B4-BE49-F238E27FC236}">
+                      <a16:creationId xmlns:a16="http://schemas.microsoft.com/office/drawing/2014/main" id="{04E43AB7-CE34-95AC-24A0-7A1868285E50}"/>
+                    </a:ext>
+                  </a:extLst>
+                </p:cNvPr>
+                <p:cNvPicPr/>
+                <p:nvPr/>
+              </p:nvPicPr>
+              <p:blipFill>
+                <a:blip r:embed="rId4"/>
+                <a:stretch>
+                  <a:fillRect/>
+                </a:stretch>
+              </p:blipFill>
+              <p:spPr>
+                <a:xfrm>
+                  <a:off x="6524424" y="4252536"/>
+                  <a:ext cx="634320" cy="242640"/>
+                </a:xfrm>
+                <a:prstGeom prst="rect">
+                  <a:avLst/>
+                </a:prstGeom>
+              </p:spPr>
+            </p:pic>
+          </mc:Fallback>
+        </mc:AlternateContent>
+        <mc:AlternateContent xmlns:mc="http://schemas.openxmlformats.org/markup-compatibility/2006" xmlns:p14="http://schemas.microsoft.com/office/powerpoint/2010/main">
+          <mc:Choice Requires="p14">
+            <p:contentPart p14:bwMode="auto" r:id="rId5">
+              <p14:nvContentPartPr>
+                <p14:cNvPr id="51" name="Ink 50">
+                  <a:extLst>
+                    <a:ext uri="{FF2B5EF4-FFF2-40B4-BE49-F238E27FC236}">
+                      <a16:creationId xmlns:a16="http://schemas.microsoft.com/office/drawing/2014/main" id="{DA0BF638-D67A-D6A3-5305-1F1F02B498F3}"/>
+                    </a:ext>
+                  </a:extLst>
+                </p14:cNvPr>
+                <p14:cNvContentPartPr/>
+                <p14:nvPr/>
+              </p14:nvContentPartPr>
+              <p14:xfrm>
+                <a:off x="7138944" y="4190976"/>
+                <a:ext cx="112320" cy="197280"/>
+              </p14:xfrm>
+            </p:contentPart>
+          </mc:Choice>
+          <mc:Fallback xmlns="">
+            <p:pic>
+              <p:nvPicPr>
+                <p:cNvPr id="51" name="Ink 50">
+                  <a:extLst>
+                    <a:ext uri="{FF2B5EF4-FFF2-40B4-BE49-F238E27FC236}">
+                      <a16:creationId xmlns:a16="http://schemas.microsoft.com/office/drawing/2014/main" id="{DA0BF638-D67A-D6A3-5305-1F1F02B498F3}"/>
+                    </a:ext>
+                  </a:extLst>
+                </p:cNvPr>
+                <p:cNvPicPr/>
+                <p:nvPr/>
+              </p:nvPicPr>
+              <p:blipFill>
+                <a:blip r:embed="rId6"/>
+                <a:stretch>
+                  <a:fillRect/>
+                </a:stretch>
+              </p:blipFill>
+              <p:spPr>
+                <a:xfrm>
+                  <a:off x="7103304" y="4154976"/>
+                  <a:ext cx="183960" cy="268920"/>
+                </a:xfrm>
+                <a:prstGeom prst="rect">
+                  <a:avLst/>
+                </a:prstGeom>
+              </p:spPr>
+            </p:pic>
+          </mc:Fallback>
+        </mc:AlternateContent>
+        <mc:AlternateContent xmlns:mc="http://schemas.openxmlformats.org/markup-compatibility/2006" xmlns:p14="http://schemas.microsoft.com/office/powerpoint/2010/main">
+          <mc:Choice Requires="p14">
+            <p:contentPart p14:bwMode="auto" r:id="rId7">
+              <p14:nvContentPartPr>
+                <p14:cNvPr id="53" name="Ink 52">
+                  <a:extLst>
+                    <a:ext uri="{FF2B5EF4-FFF2-40B4-BE49-F238E27FC236}">
+                      <a16:creationId xmlns:a16="http://schemas.microsoft.com/office/drawing/2014/main" id="{4E7A014F-54F4-5341-F2EE-6BE9FF1743D0}"/>
+                    </a:ext>
+                  </a:extLst>
+                </p14:cNvPr>
+                <p14:cNvContentPartPr/>
+                <p14:nvPr/>
+              </p14:nvContentPartPr>
+              <p14:xfrm>
+                <a:off x="7490664" y="4034016"/>
+                <a:ext cx="168840" cy="238680"/>
+              </p14:xfrm>
+            </p:contentPart>
+          </mc:Choice>
+          <mc:Fallback xmlns="">
+            <p:pic>
+              <p:nvPicPr>
+                <p:cNvPr id="53" name="Ink 52">
+                  <a:extLst>
+                    <a:ext uri="{FF2B5EF4-FFF2-40B4-BE49-F238E27FC236}">
+                      <a16:creationId xmlns:a16="http://schemas.microsoft.com/office/drawing/2014/main" id="{4E7A014F-54F4-5341-F2EE-6BE9FF1743D0}"/>
+                    </a:ext>
+                  </a:extLst>
+                </p:cNvPr>
+                <p:cNvPicPr/>
+                <p:nvPr/>
+              </p:nvPicPr>
+              <p:blipFill>
+                <a:blip r:embed="rId8"/>
+                <a:stretch>
+                  <a:fillRect/>
+                </a:stretch>
+              </p:blipFill>
+              <p:spPr>
+                <a:xfrm>
+                  <a:off x="7455024" y="3998016"/>
+                  <a:ext cx="240480" cy="310320"/>
+                </a:xfrm>
+                <a:prstGeom prst="rect">
+                  <a:avLst/>
+                </a:prstGeom>
+              </p:spPr>
+            </p:pic>
+          </mc:Fallback>
+        </mc:AlternateContent>
+        <mc:AlternateContent xmlns:mc="http://schemas.openxmlformats.org/markup-compatibility/2006" xmlns:p14="http://schemas.microsoft.com/office/powerpoint/2010/main">
+          <mc:Choice Requires="p14">
+            <p:contentPart p14:bwMode="auto" r:id="rId9">
+              <p14:nvContentPartPr>
+                <p14:cNvPr id="54" name="Ink 53">
+                  <a:extLst>
+                    <a:ext uri="{FF2B5EF4-FFF2-40B4-BE49-F238E27FC236}">
+                      <a16:creationId xmlns:a16="http://schemas.microsoft.com/office/drawing/2014/main" id="{754EE7B7-D23D-A736-4FA7-7C926E56622D}"/>
+                    </a:ext>
+                  </a:extLst>
+                </p14:cNvPr>
+                <p14:cNvContentPartPr/>
+                <p14:nvPr/>
+              </p14:nvContentPartPr>
+              <p14:xfrm>
+                <a:off x="7757424" y="4055256"/>
+                <a:ext cx="183600" cy="200520"/>
+              </p14:xfrm>
+            </p:contentPart>
+          </mc:Choice>
+          <mc:Fallback xmlns="">
+            <p:pic>
+              <p:nvPicPr>
+                <p:cNvPr id="54" name="Ink 53">
+                  <a:extLst>
+                    <a:ext uri="{FF2B5EF4-FFF2-40B4-BE49-F238E27FC236}">
+                      <a16:creationId xmlns:a16="http://schemas.microsoft.com/office/drawing/2014/main" id="{754EE7B7-D23D-A736-4FA7-7C926E56622D}"/>
+                    </a:ext>
+                  </a:extLst>
+                </p:cNvPr>
+                <p:cNvPicPr/>
+                <p:nvPr/>
+              </p:nvPicPr>
+              <p:blipFill>
+                <a:blip r:embed="rId10"/>
+                <a:stretch>
+                  <a:fillRect/>
+                </a:stretch>
+              </p:blipFill>
+              <p:spPr>
+                <a:xfrm>
+                  <a:off x="7721784" y="4019256"/>
+                  <a:ext cx="255240" cy="272160"/>
+                </a:xfrm>
+                <a:prstGeom prst="rect">
+                  <a:avLst/>
+                </a:prstGeom>
+              </p:spPr>
+            </p:pic>
+          </mc:Fallback>
+        </mc:AlternateContent>
+        <mc:AlternateContent xmlns:mc="http://schemas.openxmlformats.org/markup-compatibility/2006" xmlns:p14="http://schemas.microsoft.com/office/powerpoint/2010/main">
+          <mc:Choice Requires="p14">
+            <p:contentPart p14:bwMode="auto" r:id="rId11">
+              <p14:nvContentPartPr>
+                <p14:cNvPr id="56" name="Ink 55">
+                  <a:extLst>
+                    <a:ext uri="{FF2B5EF4-FFF2-40B4-BE49-F238E27FC236}">
+                      <a16:creationId xmlns:a16="http://schemas.microsoft.com/office/drawing/2014/main" id="{3C7A1828-EF2B-0454-7495-C20BDF1E8870}"/>
+                    </a:ext>
+                  </a:extLst>
+                </p14:cNvPr>
+                <p14:cNvContentPartPr/>
+                <p14:nvPr/>
+              </p14:nvContentPartPr>
+              <p14:xfrm>
+                <a:off x="5993424" y="3594816"/>
+                <a:ext cx="1508040" cy="754200"/>
+              </p14:xfrm>
+            </p:contentPart>
+          </mc:Choice>
+          <mc:Fallback xmlns="">
+            <p:pic>
+              <p:nvPicPr>
+                <p:cNvPr id="56" name="Ink 55">
+                  <a:extLst>
+                    <a:ext uri="{FF2B5EF4-FFF2-40B4-BE49-F238E27FC236}">
+                      <a16:creationId xmlns:a16="http://schemas.microsoft.com/office/drawing/2014/main" id="{3C7A1828-EF2B-0454-7495-C20BDF1E8870}"/>
+                    </a:ext>
+                  </a:extLst>
+                </p:cNvPr>
+                <p:cNvPicPr/>
+                <p:nvPr/>
+              </p:nvPicPr>
+              <p:blipFill>
+                <a:blip r:embed="rId12"/>
+                <a:stretch>
+                  <a:fillRect/>
+                </a:stretch>
+              </p:blipFill>
+              <p:spPr>
+                <a:xfrm>
+                  <a:off x="5957784" y="3558816"/>
+                  <a:ext cx="1579680" cy="825840"/>
+                </a:xfrm>
+                <a:prstGeom prst="rect">
+                  <a:avLst/>
+                </a:prstGeom>
+              </p:spPr>
+            </p:pic>
+          </mc:Fallback>
+        </mc:AlternateContent>
+        <mc:AlternateContent xmlns:mc="http://schemas.openxmlformats.org/markup-compatibility/2006" xmlns:p14="http://schemas.microsoft.com/office/powerpoint/2010/main">
+          <mc:Choice Requires="p14">
+            <p:contentPart p14:bwMode="auto" r:id="rId13">
+              <p14:nvContentPartPr>
+                <p14:cNvPr id="57" name="Ink 56">
+                  <a:extLst>
+                    <a:ext uri="{FF2B5EF4-FFF2-40B4-BE49-F238E27FC236}">
+                      <a16:creationId xmlns:a16="http://schemas.microsoft.com/office/drawing/2014/main" id="{8323DF79-2C3D-12AC-3DC8-DA41ADAFB76B}"/>
+                    </a:ext>
+                  </a:extLst>
+                </p14:cNvPr>
+                <p14:cNvContentPartPr/>
+                <p14:nvPr/>
+              </p14:nvContentPartPr>
+              <p14:xfrm>
+                <a:off x="7352424" y="3527856"/>
+                <a:ext cx="155160" cy="161640"/>
+              </p14:xfrm>
+            </p:contentPart>
+          </mc:Choice>
+          <mc:Fallback xmlns="">
+            <p:pic>
+              <p:nvPicPr>
+                <p:cNvPr id="57" name="Ink 56">
+                  <a:extLst>
+                    <a:ext uri="{FF2B5EF4-FFF2-40B4-BE49-F238E27FC236}">
+                      <a16:creationId xmlns:a16="http://schemas.microsoft.com/office/drawing/2014/main" id="{8323DF79-2C3D-12AC-3DC8-DA41ADAFB76B}"/>
+                    </a:ext>
+                  </a:extLst>
+                </p:cNvPr>
+                <p:cNvPicPr/>
+                <p:nvPr/>
+              </p:nvPicPr>
+              <p:blipFill>
+                <a:blip r:embed="rId14"/>
+                <a:stretch>
+                  <a:fillRect/>
+                </a:stretch>
+              </p:blipFill>
+              <p:spPr>
+                <a:xfrm>
+                  <a:off x="7316424" y="3492216"/>
+                  <a:ext cx="226800" cy="233280"/>
+                </a:xfrm>
+                <a:prstGeom prst="rect">
+                  <a:avLst/>
+                </a:prstGeom>
+              </p:spPr>
+            </p:pic>
+          </mc:Fallback>
+        </mc:AlternateContent>
+        <mc:AlternateContent xmlns:mc="http://schemas.openxmlformats.org/markup-compatibility/2006" xmlns:p14="http://schemas.microsoft.com/office/powerpoint/2010/main">
+          <mc:Choice Requires="p14">
+            <p:contentPart p14:bwMode="auto" r:id="rId15">
+              <p14:nvContentPartPr>
+                <p14:cNvPr id="59" name="Ink 58">
+                  <a:extLst>
+                    <a:ext uri="{FF2B5EF4-FFF2-40B4-BE49-F238E27FC236}">
+                      <a16:creationId xmlns:a16="http://schemas.microsoft.com/office/drawing/2014/main" id="{A79CA9AE-C99E-8B74-D05F-347754743BEE}"/>
+                    </a:ext>
+                  </a:extLst>
+                </p14:cNvPr>
+                <p14:cNvContentPartPr/>
+                <p14:nvPr/>
+              </p14:nvContentPartPr>
+              <p14:xfrm>
+                <a:off x="7654104" y="3478176"/>
+                <a:ext cx="150480" cy="226080"/>
+              </p14:xfrm>
+            </p:contentPart>
+          </mc:Choice>
+          <mc:Fallback xmlns="">
+            <p:pic>
+              <p:nvPicPr>
+                <p:cNvPr id="59" name="Ink 58">
+                  <a:extLst>
+                    <a:ext uri="{FF2B5EF4-FFF2-40B4-BE49-F238E27FC236}">
+                      <a16:creationId xmlns:a16="http://schemas.microsoft.com/office/drawing/2014/main" id="{A79CA9AE-C99E-8B74-D05F-347754743BEE}"/>
+                    </a:ext>
+                  </a:extLst>
+                </p:cNvPr>
+                <p:cNvPicPr/>
+                <p:nvPr/>
+              </p:nvPicPr>
+              <p:blipFill>
+                <a:blip r:embed="rId16"/>
+                <a:stretch>
+                  <a:fillRect/>
+                </a:stretch>
+              </p:blipFill>
+              <p:spPr>
+                <a:xfrm>
+                  <a:off x="7618104" y="3442536"/>
+                  <a:ext cx="222120" cy="297720"/>
+                </a:xfrm>
+                <a:prstGeom prst="rect">
+                  <a:avLst/>
+                </a:prstGeom>
+              </p:spPr>
+            </p:pic>
+          </mc:Fallback>
+        </mc:AlternateContent>
+        <mc:AlternateContent xmlns:mc="http://schemas.openxmlformats.org/markup-compatibility/2006" xmlns:p14="http://schemas.microsoft.com/office/powerpoint/2010/main">
+          <mc:Choice Requires="p14">
+            <p:contentPart p14:bwMode="auto" r:id="rId17">
+              <p14:nvContentPartPr>
+                <p14:cNvPr id="60" name="Ink 59">
+                  <a:extLst>
+                    <a:ext uri="{FF2B5EF4-FFF2-40B4-BE49-F238E27FC236}">
+                      <a16:creationId xmlns:a16="http://schemas.microsoft.com/office/drawing/2014/main" id="{DBD0BAE2-27F1-224C-A9CC-B741128419C0}"/>
+                    </a:ext>
+                  </a:extLst>
+                </p14:cNvPr>
+                <p14:cNvContentPartPr/>
+                <p14:nvPr/>
+              </p14:nvContentPartPr>
+              <p14:xfrm>
+                <a:off x="7902864" y="3502296"/>
+                <a:ext cx="152280" cy="243000"/>
+              </p14:xfrm>
+            </p:contentPart>
+          </mc:Choice>
+          <mc:Fallback xmlns="">
+            <p:pic>
+              <p:nvPicPr>
+                <p:cNvPr id="60" name="Ink 59">
+                  <a:extLst>
+                    <a:ext uri="{FF2B5EF4-FFF2-40B4-BE49-F238E27FC236}">
+                      <a16:creationId xmlns:a16="http://schemas.microsoft.com/office/drawing/2014/main" id="{DBD0BAE2-27F1-224C-A9CC-B741128419C0}"/>
+                    </a:ext>
+                  </a:extLst>
+                </p:cNvPr>
+                <p:cNvPicPr/>
+                <p:nvPr/>
+              </p:nvPicPr>
+              <p:blipFill>
+                <a:blip r:embed="rId18"/>
+                <a:stretch>
+                  <a:fillRect/>
+                </a:stretch>
+              </p:blipFill>
+              <p:spPr>
+                <a:xfrm>
+                  <a:off x="7867224" y="3466656"/>
+                  <a:ext cx="223920" cy="314640"/>
+                </a:xfrm>
+                <a:prstGeom prst="rect">
+                  <a:avLst/>
+                </a:prstGeom>
+              </p:spPr>
+            </p:pic>
+          </mc:Fallback>
+        </mc:AlternateContent>
+      </p:grpSp>
+      <p:grpSp>
+        <p:nvGrpSpPr>
+          <p:cNvPr id="73" name="Group 72">
+            <a:extLst>
+              <a:ext uri="{FF2B5EF4-FFF2-40B4-BE49-F238E27FC236}">
+                <a16:creationId xmlns:a16="http://schemas.microsoft.com/office/drawing/2014/main" id="{24177E22-1DD7-007A-C15D-3F48C40E8AEA}"/>
+              </a:ext>
+            </a:extLst>
+          </p:cNvPr>
+          <p:cNvGrpSpPr/>
+          <p:nvPr/>
+        </p:nvGrpSpPr>
+        <p:grpSpPr>
+          <a:xfrm>
+            <a:off x="5993424" y="4962816"/>
+            <a:ext cx="2496600" cy="671040"/>
+            <a:chOff x="5993424" y="4962816"/>
+            <a:chExt cx="2496600" cy="671040"/>
+          </a:xfrm>
+        </p:grpSpPr>
+        <mc:AlternateContent xmlns:mc="http://schemas.openxmlformats.org/markup-compatibility/2006" xmlns:p14="http://schemas.microsoft.com/office/powerpoint/2010/main">
+          <mc:Choice Requires="p14">
+            <p:contentPart p14:bwMode="auto" r:id="rId19">
+              <p14:nvContentPartPr>
+                <p14:cNvPr id="62" name="Ink 61">
+                  <a:extLst>
+                    <a:ext uri="{FF2B5EF4-FFF2-40B4-BE49-F238E27FC236}">
+                      <a16:creationId xmlns:a16="http://schemas.microsoft.com/office/drawing/2014/main" id="{6CC01A34-A70D-488A-399E-A9338D6603D3}"/>
+                    </a:ext>
+                  </a:extLst>
+                </p14:cNvPr>
+                <p14:cNvContentPartPr/>
+                <p14:nvPr/>
+              </p14:nvContentPartPr>
+              <p14:xfrm>
+                <a:off x="6506784" y="5110416"/>
+                <a:ext cx="716040" cy="99720"/>
+              </p14:xfrm>
+            </p:contentPart>
+          </mc:Choice>
+          <mc:Fallback xmlns="">
+            <p:pic>
+              <p:nvPicPr>
+                <p:cNvPr id="62" name="Ink 61">
+                  <a:extLst>
+                    <a:ext uri="{FF2B5EF4-FFF2-40B4-BE49-F238E27FC236}">
+                      <a16:creationId xmlns:a16="http://schemas.microsoft.com/office/drawing/2014/main" id="{6CC01A34-A70D-488A-399E-A9338D6603D3}"/>
+                    </a:ext>
+                  </a:extLst>
+                </p:cNvPr>
+                <p:cNvPicPr/>
+                <p:nvPr/>
+              </p:nvPicPr>
+              <p:blipFill>
+                <a:blip r:embed="rId20"/>
+                <a:stretch>
+                  <a:fillRect/>
+                </a:stretch>
+              </p:blipFill>
+              <p:spPr>
+                <a:xfrm>
+                  <a:off x="6471144" y="5074416"/>
+                  <a:ext cx="787680" cy="171360"/>
+                </a:xfrm>
+                <a:prstGeom prst="rect">
+                  <a:avLst/>
+                </a:prstGeom>
+              </p:spPr>
+            </p:pic>
+          </mc:Fallback>
+        </mc:AlternateContent>
+        <mc:AlternateContent xmlns:mc="http://schemas.openxmlformats.org/markup-compatibility/2006" xmlns:p14="http://schemas.microsoft.com/office/powerpoint/2010/main">
+          <mc:Choice Requires="p14">
+            <p:contentPart p14:bwMode="auto" r:id="rId21">
+              <p14:nvContentPartPr>
+                <p14:cNvPr id="63" name="Ink 62">
+                  <a:extLst>
+                    <a:ext uri="{FF2B5EF4-FFF2-40B4-BE49-F238E27FC236}">
+                      <a16:creationId xmlns:a16="http://schemas.microsoft.com/office/drawing/2014/main" id="{640F6000-F833-42BB-2E60-111D74F0F56C}"/>
+                    </a:ext>
+                  </a:extLst>
+                </p14:cNvPr>
+                <p14:cNvContentPartPr/>
+                <p14:nvPr/>
+              </p14:nvContentPartPr>
+              <p14:xfrm>
+                <a:off x="7090344" y="5048136"/>
+                <a:ext cx="164520" cy="152280"/>
+              </p14:xfrm>
+            </p:contentPart>
+          </mc:Choice>
+          <mc:Fallback xmlns="">
+            <p:pic>
+              <p:nvPicPr>
+                <p:cNvPr id="63" name="Ink 62">
+                  <a:extLst>
+                    <a:ext uri="{FF2B5EF4-FFF2-40B4-BE49-F238E27FC236}">
+                      <a16:creationId xmlns:a16="http://schemas.microsoft.com/office/drawing/2014/main" id="{640F6000-F833-42BB-2E60-111D74F0F56C}"/>
+                    </a:ext>
+                  </a:extLst>
+                </p:cNvPr>
+                <p:cNvPicPr/>
+                <p:nvPr/>
+              </p:nvPicPr>
+              <p:blipFill>
+                <a:blip r:embed="rId22"/>
+                <a:stretch>
+                  <a:fillRect/>
+                </a:stretch>
+              </p:blipFill>
+              <p:spPr>
+                <a:xfrm>
+                  <a:off x="7054704" y="5012136"/>
+                  <a:ext cx="236160" cy="223920"/>
+                </a:xfrm>
+                <a:prstGeom prst="rect">
+                  <a:avLst/>
+                </a:prstGeom>
+              </p:spPr>
+            </p:pic>
+          </mc:Fallback>
+        </mc:AlternateContent>
+        <mc:AlternateContent xmlns:mc="http://schemas.openxmlformats.org/markup-compatibility/2006" xmlns:p14="http://schemas.microsoft.com/office/powerpoint/2010/main">
+          <mc:Choice Requires="p14">
+            <p:contentPart p14:bwMode="auto" r:id="rId23">
+              <p14:nvContentPartPr>
+                <p14:cNvPr id="64" name="Ink 63">
+                  <a:extLst>
+                    <a:ext uri="{FF2B5EF4-FFF2-40B4-BE49-F238E27FC236}">
+                      <a16:creationId xmlns:a16="http://schemas.microsoft.com/office/drawing/2014/main" id="{D540DFD4-099B-14B2-F3DF-6DB86D6F5DD6}"/>
+                    </a:ext>
+                  </a:extLst>
+                </p14:cNvPr>
+                <p14:cNvContentPartPr/>
+                <p14:nvPr/>
+              </p14:nvContentPartPr>
+              <p14:xfrm>
+                <a:off x="7515504" y="4962816"/>
+                <a:ext cx="159840" cy="217440"/>
+              </p14:xfrm>
+            </p:contentPart>
+          </mc:Choice>
+          <mc:Fallback xmlns="">
+            <p:pic>
+              <p:nvPicPr>
+                <p:cNvPr id="64" name="Ink 63">
+                  <a:extLst>
+                    <a:ext uri="{FF2B5EF4-FFF2-40B4-BE49-F238E27FC236}">
+                      <a16:creationId xmlns:a16="http://schemas.microsoft.com/office/drawing/2014/main" id="{D540DFD4-099B-14B2-F3DF-6DB86D6F5DD6}"/>
+                    </a:ext>
+                  </a:extLst>
+                </p:cNvPr>
+                <p:cNvPicPr/>
+                <p:nvPr/>
+              </p:nvPicPr>
+              <p:blipFill>
+                <a:blip r:embed="rId24"/>
+                <a:stretch>
+                  <a:fillRect/>
+                </a:stretch>
+              </p:blipFill>
+              <p:spPr>
+                <a:xfrm>
+                  <a:off x="7479504" y="4926816"/>
+                  <a:ext cx="231480" cy="289080"/>
+                </a:xfrm>
+                <a:prstGeom prst="rect">
+                  <a:avLst/>
+                </a:prstGeom>
+              </p:spPr>
+            </p:pic>
+          </mc:Fallback>
+        </mc:AlternateContent>
+        <mc:AlternateContent xmlns:mc="http://schemas.openxmlformats.org/markup-compatibility/2006" xmlns:p14="http://schemas.microsoft.com/office/powerpoint/2010/main">
+          <mc:Choice Requires="p14">
+            <p:contentPart p14:bwMode="auto" r:id="rId25">
+              <p14:nvContentPartPr>
+                <p14:cNvPr id="65" name="Ink 64">
+                  <a:extLst>
+                    <a:ext uri="{FF2B5EF4-FFF2-40B4-BE49-F238E27FC236}">
+                      <a16:creationId xmlns:a16="http://schemas.microsoft.com/office/drawing/2014/main" id="{1A33F3A9-ADED-5285-9006-A0913A4B9CB7}"/>
+                    </a:ext>
+                  </a:extLst>
+                </p14:cNvPr>
+                <p14:cNvContentPartPr/>
+                <p14:nvPr/>
+              </p14:nvContentPartPr>
+              <p14:xfrm>
+                <a:off x="7683624" y="5012856"/>
+                <a:ext cx="318600" cy="198720"/>
+              </p14:xfrm>
+            </p:contentPart>
+          </mc:Choice>
+          <mc:Fallback xmlns="">
+            <p:pic>
+              <p:nvPicPr>
+                <p:cNvPr id="65" name="Ink 64">
+                  <a:extLst>
+                    <a:ext uri="{FF2B5EF4-FFF2-40B4-BE49-F238E27FC236}">
+                      <a16:creationId xmlns:a16="http://schemas.microsoft.com/office/drawing/2014/main" id="{1A33F3A9-ADED-5285-9006-A0913A4B9CB7}"/>
+                    </a:ext>
+                  </a:extLst>
+                </p:cNvPr>
+                <p:cNvPicPr/>
+                <p:nvPr/>
+              </p:nvPicPr>
+              <p:blipFill>
+                <a:blip r:embed="rId26"/>
+                <a:stretch>
+                  <a:fillRect/>
+                </a:stretch>
+              </p:blipFill>
+              <p:spPr>
+                <a:xfrm>
+                  <a:off x="7647624" y="4976856"/>
+                  <a:ext cx="390240" cy="270360"/>
+                </a:xfrm>
+                <a:prstGeom prst="rect">
+                  <a:avLst/>
+                </a:prstGeom>
+              </p:spPr>
+            </p:pic>
+          </mc:Fallback>
+        </mc:AlternateContent>
+        <mc:AlternateContent xmlns:mc="http://schemas.openxmlformats.org/markup-compatibility/2006" xmlns:p14="http://schemas.microsoft.com/office/powerpoint/2010/main">
+          <mc:Choice Requires="p14">
+            <p:contentPart p14:bwMode="auto" r:id="rId27">
+              <p14:nvContentPartPr>
+                <p14:cNvPr id="67" name="Ink 66">
+                  <a:extLst>
+                    <a:ext uri="{FF2B5EF4-FFF2-40B4-BE49-F238E27FC236}">
+                      <a16:creationId xmlns:a16="http://schemas.microsoft.com/office/drawing/2014/main" id="{27120E8D-0C75-5D74-1797-38FD7B575A95}"/>
+                    </a:ext>
+                  </a:extLst>
+                </p14:cNvPr>
+                <p14:cNvContentPartPr/>
+                <p14:nvPr/>
+              </p14:nvContentPartPr>
+              <p14:xfrm>
+                <a:off x="5993424" y="5339736"/>
+                <a:ext cx="1231560" cy="271800"/>
+              </p14:xfrm>
+            </p:contentPart>
+          </mc:Choice>
+          <mc:Fallback xmlns="">
+            <p:pic>
+              <p:nvPicPr>
+                <p:cNvPr id="67" name="Ink 66">
+                  <a:extLst>
+                    <a:ext uri="{FF2B5EF4-FFF2-40B4-BE49-F238E27FC236}">
+                      <a16:creationId xmlns:a16="http://schemas.microsoft.com/office/drawing/2014/main" id="{27120E8D-0C75-5D74-1797-38FD7B575A95}"/>
+                    </a:ext>
+                  </a:extLst>
+                </p:cNvPr>
+                <p:cNvPicPr/>
+                <p:nvPr/>
+              </p:nvPicPr>
+              <p:blipFill>
+                <a:blip r:embed="rId28"/>
+                <a:stretch>
+                  <a:fillRect/>
+                </a:stretch>
+              </p:blipFill>
+              <p:spPr>
+                <a:xfrm>
+                  <a:off x="5957784" y="5303736"/>
+                  <a:ext cx="1303200" cy="343440"/>
+                </a:xfrm>
+                <a:prstGeom prst="rect">
+                  <a:avLst/>
+                </a:prstGeom>
+              </p:spPr>
+            </p:pic>
+          </mc:Fallback>
+        </mc:AlternateContent>
+        <mc:AlternateContent xmlns:mc="http://schemas.openxmlformats.org/markup-compatibility/2006" xmlns:p14="http://schemas.microsoft.com/office/powerpoint/2010/main">
+          <mc:Choice Requires="p14">
+            <p:contentPart p14:bwMode="auto" r:id="rId29">
+              <p14:nvContentPartPr>
+                <p14:cNvPr id="68" name="Ink 67">
+                  <a:extLst>
+                    <a:ext uri="{FF2B5EF4-FFF2-40B4-BE49-F238E27FC236}">
+                      <a16:creationId xmlns:a16="http://schemas.microsoft.com/office/drawing/2014/main" id="{8E4B3166-4F1D-6BD7-B072-959E2172E5A1}"/>
+                    </a:ext>
+                  </a:extLst>
+                </p14:cNvPr>
+                <p14:cNvContentPartPr/>
+                <p14:nvPr/>
+              </p14:nvContentPartPr>
+              <p14:xfrm>
+                <a:off x="7212744" y="5482656"/>
+                <a:ext cx="158400" cy="151200"/>
+              </p14:xfrm>
+            </p:contentPart>
+          </mc:Choice>
+          <mc:Fallback xmlns="">
+            <p:pic>
+              <p:nvPicPr>
+                <p:cNvPr id="68" name="Ink 67">
+                  <a:extLst>
+                    <a:ext uri="{FF2B5EF4-FFF2-40B4-BE49-F238E27FC236}">
+                      <a16:creationId xmlns:a16="http://schemas.microsoft.com/office/drawing/2014/main" id="{8E4B3166-4F1D-6BD7-B072-959E2172E5A1}"/>
+                    </a:ext>
+                  </a:extLst>
+                </p:cNvPr>
+                <p:cNvPicPr/>
+                <p:nvPr/>
+              </p:nvPicPr>
+              <p:blipFill>
+                <a:blip r:embed="rId30"/>
+                <a:stretch>
+                  <a:fillRect/>
+                </a:stretch>
+              </p:blipFill>
+              <p:spPr>
+                <a:xfrm>
+                  <a:off x="7176744" y="5447016"/>
+                  <a:ext cx="230040" cy="222840"/>
+                </a:xfrm>
+                <a:prstGeom prst="rect">
+                  <a:avLst/>
+                </a:prstGeom>
+              </p:spPr>
+            </p:pic>
+          </mc:Fallback>
+        </mc:AlternateContent>
+        <mc:AlternateContent xmlns:mc="http://schemas.openxmlformats.org/markup-compatibility/2006" xmlns:p14="http://schemas.microsoft.com/office/powerpoint/2010/main">
+          <mc:Choice Requires="p14">
+            <p:contentPart p14:bwMode="auto" r:id="rId31">
+              <p14:nvContentPartPr>
+                <p14:cNvPr id="69" name="Ink 68">
+                  <a:extLst>
+                    <a:ext uri="{FF2B5EF4-FFF2-40B4-BE49-F238E27FC236}">
+                      <a16:creationId xmlns:a16="http://schemas.microsoft.com/office/drawing/2014/main" id="{411095B1-F76A-B11E-50F6-1C83B341DBDA}"/>
+                    </a:ext>
+                  </a:extLst>
+                </p14:cNvPr>
+                <p14:cNvContentPartPr/>
+                <p14:nvPr/>
+              </p14:nvContentPartPr>
+              <p14:xfrm>
+                <a:off x="7545744" y="5469696"/>
+                <a:ext cx="57600" cy="160920"/>
+              </p14:xfrm>
+            </p:contentPart>
+          </mc:Choice>
+          <mc:Fallback xmlns="">
+            <p:pic>
+              <p:nvPicPr>
+                <p:cNvPr id="69" name="Ink 68">
+                  <a:extLst>
+                    <a:ext uri="{FF2B5EF4-FFF2-40B4-BE49-F238E27FC236}">
+                      <a16:creationId xmlns:a16="http://schemas.microsoft.com/office/drawing/2014/main" id="{411095B1-F76A-B11E-50F6-1C83B341DBDA}"/>
+                    </a:ext>
+                  </a:extLst>
+                </p:cNvPr>
+                <p:cNvPicPr/>
+                <p:nvPr/>
+              </p:nvPicPr>
+              <p:blipFill>
+                <a:blip r:embed="rId32"/>
+                <a:stretch>
+                  <a:fillRect/>
+                </a:stretch>
+              </p:blipFill>
+              <p:spPr>
+                <a:xfrm>
+                  <a:off x="7509744" y="5434056"/>
+                  <a:ext cx="129240" cy="232560"/>
+                </a:xfrm>
+                <a:prstGeom prst="rect">
+                  <a:avLst/>
+                </a:prstGeom>
+              </p:spPr>
+            </p:pic>
+          </mc:Fallback>
+        </mc:AlternateContent>
+        <mc:AlternateContent xmlns:mc="http://schemas.openxmlformats.org/markup-compatibility/2006" xmlns:p14="http://schemas.microsoft.com/office/powerpoint/2010/main">
+          <mc:Choice Requires="p14">
+            <p:contentPart p14:bwMode="auto" r:id="rId33">
+              <p14:nvContentPartPr>
+                <p14:cNvPr id="70" name="Ink 69">
+                  <a:extLst>
+                    <a:ext uri="{FF2B5EF4-FFF2-40B4-BE49-F238E27FC236}">
+                      <a16:creationId xmlns:a16="http://schemas.microsoft.com/office/drawing/2014/main" id="{4818729B-6DF3-C826-A8BF-51B01FA22E6C}"/>
+                    </a:ext>
+                  </a:extLst>
+                </p14:cNvPr>
+                <p14:cNvContentPartPr/>
+                <p14:nvPr/>
+              </p14:nvContentPartPr>
+              <p14:xfrm>
+                <a:off x="7749504" y="5484816"/>
+                <a:ext cx="286200" cy="128160"/>
+              </p14:xfrm>
+            </p:contentPart>
+          </mc:Choice>
+          <mc:Fallback xmlns="">
+            <p:pic>
+              <p:nvPicPr>
+                <p:cNvPr id="70" name="Ink 69">
+                  <a:extLst>
+                    <a:ext uri="{FF2B5EF4-FFF2-40B4-BE49-F238E27FC236}">
+                      <a16:creationId xmlns:a16="http://schemas.microsoft.com/office/drawing/2014/main" id="{4818729B-6DF3-C826-A8BF-51B01FA22E6C}"/>
+                    </a:ext>
+                  </a:extLst>
+                </p:cNvPr>
+                <p:cNvPicPr/>
+                <p:nvPr/>
+              </p:nvPicPr>
+              <p:blipFill>
+                <a:blip r:embed="rId34"/>
+                <a:stretch>
+                  <a:fillRect/>
+                </a:stretch>
+              </p:blipFill>
+              <p:spPr>
+                <a:xfrm>
+                  <a:off x="7713504" y="5448816"/>
+                  <a:ext cx="357840" cy="199800"/>
+                </a:xfrm>
+                <a:prstGeom prst="rect">
+                  <a:avLst/>
+                </a:prstGeom>
+              </p:spPr>
+            </p:pic>
+          </mc:Fallback>
+        </mc:AlternateContent>
+        <mc:AlternateContent xmlns:mc="http://schemas.openxmlformats.org/markup-compatibility/2006" xmlns:p14="http://schemas.microsoft.com/office/powerpoint/2010/main">
+          <mc:Choice Requires="p14">
+            <p:contentPart p14:bwMode="auto" r:id="rId35">
+              <p14:nvContentPartPr>
+                <p14:cNvPr id="71" name="Ink 70">
+                  <a:extLst>
+                    <a:ext uri="{FF2B5EF4-FFF2-40B4-BE49-F238E27FC236}">
+                      <a16:creationId xmlns:a16="http://schemas.microsoft.com/office/drawing/2014/main" id="{ED71FF5E-87FD-F0C4-C60E-ED021C74B67D}"/>
+                    </a:ext>
+                  </a:extLst>
+                </p14:cNvPr>
+                <p14:cNvContentPartPr/>
+                <p14:nvPr/>
+              </p14:nvContentPartPr>
+              <p14:xfrm>
+                <a:off x="8156304" y="5434776"/>
+                <a:ext cx="172800" cy="173520"/>
+              </p14:xfrm>
+            </p:contentPart>
+          </mc:Choice>
+          <mc:Fallback xmlns="">
+            <p:pic>
+              <p:nvPicPr>
+                <p:cNvPr id="71" name="Ink 70">
+                  <a:extLst>
+                    <a:ext uri="{FF2B5EF4-FFF2-40B4-BE49-F238E27FC236}">
+                      <a16:creationId xmlns:a16="http://schemas.microsoft.com/office/drawing/2014/main" id="{ED71FF5E-87FD-F0C4-C60E-ED021C74B67D}"/>
+                    </a:ext>
+                  </a:extLst>
+                </p:cNvPr>
+                <p:cNvPicPr/>
+                <p:nvPr/>
+              </p:nvPicPr>
+              <p:blipFill>
+                <a:blip r:embed="rId36"/>
+                <a:stretch>
+                  <a:fillRect/>
+                </a:stretch>
+              </p:blipFill>
+              <p:spPr>
+                <a:xfrm>
+                  <a:off x="8120304" y="5398776"/>
+                  <a:ext cx="244440" cy="245160"/>
+                </a:xfrm>
+                <a:prstGeom prst="rect">
+                  <a:avLst/>
+                </a:prstGeom>
+              </p:spPr>
+            </p:pic>
+          </mc:Fallback>
+        </mc:AlternateContent>
+        <mc:AlternateContent xmlns:mc="http://schemas.openxmlformats.org/markup-compatibility/2006" xmlns:p14="http://schemas.microsoft.com/office/powerpoint/2010/main">
+          <mc:Choice Requires="p14">
+            <p:contentPart p14:bwMode="auto" r:id="rId37">
+              <p14:nvContentPartPr>
+                <p14:cNvPr id="72" name="Ink 71">
+                  <a:extLst>
+                    <a:ext uri="{FF2B5EF4-FFF2-40B4-BE49-F238E27FC236}">
+                      <a16:creationId xmlns:a16="http://schemas.microsoft.com/office/drawing/2014/main" id="{07771510-0902-B7AD-C414-2B5D58314603}"/>
+                    </a:ext>
+                  </a:extLst>
+                </p14:cNvPr>
+                <p14:cNvContentPartPr/>
+                <p14:nvPr/>
+              </p14:nvContentPartPr>
+              <p14:xfrm>
+                <a:off x="8316864" y="5362776"/>
+                <a:ext cx="173160" cy="59760"/>
+              </p14:xfrm>
+            </p:contentPart>
+          </mc:Choice>
+          <mc:Fallback xmlns="">
+            <p:pic>
+              <p:nvPicPr>
+                <p:cNvPr id="72" name="Ink 71">
+                  <a:extLst>
+                    <a:ext uri="{FF2B5EF4-FFF2-40B4-BE49-F238E27FC236}">
+                      <a16:creationId xmlns:a16="http://schemas.microsoft.com/office/drawing/2014/main" id="{07771510-0902-B7AD-C414-2B5D58314603}"/>
+                    </a:ext>
+                  </a:extLst>
+                </p:cNvPr>
+                <p:cNvPicPr/>
+                <p:nvPr/>
+              </p:nvPicPr>
+              <p:blipFill>
+                <a:blip r:embed="rId38"/>
+                <a:stretch>
+                  <a:fillRect/>
+                </a:stretch>
+              </p:blipFill>
+              <p:spPr>
+                <a:xfrm>
+                  <a:off x="8280864" y="5326776"/>
+                  <a:ext cx="244800" cy="131400"/>
+                </a:xfrm>
+                <a:prstGeom prst="rect">
+                  <a:avLst/>
+                </a:prstGeom>
+              </p:spPr>
+            </p:pic>
+          </mc:Fallback>
+        </mc:AlternateContent>
+      </p:grpSp>
+    </p:spTree>
+    <p:extLst>
+      <p:ext uri="{BB962C8B-B14F-4D97-AF65-F5344CB8AC3E}">
+        <p14:creationId xmlns:p14="http://schemas.microsoft.com/office/powerpoint/2010/main" val="2886141958"/>
+      </p:ext>
+    </p:extLst>
+  </p:cSld>
+  <p:clrMapOvr>
+    <a:masterClrMapping/>
+  </p:clrMapOvr>
+</p:sld>
+</file>
+
+<file path=ppt/slides/slide11.xml><?xml version="1.0" encoding="utf-8"?>
+<p:sld xmlns:a="http://schemas.openxmlformats.org/drawingml/2006/main" xmlns:r="http://schemas.openxmlformats.org/officeDocument/2006/relationships" xmlns:p="http://schemas.openxmlformats.org/presentationml/2006/main">
+  <p:cSld>
+    <p:spTree>
+      <p:nvGrpSpPr>
+        <p:cNvPr id="1" name="">
+          <a:extLst>
+            <a:ext uri="{FF2B5EF4-FFF2-40B4-BE49-F238E27FC236}">
               <a16:creationId xmlns:a16="http://schemas.microsoft.com/office/drawing/2014/main" id="{9461BAA0-7037-F534-C4D5-AC33B9EB0FE4}"/>
             </a:ext>
           </a:extLst>
@@ -10164,7 +11708,7 @@
 </p:sld>
 </file>
 
-<file path=ppt/slides/slide11.xml><?xml version="1.0" encoding="utf-8"?>
+<file path=ppt/slides/slide12.xml><?xml version="1.0" encoding="utf-8"?>
 <p:sld xmlns:a="http://schemas.openxmlformats.org/drawingml/2006/main" xmlns:r="http://schemas.openxmlformats.org/officeDocument/2006/relationships" xmlns:p="http://schemas.openxmlformats.org/presentationml/2006/main">
   <p:cSld>
     <p:spTree>
@@ -10201,6 +11745,11 @@
           </p:cNvGraphicFramePr>
           <p:nvPr>
             <p:ph idx="1"/>
+            <p:extLst>
+              <p:ext uri="{D42A27DB-BD31-4B8C-83A1-F6EECF244321}">
+                <p14:modId xmlns:p14="http://schemas.microsoft.com/office/powerpoint/2010/main" val="3581653777"/>
+              </p:ext>
+            </p:extLst>
           </p:nvPr>
         </p:nvGraphicFramePr>
         <p:xfrm>
@@ -10402,7 +11951,7 @@
                     <a:lstStyle/>
                     <a:p>
                       <a:r>
-                        <a:rPr lang="en-US" b="0" baseline="0" dirty="0">
+                        <a:rPr lang="en-US" b="1" baseline="0" dirty="0">
                           <a:solidFill>
                             <a:schemeClr val="accent6">
                               <a:lumMod val="60000"/>
@@ -10464,7 +12013,7 @@
                     <a:lstStyle/>
                     <a:p>
                       <a:r>
-                        <a:rPr lang="en-US" b="0" baseline="0" dirty="0">
+                        <a:rPr lang="en-US" b="1" baseline="0" dirty="0">
                           <a:solidFill>
                             <a:schemeClr val="accent6">
                               <a:lumMod val="60000"/>
@@ -10905,7 +12454,7 @@
                     <a:lstStyle/>
                     <a:p>
                       <a:r>
-                        <a:rPr lang="en-US" b="0" baseline="0" dirty="0">
+                        <a:rPr lang="en-US" b="1" baseline="0" dirty="0">
                           <a:solidFill>
                             <a:schemeClr val="accent6">
                               <a:lumMod val="60000"/>
@@ -11470,7 +13019,7 @@
                     <a:lstStyle/>
                     <a:p>
                       <a:r>
-                        <a:rPr lang="en-US" b="0" baseline="0" dirty="0">
+                        <a:rPr lang="en-US" b="1" baseline="0" dirty="0">
                           <a:solidFill>
                             <a:schemeClr val="accent6">
                               <a:lumMod val="60000"/>
@@ -12035,7 +13584,7 @@
                     <a:lstStyle/>
                     <a:p>
                       <a:r>
-                        <a:rPr lang="en-US" b="0" baseline="0" dirty="0">
+                        <a:rPr lang="en-US" b="1" baseline="0" dirty="0">
                           <a:solidFill>
                             <a:schemeClr val="accent6">
                               <a:lumMod val="60000"/>
@@ -12600,7 +14149,7 @@
                     <a:lstStyle/>
                     <a:p>
                       <a:r>
-                        <a:rPr lang="en-US" b="0" baseline="0" dirty="0">
+                        <a:rPr lang="en-US" b="1" baseline="0" dirty="0">
                           <a:solidFill>
                             <a:schemeClr val="accent6">
                               <a:lumMod val="60000"/>
@@ -13165,7 +14714,7 @@
                     <a:lstStyle/>
                     <a:p>
                       <a:r>
-                        <a:rPr lang="en-US" b="0" baseline="0" dirty="0">
+                        <a:rPr lang="en-US" b="1" baseline="0" dirty="0">
                           <a:solidFill>
                             <a:schemeClr val="accent6">
                               <a:lumMod val="60000"/>
@@ -13730,7 +15279,7 @@
                     <a:lstStyle/>
                     <a:p>
                       <a:r>
-                        <a:rPr lang="en-US" b="0" baseline="0" dirty="0">
+                        <a:rPr lang="en-US" b="1" baseline="0" dirty="0">
                           <a:solidFill>
                             <a:schemeClr val="accent6">
                               <a:lumMod val="60000"/>
@@ -14233,7 +15782,7 @@
                     <a:lstStyle/>
                     <a:p>
                       <a:r>
-                        <a:rPr lang="en-US" b="0" baseline="0" dirty="0">
+                        <a:rPr lang="en-US" b="1" baseline="0" dirty="0">
                           <a:solidFill>
                             <a:schemeClr val="accent6">
                               <a:lumMod val="60000"/>
@@ -14487,7 +16036,7 @@
         </p:nvSpPr>
         <p:spPr>
           <a:xfrm>
-            <a:off x="1100138" y="5715000"/>
+            <a:off x="1420119" y="5449386"/>
             <a:ext cx="2217915" cy="461665"/>
           </a:xfrm>
           <a:prstGeom prst="rect">
@@ -14529,7 +16078,7 @@
         </p:nvSpPr>
         <p:spPr>
           <a:xfrm>
-            <a:off x="7186613" y="5915025"/>
+            <a:off x="6692837" y="5585841"/>
             <a:ext cx="4758995" cy="461665"/>
           </a:xfrm>
           <a:prstGeom prst="rect">
@@ -18276,7 +19825,7 @@
         <p:spPr>
           <a:xfrm>
             <a:off x="553212" y="830318"/>
-            <a:ext cx="6190488" cy="461665"/>
+            <a:ext cx="4832604" cy="830997"/>
           </a:xfrm>
           <a:prstGeom prst="rect">
             <a:avLst/>
@@ -18298,7 +19847,20 @@
                   </a:schemeClr>
                 </a:solidFill>
               </a:rPr>
-              <a:t>Images are represented as matrix</a:t>
+              <a:t>Images are represented as matrix:</a:t>
+            </a:r>
+          </a:p>
+          <a:p>
+            <a:r>
+              <a:rPr lang="en-US" sz="2400" dirty="0">
+                <a:solidFill>
+                  <a:schemeClr val="accent6">
+                    <a:lumMod val="60000"/>
+                    <a:lumOff val="40000"/>
+                  </a:schemeClr>
+                </a:solidFill>
+              </a:rPr>
+              <a:t>Below is a  simple image in gray scale</a:t>
             </a:r>
           </a:p>
         </p:txBody>
@@ -18368,7 +19930,7 @@
 </p:sld>
 </file>
 
-<file path=ppt/slides/slide12.xml><?xml version="1.0" encoding="utf-8"?>
+<file path=ppt/slides/slide13.xml><?xml version="1.0" encoding="utf-8"?>
 <p:sld xmlns:a="http://schemas.openxmlformats.org/drawingml/2006/main" xmlns:r="http://schemas.openxmlformats.org/officeDocument/2006/relationships" xmlns:p="http://schemas.openxmlformats.org/presentationml/2006/main">
   <p:cSld>
     <p:spTree>
@@ -18424,7 +19986,7 @@
             <p:ph idx="1"/>
             <p:extLst>
               <p:ext uri="{D42A27DB-BD31-4B8C-83A1-F6EECF244321}">
-                <p14:modId xmlns:p14="http://schemas.microsoft.com/office/powerpoint/2010/main" val="2110648961"/>
+                <p14:modId xmlns:p14="http://schemas.microsoft.com/office/powerpoint/2010/main" val="3167328999"/>
               </p:ext>
             </p:extLst>
           </p:nvPr>
@@ -19523,7 +21085,7 @@
         <p:spPr>
           <a:xfrm>
             <a:off x="3423050" y="2262892"/>
-            <a:ext cx="885825" cy="404814"/>
+            <a:ext cx="3828142" cy="404814"/>
           </a:xfrm>
           <a:prstGeom prst="rightArrow">
             <a:avLst/>
@@ -22377,7 +23939,7 @@
 </p:sld>
 </file>
 
-<file path=ppt/slides/slide13.xml><?xml version="1.0" encoding="utf-8"?>
+<file path=ppt/slides/slide14.xml><?xml version="1.0" encoding="utf-8"?>
 <p:sld xmlns:a="http://schemas.openxmlformats.org/drawingml/2006/main" xmlns:r="http://schemas.openxmlformats.org/officeDocument/2006/relationships" xmlns:p="http://schemas.openxmlformats.org/presentationml/2006/main">
   <p:cSld>
     <p:spTree>
@@ -22480,7 +24042,7 @@
         </p:blipFill>
         <p:spPr bwMode="auto">
           <a:xfrm>
-            <a:off x="873226" y="749808"/>
+            <a:off x="576072" y="533031"/>
             <a:ext cx="9870593" cy="2947963"/>
           </a:xfrm>
           <a:prstGeom prst="rect">
@@ -22512,8 +24074,8 @@
         </p:nvSpPr>
         <p:spPr>
           <a:xfrm>
-            <a:off x="178308" y="4284846"/>
-            <a:ext cx="4274820" cy="1631216"/>
+            <a:off x="406908" y="3608190"/>
+            <a:ext cx="4695444" cy="1323439"/>
           </a:xfrm>
           <a:prstGeom prst="rect">
             <a:avLst/>
@@ -22618,7 +24180,7 @@
                 <a:effectLst/>
                 <a:latin typeface="+mj-lt"/>
               </a:rPr>
-              <a:t>So, a grayscale image is represented as (height, width, 1) or simply (height, width) </a:t>
+              <a:t>So, a grayscale image is represented as (height, width, 1)</a:t>
             </a:r>
           </a:p>
         </p:txBody>
@@ -22637,8 +24199,8 @@
         </p:nvSpPr>
         <p:spPr>
           <a:xfrm>
-            <a:off x="5823204" y="4282119"/>
-            <a:ext cx="6190488" cy="1631216"/>
+            <a:off x="5731764" y="3770055"/>
+            <a:ext cx="6190488" cy="1015663"/>
           </a:xfrm>
           <a:prstGeom prst="rect">
             <a:avLst/>
@@ -22839,11 +24401,71 @@
                 <a:effectLst/>
                 <a:latin typeface="+mj-lt"/>
               </a:rPr>
-              <a:t>So, an RGB image is represented as (height, width, 3). The third dimension denotes the number of color channels in the image. </a:t>
+              <a:t>So, an RGB image is represented as (height, width, 3). </a:t>
             </a:r>
           </a:p>
         </p:txBody>
       </p:sp>
+      <p:pic>
+        <p:nvPicPr>
+          <p:cNvPr id="6" name="Picture 5">
+            <a:extLst>
+              <a:ext uri="{FF2B5EF4-FFF2-40B4-BE49-F238E27FC236}">
+                <a16:creationId xmlns:a16="http://schemas.microsoft.com/office/drawing/2014/main" id="{0A2E4C57-6120-6786-8C63-C2A482645FB1}"/>
+              </a:ext>
+            </a:extLst>
+          </p:cNvPr>
+          <p:cNvPicPr>
+            <a:picLocks noChangeAspect="1"/>
+          </p:cNvPicPr>
+          <p:nvPr/>
+        </p:nvPicPr>
+        <p:blipFill>
+          <a:blip r:embed="rId3"/>
+          <a:stretch>
+            <a:fillRect/>
+          </a:stretch>
+        </p:blipFill>
+        <p:spPr>
+          <a:xfrm>
+            <a:off x="1422388" y="5058825"/>
+            <a:ext cx="1668284" cy="1691375"/>
+          </a:xfrm>
+          <a:prstGeom prst="rect">
+            <a:avLst/>
+          </a:prstGeom>
+        </p:spPr>
+      </p:pic>
+      <p:pic>
+        <p:nvPicPr>
+          <p:cNvPr id="2" name="Picture 1">
+            <a:extLst>
+              <a:ext uri="{FF2B5EF4-FFF2-40B4-BE49-F238E27FC236}">
+                <a16:creationId xmlns:a16="http://schemas.microsoft.com/office/drawing/2014/main" id="{2568CAAB-7EFE-7A09-96A5-5D0C758FD884}"/>
+              </a:ext>
+            </a:extLst>
+          </p:cNvPr>
+          <p:cNvPicPr>
+            <a:picLocks noChangeAspect="1"/>
+          </p:cNvPicPr>
+          <p:nvPr/>
+        </p:nvPicPr>
+        <p:blipFill>
+          <a:blip r:embed="rId4"/>
+          <a:stretch>
+            <a:fillRect/>
+          </a:stretch>
+        </p:blipFill>
+        <p:spPr>
+          <a:xfrm>
+            <a:off x="7386986" y="4785718"/>
+            <a:ext cx="1865664" cy="1892034"/>
+          </a:xfrm>
+          <a:prstGeom prst="rect">
+            <a:avLst/>
+          </a:prstGeom>
+        </p:spPr>
+      </p:pic>
     </p:spTree>
     <p:extLst>
       <p:ext uri="{BB962C8B-B14F-4D97-AF65-F5344CB8AC3E}">
@@ -22857,7 +24479,7 @@
 </p:sld>
 </file>
 
-<file path=ppt/slides/slide14.xml><?xml version="1.0" encoding="utf-8"?>
+<file path=ppt/slides/slide15.xml><?xml version="1.0" encoding="utf-8"?>
 <p:sld xmlns:a="http://schemas.openxmlformats.org/drawingml/2006/main" xmlns:r="http://schemas.openxmlformats.org/officeDocument/2006/relationships" xmlns:p="http://schemas.openxmlformats.org/presentationml/2006/main">
   <p:cSld>
     <p:spTree>
@@ -22880,122 +24502,6 @@
           <a:chExt cx="0" cy="0"/>
         </a:xfrm>
       </p:grpSpPr>
-      <p:sp>
-        <p:nvSpPr>
-          <p:cNvPr id="5" name="TextBox 4">
-            <a:extLst>
-              <a:ext uri="{FF2B5EF4-FFF2-40B4-BE49-F238E27FC236}">
-                <a16:creationId xmlns:a16="http://schemas.microsoft.com/office/drawing/2014/main" id="{04ABD066-B159-F623-DB8F-DE6503DDE506}"/>
-              </a:ext>
-            </a:extLst>
-          </p:cNvPr>
-          <p:cNvSpPr txBox="1"/>
-          <p:nvPr/>
-        </p:nvSpPr>
-        <p:spPr>
-          <a:xfrm>
-            <a:off x="576072" y="1028343"/>
-            <a:ext cx="10899648" cy="830997"/>
-          </a:xfrm>
-          <a:prstGeom prst="rect">
-            <a:avLst/>
-          </a:prstGeom>
-          <a:noFill/>
-        </p:spPr>
-        <p:txBody>
-          <a:bodyPr wrap="square">
-            <a:spAutoFit/>
-          </a:bodyPr>
-          <a:lstStyle/>
-          <a:p>
-            <a:pPr marL="0" indent="0">
-              <a:buNone/>
-            </a:pPr>
-            <a:r>
-              <a:rPr lang="en-US" sz="2400" dirty="0" err="1">
-                <a:solidFill>
-                  <a:schemeClr val="accent6">
-                    <a:lumMod val="60000"/>
-                    <a:lumOff val="40000"/>
-                  </a:schemeClr>
-                </a:solidFill>
-              </a:rPr>
-              <a:t>Dfsag</a:t>
-            </a:r>
-            <a:endParaRPr lang="en-US" sz="2400" dirty="0">
-              <a:solidFill>
-                <a:schemeClr val="accent6">
-                  <a:lumMod val="60000"/>
-                  <a:lumOff val="40000"/>
-                </a:schemeClr>
-              </a:solidFill>
-            </a:endParaRPr>
-          </a:p>
-          <a:p>
-            <a:pPr marL="0" indent="0">
-              <a:buNone/>
-            </a:pPr>
-            <a:endParaRPr lang="en-US" sz="2400" dirty="0">
-              <a:solidFill>
-                <a:schemeClr val="accent6">
-                  <a:lumMod val="60000"/>
-                  <a:lumOff val="40000"/>
-                </a:schemeClr>
-              </a:solidFill>
-            </a:endParaRPr>
-          </a:p>
-        </p:txBody>
-      </p:sp>
-      <p:sp>
-        <p:nvSpPr>
-          <p:cNvPr id="7" name="TextBox 6">
-            <a:extLst>
-              <a:ext uri="{FF2B5EF4-FFF2-40B4-BE49-F238E27FC236}">
-                <a16:creationId xmlns:a16="http://schemas.microsoft.com/office/drawing/2014/main" id="{46BF8C7F-3E50-EBFC-F58B-762DB85481D4}"/>
-              </a:ext>
-            </a:extLst>
-          </p:cNvPr>
-          <p:cNvSpPr txBox="1"/>
-          <p:nvPr/>
-        </p:nvSpPr>
-        <p:spPr>
-          <a:xfrm>
-            <a:off x="672084" y="71366"/>
-            <a:ext cx="10943844" cy="461665"/>
-          </a:xfrm>
-          <a:prstGeom prst="rect">
-            <a:avLst/>
-          </a:prstGeom>
-          <a:noFill/>
-        </p:spPr>
-        <p:txBody>
-          <a:bodyPr wrap="square">
-            <a:spAutoFit/>
-          </a:bodyPr>
-          <a:lstStyle/>
-          <a:p>
-            <a:r>
-              <a:rPr lang="en-US" sz="2400" dirty="0" err="1">
-                <a:solidFill>
-                  <a:schemeClr val="accent6">
-                    <a:lumMod val="60000"/>
-                    <a:lumOff val="40000"/>
-                  </a:schemeClr>
-                </a:solidFill>
-              </a:rPr>
-              <a:t>hhhh</a:t>
-            </a:r>
-            <a:endParaRPr lang="en-US" sz="2400" dirty="0">
-              <a:solidFill>
-                <a:schemeClr val="accent6">
-                  <a:lumMod val="60000"/>
-                  <a:lumOff val="40000"/>
-                </a:schemeClr>
-              </a:solidFill>
-            </a:endParaRPr>
-          </a:p>
-        </p:txBody>
-      </p:sp>
     </p:spTree>
     <p:extLst>
       <p:ext uri="{BB962C8B-B14F-4D97-AF65-F5344CB8AC3E}">
@@ -23009,7 +24515,7 @@
 </p:sld>
 </file>
 
-<file path=ppt/slides/slide15.xml><?xml version="1.0" encoding="utf-8"?>
+<file path=ppt/slides/slide16.xml><?xml version="1.0" encoding="utf-8"?>
 <p:sld xmlns:a="http://schemas.openxmlformats.org/drawingml/2006/main" xmlns:r="http://schemas.openxmlformats.org/officeDocument/2006/relationships" xmlns:p="http://schemas.openxmlformats.org/presentationml/2006/main">
   <p:cSld>
     <p:spTree>
@@ -23355,8 +24861,8 @@
         </p:blipFill>
         <p:spPr bwMode="auto">
           <a:xfrm>
-            <a:off x="136398" y="929356"/>
-            <a:ext cx="4160138" cy="2082235"/>
+            <a:off x="160420" y="928816"/>
+            <a:ext cx="4539596" cy="2272162"/>
           </a:xfrm>
           <a:prstGeom prst="rect">
             <a:avLst/>
@@ -23387,8 +24893,8 @@
         </p:nvSpPr>
         <p:spPr>
           <a:xfrm>
-            <a:off x="4213225" y="6179355"/>
-            <a:ext cx="3765550" cy="461665"/>
+            <a:off x="747648" y="6086960"/>
+            <a:ext cx="3083687" cy="461665"/>
           </a:xfrm>
           <a:prstGeom prst="rect">
             <a:avLst/>
@@ -23444,8 +24950,8 @@
         </p:blipFill>
         <p:spPr bwMode="auto">
           <a:xfrm>
-            <a:off x="3539849" y="3429000"/>
-            <a:ext cx="4808623" cy="2660771"/>
+            <a:off x="3691688" y="3749040"/>
+            <a:ext cx="5287720" cy="2925871"/>
           </a:xfrm>
           <a:prstGeom prst="rect">
             <a:avLst/>
@@ -23533,8 +25039,8 @@
         </p:blipFill>
         <p:spPr bwMode="auto">
           <a:xfrm>
-            <a:off x="6897945" y="315957"/>
-            <a:ext cx="3773797" cy="2534229"/>
+            <a:off x="6382513" y="315957"/>
+            <a:ext cx="4289230" cy="2880359"/>
           </a:xfrm>
           <a:prstGeom prst="rect">
             <a:avLst/>
@@ -23565,7 +25071,7 @@
         </p:nvSpPr>
         <p:spPr>
           <a:xfrm>
-            <a:off x="8681720" y="2908760"/>
+            <a:off x="8681720" y="3200020"/>
             <a:ext cx="2794000" cy="461665"/>
           </a:xfrm>
           <a:prstGeom prst="rect">
@@ -23704,7 +25210,7 @@
         <p:spPr bwMode="auto">
           <a:xfrm>
             <a:off x="209318" y="589220"/>
-            <a:ext cx="4347809" cy="2592971"/>
+            <a:ext cx="4650358" cy="2773407"/>
           </a:xfrm>
           <a:prstGeom prst="rect">
             <a:avLst/>
@@ -23792,8 +25298,8 @@
         </p:blipFill>
         <p:spPr bwMode="auto">
           <a:xfrm>
-            <a:off x="6698792" y="74256"/>
-            <a:ext cx="2635262" cy="2635262"/>
+            <a:off x="6583680" y="74256"/>
+            <a:ext cx="2750374" cy="2750374"/>
           </a:xfrm>
           <a:prstGeom prst="rect">
             <a:avLst/>
@@ -24897,8 +26403,8 @@
         </p:nvSpPr>
         <p:spPr>
           <a:xfrm>
-            <a:off x="292608" y="991767"/>
-            <a:ext cx="6637896" cy="4524315"/>
+            <a:off x="180108" y="1257578"/>
+            <a:ext cx="6637896" cy="1938992"/>
           </a:xfrm>
           <a:prstGeom prst="rect">
             <a:avLst/>
@@ -24960,7 +26466,7 @@
                   </a:schemeClr>
                 </a:solidFill>
               </a:rPr>
-              <a:t>uppose you have a 100×100 RGB image</a:t>
+              <a:t>uppose you have a 100×100 Gray image</a:t>
             </a:r>
           </a:p>
           <a:p>
@@ -24976,7 +26482,7 @@
                   </a:schemeClr>
                 </a:solidFill>
               </a:rPr>
-              <a:t> → 100 x 100 x 3 = 30,000 inputs.</a:t>
+              <a:t> → 100 x 100  = 10,000 inputs.</a:t>
             </a:r>
           </a:p>
           <a:p>
@@ -24991,121 +26497,6 @@
                 </a:schemeClr>
               </a:solidFill>
             </a:endParaRPr>
-          </a:p>
-          <a:p>
-            <a:r>
-              <a:rPr lang="en-US" sz="2400" dirty="0">
-                <a:solidFill>
-                  <a:schemeClr val="accent6">
-                    <a:lumMod val="60000"/>
-                    <a:lumOff val="40000"/>
-                  </a:schemeClr>
-                </a:solidFill>
-              </a:rPr>
-              <a:t>If the first layer of Traditional</a:t>
-            </a:r>
-            <a:r>
-              <a:rPr lang="en-US" sz="2400" b="1" dirty="0">
-                <a:solidFill>
-                  <a:schemeClr val="accent6">
-                    <a:lumMod val="60000"/>
-                    <a:lumOff val="40000"/>
-                  </a:schemeClr>
-                </a:solidFill>
-              </a:rPr>
-              <a:t> </a:t>
-            </a:r>
-            <a:r>
-              <a:rPr lang="en-US" sz="2400" dirty="0">
-                <a:solidFill>
-                  <a:schemeClr val="accent6">
-                    <a:lumMod val="60000"/>
-                    <a:lumOff val="40000"/>
-                  </a:schemeClr>
-                </a:solidFill>
-              </a:rPr>
-              <a:t>NN has 1,000 neurons:</a:t>
-            </a:r>
-          </a:p>
-          <a:p>
-            <a:pPr marL="0" indent="0">
-              <a:buNone/>
-            </a:pPr>
-            <a:r>
-              <a:rPr lang="en-US" sz="2400" dirty="0">
-                <a:solidFill>
-                  <a:schemeClr val="accent6">
-                    <a:lumMod val="60000"/>
-                    <a:lumOff val="40000"/>
-                  </a:schemeClr>
-                </a:solidFill>
-              </a:rPr>
-              <a:t>Weights = inputs x neurons</a:t>
-            </a:r>
-          </a:p>
-          <a:p>
-            <a:pPr marL="0" indent="0">
-              <a:buNone/>
-            </a:pPr>
-            <a:r>
-              <a:rPr lang="en-US" sz="2400" dirty="0">
-                <a:solidFill>
-                  <a:schemeClr val="accent6">
-                    <a:lumMod val="60000"/>
-                    <a:lumOff val="40000"/>
-                  </a:schemeClr>
-                </a:solidFill>
-              </a:rPr>
-              <a:t> = 30,000×1,000</a:t>
-            </a:r>
-          </a:p>
-          <a:p>
-            <a:pPr marL="0" indent="0">
-              <a:buNone/>
-            </a:pPr>
-            <a:r>
-              <a:rPr lang="en-US" sz="2400" dirty="0">
-                <a:solidFill>
-                  <a:schemeClr val="accent6">
-                    <a:lumMod val="60000"/>
-                    <a:lumOff val="40000"/>
-                  </a:schemeClr>
-                </a:solidFill>
-              </a:rPr>
-              <a:t>= 30 million parameters!</a:t>
-            </a:r>
-          </a:p>
-          <a:p>
-            <a:pPr marL="0" indent="0">
-              <a:buNone/>
-            </a:pPr>
-            <a:r>
-              <a:rPr lang="en-US" sz="2400" dirty="0">
-                <a:solidFill>
-                  <a:schemeClr val="accent6">
-                    <a:lumMod val="60000"/>
-                    <a:lumOff val="40000"/>
-                  </a:schemeClr>
-                </a:solidFill>
-              </a:rPr>
-              <a:t>That’s just for one layer — it's inefficient, </a:t>
-            </a:r>
-          </a:p>
-          <a:p>
-            <a:pPr marL="0" indent="0">
-              <a:buNone/>
-            </a:pPr>
-            <a:r>
-              <a:rPr lang="en-US" sz="2400" dirty="0">
-                <a:solidFill>
-                  <a:schemeClr val="accent6">
-                    <a:lumMod val="60000"/>
-                    <a:lumOff val="40000"/>
-                  </a:schemeClr>
-                </a:solidFill>
-              </a:rPr>
-              <a:t>slow, and needs a lot of memory.</a:t>
-            </a:r>
           </a:p>
         </p:txBody>
       </p:sp>
@@ -25146,100 +26537,21 @@
                   </a:schemeClr>
                 </a:solidFill>
               </a:rPr>
-              <a:t>Why do we need CNN? Why we cannot use Traditional NN for image classification or computer vision related task?</a:t>
+              <a:t>Why do we need CNN? </a:t>
             </a:r>
           </a:p>
-        </p:txBody>
-      </p:sp>
-      <p:sp>
-        <p:nvSpPr>
-          <p:cNvPr id="3" name="Rectangle 2">
-            <a:extLst>
-              <a:ext uri="{FF2B5EF4-FFF2-40B4-BE49-F238E27FC236}">
-                <a16:creationId xmlns:a16="http://schemas.microsoft.com/office/drawing/2014/main" id="{97078F94-BBC6-1D46-7FB1-3CD6FAA1BD95}"/>
-              </a:ext>
-            </a:extLst>
-          </p:cNvPr>
-          <p:cNvSpPr/>
-          <p:nvPr/>
-        </p:nvSpPr>
-        <p:spPr>
-          <a:xfrm>
-            <a:off x="9610344" y="1523923"/>
-            <a:ext cx="2002536" cy="1755648"/>
-          </a:xfrm>
-          <a:prstGeom prst="rect">
-            <a:avLst/>
-          </a:prstGeom>
-        </p:spPr>
-        <p:style>
-          <a:lnRef idx="2">
-            <a:schemeClr val="accent1">
-              <a:shade val="15000"/>
-            </a:schemeClr>
-          </a:lnRef>
-          <a:fillRef idx="1">
-            <a:schemeClr val="accent1"/>
-          </a:fillRef>
-          <a:effectRef idx="0">
-            <a:schemeClr val="accent1"/>
-          </a:effectRef>
-          <a:fontRef idx="minor">
-            <a:schemeClr val="lt1"/>
-          </a:fontRef>
-        </p:style>
-        <p:txBody>
-          <a:bodyPr rtlCol="0" anchor="ctr"/>
-          <a:lstStyle/>
           <a:p>
-            <a:pPr algn="ctr"/>
-            <a:endParaRPr lang="en-US"/>
-          </a:p>
-        </p:txBody>
-      </p:sp>
-      <p:sp>
-        <p:nvSpPr>
-          <p:cNvPr id="4" name="Rectangle 3">
-            <a:extLst>
-              <a:ext uri="{FF2B5EF4-FFF2-40B4-BE49-F238E27FC236}">
-                <a16:creationId xmlns:a16="http://schemas.microsoft.com/office/drawing/2014/main" id="{DD9AA45E-AE02-7ED3-54B3-54C8271A2B7B}"/>
-              </a:ext>
-            </a:extLst>
-          </p:cNvPr>
-          <p:cNvSpPr/>
-          <p:nvPr/>
-        </p:nvSpPr>
-        <p:spPr>
-          <a:xfrm>
-            <a:off x="9070848" y="1883664"/>
-            <a:ext cx="2002536" cy="1755648"/>
-          </a:xfrm>
-          <a:prstGeom prst="rect">
-            <a:avLst/>
-          </a:prstGeom>
-        </p:spPr>
-        <p:style>
-          <a:lnRef idx="2">
-            <a:schemeClr val="accent1">
-              <a:shade val="15000"/>
-            </a:schemeClr>
-          </a:lnRef>
-          <a:fillRef idx="1">
-            <a:schemeClr val="accent1"/>
-          </a:fillRef>
-          <a:effectRef idx="0">
-            <a:schemeClr val="accent1"/>
-          </a:effectRef>
-          <a:fontRef idx="minor">
-            <a:schemeClr val="lt1"/>
-          </a:fontRef>
-        </p:style>
-        <p:txBody>
-          <a:bodyPr rtlCol="0" anchor="ctr"/>
-          <a:lstStyle/>
-          <a:p>
-            <a:pPr algn="ctr"/>
-            <a:endParaRPr lang="en-US"/>
+            <a:r>
+              <a:rPr lang="en-US" sz="2400" b="1" dirty="0">
+                <a:solidFill>
+                  <a:schemeClr val="accent6">
+                    <a:lumMod val="60000"/>
+                    <a:lumOff val="40000"/>
+                  </a:schemeClr>
+                </a:solidFill>
+              </a:rPr>
+              <a:t>Why we cannot use Traditional NN for computer vision related task?</a:t>
+            </a:r>
           </a:p>
         </p:txBody>
       </p:sp>
@@ -25943,6 +27255,1099 @@
           </p:pic>
         </mc:Fallback>
       </mc:AlternateContent>
+    </p:spTree>
+    <p:extLst>
+      <p:ext uri="{BB962C8B-B14F-4D97-AF65-F5344CB8AC3E}">
+        <p14:creationId xmlns:p14="http://schemas.microsoft.com/office/powerpoint/2010/main" val="3925645287"/>
+      </p:ext>
+    </p:extLst>
+  </p:cSld>
+  <p:clrMapOvr>
+    <a:masterClrMapping/>
+  </p:clrMapOvr>
+</p:sld>
+</file>
+
+<file path=ppt/slides/slide8.xml><?xml version="1.0" encoding="utf-8"?>
+<p:sld xmlns:a="http://schemas.openxmlformats.org/drawingml/2006/main" xmlns:r="http://schemas.openxmlformats.org/officeDocument/2006/relationships" xmlns:p="http://schemas.openxmlformats.org/presentationml/2006/main">
+  <p:cSld>
+    <p:spTree>
+      <p:nvGrpSpPr>
+        <p:cNvPr id="1" name="">
+          <a:extLst>
+            <a:ext uri="{FF2B5EF4-FFF2-40B4-BE49-F238E27FC236}">
+              <a16:creationId xmlns:a16="http://schemas.microsoft.com/office/drawing/2014/main" id="{668ADD60-99A6-857D-169B-92BBB88DBA67}"/>
+            </a:ext>
+          </a:extLst>
+        </p:cNvPr>
+        <p:cNvGrpSpPr/>
+        <p:nvPr/>
+      </p:nvGrpSpPr>
+      <p:grpSpPr>
+        <a:xfrm>
+          <a:off x="0" y="0"/>
+          <a:ext cx="0" cy="0"/>
+          <a:chOff x="0" y="0"/>
+          <a:chExt cx="0" cy="0"/>
+        </a:xfrm>
+      </p:grpSpPr>
+      <p:sp>
+        <p:nvSpPr>
+          <p:cNvPr id="5" name="TextBox 4">
+            <a:extLst>
+              <a:ext uri="{FF2B5EF4-FFF2-40B4-BE49-F238E27FC236}">
+                <a16:creationId xmlns:a16="http://schemas.microsoft.com/office/drawing/2014/main" id="{3E5EED45-A224-3B6E-3D79-6E0809ED4B7E}"/>
+              </a:ext>
+            </a:extLst>
+          </p:cNvPr>
+          <p:cNvSpPr txBox="1"/>
+          <p:nvPr/>
+        </p:nvSpPr>
+        <p:spPr>
+          <a:xfrm>
+            <a:off x="180108" y="1257578"/>
+            <a:ext cx="6637896" cy="4154984"/>
+          </a:xfrm>
+          <a:prstGeom prst="rect">
+            <a:avLst/>
+          </a:prstGeom>
+          <a:noFill/>
+        </p:spPr>
+        <p:txBody>
+          <a:bodyPr wrap="square">
+            <a:spAutoFit/>
+          </a:bodyPr>
+          <a:lstStyle/>
+          <a:p>
+            <a:endParaRPr lang="en-US" sz="2400" b="1" dirty="0">
+              <a:solidFill>
+                <a:schemeClr val="accent6">
+                  <a:lumMod val="60000"/>
+                  <a:lumOff val="40000"/>
+                </a:schemeClr>
+              </a:solidFill>
+            </a:endParaRPr>
+          </a:p>
+          <a:p>
+            <a:pPr marL="0" indent="0">
+              <a:buNone/>
+            </a:pPr>
+            <a:r>
+              <a:rPr lang="en-US" sz="2400" b="1" dirty="0">
+                <a:solidFill>
+                  <a:schemeClr val="accent6">
+                    <a:lumMod val="60000"/>
+                    <a:lumOff val="40000"/>
+                  </a:schemeClr>
+                </a:solidFill>
+              </a:rPr>
+              <a:t>S</a:t>
+            </a:r>
+            <a:r>
+              <a:rPr lang="en-US" sz="2400" dirty="0">
+                <a:solidFill>
+                  <a:schemeClr val="accent6">
+                    <a:lumMod val="60000"/>
+                    <a:lumOff val="40000"/>
+                  </a:schemeClr>
+                </a:solidFill>
+              </a:rPr>
+              <a:t>uppose you have a 100 × 100 RGB image</a:t>
+            </a:r>
+          </a:p>
+          <a:p>
+            <a:pPr marL="0" indent="0">
+              <a:buNone/>
+            </a:pPr>
+            <a:r>
+              <a:rPr lang="en-US" sz="2400" dirty="0">
+                <a:solidFill>
+                  <a:schemeClr val="accent6">
+                    <a:lumMod val="60000"/>
+                    <a:lumOff val="40000"/>
+                  </a:schemeClr>
+                </a:solidFill>
+              </a:rPr>
+              <a:t> → 100 x 100 x 3 = 30,000 inputs.</a:t>
+            </a:r>
+          </a:p>
+          <a:p>
+            <a:pPr marL="0" indent="0">
+              <a:buNone/>
+            </a:pPr>
+            <a:endParaRPr lang="en-US" sz="2400" dirty="0">
+              <a:solidFill>
+                <a:schemeClr val="accent6">
+                  <a:lumMod val="60000"/>
+                  <a:lumOff val="40000"/>
+                </a:schemeClr>
+              </a:solidFill>
+            </a:endParaRPr>
+          </a:p>
+          <a:p>
+            <a:r>
+              <a:rPr lang="en-US" sz="2400" dirty="0">
+                <a:solidFill>
+                  <a:schemeClr val="accent6">
+                    <a:lumMod val="60000"/>
+                    <a:lumOff val="40000"/>
+                  </a:schemeClr>
+                </a:solidFill>
+              </a:rPr>
+              <a:t>If the first layer of Traditional</a:t>
+            </a:r>
+            <a:r>
+              <a:rPr lang="en-US" sz="2400" b="1" dirty="0">
+                <a:solidFill>
+                  <a:schemeClr val="accent6">
+                    <a:lumMod val="60000"/>
+                    <a:lumOff val="40000"/>
+                  </a:schemeClr>
+                </a:solidFill>
+              </a:rPr>
+              <a:t> </a:t>
+            </a:r>
+            <a:r>
+              <a:rPr lang="en-US" sz="2400" dirty="0">
+                <a:solidFill>
+                  <a:schemeClr val="accent6">
+                    <a:lumMod val="60000"/>
+                    <a:lumOff val="40000"/>
+                  </a:schemeClr>
+                </a:solidFill>
+              </a:rPr>
+              <a:t>NN has 1,000 neurons:</a:t>
+            </a:r>
+          </a:p>
+          <a:p>
+            <a:pPr marL="0" indent="0">
+              <a:buNone/>
+            </a:pPr>
+            <a:r>
+              <a:rPr lang="en-US" sz="2400" dirty="0">
+                <a:solidFill>
+                  <a:schemeClr val="accent6">
+                    <a:lumMod val="60000"/>
+                    <a:lumOff val="40000"/>
+                  </a:schemeClr>
+                </a:solidFill>
+              </a:rPr>
+              <a:t>Weights = inputs x neurons</a:t>
+            </a:r>
+          </a:p>
+          <a:p>
+            <a:pPr marL="0" indent="0">
+              <a:buNone/>
+            </a:pPr>
+            <a:r>
+              <a:rPr lang="en-US" sz="2400" dirty="0">
+                <a:solidFill>
+                  <a:schemeClr val="accent6">
+                    <a:lumMod val="60000"/>
+                    <a:lumOff val="40000"/>
+                  </a:schemeClr>
+                </a:solidFill>
+              </a:rPr>
+              <a:t> = 30,000 × 1,000</a:t>
+            </a:r>
+          </a:p>
+          <a:p>
+            <a:pPr marL="0" indent="0">
+              <a:buNone/>
+            </a:pPr>
+            <a:r>
+              <a:rPr lang="en-US" sz="2400" dirty="0">
+                <a:solidFill>
+                  <a:schemeClr val="accent6">
+                    <a:lumMod val="60000"/>
+                    <a:lumOff val="40000"/>
+                  </a:schemeClr>
+                </a:solidFill>
+              </a:rPr>
+              <a:t>= 30 million parameters!</a:t>
+            </a:r>
+          </a:p>
+          <a:p>
+            <a:pPr marL="0" indent="0">
+              <a:buNone/>
+            </a:pPr>
+            <a:r>
+              <a:rPr lang="en-US" sz="2400" dirty="0">
+                <a:solidFill>
+                  <a:schemeClr val="accent6">
+                    <a:lumMod val="60000"/>
+                    <a:lumOff val="40000"/>
+                  </a:schemeClr>
+                </a:solidFill>
+              </a:rPr>
+              <a:t>That’s just for one layer — it's inefficient, </a:t>
+            </a:r>
+          </a:p>
+          <a:p>
+            <a:pPr marL="0" indent="0">
+              <a:buNone/>
+            </a:pPr>
+            <a:r>
+              <a:rPr lang="en-US" sz="2400" dirty="0">
+                <a:solidFill>
+                  <a:schemeClr val="accent6">
+                    <a:lumMod val="60000"/>
+                    <a:lumOff val="40000"/>
+                  </a:schemeClr>
+                </a:solidFill>
+              </a:rPr>
+              <a:t>slow, and needs a lot of memory.</a:t>
+            </a:r>
+          </a:p>
+        </p:txBody>
+      </p:sp>
+      <p:sp>
+        <p:nvSpPr>
+          <p:cNvPr id="2" name="TextBox 1">
+            <a:extLst>
+              <a:ext uri="{FF2B5EF4-FFF2-40B4-BE49-F238E27FC236}">
+                <a16:creationId xmlns:a16="http://schemas.microsoft.com/office/drawing/2014/main" id="{AF575848-77AE-D176-BD95-55715FB16E86}"/>
+              </a:ext>
+            </a:extLst>
+          </p:cNvPr>
+          <p:cNvSpPr txBox="1"/>
+          <p:nvPr/>
+        </p:nvSpPr>
+        <p:spPr>
+          <a:xfrm>
+            <a:off x="320040" y="25646"/>
+            <a:ext cx="11295888" cy="830997"/>
+          </a:xfrm>
+          <a:prstGeom prst="rect">
+            <a:avLst/>
+          </a:prstGeom>
+          <a:noFill/>
+        </p:spPr>
+        <p:txBody>
+          <a:bodyPr wrap="square">
+            <a:spAutoFit/>
+          </a:bodyPr>
+          <a:lstStyle/>
+          <a:p>
+            <a:r>
+              <a:rPr lang="en-US" sz="2400" b="1" dirty="0">
+                <a:solidFill>
+                  <a:schemeClr val="accent6">
+                    <a:lumMod val="60000"/>
+                    <a:lumOff val="40000"/>
+                  </a:schemeClr>
+                </a:solidFill>
+              </a:rPr>
+              <a:t>Why do we need CNN? </a:t>
+            </a:r>
+          </a:p>
+          <a:p>
+            <a:r>
+              <a:rPr lang="en-US" sz="2400" b="1" dirty="0">
+                <a:solidFill>
+                  <a:schemeClr val="accent6">
+                    <a:lumMod val="60000"/>
+                    <a:lumOff val="40000"/>
+                  </a:schemeClr>
+                </a:solidFill>
+              </a:rPr>
+              <a:t>Why we cannot use Traditional NN for computer vision related task?</a:t>
+            </a:r>
+          </a:p>
+        </p:txBody>
+      </p:sp>
+      <p:sp>
+        <p:nvSpPr>
+          <p:cNvPr id="3" name="Rectangle 2">
+            <a:extLst>
+              <a:ext uri="{FF2B5EF4-FFF2-40B4-BE49-F238E27FC236}">
+                <a16:creationId xmlns:a16="http://schemas.microsoft.com/office/drawing/2014/main" id="{C46C239A-19E4-BA61-6439-9F4B54C83CCA}"/>
+              </a:ext>
+            </a:extLst>
+          </p:cNvPr>
+          <p:cNvSpPr/>
+          <p:nvPr/>
+        </p:nvSpPr>
+        <p:spPr>
+          <a:xfrm>
+            <a:off x="9610344" y="1523923"/>
+            <a:ext cx="2002536" cy="1755648"/>
+          </a:xfrm>
+          <a:prstGeom prst="rect">
+            <a:avLst/>
+          </a:prstGeom>
+        </p:spPr>
+        <p:style>
+          <a:lnRef idx="2">
+            <a:schemeClr val="accent1">
+              <a:shade val="15000"/>
+            </a:schemeClr>
+          </a:lnRef>
+          <a:fillRef idx="1">
+            <a:schemeClr val="accent1"/>
+          </a:fillRef>
+          <a:effectRef idx="0">
+            <a:schemeClr val="accent1"/>
+          </a:effectRef>
+          <a:fontRef idx="minor">
+            <a:schemeClr val="lt1"/>
+          </a:fontRef>
+        </p:style>
+        <p:txBody>
+          <a:bodyPr rtlCol="0" anchor="ctr"/>
+          <a:lstStyle/>
+          <a:p>
+            <a:pPr algn="ctr"/>
+            <a:endParaRPr lang="en-US"/>
+          </a:p>
+        </p:txBody>
+      </p:sp>
+      <p:sp>
+        <p:nvSpPr>
+          <p:cNvPr id="4" name="Rectangle 3">
+            <a:extLst>
+              <a:ext uri="{FF2B5EF4-FFF2-40B4-BE49-F238E27FC236}">
+                <a16:creationId xmlns:a16="http://schemas.microsoft.com/office/drawing/2014/main" id="{E47F43ED-0A77-26DD-D31C-95CC3BB39AC2}"/>
+              </a:ext>
+            </a:extLst>
+          </p:cNvPr>
+          <p:cNvSpPr/>
+          <p:nvPr/>
+        </p:nvSpPr>
+        <p:spPr>
+          <a:xfrm>
+            <a:off x="9070848" y="1883664"/>
+            <a:ext cx="2002536" cy="1755648"/>
+          </a:xfrm>
+          <a:prstGeom prst="rect">
+            <a:avLst/>
+          </a:prstGeom>
+        </p:spPr>
+        <p:style>
+          <a:lnRef idx="2">
+            <a:schemeClr val="accent1">
+              <a:shade val="15000"/>
+            </a:schemeClr>
+          </a:lnRef>
+          <a:fillRef idx="1">
+            <a:schemeClr val="accent1"/>
+          </a:fillRef>
+          <a:effectRef idx="0">
+            <a:schemeClr val="accent1"/>
+          </a:effectRef>
+          <a:fontRef idx="minor">
+            <a:schemeClr val="lt1"/>
+          </a:fontRef>
+        </p:style>
+        <p:txBody>
+          <a:bodyPr rtlCol="0" anchor="ctr"/>
+          <a:lstStyle/>
+          <a:p>
+            <a:pPr algn="ctr"/>
+            <a:endParaRPr lang="en-US"/>
+          </a:p>
+        </p:txBody>
+      </p:sp>
+      <p:sp>
+        <p:nvSpPr>
+          <p:cNvPr id="6" name="Rectangle 5">
+            <a:extLst>
+              <a:ext uri="{FF2B5EF4-FFF2-40B4-BE49-F238E27FC236}">
+                <a16:creationId xmlns:a16="http://schemas.microsoft.com/office/drawing/2014/main" id="{73C3F4AF-DA4A-DA6B-A7BD-C902283A8635}"/>
+              </a:ext>
+            </a:extLst>
+          </p:cNvPr>
+          <p:cNvSpPr/>
+          <p:nvPr/>
+        </p:nvSpPr>
+        <p:spPr>
+          <a:xfrm>
+            <a:off x="8732520" y="2224885"/>
+            <a:ext cx="2002536" cy="1755648"/>
+          </a:xfrm>
+          <a:prstGeom prst="rect">
+            <a:avLst/>
+          </a:prstGeom>
+        </p:spPr>
+        <p:style>
+          <a:lnRef idx="2">
+            <a:schemeClr val="accent1">
+              <a:shade val="15000"/>
+            </a:schemeClr>
+          </a:lnRef>
+          <a:fillRef idx="1">
+            <a:schemeClr val="accent1"/>
+          </a:fillRef>
+          <a:effectRef idx="0">
+            <a:schemeClr val="accent1"/>
+          </a:effectRef>
+          <a:fontRef idx="minor">
+            <a:schemeClr val="lt1"/>
+          </a:fontRef>
+        </p:style>
+        <p:txBody>
+          <a:bodyPr rtlCol="0" anchor="ctr"/>
+          <a:lstStyle/>
+          <a:p>
+            <a:pPr algn="ctr"/>
+            <a:endParaRPr lang="en-US"/>
+          </a:p>
+        </p:txBody>
+      </p:sp>
+      <p:grpSp>
+        <p:nvGrpSpPr>
+          <p:cNvPr id="14" name="Group 13">
+            <a:extLst>
+              <a:ext uri="{FF2B5EF4-FFF2-40B4-BE49-F238E27FC236}">
+                <a16:creationId xmlns:a16="http://schemas.microsoft.com/office/drawing/2014/main" id="{E247CB81-7328-DB92-B0D6-6FFD89B710EF}"/>
+              </a:ext>
+            </a:extLst>
+          </p:cNvPr>
+          <p:cNvGrpSpPr/>
+          <p:nvPr/>
+        </p:nvGrpSpPr>
+        <p:grpSpPr>
+          <a:xfrm>
+            <a:off x="8080704" y="2267496"/>
+            <a:ext cx="430560" cy="1677960"/>
+            <a:chOff x="8080704" y="2267496"/>
+            <a:chExt cx="430560" cy="1677960"/>
+          </a:xfrm>
+        </p:grpSpPr>
+        <mc:AlternateContent xmlns:mc="http://schemas.openxmlformats.org/markup-compatibility/2006" xmlns:p14="http://schemas.microsoft.com/office/powerpoint/2010/main">
+          <mc:Choice Requires="p14">
+            <p:contentPart p14:bwMode="auto" r:id="rId2">
+              <p14:nvContentPartPr>
+                <p14:cNvPr id="8" name="Ink 7">
+                  <a:extLst>
+                    <a:ext uri="{FF2B5EF4-FFF2-40B4-BE49-F238E27FC236}">
+                      <a16:creationId xmlns:a16="http://schemas.microsoft.com/office/drawing/2014/main" id="{599D7B4B-ECF5-E4CF-CE98-0566412FCE74}"/>
+                    </a:ext>
+                  </a:extLst>
+                </p14:cNvPr>
+                <p14:cNvContentPartPr/>
+                <p14:nvPr/>
+              </p14:nvContentPartPr>
+              <p14:xfrm>
+                <a:off x="8080704" y="2925216"/>
+                <a:ext cx="29160" cy="149040"/>
+              </p14:xfrm>
+            </p:contentPart>
+          </mc:Choice>
+          <mc:Fallback xmlns="">
+            <p:pic>
+              <p:nvPicPr>
+                <p:cNvPr id="8" name="Ink 7">
+                  <a:extLst>
+                    <a:ext uri="{FF2B5EF4-FFF2-40B4-BE49-F238E27FC236}">
+                      <a16:creationId xmlns:a16="http://schemas.microsoft.com/office/drawing/2014/main" id="{599D7B4B-ECF5-E4CF-CE98-0566412FCE74}"/>
+                    </a:ext>
+                  </a:extLst>
+                </p:cNvPr>
+                <p:cNvPicPr/>
+                <p:nvPr/>
+              </p:nvPicPr>
+              <p:blipFill>
+                <a:blip r:embed="rId3"/>
+                <a:stretch>
+                  <a:fillRect/>
+                </a:stretch>
+              </p:blipFill>
+              <p:spPr>
+                <a:xfrm>
+                  <a:off x="8062479" y="2907216"/>
+                  <a:ext cx="65246" cy="184680"/>
+                </a:xfrm>
+                <a:prstGeom prst="rect">
+                  <a:avLst/>
+                </a:prstGeom>
+              </p:spPr>
+            </p:pic>
+          </mc:Fallback>
+        </mc:AlternateContent>
+        <mc:AlternateContent xmlns:mc="http://schemas.openxmlformats.org/markup-compatibility/2006" xmlns:p14="http://schemas.microsoft.com/office/powerpoint/2010/main">
+          <mc:Choice Requires="p14">
+            <p:contentPart p14:bwMode="auto" r:id="rId4">
+              <p14:nvContentPartPr>
+                <p14:cNvPr id="9" name="Ink 8">
+                  <a:extLst>
+                    <a:ext uri="{FF2B5EF4-FFF2-40B4-BE49-F238E27FC236}">
+                      <a16:creationId xmlns:a16="http://schemas.microsoft.com/office/drawing/2014/main" id="{0F217DA5-FFFC-ACA1-9A1C-B2D760F83EB2}"/>
+                    </a:ext>
+                  </a:extLst>
+                </p14:cNvPr>
+                <p14:cNvContentPartPr/>
+                <p14:nvPr/>
+              </p14:nvContentPartPr>
+              <p14:xfrm>
+                <a:off x="8172504" y="2945016"/>
+                <a:ext cx="149760" cy="93960"/>
+              </p14:xfrm>
+            </p:contentPart>
+          </mc:Choice>
+          <mc:Fallback xmlns="">
+            <p:pic>
+              <p:nvPicPr>
+                <p:cNvPr id="9" name="Ink 8">
+                  <a:extLst>
+                    <a:ext uri="{FF2B5EF4-FFF2-40B4-BE49-F238E27FC236}">
+                      <a16:creationId xmlns:a16="http://schemas.microsoft.com/office/drawing/2014/main" id="{0F217DA5-FFFC-ACA1-9A1C-B2D760F83EB2}"/>
+                    </a:ext>
+                  </a:extLst>
+                </p:cNvPr>
+                <p:cNvPicPr/>
+                <p:nvPr/>
+              </p:nvPicPr>
+              <p:blipFill>
+                <a:blip r:embed="rId5"/>
+                <a:stretch>
+                  <a:fillRect/>
+                </a:stretch>
+              </p:blipFill>
+              <p:spPr>
+                <a:xfrm>
+                  <a:off x="8154504" y="2927016"/>
+                  <a:ext cx="185400" cy="129600"/>
+                </a:xfrm>
+                <a:prstGeom prst="rect">
+                  <a:avLst/>
+                </a:prstGeom>
+              </p:spPr>
+            </p:pic>
+          </mc:Fallback>
+        </mc:AlternateContent>
+        <mc:AlternateContent xmlns:mc="http://schemas.openxmlformats.org/markup-compatibility/2006" xmlns:p14="http://schemas.microsoft.com/office/powerpoint/2010/main">
+          <mc:Choice Requires="p14">
+            <p:contentPart p14:bwMode="auto" r:id="rId6">
+              <p14:nvContentPartPr>
+                <p14:cNvPr id="10" name="Ink 9">
+                  <a:extLst>
+                    <a:ext uri="{FF2B5EF4-FFF2-40B4-BE49-F238E27FC236}">
+                      <a16:creationId xmlns:a16="http://schemas.microsoft.com/office/drawing/2014/main" id="{930B42DF-8445-A525-C2E3-062A1D28E1AC}"/>
+                    </a:ext>
+                  </a:extLst>
+                </p14:cNvPr>
+                <p14:cNvContentPartPr/>
+                <p14:nvPr/>
+              </p14:nvContentPartPr>
+              <p14:xfrm>
+                <a:off x="8375904" y="2934216"/>
+                <a:ext cx="135360" cy="108720"/>
+              </p14:xfrm>
+            </p:contentPart>
+          </mc:Choice>
+          <mc:Fallback xmlns="">
+            <p:pic>
+              <p:nvPicPr>
+                <p:cNvPr id="10" name="Ink 9">
+                  <a:extLst>
+                    <a:ext uri="{FF2B5EF4-FFF2-40B4-BE49-F238E27FC236}">
+                      <a16:creationId xmlns:a16="http://schemas.microsoft.com/office/drawing/2014/main" id="{930B42DF-8445-A525-C2E3-062A1D28E1AC}"/>
+                    </a:ext>
+                  </a:extLst>
+                </p:cNvPr>
+                <p:cNvPicPr/>
+                <p:nvPr/>
+              </p:nvPicPr>
+              <p:blipFill>
+                <a:blip r:embed="rId7"/>
+                <a:stretch>
+                  <a:fillRect/>
+                </a:stretch>
+              </p:blipFill>
+              <p:spPr>
+                <a:xfrm>
+                  <a:off x="8357856" y="2916216"/>
+                  <a:ext cx="171095" cy="144360"/>
+                </a:xfrm>
+                <a:prstGeom prst="rect">
+                  <a:avLst/>
+                </a:prstGeom>
+              </p:spPr>
+            </p:pic>
+          </mc:Fallback>
+        </mc:AlternateContent>
+        <mc:AlternateContent xmlns:mc="http://schemas.openxmlformats.org/markup-compatibility/2006" xmlns:p14="http://schemas.microsoft.com/office/powerpoint/2010/main">
+          <mc:Choice Requires="p14">
+            <p:contentPart p14:bwMode="auto" r:id="rId8">
+              <p14:nvContentPartPr>
+                <p14:cNvPr id="11" name="Ink 10">
+                  <a:extLst>
+                    <a:ext uri="{FF2B5EF4-FFF2-40B4-BE49-F238E27FC236}">
+                      <a16:creationId xmlns:a16="http://schemas.microsoft.com/office/drawing/2014/main" id="{844EFF26-C8BA-1700-D2AE-43D80E8572A0}"/>
+                    </a:ext>
+                  </a:extLst>
+                </p14:cNvPr>
+                <p14:cNvContentPartPr/>
+                <p14:nvPr/>
+              </p14:nvContentPartPr>
+              <p14:xfrm>
+                <a:off x="8231904" y="2267496"/>
+                <a:ext cx="186120" cy="90000"/>
+              </p14:xfrm>
+            </p:contentPart>
+          </mc:Choice>
+          <mc:Fallback xmlns="">
+            <p:pic>
+              <p:nvPicPr>
+                <p:cNvPr id="11" name="Ink 10">
+                  <a:extLst>
+                    <a:ext uri="{FF2B5EF4-FFF2-40B4-BE49-F238E27FC236}">
+                      <a16:creationId xmlns:a16="http://schemas.microsoft.com/office/drawing/2014/main" id="{844EFF26-C8BA-1700-D2AE-43D80E8572A0}"/>
+                    </a:ext>
+                  </a:extLst>
+                </p:cNvPr>
+                <p:cNvPicPr/>
+                <p:nvPr/>
+              </p:nvPicPr>
+              <p:blipFill>
+                <a:blip r:embed="rId9"/>
+                <a:stretch>
+                  <a:fillRect/>
+                </a:stretch>
+              </p:blipFill>
+              <p:spPr>
+                <a:xfrm>
+                  <a:off x="8213939" y="2249496"/>
+                  <a:ext cx="221691" cy="125640"/>
+                </a:xfrm>
+                <a:prstGeom prst="rect">
+                  <a:avLst/>
+                </a:prstGeom>
+              </p:spPr>
+            </p:pic>
+          </mc:Fallback>
+        </mc:AlternateContent>
+        <mc:AlternateContent xmlns:mc="http://schemas.openxmlformats.org/markup-compatibility/2006" xmlns:p14="http://schemas.microsoft.com/office/powerpoint/2010/main">
+          <mc:Choice Requires="p14">
+            <p:contentPart p14:bwMode="auto" r:id="rId10">
+              <p14:nvContentPartPr>
+                <p14:cNvPr id="12" name="Ink 11">
+                  <a:extLst>
+                    <a:ext uri="{FF2B5EF4-FFF2-40B4-BE49-F238E27FC236}">
+                      <a16:creationId xmlns:a16="http://schemas.microsoft.com/office/drawing/2014/main" id="{99B2AB6C-FF72-1412-612C-C79F1BEFDC87}"/>
+                    </a:ext>
+                  </a:extLst>
+                </p14:cNvPr>
+                <p14:cNvContentPartPr/>
+                <p14:nvPr/>
+              </p14:nvContentPartPr>
+              <p14:xfrm>
+                <a:off x="8304984" y="2335176"/>
+                <a:ext cx="20160" cy="577080"/>
+              </p14:xfrm>
+            </p:contentPart>
+          </mc:Choice>
+          <mc:Fallback xmlns="">
+            <p:pic>
+              <p:nvPicPr>
+                <p:cNvPr id="12" name="Ink 11">
+                  <a:extLst>
+                    <a:ext uri="{FF2B5EF4-FFF2-40B4-BE49-F238E27FC236}">
+                      <a16:creationId xmlns:a16="http://schemas.microsoft.com/office/drawing/2014/main" id="{99B2AB6C-FF72-1412-612C-C79F1BEFDC87}"/>
+                    </a:ext>
+                  </a:extLst>
+                </p:cNvPr>
+                <p:cNvPicPr/>
+                <p:nvPr/>
+              </p:nvPicPr>
+              <p:blipFill>
+                <a:blip r:embed="rId11"/>
+                <a:stretch>
+                  <a:fillRect/>
+                </a:stretch>
+              </p:blipFill>
+              <p:spPr>
+                <a:xfrm>
+                  <a:off x="8286984" y="2317176"/>
+                  <a:ext cx="55800" cy="612720"/>
+                </a:xfrm>
+                <a:prstGeom prst="rect">
+                  <a:avLst/>
+                </a:prstGeom>
+              </p:spPr>
+            </p:pic>
+          </mc:Fallback>
+        </mc:AlternateContent>
+        <mc:AlternateContent xmlns:mc="http://schemas.openxmlformats.org/markup-compatibility/2006" xmlns:p14="http://schemas.microsoft.com/office/powerpoint/2010/main">
+          <mc:Choice Requires="p14">
+            <p:contentPart p14:bwMode="auto" r:id="rId12">
+              <p14:nvContentPartPr>
+                <p14:cNvPr id="13" name="Ink 12">
+                  <a:extLst>
+                    <a:ext uri="{FF2B5EF4-FFF2-40B4-BE49-F238E27FC236}">
+                      <a16:creationId xmlns:a16="http://schemas.microsoft.com/office/drawing/2014/main" id="{3150059B-1613-A961-2B71-0F6B007165D2}"/>
+                    </a:ext>
+                  </a:extLst>
+                </p14:cNvPr>
+                <p14:cNvContentPartPr/>
+                <p14:nvPr/>
+              </p14:nvContentPartPr>
+              <p14:xfrm>
+                <a:off x="8130024" y="3133656"/>
+                <a:ext cx="201960" cy="811800"/>
+              </p14:xfrm>
+            </p:contentPart>
+          </mc:Choice>
+          <mc:Fallback xmlns="">
+            <p:pic>
+              <p:nvPicPr>
+                <p:cNvPr id="13" name="Ink 12">
+                  <a:extLst>
+                    <a:ext uri="{FF2B5EF4-FFF2-40B4-BE49-F238E27FC236}">
+                      <a16:creationId xmlns:a16="http://schemas.microsoft.com/office/drawing/2014/main" id="{3150059B-1613-A961-2B71-0F6B007165D2}"/>
+                    </a:ext>
+                  </a:extLst>
+                </p:cNvPr>
+                <p:cNvPicPr/>
+                <p:nvPr/>
+              </p:nvPicPr>
+              <p:blipFill>
+                <a:blip r:embed="rId13"/>
+                <a:stretch>
+                  <a:fillRect/>
+                </a:stretch>
+              </p:blipFill>
+              <p:spPr>
+                <a:xfrm>
+                  <a:off x="8111992" y="3115656"/>
+                  <a:ext cx="237664" cy="847440"/>
+                </a:xfrm>
+                <a:prstGeom prst="rect">
+                  <a:avLst/>
+                </a:prstGeom>
+              </p:spPr>
+            </p:pic>
+          </mc:Fallback>
+        </mc:AlternateContent>
+      </p:grpSp>
+      <p:grpSp>
+        <p:nvGrpSpPr>
+          <p:cNvPr id="20" name="Group 19">
+            <a:extLst>
+              <a:ext uri="{FF2B5EF4-FFF2-40B4-BE49-F238E27FC236}">
+                <a16:creationId xmlns:a16="http://schemas.microsoft.com/office/drawing/2014/main" id="{CAB26776-27FE-CE96-ACAE-8B8F85AD62D7}"/>
+              </a:ext>
+            </a:extLst>
+          </p:cNvPr>
+          <p:cNvGrpSpPr/>
+          <p:nvPr/>
+        </p:nvGrpSpPr>
+        <p:grpSpPr>
+          <a:xfrm>
+            <a:off x="8772984" y="4162896"/>
+            <a:ext cx="1950840" cy="308880"/>
+            <a:chOff x="8772984" y="4162896"/>
+            <a:chExt cx="1950840" cy="308880"/>
+          </a:xfrm>
+        </p:grpSpPr>
+        <mc:AlternateContent xmlns:mc="http://schemas.openxmlformats.org/markup-compatibility/2006" xmlns:p14="http://schemas.microsoft.com/office/powerpoint/2010/main">
+          <mc:Choice Requires="p14">
+            <p:contentPart p14:bwMode="auto" r:id="rId14">
+              <p14:nvContentPartPr>
+                <p14:cNvPr id="15" name="Ink 14">
+                  <a:extLst>
+                    <a:ext uri="{FF2B5EF4-FFF2-40B4-BE49-F238E27FC236}">
+                      <a16:creationId xmlns:a16="http://schemas.microsoft.com/office/drawing/2014/main" id="{D917FACF-2724-541E-43D7-A4AE38248D15}"/>
+                    </a:ext>
+                  </a:extLst>
+                </p14:cNvPr>
+                <p14:cNvContentPartPr/>
+                <p14:nvPr/>
+              </p14:nvContentPartPr>
+              <p14:xfrm>
+                <a:off x="8772984" y="4162896"/>
+                <a:ext cx="161280" cy="117000"/>
+              </p14:xfrm>
+            </p:contentPart>
+          </mc:Choice>
+          <mc:Fallback xmlns="">
+            <p:pic>
+              <p:nvPicPr>
+                <p:cNvPr id="15" name="Ink 14">
+                  <a:extLst>
+                    <a:ext uri="{FF2B5EF4-FFF2-40B4-BE49-F238E27FC236}">
+                      <a16:creationId xmlns:a16="http://schemas.microsoft.com/office/drawing/2014/main" id="{D917FACF-2724-541E-43D7-A4AE38248D15}"/>
+                    </a:ext>
+                  </a:extLst>
+                </p:cNvPr>
+                <p:cNvPicPr/>
+                <p:nvPr/>
+              </p:nvPicPr>
+              <p:blipFill>
+                <a:blip r:embed="rId15"/>
+                <a:stretch>
+                  <a:fillRect/>
+                </a:stretch>
+              </p:blipFill>
+              <p:spPr>
+                <a:xfrm>
+                  <a:off x="8754984" y="4144896"/>
+                  <a:ext cx="196920" cy="152640"/>
+                </a:xfrm>
+                <a:prstGeom prst="rect">
+                  <a:avLst/>
+                </a:prstGeom>
+              </p:spPr>
+            </p:pic>
+          </mc:Fallback>
+        </mc:AlternateContent>
+        <mc:AlternateContent xmlns:mc="http://schemas.openxmlformats.org/markup-compatibility/2006" xmlns:p14="http://schemas.microsoft.com/office/powerpoint/2010/main">
+          <mc:Choice Requires="p14">
+            <p:contentPart p14:bwMode="auto" r:id="rId16">
+              <p14:nvContentPartPr>
+                <p14:cNvPr id="16" name="Ink 15">
+                  <a:extLst>
+                    <a:ext uri="{FF2B5EF4-FFF2-40B4-BE49-F238E27FC236}">
+                      <a16:creationId xmlns:a16="http://schemas.microsoft.com/office/drawing/2014/main" id="{E1521D5C-7E25-E289-20F9-10DC36BA13DE}"/>
+                    </a:ext>
+                  </a:extLst>
+                </p14:cNvPr>
+                <p14:cNvContentPartPr/>
+                <p14:nvPr/>
+              </p14:nvContentPartPr>
+              <p14:xfrm>
+                <a:off x="8858664" y="4172256"/>
+                <a:ext cx="1865160" cy="120960"/>
+              </p14:xfrm>
+            </p:contentPart>
+          </mc:Choice>
+          <mc:Fallback xmlns="">
+            <p:pic>
+              <p:nvPicPr>
+                <p:cNvPr id="16" name="Ink 15">
+                  <a:extLst>
+                    <a:ext uri="{FF2B5EF4-FFF2-40B4-BE49-F238E27FC236}">
+                      <a16:creationId xmlns:a16="http://schemas.microsoft.com/office/drawing/2014/main" id="{E1521D5C-7E25-E289-20F9-10DC36BA13DE}"/>
+                    </a:ext>
+                  </a:extLst>
+                </p:cNvPr>
+                <p:cNvPicPr/>
+                <p:nvPr/>
+              </p:nvPicPr>
+              <p:blipFill>
+                <a:blip r:embed="rId17"/>
+                <a:stretch>
+                  <a:fillRect/>
+                </a:stretch>
+              </p:blipFill>
+              <p:spPr>
+                <a:xfrm>
+                  <a:off x="8840661" y="4154256"/>
+                  <a:ext cx="1900807" cy="156600"/>
+                </a:xfrm>
+                <a:prstGeom prst="rect">
+                  <a:avLst/>
+                </a:prstGeom>
+              </p:spPr>
+            </p:pic>
+          </mc:Fallback>
+        </mc:AlternateContent>
+        <mc:AlternateContent xmlns:mc="http://schemas.openxmlformats.org/markup-compatibility/2006" xmlns:p14="http://schemas.microsoft.com/office/powerpoint/2010/main">
+          <mc:Choice Requires="p14">
+            <p:contentPart p14:bwMode="auto" r:id="rId18">
+              <p14:nvContentPartPr>
+                <p14:cNvPr id="17" name="Ink 16">
+                  <a:extLst>
+                    <a:ext uri="{FF2B5EF4-FFF2-40B4-BE49-F238E27FC236}">
+                      <a16:creationId xmlns:a16="http://schemas.microsoft.com/office/drawing/2014/main" id="{3ECB76EE-B65D-4ADC-93A8-48DF18C9DC49}"/>
+                    </a:ext>
+                  </a:extLst>
+                </p14:cNvPr>
+                <p14:cNvContentPartPr/>
+                <p14:nvPr/>
+              </p14:nvContentPartPr>
+              <p14:xfrm>
+                <a:off x="9540144" y="4345416"/>
+                <a:ext cx="55440" cy="126360"/>
+              </p14:xfrm>
+            </p:contentPart>
+          </mc:Choice>
+          <mc:Fallback xmlns="">
+            <p:pic>
+              <p:nvPicPr>
+                <p:cNvPr id="17" name="Ink 16">
+                  <a:extLst>
+                    <a:ext uri="{FF2B5EF4-FFF2-40B4-BE49-F238E27FC236}">
+                      <a16:creationId xmlns:a16="http://schemas.microsoft.com/office/drawing/2014/main" id="{3ECB76EE-B65D-4ADC-93A8-48DF18C9DC49}"/>
+                    </a:ext>
+                  </a:extLst>
+                </p:cNvPr>
+                <p:cNvPicPr/>
+                <p:nvPr/>
+              </p:nvPicPr>
+              <p:blipFill>
+                <a:blip r:embed="rId19"/>
+                <a:stretch>
+                  <a:fillRect/>
+                </a:stretch>
+              </p:blipFill>
+              <p:spPr>
+                <a:xfrm>
+                  <a:off x="9522144" y="4327416"/>
+                  <a:ext cx="91080" cy="162000"/>
+                </a:xfrm>
+                <a:prstGeom prst="rect">
+                  <a:avLst/>
+                </a:prstGeom>
+              </p:spPr>
+            </p:pic>
+          </mc:Fallback>
+        </mc:AlternateContent>
+        <mc:AlternateContent xmlns:mc="http://schemas.openxmlformats.org/markup-compatibility/2006" xmlns:p14="http://schemas.microsoft.com/office/powerpoint/2010/main">
+          <mc:Choice Requires="p14">
+            <p:contentPart p14:bwMode="auto" r:id="rId20">
+              <p14:nvContentPartPr>
+                <p14:cNvPr id="18" name="Ink 17">
+                  <a:extLst>
+                    <a:ext uri="{FF2B5EF4-FFF2-40B4-BE49-F238E27FC236}">
+                      <a16:creationId xmlns:a16="http://schemas.microsoft.com/office/drawing/2014/main" id="{024C6341-E68D-3443-4C71-83DFF181D173}"/>
+                    </a:ext>
+                  </a:extLst>
+                </p14:cNvPr>
+                <p14:cNvContentPartPr/>
+                <p14:nvPr/>
+              </p14:nvContentPartPr>
+              <p14:xfrm>
+                <a:off x="9674784" y="4340376"/>
+                <a:ext cx="121320" cy="102240"/>
+              </p14:xfrm>
+            </p:contentPart>
+          </mc:Choice>
+          <mc:Fallback xmlns="">
+            <p:pic>
+              <p:nvPicPr>
+                <p:cNvPr id="18" name="Ink 17">
+                  <a:extLst>
+                    <a:ext uri="{FF2B5EF4-FFF2-40B4-BE49-F238E27FC236}">
+                      <a16:creationId xmlns:a16="http://schemas.microsoft.com/office/drawing/2014/main" id="{024C6341-E68D-3443-4C71-83DFF181D173}"/>
+                    </a:ext>
+                  </a:extLst>
+                </p:cNvPr>
+                <p:cNvPicPr/>
+                <p:nvPr/>
+              </p:nvPicPr>
+              <p:blipFill>
+                <a:blip r:embed="rId21"/>
+                <a:stretch>
+                  <a:fillRect/>
+                </a:stretch>
+              </p:blipFill>
+              <p:spPr>
+                <a:xfrm>
+                  <a:off x="9656784" y="4322376"/>
+                  <a:ext cx="156960" cy="137880"/>
+                </a:xfrm>
+                <a:prstGeom prst="rect">
+                  <a:avLst/>
+                </a:prstGeom>
+              </p:spPr>
+            </p:pic>
+          </mc:Fallback>
+        </mc:AlternateContent>
+        <mc:AlternateContent xmlns:mc="http://schemas.openxmlformats.org/markup-compatibility/2006" xmlns:p14="http://schemas.microsoft.com/office/powerpoint/2010/main">
+          <mc:Choice Requires="p14">
+            <p:contentPart p14:bwMode="auto" r:id="rId22">
+              <p14:nvContentPartPr>
+                <p14:cNvPr id="19" name="Ink 18">
+                  <a:extLst>
+                    <a:ext uri="{FF2B5EF4-FFF2-40B4-BE49-F238E27FC236}">
+                      <a16:creationId xmlns:a16="http://schemas.microsoft.com/office/drawing/2014/main" id="{88971E90-4B93-04E0-F00E-7F9479DDD587}"/>
+                    </a:ext>
+                  </a:extLst>
+                </p14:cNvPr>
+                <p14:cNvContentPartPr/>
+                <p14:nvPr/>
+              </p14:nvContentPartPr>
+              <p14:xfrm>
+                <a:off x="9883944" y="4309056"/>
+                <a:ext cx="150480" cy="123480"/>
+              </p14:xfrm>
+            </p:contentPart>
+          </mc:Choice>
+          <mc:Fallback xmlns="">
+            <p:pic>
+              <p:nvPicPr>
+                <p:cNvPr id="19" name="Ink 18">
+                  <a:extLst>
+                    <a:ext uri="{FF2B5EF4-FFF2-40B4-BE49-F238E27FC236}">
+                      <a16:creationId xmlns:a16="http://schemas.microsoft.com/office/drawing/2014/main" id="{88971E90-4B93-04E0-F00E-7F9479DDD587}"/>
+                    </a:ext>
+                  </a:extLst>
+                </p:cNvPr>
+                <p:cNvPicPr/>
+                <p:nvPr/>
+              </p:nvPicPr>
+              <p:blipFill>
+                <a:blip r:embed="rId23"/>
+                <a:stretch>
+                  <a:fillRect/>
+                </a:stretch>
+              </p:blipFill>
+              <p:spPr>
+                <a:xfrm>
+                  <a:off x="9865944" y="4291056"/>
+                  <a:ext cx="186120" cy="159120"/>
+                </a:xfrm>
+                <a:prstGeom prst="rect">
+                  <a:avLst/>
+                </a:prstGeom>
+              </p:spPr>
+            </p:pic>
+          </mc:Fallback>
+        </mc:AlternateContent>
+      </p:grpSp>
+      <mc:AlternateContent xmlns:mc="http://schemas.openxmlformats.org/markup-compatibility/2006" xmlns:p14="http://schemas.microsoft.com/office/powerpoint/2010/main">
+        <mc:Choice Requires="p14">
+          <p:contentPart p14:bwMode="auto" r:id="rId24">
+            <p14:nvContentPartPr>
+              <p14:cNvPr id="21" name="Ink 20">
+                <a:extLst>
+                  <a:ext uri="{FF2B5EF4-FFF2-40B4-BE49-F238E27FC236}">
+                    <a16:creationId xmlns:a16="http://schemas.microsoft.com/office/drawing/2014/main" id="{D03F0FA8-C181-DEDE-1A99-C3B6A0FE7861}"/>
+                  </a:ext>
+                </a:extLst>
+              </p14:cNvPr>
+              <p14:cNvContentPartPr/>
+              <p14:nvPr/>
+            </p14:nvContentPartPr>
+            <p14:xfrm>
+              <a:off x="10360584" y="2337336"/>
+              <a:ext cx="41760" cy="165240"/>
+            </p14:xfrm>
+          </p:contentPart>
+        </mc:Choice>
+        <mc:Fallback xmlns="">
+          <p:pic>
+            <p:nvPicPr>
+              <p:cNvPr id="21" name="Ink 20">
+                <a:extLst>
+                  <a:ext uri="{FF2B5EF4-FFF2-40B4-BE49-F238E27FC236}">
+                    <a16:creationId xmlns:a16="http://schemas.microsoft.com/office/drawing/2014/main" id="{D03F0FA8-C181-DEDE-1A99-C3B6A0FE7861}"/>
+                  </a:ext>
+                </a:extLst>
+              </p:cNvPr>
+              <p:cNvPicPr/>
+              <p:nvPr/>
+            </p:nvPicPr>
+            <p:blipFill>
+              <a:blip r:embed="rId25"/>
+              <a:stretch>
+                <a:fillRect/>
+              </a:stretch>
+            </p:blipFill>
+            <p:spPr>
+              <a:xfrm>
+                <a:off x="10342584" y="2319375"/>
+                <a:ext cx="77400" cy="200803"/>
+              </a:xfrm>
+              <a:prstGeom prst="rect">
+                <a:avLst/>
+              </a:prstGeom>
+            </p:spPr>
+          </p:pic>
+        </mc:Fallback>
+      </mc:AlternateContent>
       <mc:AlternateContent xmlns:mc="http://schemas.openxmlformats.org/markup-compatibility/2006" xmlns:p14="http://schemas.microsoft.com/office/powerpoint/2010/main">
         <mc:Choice Requires="p14">
           <p:contentPart p14:bwMode="auto" r:id="rId26">
@@ -25950,7 +28355,7 @@
               <p14:cNvPr id="22" name="Ink 21">
                 <a:extLst>
                   <a:ext uri="{FF2B5EF4-FFF2-40B4-BE49-F238E27FC236}">
-                    <a16:creationId xmlns:a16="http://schemas.microsoft.com/office/drawing/2014/main" id="{F52763D6-6728-F737-46A2-1AF75BCB98BE}"/>
+                    <a16:creationId xmlns:a16="http://schemas.microsoft.com/office/drawing/2014/main" id="{63B81866-B9B0-3055-4E18-36C4FEB6B67E}"/>
                   </a:ext>
                 </a:extLst>
               </p14:cNvPr>
@@ -25969,7 +28374,7 @@
               <p:cNvPr id="22" name="Ink 21">
                 <a:extLst>
                   <a:ext uri="{FF2B5EF4-FFF2-40B4-BE49-F238E27FC236}">
-                    <a16:creationId xmlns:a16="http://schemas.microsoft.com/office/drawing/2014/main" id="{F52763D6-6728-F737-46A2-1AF75BCB98BE}"/>
+                    <a16:creationId xmlns:a16="http://schemas.microsoft.com/office/drawing/2014/main" id="{63B81866-B9B0-3055-4E18-36C4FEB6B67E}"/>
                   </a:ext>
                 </a:extLst>
               </p:cNvPr>
@@ -25984,7 +28389,7 @@
             </p:blipFill>
             <p:spPr>
               <a:xfrm>
-                <a:off x="10342944" y="2274696"/>
+                <a:off x="10342584" y="2274336"/>
                 <a:ext cx="323280" cy="242280"/>
               </a:xfrm>
               <a:prstGeom prst="rect">
@@ -26001,7 +28406,7 @@
               <p14:cNvPr id="25" name="Ink 24">
                 <a:extLst>
                   <a:ext uri="{FF2B5EF4-FFF2-40B4-BE49-F238E27FC236}">
-                    <a16:creationId xmlns:a16="http://schemas.microsoft.com/office/drawing/2014/main" id="{2A5267D9-88F3-990F-8D06-59CA03557CA2}"/>
+                    <a16:creationId xmlns:a16="http://schemas.microsoft.com/office/drawing/2014/main" id="{27BA151C-50DE-AA3F-12DA-60895ED457B5}"/>
                   </a:ext>
                 </a:extLst>
               </p14:cNvPr>
@@ -26020,7 +28425,7 @@
               <p:cNvPr id="25" name="Ink 24">
                 <a:extLst>
                   <a:ext uri="{FF2B5EF4-FFF2-40B4-BE49-F238E27FC236}">
-                    <a16:creationId xmlns:a16="http://schemas.microsoft.com/office/drawing/2014/main" id="{2A5267D9-88F3-990F-8D06-59CA03557CA2}"/>
+                    <a16:creationId xmlns:a16="http://schemas.microsoft.com/office/drawing/2014/main" id="{27BA151C-50DE-AA3F-12DA-60895ED457B5}"/>
                   </a:ext>
                 </a:extLst>
               </p:cNvPr>
@@ -26035,8 +28440,8 @@
             </p:blipFill>
             <p:spPr>
               <a:xfrm>
-                <a:off x="10688184" y="1970136"/>
-                <a:ext cx="205920" cy="245520"/>
+                <a:off x="10687824" y="1970167"/>
+                <a:ext cx="205920" cy="245459"/>
               </a:xfrm>
               <a:prstGeom prst="rect">
                 <a:avLst/>
@@ -26050,7 +28455,7 @@
           <p:cNvPr id="28" name="Group 27">
             <a:extLst>
               <a:ext uri="{FF2B5EF4-FFF2-40B4-BE49-F238E27FC236}">
-                <a16:creationId xmlns:a16="http://schemas.microsoft.com/office/drawing/2014/main" id="{E4C93237-0650-5576-220F-EC08C30C68CF}"/>
+                <a16:creationId xmlns:a16="http://schemas.microsoft.com/office/drawing/2014/main" id="{752D83BE-AFD7-D7BA-0826-BA2605352CE8}"/>
               </a:ext>
             </a:extLst>
           </p:cNvPr>
@@ -26072,7 +28477,7 @@
                 <p14:cNvPr id="26" name="Ink 25">
                   <a:extLst>
                     <a:ext uri="{FF2B5EF4-FFF2-40B4-BE49-F238E27FC236}">
-                      <a16:creationId xmlns:a16="http://schemas.microsoft.com/office/drawing/2014/main" id="{DE416CD9-555D-45EA-A63E-75E0003E435B}"/>
+                      <a16:creationId xmlns:a16="http://schemas.microsoft.com/office/drawing/2014/main" id="{9C958205-F001-4F9D-F12B-D4A5729D6694}"/>
                     </a:ext>
                   </a:extLst>
                 </p14:cNvPr>
@@ -26091,7 +28496,7 @@
                 <p:cNvPr id="26" name="Ink 25">
                   <a:extLst>
                     <a:ext uri="{FF2B5EF4-FFF2-40B4-BE49-F238E27FC236}">
-                      <a16:creationId xmlns:a16="http://schemas.microsoft.com/office/drawing/2014/main" id="{DE416CD9-555D-45EA-A63E-75E0003E435B}"/>
+                      <a16:creationId xmlns:a16="http://schemas.microsoft.com/office/drawing/2014/main" id="{9C958205-F001-4F9D-F12B-D4A5729D6694}"/>
                     </a:ext>
                   </a:extLst>
                 </p:cNvPr>
@@ -26123,7 +28528,7 @@
                 <p14:cNvPr id="27" name="Ink 26">
                   <a:extLst>
                     <a:ext uri="{FF2B5EF4-FFF2-40B4-BE49-F238E27FC236}">
-                      <a16:creationId xmlns:a16="http://schemas.microsoft.com/office/drawing/2014/main" id="{2DF76648-42E8-51D7-885E-52D99BA4D0A8}"/>
+                      <a16:creationId xmlns:a16="http://schemas.microsoft.com/office/drawing/2014/main" id="{6F737524-A7E2-A34D-B4CA-706DB6863B43}"/>
                     </a:ext>
                   </a:extLst>
                 </p14:cNvPr>
@@ -26142,7 +28547,7 @@
                 <p:cNvPr id="27" name="Ink 26">
                   <a:extLst>
                     <a:ext uri="{FF2B5EF4-FFF2-40B4-BE49-F238E27FC236}">
-                      <a16:creationId xmlns:a16="http://schemas.microsoft.com/office/drawing/2014/main" id="{2DF76648-42E8-51D7-885E-52D99BA4D0A8}"/>
+                      <a16:creationId xmlns:a16="http://schemas.microsoft.com/office/drawing/2014/main" id="{6F737524-A7E2-A34D-B4CA-706DB6863B43}"/>
                     </a:ext>
                   </a:extLst>
                 </p:cNvPr>
@@ -26157,7 +28562,7 @@
               </p:blipFill>
               <p:spPr>
                 <a:xfrm>
-                  <a:off x="11294784" y="1665936"/>
+                  <a:off x="11294784" y="1665576"/>
                   <a:ext cx="201600" cy="199440"/>
                 </a:xfrm>
                 <a:prstGeom prst="rect">
@@ -26173,7 +28578,7 @@
           <p:cNvPr id="37" name="Group 36">
             <a:extLst>
               <a:ext uri="{FF2B5EF4-FFF2-40B4-BE49-F238E27FC236}">
-                <a16:creationId xmlns:a16="http://schemas.microsoft.com/office/drawing/2014/main" id="{EC3824D7-847B-BC70-6C74-9E21EF71F2C1}"/>
+                <a16:creationId xmlns:a16="http://schemas.microsoft.com/office/drawing/2014/main" id="{9AD80951-C694-D6CD-9DE6-FBE346CD7912}"/>
               </a:ext>
             </a:extLst>
           </p:cNvPr>
@@ -26195,7 +28600,7 @@
                 <p14:cNvPr id="34" name="Ink 33">
                   <a:extLst>
                     <a:ext uri="{FF2B5EF4-FFF2-40B4-BE49-F238E27FC236}">
-                      <a16:creationId xmlns:a16="http://schemas.microsoft.com/office/drawing/2014/main" id="{081969B5-A1FA-6567-085E-D3DDE36E4D52}"/>
+                      <a16:creationId xmlns:a16="http://schemas.microsoft.com/office/drawing/2014/main" id="{BB92C6B2-3873-9C46-5B16-39C443895669}"/>
                     </a:ext>
                   </a:extLst>
                 </p14:cNvPr>
@@ -26214,7 +28619,7 @@
                 <p:cNvPr id="34" name="Ink 33">
                   <a:extLst>
                     <a:ext uri="{FF2B5EF4-FFF2-40B4-BE49-F238E27FC236}">
-                      <a16:creationId xmlns:a16="http://schemas.microsoft.com/office/drawing/2014/main" id="{081969B5-A1FA-6567-085E-D3DDE36E4D52}"/>
+                      <a16:creationId xmlns:a16="http://schemas.microsoft.com/office/drawing/2014/main" id="{BB92C6B2-3873-9C46-5B16-39C443895669}"/>
                     </a:ext>
                   </a:extLst>
                 </p:cNvPr>
@@ -26246,7 +28651,7 @@
                 <p14:cNvPr id="35" name="Ink 34">
                   <a:extLst>
                     <a:ext uri="{FF2B5EF4-FFF2-40B4-BE49-F238E27FC236}">
-                      <a16:creationId xmlns:a16="http://schemas.microsoft.com/office/drawing/2014/main" id="{34350236-AB9A-98B0-6902-4E838413FD21}"/>
+                      <a16:creationId xmlns:a16="http://schemas.microsoft.com/office/drawing/2014/main" id="{99CE6CA9-FC54-3B75-EABB-AB4DB253EDC3}"/>
                     </a:ext>
                   </a:extLst>
                 </p14:cNvPr>
@@ -26265,7 +28670,7 @@
                 <p:cNvPr id="35" name="Ink 34">
                   <a:extLst>
                     <a:ext uri="{FF2B5EF4-FFF2-40B4-BE49-F238E27FC236}">
-                      <a16:creationId xmlns:a16="http://schemas.microsoft.com/office/drawing/2014/main" id="{34350236-AB9A-98B0-6902-4E838413FD21}"/>
+                      <a16:creationId xmlns:a16="http://schemas.microsoft.com/office/drawing/2014/main" id="{99CE6CA9-FC54-3B75-EABB-AB4DB253EDC3}"/>
                     </a:ext>
                   </a:extLst>
                 </p:cNvPr>
@@ -26280,7 +28685,7 @@
               </p:blipFill>
               <p:spPr>
                 <a:xfrm>
-                  <a:off x="6810984" y="6229296"/>
+                  <a:off x="6810624" y="6228936"/>
                   <a:ext cx="72720" cy="79560"/>
                 </a:xfrm>
                 <a:prstGeom prst="rect">
@@ -26298,7 +28703,7 @@
               <p14:cNvPr id="36" name="Ink 35">
                 <a:extLst>
                   <a:ext uri="{FF2B5EF4-FFF2-40B4-BE49-F238E27FC236}">
-                    <a16:creationId xmlns:a16="http://schemas.microsoft.com/office/drawing/2014/main" id="{CF4E6ABC-E4DB-A534-A75C-645366BE0D77}"/>
+                    <a16:creationId xmlns:a16="http://schemas.microsoft.com/office/drawing/2014/main" id="{230013E9-2C16-766E-7B97-6CBCE2644BB4}"/>
                   </a:ext>
                 </a:extLst>
               </p14:cNvPr>
@@ -26317,7 +28722,7 @@
               <p:cNvPr id="36" name="Ink 35">
                 <a:extLst>
                   <a:ext uri="{FF2B5EF4-FFF2-40B4-BE49-F238E27FC236}">
-                    <a16:creationId xmlns:a16="http://schemas.microsoft.com/office/drawing/2014/main" id="{CF4E6ABC-E4DB-A534-A75C-645366BE0D77}"/>
+                    <a16:creationId xmlns:a16="http://schemas.microsoft.com/office/drawing/2014/main" id="{230013E9-2C16-766E-7B97-6CBCE2644BB4}"/>
                   </a:ext>
                 </a:extLst>
               </p:cNvPr>
@@ -26347,7 +28752,7 @@
           <p:cNvPr id="48" name="Group 47">
             <a:extLst>
               <a:ext uri="{FF2B5EF4-FFF2-40B4-BE49-F238E27FC236}">
-                <a16:creationId xmlns:a16="http://schemas.microsoft.com/office/drawing/2014/main" id="{41ED2A61-E907-D4CD-2E9D-CCBFED7687DF}"/>
+                <a16:creationId xmlns:a16="http://schemas.microsoft.com/office/drawing/2014/main" id="{3F2D55DC-43D3-47E2-30BD-D872A79B7F78}"/>
               </a:ext>
             </a:extLst>
           </p:cNvPr>
@@ -26369,7 +28774,7 @@
                 <p14:cNvPr id="38" name="Ink 37">
                   <a:extLst>
                     <a:ext uri="{FF2B5EF4-FFF2-40B4-BE49-F238E27FC236}">
-                      <a16:creationId xmlns:a16="http://schemas.microsoft.com/office/drawing/2014/main" id="{34823259-C760-A07A-097D-710EF2792B32}"/>
+                      <a16:creationId xmlns:a16="http://schemas.microsoft.com/office/drawing/2014/main" id="{AE04EE33-5165-F812-B847-6517F4724B37}"/>
                     </a:ext>
                   </a:extLst>
                 </p14:cNvPr>
@@ -26388,7 +28793,7 @@
                 <p:cNvPr id="38" name="Ink 37">
                   <a:extLst>
                     <a:ext uri="{FF2B5EF4-FFF2-40B4-BE49-F238E27FC236}">
-                      <a16:creationId xmlns:a16="http://schemas.microsoft.com/office/drawing/2014/main" id="{34823259-C760-A07A-097D-710EF2792B32}"/>
+                      <a16:creationId xmlns:a16="http://schemas.microsoft.com/office/drawing/2014/main" id="{AE04EE33-5165-F812-B847-6517F4724B37}"/>
                     </a:ext>
                   </a:extLst>
                 </p:cNvPr>
@@ -26403,7 +28808,7 @@
               </p:blipFill>
               <p:spPr>
                 <a:xfrm>
-                  <a:off x="6376464" y="4713336"/>
+                  <a:off x="6376104" y="4712976"/>
                   <a:ext cx="125280" cy="193680"/>
                 </a:xfrm>
                 <a:prstGeom prst="rect">
@@ -26420,7 +28825,7 @@
                 <p14:cNvPr id="39" name="Ink 38">
                   <a:extLst>
                     <a:ext uri="{FF2B5EF4-FFF2-40B4-BE49-F238E27FC236}">
-                      <a16:creationId xmlns:a16="http://schemas.microsoft.com/office/drawing/2014/main" id="{176B8A4C-F165-9C30-006E-4F71333D07F5}"/>
+                      <a16:creationId xmlns:a16="http://schemas.microsoft.com/office/drawing/2014/main" id="{3C8A899B-E6DF-D2ED-6038-52C412B389CE}"/>
                     </a:ext>
                   </a:extLst>
                 </p14:cNvPr>
@@ -26439,7 +28844,7 @@
                 <p:cNvPr id="39" name="Ink 38">
                   <a:extLst>
                     <a:ext uri="{FF2B5EF4-FFF2-40B4-BE49-F238E27FC236}">
-                      <a16:creationId xmlns:a16="http://schemas.microsoft.com/office/drawing/2014/main" id="{176B8A4C-F165-9C30-006E-4F71333D07F5}"/>
+                      <a16:creationId xmlns:a16="http://schemas.microsoft.com/office/drawing/2014/main" id="{3C8A899B-E6DF-D2ED-6038-52C412B389CE}"/>
                     </a:ext>
                   </a:extLst>
                 </p:cNvPr>
@@ -26454,7 +28859,7 @@
               </p:blipFill>
               <p:spPr>
                 <a:xfrm>
-                  <a:off x="6516504" y="4702896"/>
+                  <a:off x="6516144" y="4702536"/>
                   <a:ext cx="517680" cy="167760"/>
                 </a:xfrm>
                 <a:prstGeom prst="rect">
@@ -26471,7 +28876,7 @@
                 <p14:cNvPr id="40" name="Ink 39">
                   <a:extLst>
                     <a:ext uri="{FF2B5EF4-FFF2-40B4-BE49-F238E27FC236}">
-                      <a16:creationId xmlns:a16="http://schemas.microsoft.com/office/drawing/2014/main" id="{D5E415BE-82AE-E331-4AD3-5C8A17F1B6E9}"/>
+                      <a16:creationId xmlns:a16="http://schemas.microsoft.com/office/drawing/2014/main" id="{53A77183-4872-BA31-7679-993249777D4A}"/>
                     </a:ext>
                   </a:extLst>
                 </p14:cNvPr>
@@ -26490,7 +28895,7 @@
                 <p:cNvPr id="40" name="Ink 39">
                   <a:extLst>
                     <a:ext uri="{FF2B5EF4-FFF2-40B4-BE49-F238E27FC236}">
-                      <a16:creationId xmlns:a16="http://schemas.microsoft.com/office/drawing/2014/main" id="{D5E415BE-82AE-E331-4AD3-5C8A17F1B6E9}"/>
+                      <a16:creationId xmlns:a16="http://schemas.microsoft.com/office/drawing/2014/main" id="{53A77183-4872-BA31-7679-993249777D4A}"/>
                     </a:ext>
                   </a:extLst>
                 </p:cNvPr>
@@ -26505,8 +28910,8 @@
               </p:blipFill>
               <p:spPr>
                 <a:xfrm>
-                  <a:off x="7067304" y="4664736"/>
-                  <a:ext cx="275040" cy="196920"/>
+                  <a:off x="7067368" y="4664272"/>
+                  <a:ext cx="274913" cy="197126"/>
                 </a:xfrm>
                 <a:prstGeom prst="rect">
                   <a:avLst/>
@@ -26522,7 +28927,7 @@
                 <p14:cNvPr id="41" name="Ink 40">
                   <a:extLst>
                     <a:ext uri="{FF2B5EF4-FFF2-40B4-BE49-F238E27FC236}">
-                      <a16:creationId xmlns:a16="http://schemas.microsoft.com/office/drawing/2014/main" id="{A002C050-D876-F9DE-A308-726EC46BD4D7}"/>
+                      <a16:creationId xmlns:a16="http://schemas.microsoft.com/office/drawing/2014/main" id="{BAC39CCE-1A87-00B6-C32F-7A66F65159FB}"/>
                     </a:ext>
                   </a:extLst>
                 </p14:cNvPr>
@@ -26541,7 +28946,7 @@
                 <p:cNvPr id="41" name="Ink 40">
                   <a:extLst>
                     <a:ext uri="{FF2B5EF4-FFF2-40B4-BE49-F238E27FC236}">
-                      <a16:creationId xmlns:a16="http://schemas.microsoft.com/office/drawing/2014/main" id="{A002C050-D876-F9DE-A308-726EC46BD4D7}"/>
+                      <a16:creationId xmlns:a16="http://schemas.microsoft.com/office/drawing/2014/main" id="{BAC39CCE-1A87-00B6-C32F-7A66F65159FB}"/>
                     </a:ext>
                   </a:extLst>
                 </p:cNvPr>
@@ -26556,8 +28961,8 @@
               </p:blipFill>
               <p:spPr>
                 <a:xfrm>
-                  <a:off x="7329024" y="4665456"/>
-                  <a:ext cx="206640" cy="187560"/>
+                  <a:off x="7328568" y="4665456"/>
+                  <a:ext cx="206832" cy="187560"/>
                 </a:xfrm>
                 <a:prstGeom prst="rect">
                   <a:avLst/>
@@ -26573,7 +28978,7 @@
                 <p14:cNvPr id="42" name="Ink 41">
                   <a:extLst>
                     <a:ext uri="{FF2B5EF4-FFF2-40B4-BE49-F238E27FC236}">
-                      <a16:creationId xmlns:a16="http://schemas.microsoft.com/office/drawing/2014/main" id="{15C8C6A7-45C8-D2F0-FD0F-13CB4B05B59D}"/>
+                      <a16:creationId xmlns:a16="http://schemas.microsoft.com/office/drawing/2014/main" id="{FE5BDE43-031B-AE3D-7D62-7A82FDA3A894}"/>
                     </a:ext>
                   </a:extLst>
                 </p14:cNvPr>
@@ -26592,7 +28997,7 @@
                 <p:cNvPr id="42" name="Ink 41">
                   <a:extLst>
                     <a:ext uri="{FF2B5EF4-FFF2-40B4-BE49-F238E27FC236}">
-                      <a16:creationId xmlns:a16="http://schemas.microsoft.com/office/drawing/2014/main" id="{15C8C6A7-45C8-D2F0-FD0F-13CB4B05B59D}"/>
+                      <a16:creationId xmlns:a16="http://schemas.microsoft.com/office/drawing/2014/main" id="{FE5BDE43-031B-AE3D-7D62-7A82FDA3A894}"/>
                     </a:ext>
                   </a:extLst>
                 </p:cNvPr>
@@ -26624,7 +29029,7 @@
                 <p14:cNvPr id="43" name="Ink 42">
                   <a:extLst>
                     <a:ext uri="{FF2B5EF4-FFF2-40B4-BE49-F238E27FC236}">
-                      <a16:creationId xmlns:a16="http://schemas.microsoft.com/office/drawing/2014/main" id="{E59A1DB4-43E9-2C0F-0BAA-40F102F2B5A2}"/>
+                      <a16:creationId xmlns:a16="http://schemas.microsoft.com/office/drawing/2014/main" id="{63704B14-E5DB-09F3-134A-CF0CB63EFDE2}"/>
                     </a:ext>
                   </a:extLst>
                 </p14:cNvPr>
@@ -26643,7 +29048,7 @@
                 <p:cNvPr id="43" name="Ink 42">
                   <a:extLst>
                     <a:ext uri="{FF2B5EF4-FFF2-40B4-BE49-F238E27FC236}">
-                      <a16:creationId xmlns:a16="http://schemas.microsoft.com/office/drawing/2014/main" id="{E59A1DB4-43E9-2C0F-0BAA-40F102F2B5A2}"/>
+                      <a16:creationId xmlns:a16="http://schemas.microsoft.com/office/drawing/2014/main" id="{63704B14-E5DB-09F3-134A-CF0CB63EFDE2}"/>
                     </a:ext>
                   </a:extLst>
                 </p:cNvPr>
@@ -26658,8 +29063,8 @@
               </p:blipFill>
               <p:spPr>
                 <a:xfrm>
-                  <a:off x="7711344" y="4600656"/>
-                  <a:ext cx="298080" cy="224280"/>
+                  <a:off x="7710984" y="4600741"/>
+                  <a:ext cx="298080" cy="224111"/>
                 </a:xfrm>
                 <a:prstGeom prst="rect">
                   <a:avLst/>
@@ -26675,7 +29080,7 @@
                 <p14:cNvPr id="44" name="Ink 43">
                   <a:extLst>
                     <a:ext uri="{FF2B5EF4-FFF2-40B4-BE49-F238E27FC236}">
-                      <a16:creationId xmlns:a16="http://schemas.microsoft.com/office/drawing/2014/main" id="{31B78BD9-A3E4-BE60-966A-668656D78C43}"/>
+                      <a16:creationId xmlns:a16="http://schemas.microsoft.com/office/drawing/2014/main" id="{DBAFEDA0-FAF6-C1E2-1F51-6F87918A92CE}"/>
                     </a:ext>
                   </a:extLst>
                 </p14:cNvPr>
@@ -26694,7 +29099,7 @@
                 <p:cNvPr id="44" name="Ink 43">
                   <a:extLst>
                     <a:ext uri="{FF2B5EF4-FFF2-40B4-BE49-F238E27FC236}">
-                      <a16:creationId xmlns:a16="http://schemas.microsoft.com/office/drawing/2014/main" id="{31B78BD9-A3E4-BE60-966A-668656D78C43}"/>
+                      <a16:creationId xmlns:a16="http://schemas.microsoft.com/office/drawing/2014/main" id="{DBAFEDA0-FAF6-C1E2-1F51-6F87918A92CE}"/>
                     </a:ext>
                   </a:extLst>
                 </p:cNvPr>
@@ -26709,7 +29114,7 @@
               </p:blipFill>
               <p:spPr>
                 <a:xfrm>
-                  <a:off x="7946064" y="4640256"/>
+                  <a:off x="7945704" y="4640256"/>
                   <a:ext cx="402840" cy="173880"/>
                 </a:xfrm>
                 <a:prstGeom prst="rect">
@@ -26726,7 +29131,7 @@
                 <p14:cNvPr id="45" name="Ink 44">
                   <a:extLst>
                     <a:ext uri="{FF2B5EF4-FFF2-40B4-BE49-F238E27FC236}">
-                      <a16:creationId xmlns:a16="http://schemas.microsoft.com/office/drawing/2014/main" id="{183A3420-2FAB-D375-062B-28CF02F4102E}"/>
+                      <a16:creationId xmlns:a16="http://schemas.microsoft.com/office/drawing/2014/main" id="{D3FFE793-9809-C492-848A-CF7C657DED14}"/>
                     </a:ext>
                   </a:extLst>
                 </p14:cNvPr>
@@ -26745,7 +29150,7 @@
                 <p:cNvPr id="45" name="Ink 44">
                   <a:extLst>
                     <a:ext uri="{FF2B5EF4-FFF2-40B4-BE49-F238E27FC236}">
-                      <a16:creationId xmlns:a16="http://schemas.microsoft.com/office/drawing/2014/main" id="{183A3420-2FAB-D375-062B-28CF02F4102E}"/>
+                      <a16:creationId xmlns:a16="http://schemas.microsoft.com/office/drawing/2014/main" id="{D3FFE793-9809-C492-848A-CF7C657DED14}"/>
                     </a:ext>
                   </a:extLst>
                 </p:cNvPr>
@@ -26760,7 +29165,7 @@
               </p:blipFill>
               <p:spPr>
                 <a:xfrm>
-                  <a:off x="8327664" y="4612896"/>
+                  <a:off x="8327664" y="4612536"/>
                   <a:ext cx="166680" cy="178200"/>
                 </a:xfrm>
                 <a:prstGeom prst="rect">
@@ -26777,7 +29182,7 @@
                 <p14:cNvPr id="46" name="Ink 45">
                   <a:extLst>
                     <a:ext uri="{FF2B5EF4-FFF2-40B4-BE49-F238E27FC236}">
-                      <a16:creationId xmlns:a16="http://schemas.microsoft.com/office/drawing/2014/main" id="{F2576517-C729-8651-967D-3B52253734FB}"/>
+                      <a16:creationId xmlns:a16="http://schemas.microsoft.com/office/drawing/2014/main" id="{ABDD193B-C3EA-5A02-7FD3-12EF962AB43D}"/>
                     </a:ext>
                   </a:extLst>
                 </p14:cNvPr>
@@ -26796,7 +29201,7 @@
                 <p:cNvPr id="46" name="Ink 45">
                   <a:extLst>
                     <a:ext uri="{FF2B5EF4-FFF2-40B4-BE49-F238E27FC236}">
-                      <a16:creationId xmlns:a16="http://schemas.microsoft.com/office/drawing/2014/main" id="{F2576517-C729-8651-967D-3B52253734FB}"/>
+                      <a16:creationId xmlns:a16="http://schemas.microsoft.com/office/drawing/2014/main" id="{ABDD193B-C3EA-5A02-7FD3-12EF962AB43D}"/>
                     </a:ext>
                   </a:extLst>
                 </p:cNvPr>
@@ -26811,7 +29216,7 @@
               </p:blipFill>
               <p:spPr>
                 <a:xfrm>
-                  <a:off x="8425224" y="4499496"/>
+                  <a:off x="8424864" y="4499496"/>
                   <a:ext cx="264960" cy="358920"/>
                 </a:xfrm>
                 <a:prstGeom prst="rect">
@@ -26828,7 +29233,7 @@
                 <p14:cNvPr id="47" name="Ink 46">
                   <a:extLst>
                     <a:ext uri="{FF2B5EF4-FFF2-40B4-BE49-F238E27FC236}">
-                      <a16:creationId xmlns:a16="http://schemas.microsoft.com/office/drawing/2014/main" id="{53BF5C9E-799E-891A-4580-620567F8C4D3}"/>
+                      <a16:creationId xmlns:a16="http://schemas.microsoft.com/office/drawing/2014/main" id="{5E1803B0-89C4-FBEA-89CF-A4D1F8D728FB}"/>
                     </a:ext>
                   </a:extLst>
                 </p14:cNvPr>
@@ -26847,7 +29252,7 @@
                 <p:cNvPr id="47" name="Ink 46">
                   <a:extLst>
                     <a:ext uri="{FF2B5EF4-FFF2-40B4-BE49-F238E27FC236}">
-                      <a16:creationId xmlns:a16="http://schemas.microsoft.com/office/drawing/2014/main" id="{53BF5C9E-799E-891A-4580-620567F8C4D3}"/>
+                      <a16:creationId xmlns:a16="http://schemas.microsoft.com/office/drawing/2014/main" id="{5E1803B0-89C4-FBEA-89CF-A4D1F8D728FB}"/>
                     </a:ext>
                   </a:extLst>
                 </p:cNvPr>
@@ -26862,8 +29267,8 @@
               </p:blipFill>
               <p:spPr>
                 <a:xfrm>
-                  <a:off x="6202224" y="4623696"/>
-                  <a:ext cx="219960" cy="352800"/>
+                  <a:off x="6201776" y="4623742"/>
+                  <a:ext cx="220134" cy="352708"/>
                 </a:xfrm>
                 <a:prstGeom prst="rect">
                   <a:avLst/>
@@ -26878,7 +29283,7 @@
           <p:cNvPr id="70" name="Group 69">
             <a:extLst>
               <a:ext uri="{FF2B5EF4-FFF2-40B4-BE49-F238E27FC236}">
-                <a16:creationId xmlns:a16="http://schemas.microsoft.com/office/drawing/2014/main" id="{2DED3CB2-8FAC-1FBB-316E-A904B5DFE2EB}"/>
+                <a16:creationId xmlns:a16="http://schemas.microsoft.com/office/drawing/2014/main" id="{A99D60D0-CD48-334A-3674-2D7FD6A2E927}"/>
               </a:ext>
             </a:extLst>
           </p:cNvPr>
@@ -26900,7 +29305,7 @@
                 <p14:cNvPr id="31" name="Ink 30">
                   <a:extLst>
                     <a:ext uri="{FF2B5EF4-FFF2-40B4-BE49-F238E27FC236}">
-                      <a16:creationId xmlns:a16="http://schemas.microsoft.com/office/drawing/2014/main" id="{0C82F06F-9852-6298-CD04-E7F5D3793204}"/>
+                      <a16:creationId xmlns:a16="http://schemas.microsoft.com/office/drawing/2014/main" id="{9BA1A169-1095-012D-1A19-8B28C716A31F}"/>
                     </a:ext>
                   </a:extLst>
                 </p14:cNvPr>
@@ -26919,7 +29324,7 @@
                 <p:cNvPr id="31" name="Ink 30">
                   <a:extLst>
                     <a:ext uri="{FF2B5EF4-FFF2-40B4-BE49-F238E27FC236}">
-                      <a16:creationId xmlns:a16="http://schemas.microsoft.com/office/drawing/2014/main" id="{0C82F06F-9852-6298-CD04-E7F5D3793204}"/>
+                      <a16:creationId xmlns:a16="http://schemas.microsoft.com/office/drawing/2014/main" id="{9BA1A169-1095-012D-1A19-8B28C716A31F}"/>
                     </a:ext>
                   </a:extLst>
                 </p:cNvPr>
@@ -26934,8 +29339,8 @@
               </p:blipFill>
               <p:spPr>
                 <a:xfrm>
-                  <a:off x="6673464" y="4934376"/>
-                  <a:ext cx="333360" cy="276120"/>
+                  <a:off x="6673054" y="4934376"/>
+                  <a:ext cx="333459" cy="276120"/>
                 </a:xfrm>
                 <a:prstGeom prst="rect">
                   <a:avLst/>
@@ -26951,7 +29356,7 @@
                 <p14:cNvPr id="32" name="Ink 31">
                   <a:extLst>
                     <a:ext uri="{FF2B5EF4-FFF2-40B4-BE49-F238E27FC236}">
-                      <a16:creationId xmlns:a16="http://schemas.microsoft.com/office/drawing/2014/main" id="{3BEA3F34-F49F-0B58-F3E8-07B6132B872E}"/>
+                      <a16:creationId xmlns:a16="http://schemas.microsoft.com/office/drawing/2014/main" id="{E2C98721-EFFA-2D9F-5756-C1A6626E2269}"/>
                     </a:ext>
                   </a:extLst>
                 </p14:cNvPr>
@@ -26970,7 +29375,7 @@
                 <p:cNvPr id="32" name="Ink 31">
                   <a:extLst>
                     <a:ext uri="{FF2B5EF4-FFF2-40B4-BE49-F238E27FC236}">
-                      <a16:creationId xmlns:a16="http://schemas.microsoft.com/office/drawing/2014/main" id="{3BEA3F34-F49F-0B58-F3E8-07B6132B872E}"/>
+                      <a16:creationId xmlns:a16="http://schemas.microsoft.com/office/drawing/2014/main" id="{E2C98721-EFFA-2D9F-5756-C1A6626E2269}"/>
                     </a:ext>
                   </a:extLst>
                 </p:cNvPr>
@@ -26985,7 +29390,7 @@
               </p:blipFill>
               <p:spPr>
                 <a:xfrm>
-                  <a:off x="6692184" y="5394456"/>
+                  <a:off x="6691824" y="5394456"/>
                   <a:ext cx="358560" cy="290520"/>
                 </a:xfrm>
                 <a:prstGeom prst="rect">
@@ -27002,7 +29407,7 @@
                 <p14:cNvPr id="33" name="Ink 32">
                   <a:extLst>
                     <a:ext uri="{FF2B5EF4-FFF2-40B4-BE49-F238E27FC236}">
-                      <a16:creationId xmlns:a16="http://schemas.microsoft.com/office/drawing/2014/main" id="{65B5B3C0-B3CD-5B60-0DBF-6BBBA12E25D6}"/>
+                      <a16:creationId xmlns:a16="http://schemas.microsoft.com/office/drawing/2014/main" id="{391EA94F-2128-05C2-3CF6-251405579620}"/>
                     </a:ext>
                   </a:extLst>
                 </p14:cNvPr>
@@ -27021,7 +29426,7 @@
                 <p:cNvPr id="33" name="Ink 32">
                   <a:extLst>
                     <a:ext uri="{FF2B5EF4-FFF2-40B4-BE49-F238E27FC236}">
-                      <a16:creationId xmlns:a16="http://schemas.microsoft.com/office/drawing/2014/main" id="{65B5B3C0-B3CD-5B60-0DBF-6BBBA12E25D6}"/>
+                      <a16:creationId xmlns:a16="http://schemas.microsoft.com/office/drawing/2014/main" id="{391EA94F-2128-05C2-3CF6-251405579620}"/>
                     </a:ext>
                   </a:extLst>
                 </p:cNvPr>
@@ -27036,8 +29441,8 @@
               </p:blipFill>
               <p:spPr>
                 <a:xfrm>
-                  <a:off x="6758784" y="5810256"/>
-                  <a:ext cx="302400" cy="259920"/>
+                  <a:off x="6758368" y="5810256"/>
+                  <a:ext cx="302512" cy="259920"/>
                 </a:xfrm>
                 <a:prstGeom prst="rect">
                   <a:avLst/>
@@ -27053,7 +29458,7 @@
                 <p14:cNvPr id="49" name="Ink 48">
                   <a:extLst>
                     <a:ext uri="{FF2B5EF4-FFF2-40B4-BE49-F238E27FC236}">
-                      <a16:creationId xmlns:a16="http://schemas.microsoft.com/office/drawing/2014/main" id="{CCE1ED5B-E37B-47E0-FA8B-15195EF92A23}"/>
+                      <a16:creationId xmlns:a16="http://schemas.microsoft.com/office/drawing/2014/main" id="{D7971024-6E5A-D3CC-43E0-52E80F6A9F74}"/>
                     </a:ext>
                   </a:extLst>
                 </p14:cNvPr>
@@ -27072,7 +29477,7 @@
                 <p:cNvPr id="49" name="Ink 48">
                   <a:extLst>
                     <a:ext uri="{FF2B5EF4-FFF2-40B4-BE49-F238E27FC236}">
-                      <a16:creationId xmlns:a16="http://schemas.microsoft.com/office/drawing/2014/main" id="{CCE1ED5B-E37B-47E0-FA8B-15195EF92A23}"/>
+                      <a16:creationId xmlns:a16="http://schemas.microsoft.com/office/drawing/2014/main" id="{D7971024-6E5A-D3CC-43E0-52E80F6A9F74}"/>
                     </a:ext>
                   </a:extLst>
                 </p:cNvPr>
@@ -27087,8 +29492,8 @@
               </p:blipFill>
               <p:spPr>
                 <a:xfrm>
-                  <a:off x="5630904" y="5347656"/>
-                  <a:ext cx="111600" cy="101880"/>
+                  <a:off x="5630217" y="5347656"/>
+                  <a:ext cx="112251" cy="101880"/>
                 </a:xfrm>
                 <a:prstGeom prst="rect">
                   <a:avLst/>
@@ -27104,7 +29509,7 @@
                 <p14:cNvPr id="50" name="Ink 49">
                   <a:extLst>
                     <a:ext uri="{FF2B5EF4-FFF2-40B4-BE49-F238E27FC236}">
-                      <a16:creationId xmlns:a16="http://schemas.microsoft.com/office/drawing/2014/main" id="{8568F5A0-B925-A31A-A5AF-74B5F40BF8A7}"/>
+                      <a16:creationId xmlns:a16="http://schemas.microsoft.com/office/drawing/2014/main" id="{22D08576-36D5-F9CD-E574-A5E1528F2AE3}"/>
                     </a:ext>
                   </a:extLst>
                 </p14:cNvPr>
@@ -27123,7 +29528,7 @@
                 <p:cNvPr id="50" name="Ink 49">
                   <a:extLst>
                     <a:ext uri="{FF2B5EF4-FFF2-40B4-BE49-F238E27FC236}">
-                      <a16:creationId xmlns:a16="http://schemas.microsoft.com/office/drawing/2014/main" id="{8568F5A0-B925-A31A-A5AF-74B5F40BF8A7}"/>
+                      <a16:creationId xmlns:a16="http://schemas.microsoft.com/office/drawing/2014/main" id="{22D08576-36D5-F9CD-E574-A5E1528F2AE3}"/>
                     </a:ext>
                   </a:extLst>
                 </p:cNvPr>
@@ -27138,8 +29543,8 @@
               </p:blipFill>
               <p:spPr>
                 <a:xfrm>
-                  <a:off x="5642784" y="5535936"/>
-                  <a:ext cx="114120" cy="107640"/>
+                  <a:off x="5643087" y="5535212"/>
+                  <a:ext cx="113518" cy="108364"/>
                 </a:xfrm>
                 <a:prstGeom prst="rect">
                   <a:avLst/>
@@ -27155,7 +29560,7 @@
                 <p14:cNvPr id="51" name="Ink 50">
                   <a:extLst>
                     <a:ext uri="{FF2B5EF4-FFF2-40B4-BE49-F238E27FC236}">
-                      <a16:creationId xmlns:a16="http://schemas.microsoft.com/office/drawing/2014/main" id="{57DCD316-F596-16DD-0F5F-9A00A35ED6E4}"/>
+                      <a16:creationId xmlns:a16="http://schemas.microsoft.com/office/drawing/2014/main" id="{CE6B0991-AF94-6CBE-A8E0-B8F671A25912}"/>
                     </a:ext>
                   </a:extLst>
                 </p14:cNvPr>
@@ -27174,7 +29579,7 @@
                 <p:cNvPr id="51" name="Ink 50">
                   <a:extLst>
                     <a:ext uri="{FF2B5EF4-FFF2-40B4-BE49-F238E27FC236}">
-                      <a16:creationId xmlns:a16="http://schemas.microsoft.com/office/drawing/2014/main" id="{57DCD316-F596-16DD-0F5F-9A00A35ED6E4}"/>
+                      <a16:creationId xmlns:a16="http://schemas.microsoft.com/office/drawing/2014/main" id="{CE6B0991-AF94-6CBE-A8E0-B8F671A25912}"/>
                     </a:ext>
                   </a:extLst>
                 </p:cNvPr>
@@ -27189,7 +29594,7 @@
               </p:blipFill>
               <p:spPr>
                 <a:xfrm>
-                  <a:off x="5670144" y="5708376"/>
+                  <a:off x="5670144" y="5708016"/>
                   <a:ext cx="117000" cy="90720"/>
                 </a:xfrm>
                 <a:prstGeom prst="rect">
@@ -27206,7 +29611,7 @@
                 <p14:cNvPr id="66" name="Ink 65">
                   <a:extLst>
                     <a:ext uri="{FF2B5EF4-FFF2-40B4-BE49-F238E27FC236}">
-                      <a16:creationId xmlns:a16="http://schemas.microsoft.com/office/drawing/2014/main" id="{63CD50FD-E816-CE8B-DC88-581F1127D81D}"/>
+                      <a16:creationId xmlns:a16="http://schemas.microsoft.com/office/drawing/2014/main" id="{43CC4E41-4715-CC19-8D40-EDF29632D61F}"/>
                     </a:ext>
                   </a:extLst>
                 </p14:cNvPr>
@@ -27225,7 +29630,7 @@
                 <p:cNvPr id="66" name="Ink 65">
                   <a:extLst>
                     <a:ext uri="{FF2B5EF4-FFF2-40B4-BE49-F238E27FC236}">
-                      <a16:creationId xmlns:a16="http://schemas.microsoft.com/office/drawing/2014/main" id="{63CD50FD-E816-CE8B-DC88-581F1127D81D}"/>
+                      <a16:creationId xmlns:a16="http://schemas.microsoft.com/office/drawing/2014/main" id="{43CC4E41-4715-CC19-8D40-EDF29632D61F}"/>
                     </a:ext>
                   </a:extLst>
                 </p:cNvPr>
@@ -27240,7 +29645,7 @@
               </p:blipFill>
               <p:spPr>
                 <a:xfrm>
-                  <a:off x="5753304" y="5033736"/>
+                  <a:off x="5752944" y="5033736"/>
                   <a:ext cx="897840" cy="380160"/>
                 </a:xfrm>
                 <a:prstGeom prst="rect">
@@ -27257,7 +29662,7 @@
                 <p14:cNvPr id="67" name="Ink 66">
                   <a:extLst>
                     <a:ext uri="{FF2B5EF4-FFF2-40B4-BE49-F238E27FC236}">
-                      <a16:creationId xmlns:a16="http://schemas.microsoft.com/office/drawing/2014/main" id="{BC5C1E31-B3C7-1384-A305-7F2A21B8861F}"/>
+                      <a16:creationId xmlns:a16="http://schemas.microsoft.com/office/drawing/2014/main" id="{ADC05D1E-03A2-BB85-DA39-3D66748912D2}"/>
                     </a:ext>
                   </a:extLst>
                 </p14:cNvPr>
@@ -27276,7 +29681,7 @@
                 <p:cNvPr id="67" name="Ink 66">
                   <a:extLst>
                     <a:ext uri="{FF2B5EF4-FFF2-40B4-BE49-F238E27FC236}">
-                      <a16:creationId xmlns:a16="http://schemas.microsoft.com/office/drawing/2014/main" id="{BC5C1E31-B3C7-1384-A305-7F2A21B8861F}"/>
+                      <a16:creationId xmlns:a16="http://schemas.microsoft.com/office/drawing/2014/main" id="{ADC05D1E-03A2-BB85-DA39-3D66748912D2}"/>
                     </a:ext>
                   </a:extLst>
                 </p:cNvPr>
@@ -27291,8 +29696,8 @@
               </p:blipFill>
               <p:spPr>
                 <a:xfrm>
-                  <a:off x="5790744" y="5379696"/>
-                  <a:ext cx="870840" cy="268200"/>
+                  <a:off x="5790384" y="5379270"/>
+                  <a:ext cx="870840" cy="268331"/>
                 </a:xfrm>
                 <a:prstGeom prst="rect">
                   <a:avLst/>
@@ -27308,7 +29713,7 @@
                 <p14:cNvPr id="68" name="Ink 67">
                   <a:extLst>
                     <a:ext uri="{FF2B5EF4-FFF2-40B4-BE49-F238E27FC236}">
-                      <a16:creationId xmlns:a16="http://schemas.microsoft.com/office/drawing/2014/main" id="{060BF676-5977-A89F-A221-AE7E80C51862}"/>
+                      <a16:creationId xmlns:a16="http://schemas.microsoft.com/office/drawing/2014/main" id="{142B04AE-49E7-D55E-3F85-97ECB24C60C3}"/>
                     </a:ext>
                   </a:extLst>
                 </p14:cNvPr>
@@ -27327,7 +29732,7 @@
                 <p:cNvPr id="68" name="Ink 67">
                   <a:extLst>
                     <a:ext uri="{FF2B5EF4-FFF2-40B4-BE49-F238E27FC236}">
-                      <a16:creationId xmlns:a16="http://schemas.microsoft.com/office/drawing/2014/main" id="{060BF676-5977-A89F-A221-AE7E80C51862}"/>
+                      <a16:creationId xmlns:a16="http://schemas.microsoft.com/office/drawing/2014/main" id="{142B04AE-49E7-D55E-3F85-97ECB24C60C3}"/>
                     </a:ext>
                   </a:extLst>
                 </p:cNvPr>
@@ -27342,8 +29747,8 @@
               </p:blipFill>
               <p:spPr>
                 <a:xfrm>
-                  <a:off x="5802264" y="5432616"/>
-                  <a:ext cx="858960" cy="379440"/>
+                  <a:off x="5801904" y="5432658"/>
+                  <a:ext cx="858960" cy="379356"/>
                 </a:xfrm>
                 <a:prstGeom prst="rect">
                   <a:avLst/>
@@ -27359,7 +29764,7 @@
                 <p14:cNvPr id="69" name="Ink 68">
                   <a:extLst>
                     <a:ext uri="{FF2B5EF4-FFF2-40B4-BE49-F238E27FC236}">
-                      <a16:creationId xmlns:a16="http://schemas.microsoft.com/office/drawing/2014/main" id="{257D2BB0-367B-DF04-A93B-2ED7113CE723}"/>
+                      <a16:creationId xmlns:a16="http://schemas.microsoft.com/office/drawing/2014/main" id="{1E523B13-BEC7-4368-5B93-A0A8E1E5FE19}"/>
                     </a:ext>
                   </a:extLst>
                 </p14:cNvPr>
@@ -27378,7 +29783,7 @@
                 <p:cNvPr id="69" name="Ink 68">
                   <a:extLst>
                     <a:ext uri="{FF2B5EF4-FFF2-40B4-BE49-F238E27FC236}">
-                      <a16:creationId xmlns:a16="http://schemas.microsoft.com/office/drawing/2014/main" id="{257D2BB0-367B-DF04-A93B-2ED7113CE723}"/>
+                      <a16:creationId xmlns:a16="http://schemas.microsoft.com/office/drawing/2014/main" id="{1E523B13-BEC7-4368-5B93-A0A8E1E5FE19}"/>
                     </a:ext>
                   </a:extLst>
                 </p:cNvPr>
@@ -27411,7 +29816,7 @@
               <p14:cNvPr id="72" name="Ink 71">
                 <a:extLst>
                   <a:ext uri="{FF2B5EF4-FFF2-40B4-BE49-F238E27FC236}">
-                    <a16:creationId xmlns:a16="http://schemas.microsoft.com/office/drawing/2014/main" id="{8BD2FB4D-0E9F-00EA-D135-5AF920BC8283}"/>
+                    <a16:creationId xmlns:a16="http://schemas.microsoft.com/office/drawing/2014/main" id="{C76CFF83-6D46-E9A2-1133-1BABE1F13565}"/>
                   </a:ext>
                 </a:extLst>
               </p14:cNvPr>
@@ -27430,7 +29835,7 @@
               <p:cNvPr id="72" name="Ink 71">
                 <a:extLst>
                   <a:ext uri="{FF2B5EF4-FFF2-40B4-BE49-F238E27FC236}">
-                    <a16:creationId xmlns:a16="http://schemas.microsoft.com/office/drawing/2014/main" id="{8BD2FB4D-0E9F-00EA-D135-5AF920BC8283}"/>
+                    <a16:creationId xmlns:a16="http://schemas.microsoft.com/office/drawing/2014/main" id="{C76CFF83-6D46-E9A2-1133-1BABE1F13565}"/>
                   </a:ext>
                 </a:extLst>
               </p:cNvPr>
@@ -27445,7 +29850,7 @@
             </p:blipFill>
             <p:spPr>
               <a:xfrm>
-                <a:off x="6374304" y="6165216"/>
+                <a:off x="6373944" y="6164856"/>
                 <a:ext cx="77040" cy="77400"/>
               </a:xfrm>
               <a:prstGeom prst="rect">
@@ -27460,7 +29865,7 @@
           <p:cNvPr id="78" name="Group 77">
             <a:extLst>
               <a:ext uri="{FF2B5EF4-FFF2-40B4-BE49-F238E27FC236}">
-                <a16:creationId xmlns:a16="http://schemas.microsoft.com/office/drawing/2014/main" id="{FF8CEDC6-8DAB-FC69-7810-390824C62B15}"/>
+                <a16:creationId xmlns:a16="http://schemas.microsoft.com/office/drawing/2014/main" id="{C365DB1D-9523-548E-8780-F11EFF99BCED}"/>
               </a:ext>
             </a:extLst>
           </p:cNvPr>
@@ -27482,7 +29887,7 @@
                 <p14:cNvPr id="73" name="Ink 72">
                   <a:extLst>
                     <a:ext uri="{FF2B5EF4-FFF2-40B4-BE49-F238E27FC236}">
-                      <a16:creationId xmlns:a16="http://schemas.microsoft.com/office/drawing/2014/main" id="{F567667C-6A27-2190-30CB-61F9D19010D1}"/>
+                      <a16:creationId xmlns:a16="http://schemas.microsoft.com/office/drawing/2014/main" id="{66B44DCE-910E-CF3C-9600-B3DE1039E6DF}"/>
                     </a:ext>
                   </a:extLst>
                 </p14:cNvPr>
@@ -27501,7 +29906,7 @@
                 <p:cNvPr id="73" name="Ink 72">
                   <a:extLst>
                     <a:ext uri="{FF2B5EF4-FFF2-40B4-BE49-F238E27FC236}">
-                      <a16:creationId xmlns:a16="http://schemas.microsoft.com/office/drawing/2014/main" id="{F567667C-6A27-2190-30CB-61F9D19010D1}"/>
+                      <a16:creationId xmlns:a16="http://schemas.microsoft.com/office/drawing/2014/main" id="{66B44DCE-910E-CF3C-9600-B3DE1039E6DF}"/>
                     </a:ext>
                   </a:extLst>
                 </p:cNvPr>
@@ -27516,8 +29921,8 @@
               </p:blipFill>
               <p:spPr>
                 <a:xfrm>
-                  <a:off x="5650344" y="5853816"/>
-                  <a:ext cx="114480" cy="126000"/>
+                  <a:off x="5650644" y="5853456"/>
+                  <a:ext cx="113883" cy="126000"/>
                 </a:xfrm>
                 <a:prstGeom prst="rect">
                   <a:avLst/>
@@ -27533,7 +29938,7 @@
                 <p14:cNvPr id="74" name="Ink 73">
                   <a:extLst>
                     <a:ext uri="{FF2B5EF4-FFF2-40B4-BE49-F238E27FC236}">
-                      <a16:creationId xmlns:a16="http://schemas.microsoft.com/office/drawing/2014/main" id="{D6736167-F98F-8A48-6691-BF2E49716F21}"/>
+                      <a16:creationId xmlns:a16="http://schemas.microsoft.com/office/drawing/2014/main" id="{976253B6-FE77-103C-249C-426434E5C8E6}"/>
                     </a:ext>
                   </a:extLst>
                 </p14:cNvPr>
@@ -27552,7 +29957,7 @@
                 <p:cNvPr id="74" name="Ink 73">
                   <a:extLst>
                     <a:ext uri="{FF2B5EF4-FFF2-40B4-BE49-F238E27FC236}">
-                      <a16:creationId xmlns:a16="http://schemas.microsoft.com/office/drawing/2014/main" id="{D6736167-F98F-8A48-6691-BF2E49716F21}"/>
+                      <a16:creationId xmlns:a16="http://schemas.microsoft.com/office/drawing/2014/main" id="{976253B6-FE77-103C-249C-426434E5C8E6}"/>
                     </a:ext>
                   </a:extLst>
                 </p:cNvPr>
@@ -27583,7 +29988,7 @@
           <p:cNvPr id="77" name="Group 76">
             <a:extLst>
               <a:ext uri="{FF2B5EF4-FFF2-40B4-BE49-F238E27FC236}">
-                <a16:creationId xmlns:a16="http://schemas.microsoft.com/office/drawing/2014/main" id="{30449199-7E4A-5318-89B1-932481904683}"/>
+                <a16:creationId xmlns:a16="http://schemas.microsoft.com/office/drawing/2014/main" id="{CF7AADB1-D1F4-942C-DDB0-0A8B271771F8}"/>
               </a:ext>
             </a:extLst>
           </p:cNvPr>
@@ -27605,7 +30010,7 @@
                 <p14:cNvPr id="52" name="Ink 51">
                   <a:extLst>
                     <a:ext uri="{FF2B5EF4-FFF2-40B4-BE49-F238E27FC236}">
-                      <a16:creationId xmlns:a16="http://schemas.microsoft.com/office/drawing/2014/main" id="{A0F102F1-1D4B-1B3A-1778-EC0B08966048}"/>
+                      <a16:creationId xmlns:a16="http://schemas.microsoft.com/office/drawing/2014/main" id="{F0EAB291-72E1-A0A3-877D-F4A7C206BCC3}"/>
                     </a:ext>
                   </a:extLst>
                 </p14:cNvPr>
@@ -27624,7 +30029,7 @@
                 <p:cNvPr id="52" name="Ink 51">
                   <a:extLst>
                     <a:ext uri="{FF2B5EF4-FFF2-40B4-BE49-F238E27FC236}">
-                      <a16:creationId xmlns:a16="http://schemas.microsoft.com/office/drawing/2014/main" id="{A0F102F1-1D4B-1B3A-1778-EC0B08966048}"/>
+                      <a16:creationId xmlns:a16="http://schemas.microsoft.com/office/drawing/2014/main" id="{F0EAB291-72E1-A0A3-877D-F4A7C206BCC3}"/>
                     </a:ext>
                   </a:extLst>
                 </p:cNvPr>
@@ -27639,7 +30044,7 @@
               </p:blipFill>
               <p:spPr>
                 <a:xfrm>
-                  <a:off x="5152104" y="6273576"/>
+                  <a:off x="5151744" y="6273576"/>
                   <a:ext cx="257760" cy="225720"/>
                 </a:xfrm>
                 <a:prstGeom prst="rect">
@@ -27656,7 +30061,7 @@
                 <p14:cNvPr id="53" name="Ink 52">
                   <a:extLst>
                     <a:ext uri="{FF2B5EF4-FFF2-40B4-BE49-F238E27FC236}">
-                      <a16:creationId xmlns:a16="http://schemas.microsoft.com/office/drawing/2014/main" id="{A5BBB61B-F7E0-9695-EAAE-0B662BAA14E6}"/>
+                      <a16:creationId xmlns:a16="http://schemas.microsoft.com/office/drawing/2014/main" id="{3BAAF8BC-0C4F-9A01-956F-E33C562DB708}"/>
                     </a:ext>
                   </a:extLst>
                 </p14:cNvPr>
@@ -27675,7 +30080,7 @@
                 <p:cNvPr id="53" name="Ink 52">
                   <a:extLst>
                     <a:ext uri="{FF2B5EF4-FFF2-40B4-BE49-F238E27FC236}">
-                      <a16:creationId xmlns:a16="http://schemas.microsoft.com/office/drawing/2014/main" id="{A5BBB61B-F7E0-9695-EAAE-0B662BAA14E6}"/>
+                      <a16:creationId xmlns:a16="http://schemas.microsoft.com/office/drawing/2014/main" id="{3BAAF8BC-0C4F-9A01-956F-E33C562DB708}"/>
                     </a:ext>
                   </a:extLst>
                 </p:cNvPr>
@@ -27707,7 +30112,7 @@
                 <p14:cNvPr id="54" name="Ink 53">
                   <a:extLst>
                     <a:ext uri="{FF2B5EF4-FFF2-40B4-BE49-F238E27FC236}">
-                      <a16:creationId xmlns:a16="http://schemas.microsoft.com/office/drawing/2014/main" id="{BC09BD23-52A3-5CA0-D982-A5C4E6D2816D}"/>
+                      <a16:creationId xmlns:a16="http://schemas.microsoft.com/office/drawing/2014/main" id="{D6550852-8D53-7C55-BDC1-07CEA4D8C5BC}"/>
                     </a:ext>
                   </a:extLst>
                 </p14:cNvPr>
@@ -27726,7 +30131,7 @@
                 <p:cNvPr id="54" name="Ink 53">
                   <a:extLst>
                     <a:ext uri="{FF2B5EF4-FFF2-40B4-BE49-F238E27FC236}">
-                      <a16:creationId xmlns:a16="http://schemas.microsoft.com/office/drawing/2014/main" id="{BC09BD23-52A3-5CA0-D982-A5C4E6D2816D}"/>
+                      <a16:creationId xmlns:a16="http://schemas.microsoft.com/office/drawing/2014/main" id="{D6550852-8D53-7C55-BDC1-07CEA4D8C5BC}"/>
                     </a:ext>
                   </a:extLst>
                 </p:cNvPr>
@@ -27741,8 +30146,8 @@
               </p:blipFill>
               <p:spPr>
                 <a:xfrm>
-                  <a:off x="5631624" y="6253416"/>
-                  <a:ext cx="140040" cy="222480"/>
+                  <a:off x="5631812" y="6252970"/>
+                  <a:ext cx="139665" cy="222651"/>
                 </a:xfrm>
                 <a:prstGeom prst="rect">
                   <a:avLst/>
@@ -27758,7 +30163,7 @@
                 <p14:cNvPr id="55" name="Ink 54">
                   <a:extLst>
                     <a:ext uri="{FF2B5EF4-FFF2-40B4-BE49-F238E27FC236}">
-                      <a16:creationId xmlns:a16="http://schemas.microsoft.com/office/drawing/2014/main" id="{B1EB2F16-BE34-F503-BCBB-5159AA901B9B}"/>
+                      <a16:creationId xmlns:a16="http://schemas.microsoft.com/office/drawing/2014/main" id="{54D7FA47-5B78-B5BD-E31C-BB47DF4991E0}"/>
                     </a:ext>
                   </a:extLst>
                 </p14:cNvPr>
@@ -27777,7 +30182,7 @@
                 <p:cNvPr id="55" name="Ink 54">
                   <a:extLst>
                     <a:ext uri="{FF2B5EF4-FFF2-40B4-BE49-F238E27FC236}">
-                      <a16:creationId xmlns:a16="http://schemas.microsoft.com/office/drawing/2014/main" id="{B1EB2F16-BE34-F503-BCBB-5159AA901B9B}"/>
+                      <a16:creationId xmlns:a16="http://schemas.microsoft.com/office/drawing/2014/main" id="{54D7FA47-5B78-B5BD-E31C-BB47DF4991E0}"/>
                     </a:ext>
                   </a:extLst>
                 </p:cNvPr>
@@ -27792,8 +30197,8 @@
               </p:blipFill>
               <p:spPr>
                 <a:xfrm>
-                  <a:off x="5676624" y="6267456"/>
-                  <a:ext cx="198720" cy="144720"/>
+                  <a:off x="5676726" y="6267096"/>
+                  <a:ext cx="198518" cy="144720"/>
                 </a:xfrm>
                 <a:prstGeom prst="rect">
                   <a:avLst/>
@@ -27809,7 +30214,7 @@
                 <p14:cNvPr id="56" name="Ink 55">
                   <a:extLst>
                     <a:ext uri="{FF2B5EF4-FFF2-40B4-BE49-F238E27FC236}">
-                      <a16:creationId xmlns:a16="http://schemas.microsoft.com/office/drawing/2014/main" id="{77582301-A627-92CF-2C48-288327D389BD}"/>
+                      <a16:creationId xmlns:a16="http://schemas.microsoft.com/office/drawing/2014/main" id="{3BC2F212-4197-0FE0-87C5-B13E792BF266}"/>
                     </a:ext>
                   </a:extLst>
                 </p14:cNvPr>
@@ -27828,7 +30233,7 @@
                 <p:cNvPr id="56" name="Ink 55">
                   <a:extLst>
                     <a:ext uri="{FF2B5EF4-FFF2-40B4-BE49-F238E27FC236}">
-                      <a16:creationId xmlns:a16="http://schemas.microsoft.com/office/drawing/2014/main" id="{77582301-A627-92CF-2C48-288327D389BD}"/>
+                      <a16:creationId xmlns:a16="http://schemas.microsoft.com/office/drawing/2014/main" id="{3BC2F212-4197-0FE0-87C5-B13E792BF266}"/>
                     </a:ext>
                   </a:extLst>
                 </p:cNvPr>
@@ -27843,8 +30248,8 @@
               </p:blipFill>
               <p:spPr>
                 <a:xfrm>
-                  <a:off x="5682024" y="6326856"/>
-                  <a:ext cx="237960" cy="132840"/>
+                  <a:off x="5682102" y="6326856"/>
+                  <a:ext cx="237805" cy="132840"/>
                 </a:xfrm>
                 <a:prstGeom prst="rect">
                   <a:avLst/>
@@ -27860,7 +30265,7 @@
                 <p14:cNvPr id="58" name="Ink 57">
                   <a:extLst>
                     <a:ext uri="{FF2B5EF4-FFF2-40B4-BE49-F238E27FC236}">
-                      <a16:creationId xmlns:a16="http://schemas.microsoft.com/office/drawing/2014/main" id="{0C06E826-455B-E341-5832-4BFBFA006D01}"/>
+                      <a16:creationId xmlns:a16="http://schemas.microsoft.com/office/drawing/2014/main" id="{6BBEC9DC-8AFC-85BA-6C19-C0BB1E96EE6A}"/>
                     </a:ext>
                   </a:extLst>
                 </p14:cNvPr>
@@ -27879,7 +30284,7 @@
                 <p:cNvPr id="58" name="Ink 57">
                   <a:extLst>
                     <a:ext uri="{FF2B5EF4-FFF2-40B4-BE49-F238E27FC236}">
-                      <a16:creationId xmlns:a16="http://schemas.microsoft.com/office/drawing/2014/main" id="{0C06E826-455B-E341-5832-4BFBFA006D01}"/>
+                      <a16:creationId xmlns:a16="http://schemas.microsoft.com/office/drawing/2014/main" id="{6BBEC9DC-8AFC-85BA-6C19-C0BB1E96EE6A}"/>
                     </a:ext>
                   </a:extLst>
                 </p:cNvPr>
@@ -27911,7 +30316,7 @@
                 <p14:cNvPr id="59" name="Ink 58">
                   <a:extLst>
                     <a:ext uri="{FF2B5EF4-FFF2-40B4-BE49-F238E27FC236}">
-                      <a16:creationId xmlns:a16="http://schemas.microsoft.com/office/drawing/2014/main" id="{6FAB08C1-3A83-AC30-1BBB-C313062E80E7}"/>
+                      <a16:creationId xmlns:a16="http://schemas.microsoft.com/office/drawing/2014/main" id="{83EE6BAD-6820-C848-24F0-E6EDECA4EC80}"/>
                     </a:ext>
                   </a:extLst>
                 </p14:cNvPr>
@@ -27930,7 +30335,7 @@
                 <p:cNvPr id="59" name="Ink 58">
                   <a:extLst>
                     <a:ext uri="{FF2B5EF4-FFF2-40B4-BE49-F238E27FC236}">
-                      <a16:creationId xmlns:a16="http://schemas.microsoft.com/office/drawing/2014/main" id="{6FAB08C1-3A83-AC30-1BBB-C313062E80E7}"/>
+                      <a16:creationId xmlns:a16="http://schemas.microsoft.com/office/drawing/2014/main" id="{83EE6BAD-6820-C848-24F0-E6EDECA4EC80}"/>
                     </a:ext>
                   </a:extLst>
                 </p:cNvPr>
@@ -27945,7 +30350,7 @@
               </p:blipFill>
               <p:spPr>
                 <a:xfrm>
-                  <a:off x="5243184" y="6523056"/>
+                  <a:off x="5243184" y="6522696"/>
                   <a:ext cx="98280" cy="81360"/>
                 </a:xfrm>
                 <a:prstGeom prst="rect">
@@ -27962,7 +30367,7 @@
                 <p14:cNvPr id="60" name="Ink 59">
                   <a:extLst>
                     <a:ext uri="{FF2B5EF4-FFF2-40B4-BE49-F238E27FC236}">
-                      <a16:creationId xmlns:a16="http://schemas.microsoft.com/office/drawing/2014/main" id="{38A73232-DF23-DB7E-E004-0F8B2FC322B9}"/>
+                      <a16:creationId xmlns:a16="http://schemas.microsoft.com/office/drawing/2014/main" id="{2338C598-9A53-02D6-A959-75D386BFD57E}"/>
                     </a:ext>
                   </a:extLst>
                 </p14:cNvPr>
@@ -27981,7 +30386,7 @@
                 <p:cNvPr id="60" name="Ink 59">
                   <a:extLst>
                     <a:ext uri="{FF2B5EF4-FFF2-40B4-BE49-F238E27FC236}">
-                      <a16:creationId xmlns:a16="http://schemas.microsoft.com/office/drawing/2014/main" id="{38A73232-DF23-DB7E-E004-0F8B2FC322B9}"/>
+                      <a16:creationId xmlns:a16="http://schemas.microsoft.com/office/drawing/2014/main" id="{2338C598-9A53-02D6-A959-75D386BFD57E}"/>
                     </a:ext>
                   </a:extLst>
                 </p:cNvPr>
@@ -27996,8 +30401,8 @@
               </p:blipFill>
               <p:spPr>
                 <a:xfrm>
-                  <a:off x="5417424" y="6566976"/>
-                  <a:ext cx="189360" cy="162360"/>
+                  <a:off x="5417424" y="6566473"/>
+                  <a:ext cx="189360" cy="162645"/>
                 </a:xfrm>
                 <a:prstGeom prst="rect">
                   <a:avLst/>
@@ -28013,7 +30418,7 @@
                 <p14:cNvPr id="61" name="Ink 60">
                   <a:extLst>
                     <a:ext uri="{FF2B5EF4-FFF2-40B4-BE49-F238E27FC236}">
-                      <a16:creationId xmlns:a16="http://schemas.microsoft.com/office/drawing/2014/main" id="{75B3CDE2-5F75-B36D-19FC-AF9F55B30E79}"/>
+                      <a16:creationId xmlns:a16="http://schemas.microsoft.com/office/drawing/2014/main" id="{93B89410-F32A-C243-5EF9-DFD00297CBD2}"/>
                     </a:ext>
                   </a:extLst>
                 </p14:cNvPr>
@@ -28032,7 +30437,7 @@
                 <p:cNvPr id="61" name="Ink 60">
                   <a:extLst>
                     <a:ext uri="{FF2B5EF4-FFF2-40B4-BE49-F238E27FC236}">
-                      <a16:creationId xmlns:a16="http://schemas.microsoft.com/office/drawing/2014/main" id="{75B3CDE2-5F75-B36D-19FC-AF9F55B30E79}"/>
+                      <a16:creationId xmlns:a16="http://schemas.microsoft.com/office/drawing/2014/main" id="{93B89410-F32A-C243-5EF9-DFD00297CBD2}"/>
                     </a:ext>
                   </a:extLst>
                 </p:cNvPr>
@@ -28064,7 +30469,7 @@
                 <p14:cNvPr id="62" name="Ink 61">
                   <a:extLst>
                     <a:ext uri="{FF2B5EF4-FFF2-40B4-BE49-F238E27FC236}">
-                      <a16:creationId xmlns:a16="http://schemas.microsoft.com/office/drawing/2014/main" id="{7F822235-46D3-AC1C-14FD-F0B98113142A}"/>
+                      <a16:creationId xmlns:a16="http://schemas.microsoft.com/office/drawing/2014/main" id="{91B993C5-4162-E018-87C0-DA1ACC5403D6}"/>
                     </a:ext>
                   </a:extLst>
                 </p14:cNvPr>
@@ -28083,7 +30488,7 @@
                 <p:cNvPr id="62" name="Ink 61">
                   <a:extLst>
                     <a:ext uri="{FF2B5EF4-FFF2-40B4-BE49-F238E27FC236}">
-                      <a16:creationId xmlns:a16="http://schemas.microsoft.com/office/drawing/2014/main" id="{7F822235-46D3-AC1C-14FD-F0B98113142A}"/>
+                      <a16:creationId xmlns:a16="http://schemas.microsoft.com/office/drawing/2014/main" id="{91B993C5-4162-E018-87C0-DA1ACC5403D6}"/>
                     </a:ext>
                   </a:extLst>
                 </p:cNvPr>
@@ -28098,7 +30503,7 @@
               </p:blipFill>
               <p:spPr>
                 <a:xfrm>
-                  <a:off x="5810184" y="6507576"/>
+                  <a:off x="5810184" y="6507216"/>
                   <a:ext cx="196560" cy="167760"/>
                 </a:xfrm>
                 <a:prstGeom prst="rect">
@@ -28115,7 +30520,7 @@
                 <p14:cNvPr id="63" name="Ink 62">
                   <a:extLst>
                     <a:ext uri="{FF2B5EF4-FFF2-40B4-BE49-F238E27FC236}">
-                      <a16:creationId xmlns:a16="http://schemas.microsoft.com/office/drawing/2014/main" id="{6F1D3F3F-D173-426D-8F7D-EC38FC21C3BC}"/>
+                      <a16:creationId xmlns:a16="http://schemas.microsoft.com/office/drawing/2014/main" id="{8FEEB8B8-19A2-7196-85E9-191F42E030FC}"/>
                     </a:ext>
                   </a:extLst>
                 </p14:cNvPr>
@@ -28134,7 +30539,7 @@
                 <p:cNvPr id="63" name="Ink 62">
                   <a:extLst>
                     <a:ext uri="{FF2B5EF4-FFF2-40B4-BE49-F238E27FC236}">
-                      <a16:creationId xmlns:a16="http://schemas.microsoft.com/office/drawing/2014/main" id="{6F1D3F3F-D173-426D-8F7D-EC38FC21C3BC}"/>
+                      <a16:creationId xmlns:a16="http://schemas.microsoft.com/office/drawing/2014/main" id="{8FEEB8B8-19A2-7196-85E9-191F42E030FC}"/>
                     </a:ext>
                   </a:extLst>
                 </p:cNvPr>
@@ -28149,8 +30554,8 @@
               </p:blipFill>
               <p:spPr>
                 <a:xfrm>
-                  <a:off x="5964624" y="6381216"/>
-                  <a:ext cx="141120" cy="312120"/>
+                  <a:off x="5964264" y="6380802"/>
+                  <a:ext cx="141120" cy="312227"/>
                 </a:xfrm>
                 <a:prstGeom prst="rect">
                   <a:avLst/>
@@ -28166,7 +30571,7 @@
                 <p14:cNvPr id="64" name="Ink 63">
                   <a:extLst>
                     <a:ext uri="{FF2B5EF4-FFF2-40B4-BE49-F238E27FC236}">
-                      <a16:creationId xmlns:a16="http://schemas.microsoft.com/office/drawing/2014/main" id="{D3BEA241-F996-98FF-5BFD-B28C4901582D}"/>
+                      <a16:creationId xmlns:a16="http://schemas.microsoft.com/office/drawing/2014/main" id="{AE5C03BF-1D10-0F25-1D8B-710B2473874F}"/>
                     </a:ext>
                   </a:extLst>
                 </p14:cNvPr>
@@ -28185,7 +30590,7 @@
                 <p:cNvPr id="64" name="Ink 63">
                   <a:extLst>
                     <a:ext uri="{FF2B5EF4-FFF2-40B4-BE49-F238E27FC236}">
-                      <a16:creationId xmlns:a16="http://schemas.microsoft.com/office/drawing/2014/main" id="{D3BEA241-F996-98FF-5BFD-B28C4901582D}"/>
+                      <a16:creationId xmlns:a16="http://schemas.microsoft.com/office/drawing/2014/main" id="{AE5C03BF-1D10-0F25-1D8B-710B2473874F}"/>
                     </a:ext>
                   </a:extLst>
                 </p:cNvPr>
@@ -28200,8 +30605,8 @@
               </p:blipFill>
               <p:spPr>
                 <a:xfrm>
-                  <a:off x="5962104" y="6497496"/>
-                  <a:ext cx="176040" cy="121680"/>
+                  <a:off x="5961744" y="6497753"/>
+                  <a:ext cx="176040" cy="121168"/>
                 </a:xfrm>
                 <a:prstGeom prst="rect">
                   <a:avLst/>
@@ -28217,7 +30622,7 @@
                 <p14:cNvPr id="65" name="Ink 64">
                   <a:extLst>
                     <a:ext uri="{FF2B5EF4-FFF2-40B4-BE49-F238E27FC236}">
-                      <a16:creationId xmlns:a16="http://schemas.microsoft.com/office/drawing/2014/main" id="{AA076D34-CDF1-BB4E-44A5-89D17EA77B99}"/>
+                      <a16:creationId xmlns:a16="http://schemas.microsoft.com/office/drawing/2014/main" id="{426E3F94-2809-483A-50C0-09FC9A0B17C4}"/>
                     </a:ext>
                   </a:extLst>
                 </p14:cNvPr>
@@ -28236,7 +30641,7 @@
                 <p:cNvPr id="65" name="Ink 64">
                   <a:extLst>
                     <a:ext uri="{FF2B5EF4-FFF2-40B4-BE49-F238E27FC236}">
-                      <a16:creationId xmlns:a16="http://schemas.microsoft.com/office/drawing/2014/main" id="{AA076D34-CDF1-BB4E-44A5-89D17EA77B99}"/>
+                      <a16:creationId xmlns:a16="http://schemas.microsoft.com/office/drawing/2014/main" id="{426E3F94-2809-483A-50C0-09FC9A0B17C4}"/>
                     </a:ext>
                   </a:extLst>
                 </p:cNvPr>
@@ -28251,7 +30656,7 @@
               </p:blipFill>
               <p:spPr>
                 <a:xfrm>
-                  <a:off x="6068304" y="6493176"/>
+                  <a:off x="6067944" y="6492816"/>
                   <a:ext cx="179280" cy="195120"/>
                 </a:xfrm>
                 <a:prstGeom prst="rect">
@@ -28268,7 +30673,7 @@
                 <p14:cNvPr id="75" name="Ink 74">
                   <a:extLst>
                     <a:ext uri="{FF2B5EF4-FFF2-40B4-BE49-F238E27FC236}">
-                      <a16:creationId xmlns:a16="http://schemas.microsoft.com/office/drawing/2014/main" id="{8B4966EB-51C8-61F3-D208-FB9533E7C32A}"/>
+                      <a16:creationId xmlns:a16="http://schemas.microsoft.com/office/drawing/2014/main" id="{840163EC-8EA8-A000-BC43-C7D18A93DC86}"/>
                     </a:ext>
                   </a:extLst>
                 </p14:cNvPr>
@@ -28287,7 +30692,7 @@
                 <p:cNvPr id="75" name="Ink 74">
                   <a:extLst>
                     <a:ext uri="{FF2B5EF4-FFF2-40B4-BE49-F238E27FC236}">
-                      <a16:creationId xmlns:a16="http://schemas.microsoft.com/office/drawing/2014/main" id="{8B4966EB-51C8-61F3-D208-FB9533E7C32A}"/>
+                      <a16:creationId xmlns:a16="http://schemas.microsoft.com/office/drawing/2014/main" id="{840163EC-8EA8-A000-BC43-C7D18A93DC86}"/>
                     </a:ext>
                   </a:extLst>
                 </p:cNvPr>
@@ -28302,8 +30707,8 @@
               </p:blipFill>
               <p:spPr>
                 <a:xfrm>
-                  <a:off x="5009184" y="6180336"/>
-                  <a:ext cx="342360" cy="696960"/>
+                  <a:off x="5008776" y="6179976"/>
+                  <a:ext cx="342455" cy="696960"/>
                 </a:xfrm>
                 <a:prstGeom prst="rect">
                   <a:avLst/>
@@ -28319,7 +30724,7 @@
                 <p14:cNvPr id="76" name="Ink 75">
                   <a:extLst>
                     <a:ext uri="{FF2B5EF4-FFF2-40B4-BE49-F238E27FC236}">
-                      <a16:creationId xmlns:a16="http://schemas.microsoft.com/office/drawing/2014/main" id="{E9611FF9-357E-7FFE-053E-3676551A2334}"/>
+                      <a16:creationId xmlns:a16="http://schemas.microsoft.com/office/drawing/2014/main" id="{EA9BA041-F2B6-6180-9DE5-E35CBA2451EB}"/>
                     </a:ext>
                   </a:extLst>
                 </p14:cNvPr>
@@ -28338,7 +30743,7 @@
                 <p:cNvPr id="76" name="Ink 75">
                   <a:extLst>
                     <a:ext uri="{FF2B5EF4-FFF2-40B4-BE49-F238E27FC236}">
-                      <a16:creationId xmlns:a16="http://schemas.microsoft.com/office/drawing/2014/main" id="{E9611FF9-357E-7FFE-053E-3676551A2334}"/>
+                      <a16:creationId xmlns:a16="http://schemas.microsoft.com/office/drawing/2014/main" id="{EA9BA041-F2B6-6180-9DE5-E35CBA2451EB}"/>
                     </a:ext>
                   </a:extLst>
                 </p:cNvPr>
@@ -28353,7 +30758,7 @@
               </p:blipFill>
               <p:spPr>
                 <a:xfrm>
-                  <a:off x="6108624" y="6213096"/>
+                  <a:off x="6108264" y="6212736"/>
                   <a:ext cx="303480" cy="598320"/>
                 </a:xfrm>
                 <a:prstGeom prst="rect">
@@ -28367,7 +30772,7 @@
     </p:spTree>
     <p:extLst>
       <p:ext uri="{BB962C8B-B14F-4D97-AF65-F5344CB8AC3E}">
-        <p14:creationId xmlns:p14="http://schemas.microsoft.com/office/powerpoint/2010/main" val="3925645287"/>
+        <p14:creationId xmlns:p14="http://schemas.microsoft.com/office/powerpoint/2010/main" val="1916362717"/>
       </p:ext>
     </p:extLst>
   </p:cSld>
@@ -28377,7 +30782,7 @@
 </p:sld>
 </file>
 
-<file path=ppt/slides/slide8.xml><?xml version="1.0" encoding="utf-8"?>
+<file path=ppt/slides/slide9.xml><?xml version="1.0" encoding="utf-8"?>
 <p:sld xmlns:a="http://schemas.openxmlformats.org/drawingml/2006/main" xmlns:r="http://schemas.openxmlformats.org/officeDocument/2006/relationships" xmlns:p="http://schemas.openxmlformats.org/presentationml/2006/main">
   <p:cSld>
     <p:spTree>
@@ -29584,1165 +31989,6 @@
 </p:sld>
 </file>
 
-<file path=ppt/slides/slide9.xml><?xml version="1.0" encoding="utf-8"?>
-<p:sld xmlns:a="http://schemas.openxmlformats.org/drawingml/2006/main" xmlns:r="http://schemas.openxmlformats.org/officeDocument/2006/relationships" xmlns:p="http://schemas.openxmlformats.org/presentationml/2006/main">
-  <p:cSld>
-    <p:spTree>
-      <p:nvGrpSpPr>
-        <p:cNvPr id="1" name="">
-          <a:extLst>
-            <a:ext uri="{FF2B5EF4-FFF2-40B4-BE49-F238E27FC236}">
-              <a16:creationId xmlns:a16="http://schemas.microsoft.com/office/drawing/2014/main" id="{9E5339FB-3CCE-9C06-6D57-630433EE2FFB}"/>
-            </a:ext>
-          </a:extLst>
-        </p:cNvPr>
-        <p:cNvGrpSpPr/>
-        <p:nvPr/>
-      </p:nvGrpSpPr>
-      <p:grpSpPr>
-        <a:xfrm>
-          <a:off x="0" y="0"/>
-          <a:ext cx="0" cy="0"/>
-          <a:chOff x="0" y="0"/>
-          <a:chExt cx="0" cy="0"/>
-        </a:xfrm>
-      </p:grpSpPr>
-      <p:pic>
-        <p:nvPicPr>
-          <p:cNvPr id="27" name="Picture 2">
-            <a:extLst>
-              <a:ext uri="{FF2B5EF4-FFF2-40B4-BE49-F238E27FC236}">
-                <a16:creationId xmlns:a16="http://schemas.microsoft.com/office/drawing/2014/main" id="{B0816346-52BA-1BF0-CE1A-929B33BB607B}"/>
-              </a:ext>
-            </a:extLst>
-          </p:cNvPr>
-          <p:cNvPicPr>
-            <a:picLocks noChangeAspect="1" noChangeArrowheads="1"/>
-          </p:cNvPicPr>
-          <p:nvPr/>
-        </p:nvPicPr>
-        <p:blipFill>
-          <a:blip r:embed="rId2">
-            <a:extLst>
-              <a:ext uri="{28A0092B-C50C-407E-A947-70E740481C1C}">
-                <a14:useLocalDpi xmlns:a14="http://schemas.microsoft.com/office/drawing/2010/main" val="0"/>
-              </a:ext>
-            </a:extLst>
-          </a:blip>
-          <a:srcRect/>
-          <a:stretch>
-            <a:fillRect/>
-          </a:stretch>
-        </p:blipFill>
-        <p:spPr bwMode="auto">
-          <a:xfrm>
-            <a:off x="1307592" y="1132070"/>
-            <a:ext cx="5724144" cy="5175916"/>
-          </a:xfrm>
-          <a:prstGeom prst="rect">
-            <a:avLst/>
-          </a:prstGeom>
-          <a:noFill/>
-          <a:extLst>
-            <a:ext uri="{909E8E84-426E-40DD-AFC4-6F175D3DCCD1}">
-              <a14:hiddenFill xmlns:a14="http://schemas.microsoft.com/office/drawing/2010/main">
-                <a:solidFill>
-                  <a:srgbClr val="FFFFFF"/>
-                </a:solidFill>
-              </a14:hiddenFill>
-            </a:ext>
-          </a:extLst>
-        </p:spPr>
-      </p:pic>
-      <p:sp>
-        <p:nvSpPr>
-          <p:cNvPr id="30" name="TextBox 29">
-            <a:extLst>
-              <a:ext uri="{FF2B5EF4-FFF2-40B4-BE49-F238E27FC236}">
-                <a16:creationId xmlns:a16="http://schemas.microsoft.com/office/drawing/2014/main" id="{D4D8C8B7-8D00-FEF1-9ADE-6877D7289872}"/>
-              </a:ext>
-            </a:extLst>
-          </p:cNvPr>
-          <p:cNvSpPr txBox="1"/>
-          <p:nvPr/>
-        </p:nvSpPr>
-        <p:spPr>
-          <a:xfrm>
-            <a:off x="736092" y="71366"/>
-            <a:ext cx="6190488" cy="461665"/>
-          </a:xfrm>
-          <a:prstGeom prst="rect">
-            <a:avLst/>
-          </a:prstGeom>
-          <a:noFill/>
-        </p:spPr>
-        <p:txBody>
-          <a:bodyPr wrap="square">
-            <a:spAutoFit/>
-          </a:bodyPr>
-          <a:lstStyle/>
-          <a:p>
-            <a:r>
-              <a:rPr lang="en-US" sz="2400" b="1" i="0" dirty="0">
-                <a:solidFill>
-                  <a:schemeClr val="accent6">
-                    <a:lumMod val="60000"/>
-                    <a:lumOff val="40000"/>
-                  </a:schemeClr>
-                </a:solidFill>
-                <a:effectLst/>
-                <a:latin typeface="sohne"/>
-              </a:rPr>
-              <a:t>How do computers process images?</a:t>
-            </a:r>
-            <a:endParaRPr lang="en-US" sz="2400" b="1" dirty="0">
-              <a:solidFill>
-                <a:schemeClr val="accent6">
-                  <a:lumMod val="60000"/>
-                  <a:lumOff val="40000"/>
-                </a:schemeClr>
-              </a:solidFill>
-            </a:endParaRPr>
-          </a:p>
-        </p:txBody>
-      </p:sp>
-      <p:sp>
-        <p:nvSpPr>
-          <p:cNvPr id="32" name="TextBox 31">
-            <a:extLst>
-              <a:ext uri="{FF2B5EF4-FFF2-40B4-BE49-F238E27FC236}">
-                <a16:creationId xmlns:a16="http://schemas.microsoft.com/office/drawing/2014/main" id="{0C0F8E5F-4D8B-7FB4-E6BC-8B09AD5D24BF}"/>
-              </a:ext>
-            </a:extLst>
-          </p:cNvPr>
-          <p:cNvSpPr txBox="1"/>
-          <p:nvPr/>
-        </p:nvSpPr>
-        <p:spPr>
-          <a:xfrm>
-            <a:off x="512064" y="601718"/>
-            <a:ext cx="8691372" cy="461665"/>
-          </a:xfrm>
-          <a:prstGeom prst="rect">
-            <a:avLst/>
-          </a:prstGeom>
-          <a:noFill/>
-        </p:spPr>
-        <p:txBody>
-          <a:bodyPr wrap="square">
-            <a:spAutoFit/>
-          </a:bodyPr>
-          <a:lstStyle/>
-          <a:p>
-            <a:r>
-              <a:rPr lang="en-US" sz="2400" dirty="0">
-                <a:solidFill>
-                  <a:schemeClr val="accent6">
-                    <a:lumMod val="60000"/>
-                    <a:lumOff val="40000"/>
-                  </a:schemeClr>
-                </a:solidFill>
-                <a:latin typeface="sohne"/>
-              </a:rPr>
-              <a:t>T</a:t>
-            </a:r>
-            <a:r>
-              <a:rPr lang="en-US" sz="2400" b="0" i="0" dirty="0">
-                <a:solidFill>
-                  <a:schemeClr val="accent6">
-                    <a:lumMod val="60000"/>
-                    <a:lumOff val="40000"/>
-                  </a:schemeClr>
-                </a:solidFill>
-                <a:effectLst/>
-                <a:latin typeface="sohne"/>
-              </a:rPr>
-              <a:t>o a computer, images are just numbers. </a:t>
-            </a:r>
-            <a:endParaRPr lang="en-IN" sz="2400" dirty="0">
-              <a:solidFill>
-                <a:schemeClr val="accent6">
-                  <a:lumMod val="60000"/>
-                  <a:lumOff val="40000"/>
-                </a:schemeClr>
-              </a:solidFill>
-            </a:endParaRPr>
-          </a:p>
-        </p:txBody>
-      </p:sp>
-      <p:grpSp>
-        <p:nvGrpSpPr>
-          <p:cNvPr id="61" name="Group 60">
-            <a:extLst>
-              <a:ext uri="{FF2B5EF4-FFF2-40B4-BE49-F238E27FC236}">
-                <a16:creationId xmlns:a16="http://schemas.microsoft.com/office/drawing/2014/main" id="{0D305897-197E-497C-F211-5AC12946E344}"/>
-              </a:ext>
-            </a:extLst>
-          </p:cNvPr>
-          <p:cNvGrpSpPr/>
-          <p:nvPr/>
-        </p:nvGrpSpPr>
-        <p:grpSpPr>
-          <a:xfrm>
-            <a:off x="5993424" y="3478176"/>
-            <a:ext cx="2061720" cy="981000"/>
-            <a:chOff x="5993424" y="3478176"/>
-            <a:chExt cx="2061720" cy="981000"/>
-          </a:xfrm>
-        </p:grpSpPr>
-        <mc:AlternateContent xmlns:mc="http://schemas.openxmlformats.org/markup-compatibility/2006" xmlns:p14="http://schemas.microsoft.com/office/powerpoint/2010/main">
-          <mc:Choice Requires="p14">
-            <p:contentPart p14:bwMode="auto" r:id="rId3">
-              <p14:nvContentPartPr>
-                <p14:cNvPr id="50" name="Ink 49">
-                  <a:extLst>
-                    <a:ext uri="{FF2B5EF4-FFF2-40B4-BE49-F238E27FC236}">
-                      <a16:creationId xmlns:a16="http://schemas.microsoft.com/office/drawing/2014/main" id="{04E43AB7-CE34-95AC-24A0-7A1868285E50}"/>
-                    </a:ext>
-                  </a:extLst>
-                </p14:cNvPr>
-                <p14:cNvContentPartPr/>
-                <p14:nvPr/>
-              </p14:nvContentPartPr>
-              <p14:xfrm>
-                <a:off x="6560064" y="4288176"/>
-                <a:ext cx="562680" cy="171000"/>
-              </p14:xfrm>
-            </p:contentPart>
-          </mc:Choice>
-          <mc:Fallback xmlns="">
-            <p:pic>
-              <p:nvPicPr>
-                <p:cNvPr id="50" name="Ink 49">
-                  <a:extLst>
-                    <a:ext uri="{FF2B5EF4-FFF2-40B4-BE49-F238E27FC236}">
-                      <a16:creationId xmlns:a16="http://schemas.microsoft.com/office/drawing/2014/main" id="{04E43AB7-CE34-95AC-24A0-7A1868285E50}"/>
-                    </a:ext>
-                  </a:extLst>
-                </p:cNvPr>
-                <p:cNvPicPr/>
-                <p:nvPr/>
-              </p:nvPicPr>
-              <p:blipFill>
-                <a:blip r:embed="rId4"/>
-                <a:stretch>
-                  <a:fillRect/>
-                </a:stretch>
-              </p:blipFill>
-              <p:spPr>
-                <a:xfrm>
-                  <a:off x="6524424" y="4252536"/>
-                  <a:ext cx="634320" cy="242640"/>
-                </a:xfrm>
-                <a:prstGeom prst="rect">
-                  <a:avLst/>
-                </a:prstGeom>
-              </p:spPr>
-            </p:pic>
-          </mc:Fallback>
-        </mc:AlternateContent>
-        <mc:AlternateContent xmlns:mc="http://schemas.openxmlformats.org/markup-compatibility/2006" xmlns:p14="http://schemas.microsoft.com/office/powerpoint/2010/main">
-          <mc:Choice Requires="p14">
-            <p:contentPart p14:bwMode="auto" r:id="rId5">
-              <p14:nvContentPartPr>
-                <p14:cNvPr id="51" name="Ink 50">
-                  <a:extLst>
-                    <a:ext uri="{FF2B5EF4-FFF2-40B4-BE49-F238E27FC236}">
-                      <a16:creationId xmlns:a16="http://schemas.microsoft.com/office/drawing/2014/main" id="{DA0BF638-D67A-D6A3-5305-1F1F02B498F3}"/>
-                    </a:ext>
-                  </a:extLst>
-                </p14:cNvPr>
-                <p14:cNvContentPartPr/>
-                <p14:nvPr/>
-              </p14:nvContentPartPr>
-              <p14:xfrm>
-                <a:off x="7138944" y="4190976"/>
-                <a:ext cx="112320" cy="197280"/>
-              </p14:xfrm>
-            </p:contentPart>
-          </mc:Choice>
-          <mc:Fallback xmlns="">
-            <p:pic>
-              <p:nvPicPr>
-                <p:cNvPr id="51" name="Ink 50">
-                  <a:extLst>
-                    <a:ext uri="{FF2B5EF4-FFF2-40B4-BE49-F238E27FC236}">
-                      <a16:creationId xmlns:a16="http://schemas.microsoft.com/office/drawing/2014/main" id="{DA0BF638-D67A-D6A3-5305-1F1F02B498F3}"/>
-                    </a:ext>
-                  </a:extLst>
-                </p:cNvPr>
-                <p:cNvPicPr/>
-                <p:nvPr/>
-              </p:nvPicPr>
-              <p:blipFill>
-                <a:blip r:embed="rId6"/>
-                <a:stretch>
-                  <a:fillRect/>
-                </a:stretch>
-              </p:blipFill>
-              <p:spPr>
-                <a:xfrm>
-                  <a:off x="7103304" y="4154976"/>
-                  <a:ext cx="183960" cy="268920"/>
-                </a:xfrm>
-                <a:prstGeom prst="rect">
-                  <a:avLst/>
-                </a:prstGeom>
-              </p:spPr>
-            </p:pic>
-          </mc:Fallback>
-        </mc:AlternateContent>
-        <mc:AlternateContent xmlns:mc="http://schemas.openxmlformats.org/markup-compatibility/2006" xmlns:p14="http://schemas.microsoft.com/office/powerpoint/2010/main">
-          <mc:Choice Requires="p14">
-            <p:contentPart p14:bwMode="auto" r:id="rId7">
-              <p14:nvContentPartPr>
-                <p14:cNvPr id="53" name="Ink 52">
-                  <a:extLst>
-                    <a:ext uri="{FF2B5EF4-FFF2-40B4-BE49-F238E27FC236}">
-                      <a16:creationId xmlns:a16="http://schemas.microsoft.com/office/drawing/2014/main" id="{4E7A014F-54F4-5341-F2EE-6BE9FF1743D0}"/>
-                    </a:ext>
-                  </a:extLst>
-                </p14:cNvPr>
-                <p14:cNvContentPartPr/>
-                <p14:nvPr/>
-              </p14:nvContentPartPr>
-              <p14:xfrm>
-                <a:off x="7490664" y="4034016"/>
-                <a:ext cx="168840" cy="238680"/>
-              </p14:xfrm>
-            </p:contentPart>
-          </mc:Choice>
-          <mc:Fallback xmlns="">
-            <p:pic>
-              <p:nvPicPr>
-                <p:cNvPr id="53" name="Ink 52">
-                  <a:extLst>
-                    <a:ext uri="{FF2B5EF4-FFF2-40B4-BE49-F238E27FC236}">
-                      <a16:creationId xmlns:a16="http://schemas.microsoft.com/office/drawing/2014/main" id="{4E7A014F-54F4-5341-F2EE-6BE9FF1743D0}"/>
-                    </a:ext>
-                  </a:extLst>
-                </p:cNvPr>
-                <p:cNvPicPr/>
-                <p:nvPr/>
-              </p:nvPicPr>
-              <p:blipFill>
-                <a:blip r:embed="rId8"/>
-                <a:stretch>
-                  <a:fillRect/>
-                </a:stretch>
-              </p:blipFill>
-              <p:spPr>
-                <a:xfrm>
-                  <a:off x="7455024" y="3998016"/>
-                  <a:ext cx="240480" cy="310320"/>
-                </a:xfrm>
-                <a:prstGeom prst="rect">
-                  <a:avLst/>
-                </a:prstGeom>
-              </p:spPr>
-            </p:pic>
-          </mc:Fallback>
-        </mc:AlternateContent>
-        <mc:AlternateContent xmlns:mc="http://schemas.openxmlformats.org/markup-compatibility/2006" xmlns:p14="http://schemas.microsoft.com/office/powerpoint/2010/main">
-          <mc:Choice Requires="p14">
-            <p:contentPart p14:bwMode="auto" r:id="rId9">
-              <p14:nvContentPartPr>
-                <p14:cNvPr id="54" name="Ink 53">
-                  <a:extLst>
-                    <a:ext uri="{FF2B5EF4-FFF2-40B4-BE49-F238E27FC236}">
-                      <a16:creationId xmlns:a16="http://schemas.microsoft.com/office/drawing/2014/main" id="{754EE7B7-D23D-A736-4FA7-7C926E56622D}"/>
-                    </a:ext>
-                  </a:extLst>
-                </p14:cNvPr>
-                <p14:cNvContentPartPr/>
-                <p14:nvPr/>
-              </p14:nvContentPartPr>
-              <p14:xfrm>
-                <a:off x="7757424" y="4055256"/>
-                <a:ext cx="183600" cy="200520"/>
-              </p14:xfrm>
-            </p:contentPart>
-          </mc:Choice>
-          <mc:Fallback xmlns="">
-            <p:pic>
-              <p:nvPicPr>
-                <p:cNvPr id="54" name="Ink 53">
-                  <a:extLst>
-                    <a:ext uri="{FF2B5EF4-FFF2-40B4-BE49-F238E27FC236}">
-                      <a16:creationId xmlns:a16="http://schemas.microsoft.com/office/drawing/2014/main" id="{754EE7B7-D23D-A736-4FA7-7C926E56622D}"/>
-                    </a:ext>
-                  </a:extLst>
-                </p:cNvPr>
-                <p:cNvPicPr/>
-                <p:nvPr/>
-              </p:nvPicPr>
-              <p:blipFill>
-                <a:blip r:embed="rId10"/>
-                <a:stretch>
-                  <a:fillRect/>
-                </a:stretch>
-              </p:blipFill>
-              <p:spPr>
-                <a:xfrm>
-                  <a:off x="7721784" y="4019256"/>
-                  <a:ext cx="255240" cy="272160"/>
-                </a:xfrm>
-                <a:prstGeom prst="rect">
-                  <a:avLst/>
-                </a:prstGeom>
-              </p:spPr>
-            </p:pic>
-          </mc:Fallback>
-        </mc:AlternateContent>
-        <mc:AlternateContent xmlns:mc="http://schemas.openxmlformats.org/markup-compatibility/2006" xmlns:p14="http://schemas.microsoft.com/office/powerpoint/2010/main">
-          <mc:Choice Requires="p14">
-            <p:contentPart p14:bwMode="auto" r:id="rId11">
-              <p14:nvContentPartPr>
-                <p14:cNvPr id="56" name="Ink 55">
-                  <a:extLst>
-                    <a:ext uri="{FF2B5EF4-FFF2-40B4-BE49-F238E27FC236}">
-                      <a16:creationId xmlns:a16="http://schemas.microsoft.com/office/drawing/2014/main" id="{3C7A1828-EF2B-0454-7495-C20BDF1E8870}"/>
-                    </a:ext>
-                  </a:extLst>
-                </p14:cNvPr>
-                <p14:cNvContentPartPr/>
-                <p14:nvPr/>
-              </p14:nvContentPartPr>
-              <p14:xfrm>
-                <a:off x="5993424" y="3594816"/>
-                <a:ext cx="1508040" cy="754200"/>
-              </p14:xfrm>
-            </p:contentPart>
-          </mc:Choice>
-          <mc:Fallback xmlns="">
-            <p:pic>
-              <p:nvPicPr>
-                <p:cNvPr id="56" name="Ink 55">
-                  <a:extLst>
-                    <a:ext uri="{FF2B5EF4-FFF2-40B4-BE49-F238E27FC236}">
-                      <a16:creationId xmlns:a16="http://schemas.microsoft.com/office/drawing/2014/main" id="{3C7A1828-EF2B-0454-7495-C20BDF1E8870}"/>
-                    </a:ext>
-                  </a:extLst>
-                </p:cNvPr>
-                <p:cNvPicPr/>
-                <p:nvPr/>
-              </p:nvPicPr>
-              <p:blipFill>
-                <a:blip r:embed="rId12"/>
-                <a:stretch>
-                  <a:fillRect/>
-                </a:stretch>
-              </p:blipFill>
-              <p:spPr>
-                <a:xfrm>
-                  <a:off x="5957784" y="3558816"/>
-                  <a:ext cx="1579680" cy="825840"/>
-                </a:xfrm>
-                <a:prstGeom prst="rect">
-                  <a:avLst/>
-                </a:prstGeom>
-              </p:spPr>
-            </p:pic>
-          </mc:Fallback>
-        </mc:AlternateContent>
-        <mc:AlternateContent xmlns:mc="http://schemas.openxmlformats.org/markup-compatibility/2006" xmlns:p14="http://schemas.microsoft.com/office/powerpoint/2010/main">
-          <mc:Choice Requires="p14">
-            <p:contentPart p14:bwMode="auto" r:id="rId13">
-              <p14:nvContentPartPr>
-                <p14:cNvPr id="57" name="Ink 56">
-                  <a:extLst>
-                    <a:ext uri="{FF2B5EF4-FFF2-40B4-BE49-F238E27FC236}">
-                      <a16:creationId xmlns:a16="http://schemas.microsoft.com/office/drawing/2014/main" id="{8323DF79-2C3D-12AC-3DC8-DA41ADAFB76B}"/>
-                    </a:ext>
-                  </a:extLst>
-                </p14:cNvPr>
-                <p14:cNvContentPartPr/>
-                <p14:nvPr/>
-              </p14:nvContentPartPr>
-              <p14:xfrm>
-                <a:off x="7352424" y="3527856"/>
-                <a:ext cx="155160" cy="161640"/>
-              </p14:xfrm>
-            </p:contentPart>
-          </mc:Choice>
-          <mc:Fallback xmlns="">
-            <p:pic>
-              <p:nvPicPr>
-                <p:cNvPr id="57" name="Ink 56">
-                  <a:extLst>
-                    <a:ext uri="{FF2B5EF4-FFF2-40B4-BE49-F238E27FC236}">
-                      <a16:creationId xmlns:a16="http://schemas.microsoft.com/office/drawing/2014/main" id="{8323DF79-2C3D-12AC-3DC8-DA41ADAFB76B}"/>
-                    </a:ext>
-                  </a:extLst>
-                </p:cNvPr>
-                <p:cNvPicPr/>
-                <p:nvPr/>
-              </p:nvPicPr>
-              <p:blipFill>
-                <a:blip r:embed="rId14"/>
-                <a:stretch>
-                  <a:fillRect/>
-                </a:stretch>
-              </p:blipFill>
-              <p:spPr>
-                <a:xfrm>
-                  <a:off x="7316424" y="3492216"/>
-                  <a:ext cx="226800" cy="233280"/>
-                </a:xfrm>
-                <a:prstGeom prst="rect">
-                  <a:avLst/>
-                </a:prstGeom>
-              </p:spPr>
-            </p:pic>
-          </mc:Fallback>
-        </mc:AlternateContent>
-        <mc:AlternateContent xmlns:mc="http://schemas.openxmlformats.org/markup-compatibility/2006" xmlns:p14="http://schemas.microsoft.com/office/powerpoint/2010/main">
-          <mc:Choice Requires="p14">
-            <p:contentPart p14:bwMode="auto" r:id="rId15">
-              <p14:nvContentPartPr>
-                <p14:cNvPr id="59" name="Ink 58">
-                  <a:extLst>
-                    <a:ext uri="{FF2B5EF4-FFF2-40B4-BE49-F238E27FC236}">
-                      <a16:creationId xmlns:a16="http://schemas.microsoft.com/office/drawing/2014/main" id="{A79CA9AE-C99E-8B74-D05F-347754743BEE}"/>
-                    </a:ext>
-                  </a:extLst>
-                </p14:cNvPr>
-                <p14:cNvContentPartPr/>
-                <p14:nvPr/>
-              </p14:nvContentPartPr>
-              <p14:xfrm>
-                <a:off x="7654104" y="3478176"/>
-                <a:ext cx="150480" cy="226080"/>
-              </p14:xfrm>
-            </p:contentPart>
-          </mc:Choice>
-          <mc:Fallback xmlns="">
-            <p:pic>
-              <p:nvPicPr>
-                <p:cNvPr id="59" name="Ink 58">
-                  <a:extLst>
-                    <a:ext uri="{FF2B5EF4-FFF2-40B4-BE49-F238E27FC236}">
-                      <a16:creationId xmlns:a16="http://schemas.microsoft.com/office/drawing/2014/main" id="{A79CA9AE-C99E-8B74-D05F-347754743BEE}"/>
-                    </a:ext>
-                  </a:extLst>
-                </p:cNvPr>
-                <p:cNvPicPr/>
-                <p:nvPr/>
-              </p:nvPicPr>
-              <p:blipFill>
-                <a:blip r:embed="rId16"/>
-                <a:stretch>
-                  <a:fillRect/>
-                </a:stretch>
-              </p:blipFill>
-              <p:spPr>
-                <a:xfrm>
-                  <a:off x="7618104" y="3442536"/>
-                  <a:ext cx="222120" cy="297720"/>
-                </a:xfrm>
-                <a:prstGeom prst="rect">
-                  <a:avLst/>
-                </a:prstGeom>
-              </p:spPr>
-            </p:pic>
-          </mc:Fallback>
-        </mc:AlternateContent>
-        <mc:AlternateContent xmlns:mc="http://schemas.openxmlformats.org/markup-compatibility/2006" xmlns:p14="http://schemas.microsoft.com/office/powerpoint/2010/main">
-          <mc:Choice Requires="p14">
-            <p:contentPart p14:bwMode="auto" r:id="rId17">
-              <p14:nvContentPartPr>
-                <p14:cNvPr id="60" name="Ink 59">
-                  <a:extLst>
-                    <a:ext uri="{FF2B5EF4-FFF2-40B4-BE49-F238E27FC236}">
-                      <a16:creationId xmlns:a16="http://schemas.microsoft.com/office/drawing/2014/main" id="{DBD0BAE2-27F1-224C-A9CC-B741128419C0}"/>
-                    </a:ext>
-                  </a:extLst>
-                </p14:cNvPr>
-                <p14:cNvContentPartPr/>
-                <p14:nvPr/>
-              </p14:nvContentPartPr>
-              <p14:xfrm>
-                <a:off x="7902864" y="3502296"/>
-                <a:ext cx="152280" cy="243000"/>
-              </p14:xfrm>
-            </p:contentPart>
-          </mc:Choice>
-          <mc:Fallback xmlns="">
-            <p:pic>
-              <p:nvPicPr>
-                <p:cNvPr id="60" name="Ink 59">
-                  <a:extLst>
-                    <a:ext uri="{FF2B5EF4-FFF2-40B4-BE49-F238E27FC236}">
-                      <a16:creationId xmlns:a16="http://schemas.microsoft.com/office/drawing/2014/main" id="{DBD0BAE2-27F1-224C-A9CC-B741128419C0}"/>
-                    </a:ext>
-                  </a:extLst>
-                </p:cNvPr>
-                <p:cNvPicPr/>
-                <p:nvPr/>
-              </p:nvPicPr>
-              <p:blipFill>
-                <a:blip r:embed="rId18"/>
-                <a:stretch>
-                  <a:fillRect/>
-                </a:stretch>
-              </p:blipFill>
-              <p:spPr>
-                <a:xfrm>
-                  <a:off x="7867224" y="3466656"/>
-                  <a:ext cx="223920" cy="314640"/>
-                </a:xfrm>
-                <a:prstGeom prst="rect">
-                  <a:avLst/>
-                </a:prstGeom>
-              </p:spPr>
-            </p:pic>
-          </mc:Fallback>
-        </mc:AlternateContent>
-      </p:grpSp>
-      <p:grpSp>
-        <p:nvGrpSpPr>
-          <p:cNvPr id="73" name="Group 72">
-            <a:extLst>
-              <a:ext uri="{FF2B5EF4-FFF2-40B4-BE49-F238E27FC236}">
-                <a16:creationId xmlns:a16="http://schemas.microsoft.com/office/drawing/2014/main" id="{24177E22-1DD7-007A-C15D-3F48C40E8AEA}"/>
-              </a:ext>
-            </a:extLst>
-          </p:cNvPr>
-          <p:cNvGrpSpPr/>
-          <p:nvPr/>
-        </p:nvGrpSpPr>
-        <p:grpSpPr>
-          <a:xfrm>
-            <a:off x="5993424" y="4962816"/>
-            <a:ext cx="2496600" cy="671040"/>
-            <a:chOff x="5993424" y="4962816"/>
-            <a:chExt cx="2496600" cy="671040"/>
-          </a:xfrm>
-        </p:grpSpPr>
-        <mc:AlternateContent xmlns:mc="http://schemas.openxmlformats.org/markup-compatibility/2006" xmlns:p14="http://schemas.microsoft.com/office/powerpoint/2010/main">
-          <mc:Choice Requires="p14">
-            <p:contentPart p14:bwMode="auto" r:id="rId19">
-              <p14:nvContentPartPr>
-                <p14:cNvPr id="62" name="Ink 61">
-                  <a:extLst>
-                    <a:ext uri="{FF2B5EF4-FFF2-40B4-BE49-F238E27FC236}">
-                      <a16:creationId xmlns:a16="http://schemas.microsoft.com/office/drawing/2014/main" id="{6CC01A34-A70D-488A-399E-A9338D6603D3}"/>
-                    </a:ext>
-                  </a:extLst>
-                </p14:cNvPr>
-                <p14:cNvContentPartPr/>
-                <p14:nvPr/>
-              </p14:nvContentPartPr>
-              <p14:xfrm>
-                <a:off x="6506784" y="5110416"/>
-                <a:ext cx="716040" cy="99720"/>
-              </p14:xfrm>
-            </p:contentPart>
-          </mc:Choice>
-          <mc:Fallback xmlns="">
-            <p:pic>
-              <p:nvPicPr>
-                <p:cNvPr id="62" name="Ink 61">
-                  <a:extLst>
-                    <a:ext uri="{FF2B5EF4-FFF2-40B4-BE49-F238E27FC236}">
-                      <a16:creationId xmlns:a16="http://schemas.microsoft.com/office/drawing/2014/main" id="{6CC01A34-A70D-488A-399E-A9338D6603D3}"/>
-                    </a:ext>
-                  </a:extLst>
-                </p:cNvPr>
-                <p:cNvPicPr/>
-                <p:nvPr/>
-              </p:nvPicPr>
-              <p:blipFill>
-                <a:blip r:embed="rId20"/>
-                <a:stretch>
-                  <a:fillRect/>
-                </a:stretch>
-              </p:blipFill>
-              <p:spPr>
-                <a:xfrm>
-                  <a:off x="6471144" y="5074416"/>
-                  <a:ext cx="787680" cy="171360"/>
-                </a:xfrm>
-                <a:prstGeom prst="rect">
-                  <a:avLst/>
-                </a:prstGeom>
-              </p:spPr>
-            </p:pic>
-          </mc:Fallback>
-        </mc:AlternateContent>
-        <mc:AlternateContent xmlns:mc="http://schemas.openxmlformats.org/markup-compatibility/2006" xmlns:p14="http://schemas.microsoft.com/office/powerpoint/2010/main">
-          <mc:Choice Requires="p14">
-            <p:contentPart p14:bwMode="auto" r:id="rId21">
-              <p14:nvContentPartPr>
-                <p14:cNvPr id="63" name="Ink 62">
-                  <a:extLst>
-                    <a:ext uri="{FF2B5EF4-FFF2-40B4-BE49-F238E27FC236}">
-                      <a16:creationId xmlns:a16="http://schemas.microsoft.com/office/drawing/2014/main" id="{640F6000-F833-42BB-2E60-111D74F0F56C}"/>
-                    </a:ext>
-                  </a:extLst>
-                </p14:cNvPr>
-                <p14:cNvContentPartPr/>
-                <p14:nvPr/>
-              </p14:nvContentPartPr>
-              <p14:xfrm>
-                <a:off x="7090344" y="5048136"/>
-                <a:ext cx="164520" cy="152280"/>
-              </p14:xfrm>
-            </p:contentPart>
-          </mc:Choice>
-          <mc:Fallback xmlns="">
-            <p:pic>
-              <p:nvPicPr>
-                <p:cNvPr id="63" name="Ink 62">
-                  <a:extLst>
-                    <a:ext uri="{FF2B5EF4-FFF2-40B4-BE49-F238E27FC236}">
-                      <a16:creationId xmlns:a16="http://schemas.microsoft.com/office/drawing/2014/main" id="{640F6000-F833-42BB-2E60-111D74F0F56C}"/>
-                    </a:ext>
-                  </a:extLst>
-                </p:cNvPr>
-                <p:cNvPicPr/>
-                <p:nvPr/>
-              </p:nvPicPr>
-              <p:blipFill>
-                <a:blip r:embed="rId22"/>
-                <a:stretch>
-                  <a:fillRect/>
-                </a:stretch>
-              </p:blipFill>
-              <p:spPr>
-                <a:xfrm>
-                  <a:off x="7054704" y="5012136"/>
-                  <a:ext cx="236160" cy="223920"/>
-                </a:xfrm>
-                <a:prstGeom prst="rect">
-                  <a:avLst/>
-                </a:prstGeom>
-              </p:spPr>
-            </p:pic>
-          </mc:Fallback>
-        </mc:AlternateContent>
-        <mc:AlternateContent xmlns:mc="http://schemas.openxmlformats.org/markup-compatibility/2006" xmlns:p14="http://schemas.microsoft.com/office/powerpoint/2010/main">
-          <mc:Choice Requires="p14">
-            <p:contentPart p14:bwMode="auto" r:id="rId23">
-              <p14:nvContentPartPr>
-                <p14:cNvPr id="64" name="Ink 63">
-                  <a:extLst>
-                    <a:ext uri="{FF2B5EF4-FFF2-40B4-BE49-F238E27FC236}">
-                      <a16:creationId xmlns:a16="http://schemas.microsoft.com/office/drawing/2014/main" id="{D540DFD4-099B-14B2-F3DF-6DB86D6F5DD6}"/>
-                    </a:ext>
-                  </a:extLst>
-                </p14:cNvPr>
-                <p14:cNvContentPartPr/>
-                <p14:nvPr/>
-              </p14:nvContentPartPr>
-              <p14:xfrm>
-                <a:off x="7515504" y="4962816"/>
-                <a:ext cx="159840" cy="217440"/>
-              </p14:xfrm>
-            </p:contentPart>
-          </mc:Choice>
-          <mc:Fallback xmlns="">
-            <p:pic>
-              <p:nvPicPr>
-                <p:cNvPr id="64" name="Ink 63">
-                  <a:extLst>
-                    <a:ext uri="{FF2B5EF4-FFF2-40B4-BE49-F238E27FC236}">
-                      <a16:creationId xmlns:a16="http://schemas.microsoft.com/office/drawing/2014/main" id="{D540DFD4-099B-14B2-F3DF-6DB86D6F5DD6}"/>
-                    </a:ext>
-                  </a:extLst>
-                </p:cNvPr>
-                <p:cNvPicPr/>
-                <p:nvPr/>
-              </p:nvPicPr>
-              <p:blipFill>
-                <a:blip r:embed="rId24"/>
-                <a:stretch>
-                  <a:fillRect/>
-                </a:stretch>
-              </p:blipFill>
-              <p:spPr>
-                <a:xfrm>
-                  <a:off x="7479504" y="4926816"/>
-                  <a:ext cx="231480" cy="289080"/>
-                </a:xfrm>
-                <a:prstGeom prst="rect">
-                  <a:avLst/>
-                </a:prstGeom>
-              </p:spPr>
-            </p:pic>
-          </mc:Fallback>
-        </mc:AlternateContent>
-        <mc:AlternateContent xmlns:mc="http://schemas.openxmlformats.org/markup-compatibility/2006" xmlns:p14="http://schemas.microsoft.com/office/powerpoint/2010/main">
-          <mc:Choice Requires="p14">
-            <p:contentPart p14:bwMode="auto" r:id="rId25">
-              <p14:nvContentPartPr>
-                <p14:cNvPr id="65" name="Ink 64">
-                  <a:extLst>
-                    <a:ext uri="{FF2B5EF4-FFF2-40B4-BE49-F238E27FC236}">
-                      <a16:creationId xmlns:a16="http://schemas.microsoft.com/office/drawing/2014/main" id="{1A33F3A9-ADED-5285-9006-A0913A4B9CB7}"/>
-                    </a:ext>
-                  </a:extLst>
-                </p14:cNvPr>
-                <p14:cNvContentPartPr/>
-                <p14:nvPr/>
-              </p14:nvContentPartPr>
-              <p14:xfrm>
-                <a:off x="7683624" y="5012856"/>
-                <a:ext cx="318600" cy="198720"/>
-              </p14:xfrm>
-            </p:contentPart>
-          </mc:Choice>
-          <mc:Fallback xmlns="">
-            <p:pic>
-              <p:nvPicPr>
-                <p:cNvPr id="65" name="Ink 64">
-                  <a:extLst>
-                    <a:ext uri="{FF2B5EF4-FFF2-40B4-BE49-F238E27FC236}">
-                      <a16:creationId xmlns:a16="http://schemas.microsoft.com/office/drawing/2014/main" id="{1A33F3A9-ADED-5285-9006-A0913A4B9CB7}"/>
-                    </a:ext>
-                  </a:extLst>
-                </p:cNvPr>
-                <p:cNvPicPr/>
-                <p:nvPr/>
-              </p:nvPicPr>
-              <p:blipFill>
-                <a:blip r:embed="rId26"/>
-                <a:stretch>
-                  <a:fillRect/>
-                </a:stretch>
-              </p:blipFill>
-              <p:spPr>
-                <a:xfrm>
-                  <a:off x="7647624" y="4976856"/>
-                  <a:ext cx="390240" cy="270360"/>
-                </a:xfrm>
-                <a:prstGeom prst="rect">
-                  <a:avLst/>
-                </a:prstGeom>
-              </p:spPr>
-            </p:pic>
-          </mc:Fallback>
-        </mc:AlternateContent>
-        <mc:AlternateContent xmlns:mc="http://schemas.openxmlformats.org/markup-compatibility/2006" xmlns:p14="http://schemas.microsoft.com/office/powerpoint/2010/main">
-          <mc:Choice Requires="p14">
-            <p:contentPart p14:bwMode="auto" r:id="rId27">
-              <p14:nvContentPartPr>
-                <p14:cNvPr id="67" name="Ink 66">
-                  <a:extLst>
-                    <a:ext uri="{FF2B5EF4-FFF2-40B4-BE49-F238E27FC236}">
-                      <a16:creationId xmlns:a16="http://schemas.microsoft.com/office/drawing/2014/main" id="{27120E8D-0C75-5D74-1797-38FD7B575A95}"/>
-                    </a:ext>
-                  </a:extLst>
-                </p14:cNvPr>
-                <p14:cNvContentPartPr/>
-                <p14:nvPr/>
-              </p14:nvContentPartPr>
-              <p14:xfrm>
-                <a:off x="5993424" y="5339736"/>
-                <a:ext cx="1231560" cy="271800"/>
-              </p14:xfrm>
-            </p:contentPart>
-          </mc:Choice>
-          <mc:Fallback xmlns="">
-            <p:pic>
-              <p:nvPicPr>
-                <p:cNvPr id="67" name="Ink 66">
-                  <a:extLst>
-                    <a:ext uri="{FF2B5EF4-FFF2-40B4-BE49-F238E27FC236}">
-                      <a16:creationId xmlns:a16="http://schemas.microsoft.com/office/drawing/2014/main" id="{27120E8D-0C75-5D74-1797-38FD7B575A95}"/>
-                    </a:ext>
-                  </a:extLst>
-                </p:cNvPr>
-                <p:cNvPicPr/>
-                <p:nvPr/>
-              </p:nvPicPr>
-              <p:blipFill>
-                <a:blip r:embed="rId28"/>
-                <a:stretch>
-                  <a:fillRect/>
-                </a:stretch>
-              </p:blipFill>
-              <p:spPr>
-                <a:xfrm>
-                  <a:off x="5957784" y="5303736"/>
-                  <a:ext cx="1303200" cy="343440"/>
-                </a:xfrm>
-                <a:prstGeom prst="rect">
-                  <a:avLst/>
-                </a:prstGeom>
-              </p:spPr>
-            </p:pic>
-          </mc:Fallback>
-        </mc:AlternateContent>
-        <mc:AlternateContent xmlns:mc="http://schemas.openxmlformats.org/markup-compatibility/2006" xmlns:p14="http://schemas.microsoft.com/office/powerpoint/2010/main">
-          <mc:Choice Requires="p14">
-            <p:contentPart p14:bwMode="auto" r:id="rId29">
-              <p14:nvContentPartPr>
-                <p14:cNvPr id="68" name="Ink 67">
-                  <a:extLst>
-                    <a:ext uri="{FF2B5EF4-FFF2-40B4-BE49-F238E27FC236}">
-                      <a16:creationId xmlns:a16="http://schemas.microsoft.com/office/drawing/2014/main" id="{8E4B3166-4F1D-6BD7-B072-959E2172E5A1}"/>
-                    </a:ext>
-                  </a:extLst>
-                </p14:cNvPr>
-                <p14:cNvContentPartPr/>
-                <p14:nvPr/>
-              </p14:nvContentPartPr>
-              <p14:xfrm>
-                <a:off x="7212744" y="5482656"/>
-                <a:ext cx="158400" cy="151200"/>
-              </p14:xfrm>
-            </p:contentPart>
-          </mc:Choice>
-          <mc:Fallback xmlns="">
-            <p:pic>
-              <p:nvPicPr>
-                <p:cNvPr id="68" name="Ink 67">
-                  <a:extLst>
-                    <a:ext uri="{FF2B5EF4-FFF2-40B4-BE49-F238E27FC236}">
-                      <a16:creationId xmlns:a16="http://schemas.microsoft.com/office/drawing/2014/main" id="{8E4B3166-4F1D-6BD7-B072-959E2172E5A1}"/>
-                    </a:ext>
-                  </a:extLst>
-                </p:cNvPr>
-                <p:cNvPicPr/>
-                <p:nvPr/>
-              </p:nvPicPr>
-              <p:blipFill>
-                <a:blip r:embed="rId30"/>
-                <a:stretch>
-                  <a:fillRect/>
-                </a:stretch>
-              </p:blipFill>
-              <p:spPr>
-                <a:xfrm>
-                  <a:off x="7176744" y="5447016"/>
-                  <a:ext cx="230040" cy="222840"/>
-                </a:xfrm>
-                <a:prstGeom prst="rect">
-                  <a:avLst/>
-                </a:prstGeom>
-              </p:spPr>
-            </p:pic>
-          </mc:Fallback>
-        </mc:AlternateContent>
-        <mc:AlternateContent xmlns:mc="http://schemas.openxmlformats.org/markup-compatibility/2006" xmlns:p14="http://schemas.microsoft.com/office/powerpoint/2010/main">
-          <mc:Choice Requires="p14">
-            <p:contentPart p14:bwMode="auto" r:id="rId31">
-              <p14:nvContentPartPr>
-                <p14:cNvPr id="69" name="Ink 68">
-                  <a:extLst>
-                    <a:ext uri="{FF2B5EF4-FFF2-40B4-BE49-F238E27FC236}">
-                      <a16:creationId xmlns:a16="http://schemas.microsoft.com/office/drawing/2014/main" id="{411095B1-F76A-B11E-50F6-1C83B341DBDA}"/>
-                    </a:ext>
-                  </a:extLst>
-                </p14:cNvPr>
-                <p14:cNvContentPartPr/>
-                <p14:nvPr/>
-              </p14:nvContentPartPr>
-              <p14:xfrm>
-                <a:off x="7545744" y="5469696"/>
-                <a:ext cx="57600" cy="160920"/>
-              </p14:xfrm>
-            </p:contentPart>
-          </mc:Choice>
-          <mc:Fallback xmlns="">
-            <p:pic>
-              <p:nvPicPr>
-                <p:cNvPr id="69" name="Ink 68">
-                  <a:extLst>
-                    <a:ext uri="{FF2B5EF4-FFF2-40B4-BE49-F238E27FC236}">
-                      <a16:creationId xmlns:a16="http://schemas.microsoft.com/office/drawing/2014/main" id="{411095B1-F76A-B11E-50F6-1C83B341DBDA}"/>
-                    </a:ext>
-                  </a:extLst>
-                </p:cNvPr>
-                <p:cNvPicPr/>
-                <p:nvPr/>
-              </p:nvPicPr>
-              <p:blipFill>
-                <a:blip r:embed="rId32"/>
-                <a:stretch>
-                  <a:fillRect/>
-                </a:stretch>
-              </p:blipFill>
-              <p:spPr>
-                <a:xfrm>
-                  <a:off x="7509744" y="5434056"/>
-                  <a:ext cx="129240" cy="232560"/>
-                </a:xfrm>
-                <a:prstGeom prst="rect">
-                  <a:avLst/>
-                </a:prstGeom>
-              </p:spPr>
-            </p:pic>
-          </mc:Fallback>
-        </mc:AlternateContent>
-        <mc:AlternateContent xmlns:mc="http://schemas.openxmlformats.org/markup-compatibility/2006" xmlns:p14="http://schemas.microsoft.com/office/powerpoint/2010/main">
-          <mc:Choice Requires="p14">
-            <p:contentPart p14:bwMode="auto" r:id="rId33">
-              <p14:nvContentPartPr>
-                <p14:cNvPr id="70" name="Ink 69">
-                  <a:extLst>
-                    <a:ext uri="{FF2B5EF4-FFF2-40B4-BE49-F238E27FC236}">
-                      <a16:creationId xmlns:a16="http://schemas.microsoft.com/office/drawing/2014/main" id="{4818729B-6DF3-C826-A8BF-51B01FA22E6C}"/>
-                    </a:ext>
-                  </a:extLst>
-                </p14:cNvPr>
-                <p14:cNvContentPartPr/>
-                <p14:nvPr/>
-              </p14:nvContentPartPr>
-              <p14:xfrm>
-                <a:off x="7749504" y="5484816"/>
-                <a:ext cx="286200" cy="128160"/>
-              </p14:xfrm>
-            </p:contentPart>
-          </mc:Choice>
-          <mc:Fallback xmlns="">
-            <p:pic>
-              <p:nvPicPr>
-                <p:cNvPr id="70" name="Ink 69">
-                  <a:extLst>
-                    <a:ext uri="{FF2B5EF4-FFF2-40B4-BE49-F238E27FC236}">
-                      <a16:creationId xmlns:a16="http://schemas.microsoft.com/office/drawing/2014/main" id="{4818729B-6DF3-C826-A8BF-51B01FA22E6C}"/>
-                    </a:ext>
-                  </a:extLst>
-                </p:cNvPr>
-                <p:cNvPicPr/>
-                <p:nvPr/>
-              </p:nvPicPr>
-              <p:blipFill>
-                <a:blip r:embed="rId34"/>
-                <a:stretch>
-                  <a:fillRect/>
-                </a:stretch>
-              </p:blipFill>
-              <p:spPr>
-                <a:xfrm>
-                  <a:off x="7713504" y="5448816"/>
-                  <a:ext cx="357840" cy="199800"/>
-                </a:xfrm>
-                <a:prstGeom prst="rect">
-                  <a:avLst/>
-                </a:prstGeom>
-              </p:spPr>
-            </p:pic>
-          </mc:Fallback>
-        </mc:AlternateContent>
-        <mc:AlternateContent xmlns:mc="http://schemas.openxmlformats.org/markup-compatibility/2006" xmlns:p14="http://schemas.microsoft.com/office/powerpoint/2010/main">
-          <mc:Choice Requires="p14">
-            <p:contentPart p14:bwMode="auto" r:id="rId35">
-              <p14:nvContentPartPr>
-                <p14:cNvPr id="71" name="Ink 70">
-                  <a:extLst>
-                    <a:ext uri="{FF2B5EF4-FFF2-40B4-BE49-F238E27FC236}">
-                      <a16:creationId xmlns:a16="http://schemas.microsoft.com/office/drawing/2014/main" id="{ED71FF5E-87FD-F0C4-C60E-ED021C74B67D}"/>
-                    </a:ext>
-                  </a:extLst>
-                </p14:cNvPr>
-                <p14:cNvContentPartPr/>
-                <p14:nvPr/>
-              </p14:nvContentPartPr>
-              <p14:xfrm>
-                <a:off x="8156304" y="5434776"/>
-                <a:ext cx="172800" cy="173520"/>
-              </p14:xfrm>
-            </p:contentPart>
-          </mc:Choice>
-          <mc:Fallback xmlns="">
-            <p:pic>
-              <p:nvPicPr>
-                <p:cNvPr id="71" name="Ink 70">
-                  <a:extLst>
-                    <a:ext uri="{FF2B5EF4-FFF2-40B4-BE49-F238E27FC236}">
-                      <a16:creationId xmlns:a16="http://schemas.microsoft.com/office/drawing/2014/main" id="{ED71FF5E-87FD-F0C4-C60E-ED021C74B67D}"/>
-                    </a:ext>
-                  </a:extLst>
-                </p:cNvPr>
-                <p:cNvPicPr/>
-                <p:nvPr/>
-              </p:nvPicPr>
-              <p:blipFill>
-                <a:blip r:embed="rId36"/>
-                <a:stretch>
-                  <a:fillRect/>
-                </a:stretch>
-              </p:blipFill>
-              <p:spPr>
-                <a:xfrm>
-                  <a:off x="8120304" y="5398776"/>
-                  <a:ext cx="244440" cy="245160"/>
-                </a:xfrm>
-                <a:prstGeom prst="rect">
-                  <a:avLst/>
-                </a:prstGeom>
-              </p:spPr>
-            </p:pic>
-          </mc:Fallback>
-        </mc:AlternateContent>
-        <mc:AlternateContent xmlns:mc="http://schemas.openxmlformats.org/markup-compatibility/2006" xmlns:p14="http://schemas.microsoft.com/office/powerpoint/2010/main">
-          <mc:Choice Requires="p14">
-            <p:contentPart p14:bwMode="auto" r:id="rId37">
-              <p14:nvContentPartPr>
-                <p14:cNvPr id="72" name="Ink 71">
-                  <a:extLst>
-                    <a:ext uri="{FF2B5EF4-FFF2-40B4-BE49-F238E27FC236}">
-                      <a16:creationId xmlns:a16="http://schemas.microsoft.com/office/drawing/2014/main" id="{07771510-0902-B7AD-C414-2B5D58314603}"/>
-                    </a:ext>
-                  </a:extLst>
-                </p14:cNvPr>
-                <p14:cNvContentPartPr/>
-                <p14:nvPr/>
-              </p14:nvContentPartPr>
-              <p14:xfrm>
-                <a:off x="8316864" y="5362776"/>
-                <a:ext cx="173160" cy="59760"/>
-              </p14:xfrm>
-            </p:contentPart>
-          </mc:Choice>
-          <mc:Fallback xmlns="">
-            <p:pic>
-              <p:nvPicPr>
-                <p:cNvPr id="72" name="Ink 71">
-                  <a:extLst>
-                    <a:ext uri="{FF2B5EF4-FFF2-40B4-BE49-F238E27FC236}">
-                      <a16:creationId xmlns:a16="http://schemas.microsoft.com/office/drawing/2014/main" id="{07771510-0902-B7AD-C414-2B5D58314603}"/>
-                    </a:ext>
-                  </a:extLst>
-                </p:cNvPr>
-                <p:cNvPicPr/>
-                <p:nvPr/>
-              </p:nvPicPr>
-              <p:blipFill>
-                <a:blip r:embed="rId38"/>
-                <a:stretch>
-                  <a:fillRect/>
-                </a:stretch>
-              </p:blipFill>
-              <p:spPr>
-                <a:xfrm>
-                  <a:off x="8280864" y="5326776"/>
-                  <a:ext cx="244800" cy="131400"/>
-                </a:xfrm>
-                <a:prstGeom prst="rect">
-                  <a:avLst/>
-                </a:prstGeom>
-              </p:spPr>
-            </p:pic>
-          </mc:Fallback>
-        </mc:AlternateContent>
-      </p:grpSp>
-    </p:spTree>
-    <p:extLst>
-      <p:ext uri="{BB962C8B-B14F-4D97-AF65-F5344CB8AC3E}">
-        <p14:creationId xmlns:p14="http://schemas.microsoft.com/office/powerpoint/2010/main" val="2886141958"/>
-      </p:ext>
-    </p:extLst>
-  </p:cSld>
-  <p:clrMapOvr>
-    <a:masterClrMapping/>
-  </p:clrMapOvr>
-</p:sld>
-</file>
-
 <file path=ppt/theme/theme1.xml><?xml version="1.0" encoding="utf-8"?>
 <a:theme xmlns:a="http://schemas.openxmlformats.org/drawingml/2006/main" name="Office Theme">
   <a:themeElements>
